--- a/B.Sc. LRT/Grundlagen der Elektrotechnik/images/ETech-Images.pptx
+++ b/B.Sc. LRT/Grundlagen der Elektrotechnik/images/ETech-Images.pptx
@@ -5,11 +5,14 @@
     <p:sldMasterId id="2147483660" r:id="rId1"/>
   </p:sldMasterIdLst>
   <p:notesMasterIdLst>
-    <p:notesMasterId r:id="rId4"/>
+    <p:notesMasterId r:id="rId7"/>
   </p:notesMasterIdLst>
   <p:sldIdLst>
     <p:sldId id="256" r:id="rId2"/>
     <p:sldId id="257" r:id="rId3"/>
+    <p:sldId id="258" r:id="rId4"/>
+    <p:sldId id="259" r:id="rId5"/>
+    <p:sldId id="260" r:id="rId6"/>
   </p:sldIdLst>
   <p:sldSz cx="3600450" cy="3600450"/>
   <p:notesSz cx="6858000" cy="9144000"/>
@@ -198,7 +201,7 @@
           <a:p>
             <a:fld id="{0C596C2D-C72C-406E-B79E-9BAC142DD20E}" type="datetimeFigureOut">
               <a:rPr lang="de-DE" smtClean="0"/>
-              <a:t>28.01.2026</a:t>
+              <a:t>29.01.2026</a:t>
             </a:fld>
             <a:endParaRPr lang="de-DE"/>
           </a:p>
@@ -596,7 +599,7 @@
           <a:p>
             <a:fld id="{6EAE28AA-0912-4DA0-8B30-7F3CA3FE6671}" type="datetimeFigureOut">
               <a:rPr lang="de-DE" smtClean="0"/>
-              <a:t>28.01.2026</a:t>
+              <a:t>29.01.2026</a:t>
             </a:fld>
             <a:endParaRPr lang="de-DE"/>
           </a:p>
@@ -766,7 +769,7 @@
           <a:p>
             <a:fld id="{6EAE28AA-0912-4DA0-8B30-7F3CA3FE6671}" type="datetimeFigureOut">
               <a:rPr lang="de-DE" smtClean="0"/>
-              <a:t>28.01.2026</a:t>
+              <a:t>29.01.2026</a:t>
             </a:fld>
             <a:endParaRPr lang="de-DE"/>
           </a:p>
@@ -946,7 +949,7 @@
           <a:p>
             <a:fld id="{6EAE28AA-0912-4DA0-8B30-7F3CA3FE6671}" type="datetimeFigureOut">
               <a:rPr lang="de-DE" smtClean="0"/>
-              <a:t>28.01.2026</a:t>
+              <a:t>29.01.2026</a:t>
             </a:fld>
             <a:endParaRPr lang="de-DE"/>
           </a:p>
@@ -1116,7 +1119,7 @@
           <a:p>
             <a:fld id="{6EAE28AA-0912-4DA0-8B30-7F3CA3FE6671}" type="datetimeFigureOut">
               <a:rPr lang="de-DE" smtClean="0"/>
-              <a:t>28.01.2026</a:t>
+              <a:t>29.01.2026</a:t>
             </a:fld>
             <a:endParaRPr lang="de-DE"/>
           </a:p>
@@ -1362,7 +1365,7 @@
           <a:p>
             <a:fld id="{6EAE28AA-0912-4DA0-8B30-7F3CA3FE6671}" type="datetimeFigureOut">
               <a:rPr lang="de-DE" smtClean="0"/>
-              <a:t>28.01.2026</a:t>
+              <a:t>29.01.2026</a:t>
             </a:fld>
             <a:endParaRPr lang="de-DE"/>
           </a:p>
@@ -1594,7 +1597,7 @@
           <a:p>
             <a:fld id="{6EAE28AA-0912-4DA0-8B30-7F3CA3FE6671}" type="datetimeFigureOut">
               <a:rPr lang="de-DE" smtClean="0"/>
-              <a:t>28.01.2026</a:t>
+              <a:t>29.01.2026</a:t>
             </a:fld>
             <a:endParaRPr lang="de-DE"/>
           </a:p>
@@ -1961,7 +1964,7 @@
           <a:p>
             <a:fld id="{6EAE28AA-0912-4DA0-8B30-7F3CA3FE6671}" type="datetimeFigureOut">
               <a:rPr lang="de-DE" smtClean="0"/>
-              <a:t>28.01.2026</a:t>
+              <a:t>29.01.2026</a:t>
             </a:fld>
             <a:endParaRPr lang="de-DE"/>
           </a:p>
@@ -2079,7 +2082,7 @@
           <a:p>
             <a:fld id="{6EAE28AA-0912-4DA0-8B30-7F3CA3FE6671}" type="datetimeFigureOut">
               <a:rPr lang="de-DE" smtClean="0"/>
-              <a:t>28.01.2026</a:t>
+              <a:t>29.01.2026</a:t>
             </a:fld>
             <a:endParaRPr lang="de-DE"/>
           </a:p>
@@ -2174,7 +2177,7 @@
           <a:p>
             <a:fld id="{6EAE28AA-0912-4DA0-8B30-7F3CA3FE6671}" type="datetimeFigureOut">
               <a:rPr lang="de-DE" smtClean="0"/>
-              <a:t>28.01.2026</a:t>
+              <a:t>29.01.2026</a:t>
             </a:fld>
             <a:endParaRPr lang="de-DE"/>
           </a:p>
@@ -2451,7 +2454,7 @@
           <a:p>
             <a:fld id="{6EAE28AA-0912-4DA0-8B30-7F3CA3FE6671}" type="datetimeFigureOut">
               <a:rPr lang="de-DE" smtClean="0"/>
-              <a:t>28.01.2026</a:t>
+              <a:t>29.01.2026</a:t>
             </a:fld>
             <a:endParaRPr lang="de-DE"/>
           </a:p>
@@ -2708,7 +2711,7 @@
           <a:p>
             <a:fld id="{6EAE28AA-0912-4DA0-8B30-7F3CA3FE6671}" type="datetimeFigureOut">
               <a:rPr lang="de-DE" smtClean="0"/>
-              <a:t>28.01.2026</a:t>
+              <a:t>29.01.2026</a:t>
             </a:fld>
             <a:endParaRPr lang="de-DE"/>
           </a:p>
@@ -2921,7 +2924,7 @@
           <a:p>
             <a:fld id="{6EAE28AA-0912-4DA0-8B30-7F3CA3FE6671}" type="datetimeFigureOut">
               <a:rPr lang="de-DE" smtClean="0"/>
-              <a:t>28.01.2026</a:t>
+              <a:t>29.01.2026</a:t>
             </a:fld>
             <a:endParaRPr lang="de-DE"/>
           </a:p>
@@ -4832,10 +4835,7 @@
           </a:prstGeom>
           <a:ln cap="rnd">
             <a:solidFill>
-              <a:schemeClr val="tx2">
-                <a:lumMod val="75000"/>
-                <a:lumOff val="25000"/>
-              </a:schemeClr>
+              <a:srgbClr val="086FBD"/>
             </a:solidFill>
             <a:round/>
             <a:tailEnd type="triangle"/>
@@ -4887,10 +4887,7 @@
             <a:r>
               <a:rPr lang="de-DE" sz="1100" i="1" dirty="0">
                 <a:solidFill>
-                  <a:schemeClr val="tx2">
-                    <a:lumMod val="75000"/>
-                    <a:lumOff val="25000"/>
-                  </a:schemeClr>
+                  <a:srgbClr val="086FBD"/>
                 </a:solidFill>
                 <a:latin typeface="CMU Serif" panose="02000603000000000000" pitchFamily="2" charset="0"/>
                 <a:ea typeface="CMU Serif" panose="02000603000000000000" pitchFamily="2" charset="0"/>
@@ -4901,10 +4898,7 @@
             <a:r>
               <a:rPr lang="de-DE" sz="1100" baseline="-25000" dirty="0">
                 <a:solidFill>
-                  <a:schemeClr val="tx2">
-                    <a:lumMod val="75000"/>
-                    <a:lumOff val="25000"/>
-                  </a:schemeClr>
+                  <a:srgbClr val="086FBD"/>
                 </a:solidFill>
                 <a:latin typeface="CMU Serif" panose="02000603000000000000" pitchFamily="2" charset="0"/>
                 <a:ea typeface="CMU Serif" panose="02000603000000000000" pitchFamily="2" charset="0"/>
@@ -4939,10 +4933,7 @@
           </a:prstGeom>
           <a:ln cap="rnd">
             <a:solidFill>
-              <a:schemeClr val="tx2">
-                <a:lumMod val="75000"/>
-                <a:lumOff val="25000"/>
-              </a:schemeClr>
+              <a:srgbClr val="086FBD"/>
             </a:solidFill>
             <a:round/>
             <a:tailEnd type="triangle"/>
@@ -4994,10 +4985,7 @@
             <a:r>
               <a:rPr lang="de-DE" sz="1100" i="1" dirty="0">
                 <a:solidFill>
-                  <a:schemeClr val="tx2">
-                    <a:lumMod val="75000"/>
-                    <a:lumOff val="25000"/>
-                  </a:schemeClr>
+                  <a:srgbClr val="086FBD"/>
                 </a:solidFill>
                 <a:latin typeface="CMU Serif" panose="02000603000000000000" pitchFamily="2" charset="0"/>
                 <a:ea typeface="CMU Serif" panose="02000603000000000000" pitchFamily="2" charset="0"/>
@@ -5008,10 +4996,7 @@
             <a:r>
               <a:rPr lang="de-DE" sz="1100" baseline="-25000" dirty="0">
                 <a:solidFill>
-                  <a:schemeClr val="tx2">
-                    <a:lumMod val="75000"/>
-                    <a:lumOff val="25000"/>
-                  </a:schemeClr>
+                  <a:srgbClr val="086FBD"/>
                 </a:solidFill>
                 <a:latin typeface="CMU Serif" panose="02000603000000000000" pitchFamily="2" charset="0"/>
                 <a:ea typeface="CMU Serif" panose="02000603000000000000" pitchFamily="2" charset="0"/>
@@ -5053,10 +5038,7 @@
             <a:r>
               <a:rPr lang="de-DE" sz="1100" i="1" dirty="0">
                 <a:solidFill>
-                  <a:schemeClr val="tx2">
-                    <a:lumMod val="75000"/>
-                    <a:lumOff val="25000"/>
-                  </a:schemeClr>
+                  <a:srgbClr val="086FBD"/>
                 </a:solidFill>
                 <a:latin typeface="CMU Serif" panose="02000603000000000000" pitchFamily="2" charset="0"/>
                 <a:ea typeface="CMU Serif" panose="02000603000000000000" pitchFamily="2" charset="0"/>
@@ -5067,10 +5049,7 @@
             <a:r>
               <a:rPr lang="de-DE" sz="1100" baseline="-25000" dirty="0">
                 <a:solidFill>
-                  <a:schemeClr val="tx2">
-                    <a:lumMod val="75000"/>
-                    <a:lumOff val="25000"/>
-                  </a:schemeClr>
+                  <a:srgbClr val="086FBD"/>
                 </a:solidFill>
                 <a:latin typeface="CMU Serif" panose="02000603000000000000" pitchFamily="2" charset="0"/>
                 <a:ea typeface="CMU Serif" panose="02000603000000000000" pitchFamily="2" charset="0"/>
@@ -5105,10 +5084,7 @@
           </a:prstGeom>
           <a:ln cap="rnd">
             <a:solidFill>
-              <a:schemeClr val="tx2">
-                <a:lumMod val="75000"/>
-                <a:lumOff val="25000"/>
-              </a:schemeClr>
+              <a:srgbClr val="086FBD"/>
             </a:solidFill>
             <a:round/>
             <a:tailEnd type="triangle"/>
@@ -5153,10 +5129,7 @@
           </a:prstGeom>
           <a:ln cap="rnd">
             <a:solidFill>
-              <a:schemeClr val="tx2">
-                <a:lumMod val="75000"/>
-                <a:lumOff val="25000"/>
-              </a:schemeClr>
+              <a:srgbClr val="086FBD"/>
             </a:solidFill>
             <a:round/>
             <a:tailEnd type="triangle"/>
@@ -5208,10 +5181,7 @@
             <a:r>
               <a:rPr lang="de-DE" sz="1100" i="1" dirty="0">
                 <a:solidFill>
-                  <a:schemeClr val="tx2">
-                    <a:lumMod val="75000"/>
-                    <a:lumOff val="25000"/>
-                  </a:schemeClr>
+                  <a:srgbClr val="086FBD"/>
                 </a:solidFill>
                 <a:latin typeface="CMU Serif" panose="02000603000000000000" pitchFamily="2" charset="0"/>
                 <a:ea typeface="CMU Serif" panose="02000603000000000000" pitchFamily="2" charset="0"/>
@@ -5222,10 +5192,7 @@
             <a:r>
               <a:rPr lang="de-DE" sz="1100" baseline="-25000" dirty="0">
                 <a:solidFill>
-                  <a:schemeClr val="tx2">
-                    <a:lumMod val="75000"/>
-                    <a:lumOff val="25000"/>
-                  </a:schemeClr>
+                  <a:srgbClr val="086FBD"/>
                 </a:solidFill>
                 <a:latin typeface="CMU Serif" panose="02000603000000000000" pitchFamily="2" charset="0"/>
                 <a:ea typeface="CMU Serif" panose="02000603000000000000" pitchFamily="2" charset="0"/>
@@ -5240,6 +5207,3414 @@
     <p:extLst>
       <p:ext uri="{BB962C8B-B14F-4D97-AF65-F5344CB8AC3E}">
         <p14:creationId xmlns:p14="http://schemas.microsoft.com/office/powerpoint/2010/main" val="3333156678"/>
+      </p:ext>
+    </p:extLst>
+  </p:cSld>
+  <p:clrMapOvr>
+    <a:masterClrMapping/>
+  </p:clrMapOvr>
+</p:sld>
+</file>
+
+<file path=ppt/slides/slide3.xml><?xml version="1.0" encoding="utf-8"?>
+<p:sld xmlns:a="http://schemas.openxmlformats.org/drawingml/2006/main" xmlns:r="http://schemas.openxmlformats.org/officeDocument/2006/relationships" xmlns:p="http://schemas.openxmlformats.org/presentationml/2006/main">
+  <p:cSld>
+    <p:spTree>
+      <p:nvGrpSpPr>
+        <p:cNvPr id="1" name=""/>
+        <p:cNvGrpSpPr/>
+        <p:nvPr/>
+      </p:nvGrpSpPr>
+      <p:grpSpPr>
+        <a:xfrm>
+          <a:off x="0" y="0"/>
+          <a:ext cx="0" cy="0"/>
+          <a:chOff x="0" y="0"/>
+          <a:chExt cx="0" cy="0"/>
+        </a:xfrm>
+      </p:grpSpPr>
+      <p:sp>
+        <p:nvSpPr>
+          <p:cNvPr id="4" name="Rechteck 3">
+            <a:extLst>
+              <a:ext uri="{FF2B5EF4-FFF2-40B4-BE49-F238E27FC236}">
+                <a16:creationId xmlns:a16="http://schemas.microsoft.com/office/drawing/2014/main" id="{3E057EA1-E5CF-3541-265D-084B3BC6B0C2}"/>
+              </a:ext>
+            </a:extLst>
+          </p:cNvPr>
+          <p:cNvSpPr/>
+          <p:nvPr/>
+        </p:nvSpPr>
+        <p:spPr>
+          <a:xfrm>
+            <a:off x="980162" y="867427"/>
+            <a:ext cx="895612" cy="1803748"/>
+          </a:xfrm>
+          <a:prstGeom prst="rect">
+            <a:avLst/>
+          </a:prstGeom>
+          <a:noFill/>
+          <a:ln w="15875" cap="rnd">
+            <a:solidFill>
+              <a:schemeClr val="tx1"/>
+            </a:solidFill>
+            <a:round/>
+          </a:ln>
+        </p:spPr>
+        <p:style>
+          <a:lnRef idx="2">
+            <a:schemeClr val="accent1">
+              <a:shade val="15000"/>
+            </a:schemeClr>
+          </a:lnRef>
+          <a:fillRef idx="1">
+            <a:schemeClr val="accent1"/>
+          </a:fillRef>
+          <a:effectRef idx="0">
+            <a:schemeClr val="accent1"/>
+          </a:effectRef>
+          <a:fontRef idx="minor">
+            <a:schemeClr val="lt1"/>
+          </a:fontRef>
+        </p:style>
+        <p:txBody>
+          <a:bodyPr rtlCol="0" anchor="ctr"/>
+          <a:lstStyle/>
+          <a:p>
+            <a:pPr algn="ctr"/>
+            <a:endParaRPr lang="de-DE"/>
+          </a:p>
+        </p:txBody>
+      </p:sp>
+      <p:sp>
+        <p:nvSpPr>
+          <p:cNvPr id="5" name="Rechteck 4">
+            <a:extLst>
+              <a:ext uri="{FF2B5EF4-FFF2-40B4-BE49-F238E27FC236}">
+                <a16:creationId xmlns:a16="http://schemas.microsoft.com/office/drawing/2014/main" id="{178928DA-7BDC-B1B9-54F8-86CB5DFFD5DC}"/>
+              </a:ext>
+            </a:extLst>
+          </p:cNvPr>
+          <p:cNvSpPr/>
+          <p:nvPr/>
+        </p:nvSpPr>
+        <p:spPr>
+          <a:xfrm>
+            <a:off x="1875774" y="1778695"/>
+            <a:ext cx="735903" cy="892479"/>
+          </a:xfrm>
+          <a:prstGeom prst="rect">
+            <a:avLst/>
+          </a:prstGeom>
+          <a:noFill/>
+          <a:ln w="15875" cap="rnd">
+            <a:solidFill>
+              <a:schemeClr val="tx1"/>
+            </a:solidFill>
+            <a:round/>
+          </a:ln>
+        </p:spPr>
+        <p:style>
+          <a:lnRef idx="2">
+            <a:schemeClr val="accent1">
+              <a:shade val="15000"/>
+            </a:schemeClr>
+          </a:lnRef>
+          <a:fillRef idx="1">
+            <a:schemeClr val="accent1"/>
+          </a:fillRef>
+          <a:effectRef idx="0">
+            <a:schemeClr val="accent1"/>
+          </a:effectRef>
+          <a:fontRef idx="minor">
+            <a:schemeClr val="lt1"/>
+          </a:fontRef>
+        </p:style>
+        <p:txBody>
+          <a:bodyPr rtlCol="0" anchor="ctr"/>
+          <a:lstStyle/>
+          <a:p>
+            <a:pPr algn="ctr"/>
+            <a:endParaRPr lang="de-DE"/>
+          </a:p>
+        </p:txBody>
+      </p:sp>
+      <p:sp>
+        <p:nvSpPr>
+          <p:cNvPr id="6" name="Ellipse 5">
+            <a:extLst>
+              <a:ext uri="{FF2B5EF4-FFF2-40B4-BE49-F238E27FC236}">
+                <a16:creationId xmlns:a16="http://schemas.microsoft.com/office/drawing/2014/main" id="{D686A7B4-1A15-6A66-B176-584F0D18DE91}"/>
+              </a:ext>
+            </a:extLst>
+          </p:cNvPr>
+          <p:cNvSpPr/>
+          <p:nvPr/>
+        </p:nvSpPr>
+        <p:spPr>
+          <a:xfrm>
+            <a:off x="1835260" y="1738180"/>
+            <a:ext cx="81028" cy="81028"/>
+          </a:xfrm>
+          <a:prstGeom prst="ellipse">
+            <a:avLst/>
+          </a:prstGeom>
+          <a:solidFill>
+            <a:schemeClr val="tx1"/>
+          </a:solidFill>
+          <a:ln>
+            <a:noFill/>
+          </a:ln>
+        </p:spPr>
+        <p:style>
+          <a:lnRef idx="2">
+            <a:schemeClr val="accent1">
+              <a:shade val="15000"/>
+            </a:schemeClr>
+          </a:lnRef>
+          <a:fillRef idx="1">
+            <a:schemeClr val="accent1"/>
+          </a:fillRef>
+          <a:effectRef idx="0">
+            <a:schemeClr val="accent1"/>
+          </a:effectRef>
+          <a:fontRef idx="minor">
+            <a:schemeClr val="lt1"/>
+          </a:fontRef>
+        </p:style>
+        <p:txBody>
+          <a:bodyPr rtlCol="0" anchor="ctr"/>
+          <a:lstStyle/>
+          <a:p>
+            <a:pPr algn="ctr"/>
+            <a:endParaRPr lang="de-DE">
+              <a:solidFill>
+                <a:sysClr val="windowText" lastClr="000000"/>
+              </a:solidFill>
+            </a:endParaRPr>
+          </a:p>
+        </p:txBody>
+      </p:sp>
+      <p:sp>
+        <p:nvSpPr>
+          <p:cNvPr id="7" name="Ellipse 6">
+            <a:extLst>
+              <a:ext uri="{FF2B5EF4-FFF2-40B4-BE49-F238E27FC236}">
+                <a16:creationId xmlns:a16="http://schemas.microsoft.com/office/drawing/2014/main" id="{81C8E0FC-93A2-0376-96F4-52D43EB98E22}"/>
+              </a:ext>
+            </a:extLst>
+          </p:cNvPr>
+          <p:cNvSpPr/>
+          <p:nvPr/>
+        </p:nvSpPr>
+        <p:spPr>
+          <a:xfrm>
+            <a:off x="1835260" y="2630661"/>
+            <a:ext cx="81028" cy="81028"/>
+          </a:xfrm>
+          <a:prstGeom prst="ellipse">
+            <a:avLst/>
+          </a:prstGeom>
+          <a:solidFill>
+            <a:schemeClr val="tx1"/>
+          </a:solidFill>
+          <a:ln>
+            <a:noFill/>
+          </a:ln>
+        </p:spPr>
+        <p:style>
+          <a:lnRef idx="2">
+            <a:schemeClr val="accent1">
+              <a:shade val="15000"/>
+            </a:schemeClr>
+          </a:lnRef>
+          <a:fillRef idx="1">
+            <a:schemeClr val="accent1"/>
+          </a:fillRef>
+          <a:effectRef idx="0">
+            <a:schemeClr val="accent1"/>
+          </a:effectRef>
+          <a:fontRef idx="minor">
+            <a:schemeClr val="lt1"/>
+          </a:fontRef>
+        </p:style>
+        <p:txBody>
+          <a:bodyPr rtlCol="0" anchor="ctr"/>
+          <a:lstStyle/>
+          <a:p>
+            <a:pPr algn="ctr"/>
+            <a:endParaRPr lang="de-DE">
+              <a:solidFill>
+                <a:sysClr val="windowText" lastClr="000000"/>
+              </a:solidFill>
+            </a:endParaRPr>
+          </a:p>
+        </p:txBody>
+      </p:sp>
+      <p:sp>
+        <p:nvSpPr>
+          <p:cNvPr id="8" name="Ellipse 7">
+            <a:extLst>
+              <a:ext uri="{FF2B5EF4-FFF2-40B4-BE49-F238E27FC236}">
+                <a16:creationId xmlns:a16="http://schemas.microsoft.com/office/drawing/2014/main" id="{0104A22D-F753-DAD2-0AB0-3DE6001403B6}"/>
+              </a:ext>
+            </a:extLst>
+          </p:cNvPr>
+          <p:cNvSpPr/>
+          <p:nvPr/>
+        </p:nvSpPr>
+        <p:spPr>
+          <a:xfrm>
+            <a:off x="2225207" y="1743679"/>
+            <a:ext cx="70030" cy="70030"/>
+          </a:xfrm>
+          <a:prstGeom prst="ellipse">
+            <a:avLst/>
+          </a:prstGeom>
+          <a:solidFill>
+            <a:schemeClr val="bg1"/>
+          </a:solidFill>
+          <a:ln w="12700">
+            <a:solidFill>
+              <a:schemeClr val="tx1"/>
+            </a:solidFill>
+          </a:ln>
+        </p:spPr>
+        <p:style>
+          <a:lnRef idx="2">
+            <a:schemeClr val="accent1">
+              <a:shade val="15000"/>
+            </a:schemeClr>
+          </a:lnRef>
+          <a:fillRef idx="1">
+            <a:schemeClr val="accent1"/>
+          </a:fillRef>
+          <a:effectRef idx="0">
+            <a:schemeClr val="accent1"/>
+          </a:effectRef>
+          <a:fontRef idx="minor">
+            <a:schemeClr val="lt1"/>
+          </a:fontRef>
+        </p:style>
+        <p:txBody>
+          <a:bodyPr rtlCol="0" anchor="ctr"/>
+          <a:lstStyle/>
+          <a:p>
+            <a:pPr algn="ctr"/>
+            <a:endParaRPr lang="de-DE">
+              <a:solidFill>
+                <a:sysClr val="windowText" lastClr="000000"/>
+              </a:solidFill>
+            </a:endParaRPr>
+          </a:p>
+        </p:txBody>
+      </p:sp>
+      <p:sp>
+        <p:nvSpPr>
+          <p:cNvPr id="9" name="Ellipse 8">
+            <a:extLst>
+              <a:ext uri="{FF2B5EF4-FFF2-40B4-BE49-F238E27FC236}">
+                <a16:creationId xmlns:a16="http://schemas.microsoft.com/office/drawing/2014/main" id="{BB6A399D-038D-AE45-0E58-CE504D6EEFE1}"/>
+              </a:ext>
+            </a:extLst>
+          </p:cNvPr>
+          <p:cNvSpPr/>
+          <p:nvPr/>
+        </p:nvSpPr>
+        <p:spPr>
+          <a:xfrm>
+            <a:off x="2225207" y="2636159"/>
+            <a:ext cx="70030" cy="70030"/>
+          </a:xfrm>
+          <a:prstGeom prst="ellipse">
+            <a:avLst/>
+          </a:prstGeom>
+          <a:solidFill>
+            <a:schemeClr val="bg1"/>
+          </a:solidFill>
+          <a:ln w="12700">
+            <a:solidFill>
+              <a:schemeClr val="tx1"/>
+            </a:solidFill>
+          </a:ln>
+        </p:spPr>
+        <p:style>
+          <a:lnRef idx="2">
+            <a:schemeClr val="accent1">
+              <a:shade val="15000"/>
+            </a:schemeClr>
+          </a:lnRef>
+          <a:fillRef idx="1">
+            <a:schemeClr val="accent1"/>
+          </a:fillRef>
+          <a:effectRef idx="0">
+            <a:schemeClr val="accent1"/>
+          </a:effectRef>
+          <a:fontRef idx="minor">
+            <a:schemeClr val="lt1"/>
+          </a:fontRef>
+        </p:style>
+        <p:txBody>
+          <a:bodyPr rtlCol="0" anchor="ctr"/>
+          <a:lstStyle/>
+          <a:p>
+            <a:pPr algn="ctr"/>
+            <a:endParaRPr lang="de-DE">
+              <a:solidFill>
+                <a:sysClr val="windowText" lastClr="000000"/>
+              </a:solidFill>
+            </a:endParaRPr>
+          </a:p>
+        </p:txBody>
+      </p:sp>
+      <p:sp>
+        <p:nvSpPr>
+          <p:cNvPr id="10" name="Rechteck 9">
+            <a:extLst>
+              <a:ext uri="{FF2B5EF4-FFF2-40B4-BE49-F238E27FC236}">
+                <a16:creationId xmlns:a16="http://schemas.microsoft.com/office/drawing/2014/main" id="{EC1F46EB-8CF0-2B19-DC2A-218401FEB93A}"/>
+              </a:ext>
+            </a:extLst>
+          </p:cNvPr>
+          <p:cNvSpPr/>
+          <p:nvPr/>
+        </p:nvSpPr>
+        <p:spPr>
+          <a:xfrm rot="16200000">
+            <a:off x="1708134" y="1243749"/>
+            <a:ext cx="335280" cy="118110"/>
+          </a:xfrm>
+          <a:prstGeom prst="rect">
+            <a:avLst/>
+          </a:prstGeom>
+          <a:solidFill>
+            <a:schemeClr val="bg1"/>
+          </a:solidFill>
+          <a:ln w="15875" cap="rnd">
+            <a:solidFill>
+              <a:schemeClr val="tx1"/>
+            </a:solidFill>
+            <a:round/>
+          </a:ln>
+        </p:spPr>
+        <p:style>
+          <a:lnRef idx="2">
+            <a:schemeClr val="accent1">
+              <a:shade val="15000"/>
+            </a:schemeClr>
+          </a:lnRef>
+          <a:fillRef idx="1">
+            <a:schemeClr val="accent1"/>
+          </a:fillRef>
+          <a:effectRef idx="0">
+            <a:schemeClr val="accent1"/>
+          </a:effectRef>
+          <a:fontRef idx="minor">
+            <a:schemeClr val="lt1"/>
+          </a:fontRef>
+        </p:style>
+        <p:txBody>
+          <a:bodyPr rtlCol="0" anchor="ctr"/>
+          <a:lstStyle/>
+          <a:p>
+            <a:pPr algn="ctr"/>
+            <a:endParaRPr lang="de-DE"/>
+          </a:p>
+        </p:txBody>
+      </p:sp>
+      <p:sp>
+        <p:nvSpPr>
+          <p:cNvPr id="11" name="Rechteck 10">
+            <a:extLst>
+              <a:ext uri="{FF2B5EF4-FFF2-40B4-BE49-F238E27FC236}">
+                <a16:creationId xmlns:a16="http://schemas.microsoft.com/office/drawing/2014/main" id="{62972A03-99EE-88DD-B6C7-E772D9EBF4CD}"/>
+              </a:ext>
+            </a:extLst>
+          </p:cNvPr>
+          <p:cNvSpPr/>
+          <p:nvPr/>
+        </p:nvSpPr>
+        <p:spPr>
+          <a:xfrm rot="16200000">
+            <a:off x="1708134" y="2165879"/>
+            <a:ext cx="335280" cy="118110"/>
+          </a:xfrm>
+          <a:prstGeom prst="rect">
+            <a:avLst/>
+          </a:prstGeom>
+          <a:solidFill>
+            <a:schemeClr val="bg1"/>
+          </a:solidFill>
+          <a:ln w="15875" cap="rnd">
+            <a:solidFill>
+              <a:schemeClr val="tx1"/>
+            </a:solidFill>
+            <a:round/>
+          </a:ln>
+        </p:spPr>
+        <p:style>
+          <a:lnRef idx="2">
+            <a:schemeClr val="accent1">
+              <a:shade val="15000"/>
+            </a:schemeClr>
+          </a:lnRef>
+          <a:fillRef idx="1">
+            <a:schemeClr val="accent1"/>
+          </a:fillRef>
+          <a:effectRef idx="0">
+            <a:schemeClr val="accent1"/>
+          </a:effectRef>
+          <a:fontRef idx="minor">
+            <a:schemeClr val="lt1"/>
+          </a:fontRef>
+        </p:style>
+        <p:txBody>
+          <a:bodyPr rtlCol="0" anchor="ctr"/>
+          <a:lstStyle/>
+          <a:p>
+            <a:pPr algn="ctr"/>
+            <a:endParaRPr lang="de-DE"/>
+          </a:p>
+        </p:txBody>
+      </p:sp>
+      <p:sp>
+        <p:nvSpPr>
+          <p:cNvPr id="12" name="Rechteck 11">
+            <a:extLst>
+              <a:ext uri="{FF2B5EF4-FFF2-40B4-BE49-F238E27FC236}">
+                <a16:creationId xmlns:a16="http://schemas.microsoft.com/office/drawing/2014/main" id="{B7F5359C-0992-EE4F-03EF-45806CC8D5FA}"/>
+              </a:ext>
+            </a:extLst>
+          </p:cNvPr>
+          <p:cNvSpPr/>
+          <p:nvPr/>
+        </p:nvSpPr>
+        <p:spPr>
+          <a:xfrm rot="16200000">
+            <a:off x="2444037" y="2165879"/>
+            <a:ext cx="335280" cy="118110"/>
+          </a:xfrm>
+          <a:prstGeom prst="rect">
+            <a:avLst/>
+          </a:prstGeom>
+          <a:solidFill>
+            <a:schemeClr val="bg1"/>
+          </a:solidFill>
+          <a:ln w="15875" cap="rnd">
+            <a:solidFill>
+              <a:schemeClr val="tx1"/>
+            </a:solidFill>
+            <a:round/>
+          </a:ln>
+        </p:spPr>
+        <p:style>
+          <a:lnRef idx="2">
+            <a:schemeClr val="accent1">
+              <a:shade val="15000"/>
+            </a:schemeClr>
+          </a:lnRef>
+          <a:fillRef idx="1">
+            <a:schemeClr val="accent1"/>
+          </a:fillRef>
+          <a:effectRef idx="0">
+            <a:schemeClr val="accent1"/>
+          </a:effectRef>
+          <a:fontRef idx="minor">
+            <a:schemeClr val="lt1"/>
+          </a:fontRef>
+        </p:style>
+        <p:txBody>
+          <a:bodyPr rtlCol="0" anchor="ctr"/>
+          <a:lstStyle/>
+          <a:p>
+            <a:pPr algn="ctr"/>
+            <a:endParaRPr lang="de-DE"/>
+          </a:p>
+        </p:txBody>
+      </p:sp>
+      <p:sp>
+        <p:nvSpPr>
+          <p:cNvPr id="13" name="Ellipse 12">
+            <a:extLst>
+              <a:ext uri="{FF2B5EF4-FFF2-40B4-BE49-F238E27FC236}">
+                <a16:creationId xmlns:a16="http://schemas.microsoft.com/office/drawing/2014/main" id="{A63F8E24-4192-92D7-F463-FFE9D7573B77}"/>
+              </a:ext>
+            </a:extLst>
+          </p:cNvPr>
+          <p:cNvSpPr/>
+          <p:nvPr/>
+        </p:nvSpPr>
+        <p:spPr>
+          <a:xfrm>
+            <a:off x="865862" y="1664394"/>
+            <a:ext cx="228600" cy="228600"/>
+          </a:xfrm>
+          <a:prstGeom prst="ellipse">
+            <a:avLst/>
+          </a:prstGeom>
+          <a:noFill/>
+          <a:ln w="15875">
+            <a:solidFill>
+              <a:schemeClr val="tx1"/>
+            </a:solidFill>
+          </a:ln>
+        </p:spPr>
+        <p:style>
+          <a:lnRef idx="2">
+            <a:schemeClr val="accent1">
+              <a:shade val="15000"/>
+            </a:schemeClr>
+          </a:lnRef>
+          <a:fillRef idx="1">
+            <a:schemeClr val="accent1"/>
+          </a:fillRef>
+          <a:effectRef idx="0">
+            <a:schemeClr val="accent1"/>
+          </a:effectRef>
+          <a:fontRef idx="minor">
+            <a:schemeClr val="lt1"/>
+          </a:fontRef>
+        </p:style>
+        <p:txBody>
+          <a:bodyPr rtlCol="0" anchor="ctr"/>
+          <a:lstStyle/>
+          <a:p>
+            <a:pPr algn="ctr"/>
+            <a:endParaRPr lang="de-DE"/>
+          </a:p>
+        </p:txBody>
+      </p:sp>
+      <p:cxnSp>
+        <p:nvCxnSpPr>
+          <p:cNvPr id="14" name="Gerade Verbindung mit Pfeil 13">
+            <a:extLst>
+              <a:ext uri="{FF2B5EF4-FFF2-40B4-BE49-F238E27FC236}">
+                <a16:creationId xmlns:a16="http://schemas.microsoft.com/office/drawing/2014/main" id="{7868E458-758E-9B4B-9AE3-914A5A14B5A6}"/>
+              </a:ext>
+            </a:extLst>
+          </p:cNvPr>
+          <p:cNvCxnSpPr>
+            <a:cxnSpLocks/>
+          </p:cNvCxnSpPr>
+          <p:nvPr/>
+        </p:nvCxnSpPr>
+        <p:spPr>
+          <a:xfrm>
+            <a:off x="1153517" y="1517800"/>
+            <a:ext cx="0" cy="565147"/>
+          </a:xfrm>
+          <a:prstGeom prst="straightConnector1">
+            <a:avLst/>
+          </a:prstGeom>
+          <a:ln cap="rnd">
+            <a:solidFill>
+              <a:srgbClr val="086FBD"/>
+            </a:solidFill>
+            <a:round/>
+            <a:tailEnd type="triangle"/>
+          </a:ln>
+        </p:spPr>
+        <p:style>
+          <a:lnRef idx="2">
+            <a:schemeClr val="accent1"/>
+          </a:lnRef>
+          <a:fillRef idx="0">
+            <a:schemeClr val="accent1"/>
+          </a:fillRef>
+          <a:effectRef idx="1">
+            <a:schemeClr val="accent1"/>
+          </a:effectRef>
+          <a:fontRef idx="minor">
+            <a:schemeClr val="tx1"/>
+          </a:fontRef>
+        </p:style>
+      </p:cxnSp>
+      <p:sp>
+        <p:nvSpPr>
+          <p:cNvPr id="15" name="Textfeld 14">
+            <a:extLst>
+              <a:ext uri="{FF2B5EF4-FFF2-40B4-BE49-F238E27FC236}">
+                <a16:creationId xmlns:a16="http://schemas.microsoft.com/office/drawing/2014/main" id="{9FABC065-D538-9CA7-8C79-8A0F19E4A9DB}"/>
+              </a:ext>
+            </a:extLst>
+          </p:cNvPr>
+          <p:cNvSpPr txBox="1"/>
+          <p:nvPr/>
+        </p:nvSpPr>
+        <p:spPr>
+          <a:xfrm>
+            <a:off x="1100490" y="1651059"/>
+            <a:ext cx="341666" cy="261610"/>
+          </a:xfrm>
+          <a:prstGeom prst="rect">
+            <a:avLst/>
+          </a:prstGeom>
+          <a:noFill/>
+        </p:spPr>
+        <p:txBody>
+          <a:bodyPr wrap="square" rtlCol="0">
+            <a:spAutoFit/>
+          </a:bodyPr>
+          <a:lstStyle/>
+          <a:p>
+            <a:r>
+              <a:rPr lang="de-DE" sz="1100" i="1" dirty="0" err="1">
+                <a:solidFill>
+                  <a:srgbClr val="086FBD"/>
+                </a:solidFill>
+                <a:latin typeface="CMU Serif" panose="02000603000000000000" pitchFamily="2" charset="0"/>
+                <a:ea typeface="CMU Serif" panose="02000603000000000000" pitchFamily="2" charset="0"/>
+                <a:cs typeface="CMU Serif" panose="02000603000000000000" pitchFamily="2" charset="0"/>
+              </a:rPr>
+              <a:t>U</a:t>
+            </a:r>
+            <a:r>
+              <a:rPr lang="de-DE" sz="1100" baseline="-25000" dirty="0" err="1">
+                <a:solidFill>
+                  <a:srgbClr val="086FBD"/>
+                </a:solidFill>
+                <a:latin typeface="CMU Serif" panose="02000603000000000000" pitchFamily="2" charset="0"/>
+                <a:ea typeface="CMU Serif" panose="02000603000000000000" pitchFamily="2" charset="0"/>
+                <a:cs typeface="CMU Serif" panose="02000603000000000000" pitchFamily="2" charset="0"/>
+              </a:rPr>
+              <a:t>q</a:t>
+            </a:r>
+            <a:endParaRPr lang="de-DE" sz="1100" baseline="-25000" dirty="0">
+              <a:solidFill>
+                <a:srgbClr val="086FBD"/>
+              </a:solidFill>
+              <a:latin typeface="CMU Serif" panose="02000603000000000000" pitchFamily="2" charset="0"/>
+              <a:ea typeface="CMU Serif" panose="02000603000000000000" pitchFamily="2" charset="0"/>
+              <a:cs typeface="CMU Serif" panose="02000603000000000000" pitchFamily="2" charset="0"/>
+            </a:endParaRPr>
+          </a:p>
+        </p:txBody>
+      </p:sp>
+      <p:cxnSp>
+        <p:nvCxnSpPr>
+          <p:cNvPr id="16" name="Gerade Verbindung mit Pfeil 15">
+            <a:extLst>
+              <a:ext uri="{FF2B5EF4-FFF2-40B4-BE49-F238E27FC236}">
+                <a16:creationId xmlns:a16="http://schemas.microsoft.com/office/drawing/2014/main" id="{8D4FB6DF-2525-4FC9-BC05-B1D3572E27ED}"/>
+              </a:ext>
+            </a:extLst>
+          </p:cNvPr>
+          <p:cNvCxnSpPr/>
+          <p:nvPr/>
+        </p:nvCxnSpPr>
+        <p:spPr>
+          <a:xfrm>
+            <a:off x="1358156" y="867427"/>
+            <a:ext cx="167999" cy="0"/>
+          </a:xfrm>
+          <a:prstGeom prst="straightConnector1">
+            <a:avLst/>
+          </a:prstGeom>
+          <a:ln cap="rnd">
+            <a:solidFill>
+              <a:srgbClr val="FF0000"/>
+            </a:solidFill>
+            <a:round/>
+            <a:tailEnd type="triangle"/>
+          </a:ln>
+        </p:spPr>
+        <p:style>
+          <a:lnRef idx="2">
+            <a:schemeClr val="accent1"/>
+          </a:lnRef>
+          <a:fillRef idx="0">
+            <a:schemeClr val="accent1"/>
+          </a:fillRef>
+          <a:effectRef idx="1">
+            <a:schemeClr val="accent1"/>
+          </a:effectRef>
+          <a:fontRef idx="minor">
+            <a:schemeClr val="tx1"/>
+          </a:fontRef>
+        </p:style>
+      </p:cxnSp>
+      <p:sp>
+        <p:nvSpPr>
+          <p:cNvPr id="17" name="Textfeld 16">
+            <a:extLst>
+              <a:ext uri="{FF2B5EF4-FFF2-40B4-BE49-F238E27FC236}">
+                <a16:creationId xmlns:a16="http://schemas.microsoft.com/office/drawing/2014/main" id="{48A7EB98-7A72-4A16-2EDD-3217024027DA}"/>
+              </a:ext>
+            </a:extLst>
+          </p:cNvPr>
+          <p:cNvSpPr txBox="1"/>
+          <p:nvPr/>
+        </p:nvSpPr>
+        <p:spPr>
+          <a:xfrm>
+            <a:off x="1293951" y="892553"/>
+            <a:ext cx="296407" cy="261610"/>
+          </a:xfrm>
+          <a:prstGeom prst="rect">
+            <a:avLst/>
+          </a:prstGeom>
+          <a:noFill/>
+        </p:spPr>
+        <p:txBody>
+          <a:bodyPr wrap="square" rtlCol="0">
+            <a:spAutoFit/>
+          </a:bodyPr>
+          <a:lstStyle/>
+          <a:p>
+            <a:r>
+              <a:rPr lang="de-DE" sz="1100" i="1" dirty="0">
+                <a:solidFill>
+                  <a:srgbClr val="FF0000"/>
+                </a:solidFill>
+                <a:latin typeface="CMU Serif" panose="02000603000000000000" pitchFamily="2" charset="0"/>
+                <a:ea typeface="CMU Serif" panose="02000603000000000000" pitchFamily="2" charset="0"/>
+                <a:cs typeface="CMU Serif" panose="02000603000000000000" pitchFamily="2" charset="0"/>
+              </a:rPr>
+              <a:t>I</a:t>
+            </a:r>
+            <a:endParaRPr lang="de-DE" sz="1100" baseline="-25000" dirty="0">
+              <a:solidFill>
+                <a:srgbClr val="FF0000"/>
+              </a:solidFill>
+              <a:latin typeface="CMU Serif" panose="02000603000000000000" pitchFamily="2" charset="0"/>
+              <a:ea typeface="CMU Serif" panose="02000603000000000000" pitchFamily="2" charset="0"/>
+              <a:cs typeface="CMU Serif" panose="02000603000000000000" pitchFamily="2" charset="0"/>
+            </a:endParaRPr>
+          </a:p>
+        </p:txBody>
+      </p:sp>
+      <p:sp>
+        <p:nvSpPr>
+          <p:cNvPr id="20" name="Textfeld 19">
+            <a:extLst>
+              <a:ext uri="{FF2B5EF4-FFF2-40B4-BE49-F238E27FC236}">
+                <a16:creationId xmlns:a16="http://schemas.microsoft.com/office/drawing/2014/main" id="{FC0B39A7-A019-20A1-8634-17B91DF2738E}"/>
+              </a:ext>
+            </a:extLst>
+          </p:cNvPr>
+          <p:cNvSpPr txBox="1"/>
+          <p:nvPr/>
+        </p:nvSpPr>
+        <p:spPr>
+          <a:xfrm>
+            <a:off x="1517465" y="1177483"/>
+            <a:ext cx="341666" cy="261610"/>
+          </a:xfrm>
+          <a:prstGeom prst="rect">
+            <a:avLst/>
+          </a:prstGeom>
+          <a:noFill/>
+        </p:spPr>
+        <p:txBody>
+          <a:bodyPr wrap="square" rtlCol="0">
+            <a:spAutoFit/>
+          </a:bodyPr>
+          <a:lstStyle/>
+          <a:p>
+            <a:pPr algn="ctr"/>
+            <a:r>
+              <a:rPr lang="de-DE" sz="1100" i="1" dirty="0">
+                <a:latin typeface="CMU Serif" panose="02000603000000000000" pitchFamily="2" charset="0"/>
+                <a:ea typeface="CMU Serif" panose="02000603000000000000" pitchFamily="2" charset="0"/>
+                <a:cs typeface="CMU Serif" panose="02000603000000000000" pitchFamily="2" charset="0"/>
+              </a:rPr>
+              <a:t>R</a:t>
+            </a:r>
+            <a:r>
+              <a:rPr lang="de-DE" sz="1100" baseline="-25000" dirty="0">
+                <a:latin typeface="CMU Serif" panose="02000603000000000000" pitchFamily="2" charset="0"/>
+                <a:ea typeface="CMU Serif" panose="02000603000000000000" pitchFamily="2" charset="0"/>
+                <a:cs typeface="CMU Serif" panose="02000603000000000000" pitchFamily="2" charset="0"/>
+              </a:rPr>
+              <a:t>i</a:t>
+            </a:r>
+          </a:p>
+        </p:txBody>
+      </p:sp>
+      <p:cxnSp>
+        <p:nvCxnSpPr>
+          <p:cNvPr id="21" name="Gerade Verbindung mit Pfeil 20">
+            <a:extLst>
+              <a:ext uri="{FF2B5EF4-FFF2-40B4-BE49-F238E27FC236}">
+                <a16:creationId xmlns:a16="http://schemas.microsoft.com/office/drawing/2014/main" id="{4C2A2C33-4C59-70DB-B219-56133EE8514E}"/>
+              </a:ext>
+            </a:extLst>
+          </p:cNvPr>
+          <p:cNvCxnSpPr/>
+          <p:nvPr/>
+        </p:nvCxnSpPr>
+        <p:spPr>
+          <a:xfrm>
+            <a:off x="2384623" y="1778695"/>
+            <a:ext cx="167999" cy="0"/>
+          </a:xfrm>
+          <a:prstGeom prst="straightConnector1">
+            <a:avLst/>
+          </a:prstGeom>
+          <a:ln cap="rnd">
+            <a:solidFill>
+              <a:srgbClr val="FF0000"/>
+            </a:solidFill>
+            <a:round/>
+            <a:tailEnd type="triangle"/>
+          </a:ln>
+        </p:spPr>
+        <p:style>
+          <a:lnRef idx="2">
+            <a:schemeClr val="accent1"/>
+          </a:lnRef>
+          <a:fillRef idx="0">
+            <a:schemeClr val="accent1"/>
+          </a:fillRef>
+          <a:effectRef idx="1">
+            <a:schemeClr val="accent1"/>
+          </a:effectRef>
+          <a:fontRef idx="minor">
+            <a:schemeClr val="tx1"/>
+          </a:fontRef>
+        </p:style>
+      </p:cxnSp>
+      <p:sp>
+        <p:nvSpPr>
+          <p:cNvPr id="22" name="Textfeld 21">
+            <a:extLst>
+              <a:ext uri="{FF2B5EF4-FFF2-40B4-BE49-F238E27FC236}">
+                <a16:creationId xmlns:a16="http://schemas.microsoft.com/office/drawing/2014/main" id="{3589E243-4267-B551-6152-74220A838544}"/>
+              </a:ext>
+            </a:extLst>
+          </p:cNvPr>
+          <p:cNvSpPr txBox="1"/>
+          <p:nvPr/>
+        </p:nvSpPr>
+        <p:spPr>
+          <a:xfrm>
+            <a:off x="2315270" y="1479344"/>
+            <a:ext cx="296407" cy="261610"/>
+          </a:xfrm>
+          <a:prstGeom prst="rect">
+            <a:avLst/>
+          </a:prstGeom>
+          <a:noFill/>
+        </p:spPr>
+        <p:txBody>
+          <a:bodyPr wrap="square" rtlCol="0">
+            <a:spAutoFit/>
+          </a:bodyPr>
+          <a:lstStyle/>
+          <a:p>
+            <a:r>
+              <a:rPr lang="de-DE" sz="1100" i="1" dirty="0">
+                <a:solidFill>
+                  <a:srgbClr val="FF0000"/>
+                </a:solidFill>
+                <a:latin typeface="CMU Serif" panose="02000603000000000000" pitchFamily="2" charset="0"/>
+                <a:ea typeface="CMU Serif" panose="02000603000000000000" pitchFamily="2" charset="0"/>
+                <a:cs typeface="CMU Serif" panose="02000603000000000000" pitchFamily="2" charset="0"/>
+              </a:rPr>
+              <a:t>I</a:t>
+            </a:r>
+            <a:r>
+              <a:rPr lang="de-DE" sz="1100" baseline="-25000" dirty="0">
+                <a:solidFill>
+                  <a:srgbClr val="FF0000"/>
+                </a:solidFill>
+                <a:latin typeface="CMU Serif" panose="02000603000000000000" pitchFamily="2" charset="0"/>
+                <a:ea typeface="CMU Serif" panose="02000603000000000000" pitchFamily="2" charset="0"/>
+                <a:cs typeface="CMU Serif" panose="02000603000000000000" pitchFamily="2" charset="0"/>
+              </a:rPr>
+              <a:t>2</a:t>
+            </a:r>
+          </a:p>
+        </p:txBody>
+      </p:sp>
+      <p:cxnSp>
+        <p:nvCxnSpPr>
+          <p:cNvPr id="23" name="Gerade Verbindung mit Pfeil 22">
+            <a:extLst>
+              <a:ext uri="{FF2B5EF4-FFF2-40B4-BE49-F238E27FC236}">
+                <a16:creationId xmlns:a16="http://schemas.microsoft.com/office/drawing/2014/main" id="{A3766466-525F-2C31-259F-30B77BE5EB3C}"/>
+              </a:ext>
+            </a:extLst>
+          </p:cNvPr>
+          <p:cNvCxnSpPr>
+            <a:cxnSpLocks/>
+          </p:cNvCxnSpPr>
+          <p:nvPr/>
+        </p:nvCxnSpPr>
+        <p:spPr>
+          <a:xfrm>
+            <a:off x="1876276" y="1859589"/>
+            <a:ext cx="0" cy="157855"/>
+          </a:xfrm>
+          <a:prstGeom prst="straightConnector1">
+            <a:avLst/>
+          </a:prstGeom>
+          <a:ln cap="rnd">
+            <a:solidFill>
+              <a:srgbClr val="FF0000"/>
+            </a:solidFill>
+            <a:round/>
+            <a:tailEnd type="triangle"/>
+          </a:ln>
+        </p:spPr>
+        <p:style>
+          <a:lnRef idx="2">
+            <a:schemeClr val="accent1"/>
+          </a:lnRef>
+          <a:fillRef idx="0">
+            <a:schemeClr val="accent1"/>
+          </a:fillRef>
+          <a:effectRef idx="1">
+            <a:schemeClr val="accent1"/>
+          </a:effectRef>
+          <a:fontRef idx="minor">
+            <a:schemeClr val="tx1"/>
+          </a:fontRef>
+        </p:style>
+      </p:cxnSp>
+      <p:sp>
+        <p:nvSpPr>
+          <p:cNvPr id="24" name="Textfeld 23">
+            <a:extLst>
+              <a:ext uri="{FF2B5EF4-FFF2-40B4-BE49-F238E27FC236}">
+                <a16:creationId xmlns:a16="http://schemas.microsoft.com/office/drawing/2014/main" id="{90CEF2F2-91E1-90D2-5E73-DFDBFD33CFD7}"/>
+              </a:ext>
+            </a:extLst>
+          </p:cNvPr>
+          <p:cNvSpPr txBox="1"/>
+          <p:nvPr/>
+        </p:nvSpPr>
+        <p:spPr>
+          <a:xfrm>
+            <a:off x="1579116" y="1795683"/>
+            <a:ext cx="296407" cy="261610"/>
+          </a:xfrm>
+          <a:prstGeom prst="rect">
+            <a:avLst/>
+          </a:prstGeom>
+          <a:noFill/>
+        </p:spPr>
+        <p:txBody>
+          <a:bodyPr wrap="square" rtlCol="0">
+            <a:spAutoFit/>
+          </a:bodyPr>
+          <a:lstStyle/>
+          <a:p>
+            <a:r>
+              <a:rPr lang="de-DE" sz="1100" i="1" dirty="0">
+                <a:solidFill>
+                  <a:srgbClr val="FF0000"/>
+                </a:solidFill>
+                <a:latin typeface="CMU Serif" panose="02000603000000000000" pitchFamily="2" charset="0"/>
+                <a:ea typeface="CMU Serif" panose="02000603000000000000" pitchFamily="2" charset="0"/>
+                <a:cs typeface="CMU Serif" panose="02000603000000000000" pitchFamily="2" charset="0"/>
+              </a:rPr>
+              <a:t>I</a:t>
+            </a:r>
+            <a:r>
+              <a:rPr lang="de-DE" sz="1100" baseline="-25000" dirty="0">
+                <a:solidFill>
+                  <a:srgbClr val="FF0000"/>
+                </a:solidFill>
+                <a:latin typeface="CMU Serif" panose="02000603000000000000" pitchFamily="2" charset="0"/>
+                <a:ea typeface="CMU Serif" panose="02000603000000000000" pitchFamily="2" charset="0"/>
+                <a:cs typeface="CMU Serif" panose="02000603000000000000" pitchFamily="2" charset="0"/>
+              </a:rPr>
+              <a:t>1</a:t>
+            </a:r>
+          </a:p>
+        </p:txBody>
+      </p:sp>
+      <p:sp>
+        <p:nvSpPr>
+          <p:cNvPr id="26" name="Textfeld 25">
+            <a:extLst>
+              <a:ext uri="{FF2B5EF4-FFF2-40B4-BE49-F238E27FC236}">
+                <a16:creationId xmlns:a16="http://schemas.microsoft.com/office/drawing/2014/main" id="{26527C2F-70F0-A612-918C-B3D53D89BB9D}"/>
+              </a:ext>
+            </a:extLst>
+          </p:cNvPr>
+          <p:cNvSpPr txBox="1"/>
+          <p:nvPr/>
+        </p:nvSpPr>
+        <p:spPr>
+          <a:xfrm>
+            <a:off x="1517465" y="2094128"/>
+            <a:ext cx="341666" cy="261610"/>
+          </a:xfrm>
+          <a:prstGeom prst="rect">
+            <a:avLst/>
+          </a:prstGeom>
+          <a:noFill/>
+        </p:spPr>
+        <p:txBody>
+          <a:bodyPr wrap="square" rtlCol="0">
+            <a:spAutoFit/>
+          </a:bodyPr>
+          <a:lstStyle/>
+          <a:p>
+            <a:pPr algn="ctr"/>
+            <a:r>
+              <a:rPr lang="de-DE" sz="1100" i="1" dirty="0">
+                <a:latin typeface="CMU Serif" panose="02000603000000000000" pitchFamily="2" charset="0"/>
+                <a:ea typeface="CMU Serif" panose="02000603000000000000" pitchFamily="2" charset="0"/>
+                <a:cs typeface="CMU Serif" panose="02000603000000000000" pitchFamily="2" charset="0"/>
+              </a:rPr>
+              <a:t>R</a:t>
+            </a:r>
+            <a:r>
+              <a:rPr lang="de-DE" sz="1100" baseline="-25000" dirty="0">
+                <a:latin typeface="CMU Serif" panose="02000603000000000000" pitchFamily="2" charset="0"/>
+                <a:ea typeface="CMU Serif" panose="02000603000000000000" pitchFamily="2" charset="0"/>
+                <a:cs typeface="CMU Serif" panose="02000603000000000000" pitchFamily="2" charset="0"/>
+              </a:rPr>
+              <a:t>1</a:t>
+            </a:r>
+          </a:p>
+        </p:txBody>
+      </p:sp>
+      <p:sp>
+        <p:nvSpPr>
+          <p:cNvPr id="27" name="Textfeld 26">
+            <a:extLst>
+              <a:ext uri="{FF2B5EF4-FFF2-40B4-BE49-F238E27FC236}">
+                <a16:creationId xmlns:a16="http://schemas.microsoft.com/office/drawing/2014/main" id="{01FD6ACF-6D45-4261-82A4-C38A2595DF3A}"/>
+              </a:ext>
+            </a:extLst>
+          </p:cNvPr>
+          <p:cNvSpPr txBox="1"/>
+          <p:nvPr/>
+        </p:nvSpPr>
+        <p:spPr>
+          <a:xfrm>
+            <a:off x="2254771" y="2094128"/>
+            <a:ext cx="341666" cy="261610"/>
+          </a:xfrm>
+          <a:prstGeom prst="rect">
+            <a:avLst/>
+          </a:prstGeom>
+          <a:noFill/>
+        </p:spPr>
+        <p:txBody>
+          <a:bodyPr wrap="square" rtlCol="0">
+            <a:spAutoFit/>
+          </a:bodyPr>
+          <a:lstStyle/>
+          <a:p>
+            <a:pPr algn="ctr"/>
+            <a:r>
+              <a:rPr lang="de-DE" sz="1100" i="1" dirty="0">
+                <a:latin typeface="CMU Serif" panose="02000603000000000000" pitchFamily="2" charset="0"/>
+                <a:ea typeface="CMU Serif" panose="02000603000000000000" pitchFamily="2" charset="0"/>
+                <a:cs typeface="CMU Serif" panose="02000603000000000000" pitchFamily="2" charset="0"/>
+              </a:rPr>
+              <a:t>R</a:t>
+            </a:r>
+            <a:endParaRPr lang="de-DE" sz="1100" baseline="-25000" dirty="0">
+              <a:latin typeface="CMU Serif" panose="02000603000000000000" pitchFamily="2" charset="0"/>
+              <a:ea typeface="CMU Serif" panose="02000603000000000000" pitchFamily="2" charset="0"/>
+              <a:cs typeface="CMU Serif" panose="02000603000000000000" pitchFamily="2" charset="0"/>
+            </a:endParaRPr>
+          </a:p>
+        </p:txBody>
+      </p:sp>
+      <p:sp>
+        <p:nvSpPr>
+          <p:cNvPr id="28" name="Textfeld 27">
+            <a:extLst>
+              <a:ext uri="{FF2B5EF4-FFF2-40B4-BE49-F238E27FC236}">
+                <a16:creationId xmlns:a16="http://schemas.microsoft.com/office/drawing/2014/main" id="{E9AE8096-AD6F-F4CC-0A21-D6ECBFAA1D37}"/>
+              </a:ext>
+            </a:extLst>
+          </p:cNvPr>
+          <p:cNvSpPr txBox="1"/>
+          <p:nvPr/>
+        </p:nvSpPr>
+        <p:spPr>
+          <a:xfrm>
+            <a:off x="2089339" y="1533589"/>
+            <a:ext cx="341666" cy="261610"/>
+          </a:xfrm>
+          <a:prstGeom prst="rect">
+            <a:avLst/>
+          </a:prstGeom>
+          <a:noFill/>
+        </p:spPr>
+        <p:txBody>
+          <a:bodyPr wrap="square" rtlCol="0">
+            <a:spAutoFit/>
+          </a:bodyPr>
+          <a:lstStyle/>
+          <a:p>
+            <a:pPr algn="ctr"/>
+            <a:r>
+              <a:rPr lang="de-DE" sz="1100" dirty="0">
+                <a:latin typeface="CMU Serif" panose="02000603000000000000" pitchFamily="2" charset="0"/>
+                <a:ea typeface="CMU Serif" panose="02000603000000000000" pitchFamily="2" charset="0"/>
+                <a:cs typeface="CMU Serif" panose="02000603000000000000" pitchFamily="2" charset="0"/>
+              </a:rPr>
+              <a:t>1</a:t>
+            </a:r>
+            <a:endParaRPr lang="de-DE" sz="1100" baseline="-25000" dirty="0">
+              <a:latin typeface="CMU Serif" panose="02000603000000000000" pitchFamily="2" charset="0"/>
+              <a:ea typeface="CMU Serif" panose="02000603000000000000" pitchFamily="2" charset="0"/>
+              <a:cs typeface="CMU Serif" panose="02000603000000000000" pitchFamily="2" charset="0"/>
+            </a:endParaRPr>
+          </a:p>
+        </p:txBody>
+      </p:sp>
+      <p:sp>
+        <p:nvSpPr>
+          <p:cNvPr id="29" name="Textfeld 28">
+            <a:extLst>
+              <a:ext uri="{FF2B5EF4-FFF2-40B4-BE49-F238E27FC236}">
+                <a16:creationId xmlns:a16="http://schemas.microsoft.com/office/drawing/2014/main" id="{0FF0D137-E45A-B99D-7745-A0D5252075D9}"/>
+              </a:ext>
+            </a:extLst>
+          </p:cNvPr>
+          <p:cNvSpPr txBox="1"/>
+          <p:nvPr/>
+        </p:nvSpPr>
+        <p:spPr>
+          <a:xfrm>
+            <a:off x="2089339" y="2427072"/>
+            <a:ext cx="341666" cy="261610"/>
+          </a:xfrm>
+          <a:prstGeom prst="rect">
+            <a:avLst/>
+          </a:prstGeom>
+          <a:noFill/>
+        </p:spPr>
+        <p:txBody>
+          <a:bodyPr wrap="square" rtlCol="0">
+            <a:spAutoFit/>
+          </a:bodyPr>
+          <a:lstStyle/>
+          <a:p>
+            <a:pPr algn="ctr"/>
+            <a:r>
+              <a:rPr lang="de-DE" sz="1100" dirty="0">
+                <a:latin typeface="CMU Serif" panose="02000603000000000000" pitchFamily="2" charset="0"/>
+                <a:ea typeface="CMU Serif" panose="02000603000000000000" pitchFamily="2" charset="0"/>
+                <a:cs typeface="CMU Serif" panose="02000603000000000000" pitchFamily="2" charset="0"/>
+              </a:rPr>
+              <a:t>2</a:t>
+            </a:r>
+            <a:endParaRPr lang="de-DE" sz="1100" baseline="-25000" dirty="0">
+              <a:latin typeface="CMU Serif" panose="02000603000000000000" pitchFamily="2" charset="0"/>
+              <a:ea typeface="CMU Serif" panose="02000603000000000000" pitchFamily="2" charset="0"/>
+              <a:cs typeface="CMU Serif" panose="02000603000000000000" pitchFamily="2" charset="0"/>
+            </a:endParaRPr>
+          </a:p>
+        </p:txBody>
+      </p:sp>
+    </p:spTree>
+    <p:extLst>
+      <p:ext uri="{BB962C8B-B14F-4D97-AF65-F5344CB8AC3E}">
+        <p14:creationId xmlns:p14="http://schemas.microsoft.com/office/powerpoint/2010/main" val="2210989432"/>
+      </p:ext>
+    </p:extLst>
+  </p:cSld>
+  <p:clrMapOvr>
+    <a:masterClrMapping/>
+  </p:clrMapOvr>
+</p:sld>
+</file>
+
+<file path=ppt/slides/slide4.xml><?xml version="1.0" encoding="utf-8"?>
+<p:sld xmlns:a="http://schemas.openxmlformats.org/drawingml/2006/main" xmlns:r="http://schemas.openxmlformats.org/officeDocument/2006/relationships" xmlns:p="http://schemas.openxmlformats.org/presentationml/2006/main">
+  <p:cSld>
+    <p:spTree>
+      <p:nvGrpSpPr>
+        <p:cNvPr id="1" name="">
+          <a:extLst>
+            <a:ext uri="{FF2B5EF4-FFF2-40B4-BE49-F238E27FC236}">
+              <a16:creationId xmlns:a16="http://schemas.microsoft.com/office/drawing/2014/main" id="{42A93180-0DE8-2D3F-85B0-2B3E5D661E93}"/>
+            </a:ext>
+          </a:extLst>
+        </p:cNvPr>
+        <p:cNvGrpSpPr/>
+        <p:nvPr/>
+      </p:nvGrpSpPr>
+      <p:grpSpPr>
+        <a:xfrm>
+          <a:off x="0" y="0"/>
+          <a:ext cx="0" cy="0"/>
+          <a:chOff x="0" y="0"/>
+          <a:chExt cx="0" cy="0"/>
+        </a:xfrm>
+      </p:grpSpPr>
+      <p:sp>
+        <p:nvSpPr>
+          <p:cNvPr id="4" name="Rechteck 3">
+            <a:extLst>
+              <a:ext uri="{FF2B5EF4-FFF2-40B4-BE49-F238E27FC236}">
+                <a16:creationId xmlns:a16="http://schemas.microsoft.com/office/drawing/2014/main" id="{EC26DCF5-6F09-ACCD-47C5-0B0C2894F5CD}"/>
+              </a:ext>
+            </a:extLst>
+          </p:cNvPr>
+          <p:cNvSpPr/>
+          <p:nvPr/>
+        </p:nvSpPr>
+        <p:spPr>
+          <a:xfrm>
+            <a:off x="1096035" y="867427"/>
+            <a:ext cx="895612" cy="1803748"/>
+          </a:xfrm>
+          <a:prstGeom prst="rect">
+            <a:avLst/>
+          </a:prstGeom>
+          <a:noFill/>
+          <a:ln w="15875" cap="rnd">
+            <a:solidFill>
+              <a:schemeClr val="tx1"/>
+            </a:solidFill>
+            <a:round/>
+          </a:ln>
+        </p:spPr>
+        <p:style>
+          <a:lnRef idx="2">
+            <a:schemeClr val="accent1">
+              <a:shade val="15000"/>
+            </a:schemeClr>
+          </a:lnRef>
+          <a:fillRef idx="1">
+            <a:schemeClr val="accent1"/>
+          </a:fillRef>
+          <a:effectRef idx="0">
+            <a:schemeClr val="accent1"/>
+          </a:effectRef>
+          <a:fontRef idx="minor">
+            <a:schemeClr val="lt1"/>
+          </a:fontRef>
+        </p:style>
+        <p:txBody>
+          <a:bodyPr rtlCol="0" anchor="ctr"/>
+          <a:lstStyle/>
+          <a:p>
+            <a:pPr algn="ctr"/>
+            <a:endParaRPr lang="de-DE"/>
+          </a:p>
+        </p:txBody>
+      </p:sp>
+      <p:sp>
+        <p:nvSpPr>
+          <p:cNvPr id="5" name="Rechteck 4">
+            <a:extLst>
+              <a:ext uri="{FF2B5EF4-FFF2-40B4-BE49-F238E27FC236}">
+                <a16:creationId xmlns:a16="http://schemas.microsoft.com/office/drawing/2014/main" id="{2CCAFFB4-D097-C21D-ABAF-5956BBC8DFF7}"/>
+              </a:ext>
+            </a:extLst>
+          </p:cNvPr>
+          <p:cNvSpPr/>
+          <p:nvPr/>
+        </p:nvSpPr>
+        <p:spPr>
+          <a:xfrm>
+            <a:off x="1991647" y="1778695"/>
+            <a:ext cx="735903" cy="892479"/>
+          </a:xfrm>
+          <a:prstGeom prst="rect">
+            <a:avLst/>
+          </a:prstGeom>
+          <a:noFill/>
+          <a:ln w="15875" cap="rnd">
+            <a:solidFill>
+              <a:schemeClr val="tx1"/>
+            </a:solidFill>
+            <a:round/>
+          </a:ln>
+        </p:spPr>
+        <p:style>
+          <a:lnRef idx="2">
+            <a:schemeClr val="accent1">
+              <a:shade val="15000"/>
+            </a:schemeClr>
+          </a:lnRef>
+          <a:fillRef idx="1">
+            <a:schemeClr val="accent1"/>
+          </a:fillRef>
+          <a:effectRef idx="0">
+            <a:schemeClr val="accent1"/>
+          </a:effectRef>
+          <a:fontRef idx="minor">
+            <a:schemeClr val="lt1"/>
+          </a:fontRef>
+        </p:style>
+        <p:txBody>
+          <a:bodyPr rtlCol="0" anchor="ctr"/>
+          <a:lstStyle/>
+          <a:p>
+            <a:pPr algn="ctr"/>
+            <a:endParaRPr lang="de-DE"/>
+          </a:p>
+        </p:txBody>
+      </p:sp>
+      <p:sp>
+        <p:nvSpPr>
+          <p:cNvPr id="6" name="Ellipse 5">
+            <a:extLst>
+              <a:ext uri="{FF2B5EF4-FFF2-40B4-BE49-F238E27FC236}">
+                <a16:creationId xmlns:a16="http://schemas.microsoft.com/office/drawing/2014/main" id="{215007E6-3C24-9B92-99FF-A3E333D07E24}"/>
+              </a:ext>
+            </a:extLst>
+          </p:cNvPr>
+          <p:cNvSpPr/>
+          <p:nvPr/>
+        </p:nvSpPr>
+        <p:spPr>
+          <a:xfrm>
+            <a:off x="1951133" y="1738180"/>
+            <a:ext cx="81028" cy="81028"/>
+          </a:xfrm>
+          <a:prstGeom prst="ellipse">
+            <a:avLst/>
+          </a:prstGeom>
+          <a:solidFill>
+            <a:schemeClr val="tx1"/>
+          </a:solidFill>
+          <a:ln>
+            <a:noFill/>
+          </a:ln>
+        </p:spPr>
+        <p:style>
+          <a:lnRef idx="2">
+            <a:schemeClr val="accent1">
+              <a:shade val="15000"/>
+            </a:schemeClr>
+          </a:lnRef>
+          <a:fillRef idx="1">
+            <a:schemeClr val="accent1"/>
+          </a:fillRef>
+          <a:effectRef idx="0">
+            <a:schemeClr val="accent1"/>
+          </a:effectRef>
+          <a:fontRef idx="minor">
+            <a:schemeClr val="lt1"/>
+          </a:fontRef>
+        </p:style>
+        <p:txBody>
+          <a:bodyPr rtlCol="0" anchor="ctr"/>
+          <a:lstStyle/>
+          <a:p>
+            <a:pPr algn="ctr"/>
+            <a:endParaRPr lang="de-DE">
+              <a:solidFill>
+                <a:sysClr val="windowText" lastClr="000000"/>
+              </a:solidFill>
+            </a:endParaRPr>
+          </a:p>
+        </p:txBody>
+      </p:sp>
+      <p:sp>
+        <p:nvSpPr>
+          <p:cNvPr id="7" name="Ellipse 6">
+            <a:extLst>
+              <a:ext uri="{FF2B5EF4-FFF2-40B4-BE49-F238E27FC236}">
+                <a16:creationId xmlns:a16="http://schemas.microsoft.com/office/drawing/2014/main" id="{BE9FE3FC-7002-70D2-BBBB-DED824DA0E89}"/>
+              </a:ext>
+            </a:extLst>
+          </p:cNvPr>
+          <p:cNvSpPr/>
+          <p:nvPr/>
+        </p:nvSpPr>
+        <p:spPr>
+          <a:xfrm>
+            <a:off x="1951133" y="2630661"/>
+            <a:ext cx="81028" cy="81028"/>
+          </a:xfrm>
+          <a:prstGeom prst="ellipse">
+            <a:avLst/>
+          </a:prstGeom>
+          <a:solidFill>
+            <a:schemeClr val="tx1"/>
+          </a:solidFill>
+          <a:ln>
+            <a:noFill/>
+          </a:ln>
+        </p:spPr>
+        <p:style>
+          <a:lnRef idx="2">
+            <a:schemeClr val="accent1">
+              <a:shade val="15000"/>
+            </a:schemeClr>
+          </a:lnRef>
+          <a:fillRef idx="1">
+            <a:schemeClr val="accent1"/>
+          </a:fillRef>
+          <a:effectRef idx="0">
+            <a:schemeClr val="accent1"/>
+          </a:effectRef>
+          <a:fontRef idx="minor">
+            <a:schemeClr val="lt1"/>
+          </a:fontRef>
+        </p:style>
+        <p:txBody>
+          <a:bodyPr rtlCol="0" anchor="ctr"/>
+          <a:lstStyle/>
+          <a:p>
+            <a:pPr algn="ctr"/>
+            <a:endParaRPr lang="de-DE">
+              <a:solidFill>
+                <a:sysClr val="windowText" lastClr="000000"/>
+              </a:solidFill>
+            </a:endParaRPr>
+          </a:p>
+        </p:txBody>
+      </p:sp>
+      <p:sp>
+        <p:nvSpPr>
+          <p:cNvPr id="10" name="Rechteck 9">
+            <a:extLst>
+              <a:ext uri="{FF2B5EF4-FFF2-40B4-BE49-F238E27FC236}">
+                <a16:creationId xmlns:a16="http://schemas.microsoft.com/office/drawing/2014/main" id="{28602033-4A6D-A3FA-4390-73F7E19C3E5B}"/>
+              </a:ext>
+            </a:extLst>
+          </p:cNvPr>
+          <p:cNvSpPr/>
+          <p:nvPr/>
+        </p:nvSpPr>
+        <p:spPr>
+          <a:xfrm rot="16200000">
+            <a:off x="1824007" y="1243749"/>
+            <a:ext cx="335280" cy="118110"/>
+          </a:xfrm>
+          <a:prstGeom prst="rect">
+            <a:avLst/>
+          </a:prstGeom>
+          <a:solidFill>
+            <a:schemeClr val="bg1"/>
+          </a:solidFill>
+          <a:ln w="15875" cap="rnd">
+            <a:solidFill>
+              <a:schemeClr val="tx1"/>
+            </a:solidFill>
+            <a:round/>
+          </a:ln>
+        </p:spPr>
+        <p:style>
+          <a:lnRef idx="2">
+            <a:schemeClr val="accent1">
+              <a:shade val="15000"/>
+            </a:schemeClr>
+          </a:lnRef>
+          <a:fillRef idx="1">
+            <a:schemeClr val="accent1"/>
+          </a:fillRef>
+          <a:effectRef idx="0">
+            <a:schemeClr val="accent1"/>
+          </a:effectRef>
+          <a:fontRef idx="minor">
+            <a:schemeClr val="lt1"/>
+          </a:fontRef>
+        </p:style>
+        <p:txBody>
+          <a:bodyPr rtlCol="0" anchor="ctr"/>
+          <a:lstStyle/>
+          <a:p>
+            <a:pPr algn="ctr"/>
+            <a:endParaRPr lang="de-DE"/>
+          </a:p>
+        </p:txBody>
+      </p:sp>
+      <p:sp>
+        <p:nvSpPr>
+          <p:cNvPr id="11" name="Rechteck 10">
+            <a:extLst>
+              <a:ext uri="{FF2B5EF4-FFF2-40B4-BE49-F238E27FC236}">
+                <a16:creationId xmlns:a16="http://schemas.microsoft.com/office/drawing/2014/main" id="{33887E9A-A9B3-E710-8EB2-39D739F725DC}"/>
+              </a:ext>
+            </a:extLst>
+          </p:cNvPr>
+          <p:cNvSpPr/>
+          <p:nvPr/>
+        </p:nvSpPr>
+        <p:spPr>
+          <a:xfrm rot="16200000">
+            <a:off x="1824007" y="2165879"/>
+            <a:ext cx="335280" cy="118110"/>
+          </a:xfrm>
+          <a:prstGeom prst="rect">
+            <a:avLst/>
+          </a:prstGeom>
+          <a:solidFill>
+            <a:schemeClr val="bg1"/>
+          </a:solidFill>
+          <a:ln w="15875" cap="rnd">
+            <a:solidFill>
+              <a:schemeClr val="tx1"/>
+            </a:solidFill>
+            <a:round/>
+          </a:ln>
+        </p:spPr>
+        <p:style>
+          <a:lnRef idx="2">
+            <a:schemeClr val="accent1">
+              <a:shade val="15000"/>
+            </a:schemeClr>
+          </a:lnRef>
+          <a:fillRef idx="1">
+            <a:schemeClr val="accent1"/>
+          </a:fillRef>
+          <a:effectRef idx="0">
+            <a:schemeClr val="accent1"/>
+          </a:effectRef>
+          <a:fontRef idx="minor">
+            <a:schemeClr val="lt1"/>
+          </a:fontRef>
+        </p:style>
+        <p:txBody>
+          <a:bodyPr rtlCol="0" anchor="ctr"/>
+          <a:lstStyle/>
+          <a:p>
+            <a:pPr algn="ctr"/>
+            <a:endParaRPr lang="de-DE"/>
+          </a:p>
+        </p:txBody>
+      </p:sp>
+      <p:sp>
+        <p:nvSpPr>
+          <p:cNvPr id="12" name="Rechteck 11">
+            <a:extLst>
+              <a:ext uri="{FF2B5EF4-FFF2-40B4-BE49-F238E27FC236}">
+                <a16:creationId xmlns:a16="http://schemas.microsoft.com/office/drawing/2014/main" id="{799670D9-3C38-8A83-D639-16F028C0782C}"/>
+              </a:ext>
+            </a:extLst>
+          </p:cNvPr>
+          <p:cNvSpPr/>
+          <p:nvPr/>
+        </p:nvSpPr>
+        <p:spPr>
+          <a:xfrm rot="16200000">
+            <a:off x="2112555" y="2036733"/>
+            <a:ext cx="968008" cy="370899"/>
+          </a:xfrm>
+          <a:prstGeom prst="rect">
+            <a:avLst/>
+          </a:prstGeom>
+          <a:solidFill>
+            <a:schemeClr val="bg1"/>
+          </a:solidFill>
+          <a:ln w="15875" cap="rnd">
+            <a:noFill/>
+            <a:round/>
+          </a:ln>
+        </p:spPr>
+        <p:style>
+          <a:lnRef idx="2">
+            <a:schemeClr val="accent1">
+              <a:shade val="15000"/>
+            </a:schemeClr>
+          </a:lnRef>
+          <a:fillRef idx="1">
+            <a:schemeClr val="accent1"/>
+          </a:fillRef>
+          <a:effectRef idx="0">
+            <a:schemeClr val="accent1"/>
+          </a:effectRef>
+          <a:fontRef idx="minor">
+            <a:schemeClr val="lt1"/>
+          </a:fontRef>
+        </p:style>
+        <p:txBody>
+          <a:bodyPr rtlCol="0" anchor="ctr"/>
+          <a:lstStyle/>
+          <a:p>
+            <a:pPr algn="ctr"/>
+            <a:endParaRPr lang="de-DE"/>
+          </a:p>
+        </p:txBody>
+      </p:sp>
+      <p:sp>
+        <p:nvSpPr>
+          <p:cNvPr id="13" name="Ellipse 12">
+            <a:extLst>
+              <a:ext uri="{FF2B5EF4-FFF2-40B4-BE49-F238E27FC236}">
+                <a16:creationId xmlns:a16="http://schemas.microsoft.com/office/drawing/2014/main" id="{E2D47FA6-0C95-47D8-CDCF-052FB93DACAA}"/>
+              </a:ext>
+            </a:extLst>
+          </p:cNvPr>
+          <p:cNvSpPr/>
+          <p:nvPr/>
+        </p:nvSpPr>
+        <p:spPr>
+          <a:xfrm>
+            <a:off x="981735" y="1664394"/>
+            <a:ext cx="228600" cy="228600"/>
+          </a:xfrm>
+          <a:prstGeom prst="ellipse">
+            <a:avLst/>
+          </a:prstGeom>
+          <a:noFill/>
+          <a:ln w="15875">
+            <a:solidFill>
+              <a:schemeClr val="tx1"/>
+            </a:solidFill>
+          </a:ln>
+        </p:spPr>
+        <p:style>
+          <a:lnRef idx="2">
+            <a:schemeClr val="accent1">
+              <a:shade val="15000"/>
+            </a:schemeClr>
+          </a:lnRef>
+          <a:fillRef idx="1">
+            <a:schemeClr val="accent1"/>
+          </a:fillRef>
+          <a:effectRef idx="0">
+            <a:schemeClr val="accent1"/>
+          </a:effectRef>
+          <a:fontRef idx="minor">
+            <a:schemeClr val="lt1"/>
+          </a:fontRef>
+        </p:style>
+        <p:txBody>
+          <a:bodyPr rtlCol="0" anchor="ctr"/>
+          <a:lstStyle/>
+          <a:p>
+            <a:pPr algn="ctr"/>
+            <a:endParaRPr lang="de-DE"/>
+          </a:p>
+        </p:txBody>
+      </p:sp>
+      <p:cxnSp>
+        <p:nvCxnSpPr>
+          <p:cNvPr id="14" name="Gerade Verbindung mit Pfeil 13">
+            <a:extLst>
+              <a:ext uri="{FF2B5EF4-FFF2-40B4-BE49-F238E27FC236}">
+                <a16:creationId xmlns:a16="http://schemas.microsoft.com/office/drawing/2014/main" id="{5F243993-4FED-2C24-6D02-31E23C2B6DE4}"/>
+              </a:ext>
+            </a:extLst>
+          </p:cNvPr>
+          <p:cNvCxnSpPr>
+            <a:cxnSpLocks/>
+          </p:cNvCxnSpPr>
+          <p:nvPr/>
+        </p:nvCxnSpPr>
+        <p:spPr>
+          <a:xfrm>
+            <a:off x="1269390" y="1517800"/>
+            <a:ext cx="0" cy="565147"/>
+          </a:xfrm>
+          <a:prstGeom prst="straightConnector1">
+            <a:avLst/>
+          </a:prstGeom>
+          <a:ln cap="rnd">
+            <a:solidFill>
+              <a:srgbClr val="086FBD"/>
+            </a:solidFill>
+            <a:round/>
+            <a:tailEnd type="triangle"/>
+          </a:ln>
+        </p:spPr>
+        <p:style>
+          <a:lnRef idx="2">
+            <a:schemeClr val="accent1"/>
+          </a:lnRef>
+          <a:fillRef idx="0">
+            <a:schemeClr val="accent1"/>
+          </a:fillRef>
+          <a:effectRef idx="1">
+            <a:schemeClr val="accent1"/>
+          </a:effectRef>
+          <a:fontRef idx="minor">
+            <a:schemeClr val="tx1"/>
+          </a:fontRef>
+        </p:style>
+      </p:cxnSp>
+      <p:sp>
+        <p:nvSpPr>
+          <p:cNvPr id="15" name="Textfeld 14">
+            <a:extLst>
+              <a:ext uri="{FF2B5EF4-FFF2-40B4-BE49-F238E27FC236}">
+                <a16:creationId xmlns:a16="http://schemas.microsoft.com/office/drawing/2014/main" id="{2F861A83-F8C5-9CCC-75D3-A27446323ABA}"/>
+              </a:ext>
+            </a:extLst>
+          </p:cNvPr>
+          <p:cNvSpPr txBox="1"/>
+          <p:nvPr/>
+        </p:nvSpPr>
+        <p:spPr>
+          <a:xfrm>
+            <a:off x="1216363" y="1651059"/>
+            <a:ext cx="341666" cy="261610"/>
+          </a:xfrm>
+          <a:prstGeom prst="rect">
+            <a:avLst/>
+          </a:prstGeom>
+          <a:noFill/>
+        </p:spPr>
+        <p:txBody>
+          <a:bodyPr wrap="square" rtlCol="0">
+            <a:spAutoFit/>
+          </a:bodyPr>
+          <a:lstStyle/>
+          <a:p>
+            <a:r>
+              <a:rPr lang="de-DE" sz="1100" i="1" dirty="0" err="1">
+                <a:solidFill>
+                  <a:srgbClr val="086FBD"/>
+                </a:solidFill>
+                <a:latin typeface="CMU Serif" panose="02000603000000000000" pitchFamily="2" charset="0"/>
+                <a:ea typeface="CMU Serif" panose="02000603000000000000" pitchFamily="2" charset="0"/>
+                <a:cs typeface="CMU Serif" panose="02000603000000000000" pitchFamily="2" charset="0"/>
+              </a:rPr>
+              <a:t>U</a:t>
+            </a:r>
+            <a:r>
+              <a:rPr lang="de-DE" sz="1100" baseline="-25000" dirty="0" err="1">
+                <a:solidFill>
+                  <a:srgbClr val="086FBD"/>
+                </a:solidFill>
+                <a:latin typeface="CMU Serif" panose="02000603000000000000" pitchFamily="2" charset="0"/>
+                <a:ea typeface="CMU Serif" panose="02000603000000000000" pitchFamily="2" charset="0"/>
+                <a:cs typeface="CMU Serif" panose="02000603000000000000" pitchFamily="2" charset="0"/>
+              </a:rPr>
+              <a:t>q</a:t>
+            </a:r>
+            <a:endParaRPr lang="de-DE" sz="1100" baseline="-25000" dirty="0">
+              <a:solidFill>
+                <a:srgbClr val="086FBD"/>
+              </a:solidFill>
+              <a:latin typeface="CMU Serif" panose="02000603000000000000" pitchFamily="2" charset="0"/>
+              <a:ea typeface="CMU Serif" panose="02000603000000000000" pitchFamily="2" charset="0"/>
+              <a:cs typeface="CMU Serif" panose="02000603000000000000" pitchFamily="2" charset="0"/>
+            </a:endParaRPr>
+          </a:p>
+        </p:txBody>
+      </p:sp>
+      <p:cxnSp>
+        <p:nvCxnSpPr>
+          <p:cNvPr id="16" name="Gerade Verbindung mit Pfeil 15">
+            <a:extLst>
+              <a:ext uri="{FF2B5EF4-FFF2-40B4-BE49-F238E27FC236}">
+                <a16:creationId xmlns:a16="http://schemas.microsoft.com/office/drawing/2014/main" id="{3BE8BC9B-2E5A-88D1-D072-90BCED54D6A0}"/>
+              </a:ext>
+            </a:extLst>
+          </p:cNvPr>
+          <p:cNvCxnSpPr/>
+          <p:nvPr/>
+        </p:nvCxnSpPr>
+        <p:spPr>
+          <a:xfrm>
+            <a:off x="1474029" y="867427"/>
+            <a:ext cx="167999" cy="0"/>
+          </a:xfrm>
+          <a:prstGeom prst="straightConnector1">
+            <a:avLst/>
+          </a:prstGeom>
+          <a:ln cap="rnd">
+            <a:solidFill>
+              <a:srgbClr val="FF0000"/>
+            </a:solidFill>
+            <a:round/>
+            <a:tailEnd type="triangle"/>
+          </a:ln>
+        </p:spPr>
+        <p:style>
+          <a:lnRef idx="2">
+            <a:schemeClr val="accent1"/>
+          </a:lnRef>
+          <a:fillRef idx="0">
+            <a:schemeClr val="accent1"/>
+          </a:fillRef>
+          <a:effectRef idx="1">
+            <a:schemeClr val="accent1"/>
+          </a:effectRef>
+          <a:fontRef idx="minor">
+            <a:schemeClr val="tx1"/>
+          </a:fontRef>
+        </p:style>
+      </p:cxnSp>
+      <p:sp>
+        <p:nvSpPr>
+          <p:cNvPr id="17" name="Textfeld 16">
+            <a:extLst>
+              <a:ext uri="{FF2B5EF4-FFF2-40B4-BE49-F238E27FC236}">
+                <a16:creationId xmlns:a16="http://schemas.microsoft.com/office/drawing/2014/main" id="{10A75A5E-6306-CF12-9D41-ECCBA9C22C9B}"/>
+              </a:ext>
+            </a:extLst>
+          </p:cNvPr>
+          <p:cNvSpPr txBox="1"/>
+          <p:nvPr/>
+        </p:nvSpPr>
+        <p:spPr>
+          <a:xfrm>
+            <a:off x="1409824" y="892553"/>
+            <a:ext cx="296407" cy="261610"/>
+          </a:xfrm>
+          <a:prstGeom prst="rect">
+            <a:avLst/>
+          </a:prstGeom>
+          <a:noFill/>
+        </p:spPr>
+        <p:txBody>
+          <a:bodyPr wrap="square" rtlCol="0">
+            <a:spAutoFit/>
+          </a:bodyPr>
+          <a:lstStyle/>
+          <a:p>
+            <a:r>
+              <a:rPr lang="de-DE" sz="1100" i="1" dirty="0">
+                <a:solidFill>
+                  <a:srgbClr val="FF0000"/>
+                </a:solidFill>
+                <a:latin typeface="CMU Serif" panose="02000603000000000000" pitchFamily="2" charset="0"/>
+                <a:ea typeface="CMU Serif" panose="02000603000000000000" pitchFamily="2" charset="0"/>
+                <a:cs typeface="CMU Serif" panose="02000603000000000000" pitchFamily="2" charset="0"/>
+              </a:rPr>
+              <a:t>I</a:t>
+            </a:r>
+            <a:endParaRPr lang="de-DE" sz="1100" baseline="-25000" dirty="0">
+              <a:solidFill>
+                <a:srgbClr val="FF0000"/>
+              </a:solidFill>
+              <a:latin typeface="CMU Serif" panose="02000603000000000000" pitchFamily="2" charset="0"/>
+              <a:ea typeface="CMU Serif" panose="02000603000000000000" pitchFamily="2" charset="0"/>
+              <a:cs typeface="CMU Serif" panose="02000603000000000000" pitchFamily="2" charset="0"/>
+            </a:endParaRPr>
+          </a:p>
+        </p:txBody>
+      </p:sp>
+      <p:sp>
+        <p:nvSpPr>
+          <p:cNvPr id="20" name="Textfeld 19">
+            <a:extLst>
+              <a:ext uri="{FF2B5EF4-FFF2-40B4-BE49-F238E27FC236}">
+                <a16:creationId xmlns:a16="http://schemas.microsoft.com/office/drawing/2014/main" id="{248A2ACD-F1EA-5E7F-4AED-095EEF08B587}"/>
+              </a:ext>
+            </a:extLst>
+          </p:cNvPr>
+          <p:cNvSpPr txBox="1"/>
+          <p:nvPr/>
+        </p:nvSpPr>
+        <p:spPr>
+          <a:xfrm>
+            <a:off x="1633338" y="1177483"/>
+            <a:ext cx="341666" cy="261610"/>
+          </a:xfrm>
+          <a:prstGeom prst="rect">
+            <a:avLst/>
+          </a:prstGeom>
+          <a:noFill/>
+        </p:spPr>
+        <p:txBody>
+          <a:bodyPr wrap="square" rtlCol="0">
+            <a:spAutoFit/>
+          </a:bodyPr>
+          <a:lstStyle/>
+          <a:p>
+            <a:pPr algn="ctr"/>
+            <a:r>
+              <a:rPr lang="de-DE" sz="1100" i="1" dirty="0">
+                <a:latin typeface="CMU Serif" panose="02000603000000000000" pitchFamily="2" charset="0"/>
+                <a:ea typeface="CMU Serif" panose="02000603000000000000" pitchFamily="2" charset="0"/>
+                <a:cs typeface="CMU Serif" panose="02000603000000000000" pitchFamily="2" charset="0"/>
+              </a:rPr>
+              <a:t>R</a:t>
+            </a:r>
+            <a:r>
+              <a:rPr lang="de-DE" sz="1100" baseline="-25000" dirty="0">
+                <a:latin typeface="CMU Serif" panose="02000603000000000000" pitchFamily="2" charset="0"/>
+                <a:ea typeface="CMU Serif" panose="02000603000000000000" pitchFamily="2" charset="0"/>
+                <a:cs typeface="CMU Serif" panose="02000603000000000000" pitchFamily="2" charset="0"/>
+              </a:rPr>
+              <a:t>i</a:t>
+            </a:r>
+          </a:p>
+        </p:txBody>
+      </p:sp>
+      <p:cxnSp>
+        <p:nvCxnSpPr>
+          <p:cNvPr id="23" name="Gerade Verbindung mit Pfeil 22">
+            <a:extLst>
+              <a:ext uri="{FF2B5EF4-FFF2-40B4-BE49-F238E27FC236}">
+                <a16:creationId xmlns:a16="http://schemas.microsoft.com/office/drawing/2014/main" id="{70F39339-76E0-F373-7E0E-ADD9A72AD9CE}"/>
+              </a:ext>
+            </a:extLst>
+          </p:cNvPr>
+          <p:cNvCxnSpPr>
+            <a:cxnSpLocks/>
+          </p:cNvCxnSpPr>
+          <p:nvPr/>
+        </p:nvCxnSpPr>
+        <p:spPr>
+          <a:xfrm>
+            <a:off x="1992149" y="1859589"/>
+            <a:ext cx="0" cy="157855"/>
+          </a:xfrm>
+          <a:prstGeom prst="straightConnector1">
+            <a:avLst/>
+          </a:prstGeom>
+          <a:ln cap="rnd">
+            <a:solidFill>
+              <a:srgbClr val="FF0000"/>
+            </a:solidFill>
+            <a:round/>
+            <a:tailEnd type="triangle"/>
+          </a:ln>
+        </p:spPr>
+        <p:style>
+          <a:lnRef idx="2">
+            <a:schemeClr val="accent1"/>
+          </a:lnRef>
+          <a:fillRef idx="0">
+            <a:schemeClr val="accent1"/>
+          </a:fillRef>
+          <a:effectRef idx="1">
+            <a:schemeClr val="accent1"/>
+          </a:effectRef>
+          <a:fontRef idx="minor">
+            <a:schemeClr val="tx1"/>
+          </a:fontRef>
+        </p:style>
+      </p:cxnSp>
+      <p:sp>
+        <p:nvSpPr>
+          <p:cNvPr id="24" name="Textfeld 23">
+            <a:extLst>
+              <a:ext uri="{FF2B5EF4-FFF2-40B4-BE49-F238E27FC236}">
+                <a16:creationId xmlns:a16="http://schemas.microsoft.com/office/drawing/2014/main" id="{0F1CE6E0-30F2-2FAC-2885-3803B8C3A3DB}"/>
+              </a:ext>
+            </a:extLst>
+          </p:cNvPr>
+          <p:cNvSpPr txBox="1"/>
+          <p:nvPr/>
+        </p:nvSpPr>
+        <p:spPr>
+          <a:xfrm>
+            <a:off x="1694989" y="1795683"/>
+            <a:ext cx="296407" cy="261610"/>
+          </a:xfrm>
+          <a:prstGeom prst="rect">
+            <a:avLst/>
+          </a:prstGeom>
+          <a:noFill/>
+        </p:spPr>
+        <p:txBody>
+          <a:bodyPr wrap="square" rtlCol="0">
+            <a:spAutoFit/>
+          </a:bodyPr>
+          <a:lstStyle/>
+          <a:p>
+            <a:r>
+              <a:rPr lang="de-DE" sz="1100" i="1" dirty="0">
+                <a:solidFill>
+                  <a:srgbClr val="FF0000"/>
+                </a:solidFill>
+                <a:latin typeface="CMU Serif" panose="02000603000000000000" pitchFamily="2" charset="0"/>
+                <a:ea typeface="CMU Serif" panose="02000603000000000000" pitchFamily="2" charset="0"/>
+                <a:cs typeface="CMU Serif" panose="02000603000000000000" pitchFamily="2" charset="0"/>
+              </a:rPr>
+              <a:t>I</a:t>
+            </a:r>
+            <a:r>
+              <a:rPr lang="de-DE" sz="1100" baseline="-25000" dirty="0">
+                <a:solidFill>
+                  <a:srgbClr val="FF0000"/>
+                </a:solidFill>
+                <a:latin typeface="CMU Serif" panose="02000603000000000000" pitchFamily="2" charset="0"/>
+                <a:ea typeface="CMU Serif" panose="02000603000000000000" pitchFamily="2" charset="0"/>
+                <a:cs typeface="CMU Serif" panose="02000603000000000000" pitchFamily="2" charset="0"/>
+              </a:rPr>
+              <a:t>1</a:t>
+            </a:r>
+          </a:p>
+        </p:txBody>
+      </p:sp>
+      <p:sp>
+        <p:nvSpPr>
+          <p:cNvPr id="26" name="Textfeld 25">
+            <a:extLst>
+              <a:ext uri="{FF2B5EF4-FFF2-40B4-BE49-F238E27FC236}">
+                <a16:creationId xmlns:a16="http://schemas.microsoft.com/office/drawing/2014/main" id="{A2160195-DDB8-6ECF-0B2A-EDC98E802C09}"/>
+              </a:ext>
+            </a:extLst>
+          </p:cNvPr>
+          <p:cNvSpPr txBox="1"/>
+          <p:nvPr/>
+        </p:nvSpPr>
+        <p:spPr>
+          <a:xfrm>
+            <a:off x="1633338" y="2094128"/>
+            <a:ext cx="341666" cy="261610"/>
+          </a:xfrm>
+          <a:prstGeom prst="rect">
+            <a:avLst/>
+          </a:prstGeom>
+          <a:noFill/>
+        </p:spPr>
+        <p:txBody>
+          <a:bodyPr wrap="square" rtlCol="0">
+            <a:spAutoFit/>
+          </a:bodyPr>
+          <a:lstStyle/>
+          <a:p>
+            <a:pPr algn="ctr"/>
+            <a:r>
+              <a:rPr lang="de-DE" sz="1100" i="1" dirty="0">
+                <a:latin typeface="CMU Serif" panose="02000603000000000000" pitchFamily="2" charset="0"/>
+                <a:ea typeface="CMU Serif" panose="02000603000000000000" pitchFamily="2" charset="0"/>
+                <a:cs typeface="CMU Serif" panose="02000603000000000000" pitchFamily="2" charset="0"/>
+              </a:rPr>
+              <a:t>R</a:t>
+            </a:r>
+            <a:r>
+              <a:rPr lang="de-DE" sz="1100" baseline="-25000" dirty="0">
+                <a:latin typeface="CMU Serif" panose="02000603000000000000" pitchFamily="2" charset="0"/>
+                <a:ea typeface="CMU Serif" panose="02000603000000000000" pitchFamily="2" charset="0"/>
+                <a:cs typeface="CMU Serif" panose="02000603000000000000" pitchFamily="2" charset="0"/>
+              </a:rPr>
+              <a:t>1</a:t>
+            </a:r>
+          </a:p>
+        </p:txBody>
+      </p:sp>
+      <p:sp>
+        <p:nvSpPr>
+          <p:cNvPr id="28" name="Textfeld 27">
+            <a:extLst>
+              <a:ext uri="{FF2B5EF4-FFF2-40B4-BE49-F238E27FC236}">
+                <a16:creationId xmlns:a16="http://schemas.microsoft.com/office/drawing/2014/main" id="{3C91E694-EBC2-1B3F-C1EB-08211EE00B50}"/>
+              </a:ext>
+            </a:extLst>
+          </p:cNvPr>
+          <p:cNvSpPr txBox="1"/>
+          <p:nvPr/>
+        </p:nvSpPr>
+        <p:spPr>
+          <a:xfrm>
+            <a:off x="2331554" y="1658229"/>
+            <a:ext cx="341666" cy="261610"/>
+          </a:xfrm>
+          <a:prstGeom prst="rect">
+            <a:avLst/>
+          </a:prstGeom>
+          <a:noFill/>
+        </p:spPr>
+        <p:txBody>
+          <a:bodyPr wrap="square" rtlCol="0">
+            <a:spAutoFit/>
+          </a:bodyPr>
+          <a:lstStyle/>
+          <a:p>
+            <a:pPr algn="ctr"/>
+            <a:r>
+              <a:rPr lang="de-DE" sz="1100" dirty="0">
+                <a:latin typeface="CMU Serif" panose="02000603000000000000" pitchFamily="2" charset="0"/>
+                <a:ea typeface="CMU Serif" panose="02000603000000000000" pitchFamily="2" charset="0"/>
+                <a:cs typeface="CMU Serif" panose="02000603000000000000" pitchFamily="2" charset="0"/>
+              </a:rPr>
+              <a:t>1</a:t>
+            </a:r>
+            <a:endParaRPr lang="de-DE" sz="1100" baseline="-25000" dirty="0">
+              <a:latin typeface="CMU Serif" panose="02000603000000000000" pitchFamily="2" charset="0"/>
+              <a:ea typeface="CMU Serif" panose="02000603000000000000" pitchFamily="2" charset="0"/>
+              <a:cs typeface="CMU Serif" panose="02000603000000000000" pitchFamily="2" charset="0"/>
+            </a:endParaRPr>
+          </a:p>
+        </p:txBody>
+      </p:sp>
+      <p:sp>
+        <p:nvSpPr>
+          <p:cNvPr id="29" name="Textfeld 28">
+            <a:extLst>
+              <a:ext uri="{FF2B5EF4-FFF2-40B4-BE49-F238E27FC236}">
+                <a16:creationId xmlns:a16="http://schemas.microsoft.com/office/drawing/2014/main" id="{1460DA54-2300-4766-5270-1A2CD5D53C55}"/>
+              </a:ext>
+            </a:extLst>
+          </p:cNvPr>
+          <p:cNvSpPr txBox="1"/>
+          <p:nvPr/>
+        </p:nvSpPr>
+        <p:spPr>
+          <a:xfrm>
+            <a:off x="2337269" y="2550985"/>
+            <a:ext cx="341666" cy="261610"/>
+          </a:xfrm>
+          <a:prstGeom prst="rect">
+            <a:avLst/>
+          </a:prstGeom>
+          <a:noFill/>
+        </p:spPr>
+        <p:txBody>
+          <a:bodyPr wrap="square" rtlCol="0">
+            <a:spAutoFit/>
+          </a:bodyPr>
+          <a:lstStyle/>
+          <a:p>
+            <a:pPr algn="ctr"/>
+            <a:r>
+              <a:rPr lang="de-DE" sz="1100" dirty="0">
+                <a:latin typeface="CMU Serif" panose="02000603000000000000" pitchFamily="2" charset="0"/>
+                <a:ea typeface="CMU Serif" panose="02000603000000000000" pitchFamily="2" charset="0"/>
+                <a:cs typeface="CMU Serif" panose="02000603000000000000" pitchFamily="2" charset="0"/>
+              </a:rPr>
+              <a:t>2</a:t>
+            </a:r>
+            <a:endParaRPr lang="de-DE" sz="1100" baseline="-25000" dirty="0">
+              <a:latin typeface="CMU Serif" panose="02000603000000000000" pitchFamily="2" charset="0"/>
+              <a:ea typeface="CMU Serif" panose="02000603000000000000" pitchFamily="2" charset="0"/>
+              <a:cs typeface="CMU Serif" panose="02000603000000000000" pitchFamily="2" charset="0"/>
+            </a:endParaRPr>
+          </a:p>
+        </p:txBody>
+      </p:sp>
+      <p:sp>
+        <p:nvSpPr>
+          <p:cNvPr id="8" name="Ellipse 7">
+            <a:extLst>
+              <a:ext uri="{FF2B5EF4-FFF2-40B4-BE49-F238E27FC236}">
+                <a16:creationId xmlns:a16="http://schemas.microsoft.com/office/drawing/2014/main" id="{56FFA2C0-46D1-E466-D123-EF9B8F92B9A7}"/>
+              </a:ext>
+            </a:extLst>
+          </p:cNvPr>
+          <p:cNvSpPr/>
+          <p:nvPr/>
+        </p:nvSpPr>
+        <p:spPr>
+          <a:xfrm>
+            <a:off x="2341080" y="1743679"/>
+            <a:ext cx="70030" cy="70030"/>
+          </a:xfrm>
+          <a:prstGeom prst="ellipse">
+            <a:avLst/>
+          </a:prstGeom>
+          <a:solidFill>
+            <a:schemeClr val="bg1"/>
+          </a:solidFill>
+          <a:ln w="12700">
+            <a:solidFill>
+              <a:schemeClr val="tx1"/>
+            </a:solidFill>
+          </a:ln>
+        </p:spPr>
+        <p:style>
+          <a:lnRef idx="2">
+            <a:schemeClr val="accent1">
+              <a:shade val="15000"/>
+            </a:schemeClr>
+          </a:lnRef>
+          <a:fillRef idx="1">
+            <a:schemeClr val="accent1"/>
+          </a:fillRef>
+          <a:effectRef idx="0">
+            <a:schemeClr val="accent1"/>
+          </a:effectRef>
+          <a:fontRef idx="minor">
+            <a:schemeClr val="lt1"/>
+          </a:fontRef>
+        </p:style>
+        <p:txBody>
+          <a:bodyPr rtlCol="0" anchor="ctr"/>
+          <a:lstStyle/>
+          <a:p>
+            <a:pPr algn="ctr"/>
+            <a:endParaRPr lang="de-DE">
+              <a:solidFill>
+                <a:sysClr val="windowText" lastClr="000000"/>
+              </a:solidFill>
+            </a:endParaRPr>
+          </a:p>
+        </p:txBody>
+      </p:sp>
+      <p:sp>
+        <p:nvSpPr>
+          <p:cNvPr id="9" name="Ellipse 8">
+            <a:extLst>
+              <a:ext uri="{FF2B5EF4-FFF2-40B4-BE49-F238E27FC236}">
+                <a16:creationId xmlns:a16="http://schemas.microsoft.com/office/drawing/2014/main" id="{AA11FC0B-2738-EF53-D0C0-CAF8D6B82200}"/>
+              </a:ext>
+            </a:extLst>
+          </p:cNvPr>
+          <p:cNvSpPr/>
+          <p:nvPr/>
+        </p:nvSpPr>
+        <p:spPr>
+          <a:xfrm>
+            <a:off x="2341080" y="2636159"/>
+            <a:ext cx="70030" cy="70030"/>
+          </a:xfrm>
+          <a:prstGeom prst="ellipse">
+            <a:avLst/>
+          </a:prstGeom>
+          <a:solidFill>
+            <a:schemeClr val="bg1"/>
+          </a:solidFill>
+          <a:ln w="12700">
+            <a:solidFill>
+              <a:schemeClr val="tx1"/>
+            </a:solidFill>
+          </a:ln>
+        </p:spPr>
+        <p:style>
+          <a:lnRef idx="2">
+            <a:schemeClr val="accent1">
+              <a:shade val="15000"/>
+            </a:schemeClr>
+          </a:lnRef>
+          <a:fillRef idx="1">
+            <a:schemeClr val="accent1"/>
+          </a:fillRef>
+          <a:effectRef idx="0">
+            <a:schemeClr val="accent1"/>
+          </a:effectRef>
+          <a:fontRef idx="minor">
+            <a:schemeClr val="lt1"/>
+          </a:fontRef>
+        </p:style>
+        <p:txBody>
+          <a:bodyPr rtlCol="0" anchor="ctr"/>
+          <a:lstStyle/>
+          <a:p>
+            <a:pPr algn="ctr"/>
+            <a:endParaRPr lang="de-DE">
+              <a:solidFill>
+                <a:sysClr val="windowText" lastClr="000000"/>
+              </a:solidFill>
+            </a:endParaRPr>
+          </a:p>
+        </p:txBody>
+      </p:sp>
+      <p:cxnSp>
+        <p:nvCxnSpPr>
+          <p:cNvPr id="2" name="Gerade Verbindung mit Pfeil 1">
+            <a:extLst>
+              <a:ext uri="{FF2B5EF4-FFF2-40B4-BE49-F238E27FC236}">
+                <a16:creationId xmlns:a16="http://schemas.microsoft.com/office/drawing/2014/main" id="{5A215222-9CAB-DB87-BD22-413E4E657E3D}"/>
+              </a:ext>
+            </a:extLst>
+          </p:cNvPr>
+          <p:cNvCxnSpPr>
+            <a:cxnSpLocks/>
+          </p:cNvCxnSpPr>
+          <p:nvPr/>
+        </p:nvCxnSpPr>
+        <p:spPr>
+          <a:xfrm>
+            <a:off x="2376568" y="1859384"/>
+            <a:ext cx="0" cy="735226"/>
+          </a:xfrm>
+          <a:prstGeom prst="straightConnector1">
+            <a:avLst/>
+          </a:prstGeom>
+          <a:ln cap="rnd">
+            <a:solidFill>
+              <a:srgbClr val="086FBD"/>
+            </a:solidFill>
+            <a:round/>
+            <a:tailEnd type="triangle"/>
+          </a:ln>
+        </p:spPr>
+        <p:style>
+          <a:lnRef idx="2">
+            <a:schemeClr val="accent1"/>
+          </a:lnRef>
+          <a:fillRef idx="0">
+            <a:schemeClr val="accent1"/>
+          </a:fillRef>
+          <a:effectRef idx="1">
+            <a:schemeClr val="accent1"/>
+          </a:effectRef>
+          <a:fontRef idx="minor">
+            <a:schemeClr val="tx1"/>
+          </a:fontRef>
+        </p:style>
+      </p:cxnSp>
+      <p:sp>
+        <p:nvSpPr>
+          <p:cNvPr id="3" name="Textfeld 2">
+            <a:extLst>
+              <a:ext uri="{FF2B5EF4-FFF2-40B4-BE49-F238E27FC236}">
+                <a16:creationId xmlns:a16="http://schemas.microsoft.com/office/drawing/2014/main" id="{02ECAFED-1A1D-6661-7179-952083BDFF28}"/>
+              </a:ext>
+            </a:extLst>
+          </p:cNvPr>
+          <p:cNvSpPr txBox="1"/>
+          <p:nvPr/>
+        </p:nvSpPr>
+        <p:spPr>
+          <a:xfrm>
+            <a:off x="2331554" y="2082947"/>
+            <a:ext cx="441404" cy="261610"/>
+          </a:xfrm>
+          <a:prstGeom prst="rect">
+            <a:avLst/>
+          </a:prstGeom>
+          <a:noFill/>
+        </p:spPr>
+        <p:txBody>
+          <a:bodyPr wrap="square" rtlCol="0">
+            <a:spAutoFit/>
+          </a:bodyPr>
+          <a:lstStyle/>
+          <a:p>
+            <a:r>
+              <a:rPr lang="de-DE" sz="1100" i="1" dirty="0" err="1">
+                <a:solidFill>
+                  <a:srgbClr val="086FBD"/>
+                </a:solidFill>
+                <a:latin typeface="CMU Serif" panose="02000603000000000000" pitchFamily="2" charset="0"/>
+                <a:ea typeface="CMU Serif" panose="02000603000000000000" pitchFamily="2" charset="0"/>
+                <a:cs typeface="CMU Serif" panose="02000603000000000000" pitchFamily="2" charset="0"/>
+              </a:rPr>
+              <a:t>U</a:t>
+            </a:r>
+            <a:r>
+              <a:rPr lang="de-DE" sz="1100" baseline="-25000" dirty="0" err="1">
+                <a:solidFill>
+                  <a:srgbClr val="086FBD"/>
+                </a:solidFill>
+                <a:latin typeface="CMU Serif" panose="02000603000000000000" pitchFamily="2" charset="0"/>
+                <a:ea typeface="CMU Serif" panose="02000603000000000000" pitchFamily="2" charset="0"/>
+                <a:cs typeface="CMU Serif" panose="02000603000000000000" pitchFamily="2" charset="0"/>
+              </a:rPr>
+              <a:t>q</a:t>
+            </a:r>
+            <a:r>
+              <a:rPr lang="de-DE" sz="1100" dirty="0">
+                <a:solidFill>
+                  <a:srgbClr val="086FBD"/>
+                </a:solidFill>
+                <a:latin typeface="CMU Serif" panose="02000603000000000000" pitchFamily="2" charset="0"/>
+                <a:ea typeface="CMU Serif" panose="02000603000000000000" pitchFamily="2" charset="0"/>
+                <a:cs typeface="CMU Serif" panose="02000603000000000000" pitchFamily="2" charset="0"/>
+              </a:rPr>
+              <a:t>′</a:t>
+            </a:r>
+          </a:p>
+        </p:txBody>
+      </p:sp>
+    </p:spTree>
+    <p:extLst>
+      <p:ext uri="{BB962C8B-B14F-4D97-AF65-F5344CB8AC3E}">
+        <p14:creationId xmlns:p14="http://schemas.microsoft.com/office/powerpoint/2010/main" val="866456762"/>
+      </p:ext>
+    </p:extLst>
+  </p:cSld>
+  <p:clrMapOvr>
+    <a:masterClrMapping/>
+  </p:clrMapOvr>
+</p:sld>
+</file>
+
+<file path=ppt/slides/slide5.xml><?xml version="1.0" encoding="utf-8"?>
+<p:sld xmlns:a="http://schemas.openxmlformats.org/drawingml/2006/main" xmlns:r="http://schemas.openxmlformats.org/officeDocument/2006/relationships" xmlns:p="http://schemas.openxmlformats.org/presentationml/2006/main">
+  <p:cSld>
+    <p:spTree>
+      <p:nvGrpSpPr>
+        <p:cNvPr id="1" name="">
+          <a:extLst>
+            <a:ext uri="{FF2B5EF4-FFF2-40B4-BE49-F238E27FC236}">
+              <a16:creationId xmlns:a16="http://schemas.microsoft.com/office/drawing/2014/main" id="{95E5EDE7-E3FE-84E4-319D-31CDE830858A}"/>
+            </a:ext>
+          </a:extLst>
+        </p:cNvPr>
+        <p:cNvGrpSpPr/>
+        <p:nvPr/>
+      </p:nvGrpSpPr>
+      <p:grpSpPr>
+        <a:xfrm>
+          <a:off x="0" y="0"/>
+          <a:ext cx="0" cy="0"/>
+          <a:chOff x="0" y="0"/>
+          <a:chExt cx="0" cy="0"/>
+        </a:xfrm>
+      </p:grpSpPr>
+      <p:sp>
+        <p:nvSpPr>
+          <p:cNvPr id="4" name="Rechteck 3">
+            <a:extLst>
+              <a:ext uri="{FF2B5EF4-FFF2-40B4-BE49-F238E27FC236}">
+                <a16:creationId xmlns:a16="http://schemas.microsoft.com/office/drawing/2014/main" id="{FC8C22B4-8526-CB29-88CD-051EB7508B1B}"/>
+              </a:ext>
+            </a:extLst>
+          </p:cNvPr>
+          <p:cNvSpPr/>
+          <p:nvPr/>
+        </p:nvSpPr>
+        <p:spPr>
+          <a:xfrm>
+            <a:off x="1096035" y="867427"/>
+            <a:ext cx="895612" cy="1803748"/>
+          </a:xfrm>
+          <a:prstGeom prst="rect">
+            <a:avLst/>
+          </a:prstGeom>
+          <a:noFill/>
+          <a:ln w="15875" cap="rnd">
+            <a:solidFill>
+              <a:schemeClr val="tx1"/>
+            </a:solidFill>
+            <a:round/>
+          </a:ln>
+        </p:spPr>
+        <p:style>
+          <a:lnRef idx="2">
+            <a:schemeClr val="accent1">
+              <a:shade val="15000"/>
+            </a:schemeClr>
+          </a:lnRef>
+          <a:fillRef idx="1">
+            <a:schemeClr val="accent1"/>
+          </a:fillRef>
+          <a:effectRef idx="0">
+            <a:schemeClr val="accent1"/>
+          </a:effectRef>
+          <a:fontRef idx="minor">
+            <a:schemeClr val="lt1"/>
+          </a:fontRef>
+        </p:style>
+        <p:txBody>
+          <a:bodyPr rtlCol="0" anchor="ctr"/>
+          <a:lstStyle/>
+          <a:p>
+            <a:pPr algn="ctr"/>
+            <a:endParaRPr lang="de-DE"/>
+          </a:p>
+        </p:txBody>
+      </p:sp>
+      <p:sp>
+        <p:nvSpPr>
+          <p:cNvPr id="5" name="Rechteck 4">
+            <a:extLst>
+              <a:ext uri="{FF2B5EF4-FFF2-40B4-BE49-F238E27FC236}">
+                <a16:creationId xmlns:a16="http://schemas.microsoft.com/office/drawing/2014/main" id="{3FD89CC3-97A7-80CB-0DA3-68278E4FC0E3}"/>
+              </a:ext>
+            </a:extLst>
+          </p:cNvPr>
+          <p:cNvSpPr/>
+          <p:nvPr/>
+        </p:nvSpPr>
+        <p:spPr>
+          <a:xfrm>
+            <a:off x="1991648" y="1778695"/>
+            <a:ext cx="386136" cy="892479"/>
+          </a:xfrm>
+          <a:prstGeom prst="rect">
+            <a:avLst/>
+          </a:prstGeom>
+          <a:noFill/>
+          <a:ln w="15875" cap="rnd">
+            <a:solidFill>
+              <a:schemeClr val="tx1"/>
+            </a:solidFill>
+            <a:round/>
+          </a:ln>
+        </p:spPr>
+        <p:style>
+          <a:lnRef idx="2">
+            <a:schemeClr val="accent1">
+              <a:shade val="15000"/>
+            </a:schemeClr>
+          </a:lnRef>
+          <a:fillRef idx="1">
+            <a:schemeClr val="accent1"/>
+          </a:fillRef>
+          <a:effectRef idx="0">
+            <a:schemeClr val="accent1"/>
+          </a:effectRef>
+          <a:fontRef idx="minor">
+            <a:schemeClr val="lt1"/>
+          </a:fontRef>
+        </p:style>
+        <p:txBody>
+          <a:bodyPr rtlCol="0" anchor="ctr"/>
+          <a:lstStyle/>
+          <a:p>
+            <a:pPr algn="ctr"/>
+            <a:endParaRPr lang="de-DE"/>
+          </a:p>
+        </p:txBody>
+      </p:sp>
+      <p:sp>
+        <p:nvSpPr>
+          <p:cNvPr id="6" name="Ellipse 5">
+            <a:extLst>
+              <a:ext uri="{FF2B5EF4-FFF2-40B4-BE49-F238E27FC236}">
+                <a16:creationId xmlns:a16="http://schemas.microsoft.com/office/drawing/2014/main" id="{378204AC-684F-5034-6679-ABEC4ADFBF2C}"/>
+              </a:ext>
+            </a:extLst>
+          </p:cNvPr>
+          <p:cNvSpPr/>
+          <p:nvPr/>
+        </p:nvSpPr>
+        <p:spPr>
+          <a:xfrm>
+            <a:off x="1951133" y="1738180"/>
+            <a:ext cx="81028" cy="81028"/>
+          </a:xfrm>
+          <a:prstGeom prst="ellipse">
+            <a:avLst/>
+          </a:prstGeom>
+          <a:solidFill>
+            <a:schemeClr val="tx1"/>
+          </a:solidFill>
+          <a:ln>
+            <a:noFill/>
+          </a:ln>
+        </p:spPr>
+        <p:style>
+          <a:lnRef idx="2">
+            <a:schemeClr val="accent1">
+              <a:shade val="15000"/>
+            </a:schemeClr>
+          </a:lnRef>
+          <a:fillRef idx="1">
+            <a:schemeClr val="accent1"/>
+          </a:fillRef>
+          <a:effectRef idx="0">
+            <a:schemeClr val="accent1"/>
+          </a:effectRef>
+          <a:fontRef idx="minor">
+            <a:schemeClr val="lt1"/>
+          </a:fontRef>
+        </p:style>
+        <p:txBody>
+          <a:bodyPr rtlCol="0" anchor="ctr"/>
+          <a:lstStyle/>
+          <a:p>
+            <a:pPr algn="ctr"/>
+            <a:endParaRPr lang="de-DE">
+              <a:solidFill>
+                <a:sysClr val="windowText" lastClr="000000"/>
+              </a:solidFill>
+            </a:endParaRPr>
+          </a:p>
+        </p:txBody>
+      </p:sp>
+      <p:sp>
+        <p:nvSpPr>
+          <p:cNvPr id="7" name="Ellipse 6">
+            <a:extLst>
+              <a:ext uri="{FF2B5EF4-FFF2-40B4-BE49-F238E27FC236}">
+                <a16:creationId xmlns:a16="http://schemas.microsoft.com/office/drawing/2014/main" id="{3EE75F33-A70E-26DB-A5AC-B11C41FEC07A}"/>
+              </a:ext>
+            </a:extLst>
+          </p:cNvPr>
+          <p:cNvSpPr/>
+          <p:nvPr/>
+        </p:nvSpPr>
+        <p:spPr>
+          <a:xfrm>
+            <a:off x="1951133" y="2630661"/>
+            <a:ext cx="81028" cy="81028"/>
+          </a:xfrm>
+          <a:prstGeom prst="ellipse">
+            <a:avLst/>
+          </a:prstGeom>
+          <a:solidFill>
+            <a:schemeClr val="tx1"/>
+          </a:solidFill>
+          <a:ln>
+            <a:noFill/>
+          </a:ln>
+        </p:spPr>
+        <p:style>
+          <a:lnRef idx="2">
+            <a:schemeClr val="accent1">
+              <a:shade val="15000"/>
+            </a:schemeClr>
+          </a:lnRef>
+          <a:fillRef idx="1">
+            <a:schemeClr val="accent1"/>
+          </a:fillRef>
+          <a:effectRef idx="0">
+            <a:schemeClr val="accent1"/>
+          </a:effectRef>
+          <a:fontRef idx="minor">
+            <a:schemeClr val="lt1"/>
+          </a:fontRef>
+        </p:style>
+        <p:txBody>
+          <a:bodyPr rtlCol="0" anchor="ctr"/>
+          <a:lstStyle/>
+          <a:p>
+            <a:pPr algn="ctr"/>
+            <a:endParaRPr lang="de-DE">
+              <a:solidFill>
+                <a:sysClr val="windowText" lastClr="000000"/>
+              </a:solidFill>
+            </a:endParaRPr>
+          </a:p>
+        </p:txBody>
+      </p:sp>
+      <p:sp>
+        <p:nvSpPr>
+          <p:cNvPr id="10" name="Rechteck 9">
+            <a:extLst>
+              <a:ext uri="{FF2B5EF4-FFF2-40B4-BE49-F238E27FC236}">
+                <a16:creationId xmlns:a16="http://schemas.microsoft.com/office/drawing/2014/main" id="{F70FA5A3-5027-B1C0-3679-7F76C7CC9DDF}"/>
+              </a:ext>
+            </a:extLst>
+          </p:cNvPr>
+          <p:cNvSpPr/>
+          <p:nvPr/>
+        </p:nvSpPr>
+        <p:spPr>
+          <a:xfrm rot="16200000">
+            <a:off x="1824007" y="1243749"/>
+            <a:ext cx="335280" cy="118110"/>
+          </a:xfrm>
+          <a:prstGeom prst="rect">
+            <a:avLst/>
+          </a:prstGeom>
+          <a:solidFill>
+            <a:schemeClr val="bg1"/>
+          </a:solidFill>
+          <a:ln w="15875" cap="rnd">
+            <a:solidFill>
+              <a:schemeClr val="tx1"/>
+            </a:solidFill>
+            <a:round/>
+          </a:ln>
+        </p:spPr>
+        <p:style>
+          <a:lnRef idx="2">
+            <a:schemeClr val="accent1">
+              <a:shade val="15000"/>
+            </a:schemeClr>
+          </a:lnRef>
+          <a:fillRef idx="1">
+            <a:schemeClr val="accent1"/>
+          </a:fillRef>
+          <a:effectRef idx="0">
+            <a:schemeClr val="accent1"/>
+          </a:effectRef>
+          <a:fontRef idx="minor">
+            <a:schemeClr val="lt1"/>
+          </a:fontRef>
+        </p:style>
+        <p:txBody>
+          <a:bodyPr rtlCol="0" anchor="ctr"/>
+          <a:lstStyle/>
+          <a:p>
+            <a:pPr algn="ctr"/>
+            <a:endParaRPr lang="de-DE"/>
+          </a:p>
+        </p:txBody>
+      </p:sp>
+      <p:sp>
+        <p:nvSpPr>
+          <p:cNvPr id="11" name="Rechteck 10">
+            <a:extLst>
+              <a:ext uri="{FF2B5EF4-FFF2-40B4-BE49-F238E27FC236}">
+                <a16:creationId xmlns:a16="http://schemas.microsoft.com/office/drawing/2014/main" id="{F2CD5A6B-512D-FD37-3C41-D0E4C54CC797}"/>
+              </a:ext>
+            </a:extLst>
+          </p:cNvPr>
+          <p:cNvSpPr/>
+          <p:nvPr/>
+        </p:nvSpPr>
+        <p:spPr>
+          <a:xfrm rot="16200000">
+            <a:off x="1824007" y="2165879"/>
+            <a:ext cx="335280" cy="118110"/>
+          </a:xfrm>
+          <a:prstGeom prst="rect">
+            <a:avLst/>
+          </a:prstGeom>
+          <a:solidFill>
+            <a:schemeClr val="bg1"/>
+          </a:solidFill>
+          <a:ln w="15875" cap="rnd">
+            <a:solidFill>
+              <a:schemeClr val="tx1"/>
+            </a:solidFill>
+            <a:round/>
+          </a:ln>
+        </p:spPr>
+        <p:style>
+          <a:lnRef idx="2">
+            <a:schemeClr val="accent1">
+              <a:shade val="15000"/>
+            </a:schemeClr>
+          </a:lnRef>
+          <a:fillRef idx="1">
+            <a:schemeClr val="accent1"/>
+          </a:fillRef>
+          <a:effectRef idx="0">
+            <a:schemeClr val="accent1"/>
+          </a:effectRef>
+          <a:fontRef idx="minor">
+            <a:schemeClr val="lt1"/>
+          </a:fontRef>
+        </p:style>
+        <p:txBody>
+          <a:bodyPr rtlCol="0" anchor="ctr"/>
+          <a:lstStyle/>
+          <a:p>
+            <a:pPr algn="ctr"/>
+            <a:endParaRPr lang="de-DE"/>
+          </a:p>
+        </p:txBody>
+      </p:sp>
+      <p:sp>
+        <p:nvSpPr>
+          <p:cNvPr id="13" name="Ellipse 12">
+            <a:extLst>
+              <a:ext uri="{FF2B5EF4-FFF2-40B4-BE49-F238E27FC236}">
+                <a16:creationId xmlns:a16="http://schemas.microsoft.com/office/drawing/2014/main" id="{D7B4E630-7FAE-6F32-E538-DAD790677C58}"/>
+              </a:ext>
+            </a:extLst>
+          </p:cNvPr>
+          <p:cNvSpPr/>
+          <p:nvPr/>
+        </p:nvSpPr>
+        <p:spPr>
+          <a:xfrm>
+            <a:off x="981735" y="1664394"/>
+            <a:ext cx="228600" cy="228600"/>
+          </a:xfrm>
+          <a:prstGeom prst="ellipse">
+            <a:avLst/>
+          </a:prstGeom>
+          <a:noFill/>
+          <a:ln w="15875">
+            <a:solidFill>
+              <a:schemeClr val="tx1"/>
+            </a:solidFill>
+          </a:ln>
+        </p:spPr>
+        <p:style>
+          <a:lnRef idx="2">
+            <a:schemeClr val="accent1">
+              <a:shade val="15000"/>
+            </a:schemeClr>
+          </a:lnRef>
+          <a:fillRef idx="1">
+            <a:schemeClr val="accent1"/>
+          </a:fillRef>
+          <a:effectRef idx="0">
+            <a:schemeClr val="accent1"/>
+          </a:effectRef>
+          <a:fontRef idx="minor">
+            <a:schemeClr val="lt1"/>
+          </a:fontRef>
+        </p:style>
+        <p:txBody>
+          <a:bodyPr rtlCol="0" anchor="ctr"/>
+          <a:lstStyle/>
+          <a:p>
+            <a:pPr algn="ctr"/>
+            <a:endParaRPr lang="de-DE"/>
+          </a:p>
+        </p:txBody>
+      </p:sp>
+      <p:cxnSp>
+        <p:nvCxnSpPr>
+          <p:cNvPr id="14" name="Gerade Verbindung mit Pfeil 13">
+            <a:extLst>
+              <a:ext uri="{FF2B5EF4-FFF2-40B4-BE49-F238E27FC236}">
+                <a16:creationId xmlns:a16="http://schemas.microsoft.com/office/drawing/2014/main" id="{B3E8230A-15E9-5B6D-155E-38439D10BF5F}"/>
+              </a:ext>
+            </a:extLst>
+          </p:cNvPr>
+          <p:cNvCxnSpPr>
+            <a:cxnSpLocks/>
+          </p:cNvCxnSpPr>
+          <p:nvPr/>
+        </p:nvCxnSpPr>
+        <p:spPr>
+          <a:xfrm>
+            <a:off x="1269390" y="1517800"/>
+            <a:ext cx="0" cy="565147"/>
+          </a:xfrm>
+          <a:prstGeom prst="straightConnector1">
+            <a:avLst/>
+          </a:prstGeom>
+          <a:ln cap="rnd">
+            <a:solidFill>
+              <a:srgbClr val="086FBD"/>
+            </a:solidFill>
+            <a:round/>
+            <a:tailEnd type="triangle"/>
+          </a:ln>
+        </p:spPr>
+        <p:style>
+          <a:lnRef idx="2">
+            <a:schemeClr val="accent1"/>
+          </a:lnRef>
+          <a:fillRef idx="0">
+            <a:schemeClr val="accent1"/>
+          </a:fillRef>
+          <a:effectRef idx="1">
+            <a:schemeClr val="accent1"/>
+          </a:effectRef>
+          <a:fontRef idx="minor">
+            <a:schemeClr val="tx1"/>
+          </a:fontRef>
+        </p:style>
+      </p:cxnSp>
+      <p:sp>
+        <p:nvSpPr>
+          <p:cNvPr id="15" name="Textfeld 14">
+            <a:extLst>
+              <a:ext uri="{FF2B5EF4-FFF2-40B4-BE49-F238E27FC236}">
+                <a16:creationId xmlns:a16="http://schemas.microsoft.com/office/drawing/2014/main" id="{3D14D721-9D21-10AB-3B2A-9B05ADA13E4A}"/>
+              </a:ext>
+            </a:extLst>
+          </p:cNvPr>
+          <p:cNvSpPr txBox="1"/>
+          <p:nvPr/>
+        </p:nvSpPr>
+        <p:spPr>
+          <a:xfrm>
+            <a:off x="1216363" y="1651059"/>
+            <a:ext cx="341666" cy="261610"/>
+          </a:xfrm>
+          <a:prstGeom prst="rect">
+            <a:avLst/>
+          </a:prstGeom>
+          <a:noFill/>
+        </p:spPr>
+        <p:txBody>
+          <a:bodyPr wrap="square" rtlCol="0">
+            <a:spAutoFit/>
+          </a:bodyPr>
+          <a:lstStyle/>
+          <a:p>
+            <a:r>
+              <a:rPr lang="de-DE" sz="1100" i="1" dirty="0" err="1">
+                <a:solidFill>
+                  <a:srgbClr val="086FBD"/>
+                </a:solidFill>
+                <a:latin typeface="CMU Serif" panose="02000603000000000000" pitchFamily="2" charset="0"/>
+                <a:ea typeface="CMU Serif" panose="02000603000000000000" pitchFamily="2" charset="0"/>
+                <a:cs typeface="CMU Serif" panose="02000603000000000000" pitchFamily="2" charset="0"/>
+              </a:rPr>
+              <a:t>U</a:t>
+            </a:r>
+            <a:r>
+              <a:rPr lang="de-DE" sz="1100" baseline="-25000" dirty="0" err="1">
+                <a:solidFill>
+                  <a:srgbClr val="086FBD"/>
+                </a:solidFill>
+                <a:latin typeface="CMU Serif" panose="02000603000000000000" pitchFamily="2" charset="0"/>
+                <a:ea typeface="CMU Serif" panose="02000603000000000000" pitchFamily="2" charset="0"/>
+                <a:cs typeface="CMU Serif" panose="02000603000000000000" pitchFamily="2" charset="0"/>
+              </a:rPr>
+              <a:t>q</a:t>
+            </a:r>
+            <a:endParaRPr lang="de-DE" sz="1100" baseline="-25000" dirty="0">
+              <a:solidFill>
+                <a:srgbClr val="086FBD"/>
+              </a:solidFill>
+              <a:latin typeface="CMU Serif" panose="02000603000000000000" pitchFamily="2" charset="0"/>
+              <a:ea typeface="CMU Serif" panose="02000603000000000000" pitchFamily="2" charset="0"/>
+              <a:cs typeface="CMU Serif" panose="02000603000000000000" pitchFamily="2" charset="0"/>
+            </a:endParaRPr>
+          </a:p>
+        </p:txBody>
+      </p:sp>
+      <p:cxnSp>
+        <p:nvCxnSpPr>
+          <p:cNvPr id="16" name="Gerade Verbindung mit Pfeil 15">
+            <a:extLst>
+              <a:ext uri="{FF2B5EF4-FFF2-40B4-BE49-F238E27FC236}">
+                <a16:creationId xmlns:a16="http://schemas.microsoft.com/office/drawing/2014/main" id="{BAAB494C-ABF9-9256-0B17-8BFC9AA6F06D}"/>
+              </a:ext>
+            </a:extLst>
+          </p:cNvPr>
+          <p:cNvCxnSpPr/>
+          <p:nvPr/>
+        </p:nvCxnSpPr>
+        <p:spPr>
+          <a:xfrm>
+            <a:off x="1474029" y="867427"/>
+            <a:ext cx="167999" cy="0"/>
+          </a:xfrm>
+          <a:prstGeom prst="straightConnector1">
+            <a:avLst/>
+          </a:prstGeom>
+          <a:ln cap="rnd">
+            <a:solidFill>
+              <a:srgbClr val="FF0000"/>
+            </a:solidFill>
+            <a:round/>
+            <a:tailEnd type="triangle"/>
+          </a:ln>
+        </p:spPr>
+        <p:style>
+          <a:lnRef idx="2">
+            <a:schemeClr val="accent1"/>
+          </a:lnRef>
+          <a:fillRef idx="0">
+            <a:schemeClr val="accent1"/>
+          </a:fillRef>
+          <a:effectRef idx="1">
+            <a:schemeClr val="accent1"/>
+          </a:effectRef>
+          <a:fontRef idx="minor">
+            <a:schemeClr val="tx1"/>
+          </a:fontRef>
+        </p:style>
+      </p:cxnSp>
+      <p:sp>
+        <p:nvSpPr>
+          <p:cNvPr id="17" name="Textfeld 16">
+            <a:extLst>
+              <a:ext uri="{FF2B5EF4-FFF2-40B4-BE49-F238E27FC236}">
+                <a16:creationId xmlns:a16="http://schemas.microsoft.com/office/drawing/2014/main" id="{59FB38A0-E99A-5F9A-2393-04B62DB3A73A}"/>
+              </a:ext>
+            </a:extLst>
+          </p:cNvPr>
+          <p:cNvSpPr txBox="1"/>
+          <p:nvPr/>
+        </p:nvSpPr>
+        <p:spPr>
+          <a:xfrm>
+            <a:off x="1409824" y="892553"/>
+            <a:ext cx="296407" cy="261610"/>
+          </a:xfrm>
+          <a:prstGeom prst="rect">
+            <a:avLst/>
+          </a:prstGeom>
+          <a:noFill/>
+        </p:spPr>
+        <p:txBody>
+          <a:bodyPr wrap="square" rtlCol="0">
+            <a:spAutoFit/>
+          </a:bodyPr>
+          <a:lstStyle/>
+          <a:p>
+            <a:r>
+              <a:rPr lang="de-DE" sz="1100" i="1" dirty="0">
+                <a:solidFill>
+                  <a:srgbClr val="FF0000"/>
+                </a:solidFill>
+                <a:latin typeface="CMU Serif" panose="02000603000000000000" pitchFamily="2" charset="0"/>
+                <a:ea typeface="CMU Serif" panose="02000603000000000000" pitchFamily="2" charset="0"/>
+                <a:cs typeface="CMU Serif" panose="02000603000000000000" pitchFamily="2" charset="0"/>
+              </a:rPr>
+              <a:t>I</a:t>
+            </a:r>
+            <a:endParaRPr lang="de-DE" sz="1100" baseline="-25000" dirty="0">
+              <a:solidFill>
+                <a:srgbClr val="FF0000"/>
+              </a:solidFill>
+              <a:latin typeface="CMU Serif" panose="02000603000000000000" pitchFamily="2" charset="0"/>
+              <a:ea typeface="CMU Serif" panose="02000603000000000000" pitchFamily="2" charset="0"/>
+              <a:cs typeface="CMU Serif" panose="02000603000000000000" pitchFamily="2" charset="0"/>
+            </a:endParaRPr>
+          </a:p>
+        </p:txBody>
+      </p:sp>
+      <p:sp>
+        <p:nvSpPr>
+          <p:cNvPr id="20" name="Textfeld 19">
+            <a:extLst>
+              <a:ext uri="{FF2B5EF4-FFF2-40B4-BE49-F238E27FC236}">
+                <a16:creationId xmlns:a16="http://schemas.microsoft.com/office/drawing/2014/main" id="{8CC36C0E-20BA-4473-BE56-1D6DBEF968A6}"/>
+              </a:ext>
+            </a:extLst>
+          </p:cNvPr>
+          <p:cNvSpPr txBox="1"/>
+          <p:nvPr/>
+        </p:nvSpPr>
+        <p:spPr>
+          <a:xfrm>
+            <a:off x="1633338" y="1177483"/>
+            <a:ext cx="341666" cy="261610"/>
+          </a:xfrm>
+          <a:prstGeom prst="rect">
+            <a:avLst/>
+          </a:prstGeom>
+          <a:noFill/>
+        </p:spPr>
+        <p:txBody>
+          <a:bodyPr wrap="square" rtlCol="0">
+            <a:spAutoFit/>
+          </a:bodyPr>
+          <a:lstStyle/>
+          <a:p>
+            <a:pPr algn="ctr"/>
+            <a:r>
+              <a:rPr lang="de-DE" sz="1100" i="1" dirty="0">
+                <a:latin typeface="CMU Serif" panose="02000603000000000000" pitchFamily="2" charset="0"/>
+                <a:ea typeface="CMU Serif" panose="02000603000000000000" pitchFamily="2" charset="0"/>
+                <a:cs typeface="CMU Serif" panose="02000603000000000000" pitchFamily="2" charset="0"/>
+              </a:rPr>
+              <a:t>R</a:t>
+            </a:r>
+            <a:r>
+              <a:rPr lang="de-DE" sz="1100" baseline="-25000" dirty="0">
+                <a:latin typeface="CMU Serif" panose="02000603000000000000" pitchFamily="2" charset="0"/>
+                <a:ea typeface="CMU Serif" panose="02000603000000000000" pitchFamily="2" charset="0"/>
+                <a:cs typeface="CMU Serif" panose="02000603000000000000" pitchFamily="2" charset="0"/>
+              </a:rPr>
+              <a:t>i</a:t>
+            </a:r>
+          </a:p>
+        </p:txBody>
+      </p:sp>
+      <p:cxnSp>
+        <p:nvCxnSpPr>
+          <p:cNvPr id="23" name="Gerade Verbindung mit Pfeil 22">
+            <a:extLst>
+              <a:ext uri="{FF2B5EF4-FFF2-40B4-BE49-F238E27FC236}">
+                <a16:creationId xmlns:a16="http://schemas.microsoft.com/office/drawing/2014/main" id="{6BF2893D-2C46-0A6B-D96B-AF79C07FECCC}"/>
+              </a:ext>
+            </a:extLst>
+          </p:cNvPr>
+          <p:cNvCxnSpPr>
+            <a:cxnSpLocks/>
+          </p:cNvCxnSpPr>
+          <p:nvPr/>
+        </p:nvCxnSpPr>
+        <p:spPr>
+          <a:xfrm>
+            <a:off x="2378052" y="2146853"/>
+            <a:ext cx="0" cy="157855"/>
+          </a:xfrm>
+          <a:prstGeom prst="straightConnector1">
+            <a:avLst/>
+          </a:prstGeom>
+          <a:ln cap="rnd">
+            <a:solidFill>
+              <a:srgbClr val="FF0000"/>
+            </a:solidFill>
+            <a:round/>
+            <a:tailEnd type="triangle"/>
+          </a:ln>
+        </p:spPr>
+        <p:style>
+          <a:lnRef idx="2">
+            <a:schemeClr val="accent1"/>
+          </a:lnRef>
+          <a:fillRef idx="0">
+            <a:schemeClr val="accent1"/>
+          </a:fillRef>
+          <a:effectRef idx="1">
+            <a:schemeClr val="accent1"/>
+          </a:effectRef>
+          <a:fontRef idx="minor">
+            <a:schemeClr val="tx1"/>
+          </a:fontRef>
+        </p:style>
+      </p:cxnSp>
+      <p:sp>
+        <p:nvSpPr>
+          <p:cNvPr id="24" name="Textfeld 23">
+            <a:extLst>
+              <a:ext uri="{FF2B5EF4-FFF2-40B4-BE49-F238E27FC236}">
+                <a16:creationId xmlns:a16="http://schemas.microsoft.com/office/drawing/2014/main" id="{FE0C67E2-D3EE-AD12-9B90-3F85FD258E61}"/>
+              </a:ext>
+            </a:extLst>
+          </p:cNvPr>
+          <p:cNvSpPr txBox="1"/>
+          <p:nvPr/>
+        </p:nvSpPr>
+        <p:spPr>
+          <a:xfrm>
+            <a:off x="2358441" y="2087539"/>
+            <a:ext cx="341666" cy="261610"/>
+          </a:xfrm>
+          <a:prstGeom prst="rect">
+            <a:avLst/>
+          </a:prstGeom>
+          <a:noFill/>
+        </p:spPr>
+        <p:txBody>
+          <a:bodyPr wrap="square" rtlCol="0">
+            <a:spAutoFit/>
+          </a:bodyPr>
+          <a:lstStyle/>
+          <a:p>
+            <a:r>
+              <a:rPr lang="de-DE" sz="1100" i="1" dirty="0" err="1">
+                <a:solidFill>
+                  <a:srgbClr val="FF0000"/>
+                </a:solidFill>
+                <a:latin typeface="CMU Serif" panose="02000603000000000000" pitchFamily="2" charset="0"/>
+                <a:ea typeface="CMU Serif" panose="02000603000000000000" pitchFamily="2" charset="0"/>
+                <a:cs typeface="CMU Serif" panose="02000603000000000000" pitchFamily="2" charset="0"/>
+              </a:rPr>
+              <a:t>I</a:t>
+            </a:r>
+            <a:r>
+              <a:rPr lang="de-DE" sz="1100" baseline="-25000" dirty="0" err="1">
+                <a:solidFill>
+                  <a:srgbClr val="FF0000"/>
+                </a:solidFill>
+                <a:latin typeface="CMU Serif" panose="02000603000000000000" pitchFamily="2" charset="0"/>
+                <a:ea typeface="CMU Serif" panose="02000603000000000000" pitchFamily="2" charset="0"/>
+                <a:cs typeface="CMU Serif" panose="02000603000000000000" pitchFamily="2" charset="0"/>
+              </a:rPr>
+              <a:t>k</a:t>
+            </a:r>
+            <a:r>
+              <a:rPr lang="de-DE" sz="1100" dirty="0">
+                <a:solidFill>
+                  <a:srgbClr val="FF0000"/>
+                </a:solidFill>
+                <a:latin typeface="CMU Serif" panose="02000603000000000000" pitchFamily="2" charset="0"/>
+                <a:ea typeface="CMU Serif" panose="02000603000000000000" pitchFamily="2" charset="0"/>
+                <a:cs typeface="CMU Serif" panose="02000603000000000000" pitchFamily="2" charset="0"/>
+              </a:rPr>
+              <a:t>′</a:t>
+            </a:r>
+          </a:p>
+        </p:txBody>
+      </p:sp>
+      <p:sp>
+        <p:nvSpPr>
+          <p:cNvPr id="26" name="Textfeld 25">
+            <a:extLst>
+              <a:ext uri="{FF2B5EF4-FFF2-40B4-BE49-F238E27FC236}">
+                <a16:creationId xmlns:a16="http://schemas.microsoft.com/office/drawing/2014/main" id="{EFEF0AFA-885E-9E2C-74D3-3A7A9DD5FFAB}"/>
+              </a:ext>
+            </a:extLst>
+          </p:cNvPr>
+          <p:cNvSpPr txBox="1"/>
+          <p:nvPr/>
+        </p:nvSpPr>
+        <p:spPr>
+          <a:xfrm>
+            <a:off x="1633338" y="2094128"/>
+            <a:ext cx="341666" cy="261610"/>
+          </a:xfrm>
+          <a:prstGeom prst="rect">
+            <a:avLst/>
+          </a:prstGeom>
+          <a:noFill/>
+        </p:spPr>
+        <p:txBody>
+          <a:bodyPr wrap="square" rtlCol="0">
+            <a:spAutoFit/>
+          </a:bodyPr>
+          <a:lstStyle/>
+          <a:p>
+            <a:pPr algn="ctr"/>
+            <a:r>
+              <a:rPr lang="de-DE" sz="1100" i="1" dirty="0">
+                <a:latin typeface="CMU Serif" panose="02000603000000000000" pitchFamily="2" charset="0"/>
+                <a:ea typeface="CMU Serif" panose="02000603000000000000" pitchFamily="2" charset="0"/>
+                <a:cs typeface="CMU Serif" panose="02000603000000000000" pitchFamily="2" charset="0"/>
+              </a:rPr>
+              <a:t>R</a:t>
+            </a:r>
+            <a:r>
+              <a:rPr lang="de-DE" sz="1100" baseline="-25000" dirty="0">
+                <a:latin typeface="CMU Serif" panose="02000603000000000000" pitchFamily="2" charset="0"/>
+                <a:ea typeface="CMU Serif" panose="02000603000000000000" pitchFamily="2" charset="0"/>
+                <a:cs typeface="CMU Serif" panose="02000603000000000000" pitchFamily="2" charset="0"/>
+              </a:rPr>
+              <a:t>1</a:t>
+            </a:r>
+          </a:p>
+        </p:txBody>
+      </p:sp>
+      <p:sp>
+        <p:nvSpPr>
+          <p:cNvPr id="28" name="Textfeld 27">
+            <a:extLst>
+              <a:ext uri="{FF2B5EF4-FFF2-40B4-BE49-F238E27FC236}">
+                <a16:creationId xmlns:a16="http://schemas.microsoft.com/office/drawing/2014/main" id="{F3FDE67E-B328-51BB-1C5E-354072379244}"/>
+              </a:ext>
+            </a:extLst>
+          </p:cNvPr>
+          <p:cNvSpPr txBox="1"/>
+          <p:nvPr/>
+        </p:nvSpPr>
+        <p:spPr>
+          <a:xfrm>
+            <a:off x="2331554" y="1658229"/>
+            <a:ext cx="341666" cy="261610"/>
+          </a:xfrm>
+          <a:prstGeom prst="rect">
+            <a:avLst/>
+          </a:prstGeom>
+          <a:noFill/>
+        </p:spPr>
+        <p:txBody>
+          <a:bodyPr wrap="square" rtlCol="0">
+            <a:spAutoFit/>
+          </a:bodyPr>
+          <a:lstStyle/>
+          <a:p>
+            <a:pPr algn="ctr"/>
+            <a:r>
+              <a:rPr lang="de-DE" sz="1100" dirty="0">
+                <a:latin typeface="CMU Serif" panose="02000603000000000000" pitchFamily="2" charset="0"/>
+                <a:ea typeface="CMU Serif" panose="02000603000000000000" pitchFamily="2" charset="0"/>
+                <a:cs typeface="CMU Serif" panose="02000603000000000000" pitchFamily="2" charset="0"/>
+              </a:rPr>
+              <a:t>1</a:t>
+            </a:r>
+            <a:endParaRPr lang="de-DE" sz="1100" baseline="-25000" dirty="0">
+              <a:latin typeface="CMU Serif" panose="02000603000000000000" pitchFamily="2" charset="0"/>
+              <a:ea typeface="CMU Serif" panose="02000603000000000000" pitchFamily="2" charset="0"/>
+              <a:cs typeface="CMU Serif" panose="02000603000000000000" pitchFamily="2" charset="0"/>
+            </a:endParaRPr>
+          </a:p>
+        </p:txBody>
+      </p:sp>
+      <p:sp>
+        <p:nvSpPr>
+          <p:cNvPr id="29" name="Textfeld 28">
+            <a:extLst>
+              <a:ext uri="{FF2B5EF4-FFF2-40B4-BE49-F238E27FC236}">
+                <a16:creationId xmlns:a16="http://schemas.microsoft.com/office/drawing/2014/main" id="{985FFBC7-038C-9FC4-7699-E855256F5B4F}"/>
+              </a:ext>
+            </a:extLst>
+          </p:cNvPr>
+          <p:cNvSpPr txBox="1"/>
+          <p:nvPr/>
+        </p:nvSpPr>
+        <p:spPr>
+          <a:xfrm>
+            <a:off x="2337269" y="2550985"/>
+            <a:ext cx="341666" cy="261610"/>
+          </a:xfrm>
+          <a:prstGeom prst="rect">
+            <a:avLst/>
+          </a:prstGeom>
+          <a:noFill/>
+        </p:spPr>
+        <p:txBody>
+          <a:bodyPr wrap="square" rtlCol="0">
+            <a:spAutoFit/>
+          </a:bodyPr>
+          <a:lstStyle/>
+          <a:p>
+            <a:pPr algn="ctr"/>
+            <a:r>
+              <a:rPr lang="de-DE" sz="1100" dirty="0">
+                <a:latin typeface="CMU Serif" panose="02000603000000000000" pitchFamily="2" charset="0"/>
+                <a:ea typeface="CMU Serif" panose="02000603000000000000" pitchFamily="2" charset="0"/>
+                <a:cs typeface="CMU Serif" panose="02000603000000000000" pitchFamily="2" charset="0"/>
+              </a:rPr>
+              <a:t>2</a:t>
+            </a:r>
+            <a:endParaRPr lang="de-DE" sz="1100" baseline="-25000" dirty="0">
+              <a:latin typeface="CMU Serif" panose="02000603000000000000" pitchFamily="2" charset="0"/>
+              <a:ea typeface="CMU Serif" panose="02000603000000000000" pitchFamily="2" charset="0"/>
+              <a:cs typeface="CMU Serif" panose="02000603000000000000" pitchFamily="2" charset="0"/>
+            </a:endParaRPr>
+          </a:p>
+        </p:txBody>
+      </p:sp>
+      <p:sp>
+        <p:nvSpPr>
+          <p:cNvPr id="8" name="Ellipse 7">
+            <a:extLst>
+              <a:ext uri="{FF2B5EF4-FFF2-40B4-BE49-F238E27FC236}">
+                <a16:creationId xmlns:a16="http://schemas.microsoft.com/office/drawing/2014/main" id="{133A2C89-A0CF-4C28-7E55-D04C05E8388D}"/>
+              </a:ext>
+            </a:extLst>
+          </p:cNvPr>
+          <p:cNvSpPr/>
+          <p:nvPr/>
+        </p:nvSpPr>
+        <p:spPr>
+          <a:xfrm>
+            <a:off x="2341080" y="1743679"/>
+            <a:ext cx="70030" cy="70030"/>
+          </a:xfrm>
+          <a:prstGeom prst="ellipse">
+            <a:avLst/>
+          </a:prstGeom>
+          <a:solidFill>
+            <a:schemeClr val="bg1"/>
+          </a:solidFill>
+          <a:ln w="12700">
+            <a:solidFill>
+              <a:schemeClr val="tx1"/>
+            </a:solidFill>
+          </a:ln>
+        </p:spPr>
+        <p:style>
+          <a:lnRef idx="2">
+            <a:schemeClr val="accent1">
+              <a:shade val="15000"/>
+            </a:schemeClr>
+          </a:lnRef>
+          <a:fillRef idx="1">
+            <a:schemeClr val="accent1"/>
+          </a:fillRef>
+          <a:effectRef idx="0">
+            <a:schemeClr val="accent1"/>
+          </a:effectRef>
+          <a:fontRef idx="minor">
+            <a:schemeClr val="lt1"/>
+          </a:fontRef>
+        </p:style>
+        <p:txBody>
+          <a:bodyPr rtlCol="0" anchor="ctr"/>
+          <a:lstStyle/>
+          <a:p>
+            <a:pPr algn="ctr"/>
+            <a:endParaRPr lang="de-DE">
+              <a:solidFill>
+                <a:sysClr val="windowText" lastClr="000000"/>
+              </a:solidFill>
+            </a:endParaRPr>
+          </a:p>
+        </p:txBody>
+      </p:sp>
+      <p:sp>
+        <p:nvSpPr>
+          <p:cNvPr id="9" name="Ellipse 8">
+            <a:extLst>
+              <a:ext uri="{FF2B5EF4-FFF2-40B4-BE49-F238E27FC236}">
+                <a16:creationId xmlns:a16="http://schemas.microsoft.com/office/drawing/2014/main" id="{32EF8E7A-29F9-1B0D-AD5D-F0A2A4950141}"/>
+              </a:ext>
+            </a:extLst>
+          </p:cNvPr>
+          <p:cNvSpPr/>
+          <p:nvPr/>
+        </p:nvSpPr>
+        <p:spPr>
+          <a:xfrm>
+            <a:off x="2341080" y="2636159"/>
+            <a:ext cx="70030" cy="70030"/>
+          </a:xfrm>
+          <a:prstGeom prst="ellipse">
+            <a:avLst/>
+          </a:prstGeom>
+          <a:solidFill>
+            <a:schemeClr val="bg1"/>
+          </a:solidFill>
+          <a:ln w="12700">
+            <a:solidFill>
+              <a:schemeClr val="tx1"/>
+            </a:solidFill>
+          </a:ln>
+        </p:spPr>
+        <p:style>
+          <a:lnRef idx="2">
+            <a:schemeClr val="accent1">
+              <a:shade val="15000"/>
+            </a:schemeClr>
+          </a:lnRef>
+          <a:fillRef idx="1">
+            <a:schemeClr val="accent1"/>
+          </a:fillRef>
+          <a:effectRef idx="0">
+            <a:schemeClr val="accent1"/>
+          </a:effectRef>
+          <a:fontRef idx="minor">
+            <a:schemeClr val="lt1"/>
+          </a:fontRef>
+        </p:style>
+        <p:txBody>
+          <a:bodyPr rtlCol="0" anchor="ctr"/>
+          <a:lstStyle/>
+          <a:p>
+            <a:pPr algn="ctr"/>
+            <a:endParaRPr lang="de-DE">
+              <a:solidFill>
+                <a:sysClr val="windowText" lastClr="000000"/>
+              </a:solidFill>
+            </a:endParaRPr>
+          </a:p>
+        </p:txBody>
+      </p:sp>
+    </p:spTree>
+    <p:extLst>
+      <p:ext uri="{BB962C8B-B14F-4D97-AF65-F5344CB8AC3E}">
+        <p14:creationId xmlns:p14="http://schemas.microsoft.com/office/powerpoint/2010/main" val="3446423345"/>
       </p:ext>
     </p:extLst>
   </p:cSld>

--- a/B.Sc. LRT/Grundlagen der Elektrotechnik/images/ETech-Images.pptx
+++ b/B.Sc. LRT/Grundlagen der Elektrotechnik/images/ETech-Images.pptx
@@ -5,7 +5,7 @@
     <p:sldMasterId id="2147483660" r:id="rId1"/>
   </p:sldMasterIdLst>
   <p:notesMasterIdLst>
-    <p:notesMasterId r:id="rId7"/>
+    <p:notesMasterId r:id="rId9"/>
   </p:notesMasterIdLst>
   <p:sldIdLst>
     <p:sldId id="256" r:id="rId2"/>
@@ -13,6 +13,8 @@
     <p:sldId id="258" r:id="rId4"/>
     <p:sldId id="259" r:id="rId5"/>
     <p:sldId id="260" r:id="rId6"/>
+    <p:sldId id="261" r:id="rId7"/>
+    <p:sldId id="262" r:id="rId8"/>
   </p:sldIdLst>
   <p:sldSz cx="3600450" cy="3600450"/>
   <p:notesSz cx="6858000" cy="9144000"/>
@@ -201,7 +203,7 @@
           <a:p>
             <a:fld id="{0C596C2D-C72C-406E-B79E-9BAC142DD20E}" type="datetimeFigureOut">
               <a:rPr lang="de-DE" smtClean="0"/>
-              <a:t>29.01.2026</a:t>
+              <a:t>31.01.2026</a:t>
             </a:fld>
             <a:endParaRPr lang="de-DE"/>
           </a:p>
@@ -599,7 +601,7 @@
           <a:p>
             <a:fld id="{6EAE28AA-0912-4DA0-8B30-7F3CA3FE6671}" type="datetimeFigureOut">
               <a:rPr lang="de-DE" smtClean="0"/>
-              <a:t>29.01.2026</a:t>
+              <a:t>31.01.2026</a:t>
             </a:fld>
             <a:endParaRPr lang="de-DE"/>
           </a:p>
@@ -769,7 +771,7 @@
           <a:p>
             <a:fld id="{6EAE28AA-0912-4DA0-8B30-7F3CA3FE6671}" type="datetimeFigureOut">
               <a:rPr lang="de-DE" smtClean="0"/>
-              <a:t>29.01.2026</a:t>
+              <a:t>31.01.2026</a:t>
             </a:fld>
             <a:endParaRPr lang="de-DE"/>
           </a:p>
@@ -949,7 +951,7 @@
           <a:p>
             <a:fld id="{6EAE28AA-0912-4DA0-8B30-7F3CA3FE6671}" type="datetimeFigureOut">
               <a:rPr lang="de-DE" smtClean="0"/>
-              <a:t>29.01.2026</a:t>
+              <a:t>31.01.2026</a:t>
             </a:fld>
             <a:endParaRPr lang="de-DE"/>
           </a:p>
@@ -1119,7 +1121,7 @@
           <a:p>
             <a:fld id="{6EAE28AA-0912-4DA0-8B30-7F3CA3FE6671}" type="datetimeFigureOut">
               <a:rPr lang="de-DE" smtClean="0"/>
-              <a:t>29.01.2026</a:t>
+              <a:t>31.01.2026</a:t>
             </a:fld>
             <a:endParaRPr lang="de-DE"/>
           </a:p>
@@ -1365,7 +1367,7 @@
           <a:p>
             <a:fld id="{6EAE28AA-0912-4DA0-8B30-7F3CA3FE6671}" type="datetimeFigureOut">
               <a:rPr lang="de-DE" smtClean="0"/>
-              <a:t>29.01.2026</a:t>
+              <a:t>31.01.2026</a:t>
             </a:fld>
             <a:endParaRPr lang="de-DE"/>
           </a:p>
@@ -1597,7 +1599,7 @@
           <a:p>
             <a:fld id="{6EAE28AA-0912-4DA0-8B30-7F3CA3FE6671}" type="datetimeFigureOut">
               <a:rPr lang="de-DE" smtClean="0"/>
-              <a:t>29.01.2026</a:t>
+              <a:t>31.01.2026</a:t>
             </a:fld>
             <a:endParaRPr lang="de-DE"/>
           </a:p>
@@ -1964,7 +1966,7 @@
           <a:p>
             <a:fld id="{6EAE28AA-0912-4DA0-8B30-7F3CA3FE6671}" type="datetimeFigureOut">
               <a:rPr lang="de-DE" smtClean="0"/>
-              <a:t>29.01.2026</a:t>
+              <a:t>31.01.2026</a:t>
             </a:fld>
             <a:endParaRPr lang="de-DE"/>
           </a:p>
@@ -2082,7 +2084,7 @@
           <a:p>
             <a:fld id="{6EAE28AA-0912-4DA0-8B30-7F3CA3FE6671}" type="datetimeFigureOut">
               <a:rPr lang="de-DE" smtClean="0"/>
-              <a:t>29.01.2026</a:t>
+              <a:t>31.01.2026</a:t>
             </a:fld>
             <a:endParaRPr lang="de-DE"/>
           </a:p>
@@ -2177,7 +2179,7 @@
           <a:p>
             <a:fld id="{6EAE28AA-0912-4DA0-8B30-7F3CA3FE6671}" type="datetimeFigureOut">
               <a:rPr lang="de-DE" smtClean="0"/>
-              <a:t>29.01.2026</a:t>
+              <a:t>31.01.2026</a:t>
             </a:fld>
             <a:endParaRPr lang="de-DE"/>
           </a:p>
@@ -2454,7 +2456,7 @@
           <a:p>
             <a:fld id="{6EAE28AA-0912-4DA0-8B30-7F3CA3FE6671}" type="datetimeFigureOut">
               <a:rPr lang="de-DE" smtClean="0"/>
-              <a:t>29.01.2026</a:t>
+              <a:t>31.01.2026</a:t>
             </a:fld>
             <a:endParaRPr lang="de-DE"/>
           </a:p>
@@ -2711,7 +2713,7 @@
           <a:p>
             <a:fld id="{6EAE28AA-0912-4DA0-8B30-7F3CA3FE6671}" type="datetimeFigureOut">
               <a:rPr lang="de-DE" smtClean="0"/>
-              <a:t>29.01.2026</a:t>
+              <a:t>31.01.2026</a:t>
             </a:fld>
             <a:endParaRPr lang="de-DE"/>
           </a:p>
@@ -2924,7 +2926,7 @@
           <a:p>
             <a:fld id="{6EAE28AA-0912-4DA0-8B30-7F3CA3FE6671}" type="datetimeFigureOut">
               <a:rPr lang="de-DE" smtClean="0"/>
-              <a:t>29.01.2026</a:t>
+              <a:t>31.01.2026</a:t>
             </a:fld>
             <a:endParaRPr lang="de-DE"/>
           </a:p>
@@ -8615,6 +8617,1854 @@
     <p:extLst>
       <p:ext uri="{BB962C8B-B14F-4D97-AF65-F5344CB8AC3E}">
         <p14:creationId xmlns:p14="http://schemas.microsoft.com/office/powerpoint/2010/main" val="3446423345"/>
+      </p:ext>
+    </p:extLst>
+  </p:cSld>
+  <p:clrMapOvr>
+    <a:masterClrMapping/>
+  </p:clrMapOvr>
+</p:sld>
+</file>
+
+<file path=ppt/slides/slide6.xml><?xml version="1.0" encoding="utf-8"?>
+<p:sld xmlns:a="http://schemas.openxmlformats.org/drawingml/2006/main" xmlns:r="http://schemas.openxmlformats.org/officeDocument/2006/relationships" xmlns:p="http://schemas.openxmlformats.org/presentationml/2006/main">
+  <p:cSld>
+    <p:spTree>
+      <p:nvGrpSpPr>
+        <p:cNvPr id="1" name="">
+          <a:extLst>
+            <a:ext uri="{FF2B5EF4-FFF2-40B4-BE49-F238E27FC236}">
+              <a16:creationId xmlns:a16="http://schemas.microsoft.com/office/drawing/2014/main" id="{CB1B4BAF-30C9-5C5F-C34F-D846748341B4}"/>
+            </a:ext>
+          </a:extLst>
+        </p:cNvPr>
+        <p:cNvGrpSpPr/>
+        <p:nvPr/>
+      </p:nvGrpSpPr>
+      <p:grpSpPr>
+        <a:xfrm>
+          <a:off x="0" y="0"/>
+          <a:ext cx="0" cy="0"/>
+          <a:chOff x="0" y="0"/>
+          <a:chExt cx="0" cy="0"/>
+        </a:xfrm>
+      </p:grpSpPr>
+      <p:sp>
+        <p:nvSpPr>
+          <p:cNvPr id="4" name="Rechteck 3">
+            <a:extLst>
+              <a:ext uri="{FF2B5EF4-FFF2-40B4-BE49-F238E27FC236}">
+                <a16:creationId xmlns:a16="http://schemas.microsoft.com/office/drawing/2014/main" id="{61917DFD-AADF-BA70-1DD3-2BAA2CF2D614}"/>
+              </a:ext>
+            </a:extLst>
+          </p:cNvPr>
+          <p:cNvSpPr/>
+          <p:nvPr/>
+        </p:nvSpPr>
+        <p:spPr>
+          <a:xfrm>
+            <a:off x="1296051" y="1333727"/>
+            <a:ext cx="1065157" cy="932995"/>
+          </a:xfrm>
+          <a:prstGeom prst="rect">
+            <a:avLst/>
+          </a:prstGeom>
+          <a:noFill/>
+          <a:ln w="15875" cap="rnd">
+            <a:solidFill>
+              <a:schemeClr val="tx1"/>
+            </a:solidFill>
+            <a:round/>
+          </a:ln>
+        </p:spPr>
+        <p:style>
+          <a:lnRef idx="2">
+            <a:schemeClr val="accent1">
+              <a:shade val="15000"/>
+            </a:schemeClr>
+          </a:lnRef>
+          <a:fillRef idx="1">
+            <a:schemeClr val="accent1"/>
+          </a:fillRef>
+          <a:effectRef idx="0">
+            <a:schemeClr val="accent1"/>
+          </a:effectRef>
+          <a:fontRef idx="minor">
+            <a:schemeClr val="lt1"/>
+          </a:fontRef>
+        </p:style>
+        <p:txBody>
+          <a:bodyPr rtlCol="0" anchor="ctr"/>
+          <a:lstStyle/>
+          <a:p>
+            <a:pPr algn="ctr"/>
+            <a:endParaRPr lang="de-DE"/>
+          </a:p>
+        </p:txBody>
+      </p:sp>
+      <p:sp>
+        <p:nvSpPr>
+          <p:cNvPr id="11" name="Rechteck 10">
+            <a:extLst>
+              <a:ext uri="{FF2B5EF4-FFF2-40B4-BE49-F238E27FC236}">
+                <a16:creationId xmlns:a16="http://schemas.microsoft.com/office/drawing/2014/main" id="{44135EEA-034C-4B43-AD2D-8BA21C09EDA1}"/>
+              </a:ext>
+            </a:extLst>
+          </p:cNvPr>
+          <p:cNvSpPr/>
+          <p:nvPr/>
+        </p:nvSpPr>
+        <p:spPr>
+          <a:xfrm rot="16200000">
+            <a:off x="2193568" y="1738332"/>
+            <a:ext cx="335280" cy="118110"/>
+          </a:xfrm>
+          <a:prstGeom prst="rect">
+            <a:avLst/>
+          </a:prstGeom>
+          <a:solidFill>
+            <a:schemeClr val="bg1"/>
+          </a:solidFill>
+          <a:ln w="15875" cap="rnd">
+            <a:solidFill>
+              <a:schemeClr val="tx1"/>
+            </a:solidFill>
+            <a:round/>
+          </a:ln>
+        </p:spPr>
+        <p:style>
+          <a:lnRef idx="2">
+            <a:schemeClr val="accent1">
+              <a:shade val="15000"/>
+            </a:schemeClr>
+          </a:lnRef>
+          <a:fillRef idx="1">
+            <a:schemeClr val="accent1"/>
+          </a:fillRef>
+          <a:effectRef idx="0">
+            <a:schemeClr val="accent1"/>
+          </a:effectRef>
+          <a:fontRef idx="minor">
+            <a:schemeClr val="lt1"/>
+          </a:fontRef>
+        </p:style>
+        <p:txBody>
+          <a:bodyPr rtlCol="0" anchor="ctr"/>
+          <a:lstStyle/>
+          <a:p>
+            <a:pPr algn="ctr"/>
+            <a:endParaRPr lang="de-DE"/>
+          </a:p>
+        </p:txBody>
+      </p:sp>
+      <p:sp>
+        <p:nvSpPr>
+          <p:cNvPr id="13" name="Ellipse 12">
+            <a:extLst>
+              <a:ext uri="{FF2B5EF4-FFF2-40B4-BE49-F238E27FC236}">
+                <a16:creationId xmlns:a16="http://schemas.microsoft.com/office/drawing/2014/main" id="{018DC303-1E49-2C8E-4742-9A173F961AA2}"/>
+              </a:ext>
+            </a:extLst>
+          </p:cNvPr>
+          <p:cNvSpPr/>
+          <p:nvPr/>
+        </p:nvSpPr>
+        <p:spPr>
+          <a:xfrm>
+            <a:off x="1181618" y="1683087"/>
+            <a:ext cx="228600" cy="228600"/>
+          </a:xfrm>
+          <a:prstGeom prst="ellipse">
+            <a:avLst/>
+          </a:prstGeom>
+          <a:noFill/>
+          <a:ln w="15875">
+            <a:solidFill>
+              <a:schemeClr val="tx1"/>
+            </a:solidFill>
+          </a:ln>
+        </p:spPr>
+        <p:style>
+          <a:lnRef idx="2">
+            <a:schemeClr val="accent1">
+              <a:shade val="15000"/>
+            </a:schemeClr>
+          </a:lnRef>
+          <a:fillRef idx="1">
+            <a:schemeClr val="accent1"/>
+          </a:fillRef>
+          <a:effectRef idx="0">
+            <a:schemeClr val="accent1"/>
+          </a:effectRef>
+          <a:fontRef idx="minor">
+            <a:schemeClr val="lt1"/>
+          </a:fontRef>
+        </p:style>
+        <p:txBody>
+          <a:bodyPr rtlCol="0" anchor="ctr"/>
+          <a:lstStyle/>
+          <a:p>
+            <a:pPr algn="ctr"/>
+            <a:endParaRPr lang="de-DE"/>
+          </a:p>
+        </p:txBody>
+      </p:sp>
+      <p:grpSp>
+        <p:nvGrpSpPr>
+          <p:cNvPr id="2" name="Gruppieren 1">
+            <a:extLst>
+              <a:ext uri="{FF2B5EF4-FFF2-40B4-BE49-F238E27FC236}">
+                <a16:creationId xmlns:a16="http://schemas.microsoft.com/office/drawing/2014/main" id="{36532079-356C-B354-E0AA-7B3B750CC57F}"/>
+              </a:ext>
+            </a:extLst>
+          </p:cNvPr>
+          <p:cNvGrpSpPr/>
+          <p:nvPr/>
+        </p:nvGrpSpPr>
+        <p:grpSpPr>
+          <a:xfrm>
+            <a:off x="1691063" y="1437341"/>
+            <a:ext cx="341666" cy="739056"/>
+            <a:chOff x="1225835" y="1517800"/>
+            <a:chExt cx="341666" cy="739056"/>
+          </a:xfrm>
+        </p:grpSpPr>
+        <p:cxnSp>
+          <p:nvCxnSpPr>
+            <p:cNvPr id="14" name="Gerade Verbindung mit Pfeil 13">
+              <a:extLst>
+                <a:ext uri="{FF2B5EF4-FFF2-40B4-BE49-F238E27FC236}">
+                  <a16:creationId xmlns:a16="http://schemas.microsoft.com/office/drawing/2014/main" id="{D11B46CC-D453-9537-29B5-C0C7ADF5F2AC}"/>
+                </a:ext>
+              </a:extLst>
+            </p:cNvPr>
+            <p:cNvCxnSpPr>
+              <a:cxnSpLocks/>
+            </p:cNvCxnSpPr>
+            <p:nvPr/>
+          </p:nvCxnSpPr>
+          <p:spPr>
+            <a:xfrm>
+              <a:off x="1269390" y="1517800"/>
+              <a:ext cx="3393" cy="739056"/>
+            </a:xfrm>
+            <a:prstGeom prst="straightConnector1">
+              <a:avLst/>
+            </a:prstGeom>
+            <a:ln cap="rnd">
+              <a:solidFill>
+                <a:srgbClr val="086FBD"/>
+              </a:solidFill>
+              <a:round/>
+              <a:tailEnd type="triangle"/>
+            </a:ln>
+          </p:spPr>
+          <p:style>
+            <a:lnRef idx="2">
+              <a:schemeClr val="accent1"/>
+            </a:lnRef>
+            <a:fillRef idx="0">
+              <a:schemeClr val="accent1"/>
+            </a:fillRef>
+            <a:effectRef idx="1">
+              <a:schemeClr val="accent1"/>
+            </a:effectRef>
+            <a:fontRef idx="minor">
+              <a:schemeClr val="tx1"/>
+            </a:fontRef>
+          </p:style>
+        </p:cxnSp>
+        <p:sp>
+          <p:nvSpPr>
+            <p:cNvPr id="15" name="Textfeld 14">
+              <a:extLst>
+                <a:ext uri="{FF2B5EF4-FFF2-40B4-BE49-F238E27FC236}">
+                  <a16:creationId xmlns:a16="http://schemas.microsoft.com/office/drawing/2014/main" id="{9F13CD75-9AB9-8AC8-23F4-4A2B6C4D8C90}"/>
+                </a:ext>
+              </a:extLst>
+            </p:cNvPr>
+            <p:cNvSpPr txBox="1"/>
+            <p:nvPr/>
+          </p:nvSpPr>
+          <p:spPr>
+            <a:xfrm>
+              <a:off x="1225835" y="1747041"/>
+              <a:ext cx="341666" cy="261610"/>
+            </a:xfrm>
+            <a:prstGeom prst="rect">
+              <a:avLst/>
+            </a:prstGeom>
+            <a:noFill/>
+          </p:spPr>
+          <p:txBody>
+            <a:bodyPr wrap="square" rtlCol="0">
+              <a:spAutoFit/>
+            </a:bodyPr>
+            <a:lstStyle/>
+            <a:p>
+              <a:r>
+                <a:rPr lang="de-DE" sz="1100" i="1" dirty="0" err="1">
+                  <a:solidFill>
+                    <a:srgbClr val="086FBD"/>
+                  </a:solidFill>
+                  <a:latin typeface="CMU Serif" panose="02000603000000000000" pitchFamily="2" charset="0"/>
+                  <a:ea typeface="CMU Serif" panose="02000603000000000000" pitchFamily="2" charset="0"/>
+                  <a:cs typeface="CMU Serif" panose="02000603000000000000" pitchFamily="2" charset="0"/>
+                </a:rPr>
+                <a:t>U</a:t>
+              </a:r>
+              <a:r>
+                <a:rPr lang="de-DE" sz="1100" baseline="-25000" dirty="0" err="1">
+                  <a:solidFill>
+                    <a:srgbClr val="086FBD"/>
+                  </a:solidFill>
+                  <a:latin typeface="CMU Serif" panose="02000603000000000000" pitchFamily="2" charset="0"/>
+                  <a:ea typeface="CMU Serif" panose="02000603000000000000" pitchFamily="2" charset="0"/>
+                  <a:cs typeface="CMU Serif" panose="02000603000000000000" pitchFamily="2" charset="0"/>
+                </a:rPr>
+                <a:t>q</a:t>
+              </a:r>
+              <a:endParaRPr lang="de-DE" sz="1100" baseline="-25000" dirty="0">
+                <a:solidFill>
+                  <a:srgbClr val="086FBD"/>
+                </a:solidFill>
+                <a:latin typeface="CMU Serif" panose="02000603000000000000" pitchFamily="2" charset="0"/>
+                <a:ea typeface="CMU Serif" panose="02000603000000000000" pitchFamily="2" charset="0"/>
+                <a:cs typeface="CMU Serif" panose="02000603000000000000" pitchFamily="2" charset="0"/>
+              </a:endParaRPr>
+            </a:p>
+          </p:txBody>
+        </p:sp>
+      </p:grpSp>
+      <p:grpSp>
+        <p:nvGrpSpPr>
+          <p:cNvPr id="3" name="Gruppieren 2">
+            <a:extLst>
+              <a:ext uri="{FF2B5EF4-FFF2-40B4-BE49-F238E27FC236}">
+                <a16:creationId xmlns:a16="http://schemas.microsoft.com/office/drawing/2014/main" id="{CF99F630-38D4-3F18-FF8B-AB3C505F09B6}"/>
+              </a:ext>
+            </a:extLst>
+          </p:cNvPr>
+          <p:cNvGrpSpPr/>
+          <p:nvPr/>
+        </p:nvGrpSpPr>
+        <p:grpSpPr>
+          <a:xfrm>
+            <a:off x="1357943" y="1332778"/>
+            <a:ext cx="296407" cy="286736"/>
+            <a:chOff x="1409824" y="867427"/>
+            <a:chExt cx="296407" cy="286736"/>
+          </a:xfrm>
+        </p:grpSpPr>
+        <p:cxnSp>
+          <p:nvCxnSpPr>
+            <p:cNvPr id="16" name="Gerade Verbindung mit Pfeil 15">
+              <a:extLst>
+                <a:ext uri="{FF2B5EF4-FFF2-40B4-BE49-F238E27FC236}">
+                  <a16:creationId xmlns:a16="http://schemas.microsoft.com/office/drawing/2014/main" id="{6B8A65DD-B4F8-2779-8F4F-63FBF9E81E99}"/>
+                </a:ext>
+              </a:extLst>
+            </p:cNvPr>
+            <p:cNvCxnSpPr/>
+            <p:nvPr/>
+          </p:nvCxnSpPr>
+          <p:spPr>
+            <a:xfrm>
+              <a:off x="1474029" y="867427"/>
+              <a:ext cx="167999" cy="0"/>
+            </a:xfrm>
+            <a:prstGeom prst="straightConnector1">
+              <a:avLst/>
+            </a:prstGeom>
+            <a:ln cap="rnd">
+              <a:solidFill>
+                <a:srgbClr val="FF0000"/>
+              </a:solidFill>
+              <a:round/>
+              <a:tailEnd type="triangle"/>
+            </a:ln>
+          </p:spPr>
+          <p:style>
+            <a:lnRef idx="2">
+              <a:schemeClr val="accent1"/>
+            </a:lnRef>
+            <a:fillRef idx="0">
+              <a:schemeClr val="accent1"/>
+            </a:fillRef>
+            <a:effectRef idx="1">
+              <a:schemeClr val="accent1"/>
+            </a:effectRef>
+            <a:fontRef idx="minor">
+              <a:schemeClr val="tx1"/>
+            </a:fontRef>
+          </p:style>
+        </p:cxnSp>
+        <p:sp>
+          <p:nvSpPr>
+            <p:cNvPr id="17" name="Textfeld 16">
+              <a:extLst>
+                <a:ext uri="{FF2B5EF4-FFF2-40B4-BE49-F238E27FC236}">
+                  <a16:creationId xmlns:a16="http://schemas.microsoft.com/office/drawing/2014/main" id="{B1F05C65-34C4-5B44-38E5-63DF2A883136}"/>
+                </a:ext>
+              </a:extLst>
+            </p:cNvPr>
+            <p:cNvSpPr txBox="1"/>
+            <p:nvPr/>
+          </p:nvSpPr>
+          <p:spPr>
+            <a:xfrm>
+              <a:off x="1409824" y="892553"/>
+              <a:ext cx="296407" cy="261610"/>
+            </a:xfrm>
+            <a:prstGeom prst="rect">
+              <a:avLst/>
+            </a:prstGeom>
+            <a:noFill/>
+          </p:spPr>
+          <p:txBody>
+            <a:bodyPr wrap="square" rtlCol="0">
+              <a:spAutoFit/>
+            </a:bodyPr>
+            <a:lstStyle/>
+            <a:p>
+              <a:r>
+                <a:rPr lang="de-DE" sz="1100" i="1" dirty="0">
+                  <a:solidFill>
+                    <a:srgbClr val="FF0000"/>
+                  </a:solidFill>
+                  <a:latin typeface="CMU Serif" panose="02000603000000000000" pitchFamily="2" charset="0"/>
+                  <a:ea typeface="CMU Serif" panose="02000603000000000000" pitchFamily="2" charset="0"/>
+                  <a:cs typeface="CMU Serif" panose="02000603000000000000" pitchFamily="2" charset="0"/>
+                </a:rPr>
+                <a:t>I</a:t>
+              </a:r>
+              <a:endParaRPr lang="de-DE" sz="1100" baseline="-25000" dirty="0">
+                <a:solidFill>
+                  <a:srgbClr val="FF0000"/>
+                </a:solidFill>
+                <a:latin typeface="CMU Serif" panose="02000603000000000000" pitchFamily="2" charset="0"/>
+                <a:ea typeface="CMU Serif" panose="02000603000000000000" pitchFamily="2" charset="0"/>
+                <a:cs typeface="CMU Serif" panose="02000603000000000000" pitchFamily="2" charset="0"/>
+              </a:endParaRPr>
+            </a:p>
+          </p:txBody>
+        </p:sp>
+      </p:grpSp>
+      <p:sp>
+        <p:nvSpPr>
+          <p:cNvPr id="26" name="Textfeld 25">
+            <a:extLst>
+              <a:ext uri="{FF2B5EF4-FFF2-40B4-BE49-F238E27FC236}">
+                <a16:creationId xmlns:a16="http://schemas.microsoft.com/office/drawing/2014/main" id="{3C76060E-7756-C382-8830-D083FD21E4EA}"/>
+              </a:ext>
+            </a:extLst>
+          </p:cNvPr>
+          <p:cNvSpPr txBox="1"/>
+          <p:nvPr/>
+        </p:nvSpPr>
+        <p:spPr>
+          <a:xfrm>
+            <a:off x="1999330" y="1666582"/>
+            <a:ext cx="341666" cy="261610"/>
+          </a:xfrm>
+          <a:prstGeom prst="rect">
+            <a:avLst/>
+          </a:prstGeom>
+          <a:noFill/>
+        </p:spPr>
+        <p:txBody>
+          <a:bodyPr wrap="square" rtlCol="0">
+            <a:spAutoFit/>
+          </a:bodyPr>
+          <a:lstStyle/>
+          <a:p>
+            <a:pPr algn="ctr"/>
+            <a:r>
+              <a:rPr lang="de-DE" sz="1100" i="1" dirty="0">
+                <a:latin typeface="CMU Serif" panose="02000603000000000000" pitchFamily="2" charset="0"/>
+                <a:ea typeface="CMU Serif" panose="02000603000000000000" pitchFamily="2" charset="0"/>
+                <a:cs typeface="CMU Serif" panose="02000603000000000000" pitchFamily="2" charset="0"/>
+              </a:rPr>
+              <a:t>R</a:t>
+            </a:r>
+            <a:r>
+              <a:rPr lang="de-DE" sz="1100" baseline="-25000" dirty="0">
+                <a:latin typeface="CMU Serif" panose="02000603000000000000" pitchFamily="2" charset="0"/>
+                <a:ea typeface="CMU Serif" panose="02000603000000000000" pitchFamily="2" charset="0"/>
+                <a:cs typeface="CMU Serif" panose="02000603000000000000" pitchFamily="2" charset="0"/>
+              </a:rPr>
+              <a:t>L</a:t>
+            </a:r>
+          </a:p>
+        </p:txBody>
+      </p:sp>
+      <p:sp>
+        <p:nvSpPr>
+          <p:cNvPr id="8" name="Ellipse 7">
+            <a:extLst>
+              <a:ext uri="{FF2B5EF4-FFF2-40B4-BE49-F238E27FC236}">
+                <a16:creationId xmlns:a16="http://schemas.microsoft.com/office/drawing/2014/main" id="{5A8993ED-8A4E-E286-9BBD-26849BF3E495}"/>
+              </a:ext>
+            </a:extLst>
+          </p:cNvPr>
+          <p:cNvSpPr/>
+          <p:nvPr/>
+        </p:nvSpPr>
+        <p:spPr>
+          <a:xfrm>
+            <a:off x="1702996" y="1299668"/>
+            <a:ext cx="70030" cy="70030"/>
+          </a:xfrm>
+          <a:prstGeom prst="ellipse">
+            <a:avLst/>
+          </a:prstGeom>
+          <a:solidFill>
+            <a:schemeClr val="bg1"/>
+          </a:solidFill>
+          <a:ln w="12700">
+            <a:solidFill>
+              <a:schemeClr val="tx1"/>
+            </a:solidFill>
+          </a:ln>
+        </p:spPr>
+        <p:style>
+          <a:lnRef idx="2">
+            <a:schemeClr val="accent1">
+              <a:shade val="15000"/>
+            </a:schemeClr>
+          </a:lnRef>
+          <a:fillRef idx="1">
+            <a:schemeClr val="accent1"/>
+          </a:fillRef>
+          <a:effectRef idx="0">
+            <a:schemeClr val="accent1"/>
+          </a:effectRef>
+          <a:fontRef idx="minor">
+            <a:schemeClr val="lt1"/>
+          </a:fontRef>
+        </p:style>
+        <p:txBody>
+          <a:bodyPr rtlCol="0" anchor="ctr"/>
+          <a:lstStyle/>
+          <a:p>
+            <a:pPr algn="ctr"/>
+            <a:endParaRPr lang="de-DE">
+              <a:solidFill>
+                <a:sysClr val="windowText" lastClr="000000"/>
+              </a:solidFill>
+            </a:endParaRPr>
+          </a:p>
+        </p:txBody>
+      </p:sp>
+      <p:sp>
+        <p:nvSpPr>
+          <p:cNvPr id="9" name="Ellipse 8">
+            <a:extLst>
+              <a:ext uri="{FF2B5EF4-FFF2-40B4-BE49-F238E27FC236}">
+                <a16:creationId xmlns:a16="http://schemas.microsoft.com/office/drawing/2014/main" id="{C8285F63-1A3A-BBC2-CAD9-F52B2A05AA64}"/>
+              </a:ext>
+            </a:extLst>
+          </p:cNvPr>
+          <p:cNvSpPr/>
+          <p:nvPr/>
+        </p:nvSpPr>
+        <p:spPr>
+          <a:xfrm>
+            <a:off x="1708843" y="2233371"/>
+            <a:ext cx="70030" cy="70030"/>
+          </a:xfrm>
+          <a:prstGeom prst="ellipse">
+            <a:avLst/>
+          </a:prstGeom>
+          <a:solidFill>
+            <a:schemeClr val="bg1"/>
+          </a:solidFill>
+          <a:ln w="12700">
+            <a:solidFill>
+              <a:schemeClr val="tx1"/>
+            </a:solidFill>
+          </a:ln>
+        </p:spPr>
+        <p:style>
+          <a:lnRef idx="2">
+            <a:schemeClr val="accent1">
+              <a:shade val="15000"/>
+            </a:schemeClr>
+          </a:lnRef>
+          <a:fillRef idx="1">
+            <a:schemeClr val="accent1"/>
+          </a:fillRef>
+          <a:effectRef idx="0">
+            <a:schemeClr val="accent1"/>
+          </a:effectRef>
+          <a:fontRef idx="minor">
+            <a:schemeClr val="lt1"/>
+          </a:fontRef>
+        </p:style>
+        <p:txBody>
+          <a:bodyPr rtlCol="0" anchor="ctr"/>
+          <a:lstStyle/>
+          <a:p>
+            <a:pPr algn="ctr"/>
+            <a:endParaRPr lang="de-DE">
+              <a:solidFill>
+                <a:sysClr val="windowText" lastClr="000000"/>
+              </a:solidFill>
+            </a:endParaRPr>
+          </a:p>
+        </p:txBody>
+      </p:sp>
+    </p:spTree>
+    <p:extLst>
+      <p:ext uri="{BB962C8B-B14F-4D97-AF65-F5344CB8AC3E}">
+        <p14:creationId xmlns:p14="http://schemas.microsoft.com/office/powerpoint/2010/main" val="3462016144"/>
+      </p:ext>
+    </p:extLst>
+  </p:cSld>
+  <p:clrMapOvr>
+    <a:masterClrMapping/>
+  </p:clrMapOvr>
+</p:sld>
+</file>
+
+<file path=ppt/slides/slide7.xml><?xml version="1.0" encoding="utf-8"?>
+<p:sld xmlns:a="http://schemas.openxmlformats.org/drawingml/2006/main" xmlns:r="http://schemas.openxmlformats.org/officeDocument/2006/relationships" xmlns:p="http://schemas.openxmlformats.org/presentationml/2006/main">
+  <p:cSld>
+    <p:spTree>
+      <p:nvGrpSpPr>
+        <p:cNvPr id="1" name=""/>
+        <p:cNvGrpSpPr/>
+        <p:nvPr/>
+      </p:nvGrpSpPr>
+      <p:grpSpPr>
+        <a:xfrm>
+          <a:off x="0" y="0"/>
+          <a:ext cx="0" cy="0"/>
+          <a:chOff x="0" y="0"/>
+          <a:chExt cx="0" cy="0"/>
+        </a:xfrm>
+      </p:grpSpPr>
+      <p:sp>
+        <p:nvSpPr>
+          <p:cNvPr id="10" name="Textfeld 9">
+            <a:extLst>
+              <a:ext uri="{FF2B5EF4-FFF2-40B4-BE49-F238E27FC236}">
+                <a16:creationId xmlns:a16="http://schemas.microsoft.com/office/drawing/2014/main" id="{54D14492-B4A4-5A4B-603F-135639A2257E}"/>
+              </a:ext>
+            </a:extLst>
+          </p:cNvPr>
+          <p:cNvSpPr txBox="1"/>
+          <p:nvPr/>
+        </p:nvSpPr>
+        <p:spPr>
+          <a:xfrm>
+            <a:off x="607997" y="1022308"/>
+            <a:ext cx="341666" cy="261610"/>
+          </a:xfrm>
+          <a:prstGeom prst="rect">
+            <a:avLst/>
+          </a:prstGeom>
+          <a:noFill/>
+        </p:spPr>
+        <p:txBody>
+          <a:bodyPr wrap="square" rtlCol="0">
+            <a:spAutoFit/>
+          </a:bodyPr>
+          <a:lstStyle/>
+          <a:p>
+            <a:pPr algn="ctr"/>
+            <a:r>
+              <a:rPr lang="de-DE" sz="1100" i="1" dirty="0">
+                <a:latin typeface="CMU Serif" panose="02000603000000000000" pitchFamily="2" charset="0"/>
+                <a:ea typeface="CMU Serif" panose="02000603000000000000" pitchFamily="2" charset="0"/>
+                <a:cs typeface="CMU Serif" panose="02000603000000000000" pitchFamily="2" charset="0"/>
+              </a:rPr>
+              <a:t>U</a:t>
+            </a:r>
+            <a:endParaRPr lang="de-DE" sz="1100" baseline="-25000" dirty="0">
+              <a:latin typeface="CMU Serif" panose="02000603000000000000" pitchFamily="2" charset="0"/>
+              <a:ea typeface="CMU Serif" panose="02000603000000000000" pitchFamily="2" charset="0"/>
+              <a:cs typeface="CMU Serif" panose="02000603000000000000" pitchFamily="2" charset="0"/>
+            </a:endParaRPr>
+          </a:p>
+        </p:txBody>
+      </p:sp>
+      <p:sp>
+        <p:nvSpPr>
+          <p:cNvPr id="11" name="Textfeld 10">
+            <a:extLst>
+              <a:ext uri="{FF2B5EF4-FFF2-40B4-BE49-F238E27FC236}">
+                <a16:creationId xmlns:a16="http://schemas.microsoft.com/office/drawing/2014/main" id="{8537B0ED-ED3B-DC1F-FDDB-C33EEA4FF809}"/>
+              </a:ext>
+            </a:extLst>
+          </p:cNvPr>
+          <p:cNvSpPr txBox="1"/>
+          <p:nvPr/>
+        </p:nvSpPr>
+        <p:spPr>
+          <a:xfrm>
+            <a:off x="2728969" y="2330559"/>
+            <a:ext cx="341666" cy="261610"/>
+          </a:xfrm>
+          <a:prstGeom prst="rect">
+            <a:avLst/>
+          </a:prstGeom>
+          <a:noFill/>
+        </p:spPr>
+        <p:txBody>
+          <a:bodyPr wrap="square" rtlCol="0">
+            <a:spAutoFit/>
+          </a:bodyPr>
+          <a:lstStyle/>
+          <a:p>
+            <a:pPr algn="ctr"/>
+            <a:r>
+              <a:rPr lang="de-DE" sz="1100" i="1" dirty="0">
+                <a:latin typeface="CMU Serif" panose="02000603000000000000" pitchFamily="2" charset="0"/>
+                <a:ea typeface="CMU Serif" panose="02000603000000000000" pitchFamily="2" charset="0"/>
+                <a:cs typeface="CMU Serif" panose="02000603000000000000" pitchFamily="2" charset="0"/>
+              </a:rPr>
+              <a:t>I</a:t>
+            </a:r>
+            <a:endParaRPr lang="de-DE" sz="1100" baseline="-25000" dirty="0">
+              <a:latin typeface="CMU Serif" panose="02000603000000000000" pitchFamily="2" charset="0"/>
+              <a:ea typeface="CMU Serif" panose="02000603000000000000" pitchFamily="2" charset="0"/>
+              <a:cs typeface="CMU Serif" panose="02000603000000000000" pitchFamily="2" charset="0"/>
+            </a:endParaRPr>
+          </a:p>
+        </p:txBody>
+      </p:sp>
+      <p:cxnSp>
+        <p:nvCxnSpPr>
+          <p:cNvPr id="13" name="Gerader Verbinder 12">
+            <a:extLst>
+              <a:ext uri="{FF2B5EF4-FFF2-40B4-BE49-F238E27FC236}">
+                <a16:creationId xmlns:a16="http://schemas.microsoft.com/office/drawing/2014/main" id="{B7C09BCB-C923-45C0-6A80-2C938E976D72}"/>
+              </a:ext>
+            </a:extLst>
+          </p:cNvPr>
+          <p:cNvCxnSpPr/>
+          <p:nvPr/>
+        </p:nvCxnSpPr>
+        <p:spPr>
+          <a:xfrm>
+            <a:off x="791358" y="1537570"/>
+            <a:ext cx="1804661" cy="588723"/>
+          </a:xfrm>
+          <a:prstGeom prst="line">
+            <a:avLst/>
+          </a:prstGeom>
+          <a:ln w="15875" cap="rnd">
+            <a:solidFill>
+              <a:schemeClr val="accent2">
+                <a:lumMod val="75000"/>
+              </a:schemeClr>
+            </a:solidFill>
+            <a:round/>
+          </a:ln>
+        </p:spPr>
+        <p:style>
+          <a:lnRef idx="2">
+            <a:schemeClr val="accent1"/>
+          </a:lnRef>
+          <a:fillRef idx="0">
+            <a:schemeClr val="accent1"/>
+          </a:fillRef>
+          <a:effectRef idx="1">
+            <a:schemeClr val="accent1"/>
+          </a:effectRef>
+          <a:fontRef idx="minor">
+            <a:schemeClr val="tx1"/>
+          </a:fontRef>
+        </p:style>
+      </p:cxnSp>
+      <p:cxnSp>
+        <p:nvCxnSpPr>
+          <p:cNvPr id="14" name="Gerader Verbinder 13">
+            <a:extLst>
+              <a:ext uri="{FF2B5EF4-FFF2-40B4-BE49-F238E27FC236}">
+                <a16:creationId xmlns:a16="http://schemas.microsoft.com/office/drawing/2014/main" id="{7B61E464-DCC3-A9C2-FC97-CDFF4AC3195D}"/>
+              </a:ext>
+            </a:extLst>
+          </p:cNvPr>
+          <p:cNvCxnSpPr>
+            <a:cxnSpLocks/>
+          </p:cNvCxnSpPr>
+          <p:nvPr/>
+        </p:nvCxnSpPr>
+        <p:spPr>
+          <a:xfrm>
+            <a:off x="791357" y="1753644"/>
+            <a:ext cx="652268" cy="0"/>
+          </a:xfrm>
+          <a:prstGeom prst="line">
+            <a:avLst/>
+          </a:prstGeom>
+          <a:ln w="9525" cap="rnd">
+            <a:solidFill>
+              <a:schemeClr val="accent2">
+                <a:lumMod val="75000"/>
+              </a:schemeClr>
+            </a:solidFill>
+            <a:prstDash val="sysDash"/>
+            <a:round/>
+          </a:ln>
+        </p:spPr>
+        <p:style>
+          <a:lnRef idx="2">
+            <a:schemeClr val="accent1"/>
+          </a:lnRef>
+          <a:fillRef idx="0">
+            <a:schemeClr val="accent1"/>
+          </a:fillRef>
+          <a:effectRef idx="1">
+            <a:schemeClr val="accent1"/>
+          </a:effectRef>
+          <a:fontRef idx="minor">
+            <a:schemeClr val="tx1"/>
+          </a:fontRef>
+        </p:style>
+      </p:cxnSp>
+      <p:cxnSp>
+        <p:nvCxnSpPr>
+          <p:cNvPr id="18" name="Gerader Verbinder 17">
+            <a:extLst>
+              <a:ext uri="{FF2B5EF4-FFF2-40B4-BE49-F238E27FC236}">
+                <a16:creationId xmlns:a16="http://schemas.microsoft.com/office/drawing/2014/main" id="{9C26E879-DBF6-DC78-9B8B-B34832728B8A}"/>
+              </a:ext>
+            </a:extLst>
+          </p:cNvPr>
+          <p:cNvCxnSpPr>
+            <a:cxnSpLocks/>
+          </p:cNvCxnSpPr>
+          <p:nvPr/>
+        </p:nvCxnSpPr>
+        <p:spPr>
+          <a:xfrm>
+            <a:off x="1443625" y="1753644"/>
+            <a:ext cx="0" cy="689094"/>
+          </a:xfrm>
+          <a:prstGeom prst="line">
+            <a:avLst/>
+          </a:prstGeom>
+          <a:ln w="9525" cap="rnd">
+            <a:solidFill>
+              <a:schemeClr val="accent2">
+                <a:lumMod val="75000"/>
+              </a:schemeClr>
+            </a:solidFill>
+            <a:prstDash val="sysDash"/>
+            <a:round/>
+          </a:ln>
+        </p:spPr>
+        <p:style>
+          <a:lnRef idx="2">
+            <a:schemeClr val="accent1"/>
+          </a:lnRef>
+          <a:fillRef idx="0">
+            <a:schemeClr val="accent1"/>
+          </a:fillRef>
+          <a:effectRef idx="1">
+            <a:schemeClr val="accent1"/>
+          </a:effectRef>
+          <a:fontRef idx="minor">
+            <a:schemeClr val="tx1"/>
+          </a:fontRef>
+        </p:style>
+      </p:cxnSp>
+      <p:cxnSp>
+        <p:nvCxnSpPr>
+          <p:cNvPr id="21" name="Gerader Verbinder 20">
+            <a:extLst>
+              <a:ext uri="{FF2B5EF4-FFF2-40B4-BE49-F238E27FC236}">
+                <a16:creationId xmlns:a16="http://schemas.microsoft.com/office/drawing/2014/main" id="{F40B8E3C-616A-E5FF-0E77-EDA8F68C321A}"/>
+              </a:ext>
+            </a:extLst>
+          </p:cNvPr>
+          <p:cNvCxnSpPr>
+            <a:cxnSpLocks/>
+          </p:cNvCxnSpPr>
+          <p:nvPr/>
+        </p:nvCxnSpPr>
+        <p:spPr>
+          <a:xfrm>
+            <a:off x="791357" y="1943622"/>
+            <a:ext cx="1243078" cy="0"/>
+          </a:xfrm>
+          <a:prstGeom prst="line">
+            <a:avLst/>
+          </a:prstGeom>
+          <a:ln w="9525" cap="rnd">
+            <a:solidFill>
+              <a:schemeClr val="accent2">
+                <a:lumMod val="75000"/>
+              </a:schemeClr>
+            </a:solidFill>
+            <a:prstDash val="sysDash"/>
+            <a:round/>
+          </a:ln>
+        </p:spPr>
+        <p:style>
+          <a:lnRef idx="2">
+            <a:schemeClr val="accent1"/>
+          </a:lnRef>
+          <a:fillRef idx="0">
+            <a:schemeClr val="accent1"/>
+          </a:fillRef>
+          <a:effectRef idx="1">
+            <a:schemeClr val="accent1"/>
+          </a:effectRef>
+          <a:fontRef idx="minor">
+            <a:schemeClr val="tx1"/>
+          </a:fontRef>
+        </p:style>
+      </p:cxnSp>
+      <p:cxnSp>
+        <p:nvCxnSpPr>
+          <p:cNvPr id="22" name="Gerader Verbinder 21">
+            <a:extLst>
+              <a:ext uri="{FF2B5EF4-FFF2-40B4-BE49-F238E27FC236}">
+                <a16:creationId xmlns:a16="http://schemas.microsoft.com/office/drawing/2014/main" id="{A13821C7-55F0-6703-5395-B45B5C9CD9CE}"/>
+              </a:ext>
+            </a:extLst>
+          </p:cNvPr>
+          <p:cNvCxnSpPr>
+            <a:cxnSpLocks/>
+          </p:cNvCxnSpPr>
+          <p:nvPr/>
+        </p:nvCxnSpPr>
+        <p:spPr>
+          <a:xfrm>
+            <a:off x="2034435" y="1943622"/>
+            <a:ext cx="0" cy="499116"/>
+          </a:xfrm>
+          <a:prstGeom prst="line">
+            <a:avLst/>
+          </a:prstGeom>
+          <a:ln w="9525" cap="rnd">
+            <a:solidFill>
+              <a:schemeClr val="accent2">
+                <a:lumMod val="75000"/>
+              </a:schemeClr>
+            </a:solidFill>
+            <a:prstDash val="sysDash"/>
+            <a:round/>
+          </a:ln>
+        </p:spPr>
+        <p:style>
+          <a:lnRef idx="2">
+            <a:schemeClr val="accent1"/>
+          </a:lnRef>
+          <a:fillRef idx="0">
+            <a:schemeClr val="accent1"/>
+          </a:fillRef>
+          <a:effectRef idx="1">
+            <a:schemeClr val="accent1"/>
+          </a:effectRef>
+          <a:fontRef idx="minor">
+            <a:schemeClr val="tx1"/>
+          </a:fontRef>
+        </p:style>
+      </p:cxnSp>
+      <p:cxnSp>
+        <p:nvCxnSpPr>
+          <p:cNvPr id="6" name="Gerade Verbindung mit Pfeil 5">
+            <a:extLst>
+              <a:ext uri="{FF2B5EF4-FFF2-40B4-BE49-F238E27FC236}">
+                <a16:creationId xmlns:a16="http://schemas.microsoft.com/office/drawing/2014/main" id="{75DD5C48-0405-14A9-8D40-8FDBDACBD3E2}"/>
+              </a:ext>
+            </a:extLst>
+          </p:cNvPr>
+          <p:cNvCxnSpPr>
+            <a:cxnSpLocks/>
+          </p:cNvCxnSpPr>
+          <p:nvPr/>
+        </p:nvCxnSpPr>
+        <p:spPr>
+          <a:xfrm>
+            <a:off x="791358" y="2445706"/>
+            <a:ext cx="2017734" cy="0"/>
+          </a:xfrm>
+          <a:prstGeom prst="straightConnector1">
+            <a:avLst/>
+          </a:prstGeom>
+          <a:ln w="15875" cap="rnd">
+            <a:solidFill>
+              <a:schemeClr val="tx1"/>
+            </a:solidFill>
+            <a:round/>
+            <a:tailEnd type="triangle"/>
+          </a:ln>
+        </p:spPr>
+        <p:style>
+          <a:lnRef idx="2">
+            <a:schemeClr val="accent1"/>
+          </a:lnRef>
+          <a:fillRef idx="0">
+            <a:schemeClr val="accent1"/>
+          </a:fillRef>
+          <a:effectRef idx="1">
+            <a:schemeClr val="accent1"/>
+          </a:effectRef>
+          <a:fontRef idx="minor">
+            <a:schemeClr val="tx1"/>
+          </a:fontRef>
+        </p:style>
+      </p:cxnSp>
+      <p:cxnSp>
+        <p:nvCxnSpPr>
+          <p:cNvPr id="5" name="Gerade Verbindung mit Pfeil 4">
+            <a:extLst>
+              <a:ext uri="{FF2B5EF4-FFF2-40B4-BE49-F238E27FC236}">
+                <a16:creationId xmlns:a16="http://schemas.microsoft.com/office/drawing/2014/main" id="{5F592E18-B6C0-8E5A-6976-E6743223D547}"/>
+              </a:ext>
+            </a:extLst>
+          </p:cNvPr>
+          <p:cNvCxnSpPr>
+            <a:cxnSpLocks/>
+          </p:cNvCxnSpPr>
+          <p:nvPr/>
+        </p:nvCxnSpPr>
+        <p:spPr>
+          <a:xfrm flipV="1">
+            <a:off x="791358" y="1255734"/>
+            <a:ext cx="0" cy="1189972"/>
+          </a:xfrm>
+          <a:prstGeom prst="straightConnector1">
+            <a:avLst/>
+          </a:prstGeom>
+          <a:ln w="15875" cap="rnd">
+            <a:solidFill>
+              <a:schemeClr val="tx1"/>
+            </a:solidFill>
+            <a:round/>
+            <a:tailEnd type="triangle"/>
+          </a:ln>
+        </p:spPr>
+        <p:style>
+          <a:lnRef idx="2">
+            <a:schemeClr val="accent1"/>
+          </a:lnRef>
+          <a:fillRef idx="0">
+            <a:schemeClr val="accent1"/>
+          </a:fillRef>
+          <a:effectRef idx="1">
+            <a:schemeClr val="accent1"/>
+          </a:effectRef>
+          <a:fontRef idx="minor">
+            <a:schemeClr val="tx1"/>
+          </a:fontRef>
+        </p:style>
+      </p:cxnSp>
+      <p:cxnSp>
+        <p:nvCxnSpPr>
+          <p:cNvPr id="25" name="Gerader Verbinder 24">
+            <a:extLst>
+              <a:ext uri="{FF2B5EF4-FFF2-40B4-BE49-F238E27FC236}">
+                <a16:creationId xmlns:a16="http://schemas.microsoft.com/office/drawing/2014/main" id="{390C687C-6039-5B13-09AE-8E44C9FD5BB5}"/>
+              </a:ext>
+            </a:extLst>
+          </p:cNvPr>
+          <p:cNvCxnSpPr>
+            <a:cxnSpLocks/>
+          </p:cNvCxnSpPr>
+          <p:nvPr/>
+        </p:nvCxnSpPr>
+        <p:spPr>
+          <a:xfrm>
+            <a:off x="742609" y="1754688"/>
+            <a:ext cx="94468" cy="0"/>
+          </a:xfrm>
+          <a:prstGeom prst="line">
+            <a:avLst/>
+          </a:prstGeom>
+          <a:ln w="15875" cap="rnd">
+            <a:solidFill>
+              <a:schemeClr val="tx1"/>
+            </a:solidFill>
+            <a:prstDash val="solid"/>
+            <a:round/>
+          </a:ln>
+        </p:spPr>
+        <p:style>
+          <a:lnRef idx="2">
+            <a:schemeClr val="accent1"/>
+          </a:lnRef>
+          <a:fillRef idx="0">
+            <a:schemeClr val="accent1"/>
+          </a:fillRef>
+          <a:effectRef idx="1">
+            <a:schemeClr val="accent1"/>
+          </a:effectRef>
+          <a:fontRef idx="minor">
+            <a:schemeClr val="tx1"/>
+          </a:fontRef>
+        </p:style>
+      </p:cxnSp>
+      <p:cxnSp>
+        <p:nvCxnSpPr>
+          <p:cNvPr id="27" name="Gerader Verbinder 26">
+            <a:extLst>
+              <a:ext uri="{FF2B5EF4-FFF2-40B4-BE49-F238E27FC236}">
+                <a16:creationId xmlns:a16="http://schemas.microsoft.com/office/drawing/2014/main" id="{54B9C134-CED5-2CEA-428F-4EEFE4ED15D4}"/>
+              </a:ext>
+            </a:extLst>
+          </p:cNvPr>
+          <p:cNvCxnSpPr>
+            <a:cxnSpLocks/>
+          </p:cNvCxnSpPr>
+          <p:nvPr/>
+        </p:nvCxnSpPr>
+        <p:spPr>
+          <a:xfrm>
+            <a:off x="742609" y="1943622"/>
+            <a:ext cx="94468" cy="0"/>
+          </a:xfrm>
+          <a:prstGeom prst="line">
+            <a:avLst/>
+          </a:prstGeom>
+          <a:ln w="15875" cap="rnd">
+            <a:solidFill>
+              <a:schemeClr val="tx1"/>
+            </a:solidFill>
+            <a:prstDash val="solid"/>
+            <a:round/>
+          </a:ln>
+        </p:spPr>
+        <p:style>
+          <a:lnRef idx="2">
+            <a:schemeClr val="accent1"/>
+          </a:lnRef>
+          <a:fillRef idx="0">
+            <a:schemeClr val="accent1"/>
+          </a:fillRef>
+          <a:effectRef idx="1">
+            <a:schemeClr val="accent1"/>
+          </a:effectRef>
+          <a:fontRef idx="minor">
+            <a:schemeClr val="tx1"/>
+          </a:fontRef>
+        </p:style>
+      </p:cxnSp>
+      <p:cxnSp>
+        <p:nvCxnSpPr>
+          <p:cNvPr id="28" name="Gerader Verbinder 27">
+            <a:extLst>
+              <a:ext uri="{FF2B5EF4-FFF2-40B4-BE49-F238E27FC236}">
+                <a16:creationId xmlns:a16="http://schemas.microsoft.com/office/drawing/2014/main" id="{30D15C5A-589B-1B2B-CF34-C7A3839C4593}"/>
+              </a:ext>
+            </a:extLst>
+          </p:cNvPr>
+          <p:cNvCxnSpPr>
+            <a:cxnSpLocks/>
+          </p:cNvCxnSpPr>
+          <p:nvPr/>
+        </p:nvCxnSpPr>
+        <p:spPr>
+          <a:xfrm>
+            <a:off x="1443625" y="2400247"/>
+            <a:ext cx="0" cy="84981"/>
+          </a:xfrm>
+          <a:prstGeom prst="line">
+            <a:avLst/>
+          </a:prstGeom>
+          <a:ln w="15875" cap="rnd">
+            <a:solidFill>
+              <a:schemeClr val="tx1"/>
+            </a:solidFill>
+            <a:prstDash val="solid"/>
+            <a:round/>
+          </a:ln>
+        </p:spPr>
+        <p:style>
+          <a:lnRef idx="2">
+            <a:schemeClr val="accent1"/>
+          </a:lnRef>
+          <a:fillRef idx="0">
+            <a:schemeClr val="accent1"/>
+          </a:fillRef>
+          <a:effectRef idx="1">
+            <a:schemeClr val="accent1"/>
+          </a:effectRef>
+          <a:fontRef idx="minor">
+            <a:schemeClr val="tx1"/>
+          </a:fontRef>
+        </p:style>
+      </p:cxnSp>
+      <p:cxnSp>
+        <p:nvCxnSpPr>
+          <p:cNvPr id="30" name="Gerader Verbinder 29">
+            <a:extLst>
+              <a:ext uri="{FF2B5EF4-FFF2-40B4-BE49-F238E27FC236}">
+                <a16:creationId xmlns:a16="http://schemas.microsoft.com/office/drawing/2014/main" id="{888F8931-66F9-6966-7F4C-253F8D217118}"/>
+              </a:ext>
+            </a:extLst>
+          </p:cNvPr>
+          <p:cNvCxnSpPr>
+            <a:cxnSpLocks/>
+          </p:cNvCxnSpPr>
+          <p:nvPr/>
+        </p:nvCxnSpPr>
+        <p:spPr>
+          <a:xfrm>
+            <a:off x="2036340" y="2400247"/>
+            <a:ext cx="0" cy="84981"/>
+          </a:xfrm>
+          <a:prstGeom prst="line">
+            <a:avLst/>
+          </a:prstGeom>
+          <a:ln w="15875" cap="rnd">
+            <a:solidFill>
+              <a:schemeClr val="tx1"/>
+            </a:solidFill>
+            <a:prstDash val="solid"/>
+            <a:round/>
+          </a:ln>
+        </p:spPr>
+        <p:style>
+          <a:lnRef idx="2">
+            <a:schemeClr val="accent1"/>
+          </a:lnRef>
+          <a:fillRef idx="0">
+            <a:schemeClr val="accent1"/>
+          </a:fillRef>
+          <a:effectRef idx="1">
+            <a:schemeClr val="accent1"/>
+          </a:effectRef>
+          <a:fontRef idx="minor">
+            <a:schemeClr val="tx1"/>
+          </a:fontRef>
+        </p:style>
+      </p:cxnSp>
+      <p:cxnSp>
+        <p:nvCxnSpPr>
+          <p:cNvPr id="31" name="Gerade Verbindung mit Pfeil 30">
+            <a:extLst>
+              <a:ext uri="{FF2B5EF4-FFF2-40B4-BE49-F238E27FC236}">
+                <a16:creationId xmlns:a16="http://schemas.microsoft.com/office/drawing/2014/main" id="{031E0415-1ACA-D8DF-A50D-556FC1ECC0D6}"/>
+              </a:ext>
+            </a:extLst>
+          </p:cNvPr>
+          <p:cNvCxnSpPr>
+            <a:cxnSpLocks/>
+          </p:cNvCxnSpPr>
+          <p:nvPr/>
+        </p:nvCxnSpPr>
+        <p:spPr>
+          <a:xfrm>
+            <a:off x="913487" y="1753644"/>
+            <a:ext cx="0" cy="189978"/>
+          </a:xfrm>
+          <a:prstGeom prst="straightConnector1">
+            <a:avLst/>
+          </a:prstGeom>
+          <a:ln cap="rnd">
+            <a:solidFill>
+              <a:schemeClr val="accent1"/>
+            </a:solidFill>
+            <a:round/>
+            <a:headEnd type="triangle" w="sm" len="med"/>
+            <a:tailEnd type="triangle" w="sm" len="med"/>
+          </a:ln>
+        </p:spPr>
+        <p:style>
+          <a:lnRef idx="2">
+            <a:schemeClr val="accent1"/>
+          </a:lnRef>
+          <a:fillRef idx="0">
+            <a:schemeClr val="accent1"/>
+          </a:fillRef>
+          <a:effectRef idx="1">
+            <a:schemeClr val="accent1"/>
+          </a:effectRef>
+          <a:fontRef idx="minor">
+            <a:schemeClr val="tx1"/>
+          </a:fontRef>
+        </p:style>
+      </p:cxnSp>
+      <p:cxnSp>
+        <p:nvCxnSpPr>
+          <p:cNvPr id="35" name="Gerade Verbindung mit Pfeil 34">
+            <a:extLst>
+              <a:ext uri="{FF2B5EF4-FFF2-40B4-BE49-F238E27FC236}">
+                <a16:creationId xmlns:a16="http://schemas.microsoft.com/office/drawing/2014/main" id="{38C98017-91AE-9C51-3E4B-0156F03572DD}"/>
+              </a:ext>
+            </a:extLst>
+          </p:cNvPr>
+          <p:cNvCxnSpPr>
+            <a:cxnSpLocks/>
+          </p:cNvCxnSpPr>
+          <p:nvPr/>
+        </p:nvCxnSpPr>
+        <p:spPr>
+          <a:xfrm flipH="1">
+            <a:off x="1443625" y="2288427"/>
+            <a:ext cx="590810" cy="0"/>
+          </a:xfrm>
+          <a:prstGeom prst="straightConnector1">
+            <a:avLst/>
+          </a:prstGeom>
+          <a:ln cap="rnd">
+            <a:solidFill>
+              <a:schemeClr val="accent3"/>
+            </a:solidFill>
+            <a:round/>
+            <a:headEnd type="triangle" w="sm" len="med"/>
+            <a:tailEnd type="triangle" w="sm" len="med"/>
+          </a:ln>
+        </p:spPr>
+        <p:style>
+          <a:lnRef idx="2">
+            <a:schemeClr val="accent1"/>
+          </a:lnRef>
+          <a:fillRef idx="0">
+            <a:schemeClr val="accent1"/>
+          </a:fillRef>
+          <a:effectRef idx="1">
+            <a:schemeClr val="accent1"/>
+          </a:effectRef>
+          <a:fontRef idx="minor">
+            <a:schemeClr val="tx1"/>
+          </a:fontRef>
+        </p:style>
+      </p:cxnSp>
+      <p:sp>
+        <p:nvSpPr>
+          <p:cNvPr id="39" name="Textfeld 38">
+            <a:extLst>
+              <a:ext uri="{FF2B5EF4-FFF2-40B4-BE49-F238E27FC236}">
+                <a16:creationId xmlns:a16="http://schemas.microsoft.com/office/drawing/2014/main" id="{F1A3DF90-6DD6-3759-78DD-29BD42DA6CD7}"/>
+              </a:ext>
+            </a:extLst>
+          </p:cNvPr>
+          <p:cNvSpPr txBox="1"/>
+          <p:nvPr/>
+        </p:nvSpPr>
+        <p:spPr>
+          <a:xfrm>
+            <a:off x="885826" y="1735355"/>
+            <a:ext cx="480849" cy="261610"/>
+          </a:xfrm>
+          <a:prstGeom prst="rect">
+            <a:avLst/>
+          </a:prstGeom>
+          <a:noFill/>
+        </p:spPr>
+        <p:txBody>
+          <a:bodyPr wrap="square" rtlCol="0">
+            <a:spAutoFit/>
+          </a:bodyPr>
+          <a:lstStyle/>
+          <a:p>
+            <a:r>
+              <a:rPr lang="de-DE" sz="1100" dirty="0">
+                <a:solidFill>
+                  <a:schemeClr val="accent1"/>
+                </a:solidFill>
+                <a:latin typeface="CMU Serif" panose="02000603000000000000" pitchFamily="2" charset="0"/>
+                <a:ea typeface="CMU Serif" panose="02000603000000000000" pitchFamily="2" charset="0"/>
+                <a:cs typeface="CMU Serif" panose="02000603000000000000" pitchFamily="2" charset="0"/>
+              </a:rPr>
+              <a:t>Δ</a:t>
+            </a:r>
+            <a:r>
+              <a:rPr lang="de-DE" sz="1100" i="1" dirty="0">
+                <a:solidFill>
+                  <a:schemeClr val="accent1"/>
+                </a:solidFill>
+                <a:latin typeface="CMU Serif" panose="02000603000000000000" pitchFamily="2" charset="0"/>
+                <a:ea typeface="CMU Serif" panose="02000603000000000000" pitchFamily="2" charset="0"/>
+                <a:cs typeface="CMU Serif" panose="02000603000000000000" pitchFamily="2" charset="0"/>
+              </a:rPr>
+              <a:t>U</a:t>
+            </a:r>
+            <a:endParaRPr lang="de-DE" sz="1100" baseline="-25000" dirty="0">
+              <a:solidFill>
+                <a:schemeClr val="accent1"/>
+              </a:solidFill>
+              <a:latin typeface="CMU Serif" panose="02000603000000000000" pitchFamily="2" charset="0"/>
+              <a:ea typeface="CMU Serif" panose="02000603000000000000" pitchFamily="2" charset="0"/>
+              <a:cs typeface="CMU Serif" panose="02000603000000000000" pitchFamily="2" charset="0"/>
+            </a:endParaRPr>
+          </a:p>
+        </p:txBody>
+      </p:sp>
+      <p:sp>
+        <p:nvSpPr>
+          <p:cNvPr id="40" name="Textfeld 39">
+            <a:extLst>
+              <a:ext uri="{FF2B5EF4-FFF2-40B4-BE49-F238E27FC236}">
+                <a16:creationId xmlns:a16="http://schemas.microsoft.com/office/drawing/2014/main" id="{A4C4F449-532E-6800-A65A-208143FA1935}"/>
+              </a:ext>
+            </a:extLst>
+          </p:cNvPr>
+          <p:cNvSpPr txBox="1"/>
+          <p:nvPr/>
+        </p:nvSpPr>
+        <p:spPr>
+          <a:xfrm>
+            <a:off x="1538973" y="2071626"/>
+            <a:ext cx="480849" cy="261610"/>
+          </a:xfrm>
+          <a:prstGeom prst="rect">
+            <a:avLst/>
+          </a:prstGeom>
+          <a:noFill/>
+        </p:spPr>
+        <p:txBody>
+          <a:bodyPr wrap="square" rtlCol="0">
+            <a:spAutoFit/>
+          </a:bodyPr>
+          <a:lstStyle/>
+          <a:p>
+            <a:r>
+              <a:rPr lang="de-DE" sz="1100" dirty="0">
+                <a:solidFill>
+                  <a:schemeClr val="accent3"/>
+                </a:solidFill>
+                <a:latin typeface="CMU Serif" panose="02000603000000000000" pitchFamily="2" charset="0"/>
+                <a:ea typeface="CMU Serif" panose="02000603000000000000" pitchFamily="2" charset="0"/>
+                <a:cs typeface="CMU Serif" panose="02000603000000000000" pitchFamily="2" charset="0"/>
+              </a:rPr>
+              <a:t>Δ</a:t>
+            </a:r>
+            <a:r>
+              <a:rPr lang="de-DE" sz="1100" i="1" dirty="0">
+                <a:solidFill>
+                  <a:schemeClr val="accent3"/>
+                </a:solidFill>
+                <a:latin typeface="CMU Serif" panose="02000603000000000000" pitchFamily="2" charset="0"/>
+                <a:ea typeface="CMU Serif" panose="02000603000000000000" pitchFamily="2" charset="0"/>
+                <a:cs typeface="CMU Serif" panose="02000603000000000000" pitchFamily="2" charset="0"/>
+              </a:rPr>
+              <a:t>I</a:t>
+            </a:r>
+            <a:endParaRPr lang="de-DE" sz="1100" baseline="-25000" dirty="0">
+              <a:solidFill>
+                <a:schemeClr val="accent3"/>
+              </a:solidFill>
+              <a:latin typeface="CMU Serif" panose="02000603000000000000" pitchFamily="2" charset="0"/>
+              <a:ea typeface="CMU Serif" panose="02000603000000000000" pitchFamily="2" charset="0"/>
+              <a:cs typeface="CMU Serif" panose="02000603000000000000" pitchFamily="2" charset="0"/>
+            </a:endParaRPr>
+          </a:p>
+        </p:txBody>
+      </p:sp>
+      <p:sp>
+        <p:nvSpPr>
+          <p:cNvPr id="41" name="Textfeld 40">
+            <a:extLst>
+              <a:ext uri="{FF2B5EF4-FFF2-40B4-BE49-F238E27FC236}">
+                <a16:creationId xmlns:a16="http://schemas.microsoft.com/office/drawing/2014/main" id="{8E188949-443C-26AD-1478-F2EE9CE21A07}"/>
+              </a:ext>
+            </a:extLst>
+          </p:cNvPr>
+          <p:cNvSpPr txBox="1"/>
+          <p:nvPr/>
+        </p:nvSpPr>
+        <p:spPr>
+          <a:xfrm>
+            <a:off x="885826" y="1369687"/>
+            <a:ext cx="804900" cy="261610"/>
+          </a:xfrm>
+          <a:prstGeom prst="rect">
+            <a:avLst/>
+          </a:prstGeom>
+          <a:noFill/>
+        </p:spPr>
+        <p:txBody>
+          <a:bodyPr wrap="square" rtlCol="0">
+            <a:spAutoFit/>
+          </a:bodyPr>
+          <a:lstStyle/>
+          <a:p>
+            <a:pPr algn="ctr"/>
+            <a:r>
+              <a:rPr lang="de-DE" sz="1100" dirty="0">
+                <a:solidFill>
+                  <a:schemeClr val="accent2">
+                    <a:lumMod val="75000"/>
+                  </a:schemeClr>
+                </a:solidFill>
+                <a:latin typeface="CMU Serif" panose="02000603000000000000" pitchFamily="2" charset="0"/>
+                <a:ea typeface="CMU Serif" panose="02000603000000000000" pitchFamily="2" charset="0"/>
+                <a:cs typeface="CMU Serif" panose="02000603000000000000" pitchFamily="2" charset="0"/>
+              </a:rPr>
+              <a:t>Kennlinie</a:t>
+            </a:r>
+            <a:endParaRPr lang="de-DE" sz="1100" baseline="-25000" dirty="0">
+              <a:solidFill>
+                <a:schemeClr val="accent2">
+                  <a:lumMod val="75000"/>
+                </a:schemeClr>
+              </a:solidFill>
+              <a:latin typeface="CMU Serif" panose="02000603000000000000" pitchFamily="2" charset="0"/>
+              <a:ea typeface="CMU Serif" panose="02000603000000000000" pitchFamily="2" charset="0"/>
+              <a:cs typeface="CMU Serif" panose="02000603000000000000" pitchFamily="2" charset="0"/>
+            </a:endParaRPr>
+          </a:p>
+        </p:txBody>
+      </p:sp>
+      <p:sp>
+        <p:nvSpPr>
+          <p:cNvPr id="42" name="Textfeld 41">
+            <a:extLst>
+              <a:ext uri="{FF2B5EF4-FFF2-40B4-BE49-F238E27FC236}">
+                <a16:creationId xmlns:a16="http://schemas.microsoft.com/office/drawing/2014/main" id="{F5960734-B793-02B5-B017-35AF583D8707}"/>
+              </a:ext>
+            </a:extLst>
+          </p:cNvPr>
+          <p:cNvSpPr txBox="1"/>
+          <p:nvPr/>
+        </p:nvSpPr>
+        <p:spPr>
+          <a:xfrm>
+            <a:off x="1889787" y="1116254"/>
+            <a:ext cx="1061057" cy="261610"/>
+          </a:xfrm>
+          <a:prstGeom prst="rect">
+            <a:avLst/>
+          </a:prstGeom>
+          <a:noFill/>
+        </p:spPr>
+        <p:txBody>
+          <a:bodyPr wrap="square" rtlCol="0">
+            <a:spAutoFit/>
+          </a:bodyPr>
+          <a:lstStyle/>
+          <a:p>
+            <a:pPr algn="ctr"/>
+            <a:r>
+              <a:rPr lang="de-DE" sz="1100" i="1" dirty="0">
+                <a:solidFill>
+                  <a:schemeClr val="accent2">
+                    <a:lumMod val="75000"/>
+                  </a:schemeClr>
+                </a:solidFill>
+                <a:latin typeface="CMU Serif" panose="02000603000000000000" pitchFamily="2" charset="0"/>
+                <a:ea typeface="CMU Serif" panose="02000603000000000000" pitchFamily="2" charset="0"/>
+                <a:cs typeface="CMU Serif" panose="02000603000000000000" pitchFamily="2" charset="0"/>
+              </a:rPr>
+              <a:t>y</a:t>
+            </a:r>
+            <a:r>
+              <a:rPr lang="de-DE" sz="1100" dirty="0">
+                <a:solidFill>
+                  <a:schemeClr val="accent2">
+                    <a:lumMod val="75000"/>
+                  </a:schemeClr>
+                </a:solidFill>
+                <a:latin typeface="CMU Serif" panose="02000603000000000000" pitchFamily="2" charset="0"/>
+                <a:ea typeface="CMU Serif" panose="02000603000000000000" pitchFamily="2" charset="0"/>
+                <a:cs typeface="CMU Serif" panose="02000603000000000000" pitchFamily="2" charset="0"/>
+              </a:rPr>
+              <a:t> = </a:t>
+            </a:r>
+            <a:r>
+              <a:rPr lang="de-DE" sz="1100" i="1" dirty="0">
+                <a:solidFill>
+                  <a:schemeClr val="accent2">
+                    <a:lumMod val="75000"/>
+                  </a:schemeClr>
+                </a:solidFill>
+                <a:latin typeface="CMU Serif" panose="02000603000000000000" pitchFamily="2" charset="0"/>
+                <a:ea typeface="CMU Serif" panose="02000603000000000000" pitchFamily="2" charset="0"/>
+                <a:cs typeface="CMU Serif" panose="02000603000000000000" pitchFamily="2" charset="0"/>
+              </a:rPr>
+              <a:t>m x</a:t>
+            </a:r>
+            <a:r>
+              <a:rPr lang="de-DE" sz="1100" dirty="0">
+                <a:solidFill>
+                  <a:schemeClr val="accent2">
+                    <a:lumMod val="75000"/>
+                  </a:schemeClr>
+                </a:solidFill>
+                <a:latin typeface="CMU Serif" panose="02000603000000000000" pitchFamily="2" charset="0"/>
+                <a:ea typeface="CMU Serif" panose="02000603000000000000" pitchFamily="2" charset="0"/>
+                <a:cs typeface="CMU Serif" panose="02000603000000000000" pitchFamily="2" charset="0"/>
+              </a:rPr>
+              <a:t> + </a:t>
+            </a:r>
+            <a:r>
+              <a:rPr lang="de-DE" sz="1100" i="1" dirty="0">
+                <a:solidFill>
+                  <a:schemeClr val="accent2">
+                    <a:lumMod val="75000"/>
+                  </a:schemeClr>
+                </a:solidFill>
+                <a:latin typeface="CMU Serif" panose="02000603000000000000" pitchFamily="2" charset="0"/>
+                <a:ea typeface="CMU Serif" panose="02000603000000000000" pitchFamily="2" charset="0"/>
+                <a:cs typeface="CMU Serif" panose="02000603000000000000" pitchFamily="2" charset="0"/>
+              </a:rPr>
+              <a:t>b</a:t>
+            </a:r>
+            <a:endParaRPr lang="de-DE" sz="1100" i="1" baseline="-25000" dirty="0">
+              <a:solidFill>
+                <a:schemeClr val="accent2">
+                  <a:lumMod val="75000"/>
+                </a:schemeClr>
+              </a:solidFill>
+              <a:latin typeface="CMU Serif" panose="02000603000000000000" pitchFamily="2" charset="0"/>
+              <a:ea typeface="CMU Serif" panose="02000603000000000000" pitchFamily="2" charset="0"/>
+              <a:cs typeface="CMU Serif" panose="02000603000000000000" pitchFamily="2" charset="0"/>
+            </a:endParaRPr>
+          </a:p>
+        </p:txBody>
+      </p:sp>
+      <p:sp>
+        <p:nvSpPr>
+          <p:cNvPr id="43" name="Textfeld 42">
+            <a:extLst>
+              <a:ext uri="{FF2B5EF4-FFF2-40B4-BE49-F238E27FC236}">
+                <a16:creationId xmlns:a16="http://schemas.microsoft.com/office/drawing/2014/main" id="{EA027674-C725-EFF8-5F78-D7D675B5124A}"/>
+              </a:ext>
+            </a:extLst>
+          </p:cNvPr>
+          <p:cNvSpPr txBox="1"/>
+          <p:nvPr/>
+        </p:nvSpPr>
+        <p:spPr>
+          <a:xfrm>
+            <a:off x="2026920" y="1452906"/>
+            <a:ext cx="483898" cy="261610"/>
+          </a:xfrm>
+          <a:prstGeom prst="rect">
+            <a:avLst/>
+          </a:prstGeom>
+          <a:noFill/>
+        </p:spPr>
+        <p:txBody>
+          <a:bodyPr wrap="square" rtlCol="0">
+            <a:spAutoFit/>
+          </a:bodyPr>
+          <a:lstStyle/>
+          <a:p>
+            <a:pPr algn="ctr"/>
+            <a:r>
+              <a:rPr lang="de-DE" sz="1100" i="1" dirty="0">
+                <a:solidFill>
+                  <a:schemeClr val="accent2">
+                    <a:lumMod val="75000"/>
+                  </a:schemeClr>
+                </a:solidFill>
+                <a:latin typeface="CMU Serif" panose="02000603000000000000" pitchFamily="2" charset="0"/>
+                <a:ea typeface="CMU Serif" panose="02000603000000000000" pitchFamily="2" charset="0"/>
+                <a:cs typeface="CMU Serif" panose="02000603000000000000" pitchFamily="2" charset="0"/>
+              </a:rPr>
+              <a:t>m </a:t>
+            </a:r>
+            <a:r>
+              <a:rPr lang="de-DE" sz="1100" dirty="0">
+                <a:solidFill>
+                  <a:schemeClr val="accent2">
+                    <a:lumMod val="75000"/>
+                  </a:schemeClr>
+                </a:solidFill>
+                <a:latin typeface="CMU Serif" panose="02000603000000000000" pitchFamily="2" charset="0"/>
+                <a:ea typeface="CMU Serif" panose="02000603000000000000" pitchFamily="2" charset="0"/>
+                <a:cs typeface="CMU Serif" panose="02000603000000000000" pitchFamily="2" charset="0"/>
+              </a:rPr>
+              <a:t>= </a:t>
+            </a:r>
+            <a:r>
+              <a:rPr lang="de-DE" sz="1100" i="1" dirty="0">
+                <a:solidFill>
+                  <a:schemeClr val="accent2">
+                    <a:lumMod val="75000"/>
+                  </a:schemeClr>
+                </a:solidFill>
+                <a:latin typeface="CMU Serif" panose="02000603000000000000" pitchFamily="2" charset="0"/>
+                <a:ea typeface="CMU Serif" panose="02000603000000000000" pitchFamily="2" charset="0"/>
+                <a:cs typeface="CMU Serif" panose="02000603000000000000" pitchFamily="2" charset="0"/>
+              </a:rPr>
+              <a:t> </a:t>
+            </a:r>
+            <a:endParaRPr lang="de-DE" sz="1100" i="1" baseline="-25000" dirty="0">
+              <a:solidFill>
+                <a:schemeClr val="accent2">
+                  <a:lumMod val="75000"/>
+                </a:schemeClr>
+              </a:solidFill>
+              <a:latin typeface="CMU Serif" panose="02000603000000000000" pitchFamily="2" charset="0"/>
+              <a:ea typeface="CMU Serif" panose="02000603000000000000" pitchFamily="2" charset="0"/>
+              <a:cs typeface="CMU Serif" panose="02000603000000000000" pitchFamily="2" charset="0"/>
+            </a:endParaRPr>
+          </a:p>
+        </p:txBody>
+      </p:sp>
+      <p:sp>
+        <p:nvSpPr>
+          <p:cNvPr id="44" name="Textfeld 43">
+            <a:extLst>
+              <a:ext uri="{FF2B5EF4-FFF2-40B4-BE49-F238E27FC236}">
+                <a16:creationId xmlns:a16="http://schemas.microsoft.com/office/drawing/2014/main" id="{EEBBA1E4-227D-C9CB-6AE9-1F49A64B5D67}"/>
+              </a:ext>
+            </a:extLst>
+          </p:cNvPr>
+          <p:cNvSpPr txBox="1"/>
+          <p:nvPr/>
+        </p:nvSpPr>
+        <p:spPr>
+          <a:xfrm>
+            <a:off x="2343105" y="1378908"/>
+            <a:ext cx="474616" cy="430887"/>
+          </a:xfrm>
+          <a:prstGeom prst="rect">
+            <a:avLst/>
+          </a:prstGeom>
+          <a:noFill/>
+        </p:spPr>
+        <p:txBody>
+          <a:bodyPr wrap="square" rtlCol="0">
+            <a:spAutoFit/>
+          </a:bodyPr>
+          <a:lstStyle/>
+          <a:p>
+            <a:pPr algn="ctr"/>
+            <a:r>
+              <a:rPr lang="de-DE" sz="1100" dirty="0">
+                <a:solidFill>
+                  <a:schemeClr val="accent2">
+                    <a:lumMod val="75000"/>
+                  </a:schemeClr>
+                </a:solidFill>
+                <a:latin typeface="CMU Serif" panose="02000603000000000000" pitchFamily="2" charset="0"/>
+                <a:ea typeface="CMU Serif" panose="02000603000000000000" pitchFamily="2" charset="0"/>
+                <a:cs typeface="CMU Serif" panose="02000603000000000000" pitchFamily="2" charset="0"/>
+              </a:rPr>
+              <a:t>Δ</a:t>
+            </a:r>
+            <a:r>
+              <a:rPr lang="de-DE" sz="1100" i="1" dirty="0">
+                <a:solidFill>
+                  <a:schemeClr val="accent2">
+                    <a:lumMod val="75000"/>
+                  </a:schemeClr>
+                </a:solidFill>
+                <a:latin typeface="CMU Serif" panose="02000603000000000000" pitchFamily="2" charset="0"/>
+                <a:ea typeface="CMU Serif" panose="02000603000000000000" pitchFamily="2" charset="0"/>
+                <a:cs typeface="CMU Serif" panose="02000603000000000000" pitchFamily="2" charset="0"/>
+              </a:rPr>
+              <a:t>U</a:t>
+            </a:r>
+          </a:p>
+          <a:p>
+            <a:pPr algn="ctr"/>
+            <a:r>
+              <a:rPr lang="de-DE" sz="1100" dirty="0">
+                <a:solidFill>
+                  <a:schemeClr val="accent2">
+                    <a:lumMod val="75000"/>
+                  </a:schemeClr>
+                </a:solidFill>
+                <a:latin typeface="CMU Serif" panose="02000603000000000000" pitchFamily="2" charset="0"/>
+                <a:ea typeface="CMU Serif" panose="02000603000000000000" pitchFamily="2" charset="0"/>
+                <a:cs typeface="CMU Serif" panose="02000603000000000000" pitchFamily="2" charset="0"/>
+              </a:rPr>
+              <a:t>Δ</a:t>
+            </a:r>
+            <a:r>
+              <a:rPr lang="de-DE" sz="1100" i="1" dirty="0">
+                <a:solidFill>
+                  <a:schemeClr val="accent2">
+                    <a:lumMod val="75000"/>
+                  </a:schemeClr>
+                </a:solidFill>
+                <a:latin typeface="CMU Serif" panose="02000603000000000000" pitchFamily="2" charset="0"/>
+                <a:ea typeface="CMU Serif" panose="02000603000000000000" pitchFamily="2" charset="0"/>
+                <a:cs typeface="CMU Serif" panose="02000603000000000000" pitchFamily="2" charset="0"/>
+              </a:rPr>
+              <a:t>I</a:t>
+            </a:r>
+            <a:r>
+              <a:rPr lang="de-DE" sz="1100" dirty="0">
+                <a:solidFill>
+                  <a:schemeClr val="accent2">
+                    <a:lumMod val="75000"/>
+                  </a:schemeClr>
+                </a:solidFill>
+                <a:latin typeface="CMU Serif" panose="02000603000000000000" pitchFamily="2" charset="0"/>
+                <a:ea typeface="CMU Serif" panose="02000603000000000000" pitchFamily="2" charset="0"/>
+                <a:cs typeface="CMU Serif" panose="02000603000000000000" pitchFamily="2" charset="0"/>
+              </a:rPr>
+              <a:t> </a:t>
+            </a:r>
+            <a:r>
+              <a:rPr lang="de-DE" sz="1100" i="1" dirty="0">
+                <a:solidFill>
+                  <a:schemeClr val="accent2">
+                    <a:lumMod val="75000"/>
+                  </a:schemeClr>
+                </a:solidFill>
+                <a:latin typeface="CMU Serif" panose="02000603000000000000" pitchFamily="2" charset="0"/>
+                <a:ea typeface="CMU Serif" panose="02000603000000000000" pitchFamily="2" charset="0"/>
+                <a:cs typeface="CMU Serif" panose="02000603000000000000" pitchFamily="2" charset="0"/>
+              </a:rPr>
+              <a:t> </a:t>
+            </a:r>
+            <a:endParaRPr lang="de-DE" sz="1100" i="1" baseline="-25000" dirty="0">
+              <a:solidFill>
+                <a:schemeClr val="accent2">
+                  <a:lumMod val="75000"/>
+                </a:schemeClr>
+              </a:solidFill>
+              <a:latin typeface="CMU Serif" panose="02000603000000000000" pitchFamily="2" charset="0"/>
+              <a:ea typeface="CMU Serif" panose="02000603000000000000" pitchFamily="2" charset="0"/>
+              <a:cs typeface="CMU Serif" panose="02000603000000000000" pitchFamily="2" charset="0"/>
+            </a:endParaRPr>
+          </a:p>
+        </p:txBody>
+      </p:sp>
+      <p:cxnSp>
+        <p:nvCxnSpPr>
+          <p:cNvPr id="46" name="Gerader Verbinder 45">
+            <a:extLst>
+              <a:ext uri="{FF2B5EF4-FFF2-40B4-BE49-F238E27FC236}">
+                <a16:creationId xmlns:a16="http://schemas.microsoft.com/office/drawing/2014/main" id="{A08DEB1F-2DBD-75B6-6C31-1B4C2629DBC5}"/>
+              </a:ext>
+            </a:extLst>
+          </p:cNvPr>
+          <p:cNvCxnSpPr>
+            <a:cxnSpLocks/>
+          </p:cNvCxnSpPr>
+          <p:nvPr/>
+        </p:nvCxnSpPr>
+        <p:spPr>
+          <a:xfrm>
+            <a:off x="2456356" y="1580426"/>
+            <a:ext cx="254459" cy="0"/>
+          </a:xfrm>
+          <a:prstGeom prst="line">
+            <a:avLst/>
+          </a:prstGeom>
+          <a:ln w="6350">
+            <a:solidFill>
+              <a:schemeClr val="accent2">
+                <a:lumMod val="75000"/>
+              </a:schemeClr>
+            </a:solidFill>
+          </a:ln>
+        </p:spPr>
+        <p:style>
+          <a:lnRef idx="2">
+            <a:schemeClr val="accent1"/>
+          </a:lnRef>
+          <a:fillRef idx="0">
+            <a:schemeClr val="accent1"/>
+          </a:fillRef>
+          <a:effectRef idx="1">
+            <a:schemeClr val="accent1"/>
+          </a:effectRef>
+          <a:fontRef idx="minor">
+            <a:schemeClr val="tx1"/>
+          </a:fontRef>
+        </p:style>
+      </p:cxnSp>
+    </p:spTree>
+    <p:extLst>
+      <p:ext uri="{BB962C8B-B14F-4D97-AF65-F5344CB8AC3E}">
+        <p14:creationId xmlns:p14="http://schemas.microsoft.com/office/powerpoint/2010/main" val="2468398840"/>
       </p:ext>
     </p:extLst>
   </p:cSld>

--- a/B.Sc. LRT/Grundlagen der Elektrotechnik/images/ETech-Images.pptx
+++ b/B.Sc. LRT/Grundlagen der Elektrotechnik/images/ETech-Images.pptx
@@ -5,7 +5,7 @@
     <p:sldMasterId id="2147483660" r:id="rId1"/>
   </p:sldMasterIdLst>
   <p:notesMasterIdLst>
-    <p:notesMasterId r:id="rId9"/>
+    <p:notesMasterId r:id="rId12"/>
   </p:notesMasterIdLst>
   <p:sldIdLst>
     <p:sldId id="256" r:id="rId2"/>
@@ -15,6 +15,9 @@
     <p:sldId id="260" r:id="rId6"/>
     <p:sldId id="261" r:id="rId7"/>
     <p:sldId id="262" r:id="rId8"/>
+    <p:sldId id="263" r:id="rId9"/>
+    <p:sldId id="265" r:id="rId10"/>
+    <p:sldId id="264" r:id="rId11"/>
   </p:sldIdLst>
   <p:sldSz cx="3600450" cy="3600450"/>
   <p:notesSz cx="6858000" cy="9144000"/>
@@ -203,7 +206,7 @@
           <a:p>
             <a:fld id="{0C596C2D-C72C-406E-B79E-9BAC142DD20E}" type="datetimeFigureOut">
               <a:rPr lang="de-DE" smtClean="0"/>
-              <a:t>31.01.2026</a:t>
+              <a:t>11.02.2026</a:t>
             </a:fld>
             <a:endParaRPr lang="de-DE"/>
           </a:p>
@@ -601,7 +604,7 @@
           <a:p>
             <a:fld id="{6EAE28AA-0912-4DA0-8B30-7F3CA3FE6671}" type="datetimeFigureOut">
               <a:rPr lang="de-DE" smtClean="0"/>
-              <a:t>31.01.2026</a:t>
+              <a:t>11.02.2026</a:t>
             </a:fld>
             <a:endParaRPr lang="de-DE"/>
           </a:p>
@@ -771,7 +774,7 @@
           <a:p>
             <a:fld id="{6EAE28AA-0912-4DA0-8B30-7F3CA3FE6671}" type="datetimeFigureOut">
               <a:rPr lang="de-DE" smtClean="0"/>
-              <a:t>31.01.2026</a:t>
+              <a:t>11.02.2026</a:t>
             </a:fld>
             <a:endParaRPr lang="de-DE"/>
           </a:p>
@@ -951,7 +954,7 @@
           <a:p>
             <a:fld id="{6EAE28AA-0912-4DA0-8B30-7F3CA3FE6671}" type="datetimeFigureOut">
               <a:rPr lang="de-DE" smtClean="0"/>
-              <a:t>31.01.2026</a:t>
+              <a:t>11.02.2026</a:t>
             </a:fld>
             <a:endParaRPr lang="de-DE"/>
           </a:p>
@@ -1121,7 +1124,7 @@
           <a:p>
             <a:fld id="{6EAE28AA-0912-4DA0-8B30-7F3CA3FE6671}" type="datetimeFigureOut">
               <a:rPr lang="de-DE" smtClean="0"/>
-              <a:t>31.01.2026</a:t>
+              <a:t>11.02.2026</a:t>
             </a:fld>
             <a:endParaRPr lang="de-DE"/>
           </a:p>
@@ -1367,7 +1370,7 @@
           <a:p>
             <a:fld id="{6EAE28AA-0912-4DA0-8B30-7F3CA3FE6671}" type="datetimeFigureOut">
               <a:rPr lang="de-DE" smtClean="0"/>
-              <a:t>31.01.2026</a:t>
+              <a:t>11.02.2026</a:t>
             </a:fld>
             <a:endParaRPr lang="de-DE"/>
           </a:p>
@@ -1599,7 +1602,7 @@
           <a:p>
             <a:fld id="{6EAE28AA-0912-4DA0-8B30-7F3CA3FE6671}" type="datetimeFigureOut">
               <a:rPr lang="de-DE" smtClean="0"/>
-              <a:t>31.01.2026</a:t>
+              <a:t>11.02.2026</a:t>
             </a:fld>
             <a:endParaRPr lang="de-DE"/>
           </a:p>
@@ -1966,7 +1969,7 @@
           <a:p>
             <a:fld id="{6EAE28AA-0912-4DA0-8B30-7F3CA3FE6671}" type="datetimeFigureOut">
               <a:rPr lang="de-DE" smtClean="0"/>
-              <a:t>31.01.2026</a:t>
+              <a:t>11.02.2026</a:t>
             </a:fld>
             <a:endParaRPr lang="de-DE"/>
           </a:p>
@@ -2084,7 +2087,7 @@
           <a:p>
             <a:fld id="{6EAE28AA-0912-4DA0-8B30-7F3CA3FE6671}" type="datetimeFigureOut">
               <a:rPr lang="de-DE" smtClean="0"/>
-              <a:t>31.01.2026</a:t>
+              <a:t>11.02.2026</a:t>
             </a:fld>
             <a:endParaRPr lang="de-DE"/>
           </a:p>
@@ -2179,7 +2182,7 @@
           <a:p>
             <a:fld id="{6EAE28AA-0912-4DA0-8B30-7F3CA3FE6671}" type="datetimeFigureOut">
               <a:rPr lang="de-DE" smtClean="0"/>
-              <a:t>31.01.2026</a:t>
+              <a:t>11.02.2026</a:t>
             </a:fld>
             <a:endParaRPr lang="de-DE"/>
           </a:p>
@@ -2456,7 +2459,7 @@
           <a:p>
             <a:fld id="{6EAE28AA-0912-4DA0-8B30-7F3CA3FE6671}" type="datetimeFigureOut">
               <a:rPr lang="de-DE" smtClean="0"/>
-              <a:t>31.01.2026</a:t>
+              <a:t>11.02.2026</a:t>
             </a:fld>
             <a:endParaRPr lang="de-DE"/>
           </a:p>
@@ -2713,7 +2716,7 @@
           <a:p>
             <a:fld id="{6EAE28AA-0912-4DA0-8B30-7F3CA3FE6671}" type="datetimeFigureOut">
               <a:rPr lang="de-DE" smtClean="0"/>
-              <a:t>31.01.2026</a:t>
+              <a:t>11.02.2026</a:t>
             </a:fld>
             <a:endParaRPr lang="de-DE"/>
           </a:p>
@@ -2926,7 +2929,7 @@
           <a:p>
             <a:fld id="{6EAE28AA-0912-4DA0-8B30-7F3CA3FE6671}" type="datetimeFigureOut">
               <a:rPr lang="de-DE" smtClean="0"/>
-              <a:t>31.01.2026</a:t>
+              <a:t>11.02.2026</a:t>
             </a:fld>
             <a:endParaRPr lang="de-DE"/>
           </a:p>
@@ -4154,6 +4157,640 @@
 </p:sld>
 </file>
 
+<file path=ppt/slides/slide10.xml><?xml version="1.0" encoding="utf-8"?>
+<p:sld xmlns:a="http://schemas.openxmlformats.org/drawingml/2006/main" xmlns:r="http://schemas.openxmlformats.org/officeDocument/2006/relationships" xmlns:p="http://schemas.openxmlformats.org/presentationml/2006/main">
+  <p:cSld>
+    <p:spTree>
+      <p:nvGrpSpPr>
+        <p:cNvPr id="1" name="">
+          <a:extLst>
+            <a:ext uri="{FF2B5EF4-FFF2-40B4-BE49-F238E27FC236}">
+              <a16:creationId xmlns:a16="http://schemas.microsoft.com/office/drawing/2014/main" id="{59AF6BB8-6D1D-C6EF-674D-CF2A11B76646}"/>
+            </a:ext>
+          </a:extLst>
+        </p:cNvPr>
+        <p:cNvGrpSpPr/>
+        <p:nvPr/>
+      </p:nvGrpSpPr>
+      <p:grpSpPr>
+        <a:xfrm>
+          <a:off x="0" y="0"/>
+          <a:ext cx="0" cy="0"/>
+          <a:chOff x="0" y="0"/>
+          <a:chExt cx="0" cy="0"/>
+        </a:xfrm>
+      </p:grpSpPr>
+      <p:sp>
+        <p:nvSpPr>
+          <p:cNvPr id="19" name="Bogen 18">
+            <a:extLst>
+              <a:ext uri="{FF2B5EF4-FFF2-40B4-BE49-F238E27FC236}">
+                <a16:creationId xmlns:a16="http://schemas.microsoft.com/office/drawing/2014/main" id="{08B87E38-B585-D9F4-2D28-0DDF968FD2CB}"/>
+              </a:ext>
+            </a:extLst>
+          </p:cNvPr>
+          <p:cNvSpPr/>
+          <p:nvPr/>
+        </p:nvSpPr>
+        <p:spPr>
+          <a:xfrm>
+            <a:off x="886221" y="1509386"/>
+            <a:ext cx="1220493" cy="1220493"/>
+          </a:xfrm>
+          <a:prstGeom prst="arc">
+            <a:avLst>
+              <a:gd name="adj1" fmla="val 19392774"/>
+              <a:gd name="adj2" fmla="val 0"/>
+            </a:avLst>
+          </a:prstGeom>
+          <a:ln cap="rnd">
+            <a:solidFill>
+              <a:schemeClr val="accent5"/>
+            </a:solidFill>
+            <a:round/>
+            <a:headEnd type="triangle"/>
+          </a:ln>
+        </p:spPr>
+        <p:style>
+          <a:lnRef idx="2">
+            <a:schemeClr val="accent1"/>
+          </a:lnRef>
+          <a:fillRef idx="0">
+            <a:schemeClr val="accent1"/>
+          </a:fillRef>
+          <a:effectRef idx="1">
+            <a:schemeClr val="accent1"/>
+          </a:effectRef>
+          <a:fontRef idx="minor">
+            <a:schemeClr val="tx1"/>
+          </a:fontRef>
+        </p:style>
+        <p:txBody>
+          <a:bodyPr rtlCol="0" anchor="ctr"/>
+          <a:lstStyle/>
+          <a:p>
+            <a:pPr algn="ctr"/>
+            <a:endParaRPr lang="de-DE" sz="2400"/>
+          </a:p>
+        </p:txBody>
+      </p:sp>
+      <p:cxnSp>
+        <p:nvCxnSpPr>
+          <p:cNvPr id="8" name="Gerade Verbindung mit Pfeil 7">
+            <a:extLst>
+              <a:ext uri="{FF2B5EF4-FFF2-40B4-BE49-F238E27FC236}">
+                <a16:creationId xmlns:a16="http://schemas.microsoft.com/office/drawing/2014/main" id="{6D4BA143-2EE3-B62E-3811-EC5C2C16CD3F}"/>
+              </a:ext>
+            </a:extLst>
+          </p:cNvPr>
+          <p:cNvCxnSpPr>
+            <a:cxnSpLocks/>
+          </p:cNvCxnSpPr>
+          <p:nvPr/>
+        </p:nvCxnSpPr>
+        <p:spPr>
+          <a:xfrm flipV="1">
+            <a:off x="1496469" y="1512518"/>
+            <a:ext cx="799680" cy="607121"/>
+          </a:xfrm>
+          <a:prstGeom prst="straightConnector1">
+            <a:avLst/>
+          </a:prstGeom>
+          <a:ln cap="rnd">
+            <a:solidFill>
+              <a:srgbClr val="086FBD"/>
+            </a:solidFill>
+            <a:round/>
+            <a:tailEnd type="triangle" w="med" len="med"/>
+          </a:ln>
+        </p:spPr>
+        <p:style>
+          <a:lnRef idx="2">
+            <a:schemeClr val="accent1"/>
+          </a:lnRef>
+          <a:fillRef idx="0">
+            <a:schemeClr val="accent1"/>
+          </a:fillRef>
+          <a:effectRef idx="1">
+            <a:schemeClr val="accent1"/>
+          </a:effectRef>
+          <a:fontRef idx="minor">
+            <a:schemeClr val="tx1"/>
+          </a:fontRef>
+        </p:style>
+      </p:cxnSp>
+      <p:cxnSp>
+        <p:nvCxnSpPr>
+          <p:cNvPr id="10" name="Gerade Verbindung mit Pfeil 9">
+            <a:extLst>
+              <a:ext uri="{FF2B5EF4-FFF2-40B4-BE49-F238E27FC236}">
+                <a16:creationId xmlns:a16="http://schemas.microsoft.com/office/drawing/2014/main" id="{78FA873B-332F-2A4F-5031-351A55B64ECE}"/>
+              </a:ext>
+            </a:extLst>
+          </p:cNvPr>
+          <p:cNvCxnSpPr>
+            <a:cxnSpLocks/>
+          </p:cNvCxnSpPr>
+          <p:nvPr/>
+        </p:nvCxnSpPr>
+        <p:spPr>
+          <a:xfrm flipV="1">
+            <a:off x="1496468" y="1675356"/>
+            <a:ext cx="585195" cy="444283"/>
+          </a:xfrm>
+          <a:prstGeom prst="straightConnector1">
+            <a:avLst/>
+          </a:prstGeom>
+          <a:ln w="19050" cap="rnd">
+            <a:solidFill>
+              <a:srgbClr val="FF0000"/>
+            </a:solidFill>
+            <a:round/>
+            <a:tailEnd type="triangle" w="med" len="med"/>
+          </a:ln>
+        </p:spPr>
+        <p:style>
+          <a:lnRef idx="2">
+            <a:schemeClr val="accent1"/>
+          </a:lnRef>
+          <a:fillRef idx="0">
+            <a:schemeClr val="accent1"/>
+          </a:fillRef>
+          <a:effectRef idx="1">
+            <a:schemeClr val="accent1"/>
+          </a:effectRef>
+          <a:fontRef idx="minor">
+            <a:schemeClr val="tx1"/>
+          </a:fontRef>
+        </p:style>
+      </p:cxnSp>
+      <p:cxnSp>
+        <p:nvCxnSpPr>
+          <p:cNvPr id="5" name="Gerade Verbindung mit Pfeil 4">
+            <a:extLst>
+              <a:ext uri="{FF2B5EF4-FFF2-40B4-BE49-F238E27FC236}">
+                <a16:creationId xmlns:a16="http://schemas.microsoft.com/office/drawing/2014/main" id="{F4CAB231-1972-25BB-D11C-0014B56F43F2}"/>
+              </a:ext>
+            </a:extLst>
+          </p:cNvPr>
+          <p:cNvCxnSpPr>
+            <a:cxnSpLocks/>
+          </p:cNvCxnSpPr>
+          <p:nvPr/>
+        </p:nvCxnSpPr>
+        <p:spPr>
+          <a:xfrm flipV="1">
+            <a:off x="1496469" y="1090939"/>
+            <a:ext cx="0" cy="1373557"/>
+          </a:xfrm>
+          <a:prstGeom prst="straightConnector1">
+            <a:avLst/>
+          </a:prstGeom>
+          <a:ln cap="rnd">
+            <a:solidFill>
+              <a:schemeClr val="tx1"/>
+            </a:solidFill>
+            <a:round/>
+            <a:tailEnd type="triangle" w="med" len="med"/>
+          </a:ln>
+        </p:spPr>
+        <p:style>
+          <a:lnRef idx="2">
+            <a:schemeClr val="accent1"/>
+          </a:lnRef>
+          <a:fillRef idx="0">
+            <a:schemeClr val="accent1"/>
+          </a:fillRef>
+          <a:effectRef idx="1">
+            <a:schemeClr val="accent1"/>
+          </a:effectRef>
+          <a:fontRef idx="minor">
+            <a:schemeClr val="tx1"/>
+          </a:fontRef>
+        </p:style>
+      </p:cxnSp>
+      <p:cxnSp>
+        <p:nvCxnSpPr>
+          <p:cNvPr id="6" name="Gerade Verbindung mit Pfeil 5">
+            <a:extLst>
+              <a:ext uri="{FF2B5EF4-FFF2-40B4-BE49-F238E27FC236}">
+                <a16:creationId xmlns:a16="http://schemas.microsoft.com/office/drawing/2014/main" id="{8C88241A-EB7B-07A8-F278-E5DA0AAFA51F}"/>
+              </a:ext>
+            </a:extLst>
+          </p:cNvPr>
+          <p:cNvCxnSpPr>
+            <a:cxnSpLocks/>
+          </p:cNvCxnSpPr>
+          <p:nvPr/>
+        </p:nvCxnSpPr>
+        <p:spPr>
+          <a:xfrm>
+            <a:off x="1030266" y="2119639"/>
+            <a:ext cx="1500513" cy="0"/>
+          </a:xfrm>
+          <a:prstGeom prst="straightConnector1">
+            <a:avLst/>
+          </a:prstGeom>
+          <a:ln cap="rnd">
+            <a:solidFill>
+              <a:schemeClr val="tx1"/>
+            </a:solidFill>
+            <a:round/>
+            <a:tailEnd type="triangle" w="med" len="med"/>
+          </a:ln>
+        </p:spPr>
+        <p:style>
+          <a:lnRef idx="2">
+            <a:schemeClr val="accent1"/>
+          </a:lnRef>
+          <a:fillRef idx="0">
+            <a:schemeClr val="accent1"/>
+          </a:fillRef>
+          <a:effectRef idx="1">
+            <a:schemeClr val="accent1"/>
+          </a:effectRef>
+          <a:fontRef idx="minor">
+            <a:schemeClr val="tx1"/>
+          </a:fontRef>
+        </p:style>
+      </p:cxnSp>
+      <p:sp>
+        <p:nvSpPr>
+          <p:cNvPr id="13" name="Textfeld 12">
+            <a:extLst>
+              <a:ext uri="{FF2B5EF4-FFF2-40B4-BE49-F238E27FC236}">
+                <a16:creationId xmlns:a16="http://schemas.microsoft.com/office/drawing/2014/main" id="{00444581-34A9-6C9F-1461-BEA3B7AA5AB4}"/>
+              </a:ext>
+            </a:extLst>
+          </p:cNvPr>
+          <p:cNvSpPr txBox="1"/>
+          <p:nvPr/>
+        </p:nvSpPr>
+        <p:spPr>
+          <a:xfrm>
+            <a:off x="1962673" y="1128418"/>
+            <a:ext cx="567731" cy="307777"/>
+          </a:xfrm>
+          <a:prstGeom prst="rect">
+            <a:avLst/>
+          </a:prstGeom>
+          <a:noFill/>
+        </p:spPr>
+        <p:txBody>
+          <a:bodyPr wrap="square" rtlCol="0">
+            <a:spAutoFit/>
+          </a:bodyPr>
+          <a:lstStyle/>
+          <a:p>
+            <a:pPr algn="ctr"/>
+            <a:r>
+              <a:rPr lang="de-DE" sz="1400" i="1" dirty="0" err="1">
+                <a:solidFill>
+                  <a:srgbClr val="086FBD"/>
+                </a:solidFill>
+                <a:latin typeface="CMU Serif" panose="02000603000000000000" pitchFamily="2" charset="0"/>
+                <a:ea typeface="CMU Serif" panose="02000603000000000000" pitchFamily="2" charset="0"/>
+                <a:cs typeface="CMU Serif" panose="02000603000000000000" pitchFamily="2" charset="0"/>
+              </a:rPr>
+              <a:t>u</a:t>
+            </a:r>
+            <a:r>
+              <a:rPr lang="de-DE" sz="1400" i="1" baseline="-25000" dirty="0" err="1">
+                <a:solidFill>
+                  <a:srgbClr val="086FBD"/>
+                </a:solidFill>
+                <a:latin typeface="CMU Serif" panose="02000603000000000000" pitchFamily="2" charset="0"/>
+                <a:ea typeface="CMU Serif" panose="02000603000000000000" pitchFamily="2" charset="0"/>
+                <a:cs typeface="CMU Serif" panose="02000603000000000000" pitchFamily="2" charset="0"/>
+              </a:rPr>
+              <a:t>R</a:t>
+            </a:r>
+            <a:r>
+              <a:rPr lang="de-DE" sz="1400" dirty="0">
+                <a:solidFill>
+                  <a:srgbClr val="086FBD"/>
+                </a:solidFill>
+                <a:latin typeface="CMU Serif" panose="02000603000000000000" pitchFamily="2" charset="0"/>
+                <a:ea typeface="CMU Serif" panose="02000603000000000000" pitchFamily="2" charset="0"/>
+                <a:cs typeface="CMU Serif" panose="02000603000000000000" pitchFamily="2" charset="0"/>
+              </a:rPr>
+              <a:t>(</a:t>
+            </a:r>
+            <a:r>
+              <a:rPr lang="de-DE" sz="1400" i="1" dirty="0">
+                <a:solidFill>
+                  <a:srgbClr val="086FBD"/>
+                </a:solidFill>
+                <a:latin typeface="CMU Serif" panose="02000603000000000000" pitchFamily="2" charset="0"/>
+                <a:ea typeface="CMU Serif" panose="02000603000000000000" pitchFamily="2" charset="0"/>
+                <a:cs typeface="CMU Serif" panose="02000603000000000000" pitchFamily="2" charset="0"/>
+              </a:rPr>
+              <a:t>t</a:t>
+            </a:r>
+            <a:r>
+              <a:rPr lang="de-DE" sz="1400" dirty="0">
+                <a:solidFill>
+                  <a:srgbClr val="086FBD"/>
+                </a:solidFill>
+                <a:latin typeface="CMU Serif" panose="02000603000000000000" pitchFamily="2" charset="0"/>
+                <a:ea typeface="CMU Serif" panose="02000603000000000000" pitchFamily="2" charset="0"/>
+                <a:cs typeface="CMU Serif" panose="02000603000000000000" pitchFamily="2" charset="0"/>
+              </a:rPr>
+              <a:t>)</a:t>
+            </a:r>
+            <a:endParaRPr lang="de-DE" sz="1400" baseline="-25000" dirty="0">
+              <a:solidFill>
+                <a:srgbClr val="086FBD"/>
+              </a:solidFill>
+              <a:latin typeface="CMU Serif" panose="02000603000000000000" pitchFamily="2" charset="0"/>
+              <a:ea typeface="CMU Serif" panose="02000603000000000000" pitchFamily="2" charset="0"/>
+              <a:cs typeface="CMU Serif" panose="02000603000000000000" pitchFamily="2" charset="0"/>
+            </a:endParaRPr>
+          </a:p>
+        </p:txBody>
+      </p:sp>
+      <p:sp>
+        <p:nvSpPr>
+          <p:cNvPr id="14" name="Textfeld 13">
+            <a:extLst>
+              <a:ext uri="{FF2B5EF4-FFF2-40B4-BE49-F238E27FC236}">
+                <a16:creationId xmlns:a16="http://schemas.microsoft.com/office/drawing/2014/main" id="{5567ECA1-FAB2-D0BD-2641-FE47C133A964}"/>
+              </a:ext>
+            </a:extLst>
+          </p:cNvPr>
+          <p:cNvSpPr txBox="1"/>
+          <p:nvPr/>
+        </p:nvSpPr>
+        <p:spPr>
+          <a:xfrm>
+            <a:off x="1529673" y="1365291"/>
+            <a:ext cx="518786" cy="307777"/>
+          </a:xfrm>
+          <a:prstGeom prst="rect">
+            <a:avLst/>
+          </a:prstGeom>
+          <a:noFill/>
+        </p:spPr>
+        <p:txBody>
+          <a:bodyPr wrap="square" rtlCol="0">
+            <a:spAutoFit/>
+          </a:bodyPr>
+          <a:lstStyle/>
+          <a:p>
+            <a:pPr algn="ctr"/>
+            <a:r>
+              <a:rPr lang="de-DE" sz="1400" i="1" dirty="0" err="1">
+                <a:solidFill>
+                  <a:srgbClr val="FF0000"/>
+                </a:solidFill>
+                <a:latin typeface="CMU Serif" panose="02000603000000000000" pitchFamily="2" charset="0"/>
+                <a:ea typeface="CMU Serif" panose="02000603000000000000" pitchFamily="2" charset="0"/>
+                <a:cs typeface="CMU Serif" panose="02000603000000000000" pitchFamily="2" charset="0"/>
+              </a:rPr>
+              <a:t>i</a:t>
+            </a:r>
+            <a:r>
+              <a:rPr lang="de-DE" sz="1400" i="1" baseline="-25000" dirty="0" err="1">
+                <a:solidFill>
+                  <a:srgbClr val="FF0000"/>
+                </a:solidFill>
+                <a:latin typeface="CMU Serif" panose="02000603000000000000" pitchFamily="2" charset="0"/>
+                <a:ea typeface="CMU Serif" panose="02000603000000000000" pitchFamily="2" charset="0"/>
+                <a:cs typeface="CMU Serif" panose="02000603000000000000" pitchFamily="2" charset="0"/>
+              </a:rPr>
+              <a:t>R</a:t>
+            </a:r>
+            <a:r>
+              <a:rPr lang="de-DE" sz="1400" dirty="0">
+                <a:solidFill>
+                  <a:srgbClr val="FF0000"/>
+                </a:solidFill>
+                <a:latin typeface="CMU Serif" panose="02000603000000000000" pitchFamily="2" charset="0"/>
+                <a:ea typeface="CMU Serif" panose="02000603000000000000" pitchFamily="2" charset="0"/>
+                <a:cs typeface="CMU Serif" panose="02000603000000000000" pitchFamily="2" charset="0"/>
+              </a:rPr>
+              <a:t>(</a:t>
+            </a:r>
+            <a:r>
+              <a:rPr lang="de-DE" sz="1400" i="1" dirty="0">
+                <a:solidFill>
+                  <a:srgbClr val="FF0000"/>
+                </a:solidFill>
+                <a:latin typeface="CMU Serif" panose="02000603000000000000" pitchFamily="2" charset="0"/>
+                <a:ea typeface="CMU Serif" panose="02000603000000000000" pitchFamily="2" charset="0"/>
+                <a:cs typeface="CMU Serif" panose="02000603000000000000" pitchFamily="2" charset="0"/>
+              </a:rPr>
+              <a:t>t</a:t>
+            </a:r>
+            <a:r>
+              <a:rPr lang="de-DE" sz="1400" dirty="0">
+                <a:solidFill>
+                  <a:srgbClr val="FF0000"/>
+                </a:solidFill>
+                <a:latin typeface="CMU Serif" panose="02000603000000000000" pitchFamily="2" charset="0"/>
+                <a:ea typeface="CMU Serif" panose="02000603000000000000" pitchFamily="2" charset="0"/>
+                <a:cs typeface="CMU Serif" panose="02000603000000000000" pitchFamily="2" charset="0"/>
+              </a:rPr>
+              <a:t>)</a:t>
+            </a:r>
+            <a:endParaRPr lang="de-DE" sz="1400" baseline="-25000" dirty="0">
+              <a:solidFill>
+                <a:srgbClr val="FF0000"/>
+              </a:solidFill>
+              <a:latin typeface="CMU Serif" panose="02000603000000000000" pitchFamily="2" charset="0"/>
+              <a:ea typeface="CMU Serif" panose="02000603000000000000" pitchFamily="2" charset="0"/>
+              <a:cs typeface="CMU Serif" panose="02000603000000000000" pitchFamily="2" charset="0"/>
+            </a:endParaRPr>
+          </a:p>
+        </p:txBody>
+      </p:sp>
+      <p:sp>
+        <p:nvSpPr>
+          <p:cNvPr id="20" name="Textfeld 19">
+            <a:extLst>
+              <a:ext uri="{FF2B5EF4-FFF2-40B4-BE49-F238E27FC236}">
+                <a16:creationId xmlns:a16="http://schemas.microsoft.com/office/drawing/2014/main" id="{BBBA25C8-E09A-BD18-E42B-2B5C98856BD4}"/>
+              </a:ext>
+            </a:extLst>
+          </p:cNvPr>
+          <p:cNvSpPr txBox="1"/>
+          <p:nvPr/>
+        </p:nvSpPr>
+        <p:spPr>
+          <a:xfrm>
+            <a:off x="2070746" y="1767541"/>
+            <a:ext cx="518786" cy="307777"/>
+          </a:xfrm>
+          <a:prstGeom prst="rect">
+            <a:avLst/>
+          </a:prstGeom>
+          <a:noFill/>
+        </p:spPr>
+        <p:txBody>
+          <a:bodyPr wrap="square" rtlCol="0">
+            <a:spAutoFit/>
+          </a:bodyPr>
+          <a:lstStyle/>
+          <a:p>
+            <a:pPr algn="ctr"/>
+            <a:r>
+              <a:rPr lang="de-DE" sz="1400" i="1" dirty="0">
+                <a:solidFill>
+                  <a:schemeClr val="accent5"/>
+                </a:solidFill>
+                <a:latin typeface="Latin Modern Math" panose="02000503000000000000" pitchFamily="50" charset="0"/>
+                <a:ea typeface="Latin Modern Math" panose="02000503000000000000" pitchFamily="50" charset="0"/>
+                <a:cs typeface="CMU Serif" panose="02000603000000000000" pitchFamily="2" charset="0"/>
+              </a:rPr>
+              <a:t>ω </a:t>
+            </a:r>
+            <a:r>
+              <a:rPr lang="de-DE" sz="600" dirty="0">
+                <a:solidFill>
+                  <a:schemeClr val="accent5"/>
+                </a:solidFill>
+                <a:latin typeface="Latin Modern Math" panose="02000503000000000000" pitchFamily="50" charset="0"/>
+                <a:ea typeface="Latin Modern Math" panose="02000503000000000000" pitchFamily="50" charset="0"/>
+                <a:cs typeface="CMU Serif" panose="02000603000000000000" pitchFamily="2" charset="0"/>
+              </a:rPr>
+              <a:t>∙</a:t>
+            </a:r>
+            <a:r>
+              <a:rPr lang="de-DE" sz="1400" i="1" dirty="0">
+                <a:solidFill>
+                  <a:schemeClr val="accent5"/>
+                </a:solidFill>
+                <a:latin typeface="Latin Modern Math" panose="02000503000000000000" pitchFamily="50" charset="0"/>
+                <a:ea typeface="Latin Modern Math" panose="02000503000000000000" pitchFamily="50" charset="0"/>
+                <a:cs typeface="CMU Serif" panose="02000603000000000000" pitchFamily="2" charset="0"/>
+              </a:rPr>
+              <a:t> </a:t>
+            </a:r>
+            <a:r>
+              <a:rPr lang="de-DE" sz="1400" i="1" dirty="0">
+                <a:solidFill>
+                  <a:schemeClr val="accent5"/>
+                </a:solidFill>
+                <a:latin typeface="CMU Serif" panose="02000603000000000000" pitchFamily="2" charset="0"/>
+                <a:ea typeface="CMU Serif" panose="02000603000000000000" pitchFamily="2" charset="0"/>
+                <a:cs typeface="CMU Serif" panose="02000603000000000000" pitchFamily="2" charset="0"/>
+              </a:rPr>
+              <a:t>t</a:t>
+            </a:r>
+            <a:endParaRPr lang="de-DE" sz="1400" baseline="-25000" dirty="0">
+              <a:solidFill>
+                <a:schemeClr val="accent5"/>
+              </a:solidFill>
+              <a:latin typeface="CMU Serif" panose="02000603000000000000" pitchFamily="2" charset="0"/>
+              <a:ea typeface="CMU Serif" panose="02000603000000000000" pitchFamily="2" charset="0"/>
+              <a:cs typeface="CMU Serif" panose="02000603000000000000" pitchFamily="2" charset="0"/>
+            </a:endParaRPr>
+          </a:p>
+        </p:txBody>
+      </p:sp>
+      <p:sp>
+        <p:nvSpPr>
+          <p:cNvPr id="23" name="Textfeld 22">
+            <a:extLst>
+              <a:ext uri="{FF2B5EF4-FFF2-40B4-BE49-F238E27FC236}">
+                <a16:creationId xmlns:a16="http://schemas.microsoft.com/office/drawing/2014/main" id="{9C5DCC1C-22C1-3F97-9C39-05A26C30324A}"/>
+              </a:ext>
+            </a:extLst>
+          </p:cNvPr>
+          <p:cNvSpPr txBox="1"/>
+          <p:nvPr/>
+        </p:nvSpPr>
+        <p:spPr>
+          <a:xfrm>
+            <a:off x="2198035" y="2176651"/>
+            <a:ext cx="518786" cy="253916"/>
+          </a:xfrm>
+          <a:prstGeom prst="rect">
+            <a:avLst/>
+          </a:prstGeom>
+          <a:noFill/>
+        </p:spPr>
+        <p:txBody>
+          <a:bodyPr wrap="square" rtlCol="0">
+            <a:spAutoFit/>
+          </a:bodyPr>
+          <a:lstStyle/>
+          <a:p>
+            <a:pPr algn="ctr"/>
+            <a:r>
+              <a:rPr lang="de-DE" sz="1050" dirty="0">
+                <a:latin typeface="CMU Serif" panose="02000603000000000000" pitchFamily="2" charset="0"/>
+                <a:ea typeface="CMU Serif" panose="02000603000000000000" pitchFamily="2" charset="0"/>
+                <a:cs typeface="CMU Serif" panose="02000603000000000000" pitchFamily="2" charset="0"/>
+              </a:rPr>
+              <a:t>Re</a:t>
+            </a:r>
+            <a:endParaRPr lang="de-DE" sz="1050" baseline="-25000" dirty="0">
+              <a:latin typeface="CMU Serif" panose="02000603000000000000" pitchFamily="2" charset="0"/>
+              <a:ea typeface="CMU Serif" panose="02000603000000000000" pitchFamily="2" charset="0"/>
+              <a:cs typeface="CMU Serif" panose="02000603000000000000" pitchFamily="2" charset="0"/>
+            </a:endParaRPr>
+          </a:p>
+        </p:txBody>
+      </p:sp>
+      <p:sp>
+        <p:nvSpPr>
+          <p:cNvPr id="24" name="Textfeld 23">
+            <a:extLst>
+              <a:ext uri="{FF2B5EF4-FFF2-40B4-BE49-F238E27FC236}">
+                <a16:creationId xmlns:a16="http://schemas.microsoft.com/office/drawing/2014/main" id="{489D902E-FAF1-FB79-0651-3A5F65789A6B}"/>
+              </a:ext>
+            </a:extLst>
+          </p:cNvPr>
+          <p:cNvSpPr txBox="1"/>
+          <p:nvPr/>
+        </p:nvSpPr>
+        <p:spPr>
+          <a:xfrm>
+            <a:off x="1071759" y="1053040"/>
+            <a:ext cx="518786" cy="253916"/>
+          </a:xfrm>
+          <a:prstGeom prst="rect">
+            <a:avLst/>
+          </a:prstGeom>
+          <a:noFill/>
+        </p:spPr>
+        <p:txBody>
+          <a:bodyPr wrap="square" rtlCol="0">
+            <a:spAutoFit/>
+          </a:bodyPr>
+          <a:lstStyle/>
+          <a:p>
+            <a:pPr algn="ctr"/>
+            <a:r>
+              <a:rPr lang="de-DE" sz="1050" dirty="0">
+                <a:latin typeface="CMU Serif" panose="02000603000000000000" pitchFamily="2" charset="0"/>
+                <a:ea typeface="CMU Serif" panose="02000603000000000000" pitchFamily="2" charset="0"/>
+                <a:cs typeface="CMU Serif" panose="02000603000000000000" pitchFamily="2" charset="0"/>
+              </a:rPr>
+              <a:t>Im</a:t>
+            </a:r>
+            <a:endParaRPr lang="de-DE" sz="1050" baseline="-25000" dirty="0">
+              <a:latin typeface="CMU Serif" panose="02000603000000000000" pitchFamily="2" charset="0"/>
+              <a:ea typeface="CMU Serif" panose="02000603000000000000" pitchFamily="2" charset="0"/>
+              <a:cs typeface="CMU Serif" panose="02000603000000000000" pitchFamily="2" charset="0"/>
+            </a:endParaRPr>
+          </a:p>
+        </p:txBody>
+      </p:sp>
+    </p:spTree>
+    <p:extLst>
+      <p:ext uri="{BB962C8B-B14F-4D97-AF65-F5344CB8AC3E}">
+        <p14:creationId xmlns:p14="http://schemas.microsoft.com/office/powerpoint/2010/main" val="3996414772"/>
+      </p:ext>
+    </p:extLst>
+  </p:cSld>
+  <p:clrMapOvr>
+    <a:masterClrMapping/>
+  </p:clrMapOvr>
+</p:sld>
+</file>
+
 <file path=ppt/slides/slide2.xml><?xml version="1.0" encoding="utf-8"?>
 <p:sld xmlns:a="http://schemas.openxmlformats.org/drawingml/2006/main" xmlns:r="http://schemas.openxmlformats.org/officeDocument/2006/relationships" xmlns:p="http://schemas.openxmlformats.org/presentationml/2006/main">
   <p:cSld>
@@ -10465,6 +11102,1814 @@
     <p:extLst>
       <p:ext uri="{BB962C8B-B14F-4D97-AF65-F5344CB8AC3E}">
         <p14:creationId xmlns:p14="http://schemas.microsoft.com/office/powerpoint/2010/main" val="2468398840"/>
+      </p:ext>
+    </p:extLst>
+  </p:cSld>
+  <p:clrMapOvr>
+    <a:masterClrMapping/>
+  </p:clrMapOvr>
+</p:sld>
+</file>
+
+<file path=ppt/slides/slide8.xml><?xml version="1.0" encoding="utf-8"?>
+<p:sld xmlns:a="http://schemas.openxmlformats.org/drawingml/2006/main" xmlns:r="http://schemas.openxmlformats.org/officeDocument/2006/relationships" xmlns:p="http://schemas.openxmlformats.org/presentationml/2006/main">
+  <p:cSld>
+    <p:spTree>
+      <p:nvGrpSpPr>
+        <p:cNvPr id="1" name=""/>
+        <p:cNvGrpSpPr/>
+        <p:nvPr/>
+      </p:nvGrpSpPr>
+      <p:grpSpPr>
+        <a:xfrm>
+          <a:off x="0" y="0"/>
+          <a:ext cx="0" cy="0"/>
+          <a:chOff x="0" y="0"/>
+          <a:chExt cx="0" cy="0"/>
+        </a:xfrm>
+      </p:grpSpPr>
+      <p:sp>
+        <p:nvSpPr>
+          <p:cNvPr id="19" name="Bogen 18">
+            <a:extLst>
+              <a:ext uri="{FF2B5EF4-FFF2-40B4-BE49-F238E27FC236}">
+                <a16:creationId xmlns:a16="http://schemas.microsoft.com/office/drawing/2014/main" id="{32D897D1-A58C-9EA1-8E24-A0499319FD91}"/>
+              </a:ext>
+            </a:extLst>
+          </p:cNvPr>
+          <p:cNvSpPr/>
+          <p:nvPr/>
+        </p:nvSpPr>
+        <p:spPr>
+          <a:xfrm>
+            <a:off x="886221" y="1509386"/>
+            <a:ext cx="1220493" cy="1220493"/>
+          </a:xfrm>
+          <a:prstGeom prst="arc">
+            <a:avLst>
+              <a:gd name="adj1" fmla="val 19392774"/>
+              <a:gd name="adj2" fmla="val 0"/>
+            </a:avLst>
+          </a:prstGeom>
+          <a:ln cap="rnd">
+            <a:solidFill>
+              <a:schemeClr val="accent5"/>
+            </a:solidFill>
+            <a:round/>
+            <a:headEnd type="triangle"/>
+          </a:ln>
+        </p:spPr>
+        <p:style>
+          <a:lnRef idx="2">
+            <a:schemeClr val="accent1"/>
+          </a:lnRef>
+          <a:fillRef idx="0">
+            <a:schemeClr val="accent1"/>
+          </a:fillRef>
+          <a:effectRef idx="1">
+            <a:schemeClr val="accent1"/>
+          </a:effectRef>
+          <a:fontRef idx="minor">
+            <a:schemeClr val="tx1"/>
+          </a:fontRef>
+        </p:style>
+        <p:txBody>
+          <a:bodyPr rtlCol="0" anchor="ctr"/>
+          <a:lstStyle/>
+          <a:p>
+            <a:pPr algn="ctr"/>
+            <a:endParaRPr lang="de-DE" sz="2400"/>
+          </a:p>
+        </p:txBody>
+      </p:sp>
+      <p:cxnSp>
+        <p:nvCxnSpPr>
+          <p:cNvPr id="8" name="Gerade Verbindung mit Pfeil 7">
+            <a:extLst>
+              <a:ext uri="{FF2B5EF4-FFF2-40B4-BE49-F238E27FC236}">
+                <a16:creationId xmlns:a16="http://schemas.microsoft.com/office/drawing/2014/main" id="{6D54BD36-1AE9-A686-89F3-921009DE2088}"/>
+              </a:ext>
+            </a:extLst>
+          </p:cNvPr>
+          <p:cNvCxnSpPr>
+            <a:cxnSpLocks/>
+          </p:cNvCxnSpPr>
+          <p:nvPr/>
+        </p:nvCxnSpPr>
+        <p:spPr>
+          <a:xfrm flipV="1">
+            <a:off x="1496469" y="1512518"/>
+            <a:ext cx="799680" cy="607121"/>
+          </a:xfrm>
+          <a:prstGeom prst="straightConnector1">
+            <a:avLst/>
+          </a:prstGeom>
+          <a:ln cap="rnd">
+            <a:solidFill>
+              <a:srgbClr val="086FBD"/>
+            </a:solidFill>
+            <a:round/>
+            <a:tailEnd type="triangle" w="med" len="med"/>
+          </a:ln>
+        </p:spPr>
+        <p:style>
+          <a:lnRef idx="2">
+            <a:schemeClr val="accent1"/>
+          </a:lnRef>
+          <a:fillRef idx="0">
+            <a:schemeClr val="accent1"/>
+          </a:fillRef>
+          <a:effectRef idx="1">
+            <a:schemeClr val="accent1"/>
+          </a:effectRef>
+          <a:fontRef idx="minor">
+            <a:schemeClr val="tx1"/>
+          </a:fontRef>
+        </p:style>
+      </p:cxnSp>
+      <p:cxnSp>
+        <p:nvCxnSpPr>
+          <p:cNvPr id="10" name="Gerade Verbindung mit Pfeil 9">
+            <a:extLst>
+              <a:ext uri="{FF2B5EF4-FFF2-40B4-BE49-F238E27FC236}">
+                <a16:creationId xmlns:a16="http://schemas.microsoft.com/office/drawing/2014/main" id="{446A8EAF-64B5-B741-9CB0-99EB813D60FD}"/>
+              </a:ext>
+            </a:extLst>
+          </p:cNvPr>
+          <p:cNvCxnSpPr>
+            <a:cxnSpLocks/>
+          </p:cNvCxnSpPr>
+          <p:nvPr/>
+        </p:nvCxnSpPr>
+        <p:spPr>
+          <a:xfrm flipV="1">
+            <a:off x="1496468" y="1675356"/>
+            <a:ext cx="585195" cy="444283"/>
+          </a:xfrm>
+          <a:prstGeom prst="straightConnector1">
+            <a:avLst/>
+          </a:prstGeom>
+          <a:ln w="19050" cap="rnd">
+            <a:solidFill>
+              <a:srgbClr val="FF0000"/>
+            </a:solidFill>
+            <a:round/>
+            <a:tailEnd type="triangle" w="med" len="med"/>
+          </a:ln>
+        </p:spPr>
+        <p:style>
+          <a:lnRef idx="2">
+            <a:schemeClr val="accent1"/>
+          </a:lnRef>
+          <a:fillRef idx="0">
+            <a:schemeClr val="accent1"/>
+          </a:fillRef>
+          <a:effectRef idx="1">
+            <a:schemeClr val="accent1"/>
+          </a:effectRef>
+          <a:fontRef idx="minor">
+            <a:schemeClr val="tx1"/>
+          </a:fontRef>
+        </p:style>
+      </p:cxnSp>
+      <p:cxnSp>
+        <p:nvCxnSpPr>
+          <p:cNvPr id="5" name="Gerade Verbindung mit Pfeil 4">
+            <a:extLst>
+              <a:ext uri="{FF2B5EF4-FFF2-40B4-BE49-F238E27FC236}">
+                <a16:creationId xmlns:a16="http://schemas.microsoft.com/office/drawing/2014/main" id="{98E931C8-5F1B-74D5-918C-5E1A1E4AEC60}"/>
+              </a:ext>
+            </a:extLst>
+          </p:cNvPr>
+          <p:cNvCxnSpPr>
+            <a:cxnSpLocks/>
+          </p:cNvCxnSpPr>
+          <p:nvPr/>
+        </p:nvCxnSpPr>
+        <p:spPr>
+          <a:xfrm flipV="1">
+            <a:off x="1496469" y="1090939"/>
+            <a:ext cx="0" cy="1373557"/>
+          </a:xfrm>
+          <a:prstGeom prst="straightConnector1">
+            <a:avLst/>
+          </a:prstGeom>
+          <a:ln cap="rnd">
+            <a:solidFill>
+              <a:schemeClr val="tx1"/>
+            </a:solidFill>
+            <a:round/>
+            <a:tailEnd type="triangle" w="med" len="med"/>
+          </a:ln>
+        </p:spPr>
+        <p:style>
+          <a:lnRef idx="2">
+            <a:schemeClr val="accent1"/>
+          </a:lnRef>
+          <a:fillRef idx="0">
+            <a:schemeClr val="accent1"/>
+          </a:fillRef>
+          <a:effectRef idx="1">
+            <a:schemeClr val="accent1"/>
+          </a:effectRef>
+          <a:fontRef idx="minor">
+            <a:schemeClr val="tx1"/>
+          </a:fontRef>
+        </p:style>
+      </p:cxnSp>
+      <p:cxnSp>
+        <p:nvCxnSpPr>
+          <p:cNvPr id="6" name="Gerade Verbindung mit Pfeil 5">
+            <a:extLst>
+              <a:ext uri="{FF2B5EF4-FFF2-40B4-BE49-F238E27FC236}">
+                <a16:creationId xmlns:a16="http://schemas.microsoft.com/office/drawing/2014/main" id="{39186656-9B14-D2F3-0DB3-5EDAC43EDE6A}"/>
+              </a:ext>
+            </a:extLst>
+          </p:cNvPr>
+          <p:cNvCxnSpPr>
+            <a:cxnSpLocks/>
+          </p:cNvCxnSpPr>
+          <p:nvPr/>
+        </p:nvCxnSpPr>
+        <p:spPr>
+          <a:xfrm>
+            <a:off x="1030266" y="2119639"/>
+            <a:ext cx="1500513" cy="0"/>
+          </a:xfrm>
+          <a:prstGeom prst="straightConnector1">
+            <a:avLst/>
+          </a:prstGeom>
+          <a:ln cap="rnd">
+            <a:solidFill>
+              <a:schemeClr val="tx1"/>
+            </a:solidFill>
+            <a:round/>
+            <a:tailEnd type="triangle" w="med" len="med"/>
+          </a:ln>
+        </p:spPr>
+        <p:style>
+          <a:lnRef idx="2">
+            <a:schemeClr val="accent1"/>
+          </a:lnRef>
+          <a:fillRef idx="0">
+            <a:schemeClr val="accent1"/>
+          </a:fillRef>
+          <a:effectRef idx="1">
+            <a:schemeClr val="accent1"/>
+          </a:effectRef>
+          <a:fontRef idx="minor">
+            <a:schemeClr val="tx1"/>
+          </a:fontRef>
+        </p:style>
+      </p:cxnSp>
+      <p:sp>
+        <p:nvSpPr>
+          <p:cNvPr id="13" name="Textfeld 12">
+            <a:extLst>
+              <a:ext uri="{FF2B5EF4-FFF2-40B4-BE49-F238E27FC236}">
+                <a16:creationId xmlns:a16="http://schemas.microsoft.com/office/drawing/2014/main" id="{5BE36C7D-7650-11A7-ABA8-37BEB6591F8D}"/>
+              </a:ext>
+            </a:extLst>
+          </p:cNvPr>
+          <p:cNvSpPr txBox="1"/>
+          <p:nvPr/>
+        </p:nvSpPr>
+        <p:spPr>
+          <a:xfrm>
+            <a:off x="1962673" y="1128418"/>
+            <a:ext cx="567731" cy="307777"/>
+          </a:xfrm>
+          <a:prstGeom prst="rect">
+            <a:avLst/>
+          </a:prstGeom>
+          <a:noFill/>
+        </p:spPr>
+        <p:txBody>
+          <a:bodyPr wrap="square" rtlCol="0">
+            <a:spAutoFit/>
+          </a:bodyPr>
+          <a:lstStyle/>
+          <a:p>
+            <a:pPr algn="ctr"/>
+            <a:r>
+              <a:rPr lang="de-DE" sz="1400" i="1" dirty="0" err="1">
+                <a:solidFill>
+                  <a:srgbClr val="086FBD"/>
+                </a:solidFill>
+                <a:latin typeface="CMU Serif" panose="02000603000000000000" pitchFamily="2" charset="0"/>
+                <a:ea typeface="CMU Serif" panose="02000603000000000000" pitchFamily="2" charset="0"/>
+                <a:cs typeface="CMU Serif" panose="02000603000000000000" pitchFamily="2" charset="0"/>
+              </a:rPr>
+              <a:t>u</a:t>
+            </a:r>
+            <a:r>
+              <a:rPr lang="de-DE" sz="1400" i="1" baseline="-25000" dirty="0" err="1">
+                <a:solidFill>
+                  <a:srgbClr val="086FBD"/>
+                </a:solidFill>
+                <a:latin typeface="CMU Serif" panose="02000603000000000000" pitchFamily="2" charset="0"/>
+                <a:ea typeface="CMU Serif" panose="02000603000000000000" pitchFamily="2" charset="0"/>
+                <a:cs typeface="CMU Serif" panose="02000603000000000000" pitchFamily="2" charset="0"/>
+              </a:rPr>
+              <a:t>R</a:t>
+            </a:r>
+            <a:r>
+              <a:rPr lang="de-DE" sz="1400" dirty="0">
+                <a:solidFill>
+                  <a:srgbClr val="086FBD"/>
+                </a:solidFill>
+                <a:latin typeface="CMU Serif" panose="02000603000000000000" pitchFamily="2" charset="0"/>
+                <a:ea typeface="CMU Serif" panose="02000603000000000000" pitchFamily="2" charset="0"/>
+                <a:cs typeface="CMU Serif" panose="02000603000000000000" pitchFamily="2" charset="0"/>
+              </a:rPr>
+              <a:t>(</a:t>
+            </a:r>
+            <a:r>
+              <a:rPr lang="de-DE" sz="1400" i="1" dirty="0">
+                <a:solidFill>
+                  <a:srgbClr val="086FBD"/>
+                </a:solidFill>
+                <a:latin typeface="CMU Serif" panose="02000603000000000000" pitchFamily="2" charset="0"/>
+                <a:ea typeface="CMU Serif" panose="02000603000000000000" pitchFamily="2" charset="0"/>
+                <a:cs typeface="CMU Serif" panose="02000603000000000000" pitchFamily="2" charset="0"/>
+              </a:rPr>
+              <a:t>t</a:t>
+            </a:r>
+            <a:r>
+              <a:rPr lang="de-DE" sz="1400" dirty="0">
+                <a:solidFill>
+                  <a:srgbClr val="086FBD"/>
+                </a:solidFill>
+                <a:latin typeface="CMU Serif" panose="02000603000000000000" pitchFamily="2" charset="0"/>
+                <a:ea typeface="CMU Serif" panose="02000603000000000000" pitchFamily="2" charset="0"/>
+                <a:cs typeface="CMU Serif" panose="02000603000000000000" pitchFamily="2" charset="0"/>
+              </a:rPr>
+              <a:t>)</a:t>
+            </a:r>
+            <a:endParaRPr lang="de-DE" sz="1400" baseline="-25000" dirty="0">
+              <a:solidFill>
+                <a:srgbClr val="086FBD"/>
+              </a:solidFill>
+              <a:latin typeface="CMU Serif" panose="02000603000000000000" pitchFamily="2" charset="0"/>
+              <a:ea typeface="CMU Serif" panose="02000603000000000000" pitchFamily="2" charset="0"/>
+              <a:cs typeface="CMU Serif" panose="02000603000000000000" pitchFamily="2" charset="0"/>
+            </a:endParaRPr>
+          </a:p>
+        </p:txBody>
+      </p:sp>
+      <p:sp>
+        <p:nvSpPr>
+          <p:cNvPr id="14" name="Textfeld 13">
+            <a:extLst>
+              <a:ext uri="{FF2B5EF4-FFF2-40B4-BE49-F238E27FC236}">
+                <a16:creationId xmlns:a16="http://schemas.microsoft.com/office/drawing/2014/main" id="{FE8F30B2-0BF5-9F8A-7F88-CC7A067FB614}"/>
+              </a:ext>
+            </a:extLst>
+          </p:cNvPr>
+          <p:cNvSpPr txBox="1"/>
+          <p:nvPr/>
+        </p:nvSpPr>
+        <p:spPr>
+          <a:xfrm>
+            <a:off x="1529673" y="1365291"/>
+            <a:ext cx="518786" cy="307777"/>
+          </a:xfrm>
+          <a:prstGeom prst="rect">
+            <a:avLst/>
+          </a:prstGeom>
+          <a:noFill/>
+        </p:spPr>
+        <p:txBody>
+          <a:bodyPr wrap="square" rtlCol="0">
+            <a:spAutoFit/>
+          </a:bodyPr>
+          <a:lstStyle/>
+          <a:p>
+            <a:pPr algn="ctr"/>
+            <a:r>
+              <a:rPr lang="de-DE" sz="1400" i="1" dirty="0" err="1">
+                <a:solidFill>
+                  <a:srgbClr val="FF0000"/>
+                </a:solidFill>
+                <a:latin typeface="CMU Serif" panose="02000603000000000000" pitchFamily="2" charset="0"/>
+                <a:ea typeface="CMU Serif" panose="02000603000000000000" pitchFamily="2" charset="0"/>
+                <a:cs typeface="CMU Serif" panose="02000603000000000000" pitchFamily="2" charset="0"/>
+              </a:rPr>
+              <a:t>i</a:t>
+            </a:r>
+            <a:r>
+              <a:rPr lang="de-DE" sz="1400" i="1" baseline="-25000" dirty="0" err="1">
+                <a:solidFill>
+                  <a:srgbClr val="FF0000"/>
+                </a:solidFill>
+                <a:latin typeface="CMU Serif" panose="02000603000000000000" pitchFamily="2" charset="0"/>
+                <a:ea typeface="CMU Serif" panose="02000603000000000000" pitchFamily="2" charset="0"/>
+                <a:cs typeface="CMU Serif" panose="02000603000000000000" pitchFamily="2" charset="0"/>
+              </a:rPr>
+              <a:t>R</a:t>
+            </a:r>
+            <a:r>
+              <a:rPr lang="de-DE" sz="1400" dirty="0">
+                <a:solidFill>
+                  <a:srgbClr val="FF0000"/>
+                </a:solidFill>
+                <a:latin typeface="CMU Serif" panose="02000603000000000000" pitchFamily="2" charset="0"/>
+                <a:ea typeface="CMU Serif" panose="02000603000000000000" pitchFamily="2" charset="0"/>
+                <a:cs typeface="CMU Serif" panose="02000603000000000000" pitchFamily="2" charset="0"/>
+              </a:rPr>
+              <a:t>(</a:t>
+            </a:r>
+            <a:r>
+              <a:rPr lang="de-DE" sz="1400" i="1" dirty="0">
+                <a:solidFill>
+                  <a:srgbClr val="FF0000"/>
+                </a:solidFill>
+                <a:latin typeface="CMU Serif" panose="02000603000000000000" pitchFamily="2" charset="0"/>
+                <a:ea typeface="CMU Serif" panose="02000603000000000000" pitchFamily="2" charset="0"/>
+                <a:cs typeface="CMU Serif" panose="02000603000000000000" pitchFamily="2" charset="0"/>
+              </a:rPr>
+              <a:t>t</a:t>
+            </a:r>
+            <a:r>
+              <a:rPr lang="de-DE" sz="1400" dirty="0">
+                <a:solidFill>
+                  <a:srgbClr val="FF0000"/>
+                </a:solidFill>
+                <a:latin typeface="CMU Serif" panose="02000603000000000000" pitchFamily="2" charset="0"/>
+                <a:ea typeface="CMU Serif" panose="02000603000000000000" pitchFamily="2" charset="0"/>
+                <a:cs typeface="CMU Serif" panose="02000603000000000000" pitchFamily="2" charset="0"/>
+              </a:rPr>
+              <a:t>)</a:t>
+            </a:r>
+            <a:endParaRPr lang="de-DE" sz="1400" baseline="-25000" dirty="0">
+              <a:solidFill>
+                <a:srgbClr val="FF0000"/>
+              </a:solidFill>
+              <a:latin typeface="CMU Serif" panose="02000603000000000000" pitchFamily="2" charset="0"/>
+              <a:ea typeface="CMU Serif" panose="02000603000000000000" pitchFamily="2" charset="0"/>
+              <a:cs typeface="CMU Serif" panose="02000603000000000000" pitchFamily="2" charset="0"/>
+            </a:endParaRPr>
+          </a:p>
+        </p:txBody>
+      </p:sp>
+      <p:sp>
+        <p:nvSpPr>
+          <p:cNvPr id="20" name="Textfeld 19">
+            <a:extLst>
+              <a:ext uri="{FF2B5EF4-FFF2-40B4-BE49-F238E27FC236}">
+                <a16:creationId xmlns:a16="http://schemas.microsoft.com/office/drawing/2014/main" id="{3FA8239C-2EDA-C327-70FE-9A4493D6D5A4}"/>
+              </a:ext>
+            </a:extLst>
+          </p:cNvPr>
+          <p:cNvSpPr txBox="1"/>
+          <p:nvPr/>
+        </p:nvSpPr>
+        <p:spPr>
+          <a:xfrm>
+            <a:off x="2070746" y="1767541"/>
+            <a:ext cx="518786" cy="307777"/>
+          </a:xfrm>
+          <a:prstGeom prst="rect">
+            <a:avLst/>
+          </a:prstGeom>
+          <a:noFill/>
+        </p:spPr>
+        <p:txBody>
+          <a:bodyPr wrap="square" rtlCol="0">
+            <a:spAutoFit/>
+          </a:bodyPr>
+          <a:lstStyle/>
+          <a:p>
+            <a:pPr algn="ctr"/>
+            <a:r>
+              <a:rPr lang="de-DE" sz="1400" i="1" dirty="0">
+                <a:solidFill>
+                  <a:schemeClr val="accent5"/>
+                </a:solidFill>
+                <a:latin typeface="Latin Modern Math" panose="02000503000000000000" pitchFamily="50" charset="0"/>
+                <a:ea typeface="Latin Modern Math" panose="02000503000000000000" pitchFamily="50" charset="0"/>
+                <a:cs typeface="CMU Serif" panose="02000603000000000000" pitchFamily="2" charset="0"/>
+              </a:rPr>
+              <a:t>ω </a:t>
+            </a:r>
+            <a:r>
+              <a:rPr lang="de-DE" sz="600" dirty="0">
+                <a:solidFill>
+                  <a:schemeClr val="accent5"/>
+                </a:solidFill>
+                <a:latin typeface="Latin Modern Math" panose="02000503000000000000" pitchFamily="50" charset="0"/>
+                <a:ea typeface="Latin Modern Math" panose="02000503000000000000" pitchFamily="50" charset="0"/>
+                <a:cs typeface="CMU Serif" panose="02000603000000000000" pitchFamily="2" charset="0"/>
+              </a:rPr>
+              <a:t>∙</a:t>
+            </a:r>
+            <a:r>
+              <a:rPr lang="de-DE" sz="1400" i="1" dirty="0">
+                <a:solidFill>
+                  <a:schemeClr val="accent5"/>
+                </a:solidFill>
+                <a:latin typeface="Latin Modern Math" panose="02000503000000000000" pitchFamily="50" charset="0"/>
+                <a:ea typeface="Latin Modern Math" panose="02000503000000000000" pitchFamily="50" charset="0"/>
+                <a:cs typeface="CMU Serif" panose="02000603000000000000" pitchFamily="2" charset="0"/>
+              </a:rPr>
+              <a:t> </a:t>
+            </a:r>
+            <a:r>
+              <a:rPr lang="de-DE" sz="1400" i="1" dirty="0">
+                <a:solidFill>
+                  <a:schemeClr val="accent5"/>
+                </a:solidFill>
+                <a:latin typeface="CMU Serif" panose="02000603000000000000" pitchFamily="2" charset="0"/>
+                <a:ea typeface="CMU Serif" panose="02000603000000000000" pitchFamily="2" charset="0"/>
+                <a:cs typeface="CMU Serif" panose="02000603000000000000" pitchFamily="2" charset="0"/>
+              </a:rPr>
+              <a:t>t</a:t>
+            </a:r>
+            <a:endParaRPr lang="de-DE" sz="1400" baseline="-25000" dirty="0">
+              <a:solidFill>
+                <a:schemeClr val="accent5"/>
+              </a:solidFill>
+              <a:latin typeface="CMU Serif" panose="02000603000000000000" pitchFamily="2" charset="0"/>
+              <a:ea typeface="CMU Serif" panose="02000603000000000000" pitchFamily="2" charset="0"/>
+              <a:cs typeface="CMU Serif" panose="02000603000000000000" pitchFamily="2" charset="0"/>
+            </a:endParaRPr>
+          </a:p>
+        </p:txBody>
+      </p:sp>
+      <p:sp>
+        <p:nvSpPr>
+          <p:cNvPr id="23" name="Textfeld 22">
+            <a:extLst>
+              <a:ext uri="{FF2B5EF4-FFF2-40B4-BE49-F238E27FC236}">
+                <a16:creationId xmlns:a16="http://schemas.microsoft.com/office/drawing/2014/main" id="{CAD6B84E-3C06-C029-03BB-A0067CECE2D1}"/>
+              </a:ext>
+            </a:extLst>
+          </p:cNvPr>
+          <p:cNvSpPr txBox="1"/>
+          <p:nvPr/>
+        </p:nvSpPr>
+        <p:spPr>
+          <a:xfrm>
+            <a:off x="2198035" y="2176651"/>
+            <a:ext cx="518786" cy="253916"/>
+          </a:xfrm>
+          <a:prstGeom prst="rect">
+            <a:avLst/>
+          </a:prstGeom>
+          <a:noFill/>
+        </p:spPr>
+        <p:txBody>
+          <a:bodyPr wrap="square" rtlCol="0">
+            <a:spAutoFit/>
+          </a:bodyPr>
+          <a:lstStyle/>
+          <a:p>
+            <a:pPr algn="ctr"/>
+            <a:r>
+              <a:rPr lang="de-DE" sz="1050" dirty="0">
+                <a:latin typeface="CMU Serif" panose="02000603000000000000" pitchFamily="2" charset="0"/>
+                <a:ea typeface="CMU Serif" panose="02000603000000000000" pitchFamily="2" charset="0"/>
+                <a:cs typeface="CMU Serif" panose="02000603000000000000" pitchFamily="2" charset="0"/>
+              </a:rPr>
+              <a:t>Re</a:t>
+            </a:r>
+            <a:endParaRPr lang="de-DE" sz="1050" baseline="-25000" dirty="0">
+              <a:latin typeface="CMU Serif" panose="02000603000000000000" pitchFamily="2" charset="0"/>
+              <a:ea typeface="CMU Serif" panose="02000603000000000000" pitchFamily="2" charset="0"/>
+              <a:cs typeface="CMU Serif" panose="02000603000000000000" pitchFamily="2" charset="0"/>
+            </a:endParaRPr>
+          </a:p>
+        </p:txBody>
+      </p:sp>
+      <p:sp>
+        <p:nvSpPr>
+          <p:cNvPr id="24" name="Textfeld 23">
+            <a:extLst>
+              <a:ext uri="{FF2B5EF4-FFF2-40B4-BE49-F238E27FC236}">
+                <a16:creationId xmlns:a16="http://schemas.microsoft.com/office/drawing/2014/main" id="{896B4ABA-CC7B-ECCC-7F67-E522D6E3D0FD}"/>
+              </a:ext>
+            </a:extLst>
+          </p:cNvPr>
+          <p:cNvSpPr txBox="1"/>
+          <p:nvPr/>
+        </p:nvSpPr>
+        <p:spPr>
+          <a:xfrm>
+            <a:off x="1071759" y="1053040"/>
+            <a:ext cx="518786" cy="253916"/>
+          </a:xfrm>
+          <a:prstGeom prst="rect">
+            <a:avLst/>
+          </a:prstGeom>
+          <a:noFill/>
+        </p:spPr>
+        <p:txBody>
+          <a:bodyPr wrap="square" rtlCol="0">
+            <a:spAutoFit/>
+          </a:bodyPr>
+          <a:lstStyle/>
+          <a:p>
+            <a:pPr algn="ctr"/>
+            <a:r>
+              <a:rPr lang="de-DE" sz="1050" dirty="0">
+                <a:latin typeface="CMU Serif" panose="02000603000000000000" pitchFamily="2" charset="0"/>
+                <a:ea typeface="CMU Serif" panose="02000603000000000000" pitchFamily="2" charset="0"/>
+                <a:cs typeface="CMU Serif" panose="02000603000000000000" pitchFamily="2" charset="0"/>
+              </a:rPr>
+              <a:t>Im</a:t>
+            </a:r>
+            <a:endParaRPr lang="de-DE" sz="1050" baseline="-25000" dirty="0">
+              <a:latin typeface="CMU Serif" panose="02000603000000000000" pitchFamily="2" charset="0"/>
+              <a:ea typeface="CMU Serif" panose="02000603000000000000" pitchFamily="2" charset="0"/>
+              <a:cs typeface="CMU Serif" panose="02000603000000000000" pitchFamily="2" charset="0"/>
+            </a:endParaRPr>
+          </a:p>
+        </p:txBody>
+      </p:sp>
+    </p:spTree>
+    <p:extLst>
+      <p:ext uri="{BB962C8B-B14F-4D97-AF65-F5344CB8AC3E}">
+        <p14:creationId xmlns:p14="http://schemas.microsoft.com/office/powerpoint/2010/main" val="517033152"/>
+      </p:ext>
+    </p:extLst>
+  </p:cSld>
+  <p:clrMapOvr>
+    <a:masterClrMapping/>
+  </p:clrMapOvr>
+</p:sld>
+</file>
+
+<file path=ppt/slides/slide9.xml><?xml version="1.0" encoding="utf-8"?>
+<p:sld xmlns:a="http://schemas.openxmlformats.org/drawingml/2006/main" xmlns:r="http://schemas.openxmlformats.org/officeDocument/2006/relationships" xmlns:p="http://schemas.openxmlformats.org/presentationml/2006/main">
+  <p:cSld>
+    <p:spTree>
+      <p:nvGrpSpPr>
+        <p:cNvPr id="1" name=""/>
+        <p:cNvGrpSpPr/>
+        <p:nvPr/>
+      </p:nvGrpSpPr>
+      <p:grpSpPr>
+        <a:xfrm>
+          <a:off x="0" y="0"/>
+          <a:ext cx="0" cy="0"/>
+          <a:chOff x="0" y="0"/>
+          <a:chExt cx="0" cy="0"/>
+        </a:xfrm>
+      </p:grpSpPr>
+      <p:sp>
+        <p:nvSpPr>
+          <p:cNvPr id="4" name="Rechteck 3">
+            <a:extLst>
+              <a:ext uri="{FF2B5EF4-FFF2-40B4-BE49-F238E27FC236}">
+                <a16:creationId xmlns:a16="http://schemas.microsoft.com/office/drawing/2014/main" id="{151416CF-1FBE-948E-361C-CBFB4791216C}"/>
+              </a:ext>
+            </a:extLst>
+          </p:cNvPr>
+          <p:cNvSpPr/>
+          <p:nvPr/>
+        </p:nvSpPr>
+        <p:spPr>
+          <a:xfrm>
+            <a:off x="607080" y="1759516"/>
+            <a:ext cx="2386290" cy="961764"/>
+          </a:xfrm>
+          <a:prstGeom prst="rect">
+            <a:avLst/>
+          </a:prstGeom>
+          <a:noFill/>
+          <a:ln cap="rnd">
+            <a:solidFill>
+              <a:schemeClr val="tx1"/>
+            </a:solidFill>
+            <a:round/>
+          </a:ln>
+        </p:spPr>
+        <p:style>
+          <a:lnRef idx="2">
+            <a:schemeClr val="accent1">
+              <a:shade val="15000"/>
+            </a:schemeClr>
+          </a:lnRef>
+          <a:fillRef idx="1">
+            <a:schemeClr val="accent1"/>
+          </a:fillRef>
+          <a:effectRef idx="0">
+            <a:schemeClr val="accent1"/>
+          </a:effectRef>
+          <a:fontRef idx="minor">
+            <a:schemeClr val="lt1"/>
+          </a:fontRef>
+        </p:style>
+        <p:txBody>
+          <a:bodyPr rtlCol="0" anchor="ctr"/>
+          <a:lstStyle/>
+          <a:p>
+            <a:pPr algn="ctr"/>
+            <a:endParaRPr lang="de-DE"/>
+          </a:p>
+        </p:txBody>
+      </p:sp>
+      <p:sp>
+        <p:nvSpPr>
+          <p:cNvPr id="5" name="Rechteck 4">
+            <a:extLst>
+              <a:ext uri="{FF2B5EF4-FFF2-40B4-BE49-F238E27FC236}">
+                <a16:creationId xmlns:a16="http://schemas.microsoft.com/office/drawing/2014/main" id="{825C4AEB-8AEA-37C7-B806-4532C83E32AF}"/>
+              </a:ext>
+            </a:extLst>
+          </p:cNvPr>
+          <p:cNvSpPr/>
+          <p:nvPr/>
+        </p:nvSpPr>
+        <p:spPr>
+          <a:xfrm>
+            <a:off x="1800224" y="1283164"/>
+            <a:ext cx="1193146" cy="476352"/>
+          </a:xfrm>
+          <a:prstGeom prst="rect">
+            <a:avLst/>
+          </a:prstGeom>
+          <a:noFill/>
+          <a:ln cap="rnd">
+            <a:solidFill>
+              <a:schemeClr val="tx1"/>
+            </a:solidFill>
+            <a:round/>
+          </a:ln>
+        </p:spPr>
+        <p:style>
+          <a:lnRef idx="2">
+            <a:schemeClr val="accent1">
+              <a:shade val="15000"/>
+            </a:schemeClr>
+          </a:lnRef>
+          <a:fillRef idx="1">
+            <a:schemeClr val="accent1"/>
+          </a:fillRef>
+          <a:effectRef idx="0">
+            <a:schemeClr val="accent1"/>
+          </a:effectRef>
+          <a:fontRef idx="minor">
+            <a:schemeClr val="lt1"/>
+          </a:fontRef>
+        </p:style>
+        <p:txBody>
+          <a:bodyPr rtlCol="0" anchor="ctr"/>
+          <a:lstStyle/>
+          <a:p>
+            <a:pPr algn="ctr"/>
+            <a:endParaRPr lang="de-DE"/>
+          </a:p>
+        </p:txBody>
+      </p:sp>
+      <p:sp>
+        <p:nvSpPr>
+          <p:cNvPr id="6" name="Ellipse 5">
+            <a:extLst>
+              <a:ext uri="{FF2B5EF4-FFF2-40B4-BE49-F238E27FC236}">
+                <a16:creationId xmlns:a16="http://schemas.microsoft.com/office/drawing/2014/main" id="{D1EDCD6F-8B83-AAE8-702F-C154756A9B12}"/>
+              </a:ext>
+            </a:extLst>
+          </p:cNvPr>
+          <p:cNvSpPr/>
+          <p:nvPr/>
+        </p:nvSpPr>
+        <p:spPr>
+          <a:xfrm>
+            <a:off x="2251182" y="1137549"/>
+            <a:ext cx="291230" cy="291230"/>
+          </a:xfrm>
+          <a:prstGeom prst="ellipse">
+            <a:avLst/>
+          </a:prstGeom>
+          <a:solidFill>
+            <a:schemeClr val="bg1"/>
+          </a:solidFill>
+          <a:ln>
+            <a:solidFill>
+              <a:schemeClr val="tx1"/>
+            </a:solidFill>
+          </a:ln>
+        </p:spPr>
+        <p:style>
+          <a:lnRef idx="2">
+            <a:schemeClr val="accent1">
+              <a:shade val="15000"/>
+            </a:schemeClr>
+          </a:lnRef>
+          <a:fillRef idx="1">
+            <a:schemeClr val="accent1"/>
+          </a:fillRef>
+          <a:effectRef idx="0">
+            <a:schemeClr val="accent1"/>
+          </a:effectRef>
+          <a:fontRef idx="minor">
+            <a:schemeClr val="lt1"/>
+          </a:fontRef>
+        </p:style>
+        <p:txBody>
+          <a:bodyPr rtlCol="0" anchor="ctr"/>
+          <a:lstStyle/>
+          <a:p>
+            <a:pPr algn="ctr"/>
+            <a:endParaRPr lang="de-DE"/>
+          </a:p>
+        </p:txBody>
+      </p:sp>
+      <p:sp>
+        <p:nvSpPr>
+          <p:cNvPr id="7" name="Ellipse 6">
+            <a:extLst>
+              <a:ext uri="{FF2B5EF4-FFF2-40B4-BE49-F238E27FC236}">
+                <a16:creationId xmlns:a16="http://schemas.microsoft.com/office/drawing/2014/main" id="{28AFD021-0B35-2FA1-F772-E72FAEBFC55B}"/>
+              </a:ext>
+            </a:extLst>
+          </p:cNvPr>
+          <p:cNvSpPr/>
+          <p:nvPr/>
+        </p:nvSpPr>
+        <p:spPr>
+          <a:xfrm>
+            <a:off x="1058037" y="1613901"/>
+            <a:ext cx="291230" cy="291230"/>
+          </a:xfrm>
+          <a:prstGeom prst="ellipse">
+            <a:avLst/>
+          </a:prstGeom>
+          <a:solidFill>
+            <a:schemeClr val="bg1"/>
+          </a:solidFill>
+          <a:ln>
+            <a:solidFill>
+              <a:schemeClr val="tx1"/>
+            </a:solidFill>
+          </a:ln>
+        </p:spPr>
+        <p:style>
+          <a:lnRef idx="2">
+            <a:schemeClr val="accent1">
+              <a:shade val="15000"/>
+            </a:schemeClr>
+          </a:lnRef>
+          <a:fillRef idx="1">
+            <a:schemeClr val="accent1"/>
+          </a:fillRef>
+          <a:effectRef idx="0">
+            <a:schemeClr val="accent1"/>
+          </a:effectRef>
+          <a:fontRef idx="minor">
+            <a:schemeClr val="lt1"/>
+          </a:fontRef>
+        </p:style>
+        <p:txBody>
+          <a:bodyPr rtlCol="0" anchor="ctr"/>
+          <a:lstStyle/>
+          <a:p>
+            <a:pPr algn="ctr"/>
+            <a:endParaRPr lang="de-DE"/>
+          </a:p>
+        </p:txBody>
+      </p:sp>
+      <p:sp>
+        <p:nvSpPr>
+          <p:cNvPr id="8" name="Rechteck 7">
+            <a:extLst>
+              <a:ext uri="{FF2B5EF4-FFF2-40B4-BE49-F238E27FC236}">
+                <a16:creationId xmlns:a16="http://schemas.microsoft.com/office/drawing/2014/main" id="{E00BC18B-C13C-3FDC-48EF-EE01146FB196}"/>
+              </a:ext>
+            </a:extLst>
+          </p:cNvPr>
+          <p:cNvSpPr/>
+          <p:nvPr/>
+        </p:nvSpPr>
+        <p:spPr>
+          <a:xfrm>
+            <a:off x="1699052" y="2594454"/>
+            <a:ext cx="202344" cy="253652"/>
+          </a:xfrm>
+          <a:prstGeom prst="rect">
+            <a:avLst/>
+          </a:prstGeom>
+          <a:solidFill>
+            <a:schemeClr val="bg1"/>
+          </a:solidFill>
+          <a:ln>
+            <a:noFill/>
+          </a:ln>
+        </p:spPr>
+        <p:style>
+          <a:lnRef idx="2">
+            <a:schemeClr val="accent1">
+              <a:shade val="15000"/>
+            </a:schemeClr>
+          </a:lnRef>
+          <a:fillRef idx="1">
+            <a:schemeClr val="accent1"/>
+          </a:fillRef>
+          <a:effectRef idx="0">
+            <a:schemeClr val="accent1"/>
+          </a:effectRef>
+          <a:fontRef idx="minor">
+            <a:schemeClr val="lt1"/>
+          </a:fontRef>
+        </p:style>
+        <p:txBody>
+          <a:bodyPr rtlCol="0" anchor="ctr"/>
+          <a:lstStyle/>
+          <a:p>
+            <a:pPr algn="ctr"/>
+            <a:endParaRPr lang="de-DE"/>
+          </a:p>
+        </p:txBody>
+      </p:sp>
+      <p:sp>
+        <p:nvSpPr>
+          <p:cNvPr id="9" name="Ellipse 8">
+            <a:extLst>
+              <a:ext uri="{FF2B5EF4-FFF2-40B4-BE49-F238E27FC236}">
+                <a16:creationId xmlns:a16="http://schemas.microsoft.com/office/drawing/2014/main" id="{4E105BC4-0FF5-4C73-25D0-33685C38776F}"/>
+              </a:ext>
+            </a:extLst>
+          </p:cNvPr>
+          <p:cNvSpPr/>
+          <p:nvPr/>
+        </p:nvSpPr>
+        <p:spPr>
+          <a:xfrm>
+            <a:off x="1628703" y="2686105"/>
+            <a:ext cx="70349" cy="70349"/>
+          </a:xfrm>
+          <a:prstGeom prst="ellipse">
+            <a:avLst/>
+          </a:prstGeom>
+          <a:solidFill>
+            <a:schemeClr val="bg1"/>
+          </a:solidFill>
+          <a:ln>
+            <a:solidFill>
+              <a:schemeClr val="tx1"/>
+            </a:solidFill>
+          </a:ln>
+        </p:spPr>
+        <p:style>
+          <a:lnRef idx="2">
+            <a:schemeClr val="accent1">
+              <a:shade val="15000"/>
+            </a:schemeClr>
+          </a:lnRef>
+          <a:fillRef idx="1">
+            <a:schemeClr val="accent1"/>
+          </a:fillRef>
+          <a:effectRef idx="0">
+            <a:schemeClr val="accent1"/>
+          </a:effectRef>
+          <a:fontRef idx="minor">
+            <a:schemeClr val="lt1"/>
+          </a:fontRef>
+        </p:style>
+        <p:txBody>
+          <a:bodyPr rtlCol="0" anchor="ctr"/>
+          <a:lstStyle/>
+          <a:p>
+            <a:pPr algn="ctr"/>
+            <a:endParaRPr lang="de-DE"/>
+          </a:p>
+        </p:txBody>
+      </p:sp>
+      <p:sp>
+        <p:nvSpPr>
+          <p:cNvPr id="10" name="Ellipse 9">
+            <a:extLst>
+              <a:ext uri="{FF2B5EF4-FFF2-40B4-BE49-F238E27FC236}">
+                <a16:creationId xmlns:a16="http://schemas.microsoft.com/office/drawing/2014/main" id="{45FE19A6-6812-11D6-EB98-1DD3CE82FC07}"/>
+              </a:ext>
+            </a:extLst>
+          </p:cNvPr>
+          <p:cNvSpPr/>
+          <p:nvPr/>
+        </p:nvSpPr>
+        <p:spPr>
+          <a:xfrm>
+            <a:off x="1901396" y="2686105"/>
+            <a:ext cx="70349" cy="70349"/>
+          </a:xfrm>
+          <a:prstGeom prst="ellipse">
+            <a:avLst/>
+          </a:prstGeom>
+          <a:solidFill>
+            <a:schemeClr val="bg1"/>
+          </a:solidFill>
+          <a:ln>
+            <a:solidFill>
+              <a:schemeClr val="tx1"/>
+            </a:solidFill>
+          </a:ln>
+        </p:spPr>
+        <p:style>
+          <a:lnRef idx="2">
+            <a:schemeClr val="accent1">
+              <a:shade val="15000"/>
+            </a:schemeClr>
+          </a:lnRef>
+          <a:fillRef idx="1">
+            <a:schemeClr val="accent1"/>
+          </a:fillRef>
+          <a:effectRef idx="0">
+            <a:schemeClr val="accent1"/>
+          </a:effectRef>
+          <a:fontRef idx="minor">
+            <a:schemeClr val="lt1"/>
+          </a:fontRef>
+        </p:style>
+        <p:txBody>
+          <a:bodyPr rtlCol="0" anchor="ctr"/>
+          <a:lstStyle/>
+          <a:p>
+            <a:pPr algn="ctr"/>
+            <a:endParaRPr lang="de-DE"/>
+          </a:p>
+        </p:txBody>
+      </p:sp>
+      <p:sp>
+        <p:nvSpPr>
+          <p:cNvPr id="11" name="Textfeld 10">
+            <a:extLst>
+              <a:ext uri="{FF2B5EF4-FFF2-40B4-BE49-F238E27FC236}">
+                <a16:creationId xmlns:a16="http://schemas.microsoft.com/office/drawing/2014/main" id="{D170C4F5-D9B6-4777-54DF-FB57D1C55546}"/>
+              </a:ext>
+            </a:extLst>
+          </p:cNvPr>
+          <p:cNvSpPr txBox="1"/>
+          <p:nvPr/>
+        </p:nvSpPr>
+        <p:spPr>
+          <a:xfrm>
+            <a:off x="1032819" y="1613901"/>
+            <a:ext cx="341666" cy="307777"/>
+          </a:xfrm>
+          <a:prstGeom prst="rect">
+            <a:avLst/>
+          </a:prstGeom>
+          <a:noFill/>
+        </p:spPr>
+        <p:txBody>
+          <a:bodyPr wrap="square" rtlCol="0">
+            <a:spAutoFit/>
+          </a:bodyPr>
+          <a:lstStyle/>
+          <a:p>
+            <a:pPr algn="ctr"/>
+            <a:r>
+              <a:rPr lang="de-DE" sz="1400" dirty="0">
+                <a:latin typeface="CMU Serif" panose="02000603000000000000" pitchFamily="2" charset="0"/>
+                <a:ea typeface="CMU Serif" panose="02000603000000000000" pitchFamily="2" charset="0"/>
+                <a:cs typeface="CMU Serif" panose="02000603000000000000" pitchFamily="2" charset="0"/>
+              </a:rPr>
+              <a:t>A</a:t>
+            </a:r>
+            <a:endParaRPr lang="de-DE" sz="1400" baseline="-25000" dirty="0">
+              <a:latin typeface="CMU Serif" panose="02000603000000000000" pitchFamily="2" charset="0"/>
+              <a:ea typeface="CMU Serif" panose="02000603000000000000" pitchFamily="2" charset="0"/>
+              <a:cs typeface="CMU Serif" panose="02000603000000000000" pitchFamily="2" charset="0"/>
+            </a:endParaRPr>
+          </a:p>
+        </p:txBody>
+      </p:sp>
+      <p:sp>
+        <p:nvSpPr>
+          <p:cNvPr id="12" name="Textfeld 11">
+            <a:extLst>
+              <a:ext uri="{FF2B5EF4-FFF2-40B4-BE49-F238E27FC236}">
+                <a16:creationId xmlns:a16="http://schemas.microsoft.com/office/drawing/2014/main" id="{DD582DF5-2E06-843C-015B-A83418C9741D}"/>
+              </a:ext>
+            </a:extLst>
+          </p:cNvPr>
+          <p:cNvSpPr txBox="1"/>
+          <p:nvPr/>
+        </p:nvSpPr>
+        <p:spPr>
+          <a:xfrm>
+            <a:off x="2225964" y="1159241"/>
+            <a:ext cx="341666" cy="307777"/>
+          </a:xfrm>
+          <a:prstGeom prst="rect">
+            <a:avLst/>
+          </a:prstGeom>
+          <a:noFill/>
+        </p:spPr>
+        <p:txBody>
+          <a:bodyPr wrap="square" rtlCol="0">
+            <a:spAutoFit/>
+          </a:bodyPr>
+          <a:lstStyle/>
+          <a:p>
+            <a:pPr algn="ctr"/>
+            <a:r>
+              <a:rPr lang="de-DE" sz="1400" dirty="0">
+                <a:latin typeface="CMU Serif" panose="02000603000000000000" pitchFamily="2" charset="0"/>
+                <a:ea typeface="CMU Serif" panose="02000603000000000000" pitchFamily="2" charset="0"/>
+                <a:cs typeface="CMU Serif" panose="02000603000000000000" pitchFamily="2" charset="0"/>
+              </a:rPr>
+              <a:t>V</a:t>
+            </a:r>
+            <a:endParaRPr lang="de-DE" sz="1400" baseline="-25000" dirty="0">
+              <a:latin typeface="CMU Serif" panose="02000603000000000000" pitchFamily="2" charset="0"/>
+              <a:ea typeface="CMU Serif" panose="02000603000000000000" pitchFamily="2" charset="0"/>
+              <a:cs typeface="CMU Serif" panose="02000603000000000000" pitchFamily="2" charset="0"/>
+            </a:endParaRPr>
+          </a:p>
+        </p:txBody>
+      </p:sp>
+      <p:sp>
+        <p:nvSpPr>
+          <p:cNvPr id="13" name="Textfeld 12">
+            <a:extLst>
+              <a:ext uri="{FF2B5EF4-FFF2-40B4-BE49-F238E27FC236}">
+                <a16:creationId xmlns:a16="http://schemas.microsoft.com/office/drawing/2014/main" id="{D4DBAC26-BE8A-E26E-380A-B2DC7110AD73}"/>
+              </a:ext>
+            </a:extLst>
+          </p:cNvPr>
+          <p:cNvSpPr txBox="1"/>
+          <p:nvPr/>
+        </p:nvSpPr>
+        <p:spPr>
+          <a:xfrm>
+            <a:off x="1630079" y="2629628"/>
+            <a:ext cx="341666" cy="307777"/>
+          </a:xfrm>
+          <a:prstGeom prst="rect">
+            <a:avLst/>
+          </a:prstGeom>
+          <a:noFill/>
+        </p:spPr>
+        <p:txBody>
+          <a:bodyPr wrap="square" rtlCol="0">
+            <a:spAutoFit/>
+          </a:bodyPr>
+          <a:lstStyle/>
+          <a:p>
+            <a:pPr algn="ctr"/>
+            <a:r>
+              <a:rPr lang="de-DE" sz="1400" dirty="0">
+                <a:latin typeface="CMU Serif" panose="02000603000000000000" pitchFamily="2" charset="0"/>
+                <a:ea typeface="CMU Serif" panose="02000603000000000000" pitchFamily="2" charset="0"/>
+                <a:cs typeface="CMU Serif" panose="02000603000000000000" pitchFamily="2" charset="0"/>
+              </a:rPr>
+              <a:t>~</a:t>
+            </a:r>
+            <a:endParaRPr lang="de-DE" sz="1400" baseline="-25000" dirty="0">
+              <a:latin typeface="CMU Serif" panose="02000603000000000000" pitchFamily="2" charset="0"/>
+              <a:ea typeface="CMU Serif" panose="02000603000000000000" pitchFamily="2" charset="0"/>
+              <a:cs typeface="CMU Serif" panose="02000603000000000000" pitchFamily="2" charset="0"/>
+            </a:endParaRPr>
+          </a:p>
+        </p:txBody>
+      </p:sp>
+      <p:sp>
+        <p:nvSpPr>
+          <p:cNvPr id="14" name="Ellipse 13">
+            <a:extLst>
+              <a:ext uri="{FF2B5EF4-FFF2-40B4-BE49-F238E27FC236}">
+                <a16:creationId xmlns:a16="http://schemas.microsoft.com/office/drawing/2014/main" id="{17879248-9E5E-9540-3305-D7DB7E621D50}"/>
+              </a:ext>
+            </a:extLst>
+          </p:cNvPr>
+          <p:cNvSpPr/>
+          <p:nvPr/>
+        </p:nvSpPr>
+        <p:spPr>
+          <a:xfrm>
+            <a:off x="1765049" y="1724341"/>
+            <a:ext cx="70349" cy="70349"/>
+          </a:xfrm>
+          <a:prstGeom prst="ellipse">
+            <a:avLst/>
+          </a:prstGeom>
+          <a:solidFill>
+            <a:schemeClr val="tx1"/>
+          </a:solidFill>
+          <a:ln>
+            <a:noFill/>
+          </a:ln>
+        </p:spPr>
+        <p:style>
+          <a:lnRef idx="2">
+            <a:schemeClr val="accent1">
+              <a:shade val="15000"/>
+            </a:schemeClr>
+          </a:lnRef>
+          <a:fillRef idx="1">
+            <a:schemeClr val="accent1"/>
+          </a:fillRef>
+          <a:effectRef idx="0">
+            <a:schemeClr val="accent1"/>
+          </a:effectRef>
+          <a:fontRef idx="minor">
+            <a:schemeClr val="lt1"/>
+          </a:fontRef>
+        </p:style>
+        <p:txBody>
+          <a:bodyPr rtlCol="0" anchor="ctr"/>
+          <a:lstStyle/>
+          <a:p>
+            <a:pPr algn="ctr"/>
+            <a:endParaRPr lang="de-DE"/>
+          </a:p>
+        </p:txBody>
+      </p:sp>
+      <p:sp>
+        <p:nvSpPr>
+          <p:cNvPr id="15" name="Ellipse 14">
+            <a:extLst>
+              <a:ext uri="{FF2B5EF4-FFF2-40B4-BE49-F238E27FC236}">
+                <a16:creationId xmlns:a16="http://schemas.microsoft.com/office/drawing/2014/main" id="{FDB46DEF-7601-2053-4A91-22C90B95523C}"/>
+              </a:ext>
+            </a:extLst>
+          </p:cNvPr>
+          <p:cNvSpPr/>
+          <p:nvPr/>
+        </p:nvSpPr>
+        <p:spPr>
+          <a:xfrm>
+            <a:off x="2958195" y="1724341"/>
+            <a:ext cx="70349" cy="70349"/>
+          </a:xfrm>
+          <a:prstGeom prst="ellipse">
+            <a:avLst/>
+          </a:prstGeom>
+          <a:solidFill>
+            <a:schemeClr val="tx1"/>
+          </a:solidFill>
+          <a:ln>
+            <a:noFill/>
+          </a:ln>
+        </p:spPr>
+        <p:style>
+          <a:lnRef idx="2">
+            <a:schemeClr val="accent1">
+              <a:shade val="15000"/>
+            </a:schemeClr>
+          </a:lnRef>
+          <a:fillRef idx="1">
+            <a:schemeClr val="accent1"/>
+          </a:fillRef>
+          <a:effectRef idx="0">
+            <a:schemeClr val="accent1"/>
+          </a:effectRef>
+          <a:fontRef idx="minor">
+            <a:schemeClr val="lt1"/>
+          </a:fontRef>
+        </p:style>
+        <p:txBody>
+          <a:bodyPr rtlCol="0" anchor="ctr"/>
+          <a:lstStyle/>
+          <a:p>
+            <a:pPr algn="ctr"/>
+            <a:endParaRPr lang="de-DE"/>
+          </a:p>
+        </p:txBody>
+      </p:sp>
+      <p:sp>
+        <p:nvSpPr>
+          <p:cNvPr id="16" name="Rechteck 15">
+            <a:extLst>
+              <a:ext uri="{FF2B5EF4-FFF2-40B4-BE49-F238E27FC236}">
+                <a16:creationId xmlns:a16="http://schemas.microsoft.com/office/drawing/2014/main" id="{33A958FD-91E2-80A0-E979-96AE6A1E74CA}"/>
+              </a:ext>
+            </a:extLst>
+          </p:cNvPr>
+          <p:cNvSpPr/>
+          <p:nvPr/>
+        </p:nvSpPr>
+        <p:spPr>
+          <a:xfrm>
+            <a:off x="2095500" y="1632690"/>
+            <a:ext cx="602594" cy="253652"/>
+          </a:xfrm>
+          <a:prstGeom prst="rect">
+            <a:avLst/>
+          </a:prstGeom>
+          <a:solidFill>
+            <a:schemeClr val="bg1"/>
+          </a:solidFill>
+          <a:ln>
+            <a:noFill/>
+          </a:ln>
+        </p:spPr>
+        <p:style>
+          <a:lnRef idx="2">
+            <a:schemeClr val="accent1">
+              <a:shade val="15000"/>
+            </a:schemeClr>
+          </a:lnRef>
+          <a:fillRef idx="1">
+            <a:schemeClr val="accent1"/>
+          </a:fillRef>
+          <a:effectRef idx="0">
+            <a:schemeClr val="accent1"/>
+          </a:effectRef>
+          <a:fontRef idx="minor">
+            <a:schemeClr val="lt1"/>
+          </a:fontRef>
+        </p:style>
+        <p:txBody>
+          <a:bodyPr rtlCol="0" anchor="ctr"/>
+          <a:lstStyle/>
+          <a:p>
+            <a:pPr algn="ctr"/>
+            <a:endParaRPr lang="de-DE"/>
+          </a:p>
+        </p:txBody>
+      </p:sp>
+      <p:sp>
+        <p:nvSpPr>
+          <p:cNvPr id="17" name="Textfeld 16">
+            <a:extLst>
+              <a:ext uri="{FF2B5EF4-FFF2-40B4-BE49-F238E27FC236}">
+                <a16:creationId xmlns:a16="http://schemas.microsoft.com/office/drawing/2014/main" id="{88EFE8CB-704E-5102-E7E6-5B07A079F72E}"/>
+              </a:ext>
+            </a:extLst>
+          </p:cNvPr>
+          <p:cNvSpPr txBox="1"/>
+          <p:nvPr/>
+        </p:nvSpPr>
+        <p:spPr>
+          <a:xfrm>
+            <a:off x="2037238" y="1621774"/>
+            <a:ext cx="719118" cy="307777"/>
+          </a:xfrm>
+          <a:prstGeom prst="rect">
+            <a:avLst/>
+          </a:prstGeom>
+          <a:noFill/>
+        </p:spPr>
+        <p:txBody>
+          <a:bodyPr wrap="square" rtlCol="0">
+            <a:spAutoFit/>
+          </a:bodyPr>
+          <a:lstStyle/>
+          <a:p>
+            <a:pPr algn="ctr"/>
+            <a:r>
+              <a:rPr lang="de-DE" sz="1400" dirty="0">
+                <a:latin typeface="CMU Serif" panose="02000603000000000000" pitchFamily="2" charset="0"/>
+                <a:ea typeface="CMU Serif" panose="02000603000000000000" pitchFamily="2" charset="0"/>
+                <a:cs typeface="CMU Serif" panose="02000603000000000000" pitchFamily="2" charset="0"/>
+              </a:rPr>
+              <a:t>L / C</a:t>
+            </a:r>
+            <a:endParaRPr lang="de-DE" sz="1400" baseline="-25000" dirty="0">
+              <a:latin typeface="CMU Serif" panose="02000603000000000000" pitchFamily="2" charset="0"/>
+              <a:ea typeface="CMU Serif" panose="02000603000000000000" pitchFamily="2" charset="0"/>
+              <a:cs typeface="CMU Serif" panose="02000603000000000000" pitchFamily="2" charset="0"/>
+            </a:endParaRPr>
+          </a:p>
+        </p:txBody>
+      </p:sp>
+      <p:cxnSp>
+        <p:nvCxnSpPr>
+          <p:cNvPr id="18" name="Gerade Verbindung mit Pfeil 17">
+            <a:extLst>
+              <a:ext uri="{FF2B5EF4-FFF2-40B4-BE49-F238E27FC236}">
+                <a16:creationId xmlns:a16="http://schemas.microsoft.com/office/drawing/2014/main" id="{0567DFA3-6013-E383-1619-6CB95683A2AB}"/>
+              </a:ext>
+            </a:extLst>
+          </p:cNvPr>
+          <p:cNvCxnSpPr>
+            <a:cxnSpLocks/>
+          </p:cNvCxnSpPr>
+          <p:nvPr/>
+        </p:nvCxnSpPr>
+        <p:spPr>
+          <a:xfrm flipH="1">
+            <a:off x="2037238" y="1055483"/>
+            <a:ext cx="682772" cy="0"/>
+          </a:xfrm>
+          <a:prstGeom prst="straightConnector1">
+            <a:avLst/>
+          </a:prstGeom>
+          <a:ln cap="rnd">
+            <a:solidFill>
+              <a:srgbClr val="086FBD"/>
+            </a:solidFill>
+            <a:round/>
+            <a:tailEnd type="triangle"/>
+          </a:ln>
+        </p:spPr>
+        <p:style>
+          <a:lnRef idx="2">
+            <a:schemeClr val="accent1"/>
+          </a:lnRef>
+          <a:fillRef idx="0">
+            <a:schemeClr val="accent1"/>
+          </a:fillRef>
+          <a:effectRef idx="1">
+            <a:schemeClr val="accent1"/>
+          </a:effectRef>
+          <a:fontRef idx="minor">
+            <a:schemeClr val="tx1"/>
+          </a:fontRef>
+        </p:style>
+      </p:cxnSp>
+      <p:sp>
+        <p:nvSpPr>
+          <p:cNvPr id="19" name="Textfeld 18">
+            <a:extLst>
+              <a:ext uri="{FF2B5EF4-FFF2-40B4-BE49-F238E27FC236}">
+                <a16:creationId xmlns:a16="http://schemas.microsoft.com/office/drawing/2014/main" id="{F837B461-6CA9-6D96-A62F-178FFB54B4A5}"/>
+              </a:ext>
+            </a:extLst>
+          </p:cNvPr>
+          <p:cNvSpPr txBox="1"/>
+          <p:nvPr/>
+        </p:nvSpPr>
+        <p:spPr>
+          <a:xfrm>
+            <a:off x="1113865" y="922105"/>
+            <a:ext cx="953695" cy="261610"/>
+          </a:xfrm>
+          <a:prstGeom prst="rect">
+            <a:avLst/>
+          </a:prstGeom>
+          <a:noFill/>
+        </p:spPr>
+        <p:txBody>
+          <a:bodyPr wrap="square" rtlCol="0">
+            <a:spAutoFit/>
+          </a:bodyPr>
+          <a:lstStyle/>
+          <a:p>
+            <a:pPr algn="ctr"/>
+            <a:r>
+              <a:rPr lang="de-DE" sz="1100" i="1" dirty="0" err="1">
+                <a:solidFill>
+                  <a:srgbClr val="086FBD"/>
+                </a:solidFill>
+                <a:latin typeface="CMU Serif" panose="02000603000000000000" pitchFamily="2" charset="0"/>
+                <a:ea typeface="CMU Serif" panose="02000603000000000000" pitchFamily="2" charset="0"/>
+                <a:cs typeface="CMU Serif" panose="02000603000000000000" pitchFamily="2" charset="0"/>
+              </a:rPr>
+              <a:t>u</a:t>
+            </a:r>
+            <a:r>
+              <a:rPr lang="de-DE" sz="1100" baseline="-25000" dirty="0" err="1">
+                <a:solidFill>
+                  <a:srgbClr val="086FBD"/>
+                </a:solidFill>
+                <a:latin typeface="CMU Serif" panose="02000603000000000000" pitchFamily="2" charset="0"/>
+                <a:ea typeface="CMU Serif" panose="02000603000000000000" pitchFamily="2" charset="0"/>
+                <a:cs typeface="CMU Serif" panose="02000603000000000000" pitchFamily="2" charset="0"/>
+              </a:rPr>
+              <a:t>L</a:t>
+            </a:r>
+            <a:r>
+              <a:rPr lang="de-DE" sz="1100" dirty="0">
+                <a:solidFill>
+                  <a:srgbClr val="086FBD"/>
+                </a:solidFill>
+                <a:latin typeface="CMU Serif" panose="02000603000000000000" pitchFamily="2" charset="0"/>
+                <a:ea typeface="CMU Serif" panose="02000603000000000000" pitchFamily="2" charset="0"/>
+                <a:cs typeface="CMU Serif" panose="02000603000000000000" pitchFamily="2" charset="0"/>
+              </a:rPr>
+              <a:t>(</a:t>
+            </a:r>
+            <a:r>
+              <a:rPr lang="de-DE" sz="1100" i="1" dirty="0">
+                <a:solidFill>
+                  <a:srgbClr val="086FBD"/>
+                </a:solidFill>
+                <a:latin typeface="CMU Serif" panose="02000603000000000000" pitchFamily="2" charset="0"/>
+                <a:ea typeface="CMU Serif" panose="02000603000000000000" pitchFamily="2" charset="0"/>
+                <a:cs typeface="CMU Serif" panose="02000603000000000000" pitchFamily="2" charset="0"/>
+              </a:rPr>
+              <a:t>t</a:t>
+            </a:r>
+            <a:r>
+              <a:rPr lang="de-DE" sz="1100" dirty="0">
+                <a:solidFill>
+                  <a:srgbClr val="086FBD"/>
+                </a:solidFill>
+                <a:latin typeface="CMU Serif" panose="02000603000000000000" pitchFamily="2" charset="0"/>
+                <a:ea typeface="CMU Serif" panose="02000603000000000000" pitchFamily="2" charset="0"/>
+                <a:cs typeface="CMU Serif" panose="02000603000000000000" pitchFamily="2" charset="0"/>
+              </a:rPr>
+              <a:t>)</a:t>
+            </a:r>
+            <a:r>
+              <a:rPr lang="de-DE" sz="1100" i="1" dirty="0">
+                <a:solidFill>
+                  <a:srgbClr val="086FBD"/>
+                </a:solidFill>
+                <a:latin typeface="CMU Serif" panose="02000603000000000000" pitchFamily="2" charset="0"/>
+                <a:ea typeface="CMU Serif" panose="02000603000000000000" pitchFamily="2" charset="0"/>
+                <a:cs typeface="CMU Serif" panose="02000603000000000000" pitchFamily="2" charset="0"/>
+              </a:rPr>
+              <a:t> </a:t>
+            </a:r>
+            <a:r>
+              <a:rPr lang="de-DE" sz="1100" dirty="0">
+                <a:solidFill>
+                  <a:srgbClr val="086FBD"/>
+                </a:solidFill>
+                <a:latin typeface="CMU Serif" panose="02000603000000000000" pitchFamily="2" charset="0"/>
+                <a:ea typeface="CMU Serif" panose="02000603000000000000" pitchFamily="2" charset="0"/>
+                <a:cs typeface="CMU Serif" panose="02000603000000000000" pitchFamily="2" charset="0"/>
+              </a:rPr>
+              <a:t>/</a:t>
+            </a:r>
+            <a:r>
+              <a:rPr lang="de-DE" sz="1100" i="1" dirty="0">
+                <a:solidFill>
+                  <a:srgbClr val="086FBD"/>
+                </a:solidFill>
+                <a:latin typeface="CMU Serif" panose="02000603000000000000" pitchFamily="2" charset="0"/>
+                <a:ea typeface="CMU Serif" panose="02000603000000000000" pitchFamily="2" charset="0"/>
+                <a:cs typeface="CMU Serif" panose="02000603000000000000" pitchFamily="2" charset="0"/>
+              </a:rPr>
+              <a:t> </a:t>
+            </a:r>
+            <a:r>
+              <a:rPr lang="de-DE" sz="1100" i="1" dirty="0" err="1">
+                <a:solidFill>
+                  <a:srgbClr val="086FBD"/>
+                </a:solidFill>
+                <a:latin typeface="CMU Serif" panose="02000603000000000000" pitchFamily="2" charset="0"/>
+                <a:ea typeface="CMU Serif" panose="02000603000000000000" pitchFamily="2" charset="0"/>
+                <a:cs typeface="CMU Serif" panose="02000603000000000000" pitchFamily="2" charset="0"/>
+              </a:rPr>
+              <a:t>u</a:t>
+            </a:r>
+            <a:r>
+              <a:rPr lang="de-DE" sz="1100" baseline="-25000" dirty="0" err="1">
+                <a:solidFill>
+                  <a:srgbClr val="086FBD"/>
+                </a:solidFill>
+                <a:latin typeface="CMU Serif" panose="02000603000000000000" pitchFamily="2" charset="0"/>
+                <a:ea typeface="CMU Serif" panose="02000603000000000000" pitchFamily="2" charset="0"/>
+                <a:cs typeface="CMU Serif" panose="02000603000000000000" pitchFamily="2" charset="0"/>
+              </a:rPr>
+              <a:t>C</a:t>
+            </a:r>
+            <a:r>
+              <a:rPr lang="de-DE" sz="1100" dirty="0">
+                <a:solidFill>
+                  <a:srgbClr val="086FBD"/>
+                </a:solidFill>
+                <a:latin typeface="CMU Serif" panose="02000603000000000000" pitchFamily="2" charset="0"/>
+                <a:ea typeface="CMU Serif" panose="02000603000000000000" pitchFamily="2" charset="0"/>
+                <a:cs typeface="CMU Serif" panose="02000603000000000000" pitchFamily="2" charset="0"/>
+              </a:rPr>
+              <a:t>(</a:t>
+            </a:r>
+            <a:r>
+              <a:rPr lang="de-DE" sz="1100" i="1" dirty="0">
+                <a:solidFill>
+                  <a:srgbClr val="086FBD"/>
+                </a:solidFill>
+                <a:latin typeface="CMU Serif" panose="02000603000000000000" pitchFamily="2" charset="0"/>
+                <a:ea typeface="CMU Serif" panose="02000603000000000000" pitchFamily="2" charset="0"/>
+                <a:cs typeface="CMU Serif" panose="02000603000000000000" pitchFamily="2" charset="0"/>
+              </a:rPr>
+              <a:t>t</a:t>
+            </a:r>
+            <a:r>
+              <a:rPr lang="de-DE" sz="1100" dirty="0">
+                <a:solidFill>
+                  <a:srgbClr val="086FBD"/>
+                </a:solidFill>
+                <a:latin typeface="CMU Serif" panose="02000603000000000000" pitchFamily="2" charset="0"/>
+                <a:ea typeface="CMU Serif" panose="02000603000000000000" pitchFamily="2" charset="0"/>
+                <a:cs typeface="CMU Serif" panose="02000603000000000000" pitchFamily="2" charset="0"/>
+              </a:rPr>
+              <a:t>)</a:t>
+            </a:r>
+          </a:p>
+        </p:txBody>
+      </p:sp>
+      <p:cxnSp>
+        <p:nvCxnSpPr>
+          <p:cNvPr id="23" name="Gerade Verbindung mit Pfeil 22">
+            <a:extLst>
+              <a:ext uri="{FF2B5EF4-FFF2-40B4-BE49-F238E27FC236}">
+                <a16:creationId xmlns:a16="http://schemas.microsoft.com/office/drawing/2014/main" id="{1A7D2943-C89B-CC0F-E1FD-D83D9D74D6A3}"/>
+              </a:ext>
+            </a:extLst>
+          </p:cNvPr>
+          <p:cNvCxnSpPr>
+            <a:cxnSpLocks/>
+          </p:cNvCxnSpPr>
+          <p:nvPr/>
+        </p:nvCxnSpPr>
+        <p:spPr>
+          <a:xfrm flipH="1">
+            <a:off x="1470660" y="1759515"/>
+            <a:ext cx="193217" cy="0"/>
+          </a:xfrm>
+          <a:prstGeom prst="straightConnector1">
+            <a:avLst/>
+          </a:prstGeom>
+          <a:ln w="19050" cap="rnd">
+            <a:solidFill>
+              <a:srgbClr val="FF0000"/>
+            </a:solidFill>
+            <a:round/>
+            <a:tailEnd type="triangle"/>
+          </a:ln>
+        </p:spPr>
+        <p:style>
+          <a:lnRef idx="2">
+            <a:schemeClr val="accent1"/>
+          </a:lnRef>
+          <a:fillRef idx="0">
+            <a:schemeClr val="accent1"/>
+          </a:fillRef>
+          <a:effectRef idx="1">
+            <a:schemeClr val="accent1"/>
+          </a:effectRef>
+          <a:fontRef idx="minor">
+            <a:schemeClr val="tx1"/>
+          </a:fontRef>
+        </p:style>
+      </p:cxnSp>
+      <p:sp>
+        <p:nvSpPr>
+          <p:cNvPr id="25" name="Textfeld 24">
+            <a:extLst>
+              <a:ext uri="{FF2B5EF4-FFF2-40B4-BE49-F238E27FC236}">
+                <a16:creationId xmlns:a16="http://schemas.microsoft.com/office/drawing/2014/main" id="{324443C5-2C64-4659-D26A-DAFD0631BDD3}"/>
+              </a:ext>
+            </a:extLst>
+          </p:cNvPr>
+          <p:cNvSpPr txBox="1"/>
+          <p:nvPr/>
+        </p:nvSpPr>
+        <p:spPr>
+          <a:xfrm>
+            <a:off x="1132069" y="1914272"/>
+            <a:ext cx="905169" cy="261610"/>
+          </a:xfrm>
+          <a:prstGeom prst="rect">
+            <a:avLst/>
+          </a:prstGeom>
+          <a:noFill/>
+        </p:spPr>
+        <p:txBody>
+          <a:bodyPr wrap="square" rtlCol="0">
+            <a:spAutoFit/>
+          </a:bodyPr>
+          <a:lstStyle/>
+          <a:p>
+            <a:pPr algn="ctr"/>
+            <a:r>
+              <a:rPr lang="de-DE" sz="1100" i="1" dirty="0" err="1">
+                <a:solidFill>
+                  <a:srgbClr val="FF0000"/>
+                </a:solidFill>
+                <a:latin typeface="CMU Serif" panose="02000603000000000000" pitchFamily="2" charset="0"/>
+                <a:ea typeface="CMU Serif" panose="02000603000000000000" pitchFamily="2" charset="0"/>
+                <a:cs typeface="CMU Serif" panose="02000603000000000000" pitchFamily="2" charset="0"/>
+              </a:rPr>
+              <a:t>i</a:t>
+            </a:r>
+            <a:r>
+              <a:rPr lang="de-DE" sz="1100" baseline="-25000" dirty="0" err="1">
+                <a:solidFill>
+                  <a:srgbClr val="FF0000"/>
+                </a:solidFill>
+                <a:latin typeface="CMU Serif" panose="02000603000000000000" pitchFamily="2" charset="0"/>
+                <a:ea typeface="CMU Serif" panose="02000603000000000000" pitchFamily="2" charset="0"/>
+                <a:cs typeface="CMU Serif" panose="02000603000000000000" pitchFamily="2" charset="0"/>
+              </a:rPr>
+              <a:t>L</a:t>
+            </a:r>
+            <a:r>
+              <a:rPr lang="de-DE" sz="1100" dirty="0">
+                <a:solidFill>
+                  <a:srgbClr val="FF0000"/>
+                </a:solidFill>
+                <a:latin typeface="CMU Serif" panose="02000603000000000000" pitchFamily="2" charset="0"/>
+                <a:ea typeface="CMU Serif" panose="02000603000000000000" pitchFamily="2" charset="0"/>
+                <a:cs typeface="CMU Serif" panose="02000603000000000000" pitchFamily="2" charset="0"/>
+              </a:rPr>
+              <a:t>(</a:t>
+            </a:r>
+            <a:r>
+              <a:rPr lang="de-DE" sz="1100" i="1" dirty="0">
+                <a:solidFill>
+                  <a:srgbClr val="FF0000"/>
+                </a:solidFill>
+                <a:latin typeface="CMU Serif" panose="02000603000000000000" pitchFamily="2" charset="0"/>
+                <a:ea typeface="CMU Serif" panose="02000603000000000000" pitchFamily="2" charset="0"/>
+                <a:cs typeface="CMU Serif" panose="02000603000000000000" pitchFamily="2" charset="0"/>
+              </a:rPr>
+              <a:t>t</a:t>
+            </a:r>
+            <a:r>
+              <a:rPr lang="de-DE" sz="1100" dirty="0">
+                <a:solidFill>
+                  <a:srgbClr val="FF0000"/>
+                </a:solidFill>
+                <a:latin typeface="CMU Serif" panose="02000603000000000000" pitchFamily="2" charset="0"/>
+                <a:ea typeface="CMU Serif" panose="02000603000000000000" pitchFamily="2" charset="0"/>
+                <a:cs typeface="CMU Serif" panose="02000603000000000000" pitchFamily="2" charset="0"/>
+              </a:rPr>
+              <a:t>)</a:t>
+            </a:r>
+            <a:r>
+              <a:rPr lang="de-DE" sz="1100" i="1" dirty="0">
+                <a:solidFill>
+                  <a:srgbClr val="FF0000"/>
+                </a:solidFill>
+                <a:latin typeface="CMU Serif" panose="02000603000000000000" pitchFamily="2" charset="0"/>
+                <a:ea typeface="CMU Serif" panose="02000603000000000000" pitchFamily="2" charset="0"/>
+                <a:cs typeface="CMU Serif" panose="02000603000000000000" pitchFamily="2" charset="0"/>
+              </a:rPr>
+              <a:t> </a:t>
+            </a:r>
+            <a:r>
+              <a:rPr lang="de-DE" sz="1100" dirty="0">
+                <a:solidFill>
+                  <a:srgbClr val="FF0000"/>
+                </a:solidFill>
+                <a:latin typeface="CMU Serif" panose="02000603000000000000" pitchFamily="2" charset="0"/>
+                <a:ea typeface="CMU Serif" panose="02000603000000000000" pitchFamily="2" charset="0"/>
+                <a:cs typeface="CMU Serif" panose="02000603000000000000" pitchFamily="2" charset="0"/>
+              </a:rPr>
+              <a:t>/</a:t>
+            </a:r>
+            <a:r>
+              <a:rPr lang="de-DE" sz="1100" i="1" dirty="0">
+                <a:solidFill>
+                  <a:srgbClr val="FF0000"/>
+                </a:solidFill>
+                <a:latin typeface="CMU Serif" panose="02000603000000000000" pitchFamily="2" charset="0"/>
+                <a:ea typeface="CMU Serif" panose="02000603000000000000" pitchFamily="2" charset="0"/>
+                <a:cs typeface="CMU Serif" panose="02000603000000000000" pitchFamily="2" charset="0"/>
+              </a:rPr>
+              <a:t> </a:t>
+            </a:r>
+            <a:r>
+              <a:rPr lang="de-DE" sz="1100" i="1" dirty="0" err="1">
+                <a:solidFill>
+                  <a:srgbClr val="FF0000"/>
+                </a:solidFill>
+                <a:latin typeface="CMU Serif" panose="02000603000000000000" pitchFamily="2" charset="0"/>
+                <a:ea typeface="CMU Serif" panose="02000603000000000000" pitchFamily="2" charset="0"/>
+                <a:cs typeface="CMU Serif" panose="02000603000000000000" pitchFamily="2" charset="0"/>
+              </a:rPr>
+              <a:t>i</a:t>
+            </a:r>
+            <a:r>
+              <a:rPr lang="de-DE" sz="1100" baseline="-25000" dirty="0" err="1">
+                <a:solidFill>
+                  <a:srgbClr val="FF0000"/>
+                </a:solidFill>
+                <a:latin typeface="CMU Serif" panose="02000603000000000000" pitchFamily="2" charset="0"/>
+                <a:ea typeface="CMU Serif" panose="02000603000000000000" pitchFamily="2" charset="0"/>
+                <a:cs typeface="CMU Serif" panose="02000603000000000000" pitchFamily="2" charset="0"/>
+              </a:rPr>
+              <a:t>C</a:t>
+            </a:r>
+            <a:r>
+              <a:rPr lang="de-DE" sz="1100" dirty="0">
+                <a:solidFill>
+                  <a:srgbClr val="FF0000"/>
+                </a:solidFill>
+                <a:latin typeface="CMU Serif" panose="02000603000000000000" pitchFamily="2" charset="0"/>
+                <a:ea typeface="CMU Serif" panose="02000603000000000000" pitchFamily="2" charset="0"/>
+                <a:cs typeface="CMU Serif" panose="02000603000000000000" pitchFamily="2" charset="0"/>
+              </a:rPr>
+              <a:t>(</a:t>
+            </a:r>
+            <a:r>
+              <a:rPr lang="de-DE" sz="1100" i="1" dirty="0">
+                <a:solidFill>
+                  <a:srgbClr val="FF0000"/>
+                </a:solidFill>
+                <a:latin typeface="CMU Serif" panose="02000603000000000000" pitchFamily="2" charset="0"/>
+                <a:ea typeface="CMU Serif" panose="02000603000000000000" pitchFamily="2" charset="0"/>
+                <a:cs typeface="CMU Serif" panose="02000603000000000000" pitchFamily="2" charset="0"/>
+              </a:rPr>
+              <a:t>t</a:t>
+            </a:r>
+            <a:r>
+              <a:rPr lang="de-DE" sz="1100" dirty="0">
+                <a:solidFill>
+                  <a:srgbClr val="FF0000"/>
+                </a:solidFill>
+                <a:latin typeface="CMU Serif" panose="02000603000000000000" pitchFamily="2" charset="0"/>
+                <a:ea typeface="CMU Serif" panose="02000603000000000000" pitchFamily="2" charset="0"/>
+                <a:cs typeface="CMU Serif" panose="02000603000000000000" pitchFamily="2" charset="0"/>
+              </a:rPr>
+              <a:t>)</a:t>
+            </a:r>
+          </a:p>
+        </p:txBody>
+      </p:sp>
+    </p:spTree>
+    <p:extLst>
+      <p:ext uri="{BB962C8B-B14F-4D97-AF65-F5344CB8AC3E}">
+        <p14:creationId xmlns:p14="http://schemas.microsoft.com/office/powerpoint/2010/main" val="1472471268"/>
       </p:ext>
     </p:extLst>
   </p:cSld>

--- a/B.Sc. LRT/Grundlagen der Elektrotechnik/images/ETech-Images.pptx
+++ b/B.Sc. LRT/Grundlagen der Elektrotechnik/images/ETech-Images.pptx
@@ -5,7 +5,7 @@
     <p:sldMasterId id="2147483660" r:id="rId1"/>
   </p:sldMasterIdLst>
   <p:notesMasterIdLst>
-    <p:notesMasterId r:id="rId12"/>
+    <p:notesMasterId r:id="rId15"/>
   </p:notesMasterIdLst>
   <p:sldIdLst>
     <p:sldId id="256" r:id="rId2"/>
@@ -18,6 +18,9 @@
     <p:sldId id="263" r:id="rId9"/>
     <p:sldId id="265" r:id="rId10"/>
     <p:sldId id="264" r:id="rId11"/>
+    <p:sldId id="266" r:id="rId12"/>
+    <p:sldId id="267" r:id="rId13"/>
+    <p:sldId id="268" r:id="rId14"/>
   </p:sldIdLst>
   <p:sldSz cx="3600450" cy="3600450"/>
   <p:notesSz cx="6858000" cy="9144000"/>
@@ -173,7 +176,7 @@
             </a:lvl1pPr>
           </a:lstStyle>
           <a:p>
-            <a:endParaRPr lang="de-DE"/>
+            <a:endParaRPr lang="de-DE" dirty="0"/>
           </a:p>
         </p:txBody>
       </p:sp>
@@ -208,7 +211,7 @@
               <a:rPr lang="de-DE" smtClean="0"/>
               <a:t>11.02.2026</a:t>
             </a:fld>
-            <a:endParaRPr lang="de-DE"/>
+            <a:endParaRPr lang="de-DE" dirty="0"/>
           </a:p>
         </p:txBody>
       </p:sp>
@@ -241,7 +244,7 @@
           <a:bodyPr vert="horz" lIns="91440" tIns="45720" rIns="91440" bIns="45720" rtlCol="0" anchor="ctr"/>
           <a:lstStyle/>
           <a:p>
-            <a:endParaRPr lang="de-DE"/>
+            <a:endParaRPr lang="de-DE" dirty="0"/>
           </a:p>
         </p:txBody>
       </p:sp>
@@ -331,7 +334,7 @@
             </a:lvl1pPr>
           </a:lstStyle>
           <a:p>
-            <a:endParaRPr lang="de-DE"/>
+            <a:endParaRPr lang="de-DE" dirty="0"/>
           </a:p>
         </p:txBody>
       </p:sp>
@@ -366,7 +369,7 @@
               <a:rPr lang="de-DE" smtClean="0"/>
               <a:t>‹Nr.›</a:t>
             </a:fld>
-            <a:endParaRPr lang="de-DE"/>
+            <a:endParaRPr lang="de-DE" dirty="0"/>
           </a:p>
         </p:txBody>
       </p:sp>
@@ -606,7 +609,7 @@
               <a:rPr lang="de-DE" smtClean="0"/>
               <a:t>11.02.2026</a:t>
             </a:fld>
-            <a:endParaRPr lang="de-DE"/>
+            <a:endParaRPr lang="de-DE" dirty="0"/>
           </a:p>
         </p:txBody>
       </p:sp>
@@ -625,7 +628,7 @@
           <a:bodyPr/>
           <a:lstStyle/>
           <a:p>
-            <a:endParaRPr lang="de-DE"/>
+            <a:endParaRPr lang="de-DE" dirty="0"/>
           </a:p>
         </p:txBody>
       </p:sp>
@@ -648,7 +651,7 @@
               <a:rPr lang="de-DE" smtClean="0"/>
               <a:t>‹Nr.›</a:t>
             </a:fld>
-            <a:endParaRPr lang="de-DE"/>
+            <a:endParaRPr lang="de-DE" dirty="0"/>
           </a:p>
         </p:txBody>
       </p:sp>
@@ -776,7 +779,7 @@
               <a:rPr lang="de-DE" smtClean="0"/>
               <a:t>11.02.2026</a:t>
             </a:fld>
-            <a:endParaRPr lang="de-DE"/>
+            <a:endParaRPr lang="de-DE" dirty="0"/>
           </a:p>
         </p:txBody>
       </p:sp>
@@ -795,7 +798,7 @@
           <a:bodyPr/>
           <a:lstStyle/>
           <a:p>
-            <a:endParaRPr lang="de-DE"/>
+            <a:endParaRPr lang="de-DE" dirty="0"/>
           </a:p>
         </p:txBody>
       </p:sp>
@@ -818,7 +821,7 @@
               <a:rPr lang="de-DE" smtClean="0"/>
               <a:t>‹Nr.›</a:t>
             </a:fld>
-            <a:endParaRPr lang="de-DE"/>
+            <a:endParaRPr lang="de-DE" dirty="0"/>
           </a:p>
         </p:txBody>
       </p:sp>
@@ -956,7 +959,7 @@
               <a:rPr lang="de-DE" smtClean="0"/>
               <a:t>11.02.2026</a:t>
             </a:fld>
-            <a:endParaRPr lang="de-DE"/>
+            <a:endParaRPr lang="de-DE" dirty="0"/>
           </a:p>
         </p:txBody>
       </p:sp>
@@ -975,7 +978,7 @@
           <a:bodyPr/>
           <a:lstStyle/>
           <a:p>
-            <a:endParaRPr lang="de-DE"/>
+            <a:endParaRPr lang="de-DE" dirty="0"/>
           </a:p>
         </p:txBody>
       </p:sp>
@@ -998,7 +1001,7 @@
               <a:rPr lang="de-DE" smtClean="0"/>
               <a:t>‹Nr.›</a:t>
             </a:fld>
-            <a:endParaRPr lang="de-DE"/>
+            <a:endParaRPr lang="de-DE" dirty="0"/>
           </a:p>
         </p:txBody>
       </p:sp>
@@ -1126,7 +1129,7 @@
               <a:rPr lang="de-DE" smtClean="0"/>
               <a:t>11.02.2026</a:t>
             </a:fld>
-            <a:endParaRPr lang="de-DE"/>
+            <a:endParaRPr lang="de-DE" dirty="0"/>
           </a:p>
         </p:txBody>
       </p:sp>
@@ -1145,7 +1148,7 @@
           <a:bodyPr/>
           <a:lstStyle/>
           <a:p>
-            <a:endParaRPr lang="de-DE"/>
+            <a:endParaRPr lang="de-DE" dirty="0"/>
           </a:p>
         </p:txBody>
       </p:sp>
@@ -1168,7 +1171,7 @@
               <a:rPr lang="de-DE" smtClean="0"/>
               <a:t>‹Nr.›</a:t>
             </a:fld>
-            <a:endParaRPr lang="de-DE"/>
+            <a:endParaRPr lang="de-DE" dirty="0"/>
           </a:p>
         </p:txBody>
       </p:sp>
@@ -1372,7 +1375,7 @@
               <a:rPr lang="de-DE" smtClean="0"/>
               <a:t>11.02.2026</a:t>
             </a:fld>
-            <a:endParaRPr lang="de-DE"/>
+            <a:endParaRPr lang="de-DE" dirty="0"/>
           </a:p>
         </p:txBody>
       </p:sp>
@@ -1391,7 +1394,7 @@
           <a:bodyPr/>
           <a:lstStyle/>
           <a:p>
-            <a:endParaRPr lang="de-DE"/>
+            <a:endParaRPr lang="de-DE" dirty="0"/>
           </a:p>
         </p:txBody>
       </p:sp>
@@ -1414,7 +1417,7 @@
               <a:rPr lang="de-DE" smtClean="0"/>
               <a:t>‹Nr.›</a:t>
             </a:fld>
-            <a:endParaRPr lang="de-DE"/>
+            <a:endParaRPr lang="de-DE" dirty="0"/>
           </a:p>
         </p:txBody>
       </p:sp>
@@ -1604,7 +1607,7 @@
               <a:rPr lang="de-DE" smtClean="0"/>
               <a:t>11.02.2026</a:t>
             </a:fld>
-            <a:endParaRPr lang="de-DE"/>
+            <a:endParaRPr lang="de-DE" dirty="0"/>
           </a:p>
         </p:txBody>
       </p:sp>
@@ -1623,7 +1626,7 @@
           <a:bodyPr/>
           <a:lstStyle/>
           <a:p>
-            <a:endParaRPr lang="de-DE"/>
+            <a:endParaRPr lang="de-DE" dirty="0"/>
           </a:p>
         </p:txBody>
       </p:sp>
@@ -1646,7 +1649,7 @@
               <a:rPr lang="de-DE" smtClean="0"/>
               <a:t>‹Nr.›</a:t>
             </a:fld>
-            <a:endParaRPr lang="de-DE"/>
+            <a:endParaRPr lang="de-DE" dirty="0"/>
           </a:p>
         </p:txBody>
       </p:sp>
@@ -1971,7 +1974,7 @@
               <a:rPr lang="de-DE" smtClean="0"/>
               <a:t>11.02.2026</a:t>
             </a:fld>
-            <a:endParaRPr lang="de-DE"/>
+            <a:endParaRPr lang="de-DE" dirty="0"/>
           </a:p>
         </p:txBody>
       </p:sp>
@@ -1990,7 +1993,7 @@
           <a:bodyPr/>
           <a:lstStyle/>
           <a:p>
-            <a:endParaRPr lang="de-DE"/>
+            <a:endParaRPr lang="de-DE" dirty="0"/>
           </a:p>
         </p:txBody>
       </p:sp>
@@ -2013,7 +2016,7 @@
               <a:rPr lang="de-DE" smtClean="0"/>
               <a:t>‹Nr.›</a:t>
             </a:fld>
-            <a:endParaRPr lang="de-DE"/>
+            <a:endParaRPr lang="de-DE" dirty="0"/>
           </a:p>
         </p:txBody>
       </p:sp>
@@ -2089,7 +2092,7 @@
               <a:rPr lang="de-DE" smtClean="0"/>
               <a:t>11.02.2026</a:t>
             </a:fld>
-            <a:endParaRPr lang="de-DE"/>
+            <a:endParaRPr lang="de-DE" dirty="0"/>
           </a:p>
         </p:txBody>
       </p:sp>
@@ -2108,7 +2111,7 @@
           <a:bodyPr/>
           <a:lstStyle/>
           <a:p>
-            <a:endParaRPr lang="de-DE"/>
+            <a:endParaRPr lang="de-DE" dirty="0"/>
           </a:p>
         </p:txBody>
       </p:sp>
@@ -2131,7 +2134,7 @@
               <a:rPr lang="de-DE" smtClean="0"/>
               <a:t>‹Nr.›</a:t>
             </a:fld>
-            <a:endParaRPr lang="de-DE"/>
+            <a:endParaRPr lang="de-DE" dirty="0"/>
           </a:p>
         </p:txBody>
       </p:sp>
@@ -2184,7 +2187,7 @@
               <a:rPr lang="de-DE" smtClean="0"/>
               <a:t>11.02.2026</a:t>
             </a:fld>
-            <a:endParaRPr lang="de-DE"/>
+            <a:endParaRPr lang="de-DE" dirty="0"/>
           </a:p>
         </p:txBody>
       </p:sp>
@@ -2203,7 +2206,7 @@
           <a:bodyPr/>
           <a:lstStyle/>
           <a:p>
-            <a:endParaRPr lang="de-DE"/>
+            <a:endParaRPr lang="de-DE" dirty="0"/>
           </a:p>
         </p:txBody>
       </p:sp>
@@ -2226,7 +2229,7 @@
               <a:rPr lang="de-DE" smtClean="0"/>
               <a:t>‹Nr.›</a:t>
             </a:fld>
-            <a:endParaRPr lang="de-DE"/>
+            <a:endParaRPr lang="de-DE" dirty="0"/>
           </a:p>
         </p:txBody>
       </p:sp>
@@ -2461,7 +2464,7 @@
               <a:rPr lang="de-DE" smtClean="0"/>
               <a:t>11.02.2026</a:t>
             </a:fld>
-            <a:endParaRPr lang="de-DE"/>
+            <a:endParaRPr lang="de-DE" dirty="0"/>
           </a:p>
         </p:txBody>
       </p:sp>
@@ -2480,7 +2483,7 @@
           <a:bodyPr/>
           <a:lstStyle/>
           <a:p>
-            <a:endParaRPr lang="de-DE"/>
+            <a:endParaRPr lang="de-DE" dirty="0"/>
           </a:p>
         </p:txBody>
       </p:sp>
@@ -2503,7 +2506,7 @@
               <a:rPr lang="de-DE" smtClean="0"/>
               <a:t>‹Nr.›</a:t>
             </a:fld>
-            <a:endParaRPr lang="de-DE"/>
+            <a:endParaRPr lang="de-DE" dirty="0"/>
           </a:p>
         </p:txBody>
       </p:sp>
@@ -2627,7 +2630,7 @@
           </a:lstStyle>
           <a:p>
             <a:r>
-              <a:rPr lang="de-DE"/>
+              <a:rPr lang="de-DE" dirty="0"/>
               <a:t>Bild durch Klicken auf Symbol hinzufügen</a:t>
             </a:r>
             <a:endParaRPr lang="en-US" dirty="0"/>
@@ -2718,7 +2721,7 @@
               <a:rPr lang="de-DE" smtClean="0"/>
               <a:t>11.02.2026</a:t>
             </a:fld>
-            <a:endParaRPr lang="de-DE"/>
+            <a:endParaRPr lang="de-DE" dirty="0"/>
           </a:p>
         </p:txBody>
       </p:sp>
@@ -2737,7 +2740,7 @@
           <a:bodyPr/>
           <a:lstStyle/>
           <a:p>
-            <a:endParaRPr lang="de-DE"/>
+            <a:endParaRPr lang="de-DE" dirty="0"/>
           </a:p>
         </p:txBody>
       </p:sp>
@@ -2760,7 +2763,7 @@
               <a:rPr lang="de-DE" smtClean="0"/>
               <a:t>‹Nr.›</a:t>
             </a:fld>
-            <a:endParaRPr lang="de-DE"/>
+            <a:endParaRPr lang="de-DE" dirty="0"/>
           </a:p>
         </p:txBody>
       </p:sp>
@@ -2931,7 +2934,7 @@
               <a:rPr lang="de-DE" smtClean="0"/>
               <a:t>11.02.2026</a:t>
             </a:fld>
-            <a:endParaRPr lang="de-DE"/>
+            <a:endParaRPr lang="de-DE" dirty="0"/>
           </a:p>
         </p:txBody>
       </p:sp>
@@ -2968,7 +2971,7 @@
             </a:lvl1pPr>
           </a:lstStyle>
           <a:p>
-            <a:endParaRPr lang="de-DE"/>
+            <a:endParaRPr lang="de-DE" dirty="0"/>
           </a:p>
         </p:txBody>
       </p:sp>
@@ -3009,7 +3012,7 @@
               <a:rPr lang="de-DE" smtClean="0"/>
               <a:t>‹Nr.›</a:t>
             </a:fld>
-            <a:endParaRPr lang="de-DE"/>
+            <a:endParaRPr lang="de-DE" dirty="0"/>
           </a:p>
         </p:txBody>
       </p:sp>
@@ -3382,7 +3385,7 @@
           <a:lstStyle/>
           <a:p>
             <a:pPr algn="ctr"/>
-            <a:endParaRPr lang="de-DE">
+            <a:endParaRPr lang="de-DE" dirty="0">
               <a:solidFill>
                 <a:sysClr val="windowText" lastClr="000000"/>
               </a:solidFill>
@@ -4180,6 +4183,51 @@
           <a:chExt cx="0" cy="0"/>
         </a:xfrm>
       </p:grpSpPr>
+      <p:cxnSp>
+        <p:nvCxnSpPr>
+          <p:cNvPr id="21" name="Gerader Verbinder 20">
+            <a:extLst>
+              <a:ext uri="{FF2B5EF4-FFF2-40B4-BE49-F238E27FC236}">
+                <a16:creationId xmlns:a16="http://schemas.microsoft.com/office/drawing/2014/main" id="{0331D549-A5F1-4714-CAB6-935C09DB250A}"/>
+              </a:ext>
+            </a:extLst>
+          </p:cNvPr>
+          <p:cNvCxnSpPr>
+            <a:cxnSpLocks/>
+          </p:cNvCxnSpPr>
+          <p:nvPr/>
+        </p:nvCxnSpPr>
+        <p:spPr>
+          <a:xfrm flipH="1">
+            <a:off x="603128" y="1512786"/>
+            <a:ext cx="1888299" cy="0"/>
+          </a:xfrm>
+          <a:prstGeom prst="line">
+            <a:avLst/>
+          </a:prstGeom>
+          <a:ln w="9525" cap="rnd">
+            <a:solidFill>
+              <a:srgbClr val="FF0000"/>
+            </a:solidFill>
+            <a:prstDash val="sysDash"/>
+            <a:round/>
+          </a:ln>
+        </p:spPr>
+        <p:style>
+          <a:lnRef idx="2">
+            <a:schemeClr val="accent1"/>
+          </a:lnRef>
+          <a:fillRef idx="0">
+            <a:schemeClr val="accent1"/>
+          </a:fillRef>
+          <a:effectRef idx="1">
+            <a:schemeClr val="accent1"/>
+          </a:effectRef>
+          <a:fontRef idx="minor">
+            <a:schemeClr val="tx1"/>
+          </a:fontRef>
+        </p:style>
+      </p:cxnSp>
       <p:sp>
         <p:nvSpPr>
           <p:cNvPr id="19" name="Bogen 18">
@@ -4194,8 +4242,8 @@
         </p:nvSpPr>
         <p:spPr>
           <a:xfrm>
-            <a:off x="886221" y="1509386"/>
-            <a:ext cx="1220493" cy="1220493"/>
+            <a:off x="1501085" y="1398403"/>
+            <a:ext cx="990342" cy="990340"/>
           </a:xfrm>
           <a:prstGeom prst="arc">
             <a:avLst>
@@ -4230,7 +4278,683 @@
           <a:lstStyle/>
           <a:p>
             <a:pPr algn="ctr"/>
-            <a:endParaRPr lang="de-DE" sz="2400"/>
+            <a:endParaRPr lang="de-DE" dirty="0"/>
+          </a:p>
+        </p:txBody>
+      </p:sp>
+      <p:sp>
+        <p:nvSpPr>
+          <p:cNvPr id="14" name="Textfeld 13">
+            <a:extLst>
+              <a:ext uri="{FF2B5EF4-FFF2-40B4-BE49-F238E27FC236}">
+                <a16:creationId xmlns:a16="http://schemas.microsoft.com/office/drawing/2014/main" id="{5567ECA1-FAB2-D0BD-2641-FE47C133A964}"/>
+              </a:ext>
+            </a:extLst>
+          </p:cNvPr>
+          <p:cNvSpPr txBox="1"/>
+          <p:nvPr/>
+        </p:nvSpPr>
+        <p:spPr>
+          <a:xfrm>
+            <a:off x="2418612" y="1261376"/>
+            <a:ext cx="518786" cy="261610"/>
+          </a:xfrm>
+          <a:prstGeom prst="rect">
+            <a:avLst/>
+          </a:prstGeom>
+          <a:noFill/>
+        </p:spPr>
+        <p:txBody>
+          <a:bodyPr wrap="square" rtlCol="0">
+            <a:spAutoFit/>
+          </a:bodyPr>
+          <a:lstStyle/>
+          <a:p>
+            <a:pPr algn="ctr"/>
+            <a:r>
+              <a:rPr lang="de-DE" sz="1100" i="1" dirty="0">
+                <a:solidFill>
+                  <a:srgbClr val="FF0000"/>
+                </a:solidFill>
+                <a:latin typeface="CMU Serif" panose="02000603000000000000" pitchFamily="2" charset="0"/>
+                <a:ea typeface="CMU Serif" panose="02000603000000000000" pitchFamily="2" charset="0"/>
+                <a:cs typeface="CMU Serif" panose="02000603000000000000" pitchFamily="2" charset="0"/>
+              </a:rPr>
+              <a:t>i</a:t>
+            </a:r>
+            <a:r>
+              <a:rPr lang="de-DE" sz="1100" baseline="-25000" dirty="0">
+                <a:solidFill>
+                  <a:srgbClr val="FF0000"/>
+                </a:solidFill>
+                <a:latin typeface="CMU Serif" panose="02000603000000000000" pitchFamily="2" charset="0"/>
+                <a:ea typeface="CMU Serif" panose="02000603000000000000" pitchFamily="2" charset="0"/>
+                <a:cs typeface="CMU Serif" panose="02000603000000000000" pitchFamily="2" charset="0"/>
+              </a:rPr>
+              <a:t>L</a:t>
+            </a:r>
+            <a:r>
+              <a:rPr lang="de-DE" sz="1100" dirty="0">
+                <a:solidFill>
+                  <a:srgbClr val="FF0000"/>
+                </a:solidFill>
+                <a:latin typeface="CMU Serif" panose="02000603000000000000" pitchFamily="2" charset="0"/>
+                <a:ea typeface="CMU Serif" panose="02000603000000000000" pitchFamily="2" charset="0"/>
+                <a:cs typeface="CMU Serif" panose="02000603000000000000" pitchFamily="2" charset="0"/>
+              </a:rPr>
+              <a:t>(</a:t>
+            </a:r>
+            <a:r>
+              <a:rPr lang="de-DE" sz="1100" i="1" dirty="0">
+                <a:solidFill>
+                  <a:srgbClr val="FF0000"/>
+                </a:solidFill>
+                <a:latin typeface="CMU Serif" panose="02000603000000000000" pitchFamily="2" charset="0"/>
+                <a:ea typeface="CMU Serif" panose="02000603000000000000" pitchFamily="2" charset="0"/>
+                <a:cs typeface="CMU Serif" panose="02000603000000000000" pitchFamily="2" charset="0"/>
+              </a:rPr>
+              <a:t>t</a:t>
+            </a:r>
+            <a:r>
+              <a:rPr lang="de-DE" sz="1100" dirty="0">
+                <a:solidFill>
+                  <a:srgbClr val="FF0000"/>
+                </a:solidFill>
+                <a:latin typeface="CMU Serif" panose="02000603000000000000" pitchFamily="2" charset="0"/>
+                <a:ea typeface="CMU Serif" panose="02000603000000000000" pitchFamily="2" charset="0"/>
+                <a:cs typeface="CMU Serif" panose="02000603000000000000" pitchFamily="2" charset="0"/>
+              </a:rPr>
+              <a:t>)</a:t>
+            </a:r>
+            <a:endParaRPr lang="de-DE" sz="1100" baseline="-25000" dirty="0">
+              <a:solidFill>
+                <a:srgbClr val="FF0000"/>
+              </a:solidFill>
+              <a:latin typeface="CMU Serif" panose="02000603000000000000" pitchFamily="2" charset="0"/>
+              <a:ea typeface="CMU Serif" panose="02000603000000000000" pitchFamily="2" charset="0"/>
+              <a:cs typeface="CMU Serif" panose="02000603000000000000" pitchFamily="2" charset="0"/>
+            </a:endParaRPr>
+          </a:p>
+        </p:txBody>
+      </p:sp>
+      <p:sp>
+        <p:nvSpPr>
+          <p:cNvPr id="20" name="Textfeld 19">
+            <a:extLst>
+              <a:ext uri="{FF2B5EF4-FFF2-40B4-BE49-F238E27FC236}">
+                <a16:creationId xmlns:a16="http://schemas.microsoft.com/office/drawing/2014/main" id="{BBBA25C8-E09A-BD18-E42B-2B5C98856BD4}"/>
+              </a:ext>
+            </a:extLst>
+          </p:cNvPr>
+          <p:cNvSpPr txBox="1"/>
+          <p:nvPr/>
+        </p:nvSpPr>
+        <p:spPr>
+          <a:xfrm>
+            <a:off x="2438844" y="1594521"/>
+            <a:ext cx="518786" cy="261610"/>
+          </a:xfrm>
+          <a:prstGeom prst="rect">
+            <a:avLst/>
+          </a:prstGeom>
+          <a:noFill/>
+        </p:spPr>
+        <p:txBody>
+          <a:bodyPr wrap="square" rtlCol="0">
+            <a:spAutoFit/>
+          </a:bodyPr>
+          <a:lstStyle/>
+          <a:p>
+            <a:pPr algn="ctr"/>
+            <a:r>
+              <a:rPr lang="de-DE" sz="1100" i="1" dirty="0">
+                <a:solidFill>
+                  <a:schemeClr val="accent5"/>
+                </a:solidFill>
+                <a:latin typeface="Latin Modern Math" panose="02000503000000000000" pitchFamily="50" charset="0"/>
+                <a:ea typeface="Latin Modern Math" panose="02000503000000000000" pitchFamily="50" charset="0"/>
+                <a:cs typeface="CMU Serif" panose="02000603000000000000" pitchFamily="2" charset="0"/>
+              </a:rPr>
+              <a:t>ω </a:t>
+            </a:r>
+            <a:r>
+              <a:rPr lang="de-DE" sz="400" dirty="0">
+                <a:solidFill>
+                  <a:schemeClr val="accent5"/>
+                </a:solidFill>
+                <a:latin typeface="Latin Modern Math" panose="02000503000000000000" pitchFamily="50" charset="0"/>
+                <a:ea typeface="Latin Modern Math" panose="02000503000000000000" pitchFamily="50" charset="0"/>
+                <a:cs typeface="CMU Serif" panose="02000603000000000000" pitchFamily="2" charset="0"/>
+              </a:rPr>
+              <a:t>∙</a:t>
+            </a:r>
+            <a:r>
+              <a:rPr lang="de-DE" sz="1100" i="1" dirty="0">
+                <a:solidFill>
+                  <a:schemeClr val="accent5"/>
+                </a:solidFill>
+                <a:latin typeface="Latin Modern Math" panose="02000503000000000000" pitchFamily="50" charset="0"/>
+                <a:ea typeface="Latin Modern Math" panose="02000503000000000000" pitchFamily="50" charset="0"/>
+                <a:cs typeface="CMU Serif" panose="02000603000000000000" pitchFamily="2" charset="0"/>
+              </a:rPr>
+              <a:t> </a:t>
+            </a:r>
+            <a:r>
+              <a:rPr lang="de-DE" sz="1100" i="1" dirty="0">
+                <a:solidFill>
+                  <a:schemeClr val="accent5"/>
+                </a:solidFill>
+                <a:latin typeface="CMU Serif" panose="02000603000000000000" pitchFamily="2" charset="0"/>
+                <a:ea typeface="CMU Serif" panose="02000603000000000000" pitchFamily="2" charset="0"/>
+                <a:cs typeface="CMU Serif" panose="02000603000000000000" pitchFamily="2" charset="0"/>
+              </a:rPr>
+              <a:t>t</a:t>
+            </a:r>
+            <a:endParaRPr lang="de-DE" sz="1100" baseline="-25000" dirty="0">
+              <a:solidFill>
+                <a:schemeClr val="accent5"/>
+              </a:solidFill>
+              <a:latin typeface="CMU Serif" panose="02000603000000000000" pitchFamily="2" charset="0"/>
+              <a:ea typeface="CMU Serif" panose="02000603000000000000" pitchFamily="2" charset="0"/>
+              <a:cs typeface="CMU Serif" panose="02000603000000000000" pitchFamily="2" charset="0"/>
+            </a:endParaRPr>
+          </a:p>
+        </p:txBody>
+      </p:sp>
+      <p:sp>
+        <p:nvSpPr>
+          <p:cNvPr id="15" name="Bogen 14">
+            <a:extLst>
+              <a:ext uri="{FF2B5EF4-FFF2-40B4-BE49-F238E27FC236}">
+                <a16:creationId xmlns:a16="http://schemas.microsoft.com/office/drawing/2014/main" id="{3698FBF0-B274-B584-4B72-9461002767CF}"/>
+              </a:ext>
+            </a:extLst>
+          </p:cNvPr>
+          <p:cNvSpPr/>
+          <p:nvPr/>
+        </p:nvSpPr>
+        <p:spPr>
+          <a:xfrm>
+            <a:off x="1672227" y="1569540"/>
+            <a:ext cx="648068" cy="648066"/>
+          </a:xfrm>
+          <a:prstGeom prst="arc">
+            <a:avLst>
+              <a:gd name="adj1" fmla="val 14000263"/>
+              <a:gd name="adj2" fmla="val 19362158"/>
+            </a:avLst>
+          </a:prstGeom>
+          <a:ln cap="rnd">
+            <a:solidFill>
+              <a:schemeClr val="accent6">
+                <a:lumMod val="75000"/>
+              </a:schemeClr>
+            </a:solidFill>
+            <a:round/>
+            <a:headEnd type="triangle"/>
+          </a:ln>
+        </p:spPr>
+        <p:style>
+          <a:lnRef idx="2">
+            <a:schemeClr val="accent1"/>
+          </a:lnRef>
+          <a:fillRef idx="0">
+            <a:schemeClr val="accent1"/>
+          </a:fillRef>
+          <a:effectRef idx="1">
+            <a:schemeClr val="accent1"/>
+          </a:effectRef>
+          <a:fontRef idx="minor">
+            <a:schemeClr val="tx1"/>
+          </a:fontRef>
+        </p:style>
+        <p:txBody>
+          <a:bodyPr rtlCol="0" anchor="ctr"/>
+          <a:lstStyle/>
+          <a:p>
+            <a:pPr algn="ctr"/>
+            <a:endParaRPr lang="de-DE" dirty="0">
+              <a:solidFill>
+                <a:schemeClr val="accent6">
+                  <a:lumMod val="75000"/>
+                </a:schemeClr>
+              </a:solidFill>
+            </a:endParaRPr>
+          </a:p>
+        </p:txBody>
+      </p:sp>
+      <p:cxnSp>
+        <p:nvCxnSpPr>
+          <p:cNvPr id="10" name="Gerade Verbindung mit Pfeil 9">
+            <a:extLst>
+              <a:ext uri="{FF2B5EF4-FFF2-40B4-BE49-F238E27FC236}">
+                <a16:creationId xmlns:a16="http://schemas.microsoft.com/office/drawing/2014/main" id="{78FA873B-332F-2A4F-5031-351A55B64ECE}"/>
+              </a:ext>
+            </a:extLst>
+          </p:cNvPr>
+          <p:cNvCxnSpPr>
+            <a:cxnSpLocks/>
+          </p:cNvCxnSpPr>
+          <p:nvPr/>
+        </p:nvCxnSpPr>
+        <p:spPr>
+          <a:xfrm flipV="1">
+            <a:off x="1996256" y="1512786"/>
+            <a:ext cx="501568" cy="380793"/>
+          </a:xfrm>
+          <a:prstGeom prst="straightConnector1">
+            <a:avLst/>
+          </a:prstGeom>
+          <a:ln w="19050" cap="rnd">
+            <a:solidFill>
+              <a:srgbClr val="FF0000"/>
+            </a:solidFill>
+            <a:round/>
+            <a:tailEnd type="triangle" w="med" len="med"/>
+          </a:ln>
+        </p:spPr>
+        <p:style>
+          <a:lnRef idx="2">
+            <a:schemeClr val="accent1"/>
+          </a:lnRef>
+          <a:fillRef idx="0">
+            <a:schemeClr val="accent1"/>
+          </a:fillRef>
+          <a:effectRef idx="1">
+            <a:schemeClr val="accent1"/>
+          </a:effectRef>
+          <a:fontRef idx="minor">
+            <a:schemeClr val="tx1"/>
+          </a:fontRef>
+        </p:style>
+      </p:cxnSp>
+      <p:cxnSp>
+        <p:nvCxnSpPr>
+          <p:cNvPr id="6" name="Gerade Verbindung mit Pfeil 5">
+            <a:extLst>
+              <a:ext uri="{FF2B5EF4-FFF2-40B4-BE49-F238E27FC236}">
+                <a16:creationId xmlns:a16="http://schemas.microsoft.com/office/drawing/2014/main" id="{8C88241A-EB7B-07A8-F278-E5DA0AAFA51F}"/>
+              </a:ext>
+            </a:extLst>
+          </p:cNvPr>
+          <p:cNvCxnSpPr>
+            <a:cxnSpLocks/>
+          </p:cNvCxnSpPr>
+          <p:nvPr/>
+        </p:nvCxnSpPr>
+        <p:spPr>
+          <a:xfrm>
+            <a:off x="1260744" y="1893579"/>
+            <a:ext cx="1496860" cy="0"/>
+          </a:xfrm>
+          <a:prstGeom prst="straightConnector1">
+            <a:avLst/>
+          </a:prstGeom>
+          <a:ln cap="rnd">
+            <a:solidFill>
+              <a:schemeClr val="tx1"/>
+            </a:solidFill>
+            <a:round/>
+            <a:tailEnd type="triangle" w="med" len="med"/>
+          </a:ln>
+        </p:spPr>
+        <p:style>
+          <a:lnRef idx="2">
+            <a:schemeClr val="accent1"/>
+          </a:lnRef>
+          <a:fillRef idx="0">
+            <a:schemeClr val="accent1"/>
+          </a:fillRef>
+          <a:effectRef idx="1">
+            <a:schemeClr val="accent1"/>
+          </a:effectRef>
+          <a:fontRef idx="minor">
+            <a:schemeClr val="tx1"/>
+          </a:fontRef>
+        </p:style>
+      </p:cxnSp>
+      <p:cxnSp>
+        <p:nvCxnSpPr>
+          <p:cNvPr id="18" name="Gerader Verbinder 17">
+            <a:extLst>
+              <a:ext uri="{FF2B5EF4-FFF2-40B4-BE49-F238E27FC236}">
+                <a16:creationId xmlns:a16="http://schemas.microsoft.com/office/drawing/2014/main" id="{FB7147EA-B332-CD3D-C129-CE2FDD9F4BF9}"/>
+              </a:ext>
+            </a:extLst>
+          </p:cNvPr>
+          <p:cNvCxnSpPr/>
+          <p:nvPr/>
+        </p:nvCxnSpPr>
+        <p:spPr>
+          <a:xfrm flipH="1">
+            <a:off x="603128" y="1245153"/>
+            <a:ext cx="897956" cy="0"/>
+          </a:xfrm>
+          <a:prstGeom prst="line">
+            <a:avLst/>
+          </a:prstGeom>
+          <a:ln w="9525" cap="rnd">
+            <a:solidFill>
+              <a:srgbClr val="086FBD"/>
+            </a:solidFill>
+            <a:prstDash val="sysDash"/>
+            <a:round/>
+          </a:ln>
+        </p:spPr>
+        <p:style>
+          <a:lnRef idx="2">
+            <a:schemeClr val="accent1"/>
+          </a:lnRef>
+          <a:fillRef idx="0">
+            <a:schemeClr val="accent1"/>
+          </a:fillRef>
+          <a:effectRef idx="1">
+            <a:schemeClr val="accent1"/>
+          </a:effectRef>
+          <a:fontRef idx="minor">
+            <a:schemeClr val="tx1"/>
+          </a:fontRef>
+        </p:style>
+      </p:cxnSp>
+      <p:sp>
+        <p:nvSpPr>
+          <p:cNvPr id="13" name="Textfeld 12">
+            <a:extLst>
+              <a:ext uri="{FF2B5EF4-FFF2-40B4-BE49-F238E27FC236}">
+                <a16:creationId xmlns:a16="http://schemas.microsoft.com/office/drawing/2014/main" id="{00444581-34A9-6C9F-1461-BEA3B7AA5AB4}"/>
+              </a:ext>
+            </a:extLst>
+          </p:cNvPr>
+          <p:cNvSpPr txBox="1"/>
+          <p:nvPr/>
+        </p:nvSpPr>
+        <p:spPr>
+          <a:xfrm>
+            <a:off x="1045593" y="1232460"/>
+            <a:ext cx="567731" cy="261610"/>
+          </a:xfrm>
+          <a:prstGeom prst="rect">
+            <a:avLst/>
+          </a:prstGeom>
+          <a:noFill/>
+        </p:spPr>
+        <p:txBody>
+          <a:bodyPr wrap="square" rtlCol="0">
+            <a:spAutoFit/>
+          </a:bodyPr>
+          <a:lstStyle/>
+          <a:p>
+            <a:pPr algn="ctr"/>
+            <a:r>
+              <a:rPr lang="de-DE" sz="1100" i="1" dirty="0">
+                <a:solidFill>
+                  <a:srgbClr val="086FBD"/>
+                </a:solidFill>
+                <a:latin typeface="CMU Serif" panose="02000603000000000000" pitchFamily="2" charset="0"/>
+                <a:ea typeface="CMU Serif" panose="02000603000000000000" pitchFamily="2" charset="0"/>
+                <a:cs typeface="CMU Serif" panose="02000603000000000000" pitchFamily="2" charset="0"/>
+              </a:rPr>
+              <a:t>u</a:t>
+            </a:r>
+            <a:r>
+              <a:rPr lang="de-DE" sz="1100" baseline="-25000" dirty="0">
+                <a:solidFill>
+                  <a:srgbClr val="086FBD"/>
+                </a:solidFill>
+                <a:latin typeface="CMU Serif" panose="02000603000000000000" pitchFamily="2" charset="0"/>
+                <a:ea typeface="CMU Serif" panose="02000603000000000000" pitchFamily="2" charset="0"/>
+                <a:cs typeface="CMU Serif" panose="02000603000000000000" pitchFamily="2" charset="0"/>
+              </a:rPr>
+              <a:t>L</a:t>
+            </a:r>
+            <a:r>
+              <a:rPr lang="de-DE" sz="1100" dirty="0">
+                <a:solidFill>
+                  <a:srgbClr val="086FBD"/>
+                </a:solidFill>
+                <a:latin typeface="CMU Serif" panose="02000603000000000000" pitchFamily="2" charset="0"/>
+                <a:ea typeface="CMU Serif" panose="02000603000000000000" pitchFamily="2" charset="0"/>
+                <a:cs typeface="CMU Serif" panose="02000603000000000000" pitchFamily="2" charset="0"/>
+              </a:rPr>
+              <a:t>(</a:t>
+            </a:r>
+            <a:r>
+              <a:rPr lang="de-DE" sz="1100" i="1" dirty="0">
+                <a:solidFill>
+                  <a:srgbClr val="086FBD"/>
+                </a:solidFill>
+                <a:latin typeface="CMU Serif" panose="02000603000000000000" pitchFamily="2" charset="0"/>
+                <a:ea typeface="CMU Serif" panose="02000603000000000000" pitchFamily="2" charset="0"/>
+                <a:cs typeface="CMU Serif" panose="02000603000000000000" pitchFamily="2" charset="0"/>
+              </a:rPr>
+              <a:t>t</a:t>
+            </a:r>
+            <a:r>
+              <a:rPr lang="de-DE" sz="1100" dirty="0">
+                <a:solidFill>
+                  <a:srgbClr val="086FBD"/>
+                </a:solidFill>
+                <a:latin typeface="CMU Serif" panose="02000603000000000000" pitchFamily="2" charset="0"/>
+                <a:ea typeface="CMU Serif" panose="02000603000000000000" pitchFamily="2" charset="0"/>
+                <a:cs typeface="CMU Serif" panose="02000603000000000000" pitchFamily="2" charset="0"/>
+              </a:rPr>
+              <a:t>)</a:t>
+            </a:r>
+            <a:endParaRPr lang="de-DE" sz="1100" baseline="-25000" dirty="0">
+              <a:solidFill>
+                <a:srgbClr val="086FBD"/>
+              </a:solidFill>
+              <a:latin typeface="CMU Serif" panose="02000603000000000000" pitchFamily="2" charset="0"/>
+              <a:ea typeface="CMU Serif" panose="02000603000000000000" pitchFamily="2" charset="0"/>
+              <a:cs typeface="CMU Serif" panose="02000603000000000000" pitchFamily="2" charset="0"/>
+            </a:endParaRPr>
+          </a:p>
+        </p:txBody>
+      </p:sp>
+      <p:sp>
+        <p:nvSpPr>
+          <p:cNvPr id="16" name="Textfeld 15">
+            <a:extLst>
+              <a:ext uri="{FF2B5EF4-FFF2-40B4-BE49-F238E27FC236}">
+                <a16:creationId xmlns:a16="http://schemas.microsoft.com/office/drawing/2014/main" id="{F6D859C4-57B0-3229-5BC1-6CC0864E22E7}"/>
+              </a:ext>
+            </a:extLst>
+          </p:cNvPr>
+          <p:cNvSpPr txBox="1"/>
+          <p:nvPr/>
+        </p:nvSpPr>
+        <p:spPr>
+          <a:xfrm>
+            <a:off x="1866757" y="1294736"/>
+            <a:ext cx="518786" cy="261610"/>
+          </a:xfrm>
+          <a:prstGeom prst="rect">
+            <a:avLst/>
+          </a:prstGeom>
+          <a:noFill/>
+        </p:spPr>
+        <p:txBody>
+          <a:bodyPr wrap="square" rtlCol="0">
+            <a:spAutoFit/>
+          </a:bodyPr>
+          <a:lstStyle/>
+          <a:p>
+            <a:pPr algn="ctr"/>
+            <a:r>
+              <a:rPr lang="de-DE" sz="1100" i="1" dirty="0">
+                <a:solidFill>
+                  <a:schemeClr val="accent6">
+                    <a:lumMod val="75000"/>
+                  </a:schemeClr>
+                </a:solidFill>
+                <a:latin typeface="Latin Modern Math" panose="02000503000000000000" pitchFamily="50" charset="0"/>
+                <a:ea typeface="Latin Modern Math" panose="02000503000000000000" pitchFamily="50" charset="0"/>
+                <a:cs typeface="CMU Serif" panose="02000603000000000000" pitchFamily="2" charset="0"/>
+              </a:rPr>
+              <a:t>φ</a:t>
+            </a:r>
+            <a:r>
+              <a:rPr lang="de-DE" sz="1100" baseline="-25000" dirty="0">
+                <a:solidFill>
+                  <a:schemeClr val="accent6">
+                    <a:lumMod val="75000"/>
+                  </a:schemeClr>
+                </a:solidFill>
+                <a:latin typeface="CMU Serif" panose="02000603000000000000" pitchFamily="2" charset="0"/>
+                <a:ea typeface="CMU Serif" panose="02000603000000000000" pitchFamily="2" charset="0"/>
+                <a:cs typeface="CMU Serif" panose="02000603000000000000" pitchFamily="2" charset="0"/>
+              </a:rPr>
+              <a:t>L</a:t>
+            </a:r>
+          </a:p>
+        </p:txBody>
+      </p:sp>
+      <p:sp>
+        <p:nvSpPr>
+          <p:cNvPr id="27" name="Rechteck 26">
+            <a:extLst>
+              <a:ext uri="{FF2B5EF4-FFF2-40B4-BE49-F238E27FC236}">
+                <a16:creationId xmlns:a16="http://schemas.microsoft.com/office/drawing/2014/main" id="{FE75ACD0-3173-B128-E10A-64345A897445}"/>
+              </a:ext>
+            </a:extLst>
+          </p:cNvPr>
+          <p:cNvSpPr/>
+          <p:nvPr/>
+        </p:nvSpPr>
+        <p:spPr>
+          <a:xfrm>
+            <a:off x="1963188" y="1278575"/>
+            <a:ext cx="66145" cy="269222"/>
+          </a:xfrm>
+          <a:prstGeom prst="rect">
+            <a:avLst/>
+          </a:prstGeom>
+          <a:solidFill>
+            <a:schemeClr val="bg1"/>
+          </a:solidFill>
+          <a:ln>
+            <a:noFill/>
+          </a:ln>
+        </p:spPr>
+        <p:style>
+          <a:lnRef idx="2">
+            <a:schemeClr val="accent1">
+              <a:shade val="15000"/>
+            </a:schemeClr>
+          </a:lnRef>
+          <a:fillRef idx="1">
+            <a:schemeClr val="accent1"/>
+          </a:fillRef>
+          <a:effectRef idx="0">
+            <a:schemeClr val="accent1"/>
+          </a:effectRef>
+          <a:fontRef idx="minor">
+            <a:schemeClr val="lt1"/>
+          </a:fontRef>
+        </p:style>
+        <p:txBody>
+          <a:bodyPr rtlCol="0" anchor="ctr"/>
+          <a:lstStyle/>
+          <a:p>
+            <a:pPr algn="ctr"/>
+            <a:endParaRPr lang="de-DE" dirty="0"/>
+          </a:p>
+        </p:txBody>
+      </p:sp>
+      <p:cxnSp>
+        <p:nvCxnSpPr>
+          <p:cNvPr id="5" name="Gerade Verbindung mit Pfeil 4">
+            <a:extLst>
+              <a:ext uri="{FF2B5EF4-FFF2-40B4-BE49-F238E27FC236}">
+                <a16:creationId xmlns:a16="http://schemas.microsoft.com/office/drawing/2014/main" id="{F4CAB231-1972-25BB-D11C-0014B56F43F2}"/>
+              </a:ext>
+            </a:extLst>
+          </p:cNvPr>
+          <p:cNvCxnSpPr>
+            <a:cxnSpLocks/>
+          </p:cNvCxnSpPr>
+          <p:nvPr/>
+        </p:nvCxnSpPr>
+        <p:spPr>
+          <a:xfrm flipV="1">
+            <a:off x="1996257" y="1095436"/>
+            <a:ext cx="0" cy="1572016"/>
+          </a:xfrm>
+          <a:prstGeom prst="straightConnector1">
+            <a:avLst/>
+          </a:prstGeom>
+          <a:ln cap="rnd">
+            <a:solidFill>
+              <a:schemeClr val="tx1"/>
+            </a:solidFill>
+            <a:round/>
+            <a:tailEnd type="triangle" w="med" len="med"/>
+          </a:ln>
+        </p:spPr>
+        <p:style>
+          <a:lnRef idx="2">
+            <a:schemeClr val="accent1"/>
+          </a:lnRef>
+          <a:fillRef idx="0">
+            <a:schemeClr val="accent1"/>
+          </a:fillRef>
+          <a:effectRef idx="1">
+            <a:schemeClr val="accent1"/>
+          </a:effectRef>
+          <a:fontRef idx="minor">
+            <a:schemeClr val="tx1"/>
+          </a:fontRef>
+        </p:style>
+      </p:cxnSp>
+      <p:sp>
+        <p:nvSpPr>
+          <p:cNvPr id="28" name="Rechteck 27">
+            <a:extLst>
+              <a:ext uri="{FF2B5EF4-FFF2-40B4-BE49-F238E27FC236}">
+                <a16:creationId xmlns:a16="http://schemas.microsoft.com/office/drawing/2014/main" id="{19148B0E-00B8-E808-DFD2-B564AC4944E1}"/>
+              </a:ext>
+            </a:extLst>
+          </p:cNvPr>
+          <p:cNvSpPr/>
+          <p:nvPr/>
+        </p:nvSpPr>
+        <p:spPr>
+          <a:xfrm rot="19343824">
+            <a:off x="1674332" y="1378175"/>
+            <a:ext cx="66145" cy="269222"/>
+          </a:xfrm>
+          <a:prstGeom prst="rect">
+            <a:avLst/>
+          </a:prstGeom>
+          <a:solidFill>
+            <a:schemeClr val="bg1"/>
+          </a:solidFill>
+          <a:ln>
+            <a:noFill/>
+          </a:ln>
+        </p:spPr>
+        <p:style>
+          <a:lnRef idx="2">
+            <a:schemeClr val="accent1">
+              <a:shade val="15000"/>
+            </a:schemeClr>
+          </a:lnRef>
+          <a:fillRef idx="1">
+            <a:schemeClr val="accent1"/>
+          </a:fillRef>
+          <a:effectRef idx="0">
+            <a:schemeClr val="accent1"/>
+          </a:effectRef>
+          <a:fontRef idx="minor">
+            <a:schemeClr val="lt1"/>
+          </a:fontRef>
+        </p:style>
+        <p:txBody>
+          <a:bodyPr rtlCol="0" anchor="ctr"/>
+          <a:lstStyle/>
+          <a:p>
+            <a:pPr algn="ctr"/>
+            <a:endParaRPr lang="de-DE" dirty="0"/>
           </a:p>
         </p:txBody>
       </p:sp>
@@ -4249,9 +4973,9 @@
           <p:nvPr/>
         </p:nvCxnSpPr>
         <p:spPr>
-          <a:xfrm flipV="1">
-            <a:off x="1496469" y="1512518"/>
-            <a:ext cx="799680" cy="607121"/>
+          <a:xfrm rot="-5400000" flipV="1">
+            <a:off x="1422557" y="1319870"/>
+            <a:ext cx="652230" cy="495176"/>
           </a:xfrm>
           <a:prstGeom prst="straightConnector1">
             <a:avLst/>
@@ -4262,6 +4986,3016 @@
             </a:solidFill>
             <a:round/>
             <a:tailEnd type="triangle" w="med" len="med"/>
+          </a:ln>
+        </p:spPr>
+        <p:style>
+          <a:lnRef idx="2">
+            <a:schemeClr val="accent1"/>
+          </a:lnRef>
+          <a:fillRef idx="0">
+            <a:schemeClr val="accent1"/>
+          </a:fillRef>
+          <a:effectRef idx="1">
+            <a:schemeClr val="accent1"/>
+          </a:effectRef>
+          <a:fontRef idx="minor">
+            <a:schemeClr val="tx1"/>
+          </a:fontRef>
+        </p:style>
+      </p:cxnSp>
+      <p:cxnSp>
+        <p:nvCxnSpPr>
+          <p:cNvPr id="29" name="Gerader Verbinder 28">
+            <a:extLst>
+              <a:ext uri="{FF2B5EF4-FFF2-40B4-BE49-F238E27FC236}">
+                <a16:creationId xmlns:a16="http://schemas.microsoft.com/office/drawing/2014/main" id="{A26ED6E1-28F5-D389-6136-F55A0BD3591E}"/>
+              </a:ext>
+            </a:extLst>
+          </p:cNvPr>
+          <p:cNvCxnSpPr>
+            <a:cxnSpLocks/>
+          </p:cNvCxnSpPr>
+          <p:nvPr/>
+        </p:nvCxnSpPr>
+        <p:spPr>
+          <a:xfrm flipH="1">
+            <a:off x="603127" y="1893573"/>
+            <a:ext cx="657617" cy="0"/>
+          </a:xfrm>
+          <a:prstGeom prst="line">
+            <a:avLst/>
+          </a:prstGeom>
+          <a:ln w="9525" cap="rnd">
+            <a:solidFill>
+              <a:schemeClr val="tx1"/>
+            </a:solidFill>
+            <a:prstDash val="sysDash"/>
+            <a:round/>
+          </a:ln>
+        </p:spPr>
+        <p:style>
+          <a:lnRef idx="2">
+            <a:schemeClr val="accent1"/>
+          </a:lnRef>
+          <a:fillRef idx="0">
+            <a:schemeClr val="accent1"/>
+          </a:fillRef>
+          <a:effectRef idx="1">
+            <a:schemeClr val="accent1"/>
+          </a:effectRef>
+          <a:fontRef idx="minor">
+            <a:schemeClr val="tx1"/>
+          </a:fontRef>
+        </p:style>
+      </p:cxnSp>
+    </p:spTree>
+    <p:extLst>
+      <p:ext uri="{BB962C8B-B14F-4D97-AF65-F5344CB8AC3E}">
+        <p14:creationId xmlns:p14="http://schemas.microsoft.com/office/powerpoint/2010/main" val="3996414772"/>
+      </p:ext>
+    </p:extLst>
+  </p:cSld>
+  <p:clrMapOvr>
+    <a:masterClrMapping/>
+  </p:clrMapOvr>
+</p:sld>
+</file>
+
+<file path=ppt/slides/slide11.xml><?xml version="1.0" encoding="utf-8"?>
+<p:sld xmlns:a="http://schemas.openxmlformats.org/drawingml/2006/main" xmlns:r="http://schemas.openxmlformats.org/officeDocument/2006/relationships" xmlns:p="http://schemas.openxmlformats.org/presentationml/2006/main">
+  <p:cSld>
+    <p:spTree>
+      <p:nvGrpSpPr>
+        <p:cNvPr id="1" name="">
+          <a:extLst>
+            <a:ext uri="{FF2B5EF4-FFF2-40B4-BE49-F238E27FC236}">
+              <a16:creationId xmlns:a16="http://schemas.microsoft.com/office/drawing/2014/main" id="{849DAD25-EA92-8CAF-46D6-76EE2B32B5D7}"/>
+            </a:ext>
+          </a:extLst>
+        </p:cNvPr>
+        <p:cNvGrpSpPr/>
+        <p:nvPr/>
+      </p:nvGrpSpPr>
+      <p:grpSpPr>
+        <a:xfrm>
+          <a:off x="0" y="0"/>
+          <a:ext cx="0" cy="0"/>
+          <a:chOff x="0" y="0"/>
+          <a:chExt cx="0" cy="0"/>
+        </a:xfrm>
+      </p:grpSpPr>
+      <p:sp>
+        <p:nvSpPr>
+          <p:cNvPr id="20" name="Textfeld 19">
+            <a:extLst>
+              <a:ext uri="{FF2B5EF4-FFF2-40B4-BE49-F238E27FC236}">
+                <a16:creationId xmlns:a16="http://schemas.microsoft.com/office/drawing/2014/main" id="{3989049B-8F26-844B-5C02-C833F9C0E02B}"/>
+              </a:ext>
+            </a:extLst>
+          </p:cNvPr>
+          <p:cNvSpPr txBox="1"/>
+          <p:nvPr/>
+        </p:nvSpPr>
+        <p:spPr>
+          <a:xfrm>
+            <a:off x="221101" y="1972688"/>
+            <a:ext cx="518786" cy="261610"/>
+          </a:xfrm>
+          <a:prstGeom prst="rect">
+            <a:avLst/>
+          </a:prstGeom>
+          <a:noFill/>
+        </p:spPr>
+        <p:txBody>
+          <a:bodyPr wrap="square" rtlCol="0">
+            <a:spAutoFit/>
+          </a:bodyPr>
+          <a:lstStyle/>
+          <a:p>
+            <a:pPr algn="ctr"/>
+            <a:r>
+              <a:rPr lang="de-DE" sz="1100" i="1" dirty="0">
+                <a:solidFill>
+                  <a:schemeClr val="accent5"/>
+                </a:solidFill>
+                <a:latin typeface="Latin Modern Math" panose="02000503000000000000" pitchFamily="50" charset="0"/>
+                <a:ea typeface="Latin Modern Math" panose="02000503000000000000" pitchFamily="50" charset="0"/>
+                <a:cs typeface="CMU Serif" panose="02000603000000000000" pitchFamily="2" charset="0"/>
+              </a:rPr>
+              <a:t>ω </a:t>
+            </a:r>
+            <a:r>
+              <a:rPr lang="de-DE" sz="400" dirty="0">
+                <a:solidFill>
+                  <a:schemeClr val="accent5"/>
+                </a:solidFill>
+                <a:latin typeface="Latin Modern Math" panose="02000503000000000000" pitchFamily="50" charset="0"/>
+                <a:ea typeface="Latin Modern Math" panose="02000503000000000000" pitchFamily="50" charset="0"/>
+                <a:cs typeface="CMU Serif" panose="02000603000000000000" pitchFamily="2" charset="0"/>
+              </a:rPr>
+              <a:t>∙</a:t>
+            </a:r>
+            <a:r>
+              <a:rPr lang="de-DE" sz="1100" i="1" dirty="0">
+                <a:solidFill>
+                  <a:schemeClr val="accent5"/>
+                </a:solidFill>
+                <a:latin typeface="Latin Modern Math" panose="02000503000000000000" pitchFamily="50" charset="0"/>
+                <a:ea typeface="Latin Modern Math" panose="02000503000000000000" pitchFamily="50" charset="0"/>
+                <a:cs typeface="CMU Serif" panose="02000603000000000000" pitchFamily="2" charset="0"/>
+              </a:rPr>
+              <a:t> </a:t>
+            </a:r>
+            <a:r>
+              <a:rPr lang="de-DE" sz="1100" i="1" dirty="0">
+                <a:solidFill>
+                  <a:schemeClr val="accent5"/>
+                </a:solidFill>
+                <a:latin typeface="CMU Serif" panose="02000603000000000000" pitchFamily="2" charset="0"/>
+                <a:ea typeface="CMU Serif" panose="02000603000000000000" pitchFamily="2" charset="0"/>
+                <a:cs typeface="CMU Serif" panose="02000603000000000000" pitchFamily="2" charset="0"/>
+              </a:rPr>
+              <a:t>t</a:t>
+            </a:r>
+            <a:endParaRPr lang="de-DE" sz="1100" baseline="-25000" dirty="0">
+              <a:solidFill>
+                <a:schemeClr val="accent5"/>
+              </a:solidFill>
+              <a:latin typeface="CMU Serif" panose="02000603000000000000" pitchFamily="2" charset="0"/>
+              <a:ea typeface="CMU Serif" panose="02000603000000000000" pitchFamily="2" charset="0"/>
+              <a:cs typeface="CMU Serif" panose="02000603000000000000" pitchFamily="2" charset="0"/>
+            </a:endParaRPr>
+          </a:p>
+        </p:txBody>
+      </p:sp>
+      <p:cxnSp>
+        <p:nvCxnSpPr>
+          <p:cNvPr id="18" name="Gerader Verbinder 17">
+            <a:extLst>
+              <a:ext uri="{FF2B5EF4-FFF2-40B4-BE49-F238E27FC236}">
+                <a16:creationId xmlns:a16="http://schemas.microsoft.com/office/drawing/2014/main" id="{9AE2F42A-6EAA-2ADA-A703-FC964E108801}"/>
+              </a:ext>
+            </a:extLst>
+          </p:cNvPr>
+          <p:cNvCxnSpPr>
+            <a:cxnSpLocks/>
+          </p:cNvCxnSpPr>
+          <p:nvPr/>
+        </p:nvCxnSpPr>
+        <p:spPr>
+          <a:xfrm flipH="1">
+            <a:off x="466725" y="1245153"/>
+            <a:ext cx="2904759" cy="0"/>
+          </a:xfrm>
+          <a:prstGeom prst="line">
+            <a:avLst/>
+          </a:prstGeom>
+          <a:ln w="9525" cap="rnd">
+            <a:solidFill>
+              <a:srgbClr val="086FBD"/>
+            </a:solidFill>
+            <a:prstDash val="sysDash"/>
+            <a:round/>
+          </a:ln>
+        </p:spPr>
+        <p:style>
+          <a:lnRef idx="2">
+            <a:schemeClr val="accent1"/>
+          </a:lnRef>
+          <a:fillRef idx="0">
+            <a:schemeClr val="accent1"/>
+          </a:fillRef>
+          <a:effectRef idx="1">
+            <a:schemeClr val="accent1"/>
+          </a:effectRef>
+          <a:fontRef idx="minor">
+            <a:schemeClr val="tx1"/>
+          </a:fontRef>
+        </p:style>
+      </p:cxnSp>
+      <p:sp>
+        <p:nvSpPr>
+          <p:cNvPr id="16" name="Textfeld 15">
+            <a:extLst>
+              <a:ext uri="{FF2B5EF4-FFF2-40B4-BE49-F238E27FC236}">
+                <a16:creationId xmlns:a16="http://schemas.microsoft.com/office/drawing/2014/main" id="{6CC9CFAE-9D32-C8D9-BB6A-40C1CC9DF7C2}"/>
+              </a:ext>
+            </a:extLst>
+          </p:cNvPr>
+          <p:cNvSpPr txBox="1"/>
+          <p:nvPr/>
+        </p:nvSpPr>
+        <p:spPr>
+          <a:xfrm>
+            <a:off x="1280341" y="2571464"/>
+            <a:ext cx="518786" cy="261610"/>
+          </a:xfrm>
+          <a:prstGeom prst="rect">
+            <a:avLst/>
+          </a:prstGeom>
+          <a:noFill/>
+        </p:spPr>
+        <p:txBody>
+          <a:bodyPr wrap="square" rtlCol="0">
+            <a:spAutoFit/>
+          </a:bodyPr>
+          <a:lstStyle/>
+          <a:p>
+            <a:pPr algn="ctr"/>
+            <a:r>
+              <a:rPr lang="de-DE" sz="1100" i="1" dirty="0">
+                <a:solidFill>
+                  <a:schemeClr val="accent6">
+                    <a:lumMod val="75000"/>
+                  </a:schemeClr>
+                </a:solidFill>
+                <a:latin typeface="Latin Modern Math" panose="02000503000000000000" pitchFamily="50" charset="0"/>
+                <a:ea typeface="Latin Modern Math" panose="02000503000000000000" pitchFamily="50" charset="0"/>
+                <a:cs typeface="CMU Serif" panose="02000603000000000000" pitchFamily="2" charset="0"/>
+              </a:rPr>
+              <a:t>φ</a:t>
+            </a:r>
+            <a:r>
+              <a:rPr lang="de-DE" sz="1100" baseline="-25000" dirty="0">
+                <a:solidFill>
+                  <a:schemeClr val="accent6">
+                    <a:lumMod val="75000"/>
+                  </a:schemeClr>
+                </a:solidFill>
+                <a:latin typeface="CMU Serif" panose="02000603000000000000" pitchFamily="2" charset="0"/>
+                <a:ea typeface="CMU Serif" panose="02000603000000000000" pitchFamily="2" charset="0"/>
+                <a:cs typeface="CMU Serif" panose="02000603000000000000" pitchFamily="2" charset="0"/>
+              </a:rPr>
+              <a:t>L</a:t>
+            </a:r>
+          </a:p>
+        </p:txBody>
+      </p:sp>
+      <p:sp>
+        <p:nvSpPr>
+          <p:cNvPr id="11" name="Freihandform: Form 10">
+            <a:extLst>
+              <a:ext uri="{FF2B5EF4-FFF2-40B4-BE49-F238E27FC236}">
+                <a16:creationId xmlns:a16="http://schemas.microsoft.com/office/drawing/2014/main" id="{1B6FB268-0E1D-77EA-283C-D631D44C005B}"/>
+              </a:ext>
+            </a:extLst>
+          </p:cNvPr>
+          <p:cNvSpPr/>
+          <p:nvPr/>
+        </p:nvSpPr>
+        <p:spPr>
+          <a:xfrm>
+            <a:off x="-47899" y="1068714"/>
+            <a:ext cx="704850" cy="824134"/>
+          </a:xfrm>
+          <a:custGeom>
+            <a:avLst/>
+            <a:gdLst>
+              <a:gd name="csX0" fmla="*/ 0 w 708660"/>
+              <a:gd name="csY0" fmla="*/ 645160 h 647700"/>
+              <a:gd name="csX1" fmla="*/ 337820 w 708660"/>
+              <a:gd name="csY1" fmla="*/ 0 h 647700"/>
+              <a:gd name="csX2" fmla="*/ 708660 w 708660"/>
+              <a:gd name="csY2" fmla="*/ 647700 h 647700"/>
+              <a:gd name="csX0" fmla="*/ 0 w 708660"/>
+              <a:gd name="csY0" fmla="*/ 645160 h 647700"/>
+              <a:gd name="csX1" fmla="*/ 337820 w 708660"/>
+              <a:gd name="csY1" fmla="*/ 0 h 647700"/>
+              <a:gd name="csX2" fmla="*/ 708660 w 708660"/>
+              <a:gd name="csY2" fmla="*/ 647700 h 647700"/>
+              <a:gd name="csX0" fmla="*/ 0 w 708660"/>
+              <a:gd name="csY0" fmla="*/ 645160 h 647700"/>
+              <a:gd name="csX1" fmla="*/ 337820 w 708660"/>
+              <a:gd name="csY1" fmla="*/ 0 h 647700"/>
+              <a:gd name="csX2" fmla="*/ 708660 w 708660"/>
+              <a:gd name="csY2" fmla="*/ 647700 h 647700"/>
+              <a:gd name="csX0" fmla="*/ 0 w 708660"/>
+              <a:gd name="csY0" fmla="*/ 645160 h 647700"/>
+              <a:gd name="csX1" fmla="*/ 337820 w 708660"/>
+              <a:gd name="csY1" fmla="*/ 0 h 647700"/>
+              <a:gd name="csX2" fmla="*/ 708660 w 708660"/>
+              <a:gd name="csY2" fmla="*/ 647700 h 647700"/>
+              <a:gd name="csX0" fmla="*/ 0 w 708660"/>
+              <a:gd name="csY0" fmla="*/ 647058 h 649598"/>
+              <a:gd name="csX1" fmla="*/ 356870 w 708660"/>
+              <a:gd name="csY1" fmla="*/ 0 h 649598"/>
+              <a:gd name="csX2" fmla="*/ 708660 w 708660"/>
+              <a:gd name="csY2" fmla="*/ 649598 h 649598"/>
+              <a:gd name="csX0" fmla="*/ 0 w 704850"/>
+              <a:gd name="csY0" fmla="*/ 647058 h 647058"/>
+              <a:gd name="csX1" fmla="*/ 356870 w 704850"/>
+              <a:gd name="csY1" fmla="*/ 0 h 647058"/>
+              <a:gd name="csX2" fmla="*/ 704850 w 704850"/>
+              <a:gd name="csY2" fmla="*/ 645803 h 647058"/>
+              <a:gd name="csX0" fmla="*/ 0 w 704850"/>
+              <a:gd name="csY0" fmla="*/ 647078 h 647078"/>
+              <a:gd name="csX1" fmla="*/ 356870 w 704850"/>
+              <a:gd name="csY1" fmla="*/ 20 h 647078"/>
+              <a:gd name="csX2" fmla="*/ 704850 w 704850"/>
+              <a:gd name="csY2" fmla="*/ 645823 h 647078"/>
+              <a:gd name="csX0" fmla="*/ 0 w 704850"/>
+              <a:gd name="csY0" fmla="*/ 647078 h 647078"/>
+              <a:gd name="csX1" fmla="*/ 341630 w 704850"/>
+              <a:gd name="csY1" fmla="*/ 20 h 647078"/>
+              <a:gd name="csX2" fmla="*/ 704850 w 704850"/>
+              <a:gd name="csY2" fmla="*/ 645823 h 647078"/>
+              <a:gd name="csX0" fmla="*/ 0 w 704850"/>
+              <a:gd name="csY0" fmla="*/ 647078 h 647078"/>
+              <a:gd name="csX1" fmla="*/ 351155 w 704850"/>
+              <a:gd name="csY1" fmla="*/ 20 h 647078"/>
+              <a:gd name="csX2" fmla="*/ 704850 w 704850"/>
+              <a:gd name="csY2" fmla="*/ 645823 h 647078"/>
+              <a:gd name="csX0" fmla="*/ 0 w 704850"/>
+              <a:gd name="csY0" fmla="*/ 647078 h 647078"/>
+              <a:gd name="csX1" fmla="*/ 351155 w 704850"/>
+              <a:gd name="csY1" fmla="*/ 20 h 647078"/>
+              <a:gd name="csX2" fmla="*/ 704850 w 704850"/>
+              <a:gd name="csY2" fmla="*/ 645823 h 647078"/>
+              <a:gd name="csX0" fmla="*/ 0 w 704850"/>
+              <a:gd name="csY0" fmla="*/ 647078 h 647078"/>
+              <a:gd name="csX1" fmla="*/ 351155 w 704850"/>
+              <a:gd name="csY1" fmla="*/ 20 h 647078"/>
+              <a:gd name="csX2" fmla="*/ 704850 w 704850"/>
+              <a:gd name="csY2" fmla="*/ 645823 h 647078"/>
+              <a:gd name="csX0" fmla="*/ 0 w 704850"/>
+              <a:gd name="csY0" fmla="*/ 647078 h 647078"/>
+              <a:gd name="csX1" fmla="*/ 351155 w 704850"/>
+              <a:gd name="csY1" fmla="*/ 20 h 647078"/>
+              <a:gd name="csX2" fmla="*/ 704850 w 704850"/>
+              <a:gd name="csY2" fmla="*/ 645823 h 647078"/>
+              <a:gd name="csX0" fmla="*/ 0 w 704850"/>
+              <a:gd name="csY0" fmla="*/ 647078 h 647078"/>
+              <a:gd name="csX1" fmla="*/ 351155 w 704850"/>
+              <a:gd name="csY1" fmla="*/ 20 h 647078"/>
+              <a:gd name="csX2" fmla="*/ 704850 w 704850"/>
+              <a:gd name="csY2" fmla="*/ 645823 h 647078"/>
+              <a:gd name="csX0" fmla="*/ 0 w 704850"/>
+              <a:gd name="csY0" fmla="*/ 647078 h 647078"/>
+              <a:gd name="csX1" fmla="*/ 351155 w 704850"/>
+              <a:gd name="csY1" fmla="*/ 20 h 647078"/>
+              <a:gd name="csX2" fmla="*/ 704850 w 704850"/>
+              <a:gd name="csY2" fmla="*/ 645823 h 647078"/>
+              <a:gd name="csX0" fmla="*/ 0 w 704850"/>
+              <a:gd name="csY0" fmla="*/ 647078 h 647078"/>
+              <a:gd name="csX1" fmla="*/ 351155 w 704850"/>
+              <a:gd name="csY1" fmla="*/ 20 h 647078"/>
+              <a:gd name="csX2" fmla="*/ 704850 w 704850"/>
+              <a:gd name="csY2" fmla="*/ 645823 h 647078"/>
+              <a:gd name="csX0" fmla="*/ 0 w 704850"/>
+              <a:gd name="csY0" fmla="*/ 647062 h 647062"/>
+              <a:gd name="csX1" fmla="*/ 351155 w 704850"/>
+              <a:gd name="csY1" fmla="*/ 4 h 647062"/>
+              <a:gd name="csX2" fmla="*/ 704850 w 704850"/>
+              <a:gd name="csY2" fmla="*/ 645807 h 647062"/>
+            </a:gdLst>
+            <a:ahLst/>
+            <a:cxnLst>
+              <a:cxn ang="0">
+                <a:pos x="csX0" y="csY0"/>
+              </a:cxn>
+              <a:cxn ang="0">
+                <a:pos x="csX1" y="csY1"/>
+              </a:cxn>
+              <a:cxn ang="0">
+                <a:pos x="csX2" y="csY2"/>
+              </a:cxn>
+            </a:cxnLst>
+            <a:rect l="l" t="t" r="r" b="b"/>
+            <a:pathLst>
+              <a:path w="704850" h="647062">
+                <a:moveTo>
+                  <a:pt x="0" y="647062"/>
+                </a:moveTo>
+                <a:cubicBezTo>
+                  <a:pt x="69850" y="415353"/>
+                  <a:pt x="191135" y="1478"/>
+                  <a:pt x="351155" y="4"/>
+                </a:cubicBezTo>
+                <a:cubicBezTo>
+                  <a:pt x="511175" y="-1470"/>
+                  <a:pt x="618490" y="408469"/>
+                  <a:pt x="704850" y="645807"/>
+                </a:cubicBezTo>
+              </a:path>
+            </a:pathLst>
+          </a:custGeom>
+          <a:noFill/>
+          <a:ln cap="rnd">
+            <a:solidFill>
+              <a:srgbClr val="086FBD"/>
+            </a:solidFill>
+            <a:round/>
+          </a:ln>
+        </p:spPr>
+        <p:style>
+          <a:lnRef idx="2">
+            <a:schemeClr val="accent1">
+              <a:shade val="15000"/>
+            </a:schemeClr>
+          </a:lnRef>
+          <a:fillRef idx="1">
+            <a:schemeClr val="accent1"/>
+          </a:fillRef>
+          <a:effectRef idx="0">
+            <a:schemeClr val="accent1"/>
+          </a:effectRef>
+          <a:fontRef idx="minor">
+            <a:schemeClr val="lt1"/>
+          </a:fontRef>
+        </p:style>
+        <p:txBody>
+          <a:bodyPr rtlCol="0" anchor="ctr"/>
+          <a:lstStyle/>
+          <a:p>
+            <a:pPr algn="ctr"/>
+            <a:endParaRPr lang="de-DE"/>
+          </a:p>
+        </p:txBody>
+      </p:sp>
+      <p:sp>
+        <p:nvSpPr>
+          <p:cNvPr id="33" name="Freihandform: Form 32">
+            <a:extLst>
+              <a:ext uri="{FF2B5EF4-FFF2-40B4-BE49-F238E27FC236}">
+                <a16:creationId xmlns:a16="http://schemas.microsoft.com/office/drawing/2014/main" id="{A2095D34-1C94-DCE7-066D-D24FF65750E6}"/>
+              </a:ext>
+            </a:extLst>
+          </p:cNvPr>
+          <p:cNvSpPr/>
+          <p:nvPr/>
+        </p:nvSpPr>
+        <p:spPr>
+          <a:xfrm>
+            <a:off x="1361617" y="1068714"/>
+            <a:ext cx="704850" cy="824134"/>
+          </a:xfrm>
+          <a:custGeom>
+            <a:avLst/>
+            <a:gdLst>
+              <a:gd name="csX0" fmla="*/ 0 w 708660"/>
+              <a:gd name="csY0" fmla="*/ 645160 h 647700"/>
+              <a:gd name="csX1" fmla="*/ 337820 w 708660"/>
+              <a:gd name="csY1" fmla="*/ 0 h 647700"/>
+              <a:gd name="csX2" fmla="*/ 708660 w 708660"/>
+              <a:gd name="csY2" fmla="*/ 647700 h 647700"/>
+              <a:gd name="csX0" fmla="*/ 0 w 708660"/>
+              <a:gd name="csY0" fmla="*/ 645160 h 647700"/>
+              <a:gd name="csX1" fmla="*/ 337820 w 708660"/>
+              <a:gd name="csY1" fmla="*/ 0 h 647700"/>
+              <a:gd name="csX2" fmla="*/ 708660 w 708660"/>
+              <a:gd name="csY2" fmla="*/ 647700 h 647700"/>
+              <a:gd name="csX0" fmla="*/ 0 w 708660"/>
+              <a:gd name="csY0" fmla="*/ 645160 h 647700"/>
+              <a:gd name="csX1" fmla="*/ 337820 w 708660"/>
+              <a:gd name="csY1" fmla="*/ 0 h 647700"/>
+              <a:gd name="csX2" fmla="*/ 708660 w 708660"/>
+              <a:gd name="csY2" fmla="*/ 647700 h 647700"/>
+              <a:gd name="csX0" fmla="*/ 0 w 708660"/>
+              <a:gd name="csY0" fmla="*/ 645160 h 647700"/>
+              <a:gd name="csX1" fmla="*/ 337820 w 708660"/>
+              <a:gd name="csY1" fmla="*/ 0 h 647700"/>
+              <a:gd name="csX2" fmla="*/ 708660 w 708660"/>
+              <a:gd name="csY2" fmla="*/ 647700 h 647700"/>
+              <a:gd name="csX0" fmla="*/ 0 w 708660"/>
+              <a:gd name="csY0" fmla="*/ 647058 h 649598"/>
+              <a:gd name="csX1" fmla="*/ 356870 w 708660"/>
+              <a:gd name="csY1" fmla="*/ 0 h 649598"/>
+              <a:gd name="csX2" fmla="*/ 708660 w 708660"/>
+              <a:gd name="csY2" fmla="*/ 649598 h 649598"/>
+              <a:gd name="csX0" fmla="*/ 0 w 704850"/>
+              <a:gd name="csY0" fmla="*/ 647058 h 647058"/>
+              <a:gd name="csX1" fmla="*/ 356870 w 704850"/>
+              <a:gd name="csY1" fmla="*/ 0 h 647058"/>
+              <a:gd name="csX2" fmla="*/ 704850 w 704850"/>
+              <a:gd name="csY2" fmla="*/ 645803 h 647058"/>
+              <a:gd name="csX0" fmla="*/ 0 w 704850"/>
+              <a:gd name="csY0" fmla="*/ 647078 h 647078"/>
+              <a:gd name="csX1" fmla="*/ 356870 w 704850"/>
+              <a:gd name="csY1" fmla="*/ 20 h 647078"/>
+              <a:gd name="csX2" fmla="*/ 704850 w 704850"/>
+              <a:gd name="csY2" fmla="*/ 645823 h 647078"/>
+              <a:gd name="csX0" fmla="*/ 0 w 704850"/>
+              <a:gd name="csY0" fmla="*/ 647078 h 647078"/>
+              <a:gd name="csX1" fmla="*/ 341630 w 704850"/>
+              <a:gd name="csY1" fmla="*/ 20 h 647078"/>
+              <a:gd name="csX2" fmla="*/ 704850 w 704850"/>
+              <a:gd name="csY2" fmla="*/ 645823 h 647078"/>
+              <a:gd name="csX0" fmla="*/ 0 w 704850"/>
+              <a:gd name="csY0" fmla="*/ 647078 h 647078"/>
+              <a:gd name="csX1" fmla="*/ 351155 w 704850"/>
+              <a:gd name="csY1" fmla="*/ 20 h 647078"/>
+              <a:gd name="csX2" fmla="*/ 704850 w 704850"/>
+              <a:gd name="csY2" fmla="*/ 645823 h 647078"/>
+              <a:gd name="csX0" fmla="*/ 0 w 704850"/>
+              <a:gd name="csY0" fmla="*/ 647078 h 647078"/>
+              <a:gd name="csX1" fmla="*/ 351155 w 704850"/>
+              <a:gd name="csY1" fmla="*/ 20 h 647078"/>
+              <a:gd name="csX2" fmla="*/ 704850 w 704850"/>
+              <a:gd name="csY2" fmla="*/ 645823 h 647078"/>
+              <a:gd name="csX0" fmla="*/ 0 w 704850"/>
+              <a:gd name="csY0" fmla="*/ 647078 h 647078"/>
+              <a:gd name="csX1" fmla="*/ 351155 w 704850"/>
+              <a:gd name="csY1" fmla="*/ 20 h 647078"/>
+              <a:gd name="csX2" fmla="*/ 704850 w 704850"/>
+              <a:gd name="csY2" fmla="*/ 645823 h 647078"/>
+              <a:gd name="csX0" fmla="*/ 0 w 704850"/>
+              <a:gd name="csY0" fmla="*/ 647078 h 647078"/>
+              <a:gd name="csX1" fmla="*/ 351155 w 704850"/>
+              <a:gd name="csY1" fmla="*/ 20 h 647078"/>
+              <a:gd name="csX2" fmla="*/ 704850 w 704850"/>
+              <a:gd name="csY2" fmla="*/ 645823 h 647078"/>
+              <a:gd name="csX0" fmla="*/ 0 w 704850"/>
+              <a:gd name="csY0" fmla="*/ 647078 h 647078"/>
+              <a:gd name="csX1" fmla="*/ 351155 w 704850"/>
+              <a:gd name="csY1" fmla="*/ 20 h 647078"/>
+              <a:gd name="csX2" fmla="*/ 704850 w 704850"/>
+              <a:gd name="csY2" fmla="*/ 645823 h 647078"/>
+              <a:gd name="csX0" fmla="*/ 0 w 704850"/>
+              <a:gd name="csY0" fmla="*/ 647078 h 647078"/>
+              <a:gd name="csX1" fmla="*/ 351155 w 704850"/>
+              <a:gd name="csY1" fmla="*/ 20 h 647078"/>
+              <a:gd name="csX2" fmla="*/ 704850 w 704850"/>
+              <a:gd name="csY2" fmla="*/ 645823 h 647078"/>
+              <a:gd name="csX0" fmla="*/ 0 w 704850"/>
+              <a:gd name="csY0" fmla="*/ 647078 h 647078"/>
+              <a:gd name="csX1" fmla="*/ 351155 w 704850"/>
+              <a:gd name="csY1" fmla="*/ 20 h 647078"/>
+              <a:gd name="csX2" fmla="*/ 704850 w 704850"/>
+              <a:gd name="csY2" fmla="*/ 645823 h 647078"/>
+              <a:gd name="csX0" fmla="*/ 0 w 704850"/>
+              <a:gd name="csY0" fmla="*/ 647062 h 647062"/>
+              <a:gd name="csX1" fmla="*/ 351155 w 704850"/>
+              <a:gd name="csY1" fmla="*/ 4 h 647062"/>
+              <a:gd name="csX2" fmla="*/ 704850 w 704850"/>
+              <a:gd name="csY2" fmla="*/ 645807 h 647062"/>
+            </a:gdLst>
+            <a:ahLst/>
+            <a:cxnLst>
+              <a:cxn ang="0">
+                <a:pos x="csX0" y="csY0"/>
+              </a:cxn>
+              <a:cxn ang="0">
+                <a:pos x="csX1" y="csY1"/>
+              </a:cxn>
+              <a:cxn ang="0">
+                <a:pos x="csX2" y="csY2"/>
+              </a:cxn>
+            </a:cxnLst>
+            <a:rect l="l" t="t" r="r" b="b"/>
+            <a:pathLst>
+              <a:path w="704850" h="647062">
+                <a:moveTo>
+                  <a:pt x="0" y="647062"/>
+                </a:moveTo>
+                <a:cubicBezTo>
+                  <a:pt x="69850" y="415353"/>
+                  <a:pt x="191135" y="1478"/>
+                  <a:pt x="351155" y="4"/>
+                </a:cubicBezTo>
+                <a:cubicBezTo>
+                  <a:pt x="511175" y="-1470"/>
+                  <a:pt x="618490" y="408469"/>
+                  <a:pt x="704850" y="645807"/>
+                </a:cubicBezTo>
+              </a:path>
+            </a:pathLst>
+          </a:custGeom>
+          <a:noFill/>
+          <a:ln cap="rnd">
+            <a:solidFill>
+              <a:srgbClr val="086FBD"/>
+            </a:solidFill>
+            <a:round/>
+          </a:ln>
+        </p:spPr>
+        <p:style>
+          <a:lnRef idx="2">
+            <a:schemeClr val="accent1">
+              <a:shade val="15000"/>
+            </a:schemeClr>
+          </a:lnRef>
+          <a:fillRef idx="1">
+            <a:schemeClr val="accent1"/>
+          </a:fillRef>
+          <a:effectRef idx="0">
+            <a:schemeClr val="accent1"/>
+          </a:effectRef>
+          <a:fontRef idx="minor">
+            <a:schemeClr val="lt1"/>
+          </a:fontRef>
+        </p:style>
+        <p:txBody>
+          <a:bodyPr rtlCol="0" anchor="ctr"/>
+          <a:lstStyle/>
+          <a:p>
+            <a:pPr algn="ctr"/>
+            <a:endParaRPr lang="de-DE"/>
+          </a:p>
+        </p:txBody>
+      </p:sp>
+      <p:sp>
+        <p:nvSpPr>
+          <p:cNvPr id="34" name="Freihandform: Form 33">
+            <a:extLst>
+              <a:ext uri="{FF2B5EF4-FFF2-40B4-BE49-F238E27FC236}">
+                <a16:creationId xmlns:a16="http://schemas.microsoft.com/office/drawing/2014/main" id="{A6589D86-79E9-7C93-0D4D-004EADF076C9}"/>
+              </a:ext>
+            </a:extLst>
+          </p:cNvPr>
+          <p:cNvSpPr/>
+          <p:nvPr/>
+        </p:nvSpPr>
+        <p:spPr>
+          <a:xfrm>
+            <a:off x="308152" y="1341502"/>
+            <a:ext cx="704850" cy="550980"/>
+          </a:xfrm>
+          <a:custGeom>
+            <a:avLst/>
+            <a:gdLst>
+              <a:gd name="csX0" fmla="*/ 0 w 708660"/>
+              <a:gd name="csY0" fmla="*/ 645160 h 647700"/>
+              <a:gd name="csX1" fmla="*/ 337820 w 708660"/>
+              <a:gd name="csY1" fmla="*/ 0 h 647700"/>
+              <a:gd name="csX2" fmla="*/ 708660 w 708660"/>
+              <a:gd name="csY2" fmla="*/ 647700 h 647700"/>
+              <a:gd name="csX0" fmla="*/ 0 w 708660"/>
+              <a:gd name="csY0" fmla="*/ 645160 h 647700"/>
+              <a:gd name="csX1" fmla="*/ 337820 w 708660"/>
+              <a:gd name="csY1" fmla="*/ 0 h 647700"/>
+              <a:gd name="csX2" fmla="*/ 708660 w 708660"/>
+              <a:gd name="csY2" fmla="*/ 647700 h 647700"/>
+              <a:gd name="csX0" fmla="*/ 0 w 708660"/>
+              <a:gd name="csY0" fmla="*/ 645160 h 647700"/>
+              <a:gd name="csX1" fmla="*/ 337820 w 708660"/>
+              <a:gd name="csY1" fmla="*/ 0 h 647700"/>
+              <a:gd name="csX2" fmla="*/ 708660 w 708660"/>
+              <a:gd name="csY2" fmla="*/ 647700 h 647700"/>
+              <a:gd name="csX0" fmla="*/ 0 w 708660"/>
+              <a:gd name="csY0" fmla="*/ 645160 h 647700"/>
+              <a:gd name="csX1" fmla="*/ 337820 w 708660"/>
+              <a:gd name="csY1" fmla="*/ 0 h 647700"/>
+              <a:gd name="csX2" fmla="*/ 708660 w 708660"/>
+              <a:gd name="csY2" fmla="*/ 647700 h 647700"/>
+              <a:gd name="csX0" fmla="*/ 0 w 708660"/>
+              <a:gd name="csY0" fmla="*/ 647058 h 649598"/>
+              <a:gd name="csX1" fmla="*/ 356870 w 708660"/>
+              <a:gd name="csY1" fmla="*/ 0 h 649598"/>
+              <a:gd name="csX2" fmla="*/ 708660 w 708660"/>
+              <a:gd name="csY2" fmla="*/ 649598 h 649598"/>
+              <a:gd name="csX0" fmla="*/ 0 w 704850"/>
+              <a:gd name="csY0" fmla="*/ 647058 h 647058"/>
+              <a:gd name="csX1" fmla="*/ 356870 w 704850"/>
+              <a:gd name="csY1" fmla="*/ 0 h 647058"/>
+              <a:gd name="csX2" fmla="*/ 704850 w 704850"/>
+              <a:gd name="csY2" fmla="*/ 645803 h 647058"/>
+              <a:gd name="csX0" fmla="*/ 0 w 704850"/>
+              <a:gd name="csY0" fmla="*/ 647078 h 647078"/>
+              <a:gd name="csX1" fmla="*/ 356870 w 704850"/>
+              <a:gd name="csY1" fmla="*/ 20 h 647078"/>
+              <a:gd name="csX2" fmla="*/ 704850 w 704850"/>
+              <a:gd name="csY2" fmla="*/ 645823 h 647078"/>
+              <a:gd name="csX0" fmla="*/ 0 w 704850"/>
+              <a:gd name="csY0" fmla="*/ 647078 h 647078"/>
+              <a:gd name="csX1" fmla="*/ 341630 w 704850"/>
+              <a:gd name="csY1" fmla="*/ 20 h 647078"/>
+              <a:gd name="csX2" fmla="*/ 704850 w 704850"/>
+              <a:gd name="csY2" fmla="*/ 645823 h 647078"/>
+              <a:gd name="csX0" fmla="*/ 0 w 704850"/>
+              <a:gd name="csY0" fmla="*/ 647078 h 647078"/>
+              <a:gd name="csX1" fmla="*/ 351155 w 704850"/>
+              <a:gd name="csY1" fmla="*/ 20 h 647078"/>
+              <a:gd name="csX2" fmla="*/ 704850 w 704850"/>
+              <a:gd name="csY2" fmla="*/ 645823 h 647078"/>
+              <a:gd name="csX0" fmla="*/ 0 w 704850"/>
+              <a:gd name="csY0" fmla="*/ 647078 h 647078"/>
+              <a:gd name="csX1" fmla="*/ 351155 w 704850"/>
+              <a:gd name="csY1" fmla="*/ 20 h 647078"/>
+              <a:gd name="csX2" fmla="*/ 704850 w 704850"/>
+              <a:gd name="csY2" fmla="*/ 645823 h 647078"/>
+              <a:gd name="csX0" fmla="*/ 0 w 704850"/>
+              <a:gd name="csY0" fmla="*/ 647078 h 647078"/>
+              <a:gd name="csX1" fmla="*/ 351155 w 704850"/>
+              <a:gd name="csY1" fmla="*/ 20 h 647078"/>
+              <a:gd name="csX2" fmla="*/ 704850 w 704850"/>
+              <a:gd name="csY2" fmla="*/ 645823 h 647078"/>
+              <a:gd name="csX0" fmla="*/ 0 w 704850"/>
+              <a:gd name="csY0" fmla="*/ 647078 h 647078"/>
+              <a:gd name="csX1" fmla="*/ 351155 w 704850"/>
+              <a:gd name="csY1" fmla="*/ 20 h 647078"/>
+              <a:gd name="csX2" fmla="*/ 704850 w 704850"/>
+              <a:gd name="csY2" fmla="*/ 645823 h 647078"/>
+              <a:gd name="csX0" fmla="*/ 0 w 704850"/>
+              <a:gd name="csY0" fmla="*/ 647078 h 647078"/>
+              <a:gd name="csX1" fmla="*/ 351155 w 704850"/>
+              <a:gd name="csY1" fmla="*/ 20 h 647078"/>
+              <a:gd name="csX2" fmla="*/ 704850 w 704850"/>
+              <a:gd name="csY2" fmla="*/ 645823 h 647078"/>
+              <a:gd name="csX0" fmla="*/ 0 w 704850"/>
+              <a:gd name="csY0" fmla="*/ 647078 h 647078"/>
+              <a:gd name="csX1" fmla="*/ 351155 w 704850"/>
+              <a:gd name="csY1" fmla="*/ 20 h 647078"/>
+              <a:gd name="csX2" fmla="*/ 704850 w 704850"/>
+              <a:gd name="csY2" fmla="*/ 645823 h 647078"/>
+              <a:gd name="csX0" fmla="*/ 0 w 704850"/>
+              <a:gd name="csY0" fmla="*/ 647078 h 647078"/>
+              <a:gd name="csX1" fmla="*/ 351155 w 704850"/>
+              <a:gd name="csY1" fmla="*/ 20 h 647078"/>
+              <a:gd name="csX2" fmla="*/ 704850 w 704850"/>
+              <a:gd name="csY2" fmla="*/ 645823 h 647078"/>
+              <a:gd name="csX0" fmla="*/ 0 w 704850"/>
+              <a:gd name="csY0" fmla="*/ 647062 h 647062"/>
+              <a:gd name="csX1" fmla="*/ 351155 w 704850"/>
+              <a:gd name="csY1" fmla="*/ 4 h 647062"/>
+              <a:gd name="csX2" fmla="*/ 704850 w 704850"/>
+              <a:gd name="csY2" fmla="*/ 645807 h 647062"/>
+            </a:gdLst>
+            <a:ahLst/>
+            <a:cxnLst>
+              <a:cxn ang="0">
+                <a:pos x="csX0" y="csY0"/>
+              </a:cxn>
+              <a:cxn ang="0">
+                <a:pos x="csX1" y="csY1"/>
+              </a:cxn>
+              <a:cxn ang="0">
+                <a:pos x="csX2" y="csY2"/>
+              </a:cxn>
+            </a:cxnLst>
+            <a:rect l="l" t="t" r="r" b="b"/>
+            <a:pathLst>
+              <a:path w="704850" h="647062">
+                <a:moveTo>
+                  <a:pt x="0" y="647062"/>
+                </a:moveTo>
+                <a:cubicBezTo>
+                  <a:pt x="69850" y="415353"/>
+                  <a:pt x="191135" y="1478"/>
+                  <a:pt x="351155" y="4"/>
+                </a:cubicBezTo>
+                <a:cubicBezTo>
+                  <a:pt x="511175" y="-1470"/>
+                  <a:pt x="618490" y="408469"/>
+                  <a:pt x="704850" y="645807"/>
+                </a:cubicBezTo>
+              </a:path>
+            </a:pathLst>
+          </a:custGeom>
+          <a:noFill/>
+          <a:ln cap="rnd">
+            <a:solidFill>
+              <a:srgbClr val="FF0000"/>
+            </a:solidFill>
+            <a:round/>
+          </a:ln>
+        </p:spPr>
+        <p:style>
+          <a:lnRef idx="2">
+            <a:schemeClr val="accent1">
+              <a:shade val="15000"/>
+            </a:schemeClr>
+          </a:lnRef>
+          <a:fillRef idx="1">
+            <a:schemeClr val="accent1"/>
+          </a:fillRef>
+          <a:effectRef idx="0">
+            <a:schemeClr val="accent1"/>
+          </a:effectRef>
+          <a:fontRef idx="minor">
+            <a:schemeClr val="lt1"/>
+          </a:fontRef>
+        </p:style>
+        <p:txBody>
+          <a:bodyPr rtlCol="0" anchor="ctr"/>
+          <a:lstStyle/>
+          <a:p>
+            <a:pPr algn="ctr"/>
+            <a:endParaRPr lang="de-DE"/>
+          </a:p>
+        </p:txBody>
+      </p:sp>
+      <p:sp>
+        <p:nvSpPr>
+          <p:cNvPr id="36" name="Freihandform: Form 35">
+            <a:extLst>
+              <a:ext uri="{FF2B5EF4-FFF2-40B4-BE49-F238E27FC236}">
+                <a16:creationId xmlns:a16="http://schemas.microsoft.com/office/drawing/2014/main" id="{F2F6A8C3-9DA1-091D-B2DB-6D6A30F90A4B}"/>
+              </a:ext>
+            </a:extLst>
+          </p:cNvPr>
+          <p:cNvSpPr/>
+          <p:nvPr/>
+        </p:nvSpPr>
+        <p:spPr>
+          <a:xfrm>
+            <a:off x="1717852" y="1343028"/>
+            <a:ext cx="704850" cy="550980"/>
+          </a:xfrm>
+          <a:custGeom>
+            <a:avLst/>
+            <a:gdLst>
+              <a:gd name="csX0" fmla="*/ 0 w 708660"/>
+              <a:gd name="csY0" fmla="*/ 645160 h 647700"/>
+              <a:gd name="csX1" fmla="*/ 337820 w 708660"/>
+              <a:gd name="csY1" fmla="*/ 0 h 647700"/>
+              <a:gd name="csX2" fmla="*/ 708660 w 708660"/>
+              <a:gd name="csY2" fmla="*/ 647700 h 647700"/>
+              <a:gd name="csX0" fmla="*/ 0 w 708660"/>
+              <a:gd name="csY0" fmla="*/ 645160 h 647700"/>
+              <a:gd name="csX1" fmla="*/ 337820 w 708660"/>
+              <a:gd name="csY1" fmla="*/ 0 h 647700"/>
+              <a:gd name="csX2" fmla="*/ 708660 w 708660"/>
+              <a:gd name="csY2" fmla="*/ 647700 h 647700"/>
+              <a:gd name="csX0" fmla="*/ 0 w 708660"/>
+              <a:gd name="csY0" fmla="*/ 645160 h 647700"/>
+              <a:gd name="csX1" fmla="*/ 337820 w 708660"/>
+              <a:gd name="csY1" fmla="*/ 0 h 647700"/>
+              <a:gd name="csX2" fmla="*/ 708660 w 708660"/>
+              <a:gd name="csY2" fmla="*/ 647700 h 647700"/>
+              <a:gd name="csX0" fmla="*/ 0 w 708660"/>
+              <a:gd name="csY0" fmla="*/ 645160 h 647700"/>
+              <a:gd name="csX1" fmla="*/ 337820 w 708660"/>
+              <a:gd name="csY1" fmla="*/ 0 h 647700"/>
+              <a:gd name="csX2" fmla="*/ 708660 w 708660"/>
+              <a:gd name="csY2" fmla="*/ 647700 h 647700"/>
+              <a:gd name="csX0" fmla="*/ 0 w 708660"/>
+              <a:gd name="csY0" fmla="*/ 647058 h 649598"/>
+              <a:gd name="csX1" fmla="*/ 356870 w 708660"/>
+              <a:gd name="csY1" fmla="*/ 0 h 649598"/>
+              <a:gd name="csX2" fmla="*/ 708660 w 708660"/>
+              <a:gd name="csY2" fmla="*/ 649598 h 649598"/>
+              <a:gd name="csX0" fmla="*/ 0 w 704850"/>
+              <a:gd name="csY0" fmla="*/ 647058 h 647058"/>
+              <a:gd name="csX1" fmla="*/ 356870 w 704850"/>
+              <a:gd name="csY1" fmla="*/ 0 h 647058"/>
+              <a:gd name="csX2" fmla="*/ 704850 w 704850"/>
+              <a:gd name="csY2" fmla="*/ 645803 h 647058"/>
+              <a:gd name="csX0" fmla="*/ 0 w 704850"/>
+              <a:gd name="csY0" fmla="*/ 647078 h 647078"/>
+              <a:gd name="csX1" fmla="*/ 356870 w 704850"/>
+              <a:gd name="csY1" fmla="*/ 20 h 647078"/>
+              <a:gd name="csX2" fmla="*/ 704850 w 704850"/>
+              <a:gd name="csY2" fmla="*/ 645823 h 647078"/>
+              <a:gd name="csX0" fmla="*/ 0 w 704850"/>
+              <a:gd name="csY0" fmla="*/ 647078 h 647078"/>
+              <a:gd name="csX1" fmla="*/ 341630 w 704850"/>
+              <a:gd name="csY1" fmla="*/ 20 h 647078"/>
+              <a:gd name="csX2" fmla="*/ 704850 w 704850"/>
+              <a:gd name="csY2" fmla="*/ 645823 h 647078"/>
+              <a:gd name="csX0" fmla="*/ 0 w 704850"/>
+              <a:gd name="csY0" fmla="*/ 647078 h 647078"/>
+              <a:gd name="csX1" fmla="*/ 351155 w 704850"/>
+              <a:gd name="csY1" fmla="*/ 20 h 647078"/>
+              <a:gd name="csX2" fmla="*/ 704850 w 704850"/>
+              <a:gd name="csY2" fmla="*/ 645823 h 647078"/>
+              <a:gd name="csX0" fmla="*/ 0 w 704850"/>
+              <a:gd name="csY0" fmla="*/ 647078 h 647078"/>
+              <a:gd name="csX1" fmla="*/ 351155 w 704850"/>
+              <a:gd name="csY1" fmla="*/ 20 h 647078"/>
+              <a:gd name="csX2" fmla="*/ 704850 w 704850"/>
+              <a:gd name="csY2" fmla="*/ 645823 h 647078"/>
+              <a:gd name="csX0" fmla="*/ 0 w 704850"/>
+              <a:gd name="csY0" fmla="*/ 647078 h 647078"/>
+              <a:gd name="csX1" fmla="*/ 351155 w 704850"/>
+              <a:gd name="csY1" fmla="*/ 20 h 647078"/>
+              <a:gd name="csX2" fmla="*/ 704850 w 704850"/>
+              <a:gd name="csY2" fmla="*/ 645823 h 647078"/>
+              <a:gd name="csX0" fmla="*/ 0 w 704850"/>
+              <a:gd name="csY0" fmla="*/ 647078 h 647078"/>
+              <a:gd name="csX1" fmla="*/ 351155 w 704850"/>
+              <a:gd name="csY1" fmla="*/ 20 h 647078"/>
+              <a:gd name="csX2" fmla="*/ 704850 w 704850"/>
+              <a:gd name="csY2" fmla="*/ 645823 h 647078"/>
+              <a:gd name="csX0" fmla="*/ 0 w 704850"/>
+              <a:gd name="csY0" fmla="*/ 647078 h 647078"/>
+              <a:gd name="csX1" fmla="*/ 351155 w 704850"/>
+              <a:gd name="csY1" fmla="*/ 20 h 647078"/>
+              <a:gd name="csX2" fmla="*/ 704850 w 704850"/>
+              <a:gd name="csY2" fmla="*/ 645823 h 647078"/>
+              <a:gd name="csX0" fmla="*/ 0 w 704850"/>
+              <a:gd name="csY0" fmla="*/ 647078 h 647078"/>
+              <a:gd name="csX1" fmla="*/ 351155 w 704850"/>
+              <a:gd name="csY1" fmla="*/ 20 h 647078"/>
+              <a:gd name="csX2" fmla="*/ 704850 w 704850"/>
+              <a:gd name="csY2" fmla="*/ 645823 h 647078"/>
+              <a:gd name="csX0" fmla="*/ 0 w 704850"/>
+              <a:gd name="csY0" fmla="*/ 647078 h 647078"/>
+              <a:gd name="csX1" fmla="*/ 351155 w 704850"/>
+              <a:gd name="csY1" fmla="*/ 20 h 647078"/>
+              <a:gd name="csX2" fmla="*/ 704850 w 704850"/>
+              <a:gd name="csY2" fmla="*/ 645823 h 647078"/>
+              <a:gd name="csX0" fmla="*/ 0 w 704850"/>
+              <a:gd name="csY0" fmla="*/ 647062 h 647062"/>
+              <a:gd name="csX1" fmla="*/ 351155 w 704850"/>
+              <a:gd name="csY1" fmla="*/ 4 h 647062"/>
+              <a:gd name="csX2" fmla="*/ 704850 w 704850"/>
+              <a:gd name="csY2" fmla="*/ 645807 h 647062"/>
+            </a:gdLst>
+            <a:ahLst/>
+            <a:cxnLst>
+              <a:cxn ang="0">
+                <a:pos x="csX0" y="csY0"/>
+              </a:cxn>
+              <a:cxn ang="0">
+                <a:pos x="csX1" y="csY1"/>
+              </a:cxn>
+              <a:cxn ang="0">
+                <a:pos x="csX2" y="csY2"/>
+              </a:cxn>
+            </a:cxnLst>
+            <a:rect l="l" t="t" r="r" b="b"/>
+            <a:pathLst>
+              <a:path w="704850" h="647062">
+                <a:moveTo>
+                  <a:pt x="0" y="647062"/>
+                </a:moveTo>
+                <a:cubicBezTo>
+                  <a:pt x="69850" y="415353"/>
+                  <a:pt x="191135" y="1478"/>
+                  <a:pt x="351155" y="4"/>
+                </a:cubicBezTo>
+                <a:cubicBezTo>
+                  <a:pt x="511175" y="-1470"/>
+                  <a:pt x="618490" y="408469"/>
+                  <a:pt x="704850" y="645807"/>
+                </a:cubicBezTo>
+              </a:path>
+            </a:pathLst>
+          </a:custGeom>
+          <a:noFill/>
+          <a:ln cap="rnd">
+            <a:solidFill>
+              <a:srgbClr val="FF0000"/>
+            </a:solidFill>
+            <a:round/>
+          </a:ln>
+        </p:spPr>
+        <p:style>
+          <a:lnRef idx="2">
+            <a:schemeClr val="accent1">
+              <a:shade val="15000"/>
+            </a:schemeClr>
+          </a:lnRef>
+          <a:fillRef idx="1">
+            <a:schemeClr val="accent1"/>
+          </a:fillRef>
+          <a:effectRef idx="0">
+            <a:schemeClr val="accent1"/>
+          </a:effectRef>
+          <a:fontRef idx="minor">
+            <a:schemeClr val="lt1"/>
+          </a:fontRef>
+        </p:style>
+        <p:txBody>
+          <a:bodyPr rtlCol="0" anchor="ctr"/>
+          <a:lstStyle/>
+          <a:p>
+            <a:pPr algn="ctr"/>
+            <a:endParaRPr lang="de-DE"/>
+          </a:p>
+        </p:txBody>
+      </p:sp>
+      <p:sp>
+        <p:nvSpPr>
+          <p:cNvPr id="27" name="Rechteck 26">
+            <a:extLst>
+              <a:ext uri="{FF2B5EF4-FFF2-40B4-BE49-F238E27FC236}">
+                <a16:creationId xmlns:a16="http://schemas.microsoft.com/office/drawing/2014/main" id="{80E62703-7A6C-1BD5-337E-C45AF126AFFC}"/>
+              </a:ext>
+            </a:extLst>
+          </p:cNvPr>
+          <p:cNvSpPr/>
+          <p:nvPr/>
+        </p:nvSpPr>
+        <p:spPr>
+          <a:xfrm>
+            <a:off x="-60775" y="992505"/>
+            <a:ext cx="361602" cy="1043939"/>
+          </a:xfrm>
+          <a:prstGeom prst="rect">
+            <a:avLst/>
+          </a:prstGeom>
+          <a:solidFill>
+            <a:schemeClr val="bg1"/>
+          </a:solidFill>
+          <a:ln>
+            <a:noFill/>
+          </a:ln>
+        </p:spPr>
+        <p:style>
+          <a:lnRef idx="2">
+            <a:schemeClr val="accent1">
+              <a:shade val="15000"/>
+            </a:schemeClr>
+          </a:lnRef>
+          <a:fillRef idx="1">
+            <a:schemeClr val="accent1"/>
+          </a:fillRef>
+          <a:effectRef idx="0">
+            <a:schemeClr val="accent1"/>
+          </a:effectRef>
+          <a:fontRef idx="minor">
+            <a:schemeClr val="lt1"/>
+          </a:fontRef>
+        </p:style>
+        <p:txBody>
+          <a:bodyPr rtlCol="0" anchor="ctr"/>
+          <a:lstStyle/>
+          <a:p>
+            <a:pPr algn="ctr"/>
+            <a:endParaRPr lang="de-DE" dirty="0"/>
+          </a:p>
+        </p:txBody>
+      </p:sp>
+      <p:cxnSp>
+        <p:nvCxnSpPr>
+          <p:cNvPr id="5" name="Gerade Verbindung mit Pfeil 4">
+            <a:extLst>
+              <a:ext uri="{FF2B5EF4-FFF2-40B4-BE49-F238E27FC236}">
+                <a16:creationId xmlns:a16="http://schemas.microsoft.com/office/drawing/2014/main" id="{E0118C2F-D9E3-83E1-4A0F-E923C8F84AB9}"/>
+              </a:ext>
+            </a:extLst>
+          </p:cNvPr>
+          <p:cNvCxnSpPr>
+            <a:cxnSpLocks/>
+          </p:cNvCxnSpPr>
+          <p:nvPr/>
+        </p:nvCxnSpPr>
+        <p:spPr>
+          <a:xfrm flipV="1">
+            <a:off x="304617" y="889635"/>
+            <a:ext cx="0" cy="1994535"/>
+          </a:xfrm>
+          <a:prstGeom prst="straightConnector1">
+            <a:avLst/>
+          </a:prstGeom>
+          <a:ln cap="rnd">
+            <a:solidFill>
+              <a:schemeClr val="tx1"/>
+            </a:solidFill>
+            <a:round/>
+            <a:tailEnd type="triangle" w="med" len="med"/>
+          </a:ln>
+        </p:spPr>
+        <p:style>
+          <a:lnRef idx="2">
+            <a:schemeClr val="accent1"/>
+          </a:lnRef>
+          <a:fillRef idx="0">
+            <a:schemeClr val="accent1"/>
+          </a:fillRef>
+          <a:effectRef idx="1">
+            <a:schemeClr val="accent1"/>
+          </a:effectRef>
+          <a:fontRef idx="minor">
+            <a:schemeClr val="tx1"/>
+          </a:fontRef>
+        </p:style>
+      </p:cxnSp>
+      <p:sp>
+        <p:nvSpPr>
+          <p:cNvPr id="37" name="Rechteck 36">
+            <a:extLst>
+              <a:ext uri="{FF2B5EF4-FFF2-40B4-BE49-F238E27FC236}">
+                <a16:creationId xmlns:a16="http://schemas.microsoft.com/office/drawing/2014/main" id="{C148F55B-8416-ACF7-B39F-E3C2ED759893}"/>
+              </a:ext>
+            </a:extLst>
+          </p:cNvPr>
+          <p:cNvSpPr/>
+          <p:nvPr/>
+        </p:nvSpPr>
+        <p:spPr>
+          <a:xfrm>
+            <a:off x="2073931" y="1285565"/>
+            <a:ext cx="361602" cy="981384"/>
+          </a:xfrm>
+          <a:prstGeom prst="rect">
+            <a:avLst/>
+          </a:prstGeom>
+          <a:solidFill>
+            <a:schemeClr val="bg1"/>
+          </a:solidFill>
+          <a:ln>
+            <a:noFill/>
+          </a:ln>
+        </p:spPr>
+        <p:style>
+          <a:lnRef idx="2">
+            <a:schemeClr val="accent1">
+              <a:shade val="15000"/>
+            </a:schemeClr>
+          </a:lnRef>
+          <a:fillRef idx="1">
+            <a:schemeClr val="accent1"/>
+          </a:fillRef>
+          <a:effectRef idx="0">
+            <a:schemeClr val="accent1"/>
+          </a:effectRef>
+          <a:fontRef idx="minor">
+            <a:schemeClr val="lt1"/>
+          </a:fontRef>
+        </p:style>
+        <p:txBody>
+          <a:bodyPr rtlCol="0" anchor="ctr"/>
+          <a:lstStyle/>
+          <a:p>
+            <a:pPr algn="ctr"/>
+            <a:endParaRPr lang="de-DE" dirty="0"/>
+          </a:p>
+        </p:txBody>
+      </p:sp>
+      <p:cxnSp>
+        <p:nvCxnSpPr>
+          <p:cNvPr id="21" name="Gerader Verbinder 20">
+            <a:extLst>
+              <a:ext uri="{FF2B5EF4-FFF2-40B4-BE49-F238E27FC236}">
+                <a16:creationId xmlns:a16="http://schemas.microsoft.com/office/drawing/2014/main" id="{1DFD4F93-9EA0-B39B-D46F-88F677C2EA5F}"/>
+              </a:ext>
+            </a:extLst>
+          </p:cNvPr>
+          <p:cNvCxnSpPr>
+            <a:cxnSpLocks/>
+          </p:cNvCxnSpPr>
+          <p:nvPr/>
+        </p:nvCxnSpPr>
+        <p:spPr>
+          <a:xfrm flipH="1">
+            <a:off x="466725" y="1512786"/>
+            <a:ext cx="2904759" cy="0"/>
+          </a:xfrm>
+          <a:prstGeom prst="line">
+            <a:avLst/>
+          </a:prstGeom>
+          <a:ln w="9525" cap="rnd">
+            <a:solidFill>
+              <a:srgbClr val="FF0000"/>
+            </a:solidFill>
+            <a:prstDash val="sysDash"/>
+            <a:round/>
+          </a:ln>
+        </p:spPr>
+        <p:style>
+          <a:lnRef idx="2">
+            <a:schemeClr val="accent1"/>
+          </a:lnRef>
+          <a:fillRef idx="0">
+            <a:schemeClr val="accent1"/>
+          </a:fillRef>
+          <a:effectRef idx="1">
+            <a:schemeClr val="accent1"/>
+          </a:effectRef>
+          <a:fontRef idx="minor">
+            <a:schemeClr val="tx1"/>
+          </a:fontRef>
+        </p:style>
+      </p:cxnSp>
+      <p:sp>
+        <p:nvSpPr>
+          <p:cNvPr id="42" name="Freihandform: Form 41">
+            <a:extLst>
+              <a:ext uri="{FF2B5EF4-FFF2-40B4-BE49-F238E27FC236}">
+                <a16:creationId xmlns:a16="http://schemas.microsoft.com/office/drawing/2014/main" id="{93641830-54BA-45AA-0A7B-FDE5064551FD}"/>
+              </a:ext>
+            </a:extLst>
+          </p:cNvPr>
+          <p:cNvSpPr/>
+          <p:nvPr/>
+        </p:nvSpPr>
+        <p:spPr>
+          <a:xfrm rot="10800000">
+            <a:off x="656924" y="1894387"/>
+            <a:ext cx="704850" cy="824134"/>
+          </a:xfrm>
+          <a:custGeom>
+            <a:avLst/>
+            <a:gdLst>
+              <a:gd name="csX0" fmla="*/ 0 w 708660"/>
+              <a:gd name="csY0" fmla="*/ 645160 h 647700"/>
+              <a:gd name="csX1" fmla="*/ 337820 w 708660"/>
+              <a:gd name="csY1" fmla="*/ 0 h 647700"/>
+              <a:gd name="csX2" fmla="*/ 708660 w 708660"/>
+              <a:gd name="csY2" fmla="*/ 647700 h 647700"/>
+              <a:gd name="csX0" fmla="*/ 0 w 708660"/>
+              <a:gd name="csY0" fmla="*/ 645160 h 647700"/>
+              <a:gd name="csX1" fmla="*/ 337820 w 708660"/>
+              <a:gd name="csY1" fmla="*/ 0 h 647700"/>
+              <a:gd name="csX2" fmla="*/ 708660 w 708660"/>
+              <a:gd name="csY2" fmla="*/ 647700 h 647700"/>
+              <a:gd name="csX0" fmla="*/ 0 w 708660"/>
+              <a:gd name="csY0" fmla="*/ 645160 h 647700"/>
+              <a:gd name="csX1" fmla="*/ 337820 w 708660"/>
+              <a:gd name="csY1" fmla="*/ 0 h 647700"/>
+              <a:gd name="csX2" fmla="*/ 708660 w 708660"/>
+              <a:gd name="csY2" fmla="*/ 647700 h 647700"/>
+              <a:gd name="csX0" fmla="*/ 0 w 708660"/>
+              <a:gd name="csY0" fmla="*/ 645160 h 647700"/>
+              <a:gd name="csX1" fmla="*/ 337820 w 708660"/>
+              <a:gd name="csY1" fmla="*/ 0 h 647700"/>
+              <a:gd name="csX2" fmla="*/ 708660 w 708660"/>
+              <a:gd name="csY2" fmla="*/ 647700 h 647700"/>
+              <a:gd name="csX0" fmla="*/ 0 w 708660"/>
+              <a:gd name="csY0" fmla="*/ 647058 h 649598"/>
+              <a:gd name="csX1" fmla="*/ 356870 w 708660"/>
+              <a:gd name="csY1" fmla="*/ 0 h 649598"/>
+              <a:gd name="csX2" fmla="*/ 708660 w 708660"/>
+              <a:gd name="csY2" fmla="*/ 649598 h 649598"/>
+              <a:gd name="csX0" fmla="*/ 0 w 704850"/>
+              <a:gd name="csY0" fmla="*/ 647058 h 647058"/>
+              <a:gd name="csX1" fmla="*/ 356870 w 704850"/>
+              <a:gd name="csY1" fmla="*/ 0 h 647058"/>
+              <a:gd name="csX2" fmla="*/ 704850 w 704850"/>
+              <a:gd name="csY2" fmla="*/ 645803 h 647058"/>
+              <a:gd name="csX0" fmla="*/ 0 w 704850"/>
+              <a:gd name="csY0" fmla="*/ 647078 h 647078"/>
+              <a:gd name="csX1" fmla="*/ 356870 w 704850"/>
+              <a:gd name="csY1" fmla="*/ 20 h 647078"/>
+              <a:gd name="csX2" fmla="*/ 704850 w 704850"/>
+              <a:gd name="csY2" fmla="*/ 645823 h 647078"/>
+              <a:gd name="csX0" fmla="*/ 0 w 704850"/>
+              <a:gd name="csY0" fmla="*/ 647078 h 647078"/>
+              <a:gd name="csX1" fmla="*/ 341630 w 704850"/>
+              <a:gd name="csY1" fmla="*/ 20 h 647078"/>
+              <a:gd name="csX2" fmla="*/ 704850 w 704850"/>
+              <a:gd name="csY2" fmla="*/ 645823 h 647078"/>
+              <a:gd name="csX0" fmla="*/ 0 w 704850"/>
+              <a:gd name="csY0" fmla="*/ 647078 h 647078"/>
+              <a:gd name="csX1" fmla="*/ 351155 w 704850"/>
+              <a:gd name="csY1" fmla="*/ 20 h 647078"/>
+              <a:gd name="csX2" fmla="*/ 704850 w 704850"/>
+              <a:gd name="csY2" fmla="*/ 645823 h 647078"/>
+              <a:gd name="csX0" fmla="*/ 0 w 704850"/>
+              <a:gd name="csY0" fmla="*/ 647078 h 647078"/>
+              <a:gd name="csX1" fmla="*/ 351155 w 704850"/>
+              <a:gd name="csY1" fmla="*/ 20 h 647078"/>
+              <a:gd name="csX2" fmla="*/ 704850 w 704850"/>
+              <a:gd name="csY2" fmla="*/ 645823 h 647078"/>
+              <a:gd name="csX0" fmla="*/ 0 w 704850"/>
+              <a:gd name="csY0" fmla="*/ 647078 h 647078"/>
+              <a:gd name="csX1" fmla="*/ 351155 w 704850"/>
+              <a:gd name="csY1" fmla="*/ 20 h 647078"/>
+              <a:gd name="csX2" fmla="*/ 704850 w 704850"/>
+              <a:gd name="csY2" fmla="*/ 645823 h 647078"/>
+              <a:gd name="csX0" fmla="*/ 0 w 704850"/>
+              <a:gd name="csY0" fmla="*/ 647078 h 647078"/>
+              <a:gd name="csX1" fmla="*/ 351155 w 704850"/>
+              <a:gd name="csY1" fmla="*/ 20 h 647078"/>
+              <a:gd name="csX2" fmla="*/ 704850 w 704850"/>
+              <a:gd name="csY2" fmla="*/ 645823 h 647078"/>
+              <a:gd name="csX0" fmla="*/ 0 w 704850"/>
+              <a:gd name="csY0" fmla="*/ 647078 h 647078"/>
+              <a:gd name="csX1" fmla="*/ 351155 w 704850"/>
+              <a:gd name="csY1" fmla="*/ 20 h 647078"/>
+              <a:gd name="csX2" fmla="*/ 704850 w 704850"/>
+              <a:gd name="csY2" fmla="*/ 645823 h 647078"/>
+              <a:gd name="csX0" fmla="*/ 0 w 704850"/>
+              <a:gd name="csY0" fmla="*/ 647078 h 647078"/>
+              <a:gd name="csX1" fmla="*/ 351155 w 704850"/>
+              <a:gd name="csY1" fmla="*/ 20 h 647078"/>
+              <a:gd name="csX2" fmla="*/ 704850 w 704850"/>
+              <a:gd name="csY2" fmla="*/ 645823 h 647078"/>
+              <a:gd name="csX0" fmla="*/ 0 w 704850"/>
+              <a:gd name="csY0" fmla="*/ 647078 h 647078"/>
+              <a:gd name="csX1" fmla="*/ 351155 w 704850"/>
+              <a:gd name="csY1" fmla="*/ 20 h 647078"/>
+              <a:gd name="csX2" fmla="*/ 704850 w 704850"/>
+              <a:gd name="csY2" fmla="*/ 645823 h 647078"/>
+              <a:gd name="csX0" fmla="*/ 0 w 704850"/>
+              <a:gd name="csY0" fmla="*/ 647062 h 647062"/>
+              <a:gd name="csX1" fmla="*/ 351155 w 704850"/>
+              <a:gd name="csY1" fmla="*/ 4 h 647062"/>
+              <a:gd name="csX2" fmla="*/ 704850 w 704850"/>
+              <a:gd name="csY2" fmla="*/ 645807 h 647062"/>
+            </a:gdLst>
+            <a:ahLst/>
+            <a:cxnLst>
+              <a:cxn ang="0">
+                <a:pos x="csX0" y="csY0"/>
+              </a:cxn>
+              <a:cxn ang="0">
+                <a:pos x="csX1" y="csY1"/>
+              </a:cxn>
+              <a:cxn ang="0">
+                <a:pos x="csX2" y="csY2"/>
+              </a:cxn>
+            </a:cxnLst>
+            <a:rect l="l" t="t" r="r" b="b"/>
+            <a:pathLst>
+              <a:path w="704850" h="647062">
+                <a:moveTo>
+                  <a:pt x="0" y="647062"/>
+                </a:moveTo>
+                <a:cubicBezTo>
+                  <a:pt x="69850" y="415353"/>
+                  <a:pt x="191135" y="1478"/>
+                  <a:pt x="351155" y="4"/>
+                </a:cubicBezTo>
+                <a:cubicBezTo>
+                  <a:pt x="511175" y="-1470"/>
+                  <a:pt x="618490" y="408469"/>
+                  <a:pt x="704850" y="645807"/>
+                </a:cubicBezTo>
+              </a:path>
+            </a:pathLst>
+          </a:custGeom>
+          <a:noFill/>
+          <a:ln cap="rnd">
+            <a:solidFill>
+              <a:srgbClr val="086FBD"/>
+            </a:solidFill>
+            <a:round/>
+          </a:ln>
+        </p:spPr>
+        <p:style>
+          <a:lnRef idx="2">
+            <a:schemeClr val="accent1">
+              <a:shade val="15000"/>
+            </a:schemeClr>
+          </a:lnRef>
+          <a:fillRef idx="1">
+            <a:schemeClr val="accent1"/>
+          </a:fillRef>
+          <a:effectRef idx="0">
+            <a:schemeClr val="accent1"/>
+          </a:effectRef>
+          <a:fontRef idx="minor">
+            <a:schemeClr val="lt1"/>
+          </a:fontRef>
+        </p:style>
+        <p:txBody>
+          <a:bodyPr rtlCol="0" anchor="ctr"/>
+          <a:lstStyle/>
+          <a:p>
+            <a:pPr algn="ctr"/>
+            <a:endParaRPr lang="de-DE"/>
+          </a:p>
+        </p:txBody>
+      </p:sp>
+      <p:sp>
+        <p:nvSpPr>
+          <p:cNvPr id="43" name="Freihandform: Form 42">
+            <a:extLst>
+              <a:ext uri="{FF2B5EF4-FFF2-40B4-BE49-F238E27FC236}">
+                <a16:creationId xmlns:a16="http://schemas.microsoft.com/office/drawing/2014/main" id="{2DAA0780-DB64-B40D-E30C-2CDC5874E751}"/>
+              </a:ext>
+            </a:extLst>
+          </p:cNvPr>
+          <p:cNvSpPr/>
+          <p:nvPr/>
+        </p:nvSpPr>
+        <p:spPr>
+          <a:xfrm rot="10800000">
+            <a:off x="1013048" y="1894387"/>
+            <a:ext cx="704850" cy="550980"/>
+          </a:xfrm>
+          <a:custGeom>
+            <a:avLst/>
+            <a:gdLst>
+              <a:gd name="csX0" fmla="*/ 0 w 708660"/>
+              <a:gd name="csY0" fmla="*/ 645160 h 647700"/>
+              <a:gd name="csX1" fmla="*/ 337820 w 708660"/>
+              <a:gd name="csY1" fmla="*/ 0 h 647700"/>
+              <a:gd name="csX2" fmla="*/ 708660 w 708660"/>
+              <a:gd name="csY2" fmla="*/ 647700 h 647700"/>
+              <a:gd name="csX0" fmla="*/ 0 w 708660"/>
+              <a:gd name="csY0" fmla="*/ 645160 h 647700"/>
+              <a:gd name="csX1" fmla="*/ 337820 w 708660"/>
+              <a:gd name="csY1" fmla="*/ 0 h 647700"/>
+              <a:gd name="csX2" fmla="*/ 708660 w 708660"/>
+              <a:gd name="csY2" fmla="*/ 647700 h 647700"/>
+              <a:gd name="csX0" fmla="*/ 0 w 708660"/>
+              <a:gd name="csY0" fmla="*/ 645160 h 647700"/>
+              <a:gd name="csX1" fmla="*/ 337820 w 708660"/>
+              <a:gd name="csY1" fmla="*/ 0 h 647700"/>
+              <a:gd name="csX2" fmla="*/ 708660 w 708660"/>
+              <a:gd name="csY2" fmla="*/ 647700 h 647700"/>
+              <a:gd name="csX0" fmla="*/ 0 w 708660"/>
+              <a:gd name="csY0" fmla="*/ 645160 h 647700"/>
+              <a:gd name="csX1" fmla="*/ 337820 w 708660"/>
+              <a:gd name="csY1" fmla="*/ 0 h 647700"/>
+              <a:gd name="csX2" fmla="*/ 708660 w 708660"/>
+              <a:gd name="csY2" fmla="*/ 647700 h 647700"/>
+              <a:gd name="csX0" fmla="*/ 0 w 708660"/>
+              <a:gd name="csY0" fmla="*/ 647058 h 649598"/>
+              <a:gd name="csX1" fmla="*/ 356870 w 708660"/>
+              <a:gd name="csY1" fmla="*/ 0 h 649598"/>
+              <a:gd name="csX2" fmla="*/ 708660 w 708660"/>
+              <a:gd name="csY2" fmla="*/ 649598 h 649598"/>
+              <a:gd name="csX0" fmla="*/ 0 w 704850"/>
+              <a:gd name="csY0" fmla="*/ 647058 h 647058"/>
+              <a:gd name="csX1" fmla="*/ 356870 w 704850"/>
+              <a:gd name="csY1" fmla="*/ 0 h 647058"/>
+              <a:gd name="csX2" fmla="*/ 704850 w 704850"/>
+              <a:gd name="csY2" fmla="*/ 645803 h 647058"/>
+              <a:gd name="csX0" fmla="*/ 0 w 704850"/>
+              <a:gd name="csY0" fmla="*/ 647078 h 647078"/>
+              <a:gd name="csX1" fmla="*/ 356870 w 704850"/>
+              <a:gd name="csY1" fmla="*/ 20 h 647078"/>
+              <a:gd name="csX2" fmla="*/ 704850 w 704850"/>
+              <a:gd name="csY2" fmla="*/ 645823 h 647078"/>
+              <a:gd name="csX0" fmla="*/ 0 w 704850"/>
+              <a:gd name="csY0" fmla="*/ 647078 h 647078"/>
+              <a:gd name="csX1" fmla="*/ 341630 w 704850"/>
+              <a:gd name="csY1" fmla="*/ 20 h 647078"/>
+              <a:gd name="csX2" fmla="*/ 704850 w 704850"/>
+              <a:gd name="csY2" fmla="*/ 645823 h 647078"/>
+              <a:gd name="csX0" fmla="*/ 0 w 704850"/>
+              <a:gd name="csY0" fmla="*/ 647078 h 647078"/>
+              <a:gd name="csX1" fmla="*/ 351155 w 704850"/>
+              <a:gd name="csY1" fmla="*/ 20 h 647078"/>
+              <a:gd name="csX2" fmla="*/ 704850 w 704850"/>
+              <a:gd name="csY2" fmla="*/ 645823 h 647078"/>
+              <a:gd name="csX0" fmla="*/ 0 w 704850"/>
+              <a:gd name="csY0" fmla="*/ 647078 h 647078"/>
+              <a:gd name="csX1" fmla="*/ 351155 w 704850"/>
+              <a:gd name="csY1" fmla="*/ 20 h 647078"/>
+              <a:gd name="csX2" fmla="*/ 704850 w 704850"/>
+              <a:gd name="csY2" fmla="*/ 645823 h 647078"/>
+              <a:gd name="csX0" fmla="*/ 0 w 704850"/>
+              <a:gd name="csY0" fmla="*/ 647078 h 647078"/>
+              <a:gd name="csX1" fmla="*/ 351155 w 704850"/>
+              <a:gd name="csY1" fmla="*/ 20 h 647078"/>
+              <a:gd name="csX2" fmla="*/ 704850 w 704850"/>
+              <a:gd name="csY2" fmla="*/ 645823 h 647078"/>
+              <a:gd name="csX0" fmla="*/ 0 w 704850"/>
+              <a:gd name="csY0" fmla="*/ 647078 h 647078"/>
+              <a:gd name="csX1" fmla="*/ 351155 w 704850"/>
+              <a:gd name="csY1" fmla="*/ 20 h 647078"/>
+              <a:gd name="csX2" fmla="*/ 704850 w 704850"/>
+              <a:gd name="csY2" fmla="*/ 645823 h 647078"/>
+              <a:gd name="csX0" fmla="*/ 0 w 704850"/>
+              <a:gd name="csY0" fmla="*/ 647078 h 647078"/>
+              <a:gd name="csX1" fmla="*/ 351155 w 704850"/>
+              <a:gd name="csY1" fmla="*/ 20 h 647078"/>
+              <a:gd name="csX2" fmla="*/ 704850 w 704850"/>
+              <a:gd name="csY2" fmla="*/ 645823 h 647078"/>
+              <a:gd name="csX0" fmla="*/ 0 w 704850"/>
+              <a:gd name="csY0" fmla="*/ 647078 h 647078"/>
+              <a:gd name="csX1" fmla="*/ 351155 w 704850"/>
+              <a:gd name="csY1" fmla="*/ 20 h 647078"/>
+              <a:gd name="csX2" fmla="*/ 704850 w 704850"/>
+              <a:gd name="csY2" fmla="*/ 645823 h 647078"/>
+              <a:gd name="csX0" fmla="*/ 0 w 704850"/>
+              <a:gd name="csY0" fmla="*/ 647078 h 647078"/>
+              <a:gd name="csX1" fmla="*/ 351155 w 704850"/>
+              <a:gd name="csY1" fmla="*/ 20 h 647078"/>
+              <a:gd name="csX2" fmla="*/ 704850 w 704850"/>
+              <a:gd name="csY2" fmla="*/ 645823 h 647078"/>
+              <a:gd name="csX0" fmla="*/ 0 w 704850"/>
+              <a:gd name="csY0" fmla="*/ 647062 h 647062"/>
+              <a:gd name="csX1" fmla="*/ 351155 w 704850"/>
+              <a:gd name="csY1" fmla="*/ 4 h 647062"/>
+              <a:gd name="csX2" fmla="*/ 704850 w 704850"/>
+              <a:gd name="csY2" fmla="*/ 645807 h 647062"/>
+            </a:gdLst>
+            <a:ahLst/>
+            <a:cxnLst>
+              <a:cxn ang="0">
+                <a:pos x="csX0" y="csY0"/>
+              </a:cxn>
+              <a:cxn ang="0">
+                <a:pos x="csX1" y="csY1"/>
+              </a:cxn>
+              <a:cxn ang="0">
+                <a:pos x="csX2" y="csY2"/>
+              </a:cxn>
+            </a:cxnLst>
+            <a:rect l="l" t="t" r="r" b="b"/>
+            <a:pathLst>
+              <a:path w="704850" h="647062">
+                <a:moveTo>
+                  <a:pt x="0" y="647062"/>
+                </a:moveTo>
+                <a:cubicBezTo>
+                  <a:pt x="69850" y="415353"/>
+                  <a:pt x="191135" y="1478"/>
+                  <a:pt x="351155" y="4"/>
+                </a:cubicBezTo>
+                <a:cubicBezTo>
+                  <a:pt x="511175" y="-1470"/>
+                  <a:pt x="618490" y="408469"/>
+                  <a:pt x="704850" y="645807"/>
+                </a:cubicBezTo>
+              </a:path>
+            </a:pathLst>
+          </a:custGeom>
+          <a:noFill/>
+          <a:ln cap="rnd">
+            <a:solidFill>
+              <a:srgbClr val="FF0000"/>
+            </a:solidFill>
+            <a:round/>
+          </a:ln>
+        </p:spPr>
+        <p:style>
+          <a:lnRef idx="2">
+            <a:schemeClr val="accent1">
+              <a:shade val="15000"/>
+            </a:schemeClr>
+          </a:lnRef>
+          <a:fillRef idx="1">
+            <a:schemeClr val="accent1"/>
+          </a:fillRef>
+          <a:effectRef idx="0">
+            <a:schemeClr val="accent1"/>
+          </a:effectRef>
+          <a:fontRef idx="minor">
+            <a:schemeClr val="lt1"/>
+          </a:fontRef>
+        </p:style>
+        <p:txBody>
+          <a:bodyPr rtlCol="0" anchor="ctr"/>
+          <a:lstStyle/>
+          <a:p>
+            <a:pPr algn="ctr"/>
+            <a:endParaRPr lang="de-DE"/>
+          </a:p>
+        </p:txBody>
+      </p:sp>
+      <p:cxnSp>
+        <p:nvCxnSpPr>
+          <p:cNvPr id="6" name="Gerade Verbindung mit Pfeil 5">
+            <a:extLst>
+              <a:ext uri="{FF2B5EF4-FFF2-40B4-BE49-F238E27FC236}">
+                <a16:creationId xmlns:a16="http://schemas.microsoft.com/office/drawing/2014/main" id="{E53011E3-E7C4-9787-C9D2-8AF727EC97F7}"/>
+              </a:ext>
+            </a:extLst>
+          </p:cNvPr>
+          <p:cNvCxnSpPr>
+            <a:cxnSpLocks/>
+          </p:cNvCxnSpPr>
+          <p:nvPr/>
+        </p:nvCxnSpPr>
+        <p:spPr>
+          <a:xfrm>
+            <a:off x="308244" y="1893579"/>
+            <a:ext cx="2027286" cy="0"/>
+          </a:xfrm>
+          <a:prstGeom prst="straightConnector1">
+            <a:avLst/>
+          </a:prstGeom>
+          <a:ln cap="rnd">
+            <a:solidFill>
+              <a:schemeClr val="tx1"/>
+            </a:solidFill>
+            <a:round/>
+            <a:tailEnd type="triangle" w="med" len="med"/>
+          </a:ln>
+        </p:spPr>
+        <p:style>
+          <a:lnRef idx="2">
+            <a:schemeClr val="accent1"/>
+          </a:lnRef>
+          <a:fillRef idx="0">
+            <a:schemeClr val="accent1"/>
+          </a:fillRef>
+          <a:effectRef idx="1">
+            <a:schemeClr val="accent1"/>
+          </a:effectRef>
+          <a:fontRef idx="minor">
+            <a:schemeClr val="tx1"/>
+          </a:fontRef>
+        </p:style>
+      </p:cxnSp>
+      <p:cxnSp>
+        <p:nvCxnSpPr>
+          <p:cNvPr id="29" name="Gerader Verbinder 28">
+            <a:extLst>
+              <a:ext uri="{FF2B5EF4-FFF2-40B4-BE49-F238E27FC236}">
+                <a16:creationId xmlns:a16="http://schemas.microsoft.com/office/drawing/2014/main" id="{51731B84-72A5-BD0B-1289-B9D060386DDD}"/>
+              </a:ext>
+            </a:extLst>
+          </p:cNvPr>
+          <p:cNvCxnSpPr>
+            <a:cxnSpLocks/>
+          </p:cNvCxnSpPr>
+          <p:nvPr/>
+        </p:nvCxnSpPr>
+        <p:spPr>
+          <a:xfrm flipH="1">
+            <a:off x="2297430" y="1893573"/>
+            <a:ext cx="1074054" cy="0"/>
+          </a:xfrm>
+          <a:prstGeom prst="line">
+            <a:avLst/>
+          </a:prstGeom>
+          <a:ln w="9525" cap="rnd">
+            <a:solidFill>
+              <a:schemeClr val="tx1"/>
+            </a:solidFill>
+            <a:prstDash val="sysDash"/>
+            <a:round/>
+          </a:ln>
+        </p:spPr>
+        <p:style>
+          <a:lnRef idx="2">
+            <a:schemeClr val="accent1"/>
+          </a:lnRef>
+          <a:fillRef idx="0">
+            <a:schemeClr val="accent1"/>
+          </a:fillRef>
+          <a:effectRef idx="1">
+            <a:schemeClr val="accent1"/>
+          </a:effectRef>
+          <a:fontRef idx="minor">
+            <a:schemeClr val="tx1"/>
+          </a:fontRef>
+        </p:style>
+      </p:cxnSp>
+      <p:cxnSp>
+        <p:nvCxnSpPr>
+          <p:cNvPr id="48" name="Gerade Verbindung mit Pfeil 47">
+            <a:extLst>
+              <a:ext uri="{FF2B5EF4-FFF2-40B4-BE49-F238E27FC236}">
+                <a16:creationId xmlns:a16="http://schemas.microsoft.com/office/drawing/2014/main" id="{A58C4E78-4B1A-C63A-9C3A-F216FE1F29FE}"/>
+              </a:ext>
+            </a:extLst>
+          </p:cNvPr>
+          <p:cNvCxnSpPr>
+            <a:cxnSpLocks/>
+          </p:cNvCxnSpPr>
+          <p:nvPr/>
+        </p:nvCxnSpPr>
+        <p:spPr>
+          <a:xfrm flipV="1">
+            <a:off x="466725" y="1813560"/>
+            <a:ext cx="0" cy="160020"/>
+          </a:xfrm>
+          <a:prstGeom prst="straightConnector1">
+            <a:avLst/>
+          </a:prstGeom>
+          <a:ln cap="rnd">
+            <a:solidFill>
+              <a:schemeClr val="accent5"/>
+            </a:solidFill>
+            <a:round/>
+            <a:tailEnd type="none" w="med" len="med"/>
+          </a:ln>
+        </p:spPr>
+        <p:style>
+          <a:lnRef idx="2">
+            <a:schemeClr val="accent1"/>
+          </a:lnRef>
+          <a:fillRef idx="0">
+            <a:schemeClr val="accent1"/>
+          </a:fillRef>
+          <a:effectRef idx="1">
+            <a:schemeClr val="accent1"/>
+          </a:effectRef>
+          <a:fontRef idx="minor">
+            <a:schemeClr val="tx1"/>
+          </a:fontRef>
+        </p:style>
+      </p:cxnSp>
+      <p:cxnSp>
+        <p:nvCxnSpPr>
+          <p:cNvPr id="53" name="Gerade Verbindung mit Pfeil 52">
+            <a:extLst>
+              <a:ext uri="{FF2B5EF4-FFF2-40B4-BE49-F238E27FC236}">
+                <a16:creationId xmlns:a16="http://schemas.microsoft.com/office/drawing/2014/main" id="{2FC5465C-510E-B982-B757-04281E081D62}"/>
+              </a:ext>
+            </a:extLst>
+          </p:cNvPr>
+          <p:cNvCxnSpPr>
+            <a:cxnSpLocks/>
+          </p:cNvCxnSpPr>
+          <p:nvPr/>
+        </p:nvCxnSpPr>
+        <p:spPr>
+          <a:xfrm flipV="1">
+            <a:off x="1361617" y="1813560"/>
+            <a:ext cx="0" cy="160020"/>
+          </a:xfrm>
+          <a:prstGeom prst="straightConnector1">
+            <a:avLst/>
+          </a:prstGeom>
+          <a:ln cap="rnd">
+            <a:solidFill>
+              <a:schemeClr val="accent6">
+                <a:lumMod val="75000"/>
+              </a:schemeClr>
+            </a:solidFill>
+            <a:round/>
+            <a:tailEnd type="none" w="med" len="med"/>
+          </a:ln>
+        </p:spPr>
+        <p:style>
+          <a:lnRef idx="2">
+            <a:schemeClr val="accent1"/>
+          </a:lnRef>
+          <a:fillRef idx="0">
+            <a:schemeClr val="accent1"/>
+          </a:fillRef>
+          <a:effectRef idx="1">
+            <a:schemeClr val="accent1"/>
+          </a:effectRef>
+          <a:fontRef idx="minor">
+            <a:schemeClr val="tx1"/>
+          </a:fontRef>
+        </p:style>
+      </p:cxnSp>
+      <p:cxnSp>
+        <p:nvCxnSpPr>
+          <p:cNvPr id="54" name="Gerade Verbindung mit Pfeil 53">
+            <a:extLst>
+              <a:ext uri="{FF2B5EF4-FFF2-40B4-BE49-F238E27FC236}">
+                <a16:creationId xmlns:a16="http://schemas.microsoft.com/office/drawing/2014/main" id="{398E442E-5F87-3B07-8150-74BCC44F83B8}"/>
+              </a:ext>
+            </a:extLst>
+          </p:cNvPr>
+          <p:cNvCxnSpPr>
+            <a:cxnSpLocks/>
+          </p:cNvCxnSpPr>
+          <p:nvPr/>
+        </p:nvCxnSpPr>
+        <p:spPr>
+          <a:xfrm flipV="1">
+            <a:off x="1717852" y="1813560"/>
+            <a:ext cx="0" cy="160020"/>
+          </a:xfrm>
+          <a:prstGeom prst="straightConnector1">
+            <a:avLst/>
+          </a:prstGeom>
+          <a:ln cap="rnd">
+            <a:solidFill>
+              <a:schemeClr val="accent6">
+                <a:lumMod val="75000"/>
+              </a:schemeClr>
+            </a:solidFill>
+            <a:round/>
+            <a:tailEnd type="none" w="med" len="med"/>
+          </a:ln>
+        </p:spPr>
+        <p:style>
+          <a:lnRef idx="2">
+            <a:schemeClr val="accent1"/>
+          </a:lnRef>
+          <a:fillRef idx="0">
+            <a:schemeClr val="accent1"/>
+          </a:fillRef>
+          <a:effectRef idx="1">
+            <a:schemeClr val="accent1"/>
+          </a:effectRef>
+          <a:fontRef idx="minor">
+            <a:schemeClr val="tx1"/>
+          </a:fontRef>
+        </p:style>
+      </p:cxnSp>
+      <p:cxnSp>
+        <p:nvCxnSpPr>
+          <p:cNvPr id="55" name="Gerader Verbinder 54">
+            <a:extLst>
+              <a:ext uri="{FF2B5EF4-FFF2-40B4-BE49-F238E27FC236}">
+                <a16:creationId xmlns:a16="http://schemas.microsoft.com/office/drawing/2014/main" id="{C02DA36F-DF01-C892-EEE2-33694E39A18C}"/>
+              </a:ext>
+            </a:extLst>
+          </p:cNvPr>
+          <p:cNvCxnSpPr>
+            <a:cxnSpLocks/>
+          </p:cNvCxnSpPr>
+          <p:nvPr/>
+        </p:nvCxnSpPr>
+        <p:spPr>
+          <a:xfrm flipV="1">
+            <a:off x="1361617" y="1956435"/>
+            <a:ext cx="0" cy="661035"/>
+          </a:xfrm>
+          <a:prstGeom prst="line">
+            <a:avLst/>
+          </a:prstGeom>
+          <a:ln w="9525" cap="rnd">
+            <a:solidFill>
+              <a:schemeClr val="accent6">
+                <a:lumMod val="75000"/>
+              </a:schemeClr>
+            </a:solidFill>
+            <a:prstDash val="sysDash"/>
+            <a:round/>
+          </a:ln>
+        </p:spPr>
+        <p:style>
+          <a:lnRef idx="2">
+            <a:schemeClr val="accent1"/>
+          </a:lnRef>
+          <a:fillRef idx="0">
+            <a:schemeClr val="accent1"/>
+          </a:fillRef>
+          <a:effectRef idx="1">
+            <a:schemeClr val="accent1"/>
+          </a:effectRef>
+          <a:fontRef idx="minor">
+            <a:schemeClr val="tx1"/>
+          </a:fontRef>
+        </p:style>
+      </p:cxnSp>
+      <p:cxnSp>
+        <p:nvCxnSpPr>
+          <p:cNvPr id="58" name="Gerader Verbinder 57">
+            <a:extLst>
+              <a:ext uri="{FF2B5EF4-FFF2-40B4-BE49-F238E27FC236}">
+                <a16:creationId xmlns:a16="http://schemas.microsoft.com/office/drawing/2014/main" id="{7AF26E85-E154-D88B-30DB-C69FC5192D9A}"/>
+              </a:ext>
+            </a:extLst>
+          </p:cNvPr>
+          <p:cNvCxnSpPr>
+            <a:cxnSpLocks/>
+          </p:cNvCxnSpPr>
+          <p:nvPr/>
+        </p:nvCxnSpPr>
+        <p:spPr>
+          <a:xfrm flipV="1">
+            <a:off x="1717852" y="1956435"/>
+            <a:ext cx="0" cy="661035"/>
+          </a:xfrm>
+          <a:prstGeom prst="line">
+            <a:avLst/>
+          </a:prstGeom>
+          <a:ln w="9525" cap="rnd">
+            <a:solidFill>
+              <a:schemeClr val="accent6">
+                <a:lumMod val="75000"/>
+              </a:schemeClr>
+            </a:solidFill>
+            <a:prstDash val="sysDash"/>
+            <a:round/>
+          </a:ln>
+        </p:spPr>
+        <p:style>
+          <a:lnRef idx="2">
+            <a:schemeClr val="accent1"/>
+          </a:lnRef>
+          <a:fillRef idx="0">
+            <a:schemeClr val="accent1"/>
+          </a:fillRef>
+          <a:effectRef idx="1">
+            <a:schemeClr val="accent1"/>
+          </a:effectRef>
+          <a:fontRef idx="minor">
+            <a:schemeClr val="tx1"/>
+          </a:fontRef>
+        </p:style>
+      </p:cxnSp>
+      <p:cxnSp>
+        <p:nvCxnSpPr>
+          <p:cNvPr id="64" name="Gerade Verbindung mit Pfeil 63">
+            <a:extLst>
+              <a:ext uri="{FF2B5EF4-FFF2-40B4-BE49-F238E27FC236}">
+                <a16:creationId xmlns:a16="http://schemas.microsoft.com/office/drawing/2014/main" id="{2CBD2992-62C5-4BF3-763A-7E52405BFDCB}"/>
+              </a:ext>
+            </a:extLst>
+          </p:cNvPr>
+          <p:cNvCxnSpPr>
+            <a:cxnSpLocks/>
+          </p:cNvCxnSpPr>
+          <p:nvPr/>
+        </p:nvCxnSpPr>
+        <p:spPr>
+          <a:xfrm>
+            <a:off x="1361617" y="2570156"/>
+            <a:ext cx="356235" cy="0"/>
+          </a:xfrm>
+          <a:prstGeom prst="straightConnector1">
+            <a:avLst/>
+          </a:prstGeom>
+          <a:ln cap="rnd">
+            <a:solidFill>
+              <a:schemeClr val="accent6">
+                <a:lumMod val="75000"/>
+              </a:schemeClr>
+            </a:solidFill>
+            <a:round/>
+            <a:headEnd type="triangle" w="sm" len="med"/>
+            <a:tailEnd type="triangle" w="sm" len="med"/>
+          </a:ln>
+        </p:spPr>
+        <p:style>
+          <a:lnRef idx="2">
+            <a:schemeClr val="accent1"/>
+          </a:lnRef>
+          <a:fillRef idx="0">
+            <a:schemeClr val="accent1"/>
+          </a:fillRef>
+          <a:effectRef idx="1">
+            <a:schemeClr val="accent1"/>
+          </a:effectRef>
+          <a:fontRef idx="minor">
+            <a:schemeClr val="tx1"/>
+          </a:fontRef>
+        </p:style>
+      </p:cxnSp>
+      <p:cxnSp>
+        <p:nvCxnSpPr>
+          <p:cNvPr id="68" name="Gerader Verbinder 67">
+            <a:extLst>
+              <a:ext uri="{FF2B5EF4-FFF2-40B4-BE49-F238E27FC236}">
+                <a16:creationId xmlns:a16="http://schemas.microsoft.com/office/drawing/2014/main" id="{A6116AC3-D03C-F1B2-1762-6E5EB06AF015}"/>
+              </a:ext>
+            </a:extLst>
+          </p:cNvPr>
+          <p:cNvCxnSpPr>
+            <a:cxnSpLocks/>
+          </p:cNvCxnSpPr>
+          <p:nvPr/>
+        </p:nvCxnSpPr>
+        <p:spPr>
+          <a:xfrm flipV="1">
+            <a:off x="466725" y="1245153"/>
+            <a:ext cx="0" cy="585552"/>
+          </a:xfrm>
+          <a:prstGeom prst="line">
+            <a:avLst/>
+          </a:prstGeom>
+          <a:ln w="9525" cap="rnd">
+            <a:solidFill>
+              <a:schemeClr val="accent5"/>
+            </a:solidFill>
+            <a:prstDash val="sysDash"/>
+            <a:round/>
+          </a:ln>
+        </p:spPr>
+        <p:style>
+          <a:lnRef idx="2">
+            <a:schemeClr val="accent1"/>
+          </a:lnRef>
+          <a:fillRef idx="0">
+            <a:schemeClr val="accent1"/>
+          </a:fillRef>
+          <a:effectRef idx="1">
+            <a:schemeClr val="accent1"/>
+          </a:effectRef>
+          <a:fontRef idx="minor">
+            <a:schemeClr val="tx1"/>
+          </a:fontRef>
+        </p:style>
+      </p:cxnSp>
+      <p:sp>
+        <p:nvSpPr>
+          <p:cNvPr id="14" name="Textfeld 13">
+            <a:extLst>
+              <a:ext uri="{FF2B5EF4-FFF2-40B4-BE49-F238E27FC236}">
+                <a16:creationId xmlns:a16="http://schemas.microsoft.com/office/drawing/2014/main" id="{4BDBF56C-0E50-30A1-133F-99F501D860FA}"/>
+              </a:ext>
+            </a:extLst>
+          </p:cNvPr>
+          <p:cNvSpPr txBox="1"/>
+          <p:nvPr/>
+        </p:nvSpPr>
+        <p:spPr>
+          <a:xfrm>
+            <a:off x="2022380" y="1245153"/>
+            <a:ext cx="518786" cy="261610"/>
+          </a:xfrm>
+          <a:prstGeom prst="rect">
+            <a:avLst/>
+          </a:prstGeom>
+          <a:noFill/>
+        </p:spPr>
+        <p:txBody>
+          <a:bodyPr wrap="square" rtlCol="0">
+            <a:spAutoFit/>
+          </a:bodyPr>
+          <a:lstStyle/>
+          <a:p>
+            <a:pPr algn="ctr"/>
+            <a:r>
+              <a:rPr lang="de-DE" sz="1100" i="1" dirty="0">
+                <a:solidFill>
+                  <a:srgbClr val="FF0000"/>
+                </a:solidFill>
+                <a:latin typeface="CMU Serif" panose="02000603000000000000" pitchFamily="2" charset="0"/>
+                <a:ea typeface="CMU Serif" panose="02000603000000000000" pitchFamily="2" charset="0"/>
+                <a:cs typeface="CMU Serif" panose="02000603000000000000" pitchFamily="2" charset="0"/>
+              </a:rPr>
+              <a:t>i</a:t>
+            </a:r>
+            <a:r>
+              <a:rPr lang="de-DE" sz="1100" baseline="-25000" dirty="0">
+                <a:solidFill>
+                  <a:srgbClr val="FF0000"/>
+                </a:solidFill>
+                <a:latin typeface="CMU Serif" panose="02000603000000000000" pitchFamily="2" charset="0"/>
+                <a:ea typeface="CMU Serif" panose="02000603000000000000" pitchFamily="2" charset="0"/>
+                <a:cs typeface="CMU Serif" panose="02000603000000000000" pitchFamily="2" charset="0"/>
+              </a:rPr>
+              <a:t>L</a:t>
+            </a:r>
+            <a:r>
+              <a:rPr lang="de-DE" sz="1100" dirty="0">
+                <a:solidFill>
+                  <a:srgbClr val="FF0000"/>
+                </a:solidFill>
+                <a:latin typeface="CMU Serif" panose="02000603000000000000" pitchFamily="2" charset="0"/>
+                <a:ea typeface="CMU Serif" panose="02000603000000000000" pitchFamily="2" charset="0"/>
+                <a:cs typeface="CMU Serif" panose="02000603000000000000" pitchFamily="2" charset="0"/>
+              </a:rPr>
+              <a:t>(</a:t>
+            </a:r>
+            <a:r>
+              <a:rPr lang="de-DE" sz="1100" i="1" dirty="0">
+                <a:solidFill>
+                  <a:srgbClr val="FF0000"/>
+                </a:solidFill>
+                <a:latin typeface="CMU Serif" panose="02000603000000000000" pitchFamily="2" charset="0"/>
+                <a:ea typeface="CMU Serif" panose="02000603000000000000" pitchFamily="2" charset="0"/>
+                <a:cs typeface="CMU Serif" panose="02000603000000000000" pitchFamily="2" charset="0"/>
+              </a:rPr>
+              <a:t>t</a:t>
+            </a:r>
+            <a:r>
+              <a:rPr lang="de-DE" sz="1100" dirty="0">
+                <a:solidFill>
+                  <a:srgbClr val="FF0000"/>
+                </a:solidFill>
+                <a:latin typeface="CMU Serif" panose="02000603000000000000" pitchFamily="2" charset="0"/>
+                <a:ea typeface="CMU Serif" panose="02000603000000000000" pitchFamily="2" charset="0"/>
+                <a:cs typeface="CMU Serif" panose="02000603000000000000" pitchFamily="2" charset="0"/>
+              </a:rPr>
+              <a:t>)</a:t>
+            </a:r>
+            <a:endParaRPr lang="de-DE" sz="1100" baseline="-25000" dirty="0">
+              <a:solidFill>
+                <a:srgbClr val="FF0000"/>
+              </a:solidFill>
+              <a:latin typeface="CMU Serif" panose="02000603000000000000" pitchFamily="2" charset="0"/>
+              <a:ea typeface="CMU Serif" panose="02000603000000000000" pitchFamily="2" charset="0"/>
+              <a:cs typeface="CMU Serif" panose="02000603000000000000" pitchFamily="2" charset="0"/>
+            </a:endParaRPr>
+          </a:p>
+        </p:txBody>
+      </p:sp>
+      <p:sp>
+        <p:nvSpPr>
+          <p:cNvPr id="13" name="Textfeld 12">
+            <a:extLst>
+              <a:ext uri="{FF2B5EF4-FFF2-40B4-BE49-F238E27FC236}">
+                <a16:creationId xmlns:a16="http://schemas.microsoft.com/office/drawing/2014/main" id="{55CB53E3-3102-DD01-2AC0-5C20BB777B99}"/>
+              </a:ext>
+            </a:extLst>
+          </p:cNvPr>
+          <p:cNvSpPr txBox="1"/>
+          <p:nvPr/>
+        </p:nvSpPr>
+        <p:spPr>
+          <a:xfrm>
+            <a:off x="1714042" y="920495"/>
+            <a:ext cx="567731" cy="261610"/>
+          </a:xfrm>
+          <a:prstGeom prst="rect">
+            <a:avLst/>
+          </a:prstGeom>
+          <a:noFill/>
+        </p:spPr>
+        <p:txBody>
+          <a:bodyPr wrap="square" rtlCol="0">
+            <a:spAutoFit/>
+          </a:bodyPr>
+          <a:lstStyle/>
+          <a:p>
+            <a:pPr algn="ctr"/>
+            <a:r>
+              <a:rPr lang="de-DE" sz="1100" i="1" dirty="0">
+                <a:solidFill>
+                  <a:srgbClr val="086FBD"/>
+                </a:solidFill>
+                <a:latin typeface="CMU Serif" panose="02000603000000000000" pitchFamily="2" charset="0"/>
+                <a:ea typeface="CMU Serif" panose="02000603000000000000" pitchFamily="2" charset="0"/>
+                <a:cs typeface="CMU Serif" panose="02000603000000000000" pitchFamily="2" charset="0"/>
+              </a:rPr>
+              <a:t>u</a:t>
+            </a:r>
+            <a:r>
+              <a:rPr lang="de-DE" sz="1100" baseline="-25000" dirty="0">
+                <a:solidFill>
+                  <a:srgbClr val="086FBD"/>
+                </a:solidFill>
+                <a:latin typeface="CMU Serif" panose="02000603000000000000" pitchFamily="2" charset="0"/>
+                <a:ea typeface="CMU Serif" panose="02000603000000000000" pitchFamily="2" charset="0"/>
+                <a:cs typeface="CMU Serif" panose="02000603000000000000" pitchFamily="2" charset="0"/>
+              </a:rPr>
+              <a:t>L</a:t>
+            </a:r>
+            <a:r>
+              <a:rPr lang="de-DE" sz="1100" dirty="0">
+                <a:solidFill>
+                  <a:srgbClr val="086FBD"/>
+                </a:solidFill>
+                <a:latin typeface="CMU Serif" panose="02000603000000000000" pitchFamily="2" charset="0"/>
+                <a:ea typeface="CMU Serif" panose="02000603000000000000" pitchFamily="2" charset="0"/>
+                <a:cs typeface="CMU Serif" panose="02000603000000000000" pitchFamily="2" charset="0"/>
+              </a:rPr>
+              <a:t>(</a:t>
+            </a:r>
+            <a:r>
+              <a:rPr lang="de-DE" sz="1100" i="1" dirty="0">
+                <a:solidFill>
+                  <a:srgbClr val="086FBD"/>
+                </a:solidFill>
+                <a:latin typeface="CMU Serif" panose="02000603000000000000" pitchFamily="2" charset="0"/>
+                <a:ea typeface="CMU Serif" panose="02000603000000000000" pitchFamily="2" charset="0"/>
+                <a:cs typeface="CMU Serif" panose="02000603000000000000" pitchFamily="2" charset="0"/>
+              </a:rPr>
+              <a:t>t</a:t>
+            </a:r>
+            <a:r>
+              <a:rPr lang="de-DE" sz="1100" dirty="0">
+                <a:solidFill>
+                  <a:srgbClr val="086FBD"/>
+                </a:solidFill>
+                <a:latin typeface="CMU Serif" panose="02000603000000000000" pitchFamily="2" charset="0"/>
+                <a:ea typeface="CMU Serif" panose="02000603000000000000" pitchFamily="2" charset="0"/>
+                <a:cs typeface="CMU Serif" panose="02000603000000000000" pitchFamily="2" charset="0"/>
+              </a:rPr>
+              <a:t>)</a:t>
+            </a:r>
+            <a:endParaRPr lang="de-DE" sz="1100" baseline="-25000" dirty="0">
+              <a:solidFill>
+                <a:srgbClr val="086FBD"/>
+              </a:solidFill>
+              <a:latin typeface="CMU Serif" panose="02000603000000000000" pitchFamily="2" charset="0"/>
+              <a:ea typeface="CMU Serif" panose="02000603000000000000" pitchFamily="2" charset="0"/>
+              <a:cs typeface="CMU Serif" panose="02000603000000000000" pitchFamily="2" charset="0"/>
+            </a:endParaRPr>
+          </a:p>
+        </p:txBody>
+      </p:sp>
+      <p:sp>
+        <p:nvSpPr>
+          <p:cNvPr id="70" name="Textfeld 69">
+            <a:extLst>
+              <a:ext uri="{FF2B5EF4-FFF2-40B4-BE49-F238E27FC236}">
+                <a16:creationId xmlns:a16="http://schemas.microsoft.com/office/drawing/2014/main" id="{5CCD6CA5-A637-EF8F-1F6C-A8600159B9AE}"/>
+              </a:ext>
+            </a:extLst>
+          </p:cNvPr>
+          <p:cNvSpPr txBox="1"/>
+          <p:nvPr/>
+        </p:nvSpPr>
+        <p:spPr>
+          <a:xfrm>
+            <a:off x="2076137" y="1905639"/>
+            <a:ext cx="518786" cy="261610"/>
+          </a:xfrm>
+          <a:prstGeom prst="rect">
+            <a:avLst/>
+          </a:prstGeom>
+          <a:noFill/>
+        </p:spPr>
+        <p:txBody>
+          <a:bodyPr wrap="square" rtlCol="0">
+            <a:spAutoFit/>
+          </a:bodyPr>
+          <a:lstStyle/>
+          <a:p>
+            <a:pPr algn="ctr"/>
+            <a:r>
+              <a:rPr lang="de-DE" sz="1100" i="1" dirty="0">
+                <a:latin typeface="CMU Serif" panose="02000603000000000000" pitchFamily="2" charset="0"/>
+                <a:ea typeface="CMU Serif" panose="02000603000000000000" pitchFamily="2" charset="0"/>
+                <a:cs typeface="CMU Serif" panose="02000603000000000000" pitchFamily="2" charset="0"/>
+              </a:rPr>
+              <a:t>t</a:t>
+            </a:r>
+            <a:endParaRPr lang="de-DE" sz="1100" baseline="-25000" dirty="0">
+              <a:latin typeface="CMU Serif" panose="02000603000000000000" pitchFamily="2" charset="0"/>
+              <a:ea typeface="CMU Serif" panose="02000603000000000000" pitchFamily="2" charset="0"/>
+              <a:cs typeface="CMU Serif" panose="02000603000000000000" pitchFamily="2" charset="0"/>
+            </a:endParaRPr>
+          </a:p>
+        </p:txBody>
+      </p:sp>
+      <p:sp>
+        <p:nvSpPr>
+          <p:cNvPr id="71" name="Textfeld 70">
+            <a:extLst>
+              <a:ext uri="{FF2B5EF4-FFF2-40B4-BE49-F238E27FC236}">
+                <a16:creationId xmlns:a16="http://schemas.microsoft.com/office/drawing/2014/main" id="{7E58C5D5-89B7-2D02-CDA6-695F0EDBA392}"/>
+              </a:ext>
+            </a:extLst>
+          </p:cNvPr>
+          <p:cNvSpPr txBox="1"/>
+          <p:nvPr/>
+        </p:nvSpPr>
+        <p:spPr>
+          <a:xfrm>
+            <a:off x="265340" y="849727"/>
+            <a:ext cx="567731" cy="261610"/>
+          </a:xfrm>
+          <a:prstGeom prst="rect">
+            <a:avLst/>
+          </a:prstGeom>
+          <a:noFill/>
+        </p:spPr>
+        <p:txBody>
+          <a:bodyPr wrap="square" rtlCol="0">
+            <a:spAutoFit/>
+          </a:bodyPr>
+          <a:lstStyle/>
+          <a:p>
+            <a:pPr algn="ctr"/>
+            <a:r>
+              <a:rPr lang="de-DE" sz="1100" i="1" dirty="0">
+                <a:solidFill>
+                  <a:srgbClr val="086FBD"/>
+                </a:solidFill>
+                <a:latin typeface="CMU Serif" panose="02000603000000000000" pitchFamily="2" charset="0"/>
+                <a:ea typeface="CMU Serif" panose="02000603000000000000" pitchFamily="2" charset="0"/>
+                <a:cs typeface="CMU Serif" panose="02000603000000000000" pitchFamily="2" charset="0"/>
+              </a:rPr>
+              <a:t>u</a:t>
+            </a:r>
+            <a:r>
+              <a:rPr lang="de-DE" sz="500" dirty="0">
+                <a:solidFill>
+                  <a:srgbClr val="086FBD"/>
+                </a:solidFill>
+                <a:latin typeface="CMU Serif" panose="02000603000000000000" pitchFamily="2" charset="0"/>
+                <a:ea typeface="CMU Serif" panose="02000603000000000000" pitchFamily="2" charset="0"/>
+                <a:cs typeface="CMU Serif" panose="02000603000000000000" pitchFamily="2" charset="0"/>
+              </a:rPr>
+              <a:t> </a:t>
+            </a:r>
+            <a:r>
+              <a:rPr lang="de-DE" sz="1100" dirty="0">
+                <a:latin typeface="CMU Serif" panose="02000603000000000000" pitchFamily="2" charset="0"/>
+                <a:ea typeface="CMU Serif" panose="02000603000000000000" pitchFamily="2" charset="0"/>
+                <a:cs typeface="CMU Serif" panose="02000603000000000000" pitchFamily="2" charset="0"/>
+              </a:rPr>
+              <a:t>/</a:t>
+            </a:r>
+            <a:r>
+              <a:rPr lang="de-DE" sz="500" dirty="0">
+                <a:solidFill>
+                  <a:srgbClr val="086FBD"/>
+                </a:solidFill>
+                <a:latin typeface="CMU Serif" panose="02000603000000000000" pitchFamily="2" charset="0"/>
+                <a:ea typeface="CMU Serif" panose="02000603000000000000" pitchFamily="2" charset="0"/>
+                <a:cs typeface="CMU Serif" panose="02000603000000000000" pitchFamily="2" charset="0"/>
+              </a:rPr>
+              <a:t> </a:t>
+            </a:r>
+            <a:r>
+              <a:rPr lang="de-DE" sz="1100" i="1" dirty="0">
+                <a:solidFill>
+                  <a:srgbClr val="FF0000"/>
+                </a:solidFill>
+                <a:latin typeface="CMU Serif" panose="02000603000000000000" pitchFamily="2" charset="0"/>
+                <a:ea typeface="CMU Serif" panose="02000603000000000000" pitchFamily="2" charset="0"/>
+                <a:cs typeface="CMU Serif" panose="02000603000000000000" pitchFamily="2" charset="0"/>
+              </a:rPr>
+              <a:t>i</a:t>
+            </a:r>
+          </a:p>
+        </p:txBody>
+      </p:sp>
+    </p:spTree>
+    <p:extLst>
+      <p:ext uri="{BB962C8B-B14F-4D97-AF65-F5344CB8AC3E}">
+        <p14:creationId xmlns:p14="http://schemas.microsoft.com/office/powerpoint/2010/main" val="4228281673"/>
+      </p:ext>
+    </p:extLst>
+  </p:cSld>
+  <p:clrMapOvr>
+    <a:masterClrMapping/>
+  </p:clrMapOvr>
+</p:sld>
+</file>
+
+<file path=ppt/slides/slide12.xml><?xml version="1.0" encoding="utf-8"?>
+<p:sld xmlns:a="http://schemas.openxmlformats.org/drawingml/2006/main" xmlns:r="http://schemas.openxmlformats.org/officeDocument/2006/relationships" xmlns:p="http://schemas.openxmlformats.org/presentationml/2006/main">
+  <p:cSld>
+    <p:spTree>
+      <p:nvGrpSpPr>
+        <p:cNvPr id="1" name="">
+          <a:extLst>
+            <a:ext uri="{FF2B5EF4-FFF2-40B4-BE49-F238E27FC236}">
+              <a16:creationId xmlns:a16="http://schemas.microsoft.com/office/drawing/2014/main" id="{D9196150-F854-FF64-8C03-66566837A3CA}"/>
+            </a:ext>
+          </a:extLst>
+        </p:cNvPr>
+        <p:cNvGrpSpPr/>
+        <p:nvPr/>
+      </p:nvGrpSpPr>
+      <p:grpSpPr>
+        <a:xfrm>
+          <a:off x="0" y="0"/>
+          <a:ext cx="0" cy="0"/>
+          <a:chOff x="0" y="0"/>
+          <a:chExt cx="0" cy="0"/>
+        </a:xfrm>
+      </p:grpSpPr>
+      <p:cxnSp>
+        <p:nvCxnSpPr>
+          <p:cNvPr id="21" name="Gerader Verbinder 20">
+            <a:extLst>
+              <a:ext uri="{FF2B5EF4-FFF2-40B4-BE49-F238E27FC236}">
+                <a16:creationId xmlns:a16="http://schemas.microsoft.com/office/drawing/2014/main" id="{6FCC077E-DB3B-4EAA-5C1F-F71C6E87A30F}"/>
+              </a:ext>
+            </a:extLst>
+          </p:cNvPr>
+          <p:cNvCxnSpPr>
+            <a:cxnSpLocks/>
+          </p:cNvCxnSpPr>
+          <p:nvPr/>
+        </p:nvCxnSpPr>
+        <p:spPr>
+          <a:xfrm flipH="1">
+            <a:off x="603128" y="1449921"/>
+            <a:ext cx="933453" cy="0"/>
+          </a:xfrm>
+          <a:prstGeom prst="line">
+            <a:avLst/>
+          </a:prstGeom>
+          <a:ln w="9525" cap="rnd">
+            <a:solidFill>
+              <a:srgbClr val="FF0000"/>
+            </a:solidFill>
+            <a:prstDash val="sysDash"/>
+            <a:round/>
+          </a:ln>
+        </p:spPr>
+        <p:style>
+          <a:lnRef idx="2">
+            <a:schemeClr val="accent1"/>
+          </a:lnRef>
+          <a:fillRef idx="0">
+            <a:schemeClr val="accent1"/>
+          </a:fillRef>
+          <a:effectRef idx="1">
+            <a:schemeClr val="accent1"/>
+          </a:effectRef>
+          <a:fontRef idx="minor">
+            <a:schemeClr val="tx1"/>
+          </a:fontRef>
+        </p:style>
+      </p:cxnSp>
+      <p:sp>
+        <p:nvSpPr>
+          <p:cNvPr id="19" name="Bogen 18">
+            <a:extLst>
+              <a:ext uri="{FF2B5EF4-FFF2-40B4-BE49-F238E27FC236}">
+                <a16:creationId xmlns:a16="http://schemas.microsoft.com/office/drawing/2014/main" id="{B1F1316B-0B34-2422-48E9-34EF5D014926}"/>
+              </a:ext>
+            </a:extLst>
+          </p:cNvPr>
+          <p:cNvSpPr/>
+          <p:nvPr/>
+        </p:nvSpPr>
+        <p:spPr>
+          <a:xfrm>
+            <a:off x="1501085" y="1398403"/>
+            <a:ext cx="990342" cy="990340"/>
+          </a:xfrm>
+          <a:prstGeom prst="arc">
+            <a:avLst>
+              <a:gd name="adj1" fmla="val 18886943"/>
+              <a:gd name="adj2" fmla="val 0"/>
+            </a:avLst>
+          </a:prstGeom>
+          <a:ln cap="rnd">
+            <a:solidFill>
+              <a:schemeClr val="accent5"/>
+            </a:solidFill>
+            <a:round/>
+            <a:headEnd type="triangle"/>
+          </a:ln>
+        </p:spPr>
+        <p:style>
+          <a:lnRef idx="2">
+            <a:schemeClr val="accent1"/>
+          </a:lnRef>
+          <a:fillRef idx="0">
+            <a:schemeClr val="accent1"/>
+          </a:fillRef>
+          <a:effectRef idx="1">
+            <a:schemeClr val="accent1"/>
+          </a:effectRef>
+          <a:fontRef idx="minor">
+            <a:schemeClr val="tx1"/>
+          </a:fontRef>
+        </p:style>
+        <p:txBody>
+          <a:bodyPr rtlCol="0" anchor="ctr"/>
+          <a:lstStyle/>
+          <a:p>
+            <a:pPr algn="ctr"/>
+            <a:endParaRPr lang="de-DE" dirty="0"/>
+          </a:p>
+        </p:txBody>
+      </p:sp>
+      <p:sp>
+        <p:nvSpPr>
+          <p:cNvPr id="14" name="Textfeld 13">
+            <a:extLst>
+              <a:ext uri="{FF2B5EF4-FFF2-40B4-BE49-F238E27FC236}">
+                <a16:creationId xmlns:a16="http://schemas.microsoft.com/office/drawing/2014/main" id="{3EB3604B-3433-5B34-0B27-0D271007E1C0}"/>
+              </a:ext>
+            </a:extLst>
+          </p:cNvPr>
+          <p:cNvSpPr txBox="1"/>
+          <p:nvPr/>
+        </p:nvSpPr>
+        <p:spPr>
+          <a:xfrm>
+            <a:off x="1095212" y="1484059"/>
+            <a:ext cx="518786" cy="261610"/>
+          </a:xfrm>
+          <a:prstGeom prst="rect">
+            <a:avLst/>
+          </a:prstGeom>
+          <a:noFill/>
+        </p:spPr>
+        <p:txBody>
+          <a:bodyPr wrap="square" rtlCol="0">
+            <a:spAutoFit/>
+          </a:bodyPr>
+          <a:lstStyle/>
+          <a:p>
+            <a:pPr algn="ctr"/>
+            <a:r>
+              <a:rPr lang="de-DE" sz="1100" i="1" dirty="0">
+                <a:solidFill>
+                  <a:srgbClr val="FF0000"/>
+                </a:solidFill>
+                <a:latin typeface="CMU Serif" panose="02000603000000000000" pitchFamily="2" charset="0"/>
+                <a:ea typeface="CMU Serif" panose="02000603000000000000" pitchFamily="2" charset="0"/>
+                <a:cs typeface="CMU Serif" panose="02000603000000000000" pitchFamily="2" charset="0"/>
+              </a:rPr>
+              <a:t>i</a:t>
+            </a:r>
+            <a:r>
+              <a:rPr lang="de-DE" sz="1100" baseline="-25000" dirty="0">
+                <a:solidFill>
+                  <a:srgbClr val="FF0000"/>
+                </a:solidFill>
+                <a:latin typeface="CMU Serif" panose="02000603000000000000" pitchFamily="2" charset="0"/>
+                <a:ea typeface="CMU Serif" panose="02000603000000000000" pitchFamily="2" charset="0"/>
+                <a:cs typeface="CMU Serif" panose="02000603000000000000" pitchFamily="2" charset="0"/>
+              </a:rPr>
+              <a:t>C</a:t>
+            </a:r>
+            <a:r>
+              <a:rPr lang="de-DE" sz="1100" dirty="0">
+                <a:solidFill>
+                  <a:srgbClr val="FF0000"/>
+                </a:solidFill>
+                <a:latin typeface="CMU Serif" panose="02000603000000000000" pitchFamily="2" charset="0"/>
+                <a:ea typeface="CMU Serif" panose="02000603000000000000" pitchFamily="2" charset="0"/>
+                <a:cs typeface="CMU Serif" panose="02000603000000000000" pitchFamily="2" charset="0"/>
+              </a:rPr>
+              <a:t>(</a:t>
+            </a:r>
+            <a:r>
+              <a:rPr lang="de-DE" sz="1100" i="1" dirty="0">
+                <a:solidFill>
+                  <a:srgbClr val="FF0000"/>
+                </a:solidFill>
+                <a:latin typeface="CMU Serif" panose="02000603000000000000" pitchFamily="2" charset="0"/>
+                <a:ea typeface="CMU Serif" panose="02000603000000000000" pitchFamily="2" charset="0"/>
+                <a:cs typeface="CMU Serif" panose="02000603000000000000" pitchFamily="2" charset="0"/>
+              </a:rPr>
+              <a:t>t</a:t>
+            </a:r>
+            <a:r>
+              <a:rPr lang="de-DE" sz="1100" dirty="0">
+                <a:solidFill>
+                  <a:srgbClr val="FF0000"/>
+                </a:solidFill>
+                <a:latin typeface="CMU Serif" panose="02000603000000000000" pitchFamily="2" charset="0"/>
+                <a:ea typeface="CMU Serif" panose="02000603000000000000" pitchFamily="2" charset="0"/>
+                <a:cs typeface="CMU Serif" panose="02000603000000000000" pitchFamily="2" charset="0"/>
+              </a:rPr>
+              <a:t>)</a:t>
+            </a:r>
+            <a:endParaRPr lang="de-DE" sz="1100" baseline="-25000" dirty="0">
+              <a:solidFill>
+                <a:srgbClr val="FF0000"/>
+              </a:solidFill>
+              <a:latin typeface="CMU Serif" panose="02000603000000000000" pitchFamily="2" charset="0"/>
+              <a:ea typeface="CMU Serif" panose="02000603000000000000" pitchFamily="2" charset="0"/>
+              <a:cs typeface="CMU Serif" panose="02000603000000000000" pitchFamily="2" charset="0"/>
+            </a:endParaRPr>
+          </a:p>
+        </p:txBody>
+      </p:sp>
+      <p:sp>
+        <p:nvSpPr>
+          <p:cNvPr id="20" name="Textfeld 19">
+            <a:extLst>
+              <a:ext uri="{FF2B5EF4-FFF2-40B4-BE49-F238E27FC236}">
+                <a16:creationId xmlns:a16="http://schemas.microsoft.com/office/drawing/2014/main" id="{28C7A24D-C214-0990-8D0E-56606EF81076}"/>
+              </a:ext>
+            </a:extLst>
+          </p:cNvPr>
+          <p:cNvSpPr txBox="1"/>
+          <p:nvPr/>
+        </p:nvSpPr>
+        <p:spPr>
+          <a:xfrm>
+            <a:off x="2403176" y="1575454"/>
+            <a:ext cx="518786" cy="261610"/>
+          </a:xfrm>
+          <a:prstGeom prst="rect">
+            <a:avLst/>
+          </a:prstGeom>
+          <a:noFill/>
+        </p:spPr>
+        <p:txBody>
+          <a:bodyPr wrap="square" rtlCol="0">
+            <a:spAutoFit/>
+          </a:bodyPr>
+          <a:lstStyle/>
+          <a:p>
+            <a:pPr algn="ctr"/>
+            <a:r>
+              <a:rPr lang="de-DE" sz="1100" i="1" dirty="0">
+                <a:solidFill>
+                  <a:schemeClr val="accent5"/>
+                </a:solidFill>
+                <a:latin typeface="Latin Modern Math" panose="02000503000000000000" pitchFamily="50" charset="0"/>
+                <a:ea typeface="Latin Modern Math" panose="02000503000000000000" pitchFamily="50" charset="0"/>
+                <a:cs typeface="CMU Serif" panose="02000603000000000000" pitchFamily="2" charset="0"/>
+              </a:rPr>
+              <a:t>ω </a:t>
+            </a:r>
+            <a:r>
+              <a:rPr lang="de-DE" sz="400" dirty="0">
+                <a:solidFill>
+                  <a:schemeClr val="accent5"/>
+                </a:solidFill>
+                <a:latin typeface="Latin Modern Math" panose="02000503000000000000" pitchFamily="50" charset="0"/>
+                <a:ea typeface="Latin Modern Math" panose="02000503000000000000" pitchFamily="50" charset="0"/>
+                <a:cs typeface="CMU Serif" panose="02000603000000000000" pitchFamily="2" charset="0"/>
+              </a:rPr>
+              <a:t>∙</a:t>
+            </a:r>
+            <a:r>
+              <a:rPr lang="de-DE" sz="1100" i="1" dirty="0">
+                <a:solidFill>
+                  <a:schemeClr val="accent5"/>
+                </a:solidFill>
+                <a:latin typeface="Latin Modern Math" panose="02000503000000000000" pitchFamily="50" charset="0"/>
+                <a:ea typeface="Latin Modern Math" panose="02000503000000000000" pitchFamily="50" charset="0"/>
+                <a:cs typeface="CMU Serif" panose="02000603000000000000" pitchFamily="2" charset="0"/>
+              </a:rPr>
+              <a:t> </a:t>
+            </a:r>
+            <a:r>
+              <a:rPr lang="de-DE" sz="1100" i="1" dirty="0">
+                <a:solidFill>
+                  <a:schemeClr val="accent5"/>
+                </a:solidFill>
+                <a:latin typeface="CMU Serif" panose="02000603000000000000" pitchFamily="2" charset="0"/>
+                <a:ea typeface="CMU Serif" panose="02000603000000000000" pitchFamily="2" charset="0"/>
+                <a:cs typeface="CMU Serif" panose="02000603000000000000" pitchFamily="2" charset="0"/>
+              </a:rPr>
+              <a:t>t</a:t>
+            </a:r>
+            <a:endParaRPr lang="de-DE" sz="1100" baseline="-25000" dirty="0">
+              <a:solidFill>
+                <a:schemeClr val="accent5"/>
+              </a:solidFill>
+              <a:latin typeface="CMU Serif" panose="02000603000000000000" pitchFamily="2" charset="0"/>
+              <a:ea typeface="CMU Serif" panose="02000603000000000000" pitchFamily="2" charset="0"/>
+              <a:cs typeface="CMU Serif" panose="02000603000000000000" pitchFamily="2" charset="0"/>
+            </a:endParaRPr>
+          </a:p>
+        </p:txBody>
+      </p:sp>
+      <p:sp>
+        <p:nvSpPr>
+          <p:cNvPr id="15" name="Bogen 14">
+            <a:extLst>
+              <a:ext uri="{FF2B5EF4-FFF2-40B4-BE49-F238E27FC236}">
+                <a16:creationId xmlns:a16="http://schemas.microsoft.com/office/drawing/2014/main" id="{D35C587C-D28B-3BB9-33CF-A6EF501953E8}"/>
+              </a:ext>
+            </a:extLst>
+          </p:cNvPr>
+          <p:cNvSpPr/>
+          <p:nvPr/>
+        </p:nvSpPr>
+        <p:spPr>
+          <a:xfrm>
+            <a:off x="1672227" y="1569540"/>
+            <a:ext cx="648068" cy="648066"/>
+          </a:xfrm>
+          <a:prstGeom prst="arc">
+            <a:avLst>
+              <a:gd name="adj1" fmla="val 13498408"/>
+              <a:gd name="adj2" fmla="val 18751310"/>
+            </a:avLst>
+          </a:prstGeom>
+          <a:ln cap="rnd">
+            <a:solidFill>
+              <a:schemeClr val="accent6">
+                <a:lumMod val="75000"/>
+              </a:schemeClr>
+            </a:solidFill>
+            <a:round/>
+            <a:headEnd type="none"/>
+            <a:tailEnd type="triangle"/>
+          </a:ln>
+        </p:spPr>
+        <p:style>
+          <a:lnRef idx="2">
+            <a:schemeClr val="accent1"/>
+          </a:lnRef>
+          <a:fillRef idx="0">
+            <a:schemeClr val="accent1"/>
+          </a:fillRef>
+          <a:effectRef idx="1">
+            <a:schemeClr val="accent1"/>
+          </a:effectRef>
+          <a:fontRef idx="minor">
+            <a:schemeClr val="tx1"/>
+          </a:fontRef>
+        </p:style>
+        <p:txBody>
+          <a:bodyPr rtlCol="0" anchor="ctr"/>
+          <a:lstStyle/>
+          <a:p>
+            <a:pPr algn="ctr"/>
+            <a:endParaRPr lang="de-DE" dirty="0">
+              <a:solidFill>
+                <a:schemeClr val="accent6">
+                  <a:lumMod val="75000"/>
+                </a:schemeClr>
+              </a:solidFill>
+            </a:endParaRPr>
+          </a:p>
+        </p:txBody>
+      </p:sp>
+      <p:cxnSp>
+        <p:nvCxnSpPr>
+          <p:cNvPr id="18" name="Gerader Verbinder 17">
+            <a:extLst>
+              <a:ext uri="{FF2B5EF4-FFF2-40B4-BE49-F238E27FC236}">
+                <a16:creationId xmlns:a16="http://schemas.microsoft.com/office/drawing/2014/main" id="{781B4045-746E-02B5-5CE8-480E5B58E55C}"/>
+              </a:ext>
+            </a:extLst>
+          </p:cNvPr>
+          <p:cNvCxnSpPr>
+            <a:cxnSpLocks/>
+          </p:cNvCxnSpPr>
+          <p:nvPr/>
+        </p:nvCxnSpPr>
+        <p:spPr>
+          <a:xfrm rot="10800000" flipH="1">
+            <a:off x="603128" y="1268013"/>
+            <a:ext cx="1989577" cy="0"/>
+          </a:xfrm>
+          <a:prstGeom prst="line">
+            <a:avLst/>
+          </a:prstGeom>
+          <a:ln w="9525" cap="rnd">
+            <a:solidFill>
+              <a:srgbClr val="086FBD"/>
+            </a:solidFill>
+            <a:prstDash val="sysDash"/>
+            <a:round/>
+          </a:ln>
+        </p:spPr>
+        <p:style>
+          <a:lnRef idx="2">
+            <a:schemeClr val="accent1"/>
+          </a:lnRef>
+          <a:fillRef idx="0">
+            <a:schemeClr val="accent1"/>
+          </a:fillRef>
+          <a:effectRef idx="1">
+            <a:schemeClr val="accent1"/>
+          </a:effectRef>
+          <a:fontRef idx="minor">
+            <a:schemeClr val="tx1"/>
+          </a:fontRef>
+        </p:style>
+      </p:cxnSp>
+      <p:sp>
+        <p:nvSpPr>
+          <p:cNvPr id="13" name="Textfeld 12">
+            <a:extLst>
+              <a:ext uri="{FF2B5EF4-FFF2-40B4-BE49-F238E27FC236}">
+                <a16:creationId xmlns:a16="http://schemas.microsoft.com/office/drawing/2014/main" id="{E5473665-F389-5590-FF86-88F2300407D3}"/>
+              </a:ext>
+            </a:extLst>
+          </p:cNvPr>
+          <p:cNvSpPr txBox="1"/>
+          <p:nvPr/>
+        </p:nvSpPr>
+        <p:spPr>
+          <a:xfrm>
+            <a:off x="2316459" y="988889"/>
+            <a:ext cx="567731" cy="261610"/>
+          </a:xfrm>
+          <a:prstGeom prst="rect">
+            <a:avLst/>
+          </a:prstGeom>
+          <a:noFill/>
+        </p:spPr>
+        <p:txBody>
+          <a:bodyPr wrap="square" rtlCol="0">
+            <a:spAutoFit/>
+          </a:bodyPr>
+          <a:lstStyle/>
+          <a:p>
+            <a:pPr algn="ctr"/>
+            <a:r>
+              <a:rPr lang="de-DE" sz="1100" i="1" dirty="0">
+                <a:solidFill>
+                  <a:srgbClr val="086FBD"/>
+                </a:solidFill>
+                <a:latin typeface="CMU Serif" panose="02000603000000000000" pitchFamily="2" charset="0"/>
+                <a:ea typeface="CMU Serif" panose="02000603000000000000" pitchFamily="2" charset="0"/>
+                <a:cs typeface="CMU Serif" panose="02000603000000000000" pitchFamily="2" charset="0"/>
+              </a:rPr>
+              <a:t>u</a:t>
+            </a:r>
+            <a:r>
+              <a:rPr lang="de-DE" sz="1100" baseline="-25000" dirty="0">
+                <a:solidFill>
+                  <a:srgbClr val="086FBD"/>
+                </a:solidFill>
+                <a:latin typeface="CMU Serif" panose="02000603000000000000" pitchFamily="2" charset="0"/>
+                <a:ea typeface="CMU Serif" panose="02000603000000000000" pitchFamily="2" charset="0"/>
+                <a:cs typeface="CMU Serif" panose="02000603000000000000" pitchFamily="2" charset="0"/>
+              </a:rPr>
+              <a:t>C</a:t>
+            </a:r>
+            <a:r>
+              <a:rPr lang="de-DE" sz="1100" dirty="0">
+                <a:solidFill>
+                  <a:srgbClr val="086FBD"/>
+                </a:solidFill>
+                <a:latin typeface="CMU Serif" panose="02000603000000000000" pitchFamily="2" charset="0"/>
+                <a:ea typeface="CMU Serif" panose="02000603000000000000" pitchFamily="2" charset="0"/>
+                <a:cs typeface="CMU Serif" panose="02000603000000000000" pitchFamily="2" charset="0"/>
+              </a:rPr>
+              <a:t>(</a:t>
+            </a:r>
+            <a:r>
+              <a:rPr lang="de-DE" sz="1100" i="1" dirty="0">
+                <a:solidFill>
+                  <a:srgbClr val="086FBD"/>
+                </a:solidFill>
+                <a:latin typeface="CMU Serif" panose="02000603000000000000" pitchFamily="2" charset="0"/>
+                <a:ea typeface="CMU Serif" panose="02000603000000000000" pitchFamily="2" charset="0"/>
+                <a:cs typeface="CMU Serif" panose="02000603000000000000" pitchFamily="2" charset="0"/>
+              </a:rPr>
+              <a:t>t</a:t>
+            </a:r>
+            <a:r>
+              <a:rPr lang="de-DE" sz="1100" dirty="0">
+                <a:solidFill>
+                  <a:srgbClr val="086FBD"/>
+                </a:solidFill>
+                <a:latin typeface="CMU Serif" panose="02000603000000000000" pitchFamily="2" charset="0"/>
+                <a:ea typeface="CMU Serif" panose="02000603000000000000" pitchFamily="2" charset="0"/>
+                <a:cs typeface="CMU Serif" panose="02000603000000000000" pitchFamily="2" charset="0"/>
+              </a:rPr>
+              <a:t>)</a:t>
+            </a:r>
+            <a:endParaRPr lang="de-DE" sz="1100" baseline="-25000" dirty="0">
+              <a:solidFill>
+                <a:srgbClr val="086FBD"/>
+              </a:solidFill>
+              <a:latin typeface="CMU Serif" panose="02000603000000000000" pitchFamily="2" charset="0"/>
+              <a:ea typeface="CMU Serif" panose="02000603000000000000" pitchFamily="2" charset="0"/>
+              <a:cs typeface="CMU Serif" panose="02000603000000000000" pitchFamily="2" charset="0"/>
+            </a:endParaRPr>
+          </a:p>
+        </p:txBody>
+      </p:sp>
+      <p:sp>
+        <p:nvSpPr>
+          <p:cNvPr id="16" name="Textfeld 15">
+            <a:extLst>
+              <a:ext uri="{FF2B5EF4-FFF2-40B4-BE49-F238E27FC236}">
+                <a16:creationId xmlns:a16="http://schemas.microsoft.com/office/drawing/2014/main" id="{E96232F1-EC16-1DCD-CD49-6F03A4978EE9}"/>
+              </a:ext>
+            </a:extLst>
+          </p:cNvPr>
+          <p:cNvSpPr txBox="1"/>
+          <p:nvPr/>
+        </p:nvSpPr>
+        <p:spPr>
+          <a:xfrm>
+            <a:off x="1887075" y="1324529"/>
+            <a:ext cx="518786" cy="261610"/>
+          </a:xfrm>
+          <a:prstGeom prst="rect">
+            <a:avLst/>
+          </a:prstGeom>
+          <a:noFill/>
+        </p:spPr>
+        <p:txBody>
+          <a:bodyPr wrap="square" rtlCol="0">
+            <a:spAutoFit/>
+          </a:bodyPr>
+          <a:lstStyle/>
+          <a:p>
+            <a:pPr algn="ctr"/>
+            <a:r>
+              <a:rPr lang="de-DE" sz="1100" i="1" dirty="0" err="1">
+                <a:solidFill>
+                  <a:schemeClr val="accent6">
+                    <a:lumMod val="75000"/>
+                  </a:schemeClr>
+                </a:solidFill>
+                <a:latin typeface="Latin Modern Math" panose="02000503000000000000" pitchFamily="50" charset="0"/>
+                <a:ea typeface="Latin Modern Math" panose="02000503000000000000" pitchFamily="50" charset="0"/>
+                <a:cs typeface="CMU Serif" panose="02000603000000000000" pitchFamily="2" charset="0"/>
+              </a:rPr>
+              <a:t>φ</a:t>
+            </a:r>
+            <a:r>
+              <a:rPr lang="de-DE" sz="1100" baseline="-25000" dirty="0" err="1">
+                <a:solidFill>
+                  <a:schemeClr val="accent6">
+                    <a:lumMod val="75000"/>
+                  </a:schemeClr>
+                </a:solidFill>
+                <a:latin typeface="CMU Serif" panose="02000603000000000000" pitchFamily="2" charset="0"/>
+                <a:ea typeface="CMU Serif" panose="02000603000000000000" pitchFamily="2" charset="0"/>
+                <a:cs typeface="CMU Serif" panose="02000603000000000000" pitchFamily="2" charset="0"/>
+              </a:rPr>
+              <a:t>C</a:t>
+            </a:r>
+            <a:endParaRPr lang="de-DE" sz="1100" baseline="-25000" dirty="0">
+              <a:solidFill>
+                <a:schemeClr val="accent6">
+                  <a:lumMod val="75000"/>
+                </a:schemeClr>
+              </a:solidFill>
+              <a:latin typeface="CMU Serif" panose="02000603000000000000" pitchFamily="2" charset="0"/>
+              <a:ea typeface="CMU Serif" panose="02000603000000000000" pitchFamily="2" charset="0"/>
+              <a:cs typeface="CMU Serif" panose="02000603000000000000" pitchFamily="2" charset="0"/>
+            </a:endParaRPr>
+          </a:p>
+        </p:txBody>
+      </p:sp>
+      <p:sp>
+        <p:nvSpPr>
+          <p:cNvPr id="27" name="Rechteck 26">
+            <a:extLst>
+              <a:ext uri="{FF2B5EF4-FFF2-40B4-BE49-F238E27FC236}">
+                <a16:creationId xmlns:a16="http://schemas.microsoft.com/office/drawing/2014/main" id="{5E97D555-5834-F653-BB3A-A19448857F86}"/>
+              </a:ext>
+            </a:extLst>
+          </p:cNvPr>
+          <p:cNvSpPr/>
+          <p:nvPr/>
+        </p:nvSpPr>
+        <p:spPr>
+          <a:xfrm>
+            <a:off x="1963188" y="1278575"/>
+            <a:ext cx="66145" cy="269222"/>
+          </a:xfrm>
+          <a:prstGeom prst="rect">
+            <a:avLst/>
+          </a:prstGeom>
+          <a:solidFill>
+            <a:schemeClr val="bg1"/>
+          </a:solidFill>
+          <a:ln>
+            <a:noFill/>
+          </a:ln>
+        </p:spPr>
+        <p:style>
+          <a:lnRef idx="2">
+            <a:schemeClr val="accent1">
+              <a:shade val="15000"/>
+            </a:schemeClr>
+          </a:lnRef>
+          <a:fillRef idx="1">
+            <a:schemeClr val="accent1"/>
+          </a:fillRef>
+          <a:effectRef idx="0">
+            <a:schemeClr val="accent1"/>
+          </a:effectRef>
+          <a:fontRef idx="minor">
+            <a:schemeClr val="lt1"/>
+          </a:fontRef>
+        </p:style>
+        <p:txBody>
+          <a:bodyPr rtlCol="0" anchor="ctr"/>
+          <a:lstStyle/>
+          <a:p>
+            <a:pPr algn="ctr"/>
+            <a:endParaRPr lang="de-DE" dirty="0"/>
+          </a:p>
+        </p:txBody>
+      </p:sp>
+      <p:cxnSp>
+        <p:nvCxnSpPr>
+          <p:cNvPr id="8" name="Gerade Verbindung mit Pfeil 7">
+            <a:extLst>
+              <a:ext uri="{FF2B5EF4-FFF2-40B4-BE49-F238E27FC236}">
+                <a16:creationId xmlns:a16="http://schemas.microsoft.com/office/drawing/2014/main" id="{558A7DFA-445B-C518-E088-9418AF595E6C}"/>
+              </a:ext>
+            </a:extLst>
+          </p:cNvPr>
+          <p:cNvCxnSpPr>
+            <a:cxnSpLocks/>
+          </p:cNvCxnSpPr>
+          <p:nvPr/>
+        </p:nvCxnSpPr>
+        <p:spPr>
+          <a:xfrm flipV="1">
+            <a:off x="1997297" y="1266825"/>
+            <a:ext cx="603028" cy="623969"/>
+          </a:xfrm>
+          <a:prstGeom prst="straightConnector1">
+            <a:avLst/>
+          </a:prstGeom>
+          <a:ln cap="rnd">
+            <a:solidFill>
+              <a:srgbClr val="086FBD"/>
+            </a:solidFill>
+            <a:round/>
+            <a:tailEnd type="triangle" w="med" len="med"/>
+          </a:ln>
+        </p:spPr>
+        <p:style>
+          <a:lnRef idx="2">
+            <a:schemeClr val="accent1"/>
+          </a:lnRef>
+          <a:fillRef idx="0">
+            <a:schemeClr val="accent1"/>
+          </a:fillRef>
+          <a:effectRef idx="1">
+            <a:schemeClr val="accent1"/>
+          </a:effectRef>
+          <a:fontRef idx="minor">
+            <a:schemeClr val="tx1"/>
+          </a:fontRef>
+        </p:style>
+      </p:cxnSp>
+      <p:cxnSp>
+        <p:nvCxnSpPr>
+          <p:cNvPr id="29" name="Gerader Verbinder 28">
+            <a:extLst>
+              <a:ext uri="{FF2B5EF4-FFF2-40B4-BE49-F238E27FC236}">
+                <a16:creationId xmlns:a16="http://schemas.microsoft.com/office/drawing/2014/main" id="{3D872DF9-3E86-DE63-972F-00E2D511C539}"/>
+              </a:ext>
+            </a:extLst>
+          </p:cNvPr>
+          <p:cNvCxnSpPr>
+            <a:cxnSpLocks/>
+          </p:cNvCxnSpPr>
+          <p:nvPr/>
+        </p:nvCxnSpPr>
+        <p:spPr>
+          <a:xfrm rot="10800000" flipH="1">
+            <a:off x="603127" y="1893573"/>
+            <a:ext cx="657617" cy="0"/>
+          </a:xfrm>
+          <a:prstGeom prst="line">
+            <a:avLst/>
+          </a:prstGeom>
+          <a:ln w="9525" cap="rnd">
+            <a:solidFill>
+              <a:schemeClr val="tx1"/>
+            </a:solidFill>
+            <a:prstDash val="sysDash"/>
+            <a:round/>
           </a:ln>
         </p:spPr>
         <p:style>
@@ -4284,7 +8018,7 @@
           <p:cNvPr id="10" name="Gerade Verbindung mit Pfeil 9">
             <a:extLst>
               <a:ext uri="{FF2B5EF4-FFF2-40B4-BE49-F238E27FC236}">
-                <a16:creationId xmlns:a16="http://schemas.microsoft.com/office/drawing/2014/main" id="{78FA873B-332F-2A4F-5031-351A55B64ECE}"/>
+                <a16:creationId xmlns:a16="http://schemas.microsoft.com/office/drawing/2014/main" id="{29CF6322-DBF2-17AB-0B5C-02FE70715BF7}"/>
               </a:ext>
             </a:extLst>
           </p:cNvPr>
@@ -4294,9 +8028,9 @@
           <p:nvPr/>
         </p:nvCxnSpPr>
         <p:spPr>
-          <a:xfrm flipV="1">
-            <a:off x="1496468" y="1675356"/>
-            <a:ext cx="585195" cy="444283"/>
+          <a:xfrm rot="-5400000" flipV="1">
+            <a:off x="1544168" y="1439224"/>
+            <a:ext cx="443983" cy="459156"/>
           </a:xfrm>
           <a:prstGeom prst="straightConnector1">
             <a:avLst/>
@@ -4304,6 +8038,51 @@
           <a:ln w="19050" cap="rnd">
             <a:solidFill>
               <a:srgbClr val="FF0000"/>
+            </a:solidFill>
+            <a:round/>
+            <a:tailEnd type="triangle" w="med" len="med"/>
+          </a:ln>
+        </p:spPr>
+        <p:style>
+          <a:lnRef idx="2">
+            <a:schemeClr val="accent1"/>
+          </a:lnRef>
+          <a:fillRef idx="0">
+            <a:schemeClr val="accent1"/>
+          </a:fillRef>
+          <a:effectRef idx="1">
+            <a:schemeClr val="accent1"/>
+          </a:effectRef>
+          <a:fontRef idx="minor">
+            <a:schemeClr val="tx1"/>
+          </a:fontRef>
+        </p:style>
+      </p:cxnSp>
+      <p:cxnSp>
+        <p:nvCxnSpPr>
+          <p:cNvPr id="6" name="Gerade Verbindung mit Pfeil 5">
+            <a:extLst>
+              <a:ext uri="{FF2B5EF4-FFF2-40B4-BE49-F238E27FC236}">
+                <a16:creationId xmlns:a16="http://schemas.microsoft.com/office/drawing/2014/main" id="{E6CBD107-7EEB-3161-7B83-8636B9191BB0}"/>
+              </a:ext>
+            </a:extLst>
+          </p:cNvPr>
+          <p:cNvCxnSpPr>
+            <a:cxnSpLocks/>
+          </p:cNvCxnSpPr>
+          <p:nvPr/>
+        </p:nvCxnSpPr>
+        <p:spPr>
+          <a:xfrm>
+            <a:off x="1260744" y="1893579"/>
+            <a:ext cx="1496860" cy="0"/>
+          </a:xfrm>
+          <a:prstGeom prst="straightConnector1">
+            <a:avLst/>
+          </a:prstGeom>
+          <a:ln cap="rnd">
+            <a:solidFill>
+              <a:schemeClr val="tx1"/>
             </a:solidFill>
             <a:round/>
             <a:tailEnd type="triangle" w="med" len="med"/>
@@ -4329,7 +8108,7 @@
           <p:cNvPr id="5" name="Gerade Verbindung mit Pfeil 4">
             <a:extLst>
               <a:ext uri="{FF2B5EF4-FFF2-40B4-BE49-F238E27FC236}">
-                <a16:creationId xmlns:a16="http://schemas.microsoft.com/office/drawing/2014/main" id="{F4CAB231-1972-25BB-D11C-0014B56F43F2}"/>
+                <a16:creationId xmlns:a16="http://schemas.microsoft.com/office/drawing/2014/main" id="{B0EED522-9044-EA98-BD43-003DC03D1412}"/>
               </a:ext>
             </a:extLst>
           </p:cNvPr>
@@ -4340,8 +8119,8 @@
         </p:nvCxnSpPr>
         <p:spPr>
           <a:xfrm flipV="1">
-            <a:off x="1496469" y="1090939"/>
-            <a:ext cx="0" cy="1373557"/>
+            <a:off x="1996257" y="1095436"/>
+            <a:ext cx="0" cy="1572016"/>
           </a:xfrm>
           <a:prstGeom prst="straightConnector1">
             <a:avLst/>
@@ -4352,6 +8131,587 @@
             </a:solidFill>
             <a:round/>
             <a:tailEnd type="triangle" w="med" len="med"/>
+          </a:ln>
+        </p:spPr>
+        <p:style>
+          <a:lnRef idx="2">
+            <a:schemeClr val="accent1"/>
+          </a:lnRef>
+          <a:fillRef idx="0">
+            <a:schemeClr val="accent1"/>
+          </a:fillRef>
+          <a:effectRef idx="1">
+            <a:schemeClr val="accent1"/>
+          </a:effectRef>
+          <a:fontRef idx="minor">
+            <a:schemeClr val="tx1"/>
+          </a:fontRef>
+        </p:style>
+      </p:cxnSp>
+    </p:spTree>
+    <p:extLst>
+      <p:ext uri="{BB962C8B-B14F-4D97-AF65-F5344CB8AC3E}">
+        <p14:creationId xmlns:p14="http://schemas.microsoft.com/office/powerpoint/2010/main" val="3531276464"/>
+      </p:ext>
+    </p:extLst>
+  </p:cSld>
+  <p:clrMapOvr>
+    <a:masterClrMapping/>
+  </p:clrMapOvr>
+</p:sld>
+</file>
+
+<file path=ppt/slides/slide13.xml><?xml version="1.0" encoding="utf-8"?>
+<p:sld xmlns:a="http://schemas.openxmlformats.org/drawingml/2006/main" xmlns:r="http://schemas.openxmlformats.org/officeDocument/2006/relationships" xmlns:p="http://schemas.openxmlformats.org/presentationml/2006/main">
+  <p:cSld>
+    <p:spTree>
+      <p:nvGrpSpPr>
+        <p:cNvPr id="1" name="">
+          <a:extLst>
+            <a:ext uri="{FF2B5EF4-FFF2-40B4-BE49-F238E27FC236}">
+              <a16:creationId xmlns:a16="http://schemas.microsoft.com/office/drawing/2014/main" id="{194370E9-43A2-8B5F-F9F5-B244EFEBBB22}"/>
+            </a:ext>
+          </a:extLst>
+        </p:cNvPr>
+        <p:cNvGrpSpPr/>
+        <p:nvPr/>
+      </p:nvGrpSpPr>
+      <p:grpSpPr>
+        <a:xfrm>
+          <a:off x="0" y="0"/>
+          <a:ext cx="0" cy="0"/>
+          <a:chOff x="0" y="0"/>
+          <a:chExt cx="0" cy="0"/>
+        </a:xfrm>
+      </p:grpSpPr>
+      <p:sp>
+        <p:nvSpPr>
+          <p:cNvPr id="20" name="Textfeld 19">
+            <a:extLst>
+              <a:ext uri="{FF2B5EF4-FFF2-40B4-BE49-F238E27FC236}">
+                <a16:creationId xmlns:a16="http://schemas.microsoft.com/office/drawing/2014/main" id="{813253FE-401C-9438-FEA2-2A1985D6C924}"/>
+              </a:ext>
+            </a:extLst>
+          </p:cNvPr>
+          <p:cNvSpPr txBox="1"/>
+          <p:nvPr/>
+        </p:nvSpPr>
+        <p:spPr>
+          <a:xfrm>
+            <a:off x="221101" y="1972688"/>
+            <a:ext cx="518786" cy="261610"/>
+          </a:xfrm>
+          <a:prstGeom prst="rect">
+            <a:avLst/>
+          </a:prstGeom>
+          <a:noFill/>
+        </p:spPr>
+        <p:txBody>
+          <a:bodyPr wrap="square" rtlCol="0">
+            <a:spAutoFit/>
+          </a:bodyPr>
+          <a:lstStyle/>
+          <a:p>
+            <a:pPr algn="ctr"/>
+            <a:r>
+              <a:rPr lang="de-DE" sz="1100" i="1" dirty="0">
+                <a:solidFill>
+                  <a:schemeClr val="accent5"/>
+                </a:solidFill>
+                <a:latin typeface="Latin Modern Math" panose="02000503000000000000" pitchFamily="50" charset="0"/>
+                <a:ea typeface="Latin Modern Math" panose="02000503000000000000" pitchFamily="50" charset="0"/>
+                <a:cs typeface="CMU Serif" panose="02000603000000000000" pitchFamily="2" charset="0"/>
+              </a:rPr>
+              <a:t>ω </a:t>
+            </a:r>
+            <a:r>
+              <a:rPr lang="de-DE" sz="400" dirty="0">
+                <a:solidFill>
+                  <a:schemeClr val="accent5"/>
+                </a:solidFill>
+                <a:latin typeface="Latin Modern Math" panose="02000503000000000000" pitchFamily="50" charset="0"/>
+                <a:ea typeface="Latin Modern Math" panose="02000503000000000000" pitchFamily="50" charset="0"/>
+                <a:cs typeface="CMU Serif" panose="02000603000000000000" pitchFamily="2" charset="0"/>
+              </a:rPr>
+              <a:t>∙</a:t>
+            </a:r>
+            <a:r>
+              <a:rPr lang="de-DE" sz="1100" i="1" dirty="0">
+                <a:solidFill>
+                  <a:schemeClr val="accent5"/>
+                </a:solidFill>
+                <a:latin typeface="Latin Modern Math" panose="02000503000000000000" pitchFamily="50" charset="0"/>
+                <a:ea typeface="Latin Modern Math" panose="02000503000000000000" pitchFamily="50" charset="0"/>
+                <a:cs typeface="CMU Serif" panose="02000603000000000000" pitchFamily="2" charset="0"/>
+              </a:rPr>
+              <a:t> </a:t>
+            </a:r>
+            <a:r>
+              <a:rPr lang="de-DE" sz="1100" i="1" dirty="0">
+                <a:solidFill>
+                  <a:schemeClr val="accent5"/>
+                </a:solidFill>
+                <a:latin typeface="CMU Serif" panose="02000603000000000000" pitchFamily="2" charset="0"/>
+                <a:ea typeface="CMU Serif" panose="02000603000000000000" pitchFamily="2" charset="0"/>
+                <a:cs typeface="CMU Serif" panose="02000603000000000000" pitchFamily="2" charset="0"/>
+              </a:rPr>
+              <a:t>t</a:t>
+            </a:r>
+            <a:endParaRPr lang="de-DE" sz="1100" baseline="-25000" dirty="0">
+              <a:solidFill>
+                <a:schemeClr val="accent5"/>
+              </a:solidFill>
+              <a:latin typeface="CMU Serif" panose="02000603000000000000" pitchFamily="2" charset="0"/>
+              <a:ea typeface="CMU Serif" panose="02000603000000000000" pitchFamily="2" charset="0"/>
+              <a:cs typeface="CMU Serif" panose="02000603000000000000" pitchFamily="2" charset="0"/>
+            </a:endParaRPr>
+          </a:p>
+        </p:txBody>
+      </p:sp>
+      <p:sp>
+        <p:nvSpPr>
+          <p:cNvPr id="34" name="Freihandform: Form 33">
+            <a:extLst>
+              <a:ext uri="{FF2B5EF4-FFF2-40B4-BE49-F238E27FC236}">
+                <a16:creationId xmlns:a16="http://schemas.microsoft.com/office/drawing/2014/main" id="{9074440D-910A-C8C2-E051-F12F66349C99}"/>
+              </a:ext>
+            </a:extLst>
+          </p:cNvPr>
+          <p:cNvSpPr/>
+          <p:nvPr/>
+        </p:nvSpPr>
+        <p:spPr>
+          <a:xfrm>
+            <a:off x="308152" y="1065882"/>
+            <a:ext cx="704850" cy="826600"/>
+          </a:xfrm>
+          <a:custGeom>
+            <a:avLst/>
+            <a:gdLst>
+              <a:gd name="csX0" fmla="*/ 0 w 708660"/>
+              <a:gd name="csY0" fmla="*/ 645160 h 647700"/>
+              <a:gd name="csX1" fmla="*/ 337820 w 708660"/>
+              <a:gd name="csY1" fmla="*/ 0 h 647700"/>
+              <a:gd name="csX2" fmla="*/ 708660 w 708660"/>
+              <a:gd name="csY2" fmla="*/ 647700 h 647700"/>
+              <a:gd name="csX0" fmla="*/ 0 w 708660"/>
+              <a:gd name="csY0" fmla="*/ 645160 h 647700"/>
+              <a:gd name="csX1" fmla="*/ 337820 w 708660"/>
+              <a:gd name="csY1" fmla="*/ 0 h 647700"/>
+              <a:gd name="csX2" fmla="*/ 708660 w 708660"/>
+              <a:gd name="csY2" fmla="*/ 647700 h 647700"/>
+              <a:gd name="csX0" fmla="*/ 0 w 708660"/>
+              <a:gd name="csY0" fmla="*/ 645160 h 647700"/>
+              <a:gd name="csX1" fmla="*/ 337820 w 708660"/>
+              <a:gd name="csY1" fmla="*/ 0 h 647700"/>
+              <a:gd name="csX2" fmla="*/ 708660 w 708660"/>
+              <a:gd name="csY2" fmla="*/ 647700 h 647700"/>
+              <a:gd name="csX0" fmla="*/ 0 w 708660"/>
+              <a:gd name="csY0" fmla="*/ 645160 h 647700"/>
+              <a:gd name="csX1" fmla="*/ 337820 w 708660"/>
+              <a:gd name="csY1" fmla="*/ 0 h 647700"/>
+              <a:gd name="csX2" fmla="*/ 708660 w 708660"/>
+              <a:gd name="csY2" fmla="*/ 647700 h 647700"/>
+              <a:gd name="csX0" fmla="*/ 0 w 708660"/>
+              <a:gd name="csY0" fmla="*/ 647058 h 649598"/>
+              <a:gd name="csX1" fmla="*/ 356870 w 708660"/>
+              <a:gd name="csY1" fmla="*/ 0 h 649598"/>
+              <a:gd name="csX2" fmla="*/ 708660 w 708660"/>
+              <a:gd name="csY2" fmla="*/ 649598 h 649598"/>
+              <a:gd name="csX0" fmla="*/ 0 w 704850"/>
+              <a:gd name="csY0" fmla="*/ 647058 h 647058"/>
+              <a:gd name="csX1" fmla="*/ 356870 w 704850"/>
+              <a:gd name="csY1" fmla="*/ 0 h 647058"/>
+              <a:gd name="csX2" fmla="*/ 704850 w 704850"/>
+              <a:gd name="csY2" fmla="*/ 645803 h 647058"/>
+              <a:gd name="csX0" fmla="*/ 0 w 704850"/>
+              <a:gd name="csY0" fmla="*/ 647078 h 647078"/>
+              <a:gd name="csX1" fmla="*/ 356870 w 704850"/>
+              <a:gd name="csY1" fmla="*/ 20 h 647078"/>
+              <a:gd name="csX2" fmla="*/ 704850 w 704850"/>
+              <a:gd name="csY2" fmla="*/ 645823 h 647078"/>
+              <a:gd name="csX0" fmla="*/ 0 w 704850"/>
+              <a:gd name="csY0" fmla="*/ 647078 h 647078"/>
+              <a:gd name="csX1" fmla="*/ 341630 w 704850"/>
+              <a:gd name="csY1" fmla="*/ 20 h 647078"/>
+              <a:gd name="csX2" fmla="*/ 704850 w 704850"/>
+              <a:gd name="csY2" fmla="*/ 645823 h 647078"/>
+              <a:gd name="csX0" fmla="*/ 0 w 704850"/>
+              <a:gd name="csY0" fmla="*/ 647078 h 647078"/>
+              <a:gd name="csX1" fmla="*/ 351155 w 704850"/>
+              <a:gd name="csY1" fmla="*/ 20 h 647078"/>
+              <a:gd name="csX2" fmla="*/ 704850 w 704850"/>
+              <a:gd name="csY2" fmla="*/ 645823 h 647078"/>
+              <a:gd name="csX0" fmla="*/ 0 w 704850"/>
+              <a:gd name="csY0" fmla="*/ 647078 h 647078"/>
+              <a:gd name="csX1" fmla="*/ 351155 w 704850"/>
+              <a:gd name="csY1" fmla="*/ 20 h 647078"/>
+              <a:gd name="csX2" fmla="*/ 704850 w 704850"/>
+              <a:gd name="csY2" fmla="*/ 645823 h 647078"/>
+              <a:gd name="csX0" fmla="*/ 0 w 704850"/>
+              <a:gd name="csY0" fmla="*/ 647078 h 647078"/>
+              <a:gd name="csX1" fmla="*/ 351155 w 704850"/>
+              <a:gd name="csY1" fmla="*/ 20 h 647078"/>
+              <a:gd name="csX2" fmla="*/ 704850 w 704850"/>
+              <a:gd name="csY2" fmla="*/ 645823 h 647078"/>
+              <a:gd name="csX0" fmla="*/ 0 w 704850"/>
+              <a:gd name="csY0" fmla="*/ 647078 h 647078"/>
+              <a:gd name="csX1" fmla="*/ 351155 w 704850"/>
+              <a:gd name="csY1" fmla="*/ 20 h 647078"/>
+              <a:gd name="csX2" fmla="*/ 704850 w 704850"/>
+              <a:gd name="csY2" fmla="*/ 645823 h 647078"/>
+              <a:gd name="csX0" fmla="*/ 0 w 704850"/>
+              <a:gd name="csY0" fmla="*/ 647078 h 647078"/>
+              <a:gd name="csX1" fmla="*/ 351155 w 704850"/>
+              <a:gd name="csY1" fmla="*/ 20 h 647078"/>
+              <a:gd name="csX2" fmla="*/ 704850 w 704850"/>
+              <a:gd name="csY2" fmla="*/ 645823 h 647078"/>
+              <a:gd name="csX0" fmla="*/ 0 w 704850"/>
+              <a:gd name="csY0" fmla="*/ 647078 h 647078"/>
+              <a:gd name="csX1" fmla="*/ 351155 w 704850"/>
+              <a:gd name="csY1" fmla="*/ 20 h 647078"/>
+              <a:gd name="csX2" fmla="*/ 704850 w 704850"/>
+              <a:gd name="csY2" fmla="*/ 645823 h 647078"/>
+              <a:gd name="csX0" fmla="*/ 0 w 704850"/>
+              <a:gd name="csY0" fmla="*/ 647078 h 647078"/>
+              <a:gd name="csX1" fmla="*/ 351155 w 704850"/>
+              <a:gd name="csY1" fmla="*/ 20 h 647078"/>
+              <a:gd name="csX2" fmla="*/ 704850 w 704850"/>
+              <a:gd name="csY2" fmla="*/ 645823 h 647078"/>
+              <a:gd name="csX0" fmla="*/ 0 w 704850"/>
+              <a:gd name="csY0" fmla="*/ 647062 h 647062"/>
+              <a:gd name="csX1" fmla="*/ 351155 w 704850"/>
+              <a:gd name="csY1" fmla="*/ 4 h 647062"/>
+              <a:gd name="csX2" fmla="*/ 704850 w 704850"/>
+              <a:gd name="csY2" fmla="*/ 645807 h 647062"/>
+            </a:gdLst>
+            <a:ahLst/>
+            <a:cxnLst>
+              <a:cxn ang="0">
+                <a:pos x="csX0" y="csY0"/>
+              </a:cxn>
+              <a:cxn ang="0">
+                <a:pos x="csX1" y="csY1"/>
+              </a:cxn>
+              <a:cxn ang="0">
+                <a:pos x="csX2" y="csY2"/>
+              </a:cxn>
+            </a:cxnLst>
+            <a:rect l="l" t="t" r="r" b="b"/>
+            <a:pathLst>
+              <a:path w="704850" h="647062">
+                <a:moveTo>
+                  <a:pt x="0" y="647062"/>
+                </a:moveTo>
+                <a:cubicBezTo>
+                  <a:pt x="69850" y="415353"/>
+                  <a:pt x="191135" y="1478"/>
+                  <a:pt x="351155" y="4"/>
+                </a:cubicBezTo>
+                <a:cubicBezTo>
+                  <a:pt x="511175" y="-1470"/>
+                  <a:pt x="618490" y="408469"/>
+                  <a:pt x="704850" y="645807"/>
+                </a:cubicBezTo>
+              </a:path>
+            </a:pathLst>
+          </a:custGeom>
+          <a:noFill/>
+          <a:ln cap="rnd">
+            <a:solidFill>
+              <a:srgbClr val="086FBD"/>
+            </a:solidFill>
+            <a:round/>
+          </a:ln>
+        </p:spPr>
+        <p:style>
+          <a:lnRef idx="2">
+            <a:schemeClr val="accent1">
+              <a:shade val="15000"/>
+            </a:schemeClr>
+          </a:lnRef>
+          <a:fillRef idx="1">
+            <a:schemeClr val="accent1"/>
+          </a:fillRef>
+          <a:effectRef idx="0">
+            <a:schemeClr val="accent1"/>
+          </a:effectRef>
+          <a:fontRef idx="minor">
+            <a:schemeClr val="lt1"/>
+          </a:fontRef>
+        </p:style>
+        <p:txBody>
+          <a:bodyPr rtlCol="0" anchor="ctr"/>
+          <a:lstStyle/>
+          <a:p>
+            <a:pPr algn="ctr"/>
+            <a:endParaRPr lang="de-DE"/>
+          </a:p>
+        </p:txBody>
+      </p:sp>
+      <p:sp>
+        <p:nvSpPr>
+          <p:cNvPr id="36" name="Freihandform: Form 35">
+            <a:extLst>
+              <a:ext uri="{FF2B5EF4-FFF2-40B4-BE49-F238E27FC236}">
+                <a16:creationId xmlns:a16="http://schemas.microsoft.com/office/drawing/2014/main" id="{39709E4D-6FC7-E514-A720-C1D46715D3AC}"/>
+              </a:ext>
+            </a:extLst>
+          </p:cNvPr>
+          <p:cNvSpPr/>
+          <p:nvPr/>
+        </p:nvSpPr>
+        <p:spPr>
+          <a:xfrm>
+            <a:off x="1717852" y="1067408"/>
+            <a:ext cx="704850" cy="826600"/>
+          </a:xfrm>
+          <a:custGeom>
+            <a:avLst/>
+            <a:gdLst>
+              <a:gd name="csX0" fmla="*/ 0 w 708660"/>
+              <a:gd name="csY0" fmla="*/ 645160 h 647700"/>
+              <a:gd name="csX1" fmla="*/ 337820 w 708660"/>
+              <a:gd name="csY1" fmla="*/ 0 h 647700"/>
+              <a:gd name="csX2" fmla="*/ 708660 w 708660"/>
+              <a:gd name="csY2" fmla="*/ 647700 h 647700"/>
+              <a:gd name="csX0" fmla="*/ 0 w 708660"/>
+              <a:gd name="csY0" fmla="*/ 645160 h 647700"/>
+              <a:gd name="csX1" fmla="*/ 337820 w 708660"/>
+              <a:gd name="csY1" fmla="*/ 0 h 647700"/>
+              <a:gd name="csX2" fmla="*/ 708660 w 708660"/>
+              <a:gd name="csY2" fmla="*/ 647700 h 647700"/>
+              <a:gd name="csX0" fmla="*/ 0 w 708660"/>
+              <a:gd name="csY0" fmla="*/ 645160 h 647700"/>
+              <a:gd name="csX1" fmla="*/ 337820 w 708660"/>
+              <a:gd name="csY1" fmla="*/ 0 h 647700"/>
+              <a:gd name="csX2" fmla="*/ 708660 w 708660"/>
+              <a:gd name="csY2" fmla="*/ 647700 h 647700"/>
+              <a:gd name="csX0" fmla="*/ 0 w 708660"/>
+              <a:gd name="csY0" fmla="*/ 645160 h 647700"/>
+              <a:gd name="csX1" fmla="*/ 337820 w 708660"/>
+              <a:gd name="csY1" fmla="*/ 0 h 647700"/>
+              <a:gd name="csX2" fmla="*/ 708660 w 708660"/>
+              <a:gd name="csY2" fmla="*/ 647700 h 647700"/>
+              <a:gd name="csX0" fmla="*/ 0 w 708660"/>
+              <a:gd name="csY0" fmla="*/ 647058 h 649598"/>
+              <a:gd name="csX1" fmla="*/ 356870 w 708660"/>
+              <a:gd name="csY1" fmla="*/ 0 h 649598"/>
+              <a:gd name="csX2" fmla="*/ 708660 w 708660"/>
+              <a:gd name="csY2" fmla="*/ 649598 h 649598"/>
+              <a:gd name="csX0" fmla="*/ 0 w 704850"/>
+              <a:gd name="csY0" fmla="*/ 647058 h 647058"/>
+              <a:gd name="csX1" fmla="*/ 356870 w 704850"/>
+              <a:gd name="csY1" fmla="*/ 0 h 647058"/>
+              <a:gd name="csX2" fmla="*/ 704850 w 704850"/>
+              <a:gd name="csY2" fmla="*/ 645803 h 647058"/>
+              <a:gd name="csX0" fmla="*/ 0 w 704850"/>
+              <a:gd name="csY0" fmla="*/ 647078 h 647078"/>
+              <a:gd name="csX1" fmla="*/ 356870 w 704850"/>
+              <a:gd name="csY1" fmla="*/ 20 h 647078"/>
+              <a:gd name="csX2" fmla="*/ 704850 w 704850"/>
+              <a:gd name="csY2" fmla="*/ 645823 h 647078"/>
+              <a:gd name="csX0" fmla="*/ 0 w 704850"/>
+              <a:gd name="csY0" fmla="*/ 647078 h 647078"/>
+              <a:gd name="csX1" fmla="*/ 341630 w 704850"/>
+              <a:gd name="csY1" fmla="*/ 20 h 647078"/>
+              <a:gd name="csX2" fmla="*/ 704850 w 704850"/>
+              <a:gd name="csY2" fmla="*/ 645823 h 647078"/>
+              <a:gd name="csX0" fmla="*/ 0 w 704850"/>
+              <a:gd name="csY0" fmla="*/ 647078 h 647078"/>
+              <a:gd name="csX1" fmla="*/ 351155 w 704850"/>
+              <a:gd name="csY1" fmla="*/ 20 h 647078"/>
+              <a:gd name="csX2" fmla="*/ 704850 w 704850"/>
+              <a:gd name="csY2" fmla="*/ 645823 h 647078"/>
+              <a:gd name="csX0" fmla="*/ 0 w 704850"/>
+              <a:gd name="csY0" fmla="*/ 647078 h 647078"/>
+              <a:gd name="csX1" fmla="*/ 351155 w 704850"/>
+              <a:gd name="csY1" fmla="*/ 20 h 647078"/>
+              <a:gd name="csX2" fmla="*/ 704850 w 704850"/>
+              <a:gd name="csY2" fmla="*/ 645823 h 647078"/>
+              <a:gd name="csX0" fmla="*/ 0 w 704850"/>
+              <a:gd name="csY0" fmla="*/ 647078 h 647078"/>
+              <a:gd name="csX1" fmla="*/ 351155 w 704850"/>
+              <a:gd name="csY1" fmla="*/ 20 h 647078"/>
+              <a:gd name="csX2" fmla="*/ 704850 w 704850"/>
+              <a:gd name="csY2" fmla="*/ 645823 h 647078"/>
+              <a:gd name="csX0" fmla="*/ 0 w 704850"/>
+              <a:gd name="csY0" fmla="*/ 647078 h 647078"/>
+              <a:gd name="csX1" fmla="*/ 351155 w 704850"/>
+              <a:gd name="csY1" fmla="*/ 20 h 647078"/>
+              <a:gd name="csX2" fmla="*/ 704850 w 704850"/>
+              <a:gd name="csY2" fmla="*/ 645823 h 647078"/>
+              <a:gd name="csX0" fmla="*/ 0 w 704850"/>
+              <a:gd name="csY0" fmla="*/ 647078 h 647078"/>
+              <a:gd name="csX1" fmla="*/ 351155 w 704850"/>
+              <a:gd name="csY1" fmla="*/ 20 h 647078"/>
+              <a:gd name="csX2" fmla="*/ 704850 w 704850"/>
+              <a:gd name="csY2" fmla="*/ 645823 h 647078"/>
+              <a:gd name="csX0" fmla="*/ 0 w 704850"/>
+              <a:gd name="csY0" fmla="*/ 647078 h 647078"/>
+              <a:gd name="csX1" fmla="*/ 351155 w 704850"/>
+              <a:gd name="csY1" fmla="*/ 20 h 647078"/>
+              <a:gd name="csX2" fmla="*/ 704850 w 704850"/>
+              <a:gd name="csY2" fmla="*/ 645823 h 647078"/>
+              <a:gd name="csX0" fmla="*/ 0 w 704850"/>
+              <a:gd name="csY0" fmla="*/ 647078 h 647078"/>
+              <a:gd name="csX1" fmla="*/ 351155 w 704850"/>
+              <a:gd name="csY1" fmla="*/ 20 h 647078"/>
+              <a:gd name="csX2" fmla="*/ 704850 w 704850"/>
+              <a:gd name="csY2" fmla="*/ 645823 h 647078"/>
+              <a:gd name="csX0" fmla="*/ 0 w 704850"/>
+              <a:gd name="csY0" fmla="*/ 647062 h 647062"/>
+              <a:gd name="csX1" fmla="*/ 351155 w 704850"/>
+              <a:gd name="csY1" fmla="*/ 4 h 647062"/>
+              <a:gd name="csX2" fmla="*/ 704850 w 704850"/>
+              <a:gd name="csY2" fmla="*/ 645807 h 647062"/>
+            </a:gdLst>
+            <a:ahLst/>
+            <a:cxnLst>
+              <a:cxn ang="0">
+                <a:pos x="csX0" y="csY0"/>
+              </a:cxn>
+              <a:cxn ang="0">
+                <a:pos x="csX1" y="csY1"/>
+              </a:cxn>
+              <a:cxn ang="0">
+                <a:pos x="csX2" y="csY2"/>
+              </a:cxn>
+            </a:cxnLst>
+            <a:rect l="l" t="t" r="r" b="b"/>
+            <a:pathLst>
+              <a:path w="704850" h="647062">
+                <a:moveTo>
+                  <a:pt x="0" y="647062"/>
+                </a:moveTo>
+                <a:cubicBezTo>
+                  <a:pt x="69850" y="415353"/>
+                  <a:pt x="191135" y="1478"/>
+                  <a:pt x="351155" y="4"/>
+                </a:cubicBezTo>
+                <a:cubicBezTo>
+                  <a:pt x="511175" y="-1470"/>
+                  <a:pt x="618490" y="408469"/>
+                  <a:pt x="704850" y="645807"/>
+                </a:cubicBezTo>
+              </a:path>
+            </a:pathLst>
+          </a:custGeom>
+          <a:noFill/>
+          <a:ln cap="rnd">
+            <a:solidFill>
+              <a:srgbClr val="086FBD"/>
+            </a:solidFill>
+            <a:round/>
+          </a:ln>
+        </p:spPr>
+        <p:style>
+          <a:lnRef idx="2">
+            <a:schemeClr val="accent1">
+              <a:shade val="15000"/>
+            </a:schemeClr>
+          </a:lnRef>
+          <a:fillRef idx="1">
+            <a:schemeClr val="accent1"/>
+          </a:fillRef>
+          <a:effectRef idx="0">
+            <a:schemeClr val="accent1"/>
+          </a:effectRef>
+          <a:fontRef idx="minor">
+            <a:schemeClr val="lt1"/>
+          </a:fontRef>
+        </p:style>
+        <p:txBody>
+          <a:bodyPr rtlCol="0" anchor="ctr"/>
+          <a:lstStyle/>
+          <a:p>
+            <a:pPr algn="ctr"/>
+            <a:endParaRPr lang="de-DE"/>
+          </a:p>
+        </p:txBody>
+      </p:sp>
+      <p:sp>
+        <p:nvSpPr>
+          <p:cNvPr id="37" name="Rechteck 36">
+            <a:extLst>
+              <a:ext uri="{FF2B5EF4-FFF2-40B4-BE49-F238E27FC236}">
+                <a16:creationId xmlns:a16="http://schemas.microsoft.com/office/drawing/2014/main" id="{16FC56F2-01B9-E780-5DE3-3C624D2014CC}"/>
+              </a:ext>
+            </a:extLst>
+          </p:cNvPr>
+          <p:cNvSpPr/>
+          <p:nvPr/>
+        </p:nvSpPr>
+        <p:spPr>
+          <a:xfrm>
+            <a:off x="2073931" y="992505"/>
+            <a:ext cx="361602" cy="1274444"/>
+          </a:xfrm>
+          <a:prstGeom prst="rect">
+            <a:avLst/>
+          </a:prstGeom>
+          <a:solidFill>
+            <a:schemeClr val="bg1"/>
+          </a:solidFill>
+          <a:ln>
+            <a:noFill/>
+          </a:ln>
+        </p:spPr>
+        <p:style>
+          <a:lnRef idx="2">
+            <a:schemeClr val="accent1">
+              <a:shade val="15000"/>
+            </a:schemeClr>
+          </a:lnRef>
+          <a:fillRef idx="1">
+            <a:schemeClr val="accent1"/>
+          </a:fillRef>
+          <a:effectRef idx="0">
+            <a:schemeClr val="accent1"/>
+          </a:effectRef>
+          <a:fontRef idx="minor">
+            <a:schemeClr val="lt1"/>
+          </a:fontRef>
+        </p:style>
+        <p:txBody>
+          <a:bodyPr rtlCol="0" anchor="ctr"/>
+          <a:lstStyle/>
+          <a:p>
+            <a:pPr algn="ctr"/>
+            <a:endParaRPr lang="de-DE" dirty="0"/>
+          </a:p>
+        </p:txBody>
+      </p:sp>
+      <p:cxnSp>
+        <p:nvCxnSpPr>
+          <p:cNvPr id="55" name="Gerader Verbinder 54">
+            <a:extLst>
+              <a:ext uri="{FF2B5EF4-FFF2-40B4-BE49-F238E27FC236}">
+                <a16:creationId xmlns:a16="http://schemas.microsoft.com/office/drawing/2014/main" id="{9C4A2523-D9A7-0991-FCDD-2434C9D9642C}"/>
+              </a:ext>
+            </a:extLst>
+          </p:cNvPr>
+          <p:cNvCxnSpPr>
+            <a:cxnSpLocks/>
+          </p:cNvCxnSpPr>
+          <p:nvPr/>
+        </p:nvCxnSpPr>
+        <p:spPr>
+          <a:xfrm flipV="1">
+            <a:off x="1374952" y="1956435"/>
+            <a:ext cx="0" cy="868680"/>
+          </a:xfrm>
+          <a:prstGeom prst="line">
+            <a:avLst/>
+          </a:prstGeom>
+          <a:ln w="9525" cap="rnd">
+            <a:solidFill>
+              <a:schemeClr val="accent6">
+                <a:lumMod val="75000"/>
+              </a:schemeClr>
+            </a:solidFill>
+            <a:prstDash val="sysDash"/>
+            <a:round/>
           </a:ln>
         </p:spPr>
         <p:style>
@@ -4371,10 +8731,10 @@
       </p:cxnSp>
       <p:cxnSp>
         <p:nvCxnSpPr>
-          <p:cNvPr id="6" name="Gerade Verbindung mit Pfeil 5">
-            <a:extLst>
-              <a:ext uri="{FF2B5EF4-FFF2-40B4-BE49-F238E27FC236}">
-                <a16:creationId xmlns:a16="http://schemas.microsoft.com/office/drawing/2014/main" id="{8C88241A-EB7B-07A8-F278-E5DA0AAFA51F}"/>
+          <p:cNvPr id="58" name="Gerader Verbinder 57">
+            <a:extLst>
+              <a:ext uri="{FF2B5EF4-FFF2-40B4-BE49-F238E27FC236}">
+                <a16:creationId xmlns:a16="http://schemas.microsoft.com/office/drawing/2014/main" id="{636FBA8B-6AD5-CBF8-4856-3BF838FEBB7C}"/>
               </a:ext>
             </a:extLst>
           </p:cNvPr>
@@ -4384,9 +8744,970 @@
           <p:nvPr/>
         </p:nvCxnSpPr>
         <p:spPr>
-          <a:xfrm>
-            <a:off x="1030266" y="2119639"/>
-            <a:ext cx="1500513" cy="0"/>
+          <a:xfrm flipV="1">
+            <a:off x="1717852" y="1956435"/>
+            <a:ext cx="0" cy="868680"/>
+          </a:xfrm>
+          <a:prstGeom prst="line">
+            <a:avLst/>
+          </a:prstGeom>
+          <a:ln w="9525" cap="rnd">
+            <a:solidFill>
+              <a:schemeClr val="accent6">
+                <a:lumMod val="75000"/>
+              </a:schemeClr>
+            </a:solidFill>
+            <a:prstDash val="sysDash"/>
+            <a:round/>
+          </a:ln>
+        </p:spPr>
+        <p:style>
+          <a:lnRef idx="2">
+            <a:schemeClr val="accent1"/>
+          </a:lnRef>
+          <a:fillRef idx="0">
+            <a:schemeClr val="accent1"/>
+          </a:fillRef>
+          <a:effectRef idx="1">
+            <a:schemeClr val="accent1"/>
+          </a:effectRef>
+          <a:fontRef idx="minor">
+            <a:schemeClr val="tx1"/>
+          </a:fontRef>
+        </p:style>
+      </p:cxnSp>
+      <p:sp>
+        <p:nvSpPr>
+          <p:cNvPr id="14" name="Textfeld 13">
+            <a:extLst>
+              <a:ext uri="{FF2B5EF4-FFF2-40B4-BE49-F238E27FC236}">
+                <a16:creationId xmlns:a16="http://schemas.microsoft.com/office/drawing/2014/main" id="{9D6B427D-7103-C8D9-9B61-2EC15C4F0F66}"/>
+              </a:ext>
+            </a:extLst>
+          </p:cNvPr>
+          <p:cNvSpPr txBox="1"/>
+          <p:nvPr/>
+        </p:nvSpPr>
+        <p:spPr>
+          <a:xfrm>
+            <a:off x="1971154" y="1509140"/>
+            <a:ext cx="518786" cy="261610"/>
+          </a:xfrm>
+          <a:prstGeom prst="rect">
+            <a:avLst/>
+          </a:prstGeom>
+          <a:noFill/>
+        </p:spPr>
+        <p:txBody>
+          <a:bodyPr wrap="square" rtlCol="0">
+            <a:spAutoFit/>
+          </a:bodyPr>
+          <a:lstStyle/>
+          <a:p>
+            <a:pPr algn="ctr"/>
+            <a:r>
+              <a:rPr lang="de-DE" sz="1100" i="1" dirty="0">
+                <a:solidFill>
+                  <a:srgbClr val="FF0000"/>
+                </a:solidFill>
+                <a:latin typeface="CMU Serif" panose="02000603000000000000" pitchFamily="2" charset="0"/>
+                <a:ea typeface="CMU Serif" panose="02000603000000000000" pitchFamily="2" charset="0"/>
+                <a:cs typeface="CMU Serif" panose="02000603000000000000" pitchFamily="2" charset="0"/>
+              </a:rPr>
+              <a:t>i</a:t>
+            </a:r>
+            <a:r>
+              <a:rPr lang="de-DE" sz="1100" baseline="-25000" dirty="0">
+                <a:solidFill>
+                  <a:srgbClr val="FF0000"/>
+                </a:solidFill>
+                <a:latin typeface="CMU Serif" panose="02000603000000000000" pitchFamily="2" charset="0"/>
+                <a:ea typeface="CMU Serif" panose="02000603000000000000" pitchFamily="2" charset="0"/>
+                <a:cs typeface="CMU Serif" panose="02000603000000000000" pitchFamily="2" charset="0"/>
+              </a:rPr>
+              <a:t>C</a:t>
+            </a:r>
+            <a:r>
+              <a:rPr lang="de-DE" sz="1100" dirty="0">
+                <a:solidFill>
+                  <a:srgbClr val="FF0000"/>
+                </a:solidFill>
+                <a:latin typeface="CMU Serif" panose="02000603000000000000" pitchFamily="2" charset="0"/>
+                <a:ea typeface="CMU Serif" panose="02000603000000000000" pitchFamily="2" charset="0"/>
+                <a:cs typeface="CMU Serif" panose="02000603000000000000" pitchFamily="2" charset="0"/>
+              </a:rPr>
+              <a:t>(</a:t>
+            </a:r>
+            <a:r>
+              <a:rPr lang="de-DE" sz="1100" i="1" dirty="0">
+                <a:solidFill>
+                  <a:srgbClr val="FF0000"/>
+                </a:solidFill>
+                <a:latin typeface="CMU Serif" panose="02000603000000000000" pitchFamily="2" charset="0"/>
+                <a:ea typeface="CMU Serif" panose="02000603000000000000" pitchFamily="2" charset="0"/>
+                <a:cs typeface="CMU Serif" panose="02000603000000000000" pitchFamily="2" charset="0"/>
+              </a:rPr>
+              <a:t>t</a:t>
+            </a:r>
+            <a:r>
+              <a:rPr lang="de-DE" sz="1100" dirty="0">
+                <a:solidFill>
+                  <a:srgbClr val="FF0000"/>
+                </a:solidFill>
+                <a:latin typeface="CMU Serif" panose="02000603000000000000" pitchFamily="2" charset="0"/>
+                <a:ea typeface="CMU Serif" panose="02000603000000000000" pitchFamily="2" charset="0"/>
+                <a:cs typeface="CMU Serif" panose="02000603000000000000" pitchFamily="2" charset="0"/>
+              </a:rPr>
+              <a:t>)</a:t>
+            </a:r>
+            <a:endParaRPr lang="de-DE" sz="1100" baseline="-25000" dirty="0">
+              <a:solidFill>
+                <a:srgbClr val="FF0000"/>
+              </a:solidFill>
+              <a:latin typeface="CMU Serif" panose="02000603000000000000" pitchFamily="2" charset="0"/>
+              <a:ea typeface="CMU Serif" panose="02000603000000000000" pitchFamily="2" charset="0"/>
+              <a:cs typeface="CMU Serif" panose="02000603000000000000" pitchFamily="2" charset="0"/>
+            </a:endParaRPr>
+          </a:p>
+        </p:txBody>
+      </p:sp>
+      <p:sp>
+        <p:nvSpPr>
+          <p:cNvPr id="13" name="Textfeld 12">
+            <a:extLst>
+              <a:ext uri="{FF2B5EF4-FFF2-40B4-BE49-F238E27FC236}">
+                <a16:creationId xmlns:a16="http://schemas.microsoft.com/office/drawing/2014/main" id="{5D110753-944D-7F52-1F70-E7BADFA17F06}"/>
+              </a:ext>
+            </a:extLst>
+          </p:cNvPr>
+          <p:cNvSpPr txBox="1"/>
+          <p:nvPr/>
+        </p:nvSpPr>
+        <p:spPr>
+          <a:xfrm>
+            <a:off x="1437641" y="924972"/>
+            <a:ext cx="567731" cy="261610"/>
+          </a:xfrm>
+          <a:prstGeom prst="rect">
+            <a:avLst/>
+          </a:prstGeom>
+          <a:noFill/>
+        </p:spPr>
+        <p:txBody>
+          <a:bodyPr wrap="square" rtlCol="0">
+            <a:spAutoFit/>
+          </a:bodyPr>
+          <a:lstStyle/>
+          <a:p>
+            <a:pPr algn="ctr"/>
+            <a:r>
+              <a:rPr lang="de-DE" sz="1100" i="1" dirty="0">
+                <a:solidFill>
+                  <a:srgbClr val="086FBD"/>
+                </a:solidFill>
+                <a:latin typeface="CMU Serif" panose="02000603000000000000" pitchFamily="2" charset="0"/>
+                <a:ea typeface="CMU Serif" panose="02000603000000000000" pitchFamily="2" charset="0"/>
+                <a:cs typeface="CMU Serif" panose="02000603000000000000" pitchFamily="2" charset="0"/>
+              </a:rPr>
+              <a:t>u</a:t>
+            </a:r>
+            <a:r>
+              <a:rPr lang="de-DE" sz="1100" baseline="-25000" dirty="0">
+                <a:solidFill>
+                  <a:srgbClr val="086FBD"/>
+                </a:solidFill>
+                <a:latin typeface="CMU Serif" panose="02000603000000000000" pitchFamily="2" charset="0"/>
+                <a:ea typeface="CMU Serif" panose="02000603000000000000" pitchFamily="2" charset="0"/>
+                <a:cs typeface="CMU Serif" panose="02000603000000000000" pitchFamily="2" charset="0"/>
+              </a:rPr>
+              <a:t>C</a:t>
+            </a:r>
+            <a:r>
+              <a:rPr lang="de-DE" sz="1100" dirty="0">
+                <a:solidFill>
+                  <a:srgbClr val="086FBD"/>
+                </a:solidFill>
+                <a:latin typeface="CMU Serif" panose="02000603000000000000" pitchFamily="2" charset="0"/>
+                <a:ea typeface="CMU Serif" panose="02000603000000000000" pitchFamily="2" charset="0"/>
+                <a:cs typeface="CMU Serif" panose="02000603000000000000" pitchFamily="2" charset="0"/>
+              </a:rPr>
+              <a:t>(</a:t>
+            </a:r>
+            <a:r>
+              <a:rPr lang="de-DE" sz="1100" i="1" dirty="0">
+                <a:solidFill>
+                  <a:srgbClr val="086FBD"/>
+                </a:solidFill>
+                <a:latin typeface="CMU Serif" panose="02000603000000000000" pitchFamily="2" charset="0"/>
+                <a:ea typeface="CMU Serif" panose="02000603000000000000" pitchFamily="2" charset="0"/>
+                <a:cs typeface="CMU Serif" panose="02000603000000000000" pitchFamily="2" charset="0"/>
+              </a:rPr>
+              <a:t>t</a:t>
+            </a:r>
+            <a:r>
+              <a:rPr lang="de-DE" sz="1100" dirty="0">
+                <a:solidFill>
+                  <a:srgbClr val="086FBD"/>
+                </a:solidFill>
+                <a:latin typeface="CMU Serif" panose="02000603000000000000" pitchFamily="2" charset="0"/>
+                <a:ea typeface="CMU Serif" panose="02000603000000000000" pitchFamily="2" charset="0"/>
+                <a:cs typeface="CMU Serif" panose="02000603000000000000" pitchFamily="2" charset="0"/>
+              </a:rPr>
+              <a:t>)</a:t>
+            </a:r>
+            <a:endParaRPr lang="de-DE" sz="1100" baseline="-25000" dirty="0">
+              <a:solidFill>
+                <a:srgbClr val="086FBD"/>
+              </a:solidFill>
+              <a:latin typeface="CMU Serif" panose="02000603000000000000" pitchFamily="2" charset="0"/>
+              <a:ea typeface="CMU Serif" panose="02000603000000000000" pitchFamily="2" charset="0"/>
+              <a:cs typeface="CMU Serif" panose="02000603000000000000" pitchFamily="2" charset="0"/>
+            </a:endParaRPr>
+          </a:p>
+        </p:txBody>
+      </p:sp>
+      <p:sp>
+        <p:nvSpPr>
+          <p:cNvPr id="70" name="Textfeld 69">
+            <a:extLst>
+              <a:ext uri="{FF2B5EF4-FFF2-40B4-BE49-F238E27FC236}">
+                <a16:creationId xmlns:a16="http://schemas.microsoft.com/office/drawing/2014/main" id="{842880C7-4AEA-2257-D92F-CADBD5522BDF}"/>
+              </a:ext>
+            </a:extLst>
+          </p:cNvPr>
+          <p:cNvSpPr txBox="1"/>
+          <p:nvPr/>
+        </p:nvSpPr>
+        <p:spPr>
+          <a:xfrm>
+            <a:off x="2076137" y="1905639"/>
+            <a:ext cx="518786" cy="261610"/>
+          </a:xfrm>
+          <a:prstGeom prst="rect">
+            <a:avLst/>
+          </a:prstGeom>
+          <a:noFill/>
+        </p:spPr>
+        <p:txBody>
+          <a:bodyPr wrap="square" rtlCol="0">
+            <a:spAutoFit/>
+          </a:bodyPr>
+          <a:lstStyle/>
+          <a:p>
+            <a:pPr algn="ctr"/>
+            <a:r>
+              <a:rPr lang="de-DE" sz="1100" i="1" dirty="0">
+                <a:latin typeface="CMU Serif" panose="02000603000000000000" pitchFamily="2" charset="0"/>
+                <a:ea typeface="CMU Serif" panose="02000603000000000000" pitchFamily="2" charset="0"/>
+                <a:cs typeface="CMU Serif" panose="02000603000000000000" pitchFamily="2" charset="0"/>
+              </a:rPr>
+              <a:t>t</a:t>
+            </a:r>
+            <a:endParaRPr lang="de-DE" sz="1100" baseline="-25000" dirty="0">
+              <a:latin typeface="CMU Serif" panose="02000603000000000000" pitchFamily="2" charset="0"/>
+              <a:ea typeface="CMU Serif" panose="02000603000000000000" pitchFamily="2" charset="0"/>
+              <a:cs typeface="CMU Serif" panose="02000603000000000000" pitchFamily="2" charset="0"/>
+            </a:endParaRPr>
+          </a:p>
+        </p:txBody>
+      </p:sp>
+      <p:sp>
+        <p:nvSpPr>
+          <p:cNvPr id="71" name="Textfeld 70">
+            <a:extLst>
+              <a:ext uri="{FF2B5EF4-FFF2-40B4-BE49-F238E27FC236}">
+                <a16:creationId xmlns:a16="http://schemas.microsoft.com/office/drawing/2014/main" id="{5BFA32F6-A92A-403C-9E4F-CF016E2D3BE9}"/>
+              </a:ext>
+            </a:extLst>
+          </p:cNvPr>
+          <p:cNvSpPr txBox="1"/>
+          <p:nvPr/>
+        </p:nvSpPr>
+        <p:spPr>
+          <a:xfrm>
+            <a:off x="265340" y="849727"/>
+            <a:ext cx="567731" cy="261610"/>
+          </a:xfrm>
+          <a:prstGeom prst="rect">
+            <a:avLst/>
+          </a:prstGeom>
+          <a:noFill/>
+        </p:spPr>
+        <p:txBody>
+          <a:bodyPr wrap="square" rtlCol="0">
+            <a:spAutoFit/>
+          </a:bodyPr>
+          <a:lstStyle/>
+          <a:p>
+            <a:pPr algn="ctr"/>
+            <a:r>
+              <a:rPr lang="de-DE" sz="1100" i="1" dirty="0">
+                <a:solidFill>
+                  <a:srgbClr val="086FBD"/>
+                </a:solidFill>
+                <a:latin typeface="CMU Serif" panose="02000603000000000000" pitchFamily="2" charset="0"/>
+                <a:ea typeface="CMU Serif" panose="02000603000000000000" pitchFamily="2" charset="0"/>
+                <a:cs typeface="CMU Serif" panose="02000603000000000000" pitchFamily="2" charset="0"/>
+              </a:rPr>
+              <a:t>u</a:t>
+            </a:r>
+            <a:r>
+              <a:rPr lang="de-DE" sz="500" dirty="0">
+                <a:solidFill>
+                  <a:srgbClr val="086FBD"/>
+                </a:solidFill>
+                <a:latin typeface="CMU Serif" panose="02000603000000000000" pitchFamily="2" charset="0"/>
+                <a:ea typeface="CMU Serif" panose="02000603000000000000" pitchFamily="2" charset="0"/>
+                <a:cs typeface="CMU Serif" panose="02000603000000000000" pitchFamily="2" charset="0"/>
+              </a:rPr>
+              <a:t> </a:t>
+            </a:r>
+            <a:r>
+              <a:rPr lang="de-DE" sz="1100" dirty="0">
+                <a:latin typeface="CMU Serif" panose="02000603000000000000" pitchFamily="2" charset="0"/>
+                <a:ea typeface="CMU Serif" panose="02000603000000000000" pitchFamily="2" charset="0"/>
+                <a:cs typeface="CMU Serif" panose="02000603000000000000" pitchFamily="2" charset="0"/>
+              </a:rPr>
+              <a:t>/</a:t>
+            </a:r>
+            <a:r>
+              <a:rPr lang="de-DE" sz="500" dirty="0">
+                <a:solidFill>
+                  <a:srgbClr val="086FBD"/>
+                </a:solidFill>
+                <a:latin typeface="CMU Serif" panose="02000603000000000000" pitchFamily="2" charset="0"/>
+                <a:ea typeface="CMU Serif" panose="02000603000000000000" pitchFamily="2" charset="0"/>
+                <a:cs typeface="CMU Serif" panose="02000603000000000000" pitchFamily="2" charset="0"/>
+              </a:rPr>
+              <a:t> </a:t>
+            </a:r>
+            <a:r>
+              <a:rPr lang="de-DE" sz="1100" i="1" dirty="0">
+                <a:solidFill>
+                  <a:srgbClr val="FF0000"/>
+                </a:solidFill>
+                <a:latin typeface="CMU Serif" panose="02000603000000000000" pitchFamily="2" charset="0"/>
+                <a:ea typeface="CMU Serif" panose="02000603000000000000" pitchFamily="2" charset="0"/>
+                <a:cs typeface="CMU Serif" panose="02000603000000000000" pitchFamily="2" charset="0"/>
+              </a:rPr>
+              <a:t>i</a:t>
+            </a:r>
+          </a:p>
+        </p:txBody>
+      </p:sp>
+      <p:sp>
+        <p:nvSpPr>
+          <p:cNvPr id="2" name="Freihandform: Form 1">
+            <a:extLst>
+              <a:ext uri="{FF2B5EF4-FFF2-40B4-BE49-F238E27FC236}">
+                <a16:creationId xmlns:a16="http://schemas.microsoft.com/office/drawing/2014/main" id="{66B4D4AD-92DD-D676-1D93-D7817E0D36C9}"/>
+              </a:ext>
+            </a:extLst>
+          </p:cNvPr>
+          <p:cNvSpPr/>
+          <p:nvPr/>
+        </p:nvSpPr>
+        <p:spPr>
+          <a:xfrm>
+            <a:off x="-35657" y="1307737"/>
+            <a:ext cx="704850" cy="585552"/>
+          </a:xfrm>
+          <a:custGeom>
+            <a:avLst/>
+            <a:gdLst>
+              <a:gd name="csX0" fmla="*/ 0 w 708660"/>
+              <a:gd name="csY0" fmla="*/ 645160 h 647700"/>
+              <a:gd name="csX1" fmla="*/ 337820 w 708660"/>
+              <a:gd name="csY1" fmla="*/ 0 h 647700"/>
+              <a:gd name="csX2" fmla="*/ 708660 w 708660"/>
+              <a:gd name="csY2" fmla="*/ 647700 h 647700"/>
+              <a:gd name="csX0" fmla="*/ 0 w 708660"/>
+              <a:gd name="csY0" fmla="*/ 645160 h 647700"/>
+              <a:gd name="csX1" fmla="*/ 337820 w 708660"/>
+              <a:gd name="csY1" fmla="*/ 0 h 647700"/>
+              <a:gd name="csX2" fmla="*/ 708660 w 708660"/>
+              <a:gd name="csY2" fmla="*/ 647700 h 647700"/>
+              <a:gd name="csX0" fmla="*/ 0 w 708660"/>
+              <a:gd name="csY0" fmla="*/ 645160 h 647700"/>
+              <a:gd name="csX1" fmla="*/ 337820 w 708660"/>
+              <a:gd name="csY1" fmla="*/ 0 h 647700"/>
+              <a:gd name="csX2" fmla="*/ 708660 w 708660"/>
+              <a:gd name="csY2" fmla="*/ 647700 h 647700"/>
+              <a:gd name="csX0" fmla="*/ 0 w 708660"/>
+              <a:gd name="csY0" fmla="*/ 645160 h 647700"/>
+              <a:gd name="csX1" fmla="*/ 337820 w 708660"/>
+              <a:gd name="csY1" fmla="*/ 0 h 647700"/>
+              <a:gd name="csX2" fmla="*/ 708660 w 708660"/>
+              <a:gd name="csY2" fmla="*/ 647700 h 647700"/>
+              <a:gd name="csX0" fmla="*/ 0 w 708660"/>
+              <a:gd name="csY0" fmla="*/ 647058 h 649598"/>
+              <a:gd name="csX1" fmla="*/ 356870 w 708660"/>
+              <a:gd name="csY1" fmla="*/ 0 h 649598"/>
+              <a:gd name="csX2" fmla="*/ 708660 w 708660"/>
+              <a:gd name="csY2" fmla="*/ 649598 h 649598"/>
+              <a:gd name="csX0" fmla="*/ 0 w 704850"/>
+              <a:gd name="csY0" fmla="*/ 647058 h 647058"/>
+              <a:gd name="csX1" fmla="*/ 356870 w 704850"/>
+              <a:gd name="csY1" fmla="*/ 0 h 647058"/>
+              <a:gd name="csX2" fmla="*/ 704850 w 704850"/>
+              <a:gd name="csY2" fmla="*/ 645803 h 647058"/>
+              <a:gd name="csX0" fmla="*/ 0 w 704850"/>
+              <a:gd name="csY0" fmla="*/ 647078 h 647078"/>
+              <a:gd name="csX1" fmla="*/ 356870 w 704850"/>
+              <a:gd name="csY1" fmla="*/ 20 h 647078"/>
+              <a:gd name="csX2" fmla="*/ 704850 w 704850"/>
+              <a:gd name="csY2" fmla="*/ 645823 h 647078"/>
+              <a:gd name="csX0" fmla="*/ 0 w 704850"/>
+              <a:gd name="csY0" fmla="*/ 647078 h 647078"/>
+              <a:gd name="csX1" fmla="*/ 341630 w 704850"/>
+              <a:gd name="csY1" fmla="*/ 20 h 647078"/>
+              <a:gd name="csX2" fmla="*/ 704850 w 704850"/>
+              <a:gd name="csY2" fmla="*/ 645823 h 647078"/>
+              <a:gd name="csX0" fmla="*/ 0 w 704850"/>
+              <a:gd name="csY0" fmla="*/ 647078 h 647078"/>
+              <a:gd name="csX1" fmla="*/ 351155 w 704850"/>
+              <a:gd name="csY1" fmla="*/ 20 h 647078"/>
+              <a:gd name="csX2" fmla="*/ 704850 w 704850"/>
+              <a:gd name="csY2" fmla="*/ 645823 h 647078"/>
+              <a:gd name="csX0" fmla="*/ 0 w 704850"/>
+              <a:gd name="csY0" fmla="*/ 647078 h 647078"/>
+              <a:gd name="csX1" fmla="*/ 351155 w 704850"/>
+              <a:gd name="csY1" fmla="*/ 20 h 647078"/>
+              <a:gd name="csX2" fmla="*/ 704850 w 704850"/>
+              <a:gd name="csY2" fmla="*/ 645823 h 647078"/>
+              <a:gd name="csX0" fmla="*/ 0 w 704850"/>
+              <a:gd name="csY0" fmla="*/ 647078 h 647078"/>
+              <a:gd name="csX1" fmla="*/ 351155 w 704850"/>
+              <a:gd name="csY1" fmla="*/ 20 h 647078"/>
+              <a:gd name="csX2" fmla="*/ 704850 w 704850"/>
+              <a:gd name="csY2" fmla="*/ 645823 h 647078"/>
+              <a:gd name="csX0" fmla="*/ 0 w 704850"/>
+              <a:gd name="csY0" fmla="*/ 647078 h 647078"/>
+              <a:gd name="csX1" fmla="*/ 351155 w 704850"/>
+              <a:gd name="csY1" fmla="*/ 20 h 647078"/>
+              <a:gd name="csX2" fmla="*/ 704850 w 704850"/>
+              <a:gd name="csY2" fmla="*/ 645823 h 647078"/>
+              <a:gd name="csX0" fmla="*/ 0 w 704850"/>
+              <a:gd name="csY0" fmla="*/ 647078 h 647078"/>
+              <a:gd name="csX1" fmla="*/ 351155 w 704850"/>
+              <a:gd name="csY1" fmla="*/ 20 h 647078"/>
+              <a:gd name="csX2" fmla="*/ 704850 w 704850"/>
+              <a:gd name="csY2" fmla="*/ 645823 h 647078"/>
+              <a:gd name="csX0" fmla="*/ 0 w 704850"/>
+              <a:gd name="csY0" fmla="*/ 647078 h 647078"/>
+              <a:gd name="csX1" fmla="*/ 351155 w 704850"/>
+              <a:gd name="csY1" fmla="*/ 20 h 647078"/>
+              <a:gd name="csX2" fmla="*/ 704850 w 704850"/>
+              <a:gd name="csY2" fmla="*/ 645823 h 647078"/>
+              <a:gd name="csX0" fmla="*/ 0 w 704850"/>
+              <a:gd name="csY0" fmla="*/ 647078 h 647078"/>
+              <a:gd name="csX1" fmla="*/ 351155 w 704850"/>
+              <a:gd name="csY1" fmla="*/ 20 h 647078"/>
+              <a:gd name="csX2" fmla="*/ 704850 w 704850"/>
+              <a:gd name="csY2" fmla="*/ 645823 h 647078"/>
+              <a:gd name="csX0" fmla="*/ 0 w 704850"/>
+              <a:gd name="csY0" fmla="*/ 647062 h 647062"/>
+              <a:gd name="csX1" fmla="*/ 351155 w 704850"/>
+              <a:gd name="csY1" fmla="*/ 4 h 647062"/>
+              <a:gd name="csX2" fmla="*/ 704850 w 704850"/>
+              <a:gd name="csY2" fmla="*/ 645807 h 647062"/>
+            </a:gdLst>
+            <a:ahLst/>
+            <a:cxnLst>
+              <a:cxn ang="0">
+                <a:pos x="csX0" y="csY0"/>
+              </a:cxn>
+              <a:cxn ang="0">
+                <a:pos x="csX1" y="csY1"/>
+              </a:cxn>
+              <a:cxn ang="0">
+                <a:pos x="csX2" y="csY2"/>
+              </a:cxn>
+            </a:cxnLst>
+            <a:rect l="l" t="t" r="r" b="b"/>
+            <a:pathLst>
+              <a:path w="704850" h="647062">
+                <a:moveTo>
+                  <a:pt x="0" y="647062"/>
+                </a:moveTo>
+                <a:cubicBezTo>
+                  <a:pt x="69850" y="415353"/>
+                  <a:pt x="191135" y="1478"/>
+                  <a:pt x="351155" y="4"/>
+                </a:cubicBezTo>
+                <a:cubicBezTo>
+                  <a:pt x="511175" y="-1470"/>
+                  <a:pt x="618490" y="408469"/>
+                  <a:pt x="704850" y="645807"/>
+                </a:cubicBezTo>
+              </a:path>
+            </a:pathLst>
+          </a:custGeom>
+          <a:noFill/>
+          <a:ln cap="rnd">
+            <a:solidFill>
+              <a:srgbClr val="FF0000"/>
+            </a:solidFill>
+            <a:round/>
+          </a:ln>
+        </p:spPr>
+        <p:style>
+          <a:lnRef idx="2">
+            <a:schemeClr val="accent1">
+              <a:shade val="15000"/>
+            </a:schemeClr>
+          </a:lnRef>
+          <a:fillRef idx="1">
+            <a:schemeClr val="accent1"/>
+          </a:fillRef>
+          <a:effectRef idx="0">
+            <a:schemeClr val="accent1"/>
+          </a:effectRef>
+          <a:fontRef idx="minor">
+            <a:schemeClr val="lt1"/>
+          </a:fontRef>
+        </p:style>
+        <p:txBody>
+          <a:bodyPr rtlCol="0" anchor="ctr"/>
+          <a:lstStyle/>
+          <a:p>
+            <a:pPr algn="ctr"/>
+            <a:endParaRPr lang="de-DE"/>
+          </a:p>
+        </p:txBody>
+      </p:sp>
+      <p:sp>
+        <p:nvSpPr>
+          <p:cNvPr id="3" name="Freihandform: Form 2">
+            <a:extLst>
+              <a:ext uri="{FF2B5EF4-FFF2-40B4-BE49-F238E27FC236}">
+                <a16:creationId xmlns:a16="http://schemas.microsoft.com/office/drawing/2014/main" id="{62DE6A45-B863-666D-8620-45438762F58C}"/>
+              </a:ext>
+            </a:extLst>
+          </p:cNvPr>
+          <p:cNvSpPr/>
+          <p:nvPr/>
+        </p:nvSpPr>
+        <p:spPr>
+          <a:xfrm>
+            <a:off x="1373094" y="1307374"/>
+            <a:ext cx="704850" cy="585552"/>
+          </a:xfrm>
+          <a:custGeom>
+            <a:avLst/>
+            <a:gdLst>
+              <a:gd name="csX0" fmla="*/ 0 w 708660"/>
+              <a:gd name="csY0" fmla="*/ 645160 h 647700"/>
+              <a:gd name="csX1" fmla="*/ 337820 w 708660"/>
+              <a:gd name="csY1" fmla="*/ 0 h 647700"/>
+              <a:gd name="csX2" fmla="*/ 708660 w 708660"/>
+              <a:gd name="csY2" fmla="*/ 647700 h 647700"/>
+              <a:gd name="csX0" fmla="*/ 0 w 708660"/>
+              <a:gd name="csY0" fmla="*/ 645160 h 647700"/>
+              <a:gd name="csX1" fmla="*/ 337820 w 708660"/>
+              <a:gd name="csY1" fmla="*/ 0 h 647700"/>
+              <a:gd name="csX2" fmla="*/ 708660 w 708660"/>
+              <a:gd name="csY2" fmla="*/ 647700 h 647700"/>
+              <a:gd name="csX0" fmla="*/ 0 w 708660"/>
+              <a:gd name="csY0" fmla="*/ 645160 h 647700"/>
+              <a:gd name="csX1" fmla="*/ 337820 w 708660"/>
+              <a:gd name="csY1" fmla="*/ 0 h 647700"/>
+              <a:gd name="csX2" fmla="*/ 708660 w 708660"/>
+              <a:gd name="csY2" fmla="*/ 647700 h 647700"/>
+              <a:gd name="csX0" fmla="*/ 0 w 708660"/>
+              <a:gd name="csY0" fmla="*/ 645160 h 647700"/>
+              <a:gd name="csX1" fmla="*/ 337820 w 708660"/>
+              <a:gd name="csY1" fmla="*/ 0 h 647700"/>
+              <a:gd name="csX2" fmla="*/ 708660 w 708660"/>
+              <a:gd name="csY2" fmla="*/ 647700 h 647700"/>
+              <a:gd name="csX0" fmla="*/ 0 w 708660"/>
+              <a:gd name="csY0" fmla="*/ 647058 h 649598"/>
+              <a:gd name="csX1" fmla="*/ 356870 w 708660"/>
+              <a:gd name="csY1" fmla="*/ 0 h 649598"/>
+              <a:gd name="csX2" fmla="*/ 708660 w 708660"/>
+              <a:gd name="csY2" fmla="*/ 649598 h 649598"/>
+              <a:gd name="csX0" fmla="*/ 0 w 704850"/>
+              <a:gd name="csY0" fmla="*/ 647058 h 647058"/>
+              <a:gd name="csX1" fmla="*/ 356870 w 704850"/>
+              <a:gd name="csY1" fmla="*/ 0 h 647058"/>
+              <a:gd name="csX2" fmla="*/ 704850 w 704850"/>
+              <a:gd name="csY2" fmla="*/ 645803 h 647058"/>
+              <a:gd name="csX0" fmla="*/ 0 w 704850"/>
+              <a:gd name="csY0" fmla="*/ 647078 h 647078"/>
+              <a:gd name="csX1" fmla="*/ 356870 w 704850"/>
+              <a:gd name="csY1" fmla="*/ 20 h 647078"/>
+              <a:gd name="csX2" fmla="*/ 704850 w 704850"/>
+              <a:gd name="csY2" fmla="*/ 645823 h 647078"/>
+              <a:gd name="csX0" fmla="*/ 0 w 704850"/>
+              <a:gd name="csY0" fmla="*/ 647078 h 647078"/>
+              <a:gd name="csX1" fmla="*/ 341630 w 704850"/>
+              <a:gd name="csY1" fmla="*/ 20 h 647078"/>
+              <a:gd name="csX2" fmla="*/ 704850 w 704850"/>
+              <a:gd name="csY2" fmla="*/ 645823 h 647078"/>
+              <a:gd name="csX0" fmla="*/ 0 w 704850"/>
+              <a:gd name="csY0" fmla="*/ 647078 h 647078"/>
+              <a:gd name="csX1" fmla="*/ 351155 w 704850"/>
+              <a:gd name="csY1" fmla="*/ 20 h 647078"/>
+              <a:gd name="csX2" fmla="*/ 704850 w 704850"/>
+              <a:gd name="csY2" fmla="*/ 645823 h 647078"/>
+              <a:gd name="csX0" fmla="*/ 0 w 704850"/>
+              <a:gd name="csY0" fmla="*/ 647078 h 647078"/>
+              <a:gd name="csX1" fmla="*/ 351155 w 704850"/>
+              <a:gd name="csY1" fmla="*/ 20 h 647078"/>
+              <a:gd name="csX2" fmla="*/ 704850 w 704850"/>
+              <a:gd name="csY2" fmla="*/ 645823 h 647078"/>
+              <a:gd name="csX0" fmla="*/ 0 w 704850"/>
+              <a:gd name="csY0" fmla="*/ 647078 h 647078"/>
+              <a:gd name="csX1" fmla="*/ 351155 w 704850"/>
+              <a:gd name="csY1" fmla="*/ 20 h 647078"/>
+              <a:gd name="csX2" fmla="*/ 704850 w 704850"/>
+              <a:gd name="csY2" fmla="*/ 645823 h 647078"/>
+              <a:gd name="csX0" fmla="*/ 0 w 704850"/>
+              <a:gd name="csY0" fmla="*/ 647078 h 647078"/>
+              <a:gd name="csX1" fmla="*/ 351155 w 704850"/>
+              <a:gd name="csY1" fmla="*/ 20 h 647078"/>
+              <a:gd name="csX2" fmla="*/ 704850 w 704850"/>
+              <a:gd name="csY2" fmla="*/ 645823 h 647078"/>
+              <a:gd name="csX0" fmla="*/ 0 w 704850"/>
+              <a:gd name="csY0" fmla="*/ 647078 h 647078"/>
+              <a:gd name="csX1" fmla="*/ 351155 w 704850"/>
+              <a:gd name="csY1" fmla="*/ 20 h 647078"/>
+              <a:gd name="csX2" fmla="*/ 704850 w 704850"/>
+              <a:gd name="csY2" fmla="*/ 645823 h 647078"/>
+              <a:gd name="csX0" fmla="*/ 0 w 704850"/>
+              <a:gd name="csY0" fmla="*/ 647078 h 647078"/>
+              <a:gd name="csX1" fmla="*/ 351155 w 704850"/>
+              <a:gd name="csY1" fmla="*/ 20 h 647078"/>
+              <a:gd name="csX2" fmla="*/ 704850 w 704850"/>
+              <a:gd name="csY2" fmla="*/ 645823 h 647078"/>
+              <a:gd name="csX0" fmla="*/ 0 w 704850"/>
+              <a:gd name="csY0" fmla="*/ 647078 h 647078"/>
+              <a:gd name="csX1" fmla="*/ 351155 w 704850"/>
+              <a:gd name="csY1" fmla="*/ 20 h 647078"/>
+              <a:gd name="csX2" fmla="*/ 704850 w 704850"/>
+              <a:gd name="csY2" fmla="*/ 645823 h 647078"/>
+              <a:gd name="csX0" fmla="*/ 0 w 704850"/>
+              <a:gd name="csY0" fmla="*/ 647062 h 647062"/>
+              <a:gd name="csX1" fmla="*/ 351155 w 704850"/>
+              <a:gd name="csY1" fmla="*/ 4 h 647062"/>
+              <a:gd name="csX2" fmla="*/ 704850 w 704850"/>
+              <a:gd name="csY2" fmla="*/ 645807 h 647062"/>
+            </a:gdLst>
+            <a:ahLst/>
+            <a:cxnLst>
+              <a:cxn ang="0">
+                <a:pos x="csX0" y="csY0"/>
+              </a:cxn>
+              <a:cxn ang="0">
+                <a:pos x="csX1" y="csY1"/>
+              </a:cxn>
+              <a:cxn ang="0">
+                <a:pos x="csX2" y="csY2"/>
+              </a:cxn>
+            </a:cxnLst>
+            <a:rect l="l" t="t" r="r" b="b"/>
+            <a:pathLst>
+              <a:path w="704850" h="647062">
+                <a:moveTo>
+                  <a:pt x="0" y="647062"/>
+                </a:moveTo>
+                <a:cubicBezTo>
+                  <a:pt x="69850" y="415353"/>
+                  <a:pt x="191135" y="1478"/>
+                  <a:pt x="351155" y="4"/>
+                </a:cubicBezTo>
+                <a:cubicBezTo>
+                  <a:pt x="511175" y="-1470"/>
+                  <a:pt x="618490" y="408469"/>
+                  <a:pt x="704850" y="645807"/>
+                </a:cubicBezTo>
+              </a:path>
+            </a:pathLst>
+          </a:custGeom>
+          <a:noFill/>
+          <a:ln cap="rnd">
+            <a:solidFill>
+              <a:srgbClr val="FF0000"/>
+            </a:solidFill>
+            <a:round/>
+          </a:ln>
+        </p:spPr>
+        <p:style>
+          <a:lnRef idx="2">
+            <a:schemeClr val="accent1">
+              <a:shade val="15000"/>
+            </a:schemeClr>
+          </a:lnRef>
+          <a:fillRef idx="1">
+            <a:schemeClr val="accent1"/>
+          </a:fillRef>
+          <a:effectRef idx="0">
+            <a:schemeClr val="accent1"/>
+          </a:effectRef>
+          <a:fontRef idx="minor">
+            <a:schemeClr val="lt1"/>
+          </a:fontRef>
+        </p:style>
+        <p:txBody>
+          <a:bodyPr rtlCol="0" anchor="ctr"/>
+          <a:lstStyle/>
+          <a:p>
+            <a:pPr algn="ctr"/>
+            <a:endParaRPr lang="de-DE"/>
+          </a:p>
+        </p:txBody>
+      </p:sp>
+      <p:sp>
+        <p:nvSpPr>
+          <p:cNvPr id="4" name="Freihandform: Form 3">
+            <a:extLst>
+              <a:ext uri="{FF2B5EF4-FFF2-40B4-BE49-F238E27FC236}">
+                <a16:creationId xmlns:a16="http://schemas.microsoft.com/office/drawing/2014/main" id="{80ED771D-C827-4F32-5C03-41BEC2BBFC71}"/>
+              </a:ext>
+            </a:extLst>
+          </p:cNvPr>
+          <p:cNvSpPr/>
+          <p:nvPr/>
+        </p:nvSpPr>
+        <p:spPr>
+          <a:xfrm rot="10800000">
+            <a:off x="1012799" y="1893289"/>
+            <a:ext cx="704850" cy="826600"/>
+          </a:xfrm>
+          <a:custGeom>
+            <a:avLst/>
+            <a:gdLst>
+              <a:gd name="csX0" fmla="*/ 0 w 708660"/>
+              <a:gd name="csY0" fmla="*/ 645160 h 647700"/>
+              <a:gd name="csX1" fmla="*/ 337820 w 708660"/>
+              <a:gd name="csY1" fmla="*/ 0 h 647700"/>
+              <a:gd name="csX2" fmla="*/ 708660 w 708660"/>
+              <a:gd name="csY2" fmla="*/ 647700 h 647700"/>
+              <a:gd name="csX0" fmla="*/ 0 w 708660"/>
+              <a:gd name="csY0" fmla="*/ 645160 h 647700"/>
+              <a:gd name="csX1" fmla="*/ 337820 w 708660"/>
+              <a:gd name="csY1" fmla="*/ 0 h 647700"/>
+              <a:gd name="csX2" fmla="*/ 708660 w 708660"/>
+              <a:gd name="csY2" fmla="*/ 647700 h 647700"/>
+              <a:gd name="csX0" fmla="*/ 0 w 708660"/>
+              <a:gd name="csY0" fmla="*/ 645160 h 647700"/>
+              <a:gd name="csX1" fmla="*/ 337820 w 708660"/>
+              <a:gd name="csY1" fmla="*/ 0 h 647700"/>
+              <a:gd name="csX2" fmla="*/ 708660 w 708660"/>
+              <a:gd name="csY2" fmla="*/ 647700 h 647700"/>
+              <a:gd name="csX0" fmla="*/ 0 w 708660"/>
+              <a:gd name="csY0" fmla="*/ 645160 h 647700"/>
+              <a:gd name="csX1" fmla="*/ 337820 w 708660"/>
+              <a:gd name="csY1" fmla="*/ 0 h 647700"/>
+              <a:gd name="csX2" fmla="*/ 708660 w 708660"/>
+              <a:gd name="csY2" fmla="*/ 647700 h 647700"/>
+              <a:gd name="csX0" fmla="*/ 0 w 708660"/>
+              <a:gd name="csY0" fmla="*/ 647058 h 649598"/>
+              <a:gd name="csX1" fmla="*/ 356870 w 708660"/>
+              <a:gd name="csY1" fmla="*/ 0 h 649598"/>
+              <a:gd name="csX2" fmla="*/ 708660 w 708660"/>
+              <a:gd name="csY2" fmla="*/ 649598 h 649598"/>
+              <a:gd name="csX0" fmla="*/ 0 w 704850"/>
+              <a:gd name="csY0" fmla="*/ 647058 h 647058"/>
+              <a:gd name="csX1" fmla="*/ 356870 w 704850"/>
+              <a:gd name="csY1" fmla="*/ 0 h 647058"/>
+              <a:gd name="csX2" fmla="*/ 704850 w 704850"/>
+              <a:gd name="csY2" fmla="*/ 645803 h 647058"/>
+              <a:gd name="csX0" fmla="*/ 0 w 704850"/>
+              <a:gd name="csY0" fmla="*/ 647078 h 647078"/>
+              <a:gd name="csX1" fmla="*/ 356870 w 704850"/>
+              <a:gd name="csY1" fmla="*/ 20 h 647078"/>
+              <a:gd name="csX2" fmla="*/ 704850 w 704850"/>
+              <a:gd name="csY2" fmla="*/ 645823 h 647078"/>
+              <a:gd name="csX0" fmla="*/ 0 w 704850"/>
+              <a:gd name="csY0" fmla="*/ 647078 h 647078"/>
+              <a:gd name="csX1" fmla="*/ 341630 w 704850"/>
+              <a:gd name="csY1" fmla="*/ 20 h 647078"/>
+              <a:gd name="csX2" fmla="*/ 704850 w 704850"/>
+              <a:gd name="csY2" fmla="*/ 645823 h 647078"/>
+              <a:gd name="csX0" fmla="*/ 0 w 704850"/>
+              <a:gd name="csY0" fmla="*/ 647078 h 647078"/>
+              <a:gd name="csX1" fmla="*/ 351155 w 704850"/>
+              <a:gd name="csY1" fmla="*/ 20 h 647078"/>
+              <a:gd name="csX2" fmla="*/ 704850 w 704850"/>
+              <a:gd name="csY2" fmla="*/ 645823 h 647078"/>
+              <a:gd name="csX0" fmla="*/ 0 w 704850"/>
+              <a:gd name="csY0" fmla="*/ 647078 h 647078"/>
+              <a:gd name="csX1" fmla="*/ 351155 w 704850"/>
+              <a:gd name="csY1" fmla="*/ 20 h 647078"/>
+              <a:gd name="csX2" fmla="*/ 704850 w 704850"/>
+              <a:gd name="csY2" fmla="*/ 645823 h 647078"/>
+              <a:gd name="csX0" fmla="*/ 0 w 704850"/>
+              <a:gd name="csY0" fmla="*/ 647078 h 647078"/>
+              <a:gd name="csX1" fmla="*/ 351155 w 704850"/>
+              <a:gd name="csY1" fmla="*/ 20 h 647078"/>
+              <a:gd name="csX2" fmla="*/ 704850 w 704850"/>
+              <a:gd name="csY2" fmla="*/ 645823 h 647078"/>
+              <a:gd name="csX0" fmla="*/ 0 w 704850"/>
+              <a:gd name="csY0" fmla="*/ 647078 h 647078"/>
+              <a:gd name="csX1" fmla="*/ 351155 w 704850"/>
+              <a:gd name="csY1" fmla="*/ 20 h 647078"/>
+              <a:gd name="csX2" fmla="*/ 704850 w 704850"/>
+              <a:gd name="csY2" fmla="*/ 645823 h 647078"/>
+              <a:gd name="csX0" fmla="*/ 0 w 704850"/>
+              <a:gd name="csY0" fmla="*/ 647078 h 647078"/>
+              <a:gd name="csX1" fmla="*/ 351155 w 704850"/>
+              <a:gd name="csY1" fmla="*/ 20 h 647078"/>
+              <a:gd name="csX2" fmla="*/ 704850 w 704850"/>
+              <a:gd name="csY2" fmla="*/ 645823 h 647078"/>
+              <a:gd name="csX0" fmla="*/ 0 w 704850"/>
+              <a:gd name="csY0" fmla="*/ 647078 h 647078"/>
+              <a:gd name="csX1" fmla="*/ 351155 w 704850"/>
+              <a:gd name="csY1" fmla="*/ 20 h 647078"/>
+              <a:gd name="csX2" fmla="*/ 704850 w 704850"/>
+              <a:gd name="csY2" fmla="*/ 645823 h 647078"/>
+              <a:gd name="csX0" fmla="*/ 0 w 704850"/>
+              <a:gd name="csY0" fmla="*/ 647078 h 647078"/>
+              <a:gd name="csX1" fmla="*/ 351155 w 704850"/>
+              <a:gd name="csY1" fmla="*/ 20 h 647078"/>
+              <a:gd name="csX2" fmla="*/ 704850 w 704850"/>
+              <a:gd name="csY2" fmla="*/ 645823 h 647078"/>
+              <a:gd name="csX0" fmla="*/ 0 w 704850"/>
+              <a:gd name="csY0" fmla="*/ 647062 h 647062"/>
+              <a:gd name="csX1" fmla="*/ 351155 w 704850"/>
+              <a:gd name="csY1" fmla="*/ 4 h 647062"/>
+              <a:gd name="csX2" fmla="*/ 704850 w 704850"/>
+              <a:gd name="csY2" fmla="*/ 645807 h 647062"/>
+            </a:gdLst>
+            <a:ahLst/>
+            <a:cxnLst>
+              <a:cxn ang="0">
+                <a:pos x="csX0" y="csY0"/>
+              </a:cxn>
+              <a:cxn ang="0">
+                <a:pos x="csX1" y="csY1"/>
+              </a:cxn>
+              <a:cxn ang="0">
+                <a:pos x="csX2" y="csY2"/>
+              </a:cxn>
+            </a:cxnLst>
+            <a:rect l="l" t="t" r="r" b="b"/>
+            <a:pathLst>
+              <a:path w="704850" h="647062">
+                <a:moveTo>
+                  <a:pt x="0" y="647062"/>
+                </a:moveTo>
+                <a:cubicBezTo>
+                  <a:pt x="69850" y="415353"/>
+                  <a:pt x="191135" y="1478"/>
+                  <a:pt x="351155" y="4"/>
+                </a:cubicBezTo>
+                <a:cubicBezTo>
+                  <a:pt x="511175" y="-1470"/>
+                  <a:pt x="618490" y="408469"/>
+                  <a:pt x="704850" y="645807"/>
+                </a:cubicBezTo>
+              </a:path>
+            </a:pathLst>
+          </a:custGeom>
+          <a:noFill/>
+          <a:ln cap="rnd">
+            <a:solidFill>
+              <a:srgbClr val="086FBD"/>
+            </a:solidFill>
+            <a:round/>
+          </a:ln>
+        </p:spPr>
+        <p:style>
+          <a:lnRef idx="2">
+            <a:schemeClr val="accent1">
+              <a:shade val="15000"/>
+            </a:schemeClr>
+          </a:lnRef>
+          <a:fillRef idx="1">
+            <a:schemeClr val="accent1"/>
+          </a:fillRef>
+          <a:effectRef idx="0">
+            <a:schemeClr val="accent1"/>
+          </a:effectRef>
+          <a:fontRef idx="minor">
+            <a:schemeClr val="lt1"/>
+          </a:fontRef>
+        </p:style>
+        <p:txBody>
+          <a:bodyPr rtlCol="0" anchor="ctr"/>
+          <a:lstStyle/>
+          <a:p>
+            <a:pPr algn="ctr"/>
+            <a:endParaRPr lang="de-DE"/>
+          </a:p>
+        </p:txBody>
+      </p:sp>
+      <p:sp>
+        <p:nvSpPr>
+          <p:cNvPr id="27" name="Rechteck 26">
+            <a:extLst>
+              <a:ext uri="{FF2B5EF4-FFF2-40B4-BE49-F238E27FC236}">
+                <a16:creationId xmlns:a16="http://schemas.microsoft.com/office/drawing/2014/main" id="{DF9FC455-9CBF-5C5E-AF89-5764605D26FF}"/>
+              </a:ext>
+            </a:extLst>
+          </p:cNvPr>
+          <p:cNvSpPr/>
+          <p:nvPr/>
+        </p:nvSpPr>
+        <p:spPr>
+          <a:xfrm>
+            <a:off x="-60775" y="992505"/>
+            <a:ext cx="361602" cy="1043939"/>
+          </a:xfrm>
+          <a:prstGeom prst="rect">
+            <a:avLst/>
+          </a:prstGeom>
+          <a:solidFill>
+            <a:schemeClr val="bg1"/>
+          </a:solidFill>
+          <a:ln>
+            <a:noFill/>
+          </a:ln>
+        </p:spPr>
+        <p:style>
+          <a:lnRef idx="2">
+            <a:schemeClr val="accent1">
+              <a:shade val="15000"/>
+            </a:schemeClr>
+          </a:lnRef>
+          <a:fillRef idx="1">
+            <a:schemeClr val="accent1"/>
+          </a:fillRef>
+          <a:effectRef idx="0">
+            <a:schemeClr val="accent1"/>
+          </a:effectRef>
+          <a:fontRef idx="minor">
+            <a:schemeClr val="lt1"/>
+          </a:fontRef>
+        </p:style>
+        <p:txBody>
+          <a:bodyPr rtlCol="0" anchor="ctr"/>
+          <a:lstStyle/>
+          <a:p>
+            <a:pPr algn="ctr"/>
+            <a:endParaRPr lang="de-DE" dirty="0"/>
+          </a:p>
+        </p:txBody>
+      </p:sp>
+      <p:cxnSp>
+        <p:nvCxnSpPr>
+          <p:cNvPr id="5" name="Gerade Verbindung mit Pfeil 4">
+            <a:extLst>
+              <a:ext uri="{FF2B5EF4-FFF2-40B4-BE49-F238E27FC236}">
+                <a16:creationId xmlns:a16="http://schemas.microsoft.com/office/drawing/2014/main" id="{79B7022F-36B7-1D82-A941-7EF7B34DFE21}"/>
+              </a:ext>
+            </a:extLst>
+          </p:cNvPr>
+          <p:cNvCxnSpPr>
+            <a:cxnSpLocks/>
+          </p:cNvCxnSpPr>
+          <p:nvPr/>
+        </p:nvCxnSpPr>
+        <p:spPr>
+          <a:xfrm flipV="1">
+            <a:off x="304617" y="889635"/>
+            <a:ext cx="0" cy="1994535"/>
           </a:xfrm>
           <a:prstGeom prst="straightConnector1">
             <a:avLst/>
@@ -4416,10 +9737,10 @@
       </p:cxnSp>
       <p:sp>
         <p:nvSpPr>
-          <p:cNvPr id="13" name="Textfeld 12">
-            <a:extLst>
-              <a:ext uri="{FF2B5EF4-FFF2-40B4-BE49-F238E27FC236}">
-                <a16:creationId xmlns:a16="http://schemas.microsoft.com/office/drawing/2014/main" id="{00444581-34A9-6C9F-1461-BEA3B7AA5AB4}"/>
+          <p:cNvPr id="16" name="Textfeld 15">
+            <a:extLst>
+              <a:ext uri="{FF2B5EF4-FFF2-40B4-BE49-F238E27FC236}">
+                <a16:creationId xmlns:a16="http://schemas.microsoft.com/office/drawing/2014/main" id="{C312DBD7-37F1-A4DA-40B2-50513FAA6E87}"/>
               </a:ext>
             </a:extLst>
           </p:cNvPr>
@@ -4428,8 +9749,8 @@
         </p:nvSpPr>
         <p:spPr>
           <a:xfrm>
-            <a:off x="1962673" y="1128418"/>
-            <a:ext cx="567731" cy="307777"/>
+            <a:off x="1613640" y="2646996"/>
+            <a:ext cx="518786" cy="261610"/>
           </a:xfrm>
           <a:prstGeom prst="rect">
             <a:avLst/>
@@ -4444,63 +9765,36 @@
           <a:p>
             <a:pPr algn="ctr"/>
             <a:r>
-              <a:rPr lang="de-DE" sz="1400" i="1" dirty="0" err="1">
+              <a:rPr lang="de-DE" sz="1100" i="1" dirty="0" err="1">
                 <a:solidFill>
-                  <a:srgbClr val="086FBD"/>
+                  <a:schemeClr val="accent6">
+                    <a:lumMod val="75000"/>
+                  </a:schemeClr>
+                </a:solidFill>
+                <a:latin typeface="Latin Modern Math" panose="02000503000000000000" pitchFamily="50" charset="0"/>
+                <a:ea typeface="Latin Modern Math" panose="02000503000000000000" pitchFamily="50" charset="0"/>
+                <a:cs typeface="CMU Serif" panose="02000603000000000000" pitchFamily="2" charset="0"/>
+              </a:rPr>
+              <a:t>φ</a:t>
+            </a:r>
+            <a:r>
+              <a:rPr lang="de-DE" sz="1100" baseline="-25000" dirty="0" err="1">
+                <a:solidFill>
+                  <a:schemeClr val="accent6">
+                    <a:lumMod val="75000"/>
+                  </a:schemeClr>
                 </a:solidFill>
                 <a:latin typeface="CMU Serif" panose="02000603000000000000" pitchFamily="2" charset="0"/>
                 <a:ea typeface="CMU Serif" panose="02000603000000000000" pitchFamily="2" charset="0"/>
                 <a:cs typeface="CMU Serif" panose="02000603000000000000" pitchFamily="2" charset="0"/>
               </a:rPr>
-              <a:t>u</a:t>
-            </a:r>
-            <a:r>
-              <a:rPr lang="de-DE" sz="1400" i="1" baseline="-25000" dirty="0" err="1">
-                <a:solidFill>
-                  <a:srgbClr val="086FBD"/>
-                </a:solidFill>
-                <a:latin typeface="CMU Serif" panose="02000603000000000000" pitchFamily="2" charset="0"/>
-                <a:ea typeface="CMU Serif" panose="02000603000000000000" pitchFamily="2" charset="0"/>
-                <a:cs typeface="CMU Serif" panose="02000603000000000000" pitchFamily="2" charset="0"/>
-              </a:rPr>
-              <a:t>R</a:t>
-            </a:r>
-            <a:r>
-              <a:rPr lang="de-DE" sz="1400" dirty="0">
-                <a:solidFill>
-                  <a:srgbClr val="086FBD"/>
-                </a:solidFill>
-                <a:latin typeface="CMU Serif" panose="02000603000000000000" pitchFamily="2" charset="0"/>
-                <a:ea typeface="CMU Serif" panose="02000603000000000000" pitchFamily="2" charset="0"/>
-                <a:cs typeface="CMU Serif" panose="02000603000000000000" pitchFamily="2" charset="0"/>
-              </a:rPr>
-              <a:t>(</a:t>
-            </a:r>
-            <a:r>
-              <a:rPr lang="de-DE" sz="1400" i="1" dirty="0">
-                <a:solidFill>
-                  <a:srgbClr val="086FBD"/>
-                </a:solidFill>
-                <a:latin typeface="CMU Serif" panose="02000603000000000000" pitchFamily="2" charset="0"/>
-                <a:ea typeface="CMU Serif" panose="02000603000000000000" pitchFamily="2" charset="0"/>
-                <a:cs typeface="CMU Serif" panose="02000603000000000000" pitchFamily="2" charset="0"/>
-              </a:rPr>
-              <a:t>t</a:t>
-            </a:r>
-            <a:r>
-              <a:rPr lang="de-DE" sz="1400" dirty="0">
-                <a:solidFill>
-                  <a:srgbClr val="086FBD"/>
-                </a:solidFill>
-                <a:latin typeface="CMU Serif" panose="02000603000000000000" pitchFamily="2" charset="0"/>
-                <a:ea typeface="CMU Serif" panose="02000603000000000000" pitchFamily="2" charset="0"/>
-                <a:cs typeface="CMU Serif" panose="02000603000000000000" pitchFamily="2" charset="0"/>
-              </a:rPr>
-              <a:t>)</a:t>
-            </a:r>
-            <a:endParaRPr lang="de-DE" sz="1400" baseline="-25000" dirty="0">
+              <a:t>C</a:t>
+            </a:r>
+            <a:endParaRPr lang="de-DE" sz="1100" baseline="-25000" dirty="0">
               <a:solidFill>
-                <a:srgbClr val="086FBD"/>
+                <a:schemeClr val="accent6">
+                  <a:lumMod val="75000"/>
+                </a:schemeClr>
               </a:solidFill>
               <a:latin typeface="CMU Serif" panose="02000603000000000000" pitchFamily="2" charset="0"/>
               <a:ea typeface="CMU Serif" panose="02000603000000000000" pitchFamily="2" charset="0"/>
@@ -4509,279 +9803,603 @@
           </a:p>
         </p:txBody>
       </p:sp>
-      <p:sp>
-        <p:nvSpPr>
-          <p:cNvPr id="14" name="Textfeld 13">
-            <a:extLst>
-              <a:ext uri="{FF2B5EF4-FFF2-40B4-BE49-F238E27FC236}">
-                <a16:creationId xmlns:a16="http://schemas.microsoft.com/office/drawing/2014/main" id="{5567ECA1-FAB2-D0BD-2641-FE47C133A964}"/>
-              </a:ext>
-            </a:extLst>
-          </p:cNvPr>
-          <p:cNvSpPr txBox="1"/>
-          <p:nvPr/>
-        </p:nvSpPr>
-        <p:spPr>
-          <a:xfrm>
-            <a:off x="1529673" y="1365291"/>
-            <a:ext cx="518786" cy="307777"/>
-          </a:xfrm>
-          <a:prstGeom prst="rect">
-            <a:avLst/>
-          </a:prstGeom>
+      <p:cxnSp>
+        <p:nvCxnSpPr>
+          <p:cNvPr id="64" name="Gerade Verbindung mit Pfeil 63">
+            <a:extLst>
+              <a:ext uri="{FF2B5EF4-FFF2-40B4-BE49-F238E27FC236}">
+                <a16:creationId xmlns:a16="http://schemas.microsoft.com/office/drawing/2014/main" id="{BB4BD1CB-557A-4763-62D6-4B197A97327C}"/>
+              </a:ext>
+            </a:extLst>
+          </p:cNvPr>
+          <p:cNvCxnSpPr>
+            <a:cxnSpLocks/>
+          </p:cNvCxnSpPr>
+          <p:nvPr/>
+        </p:nvCxnSpPr>
+        <p:spPr>
+          <a:xfrm>
+            <a:off x="1373094" y="2777801"/>
+            <a:ext cx="344758" cy="0"/>
+          </a:xfrm>
+          <a:prstGeom prst="straightConnector1">
+            <a:avLst/>
+          </a:prstGeom>
+          <a:ln cap="rnd">
+            <a:solidFill>
+              <a:schemeClr val="accent6">
+                <a:lumMod val="75000"/>
+              </a:schemeClr>
+            </a:solidFill>
+            <a:round/>
+            <a:headEnd type="triangle" w="sm" len="med"/>
+            <a:tailEnd type="triangle" w="sm" len="med"/>
+          </a:ln>
+        </p:spPr>
+        <p:style>
+          <a:lnRef idx="2">
+            <a:schemeClr val="accent1"/>
+          </a:lnRef>
+          <a:fillRef idx="0">
+            <a:schemeClr val="accent1"/>
+          </a:fillRef>
+          <a:effectRef idx="1">
+            <a:schemeClr val="accent1"/>
+          </a:effectRef>
+          <a:fontRef idx="minor">
+            <a:schemeClr val="tx1"/>
+          </a:fontRef>
+        </p:style>
+      </p:cxnSp>
+      <p:cxnSp>
+        <p:nvCxnSpPr>
+          <p:cNvPr id="7" name="Gerader Verbinder 6">
+            <a:extLst>
+              <a:ext uri="{FF2B5EF4-FFF2-40B4-BE49-F238E27FC236}">
+                <a16:creationId xmlns:a16="http://schemas.microsoft.com/office/drawing/2014/main" id="{5FA8B025-8B42-9096-9DEE-2860398371EB}"/>
+              </a:ext>
+            </a:extLst>
+          </p:cNvPr>
+          <p:cNvCxnSpPr>
+            <a:cxnSpLocks/>
+          </p:cNvCxnSpPr>
+          <p:nvPr/>
+        </p:nvCxnSpPr>
+        <p:spPr>
+          <a:xfrm flipH="1">
+            <a:off x="487680" y="1449921"/>
+            <a:ext cx="2592705" cy="0"/>
+          </a:xfrm>
+          <a:prstGeom prst="line">
+            <a:avLst/>
+          </a:prstGeom>
+          <a:ln w="9525" cap="rnd">
+            <a:solidFill>
+              <a:srgbClr val="FF0000"/>
+            </a:solidFill>
+            <a:prstDash val="sysDash"/>
+            <a:round/>
+          </a:ln>
+        </p:spPr>
+        <p:style>
+          <a:lnRef idx="2">
+            <a:schemeClr val="accent1"/>
+          </a:lnRef>
+          <a:fillRef idx="0">
+            <a:schemeClr val="accent1"/>
+          </a:fillRef>
+          <a:effectRef idx="1">
+            <a:schemeClr val="accent1"/>
+          </a:effectRef>
+          <a:fontRef idx="minor">
+            <a:schemeClr val="tx1"/>
+          </a:fontRef>
+        </p:style>
+      </p:cxnSp>
+      <p:cxnSp>
+        <p:nvCxnSpPr>
+          <p:cNvPr id="8" name="Gerader Verbinder 7">
+            <a:extLst>
+              <a:ext uri="{FF2B5EF4-FFF2-40B4-BE49-F238E27FC236}">
+                <a16:creationId xmlns:a16="http://schemas.microsoft.com/office/drawing/2014/main" id="{8EB8D3DE-581A-BCCA-9DA4-8069DB0CBCCD}"/>
+              </a:ext>
+            </a:extLst>
+          </p:cNvPr>
+          <p:cNvCxnSpPr>
+            <a:cxnSpLocks/>
+          </p:cNvCxnSpPr>
+          <p:nvPr/>
+        </p:nvCxnSpPr>
+        <p:spPr>
+          <a:xfrm rot="10800000">
+            <a:off x="497205" y="1268013"/>
+            <a:ext cx="2583180" cy="0"/>
+          </a:xfrm>
+          <a:prstGeom prst="line">
+            <a:avLst/>
+          </a:prstGeom>
+          <a:ln w="9525" cap="rnd">
+            <a:solidFill>
+              <a:srgbClr val="086FBD"/>
+            </a:solidFill>
+            <a:prstDash val="sysDash"/>
+            <a:round/>
+          </a:ln>
+        </p:spPr>
+        <p:style>
+          <a:lnRef idx="2">
+            <a:schemeClr val="accent1"/>
+          </a:lnRef>
+          <a:fillRef idx="0">
+            <a:schemeClr val="accent1"/>
+          </a:fillRef>
+          <a:effectRef idx="1">
+            <a:schemeClr val="accent1"/>
+          </a:effectRef>
+          <a:fontRef idx="minor">
+            <a:schemeClr val="tx1"/>
+          </a:fontRef>
+        </p:style>
+      </p:cxnSp>
+      <p:cxnSp>
+        <p:nvCxnSpPr>
+          <p:cNvPr id="9" name="Gerader Verbinder 8">
+            <a:extLst>
+              <a:ext uri="{FF2B5EF4-FFF2-40B4-BE49-F238E27FC236}">
+                <a16:creationId xmlns:a16="http://schemas.microsoft.com/office/drawing/2014/main" id="{C1AB6164-5A2B-BF54-1BA0-4D4697E35907}"/>
+              </a:ext>
+            </a:extLst>
+          </p:cNvPr>
+          <p:cNvCxnSpPr>
+            <a:cxnSpLocks/>
+          </p:cNvCxnSpPr>
+          <p:nvPr/>
+        </p:nvCxnSpPr>
+        <p:spPr>
+          <a:xfrm rot="10800000">
+            <a:off x="2284172" y="1893573"/>
+            <a:ext cx="796213" cy="0"/>
+          </a:xfrm>
+          <a:prstGeom prst="line">
+            <a:avLst/>
+          </a:prstGeom>
+          <a:ln w="9525" cap="rnd">
+            <a:solidFill>
+              <a:schemeClr val="tx1"/>
+            </a:solidFill>
+            <a:prstDash val="sysDash"/>
+            <a:round/>
+          </a:ln>
+        </p:spPr>
+        <p:style>
+          <a:lnRef idx="2">
+            <a:schemeClr val="accent1"/>
+          </a:lnRef>
+          <a:fillRef idx="0">
+            <a:schemeClr val="accent1"/>
+          </a:fillRef>
+          <a:effectRef idx="1">
+            <a:schemeClr val="accent1"/>
+          </a:effectRef>
+          <a:fontRef idx="minor">
+            <a:schemeClr val="tx1"/>
+          </a:fontRef>
+        </p:style>
+      </p:cxnSp>
+      <p:sp>
+        <p:nvSpPr>
+          <p:cNvPr id="15" name="Freihandform: Form 14">
+            <a:extLst>
+              <a:ext uri="{FF2B5EF4-FFF2-40B4-BE49-F238E27FC236}">
+                <a16:creationId xmlns:a16="http://schemas.microsoft.com/office/drawing/2014/main" id="{9BBF460B-DB4E-B461-773B-5CC4FE721470}"/>
+              </a:ext>
+            </a:extLst>
+          </p:cNvPr>
+          <p:cNvSpPr/>
+          <p:nvPr/>
+        </p:nvSpPr>
+        <p:spPr>
+          <a:xfrm rot="10800000">
+            <a:off x="669240" y="1894387"/>
+            <a:ext cx="704850" cy="585552"/>
+          </a:xfrm>
+          <a:custGeom>
+            <a:avLst/>
+            <a:gdLst>
+              <a:gd name="csX0" fmla="*/ 0 w 708660"/>
+              <a:gd name="csY0" fmla="*/ 645160 h 647700"/>
+              <a:gd name="csX1" fmla="*/ 337820 w 708660"/>
+              <a:gd name="csY1" fmla="*/ 0 h 647700"/>
+              <a:gd name="csX2" fmla="*/ 708660 w 708660"/>
+              <a:gd name="csY2" fmla="*/ 647700 h 647700"/>
+              <a:gd name="csX0" fmla="*/ 0 w 708660"/>
+              <a:gd name="csY0" fmla="*/ 645160 h 647700"/>
+              <a:gd name="csX1" fmla="*/ 337820 w 708660"/>
+              <a:gd name="csY1" fmla="*/ 0 h 647700"/>
+              <a:gd name="csX2" fmla="*/ 708660 w 708660"/>
+              <a:gd name="csY2" fmla="*/ 647700 h 647700"/>
+              <a:gd name="csX0" fmla="*/ 0 w 708660"/>
+              <a:gd name="csY0" fmla="*/ 645160 h 647700"/>
+              <a:gd name="csX1" fmla="*/ 337820 w 708660"/>
+              <a:gd name="csY1" fmla="*/ 0 h 647700"/>
+              <a:gd name="csX2" fmla="*/ 708660 w 708660"/>
+              <a:gd name="csY2" fmla="*/ 647700 h 647700"/>
+              <a:gd name="csX0" fmla="*/ 0 w 708660"/>
+              <a:gd name="csY0" fmla="*/ 645160 h 647700"/>
+              <a:gd name="csX1" fmla="*/ 337820 w 708660"/>
+              <a:gd name="csY1" fmla="*/ 0 h 647700"/>
+              <a:gd name="csX2" fmla="*/ 708660 w 708660"/>
+              <a:gd name="csY2" fmla="*/ 647700 h 647700"/>
+              <a:gd name="csX0" fmla="*/ 0 w 708660"/>
+              <a:gd name="csY0" fmla="*/ 647058 h 649598"/>
+              <a:gd name="csX1" fmla="*/ 356870 w 708660"/>
+              <a:gd name="csY1" fmla="*/ 0 h 649598"/>
+              <a:gd name="csX2" fmla="*/ 708660 w 708660"/>
+              <a:gd name="csY2" fmla="*/ 649598 h 649598"/>
+              <a:gd name="csX0" fmla="*/ 0 w 704850"/>
+              <a:gd name="csY0" fmla="*/ 647058 h 647058"/>
+              <a:gd name="csX1" fmla="*/ 356870 w 704850"/>
+              <a:gd name="csY1" fmla="*/ 0 h 647058"/>
+              <a:gd name="csX2" fmla="*/ 704850 w 704850"/>
+              <a:gd name="csY2" fmla="*/ 645803 h 647058"/>
+              <a:gd name="csX0" fmla="*/ 0 w 704850"/>
+              <a:gd name="csY0" fmla="*/ 647078 h 647078"/>
+              <a:gd name="csX1" fmla="*/ 356870 w 704850"/>
+              <a:gd name="csY1" fmla="*/ 20 h 647078"/>
+              <a:gd name="csX2" fmla="*/ 704850 w 704850"/>
+              <a:gd name="csY2" fmla="*/ 645823 h 647078"/>
+              <a:gd name="csX0" fmla="*/ 0 w 704850"/>
+              <a:gd name="csY0" fmla="*/ 647078 h 647078"/>
+              <a:gd name="csX1" fmla="*/ 341630 w 704850"/>
+              <a:gd name="csY1" fmla="*/ 20 h 647078"/>
+              <a:gd name="csX2" fmla="*/ 704850 w 704850"/>
+              <a:gd name="csY2" fmla="*/ 645823 h 647078"/>
+              <a:gd name="csX0" fmla="*/ 0 w 704850"/>
+              <a:gd name="csY0" fmla="*/ 647078 h 647078"/>
+              <a:gd name="csX1" fmla="*/ 351155 w 704850"/>
+              <a:gd name="csY1" fmla="*/ 20 h 647078"/>
+              <a:gd name="csX2" fmla="*/ 704850 w 704850"/>
+              <a:gd name="csY2" fmla="*/ 645823 h 647078"/>
+              <a:gd name="csX0" fmla="*/ 0 w 704850"/>
+              <a:gd name="csY0" fmla="*/ 647078 h 647078"/>
+              <a:gd name="csX1" fmla="*/ 351155 w 704850"/>
+              <a:gd name="csY1" fmla="*/ 20 h 647078"/>
+              <a:gd name="csX2" fmla="*/ 704850 w 704850"/>
+              <a:gd name="csY2" fmla="*/ 645823 h 647078"/>
+              <a:gd name="csX0" fmla="*/ 0 w 704850"/>
+              <a:gd name="csY0" fmla="*/ 647078 h 647078"/>
+              <a:gd name="csX1" fmla="*/ 351155 w 704850"/>
+              <a:gd name="csY1" fmla="*/ 20 h 647078"/>
+              <a:gd name="csX2" fmla="*/ 704850 w 704850"/>
+              <a:gd name="csY2" fmla="*/ 645823 h 647078"/>
+              <a:gd name="csX0" fmla="*/ 0 w 704850"/>
+              <a:gd name="csY0" fmla="*/ 647078 h 647078"/>
+              <a:gd name="csX1" fmla="*/ 351155 w 704850"/>
+              <a:gd name="csY1" fmla="*/ 20 h 647078"/>
+              <a:gd name="csX2" fmla="*/ 704850 w 704850"/>
+              <a:gd name="csY2" fmla="*/ 645823 h 647078"/>
+              <a:gd name="csX0" fmla="*/ 0 w 704850"/>
+              <a:gd name="csY0" fmla="*/ 647078 h 647078"/>
+              <a:gd name="csX1" fmla="*/ 351155 w 704850"/>
+              <a:gd name="csY1" fmla="*/ 20 h 647078"/>
+              <a:gd name="csX2" fmla="*/ 704850 w 704850"/>
+              <a:gd name="csY2" fmla="*/ 645823 h 647078"/>
+              <a:gd name="csX0" fmla="*/ 0 w 704850"/>
+              <a:gd name="csY0" fmla="*/ 647078 h 647078"/>
+              <a:gd name="csX1" fmla="*/ 351155 w 704850"/>
+              <a:gd name="csY1" fmla="*/ 20 h 647078"/>
+              <a:gd name="csX2" fmla="*/ 704850 w 704850"/>
+              <a:gd name="csY2" fmla="*/ 645823 h 647078"/>
+              <a:gd name="csX0" fmla="*/ 0 w 704850"/>
+              <a:gd name="csY0" fmla="*/ 647078 h 647078"/>
+              <a:gd name="csX1" fmla="*/ 351155 w 704850"/>
+              <a:gd name="csY1" fmla="*/ 20 h 647078"/>
+              <a:gd name="csX2" fmla="*/ 704850 w 704850"/>
+              <a:gd name="csY2" fmla="*/ 645823 h 647078"/>
+              <a:gd name="csX0" fmla="*/ 0 w 704850"/>
+              <a:gd name="csY0" fmla="*/ 647062 h 647062"/>
+              <a:gd name="csX1" fmla="*/ 351155 w 704850"/>
+              <a:gd name="csY1" fmla="*/ 4 h 647062"/>
+              <a:gd name="csX2" fmla="*/ 704850 w 704850"/>
+              <a:gd name="csY2" fmla="*/ 645807 h 647062"/>
+            </a:gdLst>
+            <a:ahLst/>
+            <a:cxnLst>
+              <a:cxn ang="0">
+                <a:pos x="csX0" y="csY0"/>
+              </a:cxn>
+              <a:cxn ang="0">
+                <a:pos x="csX1" y="csY1"/>
+              </a:cxn>
+              <a:cxn ang="0">
+                <a:pos x="csX2" y="csY2"/>
+              </a:cxn>
+            </a:cxnLst>
+            <a:rect l="l" t="t" r="r" b="b"/>
+            <a:pathLst>
+              <a:path w="704850" h="647062">
+                <a:moveTo>
+                  <a:pt x="0" y="647062"/>
+                </a:moveTo>
+                <a:cubicBezTo>
+                  <a:pt x="69850" y="415353"/>
+                  <a:pt x="191135" y="1478"/>
+                  <a:pt x="351155" y="4"/>
+                </a:cubicBezTo>
+                <a:cubicBezTo>
+                  <a:pt x="511175" y="-1470"/>
+                  <a:pt x="618490" y="408469"/>
+                  <a:pt x="704850" y="645807"/>
+                </a:cubicBezTo>
+              </a:path>
+            </a:pathLst>
+          </a:custGeom>
           <a:noFill/>
-        </p:spPr>
-        <p:txBody>
-          <a:bodyPr wrap="square" rtlCol="0">
-            <a:spAutoFit/>
-          </a:bodyPr>
+          <a:ln cap="rnd">
+            <a:solidFill>
+              <a:srgbClr val="FF0000"/>
+            </a:solidFill>
+            <a:round/>
+          </a:ln>
+        </p:spPr>
+        <p:style>
+          <a:lnRef idx="2">
+            <a:schemeClr val="accent1">
+              <a:shade val="15000"/>
+            </a:schemeClr>
+          </a:lnRef>
+          <a:fillRef idx="1">
+            <a:schemeClr val="accent1"/>
+          </a:fillRef>
+          <a:effectRef idx="0">
+            <a:schemeClr val="accent1"/>
+          </a:effectRef>
+          <a:fontRef idx="minor">
+            <a:schemeClr val="lt1"/>
+          </a:fontRef>
+        </p:style>
+        <p:txBody>
+          <a:bodyPr rtlCol="0" anchor="ctr"/>
           <a:lstStyle/>
           <a:p>
             <a:pPr algn="ctr"/>
-            <a:r>
-              <a:rPr lang="de-DE" sz="1400" i="1" dirty="0" err="1">
-                <a:solidFill>
-                  <a:srgbClr val="FF0000"/>
-                </a:solidFill>
-                <a:latin typeface="CMU Serif" panose="02000603000000000000" pitchFamily="2" charset="0"/>
-                <a:ea typeface="CMU Serif" panose="02000603000000000000" pitchFamily="2" charset="0"/>
-                <a:cs typeface="CMU Serif" panose="02000603000000000000" pitchFamily="2" charset="0"/>
-              </a:rPr>
-              <a:t>i</a:t>
-            </a:r>
-            <a:r>
-              <a:rPr lang="de-DE" sz="1400" i="1" baseline="-25000" dirty="0" err="1">
-                <a:solidFill>
-                  <a:srgbClr val="FF0000"/>
-                </a:solidFill>
-                <a:latin typeface="CMU Serif" panose="02000603000000000000" pitchFamily="2" charset="0"/>
-                <a:ea typeface="CMU Serif" panose="02000603000000000000" pitchFamily="2" charset="0"/>
-                <a:cs typeface="CMU Serif" panose="02000603000000000000" pitchFamily="2" charset="0"/>
-              </a:rPr>
-              <a:t>R</a:t>
-            </a:r>
-            <a:r>
-              <a:rPr lang="de-DE" sz="1400" dirty="0">
-                <a:solidFill>
-                  <a:srgbClr val="FF0000"/>
-                </a:solidFill>
-                <a:latin typeface="CMU Serif" panose="02000603000000000000" pitchFamily="2" charset="0"/>
-                <a:ea typeface="CMU Serif" panose="02000603000000000000" pitchFamily="2" charset="0"/>
-                <a:cs typeface="CMU Serif" panose="02000603000000000000" pitchFamily="2" charset="0"/>
-              </a:rPr>
-              <a:t>(</a:t>
-            </a:r>
-            <a:r>
-              <a:rPr lang="de-DE" sz="1400" i="1" dirty="0">
-                <a:solidFill>
-                  <a:srgbClr val="FF0000"/>
-                </a:solidFill>
-                <a:latin typeface="CMU Serif" panose="02000603000000000000" pitchFamily="2" charset="0"/>
-                <a:ea typeface="CMU Serif" panose="02000603000000000000" pitchFamily="2" charset="0"/>
-                <a:cs typeface="CMU Serif" panose="02000603000000000000" pitchFamily="2" charset="0"/>
-              </a:rPr>
-              <a:t>t</a:t>
-            </a:r>
-            <a:r>
-              <a:rPr lang="de-DE" sz="1400" dirty="0">
-                <a:solidFill>
-                  <a:srgbClr val="FF0000"/>
-                </a:solidFill>
-                <a:latin typeface="CMU Serif" panose="02000603000000000000" pitchFamily="2" charset="0"/>
-                <a:ea typeface="CMU Serif" panose="02000603000000000000" pitchFamily="2" charset="0"/>
-                <a:cs typeface="CMU Serif" panose="02000603000000000000" pitchFamily="2" charset="0"/>
-              </a:rPr>
-              <a:t>)</a:t>
-            </a:r>
-            <a:endParaRPr lang="de-DE" sz="1400" baseline="-25000" dirty="0">
-              <a:solidFill>
-                <a:srgbClr val="FF0000"/>
-              </a:solidFill>
-              <a:latin typeface="CMU Serif" panose="02000603000000000000" pitchFamily="2" charset="0"/>
-              <a:ea typeface="CMU Serif" panose="02000603000000000000" pitchFamily="2" charset="0"/>
-              <a:cs typeface="CMU Serif" panose="02000603000000000000" pitchFamily="2" charset="0"/>
-            </a:endParaRPr>
-          </a:p>
-        </p:txBody>
-      </p:sp>
-      <p:sp>
-        <p:nvSpPr>
-          <p:cNvPr id="20" name="Textfeld 19">
-            <a:extLst>
-              <a:ext uri="{FF2B5EF4-FFF2-40B4-BE49-F238E27FC236}">
-                <a16:creationId xmlns:a16="http://schemas.microsoft.com/office/drawing/2014/main" id="{BBBA25C8-E09A-BD18-E42B-2B5C98856BD4}"/>
-              </a:ext>
-            </a:extLst>
-          </p:cNvPr>
-          <p:cNvSpPr txBox="1"/>
-          <p:nvPr/>
-        </p:nvSpPr>
-        <p:spPr>
-          <a:xfrm>
-            <a:off x="2070746" y="1767541"/>
-            <a:ext cx="518786" cy="307777"/>
-          </a:xfrm>
-          <a:prstGeom prst="rect">
-            <a:avLst/>
-          </a:prstGeom>
-          <a:noFill/>
-        </p:spPr>
-        <p:txBody>
-          <a:bodyPr wrap="square" rtlCol="0">
-            <a:spAutoFit/>
-          </a:bodyPr>
-          <a:lstStyle/>
-          <a:p>
-            <a:pPr algn="ctr"/>
-            <a:r>
-              <a:rPr lang="de-DE" sz="1400" i="1" dirty="0">
-                <a:solidFill>
-                  <a:schemeClr val="accent5"/>
-                </a:solidFill>
-                <a:latin typeface="Latin Modern Math" panose="02000503000000000000" pitchFamily="50" charset="0"/>
-                <a:ea typeface="Latin Modern Math" panose="02000503000000000000" pitchFamily="50" charset="0"/>
-                <a:cs typeface="CMU Serif" panose="02000603000000000000" pitchFamily="2" charset="0"/>
-              </a:rPr>
-              <a:t>ω </a:t>
-            </a:r>
-            <a:r>
-              <a:rPr lang="de-DE" sz="600" dirty="0">
-                <a:solidFill>
-                  <a:schemeClr val="accent5"/>
-                </a:solidFill>
-                <a:latin typeface="Latin Modern Math" panose="02000503000000000000" pitchFamily="50" charset="0"/>
-                <a:ea typeface="Latin Modern Math" panose="02000503000000000000" pitchFamily="50" charset="0"/>
-                <a:cs typeface="CMU Serif" panose="02000603000000000000" pitchFamily="2" charset="0"/>
-              </a:rPr>
-              <a:t>∙</a:t>
-            </a:r>
-            <a:r>
-              <a:rPr lang="de-DE" sz="1400" i="1" dirty="0">
-                <a:solidFill>
-                  <a:schemeClr val="accent5"/>
-                </a:solidFill>
-                <a:latin typeface="Latin Modern Math" panose="02000503000000000000" pitchFamily="50" charset="0"/>
-                <a:ea typeface="Latin Modern Math" panose="02000503000000000000" pitchFamily="50" charset="0"/>
-                <a:cs typeface="CMU Serif" panose="02000603000000000000" pitchFamily="2" charset="0"/>
-              </a:rPr>
-              <a:t> </a:t>
-            </a:r>
-            <a:r>
-              <a:rPr lang="de-DE" sz="1400" i="1" dirty="0">
-                <a:solidFill>
-                  <a:schemeClr val="accent5"/>
-                </a:solidFill>
-                <a:latin typeface="CMU Serif" panose="02000603000000000000" pitchFamily="2" charset="0"/>
-                <a:ea typeface="CMU Serif" panose="02000603000000000000" pitchFamily="2" charset="0"/>
-                <a:cs typeface="CMU Serif" panose="02000603000000000000" pitchFamily="2" charset="0"/>
-              </a:rPr>
-              <a:t>t</a:t>
-            </a:r>
-            <a:endParaRPr lang="de-DE" sz="1400" baseline="-25000" dirty="0">
-              <a:solidFill>
-                <a:schemeClr val="accent5"/>
-              </a:solidFill>
-              <a:latin typeface="CMU Serif" panose="02000603000000000000" pitchFamily="2" charset="0"/>
-              <a:ea typeface="CMU Serif" panose="02000603000000000000" pitchFamily="2" charset="0"/>
-              <a:cs typeface="CMU Serif" panose="02000603000000000000" pitchFamily="2" charset="0"/>
-            </a:endParaRPr>
-          </a:p>
-        </p:txBody>
-      </p:sp>
-      <p:sp>
-        <p:nvSpPr>
-          <p:cNvPr id="23" name="Textfeld 22">
-            <a:extLst>
-              <a:ext uri="{FF2B5EF4-FFF2-40B4-BE49-F238E27FC236}">
-                <a16:creationId xmlns:a16="http://schemas.microsoft.com/office/drawing/2014/main" id="{9C5DCC1C-22C1-3F97-9C39-05A26C30324A}"/>
-              </a:ext>
-            </a:extLst>
-          </p:cNvPr>
-          <p:cNvSpPr txBox="1"/>
-          <p:nvPr/>
-        </p:nvSpPr>
-        <p:spPr>
-          <a:xfrm>
-            <a:off x="2198035" y="2176651"/>
-            <a:ext cx="518786" cy="253916"/>
-          </a:xfrm>
-          <a:prstGeom prst="rect">
-            <a:avLst/>
-          </a:prstGeom>
-          <a:noFill/>
-        </p:spPr>
-        <p:txBody>
-          <a:bodyPr wrap="square" rtlCol="0">
-            <a:spAutoFit/>
-          </a:bodyPr>
-          <a:lstStyle/>
-          <a:p>
-            <a:pPr algn="ctr"/>
-            <a:r>
-              <a:rPr lang="de-DE" sz="1050" dirty="0">
-                <a:latin typeface="CMU Serif" panose="02000603000000000000" pitchFamily="2" charset="0"/>
-                <a:ea typeface="CMU Serif" panose="02000603000000000000" pitchFamily="2" charset="0"/>
-                <a:cs typeface="CMU Serif" panose="02000603000000000000" pitchFamily="2" charset="0"/>
-              </a:rPr>
-              <a:t>Re</a:t>
-            </a:r>
-            <a:endParaRPr lang="de-DE" sz="1050" baseline="-25000" dirty="0">
-              <a:latin typeface="CMU Serif" panose="02000603000000000000" pitchFamily="2" charset="0"/>
-              <a:ea typeface="CMU Serif" panose="02000603000000000000" pitchFamily="2" charset="0"/>
-              <a:cs typeface="CMU Serif" panose="02000603000000000000" pitchFamily="2" charset="0"/>
-            </a:endParaRPr>
-          </a:p>
-        </p:txBody>
-      </p:sp>
-      <p:sp>
-        <p:nvSpPr>
-          <p:cNvPr id="24" name="Textfeld 23">
-            <a:extLst>
-              <a:ext uri="{FF2B5EF4-FFF2-40B4-BE49-F238E27FC236}">
-                <a16:creationId xmlns:a16="http://schemas.microsoft.com/office/drawing/2014/main" id="{489D902E-FAF1-FB79-0651-3A5F65789A6B}"/>
-              </a:ext>
-            </a:extLst>
-          </p:cNvPr>
-          <p:cNvSpPr txBox="1"/>
-          <p:nvPr/>
-        </p:nvSpPr>
-        <p:spPr>
-          <a:xfrm>
-            <a:off x="1071759" y="1053040"/>
-            <a:ext cx="518786" cy="253916"/>
-          </a:xfrm>
-          <a:prstGeom prst="rect">
-            <a:avLst/>
-          </a:prstGeom>
-          <a:noFill/>
-        </p:spPr>
-        <p:txBody>
-          <a:bodyPr wrap="square" rtlCol="0">
-            <a:spAutoFit/>
-          </a:bodyPr>
-          <a:lstStyle/>
-          <a:p>
-            <a:pPr algn="ctr"/>
-            <a:r>
-              <a:rPr lang="de-DE" sz="1050" dirty="0">
-                <a:latin typeface="CMU Serif" panose="02000603000000000000" pitchFamily="2" charset="0"/>
-                <a:ea typeface="CMU Serif" panose="02000603000000000000" pitchFamily="2" charset="0"/>
-                <a:cs typeface="CMU Serif" panose="02000603000000000000" pitchFamily="2" charset="0"/>
-              </a:rPr>
-              <a:t>Im</a:t>
-            </a:r>
-            <a:endParaRPr lang="de-DE" sz="1050" baseline="-25000" dirty="0">
-              <a:latin typeface="CMU Serif" panose="02000603000000000000" pitchFamily="2" charset="0"/>
-              <a:ea typeface="CMU Serif" panose="02000603000000000000" pitchFamily="2" charset="0"/>
-              <a:cs typeface="CMU Serif" panose="02000603000000000000" pitchFamily="2" charset="0"/>
-            </a:endParaRPr>
-          </a:p>
-        </p:txBody>
-      </p:sp>
+            <a:endParaRPr lang="de-DE"/>
+          </a:p>
+        </p:txBody>
+      </p:sp>
+      <p:cxnSp>
+        <p:nvCxnSpPr>
+          <p:cNvPr id="6" name="Gerade Verbindung mit Pfeil 5">
+            <a:extLst>
+              <a:ext uri="{FF2B5EF4-FFF2-40B4-BE49-F238E27FC236}">
+                <a16:creationId xmlns:a16="http://schemas.microsoft.com/office/drawing/2014/main" id="{FCF1787E-C645-07CB-FBA0-0C7CE0A9BEEB}"/>
+              </a:ext>
+            </a:extLst>
+          </p:cNvPr>
+          <p:cNvCxnSpPr>
+            <a:cxnSpLocks/>
+          </p:cNvCxnSpPr>
+          <p:nvPr/>
+        </p:nvCxnSpPr>
+        <p:spPr>
+          <a:xfrm>
+            <a:off x="308244" y="1893579"/>
+            <a:ext cx="2027286" cy="0"/>
+          </a:xfrm>
+          <a:prstGeom prst="straightConnector1">
+            <a:avLst/>
+          </a:prstGeom>
+          <a:ln cap="rnd">
+            <a:solidFill>
+              <a:schemeClr val="tx1"/>
+            </a:solidFill>
+            <a:round/>
+            <a:tailEnd type="triangle" w="med" len="med"/>
+          </a:ln>
+        </p:spPr>
+        <p:style>
+          <a:lnRef idx="2">
+            <a:schemeClr val="accent1"/>
+          </a:lnRef>
+          <a:fillRef idx="0">
+            <a:schemeClr val="accent1"/>
+          </a:fillRef>
+          <a:effectRef idx="1">
+            <a:schemeClr val="accent1"/>
+          </a:effectRef>
+          <a:fontRef idx="minor">
+            <a:schemeClr val="tx1"/>
+          </a:fontRef>
+        </p:style>
+      </p:cxnSp>
+      <p:cxnSp>
+        <p:nvCxnSpPr>
+          <p:cNvPr id="53" name="Gerade Verbindung mit Pfeil 52">
+            <a:extLst>
+              <a:ext uri="{FF2B5EF4-FFF2-40B4-BE49-F238E27FC236}">
+                <a16:creationId xmlns:a16="http://schemas.microsoft.com/office/drawing/2014/main" id="{80E7054A-6348-66B9-6419-073411225399}"/>
+              </a:ext>
+            </a:extLst>
+          </p:cNvPr>
+          <p:cNvCxnSpPr>
+            <a:cxnSpLocks/>
+          </p:cNvCxnSpPr>
+          <p:nvPr/>
+        </p:nvCxnSpPr>
+        <p:spPr>
+          <a:xfrm flipV="1">
+            <a:off x="1374952" y="1813560"/>
+            <a:ext cx="0" cy="160020"/>
+          </a:xfrm>
+          <a:prstGeom prst="straightConnector1">
+            <a:avLst/>
+          </a:prstGeom>
+          <a:ln cap="rnd">
+            <a:solidFill>
+              <a:schemeClr val="accent6">
+                <a:lumMod val="75000"/>
+              </a:schemeClr>
+            </a:solidFill>
+            <a:round/>
+            <a:tailEnd type="none" w="med" len="med"/>
+          </a:ln>
+        </p:spPr>
+        <p:style>
+          <a:lnRef idx="2">
+            <a:schemeClr val="accent1"/>
+          </a:lnRef>
+          <a:fillRef idx="0">
+            <a:schemeClr val="accent1"/>
+          </a:fillRef>
+          <a:effectRef idx="1">
+            <a:schemeClr val="accent1"/>
+          </a:effectRef>
+          <a:fontRef idx="minor">
+            <a:schemeClr val="tx1"/>
+          </a:fontRef>
+        </p:style>
+      </p:cxnSp>
+      <p:cxnSp>
+        <p:nvCxnSpPr>
+          <p:cNvPr id="54" name="Gerade Verbindung mit Pfeil 53">
+            <a:extLst>
+              <a:ext uri="{FF2B5EF4-FFF2-40B4-BE49-F238E27FC236}">
+                <a16:creationId xmlns:a16="http://schemas.microsoft.com/office/drawing/2014/main" id="{36DCA295-5024-2D9B-35BD-38C702A1F417}"/>
+              </a:ext>
+            </a:extLst>
+          </p:cNvPr>
+          <p:cNvCxnSpPr>
+            <a:cxnSpLocks/>
+          </p:cNvCxnSpPr>
+          <p:nvPr/>
+        </p:nvCxnSpPr>
+        <p:spPr>
+          <a:xfrm flipV="1">
+            <a:off x="1717852" y="1813560"/>
+            <a:ext cx="0" cy="160020"/>
+          </a:xfrm>
+          <a:prstGeom prst="straightConnector1">
+            <a:avLst/>
+          </a:prstGeom>
+          <a:ln cap="rnd">
+            <a:solidFill>
+              <a:schemeClr val="accent6">
+                <a:lumMod val="75000"/>
+              </a:schemeClr>
+            </a:solidFill>
+            <a:round/>
+            <a:tailEnd type="none" w="med" len="med"/>
+          </a:ln>
+        </p:spPr>
+        <p:style>
+          <a:lnRef idx="2">
+            <a:schemeClr val="accent1"/>
+          </a:lnRef>
+          <a:fillRef idx="0">
+            <a:schemeClr val="accent1"/>
+          </a:fillRef>
+          <a:effectRef idx="1">
+            <a:schemeClr val="accent1"/>
+          </a:effectRef>
+          <a:fontRef idx="minor">
+            <a:schemeClr val="tx1"/>
+          </a:fontRef>
+        </p:style>
+      </p:cxnSp>
+      <p:cxnSp>
+        <p:nvCxnSpPr>
+          <p:cNvPr id="48" name="Gerade Verbindung mit Pfeil 47">
+            <a:extLst>
+              <a:ext uri="{FF2B5EF4-FFF2-40B4-BE49-F238E27FC236}">
+                <a16:creationId xmlns:a16="http://schemas.microsoft.com/office/drawing/2014/main" id="{DF610A06-9BB1-530B-1566-F2BE2FE78AD4}"/>
+              </a:ext>
+            </a:extLst>
+          </p:cNvPr>
+          <p:cNvCxnSpPr>
+            <a:cxnSpLocks/>
+          </p:cNvCxnSpPr>
+          <p:nvPr/>
+        </p:nvCxnSpPr>
+        <p:spPr>
+          <a:xfrm flipV="1">
+            <a:off x="485775" y="1813560"/>
+            <a:ext cx="0" cy="160020"/>
+          </a:xfrm>
+          <a:prstGeom prst="straightConnector1">
+            <a:avLst/>
+          </a:prstGeom>
+          <a:ln cap="rnd">
+            <a:solidFill>
+              <a:schemeClr val="accent5"/>
+            </a:solidFill>
+            <a:round/>
+            <a:tailEnd type="none" w="med" len="med"/>
+          </a:ln>
+        </p:spPr>
+        <p:style>
+          <a:lnRef idx="2">
+            <a:schemeClr val="accent1"/>
+          </a:lnRef>
+          <a:fillRef idx="0">
+            <a:schemeClr val="accent1"/>
+          </a:fillRef>
+          <a:effectRef idx="1">
+            <a:schemeClr val="accent1"/>
+          </a:effectRef>
+          <a:fontRef idx="minor">
+            <a:schemeClr val="tx1"/>
+          </a:fontRef>
+        </p:style>
+      </p:cxnSp>
+      <p:cxnSp>
+        <p:nvCxnSpPr>
+          <p:cNvPr id="68" name="Gerader Verbinder 67">
+            <a:extLst>
+              <a:ext uri="{FF2B5EF4-FFF2-40B4-BE49-F238E27FC236}">
+                <a16:creationId xmlns:a16="http://schemas.microsoft.com/office/drawing/2014/main" id="{EF1944A4-A1BF-2FE9-707A-119D943D347F}"/>
+              </a:ext>
+            </a:extLst>
+          </p:cNvPr>
+          <p:cNvCxnSpPr>
+            <a:cxnSpLocks/>
+          </p:cNvCxnSpPr>
+          <p:nvPr/>
+        </p:nvCxnSpPr>
+        <p:spPr>
+          <a:xfrm flipV="1">
+            <a:off x="486209" y="1268013"/>
+            <a:ext cx="0" cy="585552"/>
+          </a:xfrm>
+          <a:prstGeom prst="line">
+            <a:avLst/>
+          </a:prstGeom>
+          <a:ln w="9525" cap="rnd">
+            <a:solidFill>
+              <a:schemeClr val="accent5"/>
+            </a:solidFill>
+            <a:prstDash val="sysDash"/>
+            <a:round/>
+          </a:ln>
+        </p:spPr>
+        <p:style>
+          <a:lnRef idx="2">
+            <a:schemeClr val="accent1"/>
+          </a:lnRef>
+          <a:fillRef idx="0">
+            <a:schemeClr val="accent1"/>
+          </a:fillRef>
+          <a:effectRef idx="1">
+            <a:schemeClr val="accent1"/>
+          </a:effectRef>
+          <a:fontRef idx="minor">
+            <a:schemeClr val="tx1"/>
+          </a:fontRef>
+        </p:style>
+      </p:cxnSp>
     </p:spTree>
     <p:extLst>
       <p:ext uri="{BB962C8B-B14F-4D97-AF65-F5344CB8AC3E}">
-        <p14:creationId xmlns:p14="http://schemas.microsoft.com/office/powerpoint/2010/main" val="3996414772"/>
+        <p14:creationId xmlns:p14="http://schemas.microsoft.com/office/powerpoint/2010/main" val="968416413"/>
       </p:ext>
     </p:extLst>
   </p:cSld>
@@ -4863,7 +10481,7 @@
           <a:lstStyle/>
           <a:p>
             <a:pPr algn="ctr"/>
-            <a:endParaRPr lang="de-DE"/>
+            <a:endParaRPr lang="de-DE" dirty="0"/>
           </a:p>
         </p:txBody>
       </p:sp>
@@ -4915,7 +10533,7 @@
           <a:lstStyle/>
           <a:p>
             <a:pPr algn="ctr"/>
-            <a:endParaRPr lang="de-DE">
+            <a:endParaRPr lang="de-DE" dirty="0">
               <a:solidFill>
                 <a:sysClr val="windowText" lastClr="000000"/>
               </a:solidFill>
@@ -5063,7 +10681,7 @@
           <a:lstStyle/>
           <a:p>
             <a:pPr algn="ctr"/>
-            <a:endParaRPr lang="de-DE"/>
+            <a:endParaRPr lang="de-DE" dirty="0"/>
           </a:p>
         </p:txBody>
       </p:sp>
@@ -5118,7 +10736,7 @@
           <a:lstStyle/>
           <a:p>
             <a:pPr algn="ctr"/>
-            <a:endParaRPr lang="de-DE"/>
+            <a:endParaRPr lang="de-DE" dirty="0"/>
           </a:p>
         </p:txBody>
       </p:sp>
@@ -5209,7 +10827,7 @@
           <a:lstStyle/>
           <a:p>
             <a:pPr algn="ctr"/>
-            <a:endParaRPr lang="de-DE">
+            <a:endParaRPr lang="de-DE" dirty="0">
               <a:solidFill>
                 <a:sysClr val="windowText" lastClr="000000"/>
               </a:solidFill>
@@ -5356,7 +10974,7 @@
           <a:lstStyle/>
           <a:p>
             <a:pPr algn="ctr"/>
-            <a:endParaRPr lang="de-DE"/>
+            <a:endParaRPr lang="de-DE" dirty="0"/>
           </a:p>
         </p:txBody>
       </p:sp>
@@ -5921,7 +11539,7 @@
           <a:lstStyle/>
           <a:p>
             <a:pPr algn="ctr"/>
-            <a:endParaRPr lang="de-DE"/>
+            <a:endParaRPr lang="de-DE" dirty="0"/>
           </a:p>
         </p:txBody>
       </p:sp>
@@ -5974,7 +11592,7 @@
           <a:lstStyle/>
           <a:p>
             <a:pPr algn="ctr"/>
-            <a:endParaRPr lang="de-DE"/>
+            <a:endParaRPr lang="de-DE" dirty="0"/>
           </a:p>
         </p:txBody>
       </p:sp>
@@ -6026,7 +11644,7 @@
           <a:lstStyle/>
           <a:p>
             <a:pPr algn="ctr"/>
-            <a:endParaRPr lang="de-DE">
+            <a:endParaRPr lang="de-DE" dirty="0">
               <a:solidFill>
                 <a:sysClr val="windowText" lastClr="000000"/>
               </a:solidFill>
@@ -6082,7 +11700,7 @@
           <a:lstStyle/>
           <a:p>
             <a:pPr algn="ctr"/>
-            <a:endParaRPr lang="de-DE">
+            <a:endParaRPr lang="de-DE" dirty="0">
               <a:solidFill>
                 <a:sysClr val="windowText" lastClr="000000"/>
               </a:solidFill>
@@ -6140,7 +11758,7 @@
           <a:lstStyle/>
           <a:p>
             <a:pPr algn="ctr"/>
-            <a:endParaRPr lang="de-DE">
+            <a:endParaRPr lang="de-DE" dirty="0">
               <a:solidFill>
                 <a:sysClr val="windowText" lastClr="000000"/>
               </a:solidFill>
@@ -6198,7 +11816,7 @@
           <a:lstStyle/>
           <a:p>
             <a:pPr algn="ctr"/>
-            <a:endParaRPr lang="de-DE">
+            <a:endParaRPr lang="de-DE" dirty="0">
               <a:solidFill>
                 <a:sysClr val="windowText" lastClr="000000"/>
               </a:solidFill>
@@ -6257,7 +11875,7 @@
           <a:lstStyle/>
           <a:p>
             <a:pPr algn="ctr"/>
-            <a:endParaRPr lang="de-DE"/>
+            <a:endParaRPr lang="de-DE" dirty="0"/>
           </a:p>
         </p:txBody>
       </p:sp>
@@ -6312,7 +11930,7 @@
           <a:lstStyle/>
           <a:p>
             <a:pPr algn="ctr"/>
-            <a:endParaRPr lang="de-DE"/>
+            <a:endParaRPr lang="de-DE" dirty="0"/>
           </a:p>
         </p:txBody>
       </p:sp>
@@ -6367,7 +11985,7 @@
           <a:lstStyle/>
           <a:p>
             <a:pPr algn="ctr"/>
-            <a:endParaRPr lang="de-DE"/>
+            <a:endParaRPr lang="de-DE" dirty="0"/>
           </a:p>
         </p:txBody>
       </p:sp>
@@ -6419,7 +12037,7 @@
           <a:lstStyle/>
           <a:p>
             <a:pPr algn="ctr"/>
-            <a:endParaRPr lang="de-DE"/>
+            <a:endParaRPr lang="de-DE" dirty="0"/>
           </a:p>
         </p:txBody>
       </p:sp>
@@ -6497,7 +12115,7 @@
           <a:lstStyle/>
           <a:p>
             <a:r>
-              <a:rPr lang="de-DE" sz="1100" i="1" dirty="0" err="1">
+              <a:rPr lang="de-DE" sz="1100" i="1" dirty="0">
                 <a:solidFill>
                   <a:srgbClr val="086FBD"/>
                 </a:solidFill>
@@ -6508,7 +12126,7 @@
               <a:t>U</a:t>
             </a:r>
             <a:r>
-              <a:rPr lang="de-DE" sz="1100" baseline="-25000" dirty="0" err="1">
+              <a:rPr lang="de-DE" sz="1100" baseline="-25000" dirty="0">
                 <a:solidFill>
                   <a:srgbClr val="086FBD"/>
                 </a:solidFill>
@@ -6518,14 +12136,6 @@
               </a:rPr>
               <a:t>q</a:t>
             </a:r>
-            <a:endParaRPr lang="de-DE" sz="1100" baseline="-25000" dirty="0">
-              <a:solidFill>
-                <a:srgbClr val="086FBD"/>
-              </a:solidFill>
-              <a:latin typeface="CMU Serif" panose="02000603000000000000" pitchFamily="2" charset="0"/>
-              <a:ea typeface="CMU Serif" panose="02000603000000000000" pitchFamily="2" charset="0"/>
-              <a:cs typeface="CMU Serif" panose="02000603000000000000" pitchFamily="2" charset="0"/>
-            </a:endParaRPr>
           </a:p>
         </p:txBody>
       </p:sp>
@@ -7132,7 +12742,7 @@
           <a:lstStyle/>
           <a:p>
             <a:pPr algn="ctr"/>
-            <a:endParaRPr lang="de-DE"/>
+            <a:endParaRPr lang="de-DE" dirty="0"/>
           </a:p>
         </p:txBody>
       </p:sp>
@@ -7185,7 +12795,7 @@
           <a:lstStyle/>
           <a:p>
             <a:pPr algn="ctr"/>
-            <a:endParaRPr lang="de-DE"/>
+            <a:endParaRPr lang="de-DE" dirty="0"/>
           </a:p>
         </p:txBody>
       </p:sp>
@@ -7237,7 +12847,7 @@
           <a:lstStyle/>
           <a:p>
             <a:pPr algn="ctr"/>
-            <a:endParaRPr lang="de-DE">
+            <a:endParaRPr lang="de-DE" dirty="0">
               <a:solidFill>
                 <a:sysClr val="windowText" lastClr="000000"/>
               </a:solidFill>
@@ -7293,7 +12903,7 @@
           <a:lstStyle/>
           <a:p>
             <a:pPr algn="ctr"/>
-            <a:endParaRPr lang="de-DE">
+            <a:endParaRPr lang="de-DE" dirty="0">
               <a:solidFill>
                 <a:sysClr val="windowText" lastClr="000000"/>
               </a:solidFill>
@@ -7352,7 +12962,7 @@
           <a:lstStyle/>
           <a:p>
             <a:pPr algn="ctr"/>
-            <a:endParaRPr lang="de-DE"/>
+            <a:endParaRPr lang="de-DE" dirty="0"/>
           </a:p>
         </p:txBody>
       </p:sp>
@@ -7407,7 +13017,7 @@
           <a:lstStyle/>
           <a:p>
             <a:pPr algn="ctr"/>
-            <a:endParaRPr lang="de-DE"/>
+            <a:endParaRPr lang="de-DE" dirty="0"/>
           </a:p>
         </p:txBody>
       </p:sp>
@@ -7460,7 +13070,7 @@
           <a:lstStyle/>
           <a:p>
             <a:pPr algn="ctr"/>
-            <a:endParaRPr lang="de-DE"/>
+            <a:endParaRPr lang="de-DE" dirty="0"/>
           </a:p>
         </p:txBody>
       </p:sp>
@@ -7512,7 +13122,7 @@
           <a:lstStyle/>
           <a:p>
             <a:pPr algn="ctr"/>
-            <a:endParaRPr lang="de-DE"/>
+            <a:endParaRPr lang="de-DE" dirty="0"/>
           </a:p>
         </p:txBody>
       </p:sp>
@@ -7590,7 +13200,7 @@
           <a:lstStyle/>
           <a:p>
             <a:r>
-              <a:rPr lang="de-DE" sz="1100" i="1" dirty="0" err="1">
+              <a:rPr lang="de-DE" sz="1100" i="1" dirty="0">
                 <a:solidFill>
                   <a:srgbClr val="086FBD"/>
                 </a:solidFill>
@@ -7601,7 +13211,7 @@
               <a:t>U</a:t>
             </a:r>
             <a:r>
-              <a:rPr lang="de-DE" sz="1100" baseline="-25000" dirty="0" err="1">
+              <a:rPr lang="de-DE" sz="1100" baseline="-25000" dirty="0">
                 <a:solidFill>
                   <a:srgbClr val="086FBD"/>
                 </a:solidFill>
@@ -7611,14 +13221,6 @@
               </a:rPr>
               <a:t>q</a:t>
             </a:r>
-            <a:endParaRPr lang="de-DE" sz="1100" baseline="-25000" dirty="0">
-              <a:solidFill>
-                <a:srgbClr val="086FBD"/>
-              </a:solidFill>
-              <a:latin typeface="CMU Serif" panose="02000603000000000000" pitchFamily="2" charset="0"/>
-              <a:ea typeface="CMU Serif" panose="02000603000000000000" pitchFamily="2" charset="0"/>
-              <a:cs typeface="CMU Serif" panose="02000603000000000000" pitchFamily="2" charset="0"/>
-            </a:endParaRPr>
           </a:p>
         </p:txBody>
       </p:sp>
@@ -8049,7 +13651,7 @@
           <a:lstStyle/>
           <a:p>
             <a:pPr algn="ctr"/>
-            <a:endParaRPr lang="de-DE">
+            <a:endParaRPr lang="de-DE" dirty="0">
               <a:solidFill>
                 <a:sysClr val="windowText" lastClr="000000"/>
               </a:solidFill>
@@ -8107,7 +13709,7 @@
           <a:lstStyle/>
           <a:p>
             <a:pPr algn="ctr"/>
-            <a:endParaRPr lang="de-DE">
+            <a:endParaRPr lang="de-DE" dirty="0">
               <a:solidFill>
                 <a:sysClr val="windowText" lastClr="000000"/>
               </a:solidFill>
@@ -8189,7 +13791,7 @@
           <a:lstStyle/>
           <a:p>
             <a:r>
-              <a:rPr lang="de-DE" sz="1100" i="1" dirty="0" err="1">
+              <a:rPr lang="de-DE" sz="1100" i="1" dirty="0">
                 <a:solidFill>
                   <a:srgbClr val="086FBD"/>
                 </a:solidFill>
@@ -8200,7 +13802,7 @@
               <a:t>U</a:t>
             </a:r>
             <a:r>
-              <a:rPr lang="de-DE" sz="1100" baseline="-25000" dirty="0" err="1">
+              <a:rPr lang="de-DE" sz="1100" baseline="-25000" dirty="0">
                 <a:solidFill>
                   <a:srgbClr val="086FBD"/>
                 </a:solidFill>
@@ -8309,7 +13911,7 @@
           <a:lstStyle/>
           <a:p>
             <a:pPr algn="ctr"/>
-            <a:endParaRPr lang="de-DE"/>
+            <a:endParaRPr lang="de-DE" dirty="0"/>
           </a:p>
         </p:txBody>
       </p:sp>
@@ -8362,7 +13964,7 @@
           <a:lstStyle/>
           <a:p>
             <a:pPr algn="ctr"/>
-            <a:endParaRPr lang="de-DE"/>
+            <a:endParaRPr lang="de-DE" dirty="0"/>
           </a:p>
         </p:txBody>
       </p:sp>
@@ -8414,7 +14016,7 @@
           <a:lstStyle/>
           <a:p>
             <a:pPr algn="ctr"/>
-            <a:endParaRPr lang="de-DE">
+            <a:endParaRPr lang="de-DE" dirty="0">
               <a:solidFill>
                 <a:sysClr val="windowText" lastClr="000000"/>
               </a:solidFill>
@@ -8470,7 +14072,7 @@
           <a:lstStyle/>
           <a:p>
             <a:pPr algn="ctr"/>
-            <a:endParaRPr lang="de-DE">
+            <a:endParaRPr lang="de-DE" dirty="0">
               <a:solidFill>
                 <a:sysClr val="windowText" lastClr="000000"/>
               </a:solidFill>
@@ -8529,7 +14131,7 @@
           <a:lstStyle/>
           <a:p>
             <a:pPr algn="ctr"/>
-            <a:endParaRPr lang="de-DE"/>
+            <a:endParaRPr lang="de-DE" dirty="0"/>
           </a:p>
         </p:txBody>
       </p:sp>
@@ -8584,7 +14186,7 @@
           <a:lstStyle/>
           <a:p>
             <a:pPr algn="ctr"/>
-            <a:endParaRPr lang="de-DE"/>
+            <a:endParaRPr lang="de-DE" dirty="0"/>
           </a:p>
         </p:txBody>
       </p:sp>
@@ -8636,7 +14238,7 @@
           <a:lstStyle/>
           <a:p>
             <a:pPr algn="ctr"/>
-            <a:endParaRPr lang="de-DE"/>
+            <a:endParaRPr lang="de-DE" dirty="0"/>
           </a:p>
         </p:txBody>
       </p:sp>
@@ -8714,7 +14316,7 @@
           <a:lstStyle/>
           <a:p>
             <a:r>
-              <a:rPr lang="de-DE" sz="1100" i="1" dirty="0" err="1">
+              <a:rPr lang="de-DE" sz="1100" i="1" dirty="0">
                 <a:solidFill>
                   <a:srgbClr val="086FBD"/>
                 </a:solidFill>
@@ -8725,7 +14327,7 @@
               <a:t>U</a:t>
             </a:r>
             <a:r>
-              <a:rPr lang="de-DE" sz="1100" baseline="-25000" dirty="0" err="1">
+              <a:rPr lang="de-DE" sz="1100" baseline="-25000" dirty="0">
                 <a:solidFill>
                   <a:srgbClr val="086FBD"/>
                 </a:solidFill>
@@ -8735,14 +14337,6 @@
               </a:rPr>
               <a:t>q</a:t>
             </a:r>
-            <a:endParaRPr lang="de-DE" sz="1100" baseline="-25000" dirty="0">
-              <a:solidFill>
-                <a:srgbClr val="086FBD"/>
-              </a:solidFill>
-              <a:latin typeface="CMU Serif" panose="02000603000000000000" pitchFamily="2" charset="0"/>
-              <a:ea typeface="CMU Serif" panose="02000603000000000000" pitchFamily="2" charset="0"/>
-              <a:cs typeface="CMU Serif" panose="02000603000000000000" pitchFamily="2" charset="0"/>
-            </a:endParaRPr>
           </a:p>
         </p:txBody>
       </p:sp>
@@ -8961,7 +14555,7 @@
           <a:lstStyle/>
           <a:p>
             <a:r>
-              <a:rPr lang="de-DE" sz="1100" i="1" dirty="0" err="1">
+              <a:rPr lang="de-DE" sz="1100" i="1" dirty="0">
                 <a:solidFill>
                   <a:srgbClr val="FF0000"/>
                 </a:solidFill>
@@ -8972,7 +14566,7 @@
               <a:t>I</a:t>
             </a:r>
             <a:r>
-              <a:rPr lang="de-DE" sz="1100" baseline="-25000" dirty="0" err="1">
+              <a:rPr lang="de-DE" sz="1100" baseline="-25000" dirty="0">
                 <a:solidFill>
                   <a:srgbClr val="FF0000"/>
                 </a:solidFill>
@@ -9184,7 +14778,7 @@
           <a:lstStyle/>
           <a:p>
             <a:pPr algn="ctr"/>
-            <a:endParaRPr lang="de-DE">
+            <a:endParaRPr lang="de-DE" dirty="0">
               <a:solidFill>
                 <a:sysClr val="windowText" lastClr="000000"/>
               </a:solidFill>
@@ -9242,7 +14836,7 @@
           <a:lstStyle/>
           <a:p>
             <a:pPr algn="ctr"/>
-            <a:endParaRPr lang="de-DE">
+            <a:endParaRPr lang="de-DE" dirty="0">
               <a:solidFill>
                 <a:sysClr val="windowText" lastClr="000000"/>
               </a:solidFill>
@@ -9335,7 +14929,7 @@
           <a:lstStyle/>
           <a:p>
             <a:pPr algn="ctr"/>
-            <a:endParaRPr lang="de-DE"/>
+            <a:endParaRPr lang="de-DE" dirty="0"/>
           </a:p>
         </p:txBody>
       </p:sp>
@@ -9390,7 +14984,7 @@
           <a:lstStyle/>
           <a:p>
             <a:pPr algn="ctr"/>
-            <a:endParaRPr lang="de-DE"/>
+            <a:endParaRPr lang="de-DE" dirty="0"/>
           </a:p>
         </p:txBody>
       </p:sp>
@@ -9442,7 +15036,7 @@
           <a:lstStyle/>
           <a:p>
             <a:pPr algn="ctr"/>
-            <a:endParaRPr lang="de-DE"/>
+            <a:endParaRPr lang="de-DE" dirty="0"/>
           </a:p>
         </p:txBody>
       </p:sp>
@@ -9540,7 +15134,7 @@
             <a:lstStyle/>
             <a:p>
               <a:r>
-                <a:rPr lang="de-DE" sz="1100" i="1" dirty="0" err="1">
+                <a:rPr lang="de-DE" sz="1100" i="1" dirty="0">
                   <a:solidFill>
                     <a:srgbClr val="086FBD"/>
                   </a:solidFill>
@@ -9551,7 +15145,7 @@
                 <a:t>U</a:t>
               </a:r>
               <a:r>
-                <a:rPr lang="de-DE" sz="1100" baseline="-25000" dirty="0" err="1">
+                <a:rPr lang="de-DE" sz="1100" baseline="-25000" dirty="0">
                   <a:solidFill>
                     <a:srgbClr val="086FBD"/>
                   </a:solidFill>
@@ -9561,14 +15155,6 @@
                 </a:rPr>
                 <a:t>q</a:t>
               </a:r>
-              <a:endParaRPr lang="de-DE" sz="1100" baseline="-25000" dirty="0">
-                <a:solidFill>
-                  <a:srgbClr val="086FBD"/>
-                </a:solidFill>
-                <a:latin typeface="CMU Serif" panose="02000603000000000000" pitchFamily="2" charset="0"/>
-                <a:ea typeface="CMU Serif" panose="02000603000000000000" pitchFamily="2" charset="0"/>
-                <a:cs typeface="CMU Serif" panose="02000603000000000000" pitchFamily="2" charset="0"/>
-              </a:endParaRPr>
             </a:p>
           </p:txBody>
         </p:sp>
@@ -9785,7 +15371,7 @@
           <a:lstStyle/>
           <a:p>
             <a:pPr algn="ctr"/>
-            <a:endParaRPr lang="de-DE">
+            <a:endParaRPr lang="de-DE" dirty="0">
               <a:solidFill>
                 <a:sysClr val="windowText" lastClr="000000"/>
               </a:solidFill>
@@ -9843,7 +15429,7 @@
           <a:lstStyle/>
           <a:p>
             <a:pPr algn="ctr"/>
-            <a:endParaRPr lang="de-DE">
+            <a:endParaRPr lang="de-DE" dirty="0">
               <a:solidFill>
                 <a:sysClr val="windowText" lastClr="000000"/>
               </a:solidFill>
@@ -11178,7 +16764,7 @@
           <a:lstStyle/>
           <a:p>
             <a:pPr algn="ctr"/>
-            <a:endParaRPr lang="de-DE" sz="2400"/>
+            <a:endParaRPr lang="de-DE" sz="2400" dirty="0"/>
           </a:p>
         </p:txBody>
       </p:sp>
@@ -11392,7 +16978,7 @@
           <a:p>
             <a:pPr algn="ctr"/>
             <a:r>
-              <a:rPr lang="de-DE" sz="1400" i="1" dirty="0" err="1">
+              <a:rPr lang="de-DE" sz="1400" i="1" dirty="0">
                 <a:solidFill>
                   <a:srgbClr val="086FBD"/>
                 </a:solidFill>
@@ -11403,7 +16989,7 @@
               <a:t>u</a:t>
             </a:r>
             <a:r>
-              <a:rPr lang="de-DE" sz="1400" i="1" baseline="-25000" dirty="0" err="1">
+              <a:rPr lang="de-DE" sz="1400" i="1" baseline="-25000" dirty="0">
                 <a:solidFill>
                   <a:srgbClr val="086FBD"/>
                 </a:solidFill>
@@ -11487,7 +17073,7 @@
           <a:p>
             <a:pPr algn="ctr"/>
             <a:r>
-              <a:rPr lang="de-DE" sz="1400" i="1" dirty="0" err="1">
+              <a:rPr lang="de-DE" sz="1400" i="1" dirty="0">
                 <a:solidFill>
                   <a:srgbClr val="FF0000"/>
                 </a:solidFill>
@@ -11498,7 +17084,7 @@
               <a:t>i</a:t>
             </a:r>
             <a:r>
-              <a:rPr lang="de-DE" sz="1400" i="1" baseline="-25000" dirty="0" err="1">
+              <a:rPr lang="de-DE" sz="1400" i="1" baseline="-25000" dirty="0">
                 <a:solidFill>
                   <a:srgbClr val="FF0000"/>
                 </a:solidFill>
@@ -11629,96 +17215,6 @@
               <a:solidFill>
                 <a:schemeClr val="accent5"/>
               </a:solidFill>
-              <a:latin typeface="CMU Serif" panose="02000603000000000000" pitchFamily="2" charset="0"/>
-              <a:ea typeface="CMU Serif" panose="02000603000000000000" pitchFamily="2" charset="0"/>
-              <a:cs typeface="CMU Serif" panose="02000603000000000000" pitchFamily="2" charset="0"/>
-            </a:endParaRPr>
-          </a:p>
-        </p:txBody>
-      </p:sp>
-      <p:sp>
-        <p:nvSpPr>
-          <p:cNvPr id="23" name="Textfeld 22">
-            <a:extLst>
-              <a:ext uri="{FF2B5EF4-FFF2-40B4-BE49-F238E27FC236}">
-                <a16:creationId xmlns:a16="http://schemas.microsoft.com/office/drawing/2014/main" id="{CAD6B84E-3C06-C029-03BB-A0067CECE2D1}"/>
-              </a:ext>
-            </a:extLst>
-          </p:cNvPr>
-          <p:cNvSpPr txBox="1"/>
-          <p:nvPr/>
-        </p:nvSpPr>
-        <p:spPr>
-          <a:xfrm>
-            <a:off x="2198035" y="2176651"/>
-            <a:ext cx="518786" cy="253916"/>
-          </a:xfrm>
-          <a:prstGeom prst="rect">
-            <a:avLst/>
-          </a:prstGeom>
-          <a:noFill/>
-        </p:spPr>
-        <p:txBody>
-          <a:bodyPr wrap="square" rtlCol="0">
-            <a:spAutoFit/>
-          </a:bodyPr>
-          <a:lstStyle/>
-          <a:p>
-            <a:pPr algn="ctr"/>
-            <a:r>
-              <a:rPr lang="de-DE" sz="1050" dirty="0">
-                <a:latin typeface="CMU Serif" panose="02000603000000000000" pitchFamily="2" charset="0"/>
-                <a:ea typeface="CMU Serif" panose="02000603000000000000" pitchFamily="2" charset="0"/>
-                <a:cs typeface="CMU Serif" panose="02000603000000000000" pitchFamily="2" charset="0"/>
-              </a:rPr>
-              <a:t>Re</a:t>
-            </a:r>
-            <a:endParaRPr lang="de-DE" sz="1050" baseline="-25000" dirty="0">
-              <a:latin typeface="CMU Serif" panose="02000603000000000000" pitchFamily="2" charset="0"/>
-              <a:ea typeface="CMU Serif" panose="02000603000000000000" pitchFamily="2" charset="0"/>
-              <a:cs typeface="CMU Serif" panose="02000603000000000000" pitchFamily="2" charset="0"/>
-            </a:endParaRPr>
-          </a:p>
-        </p:txBody>
-      </p:sp>
-      <p:sp>
-        <p:nvSpPr>
-          <p:cNvPr id="24" name="Textfeld 23">
-            <a:extLst>
-              <a:ext uri="{FF2B5EF4-FFF2-40B4-BE49-F238E27FC236}">
-                <a16:creationId xmlns:a16="http://schemas.microsoft.com/office/drawing/2014/main" id="{896B4ABA-CC7B-ECCC-7F67-E522D6E3D0FD}"/>
-              </a:ext>
-            </a:extLst>
-          </p:cNvPr>
-          <p:cNvSpPr txBox="1"/>
-          <p:nvPr/>
-        </p:nvSpPr>
-        <p:spPr>
-          <a:xfrm>
-            <a:off x="1071759" y="1053040"/>
-            <a:ext cx="518786" cy="253916"/>
-          </a:xfrm>
-          <a:prstGeom prst="rect">
-            <a:avLst/>
-          </a:prstGeom>
-          <a:noFill/>
-        </p:spPr>
-        <p:txBody>
-          <a:bodyPr wrap="square" rtlCol="0">
-            <a:spAutoFit/>
-          </a:bodyPr>
-          <a:lstStyle/>
-          <a:p>
-            <a:pPr algn="ctr"/>
-            <a:r>
-              <a:rPr lang="de-DE" sz="1050" dirty="0">
-                <a:latin typeface="CMU Serif" panose="02000603000000000000" pitchFamily="2" charset="0"/>
-                <a:ea typeface="CMU Serif" panose="02000603000000000000" pitchFamily="2" charset="0"/>
-                <a:cs typeface="CMU Serif" panose="02000603000000000000" pitchFamily="2" charset="0"/>
-              </a:rPr>
-              <a:t>Im</a:t>
-            </a:r>
-            <a:endParaRPr lang="de-DE" sz="1050" baseline="-25000" dirty="0">
               <a:latin typeface="CMU Serif" panose="02000603000000000000" pitchFamily="2" charset="0"/>
               <a:ea typeface="CMU Serif" panose="02000603000000000000" pitchFamily="2" charset="0"/>
               <a:cs typeface="CMU Serif" panose="02000603000000000000" pitchFamily="2" charset="0"/>
@@ -11805,7 +17301,7 @@
           <a:lstStyle/>
           <a:p>
             <a:pPr algn="ctr"/>
-            <a:endParaRPr lang="de-DE"/>
+            <a:endParaRPr lang="de-DE" dirty="0"/>
           </a:p>
         </p:txBody>
       </p:sp>
@@ -11858,7 +17354,7 @@
           <a:lstStyle/>
           <a:p>
             <a:pPr algn="ctr"/>
-            <a:endParaRPr lang="de-DE"/>
+            <a:endParaRPr lang="de-DE" dirty="0"/>
           </a:p>
         </p:txBody>
       </p:sp>
@@ -11912,7 +17408,7 @@
           <a:lstStyle/>
           <a:p>
             <a:pPr algn="ctr"/>
-            <a:endParaRPr lang="de-DE"/>
+            <a:endParaRPr lang="de-DE" dirty="0"/>
           </a:p>
         </p:txBody>
       </p:sp>
@@ -11966,7 +17462,7 @@
           <a:lstStyle/>
           <a:p>
             <a:pPr algn="ctr"/>
-            <a:endParaRPr lang="de-DE"/>
+            <a:endParaRPr lang="de-DE" dirty="0"/>
           </a:p>
         </p:txBody>
       </p:sp>
@@ -12018,7 +17514,7 @@
           <a:lstStyle/>
           <a:p>
             <a:pPr algn="ctr"/>
-            <a:endParaRPr lang="de-DE"/>
+            <a:endParaRPr lang="de-DE" dirty="0"/>
           </a:p>
         </p:txBody>
       </p:sp>
@@ -12072,7 +17568,7 @@
           <a:lstStyle/>
           <a:p>
             <a:pPr algn="ctr"/>
-            <a:endParaRPr lang="de-DE"/>
+            <a:endParaRPr lang="de-DE" dirty="0"/>
           </a:p>
         </p:txBody>
       </p:sp>
@@ -12126,7 +17622,7 @@
           <a:lstStyle/>
           <a:p>
             <a:pPr algn="ctr"/>
-            <a:endParaRPr lang="de-DE"/>
+            <a:endParaRPr lang="de-DE" dirty="0"/>
           </a:p>
         </p:txBody>
       </p:sp>
@@ -12313,7 +17809,7 @@
           <a:lstStyle/>
           <a:p>
             <a:pPr algn="ctr"/>
-            <a:endParaRPr lang="de-DE"/>
+            <a:endParaRPr lang="de-DE" dirty="0"/>
           </a:p>
         </p:txBody>
       </p:sp>
@@ -12365,7 +17861,7 @@
           <a:lstStyle/>
           <a:p>
             <a:pPr algn="ctr"/>
-            <a:endParaRPr lang="de-DE"/>
+            <a:endParaRPr lang="de-DE" dirty="0"/>
           </a:p>
         </p:txBody>
       </p:sp>
@@ -12417,7 +17913,7 @@
           <a:lstStyle/>
           <a:p>
             <a:pPr algn="ctr"/>
-            <a:endParaRPr lang="de-DE"/>
+            <a:endParaRPr lang="de-DE" dirty="0"/>
           </a:p>
         </p:txBody>
       </p:sp>
@@ -12541,7 +18037,7 @@
           <a:p>
             <a:pPr algn="ctr"/>
             <a:r>
-              <a:rPr lang="de-DE" sz="1100" i="1" dirty="0" err="1">
+              <a:rPr lang="de-DE" sz="1100" i="1" dirty="0">
                 <a:solidFill>
                   <a:srgbClr val="086FBD"/>
                 </a:solidFill>
@@ -12552,7 +18048,7 @@
               <a:t>u</a:t>
             </a:r>
             <a:r>
-              <a:rPr lang="de-DE" sz="1100" baseline="-25000" dirty="0" err="1">
+              <a:rPr lang="de-DE" sz="1100" baseline="-25000" dirty="0">
                 <a:solidFill>
                   <a:srgbClr val="086FBD"/>
                 </a:solidFill>
@@ -12626,21 +18122,10 @@
                 <a:ea typeface="CMU Serif" panose="02000603000000000000" pitchFamily="2" charset="0"/>
                 <a:cs typeface="CMU Serif" panose="02000603000000000000" pitchFamily="2" charset="0"/>
               </a:rPr>
-              <a:t> </a:t>
-            </a:r>
-            <a:r>
-              <a:rPr lang="de-DE" sz="1100" i="1" dirty="0" err="1">
-                <a:solidFill>
-                  <a:srgbClr val="086FBD"/>
-                </a:solidFill>
-                <a:latin typeface="CMU Serif" panose="02000603000000000000" pitchFamily="2" charset="0"/>
-                <a:ea typeface="CMU Serif" panose="02000603000000000000" pitchFamily="2" charset="0"/>
-                <a:cs typeface="CMU Serif" panose="02000603000000000000" pitchFamily="2" charset="0"/>
-              </a:rPr>
-              <a:t>u</a:t>
-            </a:r>
-            <a:r>
-              <a:rPr lang="de-DE" sz="1100" baseline="-25000" dirty="0" err="1">
+              <a:t> u</a:t>
+            </a:r>
+            <a:r>
+              <a:rPr lang="de-DE" sz="1100" baseline="-25000" dirty="0">
                 <a:solidFill>
                   <a:srgbClr val="086FBD"/>
                 </a:solidFill>
@@ -12761,7 +18246,7 @@
           <a:p>
             <a:pPr algn="ctr"/>
             <a:r>
-              <a:rPr lang="de-DE" sz="1100" i="1" dirty="0" err="1">
+              <a:rPr lang="de-DE" sz="1100" i="1" dirty="0">
                 <a:solidFill>
                   <a:srgbClr val="FF0000"/>
                 </a:solidFill>
@@ -12772,7 +18257,7 @@
               <a:t>i</a:t>
             </a:r>
             <a:r>
-              <a:rPr lang="de-DE" sz="1100" baseline="-25000" dirty="0" err="1">
+              <a:rPr lang="de-DE" sz="1100" baseline="-25000" dirty="0">
                 <a:solidFill>
                   <a:srgbClr val="FF0000"/>
                 </a:solidFill>
@@ -12846,21 +18331,10 @@
                 <a:ea typeface="CMU Serif" panose="02000603000000000000" pitchFamily="2" charset="0"/>
                 <a:cs typeface="CMU Serif" panose="02000603000000000000" pitchFamily="2" charset="0"/>
               </a:rPr>
-              <a:t> </a:t>
-            </a:r>
-            <a:r>
-              <a:rPr lang="de-DE" sz="1100" i="1" dirty="0" err="1">
-                <a:solidFill>
-                  <a:srgbClr val="FF0000"/>
-                </a:solidFill>
-                <a:latin typeface="CMU Serif" panose="02000603000000000000" pitchFamily="2" charset="0"/>
-                <a:ea typeface="CMU Serif" panose="02000603000000000000" pitchFamily="2" charset="0"/>
-                <a:cs typeface="CMU Serif" panose="02000603000000000000" pitchFamily="2" charset="0"/>
-              </a:rPr>
-              <a:t>i</a:t>
-            </a:r>
-            <a:r>
-              <a:rPr lang="de-DE" sz="1100" baseline="-25000" dirty="0" err="1">
+              <a:t> i</a:t>
+            </a:r>
+            <a:r>
+              <a:rPr lang="de-DE" sz="1100" baseline="-25000" dirty="0">
                 <a:solidFill>
                   <a:srgbClr val="FF0000"/>
                 </a:solidFill>

--- a/B.Sc. LRT/Grundlagen der Elektrotechnik/images/ETech-Images.pptx
+++ b/B.Sc. LRT/Grundlagen der Elektrotechnik/images/ETech-Images.pptx
@@ -5,7 +5,7 @@
     <p:sldMasterId id="2147483660" r:id="rId1"/>
   </p:sldMasterIdLst>
   <p:notesMasterIdLst>
-    <p:notesMasterId r:id="rId15"/>
+    <p:notesMasterId r:id="rId23"/>
   </p:notesMasterIdLst>
   <p:sldIdLst>
     <p:sldId id="256" r:id="rId2"/>
@@ -21,6 +21,14 @@
     <p:sldId id="266" r:id="rId12"/>
     <p:sldId id="267" r:id="rId13"/>
     <p:sldId id="268" r:id="rId14"/>
+    <p:sldId id="270" r:id="rId15"/>
+    <p:sldId id="272" r:id="rId16"/>
+    <p:sldId id="274" r:id="rId17"/>
+    <p:sldId id="275" r:id="rId18"/>
+    <p:sldId id="271" r:id="rId19"/>
+    <p:sldId id="273" r:id="rId20"/>
+    <p:sldId id="276" r:id="rId21"/>
+    <p:sldId id="277" r:id="rId22"/>
   </p:sldIdLst>
   <p:sldSz cx="3600450" cy="3600450"/>
   <p:notesSz cx="6858000" cy="9144000"/>
@@ -209,7 +217,7 @@
           <a:p>
             <a:fld id="{0C596C2D-C72C-406E-B79E-9BAC142DD20E}" type="datetimeFigureOut">
               <a:rPr lang="de-DE" smtClean="0"/>
-              <a:t>11.02.2026</a:t>
+              <a:t>12.02.2026</a:t>
             </a:fld>
             <a:endParaRPr lang="de-DE" dirty="0"/>
           </a:p>
@@ -607,7 +615,7 @@
           <a:p>
             <a:fld id="{6EAE28AA-0912-4DA0-8B30-7F3CA3FE6671}" type="datetimeFigureOut">
               <a:rPr lang="de-DE" smtClean="0"/>
-              <a:t>11.02.2026</a:t>
+              <a:t>12.02.2026</a:t>
             </a:fld>
             <a:endParaRPr lang="de-DE" dirty="0"/>
           </a:p>
@@ -777,7 +785,7 @@
           <a:p>
             <a:fld id="{6EAE28AA-0912-4DA0-8B30-7F3CA3FE6671}" type="datetimeFigureOut">
               <a:rPr lang="de-DE" smtClean="0"/>
-              <a:t>11.02.2026</a:t>
+              <a:t>12.02.2026</a:t>
             </a:fld>
             <a:endParaRPr lang="de-DE" dirty="0"/>
           </a:p>
@@ -957,7 +965,7 @@
           <a:p>
             <a:fld id="{6EAE28AA-0912-4DA0-8B30-7F3CA3FE6671}" type="datetimeFigureOut">
               <a:rPr lang="de-DE" smtClean="0"/>
-              <a:t>11.02.2026</a:t>
+              <a:t>12.02.2026</a:t>
             </a:fld>
             <a:endParaRPr lang="de-DE" dirty="0"/>
           </a:p>
@@ -1127,7 +1135,7 @@
           <a:p>
             <a:fld id="{6EAE28AA-0912-4DA0-8B30-7F3CA3FE6671}" type="datetimeFigureOut">
               <a:rPr lang="de-DE" smtClean="0"/>
-              <a:t>11.02.2026</a:t>
+              <a:t>12.02.2026</a:t>
             </a:fld>
             <a:endParaRPr lang="de-DE" dirty="0"/>
           </a:p>
@@ -1373,7 +1381,7 @@
           <a:p>
             <a:fld id="{6EAE28AA-0912-4DA0-8B30-7F3CA3FE6671}" type="datetimeFigureOut">
               <a:rPr lang="de-DE" smtClean="0"/>
-              <a:t>11.02.2026</a:t>
+              <a:t>12.02.2026</a:t>
             </a:fld>
             <a:endParaRPr lang="de-DE" dirty="0"/>
           </a:p>
@@ -1605,7 +1613,7 @@
           <a:p>
             <a:fld id="{6EAE28AA-0912-4DA0-8B30-7F3CA3FE6671}" type="datetimeFigureOut">
               <a:rPr lang="de-DE" smtClean="0"/>
-              <a:t>11.02.2026</a:t>
+              <a:t>12.02.2026</a:t>
             </a:fld>
             <a:endParaRPr lang="de-DE" dirty="0"/>
           </a:p>
@@ -1972,7 +1980,7 @@
           <a:p>
             <a:fld id="{6EAE28AA-0912-4DA0-8B30-7F3CA3FE6671}" type="datetimeFigureOut">
               <a:rPr lang="de-DE" smtClean="0"/>
-              <a:t>11.02.2026</a:t>
+              <a:t>12.02.2026</a:t>
             </a:fld>
             <a:endParaRPr lang="de-DE" dirty="0"/>
           </a:p>
@@ -2090,7 +2098,7 @@
           <a:p>
             <a:fld id="{6EAE28AA-0912-4DA0-8B30-7F3CA3FE6671}" type="datetimeFigureOut">
               <a:rPr lang="de-DE" smtClean="0"/>
-              <a:t>11.02.2026</a:t>
+              <a:t>12.02.2026</a:t>
             </a:fld>
             <a:endParaRPr lang="de-DE" dirty="0"/>
           </a:p>
@@ -2185,7 +2193,7 @@
           <a:p>
             <a:fld id="{6EAE28AA-0912-4DA0-8B30-7F3CA3FE6671}" type="datetimeFigureOut">
               <a:rPr lang="de-DE" smtClean="0"/>
-              <a:t>11.02.2026</a:t>
+              <a:t>12.02.2026</a:t>
             </a:fld>
             <a:endParaRPr lang="de-DE" dirty="0"/>
           </a:p>
@@ -2462,7 +2470,7 @@
           <a:p>
             <a:fld id="{6EAE28AA-0912-4DA0-8B30-7F3CA3FE6671}" type="datetimeFigureOut">
               <a:rPr lang="de-DE" smtClean="0"/>
-              <a:t>11.02.2026</a:t>
+              <a:t>12.02.2026</a:t>
             </a:fld>
             <a:endParaRPr lang="de-DE" dirty="0"/>
           </a:p>
@@ -2719,7 +2727,7 @@
           <a:p>
             <a:fld id="{6EAE28AA-0912-4DA0-8B30-7F3CA3FE6671}" type="datetimeFigureOut">
               <a:rPr lang="de-DE" smtClean="0"/>
-              <a:t>11.02.2026</a:t>
+              <a:t>12.02.2026</a:t>
             </a:fld>
             <a:endParaRPr lang="de-DE" dirty="0"/>
           </a:p>
@@ -2932,7 +2940,7 @@
           <a:p>
             <a:fld id="{6EAE28AA-0912-4DA0-8B30-7F3CA3FE6671}" type="datetimeFigureOut">
               <a:rPr lang="de-DE" smtClean="0"/>
-              <a:t>11.02.2026</a:t>
+              <a:t>12.02.2026</a:t>
             </a:fld>
             <a:endParaRPr lang="de-DE" dirty="0"/>
           </a:p>
@@ -10409,6 +10417,6077 @@
 </p:sld>
 </file>
 
+<file path=ppt/slides/slide14.xml><?xml version="1.0" encoding="utf-8"?>
+<p:sld xmlns:a="http://schemas.openxmlformats.org/drawingml/2006/main" xmlns:r="http://schemas.openxmlformats.org/officeDocument/2006/relationships" xmlns:p="http://schemas.openxmlformats.org/presentationml/2006/main">
+  <p:cSld>
+    <p:spTree>
+      <p:nvGrpSpPr>
+        <p:cNvPr id="1" name="">
+          <a:extLst>
+            <a:ext uri="{FF2B5EF4-FFF2-40B4-BE49-F238E27FC236}">
+              <a16:creationId xmlns:a16="http://schemas.microsoft.com/office/drawing/2014/main" id="{F138136F-134C-1A41-BD3E-B97D1AAF6745}"/>
+            </a:ext>
+          </a:extLst>
+        </p:cNvPr>
+        <p:cNvGrpSpPr/>
+        <p:nvPr/>
+      </p:nvGrpSpPr>
+      <p:grpSpPr>
+        <a:xfrm>
+          <a:off x="0" y="0"/>
+          <a:ext cx="0" cy="0"/>
+          <a:chOff x="0" y="0"/>
+          <a:chExt cx="0" cy="0"/>
+        </a:xfrm>
+      </p:grpSpPr>
+      <p:sp>
+        <p:nvSpPr>
+          <p:cNvPr id="36" name="Bogen 35">
+            <a:extLst>
+              <a:ext uri="{FF2B5EF4-FFF2-40B4-BE49-F238E27FC236}">
+                <a16:creationId xmlns:a16="http://schemas.microsoft.com/office/drawing/2014/main" id="{CDBD989A-00D4-F885-F924-E955AFA090A9}"/>
+              </a:ext>
+            </a:extLst>
+          </p:cNvPr>
+          <p:cNvSpPr/>
+          <p:nvPr/>
+        </p:nvSpPr>
+        <p:spPr>
+          <a:xfrm>
+            <a:off x="1015221" y="1882453"/>
+            <a:ext cx="634988" cy="634986"/>
+          </a:xfrm>
+          <a:prstGeom prst="arc">
+            <a:avLst>
+              <a:gd name="adj1" fmla="val 14973702"/>
+              <a:gd name="adj2" fmla="val 20361855"/>
+            </a:avLst>
+          </a:prstGeom>
+          <a:ln cap="rnd">
+            <a:solidFill>
+              <a:schemeClr val="accent6">
+                <a:lumMod val="75000"/>
+              </a:schemeClr>
+            </a:solidFill>
+            <a:round/>
+            <a:headEnd type="triangle"/>
+          </a:ln>
+        </p:spPr>
+        <p:style>
+          <a:lnRef idx="2">
+            <a:schemeClr val="accent1"/>
+          </a:lnRef>
+          <a:fillRef idx="0">
+            <a:schemeClr val="accent1"/>
+          </a:fillRef>
+          <a:effectRef idx="1">
+            <a:schemeClr val="accent1"/>
+          </a:effectRef>
+          <a:fontRef idx="minor">
+            <a:schemeClr val="tx1"/>
+          </a:fontRef>
+        </p:style>
+        <p:txBody>
+          <a:bodyPr rtlCol="0" anchor="ctr"/>
+          <a:lstStyle/>
+          <a:p>
+            <a:pPr algn="ctr"/>
+            <a:endParaRPr lang="de-DE" sz="2400" dirty="0"/>
+          </a:p>
+        </p:txBody>
+      </p:sp>
+      <p:sp>
+        <p:nvSpPr>
+          <p:cNvPr id="33" name="Bogen 32">
+            <a:extLst>
+              <a:ext uri="{FF2B5EF4-FFF2-40B4-BE49-F238E27FC236}">
+                <a16:creationId xmlns:a16="http://schemas.microsoft.com/office/drawing/2014/main" id="{B0E7EBC6-5730-197F-3E0C-D6E0028124D1}"/>
+              </a:ext>
+            </a:extLst>
+          </p:cNvPr>
+          <p:cNvSpPr/>
+          <p:nvPr/>
+        </p:nvSpPr>
+        <p:spPr>
+          <a:xfrm>
+            <a:off x="723382" y="1589699"/>
+            <a:ext cx="1220493" cy="1220493"/>
+          </a:xfrm>
+          <a:prstGeom prst="arc">
+            <a:avLst>
+              <a:gd name="adj1" fmla="val 18675553"/>
+              <a:gd name="adj2" fmla="val 20361855"/>
+            </a:avLst>
+          </a:prstGeom>
+          <a:ln cap="rnd">
+            <a:solidFill>
+              <a:schemeClr val="accent2">
+                <a:lumMod val="75000"/>
+              </a:schemeClr>
+            </a:solidFill>
+            <a:round/>
+            <a:headEnd type="triangle"/>
+          </a:ln>
+        </p:spPr>
+        <p:style>
+          <a:lnRef idx="2">
+            <a:schemeClr val="accent1"/>
+          </a:lnRef>
+          <a:fillRef idx="0">
+            <a:schemeClr val="accent1"/>
+          </a:fillRef>
+          <a:effectRef idx="1">
+            <a:schemeClr val="accent1"/>
+          </a:effectRef>
+          <a:fontRef idx="minor">
+            <a:schemeClr val="tx1"/>
+          </a:fontRef>
+        </p:style>
+        <p:txBody>
+          <a:bodyPr rtlCol="0" anchor="ctr"/>
+          <a:lstStyle/>
+          <a:p>
+            <a:pPr algn="ctr"/>
+            <a:endParaRPr lang="de-DE" sz="2400" dirty="0"/>
+          </a:p>
+        </p:txBody>
+      </p:sp>
+      <p:cxnSp>
+        <p:nvCxnSpPr>
+          <p:cNvPr id="17" name="Gerade Verbindung mit Pfeil 16">
+            <a:extLst>
+              <a:ext uri="{FF2B5EF4-FFF2-40B4-BE49-F238E27FC236}">
+                <a16:creationId xmlns:a16="http://schemas.microsoft.com/office/drawing/2014/main" id="{111AB1D3-6D2F-224C-123F-5EE3521D6742}"/>
+              </a:ext>
+            </a:extLst>
+          </p:cNvPr>
+          <p:cNvCxnSpPr>
+            <a:cxnSpLocks/>
+          </p:cNvCxnSpPr>
+          <p:nvPr/>
+        </p:nvCxnSpPr>
+        <p:spPr>
+          <a:xfrm flipV="1">
+            <a:off x="1333628" y="1387173"/>
+            <a:ext cx="705197" cy="810868"/>
+          </a:xfrm>
+          <a:prstGeom prst="straightConnector1">
+            <a:avLst/>
+          </a:prstGeom>
+          <a:ln cap="rnd">
+            <a:solidFill>
+              <a:srgbClr val="086FBD"/>
+            </a:solidFill>
+            <a:round/>
+            <a:tailEnd type="triangle" w="med" len="med"/>
+          </a:ln>
+        </p:spPr>
+        <p:style>
+          <a:lnRef idx="2">
+            <a:schemeClr val="accent1"/>
+          </a:lnRef>
+          <a:fillRef idx="0">
+            <a:schemeClr val="accent1"/>
+          </a:fillRef>
+          <a:effectRef idx="1">
+            <a:schemeClr val="accent1"/>
+          </a:effectRef>
+          <a:fontRef idx="minor">
+            <a:schemeClr val="tx1"/>
+          </a:fontRef>
+        </p:style>
+      </p:cxnSp>
+      <p:cxnSp>
+        <p:nvCxnSpPr>
+          <p:cNvPr id="15" name="Gerade Verbindung mit Pfeil 14">
+            <a:extLst>
+              <a:ext uri="{FF2B5EF4-FFF2-40B4-BE49-F238E27FC236}">
+                <a16:creationId xmlns:a16="http://schemas.microsoft.com/office/drawing/2014/main" id="{A99FCC4A-66C3-42A0-EE20-AB0BEB691E6C}"/>
+              </a:ext>
+            </a:extLst>
+          </p:cNvPr>
+          <p:cNvCxnSpPr>
+            <a:cxnSpLocks/>
+          </p:cNvCxnSpPr>
+          <p:nvPr/>
+        </p:nvCxnSpPr>
+        <p:spPr>
+          <a:xfrm flipH="1" flipV="1">
+            <a:off x="1152398" y="1714951"/>
+            <a:ext cx="181230" cy="485003"/>
+          </a:xfrm>
+          <a:prstGeom prst="straightConnector1">
+            <a:avLst/>
+          </a:prstGeom>
+          <a:ln cap="rnd">
+            <a:solidFill>
+              <a:srgbClr val="086FBD"/>
+            </a:solidFill>
+            <a:round/>
+            <a:tailEnd type="triangle" w="med" len="med"/>
+          </a:ln>
+        </p:spPr>
+        <p:style>
+          <a:lnRef idx="2">
+            <a:schemeClr val="accent1"/>
+          </a:lnRef>
+          <a:fillRef idx="0">
+            <a:schemeClr val="accent1"/>
+          </a:fillRef>
+          <a:effectRef idx="1">
+            <a:schemeClr val="accent1"/>
+          </a:effectRef>
+          <a:fontRef idx="minor">
+            <a:schemeClr val="tx1"/>
+          </a:fontRef>
+        </p:style>
+      </p:cxnSp>
+      <p:sp>
+        <p:nvSpPr>
+          <p:cNvPr id="19" name="Bogen 18">
+            <a:extLst>
+              <a:ext uri="{FF2B5EF4-FFF2-40B4-BE49-F238E27FC236}">
+                <a16:creationId xmlns:a16="http://schemas.microsoft.com/office/drawing/2014/main" id="{49A9B38B-24DB-4896-2F62-3E62F420A94E}"/>
+              </a:ext>
+            </a:extLst>
+          </p:cNvPr>
+          <p:cNvSpPr/>
+          <p:nvPr/>
+        </p:nvSpPr>
+        <p:spPr>
+          <a:xfrm>
+            <a:off x="723382" y="1591614"/>
+            <a:ext cx="1220493" cy="1220493"/>
+          </a:xfrm>
+          <a:prstGeom prst="arc">
+            <a:avLst>
+              <a:gd name="adj1" fmla="val 20384948"/>
+              <a:gd name="adj2" fmla="val 0"/>
+            </a:avLst>
+          </a:prstGeom>
+          <a:ln cap="rnd">
+            <a:solidFill>
+              <a:schemeClr val="accent5"/>
+            </a:solidFill>
+            <a:round/>
+            <a:headEnd type="triangle"/>
+          </a:ln>
+        </p:spPr>
+        <p:style>
+          <a:lnRef idx="2">
+            <a:schemeClr val="accent1"/>
+          </a:lnRef>
+          <a:fillRef idx="0">
+            <a:schemeClr val="accent1"/>
+          </a:fillRef>
+          <a:effectRef idx="1">
+            <a:schemeClr val="accent1"/>
+          </a:effectRef>
+          <a:fontRef idx="minor">
+            <a:schemeClr val="tx1"/>
+          </a:fontRef>
+        </p:style>
+        <p:txBody>
+          <a:bodyPr rtlCol="0" anchor="ctr"/>
+          <a:lstStyle/>
+          <a:p>
+            <a:pPr algn="ctr"/>
+            <a:endParaRPr lang="de-DE" sz="2400" dirty="0"/>
+          </a:p>
+        </p:txBody>
+      </p:sp>
+      <p:cxnSp>
+        <p:nvCxnSpPr>
+          <p:cNvPr id="8" name="Gerade Verbindung mit Pfeil 7">
+            <a:extLst>
+              <a:ext uri="{FF2B5EF4-FFF2-40B4-BE49-F238E27FC236}">
+                <a16:creationId xmlns:a16="http://schemas.microsoft.com/office/drawing/2014/main" id="{3F19BD97-A8E3-98E8-3401-5C1082790CBD}"/>
+              </a:ext>
+            </a:extLst>
+          </p:cNvPr>
+          <p:cNvCxnSpPr>
+            <a:cxnSpLocks/>
+          </p:cNvCxnSpPr>
+          <p:nvPr/>
+        </p:nvCxnSpPr>
+        <p:spPr>
+          <a:xfrm flipV="1">
+            <a:off x="1333630" y="1869118"/>
+            <a:ext cx="890496" cy="332749"/>
+          </a:xfrm>
+          <a:prstGeom prst="straightConnector1">
+            <a:avLst/>
+          </a:prstGeom>
+          <a:ln cap="rnd">
+            <a:solidFill>
+              <a:srgbClr val="086FBD"/>
+            </a:solidFill>
+            <a:round/>
+            <a:tailEnd type="triangle" w="med" len="med"/>
+          </a:ln>
+        </p:spPr>
+        <p:style>
+          <a:lnRef idx="2">
+            <a:schemeClr val="accent1"/>
+          </a:lnRef>
+          <a:fillRef idx="0">
+            <a:schemeClr val="accent1"/>
+          </a:fillRef>
+          <a:effectRef idx="1">
+            <a:schemeClr val="accent1"/>
+          </a:effectRef>
+          <a:fontRef idx="minor">
+            <a:schemeClr val="tx1"/>
+          </a:fontRef>
+        </p:style>
+      </p:cxnSp>
+      <p:cxnSp>
+        <p:nvCxnSpPr>
+          <p:cNvPr id="10" name="Gerade Verbindung mit Pfeil 9">
+            <a:extLst>
+              <a:ext uri="{FF2B5EF4-FFF2-40B4-BE49-F238E27FC236}">
+                <a16:creationId xmlns:a16="http://schemas.microsoft.com/office/drawing/2014/main" id="{CE4BEF63-4BEA-C7AE-132D-A317F35619D1}"/>
+              </a:ext>
+            </a:extLst>
+          </p:cNvPr>
+          <p:cNvCxnSpPr>
+            <a:cxnSpLocks/>
+          </p:cNvCxnSpPr>
+          <p:nvPr/>
+        </p:nvCxnSpPr>
+        <p:spPr>
+          <a:xfrm flipV="1">
+            <a:off x="1333629" y="2048789"/>
+            <a:ext cx="409941" cy="153078"/>
+          </a:xfrm>
+          <a:prstGeom prst="straightConnector1">
+            <a:avLst/>
+          </a:prstGeom>
+          <a:ln w="19050" cap="rnd">
+            <a:solidFill>
+              <a:srgbClr val="FF0000"/>
+            </a:solidFill>
+            <a:round/>
+            <a:tailEnd type="triangle" w="med" len="med"/>
+          </a:ln>
+        </p:spPr>
+        <p:style>
+          <a:lnRef idx="2">
+            <a:schemeClr val="accent1"/>
+          </a:lnRef>
+          <a:fillRef idx="0">
+            <a:schemeClr val="accent1"/>
+          </a:fillRef>
+          <a:effectRef idx="1">
+            <a:schemeClr val="accent1"/>
+          </a:effectRef>
+          <a:fontRef idx="minor">
+            <a:schemeClr val="tx1"/>
+          </a:fontRef>
+        </p:style>
+      </p:cxnSp>
+      <p:cxnSp>
+        <p:nvCxnSpPr>
+          <p:cNvPr id="5" name="Gerade Verbindung mit Pfeil 4">
+            <a:extLst>
+              <a:ext uri="{FF2B5EF4-FFF2-40B4-BE49-F238E27FC236}">
+                <a16:creationId xmlns:a16="http://schemas.microsoft.com/office/drawing/2014/main" id="{7F94690B-27EC-D23B-4C51-7952C16380CC}"/>
+              </a:ext>
+            </a:extLst>
+          </p:cNvPr>
+          <p:cNvCxnSpPr>
+            <a:cxnSpLocks/>
+          </p:cNvCxnSpPr>
+          <p:nvPr/>
+        </p:nvCxnSpPr>
+        <p:spPr>
+          <a:xfrm flipV="1">
+            <a:off x="1333630" y="1173167"/>
+            <a:ext cx="0" cy="1254116"/>
+          </a:xfrm>
+          <a:prstGeom prst="straightConnector1">
+            <a:avLst/>
+          </a:prstGeom>
+          <a:ln cap="rnd">
+            <a:solidFill>
+              <a:schemeClr val="tx1"/>
+            </a:solidFill>
+            <a:round/>
+            <a:tailEnd type="triangle" w="med" len="med"/>
+          </a:ln>
+        </p:spPr>
+        <p:style>
+          <a:lnRef idx="2">
+            <a:schemeClr val="accent1"/>
+          </a:lnRef>
+          <a:fillRef idx="0">
+            <a:schemeClr val="accent1"/>
+          </a:fillRef>
+          <a:effectRef idx="1">
+            <a:schemeClr val="accent1"/>
+          </a:effectRef>
+          <a:fontRef idx="minor">
+            <a:schemeClr val="tx1"/>
+          </a:fontRef>
+        </p:style>
+      </p:cxnSp>
+      <p:cxnSp>
+        <p:nvCxnSpPr>
+          <p:cNvPr id="6" name="Gerade Verbindung mit Pfeil 5">
+            <a:extLst>
+              <a:ext uri="{FF2B5EF4-FFF2-40B4-BE49-F238E27FC236}">
+                <a16:creationId xmlns:a16="http://schemas.microsoft.com/office/drawing/2014/main" id="{186F9958-6E25-EF7B-3250-170BACD384F4}"/>
+              </a:ext>
+            </a:extLst>
+          </p:cNvPr>
+          <p:cNvCxnSpPr>
+            <a:cxnSpLocks/>
+          </p:cNvCxnSpPr>
+          <p:nvPr/>
+        </p:nvCxnSpPr>
+        <p:spPr>
+          <a:xfrm>
+            <a:off x="1124941" y="2201867"/>
+            <a:ext cx="1242999" cy="0"/>
+          </a:xfrm>
+          <a:prstGeom prst="straightConnector1">
+            <a:avLst/>
+          </a:prstGeom>
+          <a:ln cap="rnd">
+            <a:solidFill>
+              <a:schemeClr val="tx1"/>
+            </a:solidFill>
+            <a:round/>
+            <a:tailEnd type="triangle" w="med" len="med"/>
+          </a:ln>
+        </p:spPr>
+        <p:style>
+          <a:lnRef idx="2">
+            <a:schemeClr val="accent1"/>
+          </a:lnRef>
+          <a:fillRef idx="0">
+            <a:schemeClr val="accent1"/>
+          </a:fillRef>
+          <a:effectRef idx="1">
+            <a:schemeClr val="accent1"/>
+          </a:effectRef>
+          <a:fontRef idx="minor">
+            <a:schemeClr val="tx1"/>
+          </a:fontRef>
+        </p:style>
+      </p:cxnSp>
+      <p:sp>
+        <p:nvSpPr>
+          <p:cNvPr id="13" name="Textfeld 12">
+            <a:extLst>
+              <a:ext uri="{FF2B5EF4-FFF2-40B4-BE49-F238E27FC236}">
+                <a16:creationId xmlns:a16="http://schemas.microsoft.com/office/drawing/2014/main" id="{C6D55FFB-BC7D-3536-0B5D-2A59B15D07F2}"/>
+              </a:ext>
+            </a:extLst>
+          </p:cNvPr>
+          <p:cNvSpPr txBox="1"/>
+          <p:nvPr/>
+        </p:nvSpPr>
+        <p:spPr>
+          <a:xfrm>
+            <a:off x="2070145" y="1659455"/>
+            <a:ext cx="567731" cy="307777"/>
+          </a:xfrm>
+          <a:prstGeom prst="rect">
+            <a:avLst/>
+          </a:prstGeom>
+          <a:noFill/>
+        </p:spPr>
+        <p:txBody>
+          <a:bodyPr wrap="square" rtlCol="0">
+            <a:spAutoFit/>
+          </a:bodyPr>
+          <a:lstStyle/>
+          <a:p>
+            <a:pPr algn="ctr"/>
+            <a:r>
+              <a:rPr lang="de-DE" sz="1400" i="1" dirty="0">
+                <a:solidFill>
+                  <a:srgbClr val="086FBD"/>
+                </a:solidFill>
+                <a:latin typeface="CMU Serif" panose="02000603000000000000" pitchFamily="2" charset="0"/>
+                <a:ea typeface="CMU Serif" panose="02000603000000000000" pitchFamily="2" charset="0"/>
+                <a:cs typeface="CMU Serif" panose="02000603000000000000" pitchFamily="2" charset="0"/>
+              </a:rPr>
+              <a:t>U</a:t>
+            </a:r>
+            <a:r>
+              <a:rPr lang="de-DE" sz="1400" baseline="-25000" dirty="0">
+                <a:solidFill>
+                  <a:srgbClr val="086FBD"/>
+                </a:solidFill>
+                <a:latin typeface="CMU Serif" panose="02000603000000000000" pitchFamily="2" charset="0"/>
+                <a:ea typeface="CMU Serif" panose="02000603000000000000" pitchFamily="2" charset="0"/>
+                <a:cs typeface="CMU Serif" panose="02000603000000000000" pitchFamily="2" charset="0"/>
+              </a:rPr>
+              <a:t>R</a:t>
+            </a:r>
+          </a:p>
+        </p:txBody>
+      </p:sp>
+      <p:sp>
+        <p:nvSpPr>
+          <p:cNvPr id="14" name="Textfeld 13">
+            <a:extLst>
+              <a:ext uri="{FF2B5EF4-FFF2-40B4-BE49-F238E27FC236}">
+                <a16:creationId xmlns:a16="http://schemas.microsoft.com/office/drawing/2014/main" id="{1230391F-D58B-EE6D-89C9-412D1BA2E76D}"/>
+              </a:ext>
+            </a:extLst>
+          </p:cNvPr>
+          <p:cNvSpPr txBox="1"/>
+          <p:nvPr/>
+        </p:nvSpPr>
+        <p:spPr>
+          <a:xfrm>
+            <a:off x="1450218" y="2169108"/>
+            <a:ext cx="518786" cy="307777"/>
+          </a:xfrm>
+          <a:prstGeom prst="rect">
+            <a:avLst/>
+          </a:prstGeom>
+          <a:noFill/>
+        </p:spPr>
+        <p:txBody>
+          <a:bodyPr wrap="square" rtlCol="0">
+            <a:spAutoFit/>
+          </a:bodyPr>
+          <a:lstStyle/>
+          <a:p>
+            <a:pPr algn="ctr"/>
+            <a:r>
+              <a:rPr lang="de-DE" sz="1400" i="1" dirty="0" err="1">
+                <a:solidFill>
+                  <a:srgbClr val="FF0000"/>
+                </a:solidFill>
+                <a:latin typeface="CMU Serif" panose="02000603000000000000" pitchFamily="2" charset="0"/>
+                <a:ea typeface="CMU Serif" panose="02000603000000000000" pitchFamily="2" charset="0"/>
+                <a:cs typeface="CMU Serif" panose="02000603000000000000" pitchFamily="2" charset="0"/>
+              </a:rPr>
+              <a:t>I</a:t>
+            </a:r>
+            <a:r>
+              <a:rPr lang="de-DE" sz="1400" baseline="-25000" dirty="0" err="1">
+                <a:solidFill>
+                  <a:srgbClr val="FF0000"/>
+                </a:solidFill>
+                <a:latin typeface="CMU Serif" panose="02000603000000000000" pitchFamily="2" charset="0"/>
+                <a:ea typeface="CMU Serif" panose="02000603000000000000" pitchFamily="2" charset="0"/>
+                <a:cs typeface="CMU Serif" panose="02000603000000000000" pitchFamily="2" charset="0"/>
+              </a:rPr>
+              <a:t>ges</a:t>
+            </a:r>
+            <a:endParaRPr lang="de-DE" sz="1400" baseline="-25000" dirty="0">
+              <a:solidFill>
+                <a:srgbClr val="FF0000"/>
+              </a:solidFill>
+              <a:latin typeface="CMU Serif" panose="02000603000000000000" pitchFamily="2" charset="0"/>
+              <a:ea typeface="CMU Serif" panose="02000603000000000000" pitchFamily="2" charset="0"/>
+              <a:cs typeface="CMU Serif" panose="02000603000000000000" pitchFamily="2" charset="0"/>
+            </a:endParaRPr>
+          </a:p>
+        </p:txBody>
+      </p:sp>
+      <p:cxnSp>
+        <p:nvCxnSpPr>
+          <p:cNvPr id="21" name="Gerader Verbinder 20">
+            <a:extLst>
+              <a:ext uri="{FF2B5EF4-FFF2-40B4-BE49-F238E27FC236}">
+                <a16:creationId xmlns:a16="http://schemas.microsoft.com/office/drawing/2014/main" id="{597BCEFD-A3B1-60FB-0941-DB8E08937D91}"/>
+              </a:ext>
+            </a:extLst>
+          </p:cNvPr>
+          <p:cNvCxnSpPr>
+            <a:cxnSpLocks/>
+          </p:cNvCxnSpPr>
+          <p:nvPr/>
+        </p:nvCxnSpPr>
+        <p:spPr>
+          <a:xfrm flipH="1">
+            <a:off x="1148130" y="1391540"/>
+            <a:ext cx="879069" cy="329246"/>
+          </a:xfrm>
+          <a:prstGeom prst="line">
+            <a:avLst/>
+          </a:prstGeom>
+          <a:ln w="9525" cap="rnd">
+            <a:solidFill>
+              <a:srgbClr val="086FBD"/>
+            </a:solidFill>
+            <a:prstDash val="sysDash"/>
+            <a:round/>
+          </a:ln>
+        </p:spPr>
+        <p:style>
+          <a:lnRef idx="2">
+            <a:schemeClr val="accent1"/>
+          </a:lnRef>
+          <a:fillRef idx="0">
+            <a:schemeClr val="accent1"/>
+          </a:fillRef>
+          <a:effectRef idx="1">
+            <a:schemeClr val="accent1"/>
+          </a:effectRef>
+          <a:fontRef idx="minor">
+            <a:schemeClr val="tx1"/>
+          </a:fontRef>
+        </p:style>
+      </p:cxnSp>
+      <p:cxnSp>
+        <p:nvCxnSpPr>
+          <p:cNvPr id="26" name="Gerader Verbinder 25">
+            <a:extLst>
+              <a:ext uri="{FF2B5EF4-FFF2-40B4-BE49-F238E27FC236}">
+                <a16:creationId xmlns:a16="http://schemas.microsoft.com/office/drawing/2014/main" id="{0FFC1B81-AA81-263E-B0BD-7B5BA7A1DD17}"/>
+              </a:ext>
+            </a:extLst>
+          </p:cNvPr>
+          <p:cNvCxnSpPr>
+            <a:cxnSpLocks/>
+          </p:cNvCxnSpPr>
+          <p:nvPr/>
+        </p:nvCxnSpPr>
+        <p:spPr>
+          <a:xfrm>
+            <a:off x="2038828" y="1387173"/>
+            <a:ext cx="181090" cy="482810"/>
+          </a:xfrm>
+          <a:prstGeom prst="line">
+            <a:avLst/>
+          </a:prstGeom>
+          <a:ln w="9525" cap="rnd">
+            <a:solidFill>
+              <a:srgbClr val="086FBD"/>
+            </a:solidFill>
+            <a:prstDash val="sysDash"/>
+            <a:round/>
+          </a:ln>
+        </p:spPr>
+        <p:style>
+          <a:lnRef idx="2">
+            <a:schemeClr val="accent1"/>
+          </a:lnRef>
+          <a:fillRef idx="0">
+            <a:schemeClr val="accent1"/>
+          </a:fillRef>
+          <a:effectRef idx="1">
+            <a:schemeClr val="accent1"/>
+          </a:effectRef>
+          <a:fontRef idx="minor">
+            <a:schemeClr val="tx1"/>
+          </a:fontRef>
+        </p:style>
+      </p:cxnSp>
+      <p:sp>
+        <p:nvSpPr>
+          <p:cNvPr id="32" name="Textfeld 31">
+            <a:extLst>
+              <a:ext uri="{FF2B5EF4-FFF2-40B4-BE49-F238E27FC236}">
+                <a16:creationId xmlns:a16="http://schemas.microsoft.com/office/drawing/2014/main" id="{00D66590-6205-4819-C480-253A785789EC}"/>
+              </a:ext>
+            </a:extLst>
+          </p:cNvPr>
+          <p:cNvSpPr txBox="1"/>
+          <p:nvPr/>
+        </p:nvSpPr>
+        <p:spPr>
+          <a:xfrm>
+            <a:off x="841075" y="1364740"/>
+            <a:ext cx="567731" cy="307777"/>
+          </a:xfrm>
+          <a:prstGeom prst="rect">
+            <a:avLst/>
+          </a:prstGeom>
+          <a:noFill/>
+        </p:spPr>
+        <p:txBody>
+          <a:bodyPr wrap="square" rtlCol="0">
+            <a:spAutoFit/>
+          </a:bodyPr>
+          <a:lstStyle/>
+          <a:p>
+            <a:pPr algn="ctr"/>
+            <a:r>
+              <a:rPr lang="de-DE" sz="1400" i="1" dirty="0">
+                <a:solidFill>
+                  <a:srgbClr val="086FBD"/>
+                </a:solidFill>
+                <a:latin typeface="CMU Serif" panose="02000603000000000000" pitchFamily="2" charset="0"/>
+                <a:ea typeface="CMU Serif" panose="02000603000000000000" pitchFamily="2" charset="0"/>
+                <a:cs typeface="CMU Serif" panose="02000603000000000000" pitchFamily="2" charset="0"/>
+              </a:rPr>
+              <a:t>U</a:t>
+            </a:r>
+            <a:r>
+              <a:rPr lang="de-DE" sz="1400" baseline="-25000" dirty="0">
+                <a:solidFill>
+                  <a:srgbClr val="086FBD"/>
+                </a:solidFill>
+                <a:latin typeface="CMU Serif" panose="02000603000000000000" pitchFamily="2" charset="0"/>
+                <a:ea typeface="CMU Serif" panose="02000603000000000000" pitchFamily="2" charset="0"/>
+                <a:cs typeface="CMU Serif" panose="02000603000000000000" pitchFamily="2" charset="0"/>
+              </a:rPr>
+              <a:t>L</a:t>
+            </a:r>
+          </a:p>
+        </p:txBody>
+      </p:sp>
+      <p:sp>
+        <p:nvSpPr>
+          <p:cNvPr id="34" name="Textfeld 33">
+            <a:extLst>
+              <a:ext uri="{FF2B5EF4-FFF2-40B4-BE49-F238E27FC236}">
+                <a16:creationId xmlns:a16="http://schemas.microsoft.com/office/drawing/2014/main" id="{E2395EA0-6B69-475C-D2EC-47791B2F53BB}"/>
+              </a:ext>
+            </a:extLst>
+          </p:cNvPr>
+          <p:cNvSpPr txBox="1"/>
+          <p:nvPr/>
+        </p:nvSpPr>
+        <p:spPr>
+          <a:xfrm>
+            <a:off x="1890840" y="1122170"/>
+            <a:ext cx="567731" cy="307777"/>
+          </a:xfrm>
+          <a:prstGeom prst="rect">
+            <a:avLst/>
+          </a:prstGeom>
+          <a:noFill/>
+        </p:spPr>
+        <p:txBody>
+          <a:bodyPr wrap="square" rtlCol="0">
+            <a:spAutoFit/>
+          </a:bodyPr>
+          <a:lstStyle/>
+          <a:p>
+            <a:pPr algn="ctr"/>
+            <a:r>
+              <a:rPr lang="de-DE" sz="1400" i="1" dirty="0" err="1">
+                <a:solidFill>
+                  <a:srgbClr val="086FBD"/>
+                </a:solidFill>
+                <a:latin typeface="CMU Serif" panose="02000603000000000000" pitchFamily="2" charset="0"/>
+                <a:ea typeface="CMU Serif" panose="02000603000000000000" pitchFamily="2" charset="0"/>
+                <a:cs typeface="CMU Serif" panose="02000603000000000000" pitchFamily="2" charset="0"/>
+              </a:rPr>
+              <a:t>U</a:t>
+            </a:r>
+            <a:r>
+              <a:rPr lang="de-DE" sz="1400" baseline="-25000" dirty="0" err="1">
+                <a:solidFill>
+                  <a:srgbClr val="086FBD"/>
+                </a:solidFill>
+                <a:latin typeface="CMU Serif" panose="02000603000000000000" pitchFamily="2" charset="0"/>
+                <a:ea typeface="CMU Serif" panose="02000603000000000000" pitchFamily="2" charset="0"/>
+                <a:cs typeface="CMU Serif" panose="02000603000000000000" pitchFamily="2" charset="0"/>
+              </a:rPr>
+              <a:t>ges</a:t>
+            </a:r>
+            <a:endParaRPr lang="de-DE" sz="1400" baseline="-25000" dirty="0">
+              <a:solidFill>
+                <a:srgbClr val="086FBD"/>
+              </a:solidFill>
+              <a:latin typeface="CMU Serif" panose="02000603000000000000" pitchFamily="2" charset="0"/>
+              <a:ea typeface="CMU Serif" panose="02000603000000000000" pitchFamily="2" charset="0"/>
+              <a:cs typeface="CMU Serif" panose="02000603000000000000" pitchFamily="2" charset="0"/>
+            </a:endParaRPr>
+          </a:p>
+        </p:txBody>
+      </p:sp>
+      <p:sp>
+        <p:nvSpPr>
+          <p:cNvPr id="35" name="Textfeld 34">
+            <a:extLst>
+              <a:ext uri="{FF2B5EF4-FFF2-40B4-BE49-F238E27FC236}">
+                <a16:creationId xmlns:a16="http://schemas.microsoft.com/office/drawing/2014/main" id="{A4E999D9-78EE-4268-8605-29BE1CA7C911}"/>
+              </a:ext>
+            </a:extLst>
+          </p:cNvPr>
+          <p:cNvSpPr txBox="1"/>
+          <p:nvPr/>
+        </p:nvSpPr>
+        <p:spPr>
+          <a:xfrm>
+            <a:off x="1689643" y="1682539"/>
+            <a:ext cx="518786" cy="261610"/>
+          </a:xfrm>
+          <a:prstGeom prst="rect">
+            <a:avLst/>
+          </a:prstGeom>
+          <a:noFill/>
+        </p:spPr>
+        <p:txBody>
+          <a:bodyPr wrap="square" rtlCol="0">
+            <a:spAutoFit/>
+          </a:bodyPr>
+          <a:lstStyle/>
+          <a:p>
+            <a:pPr algn="ctr"/>
+            <a:r>
+              <a:rPr lang="de-DE" sz="1100" i="1" dirty="0">
+                <a:solidFill>
+                  <a:schemeClr val="accent2">
+                    <a:lumMod val="75000"/>
+                  </a:schemeClr>
+                </a:solidFill>
+                <a:latin typeface="Latin Modern Math" panose="02000503000000000000" pitchFamily="50" charset="0"/>
+                <a:ea typeface="Latin Modern Math" panose="02000503000000000000" pitchFamily="50" charset="0"/>
+                <a:cs typeface="CMU Serif" panose="02000603000000000000" pitchFamily="2" charset="0"/>
+              </a:rPr>
+              <a:t>φ</a:t>
+            </a:r>
+            <a:endParaRPr lang="de-DE" sz="1100" baseline="-25000" dirty="0">
+              <a:solidFill>
+                <a:schemeClr val="accent2">
+                  <a:lumMod val="75000"/>
+                </a:schemeClr>
+              </a:solidFill>
+              <a:latin typeface="CMU Serif" panose="02000603000000000000" pitchFamily="2" charset="0"/>
+              <a:ea typeface="CMU Serif" panose="02000603000000000000" pitchFamily="2" charset="0"/>
+              <a:cs typeface="CMU Serif" panose="02000603000000000000" pitchFamily="2" charset="0"/>
+            </a:endParaRPr>
+          </a:p>
+        </p:txBody>
+      </p:sp>
+      <p:sp>
+        <p:nvSpPr>
+          <p:cNvPr id="38" name="Textfeld 37">
+            <a:extLst>
+              <a:ext uri="{FF2B5EF4-FFF2-40B4-BE49-F238E27FC236}">
+                <a16:creationId xmlns:a16="http://schemas.microsoft.com/office/drawing/2014/main" id="{A3C6D5DA-DC41-2530-6E78-1511426D900B}"/>
+              </a:ext>
+            </a:extLst>
+          </p:cNvPr>
+          <p:cNvSpPr txBox="1"/>
+          <p:nvPr/>
+        </p:nvSpPr>
+        <p:spPr>
+          <a:xfrm>
+            <a:off x="1207358" y="1664147"/>
+            <a:ext cx="518786" cy="261610"/>
+          </a:xfrm>
+          <a:prstGeom prst="rect">
+            <a:avLst/>
+          </a:prstGeom>
+          <a:noFill/>
+        </p:spPr>
+        <p:txBody>
+          <a:bodyPr wrap="square" rtlCol="0">
+            <a:spAutoFit/>
+          </a:bodyPr>
+          <a:lstStyle/>
+          <a:p>
+            <a:pPr algn="ctr"/>
+            <a:r>
+              <a:rPr lang="de-DE" sz="1100" i="1" dirty="0" err="1">
+                <a:solidFill>
+                  <a:schemeClr val="accent6">
+                    <a:lumMod val="75000"/>
+                  </a:schemeClr>
+                </a:solidFill>
+                <a:latin typeface="Latin Modern Math" panose="02000503000000000000" pitchFamily="50" charset="0"/>
+                <a:ea typeface="Latin Modern Math" panose="02000503000000000000" pitchFamily="50" charset="0"/>
+                <a:cs typeface="CMU Serif" panose="02000603000000000000" pitchFamily="2" charset="0"/>
+              </a:rPr>
+              <a:t>φ</a:t>
+            </a:r>
+            <a:r>
+              <a:rPr lang="de-DE" sz="1100" baseline="-25000" dirty="0" err="1">
+                <a:solidFill>
+                  <a:schemeClr val="accent6">
+                    <a:lumMod val="75000"/>
+                  </a:schemeClr>
+                </a:solidFill>
+                <a:latin typeface="CMU Serif" panose="02000603000000000000" pitchFamily="2" charset="0"/>
+                <a:ea typeface="CMU Serif" panose="02000603000000000000" pitchFamily="2" charset="0"/>
+                <a:cs typeface="CMU Serif" panose="02000603000000000000" pitchFamily="2" charset="0"/>
+              </a:rPr>
+              <a:t>L</a:t>
+            </a:r>
+            <a:endParaRPr lang="de-DE" sz="1100" baseline="-25000" dirty="0">
+              <a:solidFill>
+                <a:schemeClr val="accent6">
+                  <a:lumMod val="75000"/>
+                </a:schemeClr>
+              </a:solidFill>
+              <a:latin typeface="CMU Serif" panose="02000603000000000000" pitchFamily="2" charset="0"/>
+              <a:ea typeface="CMU Serif" panose="02000603000000000000" pitchFamily="2" charset="0"/>
+              <a:cs typeface="CMU Serif" panose="02000603000000000000" pitchFamily="2" charset="0"/>
+            </a:endParaRPr>
+          </a:p>
+        </p:txBody>
+      </p:sp>
+      <p:sp>
+        <p:nvSpPr>
+          <p:cNvPr id="39" name="Textfeld 38">
+            <a:extLst>
+              <a:ext uri="{FF2B5EF4-FFF2-40B4-BE49-F238E27FC236}">
+                <a16:creationId xmlns:a16="http://schemas.microsoft.com/office/drawing/2014/main" id="{FDC89604-DAC1-E239-476D-1FEA9B25E15A}"/>
+              </a:ext>
+            </a:extLst>
+          </p:cNvPr>
+          <p:cNvSpPr txBox="1"/>
+          <p:nvPr/>
+        </p:nvSpPr>
+        <p:spPr>
+          <a:xfrm>
+            <a:off x="1890840" y="1964060"/>
+            <a:ext cx="518786" cy="261610"/>
+          </a:xfrm>
+          <a:prstGeom prst="rect">
+            <a:avLst/>
+          </a:prstGeom>
+          <a:noFill/>
+        </p:spPr>
+        <p:txBody>
+          <a:bodyPr wrap="square" rtlCol="0">
+            <a:spAutoFit/>
+          </a:bodyPr>
+          <a:lstStyle/>
+          <a:p>
+            <a:pPr algn="ctr"/>
+            <a:r>
+              <a:rPr lang="de-DE" sz="1100" i="1" dirty="0">
+                <a:solidFill>
+                  <a:schemeClr val="accent5"/>
+                </a:solidFill>
+                <a:latin typeface="Latin Modern Math" panose="02000503000000000000" pitchFamily="50" charset="0"/>
+                <a:ea typeface="Latin Modern Math" panose="02000503000000000000" pitchFamily="50" charset="0"/>
+                <a:cs typeface="CMU Serif" panose="02000603000000000000" pitchFamily="2" charset="0"/>
+              </a:rPr>
+              <a:t>ω </a:t>
+            </a:r>
+            <a:r>
+              <a:rPr lang="de-DE" sz="400" dirty="0">
+                <a:solidFill>
+                  <a:schemeClr val="accent5"/>
+                </a:solidFill>
+                <a:latin typeface="Latin Modern Math" panose="02000503000000000000" pitchFamily="50" charset="0"/>
+                <a:ea typeface="Latin Modern Math" panose="02000503000000000000" pitchFamily="50" charset="0"/>
+                <a:cs typeface="CMU Serif" panose="02000603000000000000" pitchFamily="2" charset="0"/>
+              </a:rPr>
+              <a:t>∙</a:t>
+            </a:r>
+            <a:r>
+              <a:rPr lang="de-DE" sz="1100" i="1" dirty="0">
+                <a:solidFill>
+                  <a:schemeClr val="accent5"/>
+                </a:solidFill>
+                <a:latin typeface="Latin Modern Math" panose="02000503000000000000" pitchFamily="50" charset="0"/>
+                <a:ea typeface="Latin Modern Math" panose="02000503000000000000" pitchFamily="50" charset="0"/>
+                <a:cs typeface="CMU Serif" panose="02000603000000000000" pitchFamily="2" charset="0"/>
+              </a:rPr>
+              <a:t> </a:t>
+            </a:r>
+            <a:r>
+              <a:rPr lang="de-DE" sz="1100" i="1" dirty="0">
+                <a:solidFill>
+                  <a:schemeClr val="accent5"/>
+                </a:solidFill>
+                <a:latin typeface="CMU Serif" panose="02000603000000000000" pitchFamily="2" charset="0"/>
+                <a:ea typeface="CMU Serif" panose="02000603000000000000" pitchFamily="2" charset="0"/>
+                <a:cs typeface="CMU Serif" panose="02000603000000000000" pitchFamily="2" charset="0"/>
+              </a:rPr>
+              <a:t>t</a:t>
+            </a:r>
+            <a:endParaRPr lang="de-DE" sz="1100" baseline="-25000" dirty="0">
+              <a:solidFill>
+                <a:schemeClr val="accent5"/>
+              </a:solidFill>
+              <a:latin typeface="CMU Serif" panose="02000603000000000000" pitchFamily="2" charset="0"/>
+              <a:ea typeface="CMU Serif" panose="02000603000000000000" pitchFamily="2" charset="0"/>
+              <a:cs typeface="CMU Serif" panose="02000603000000000000" pitchFamily="2" charset="0"/>
+            </a:endParaRPr>
+          </a:p>
+        </p:txBody>
+      </p:sp>
+    </p:spTree>
+    <p:extLst>
+      <p:ext uri="{BB962C8B-B14F-4D97-AF65-F5344CB8AC3E}">
+        <p14:creationId xmlns:p14="http://schemas.microsoft.com/office/powerpoint/2010/main" val="1725806464"/>
+      </p:ext>
+    </p:extLst>
+  </p:cSld>
+  <p:clrMapOvr>
+    <a:masterClrMapping/>
+  </p:clrMapOvr>
+</p:sld>
+</file>
+
+<file path=ppt/slides/slide15.xml><?xml version="1.0" encoding="utf-8"?>
+<p:sld xmlns:a="http://schemas.openxmlformats.org/drawingml/2006/main" xmlns:r="http://schemas.openxmlformats.org/officeDocument/2006/relationships" xmlns:p="http://schemas.openxmlformats.org/presentationml/2006/main">
+  <p:cSld>
+    <p:spTree>
+      <p:nvGrpSpPr>
+        <p:cNvPr id="1" name="">
+          <a:extLst>
+            <a:ext uri="{FF2B5EF4-FFF2-40B4-BE49-F238E27FC236}">
+              <a16:creationId xmlns:a16="http://schemas.microsoft.com/office/drawing/2014/main" id="{F6241362-31AF-946A-9D15-F2FEF637B98A}"/>
+            </a:ext>
+          </a:extLst>
+        </p:cNvPr>
+        <p:cNvGrpSpPr/>
+        <p:nvPr/>
+      </p:nvGrpSpPr>
+      <p:grpSpPr>
+        <a:xfrm>
+          <a:off x="0" y="0"/>
+          <a:ext cx="0" cy="0"/>
+          <a:chOff x="0" y="0"/>
+          <a:chExt cx="0" cy="0"/>
+        </a:xfrm>
+      </p:grpSpPr>
+      <p:sp>
+        <p:nvSpPr>
+          <p:cNvPr id="36" name="Bogen 35">
+            <a:extLst>
+              <a:ext uri="{FF2B5EF4-FFF2-40B4-BE49-F238E27FC236}">
+                <a16:creationId xmlns:a16="http://schemas.microsoft.com/office/drawing/2014/main" id="{3E1019A3-42E1-3F3C-FFCB-921F36C4811E}"/>
+              </a:ext>
+            </a:extLst>
+          </p:cNvPr>
+          <p:cNvSpPr/>
+          <p:nvPr/>
+        </p:nvSpPr>
+        <p:spPr>
+          <a:xfrm>
+            <a:off x="1015221" y="1882453"/>
+            <a:ext cx="634988" cy="634986"/>
+          </a:xfrm>
+          <a:prstGeom prst="arc">
+            <a:avLst>
+              <a:gd name="adj1" fmla="val 14973702"/>
+              <a:gd name="adj2" fmla="val 20361855"/>
+            </a:avLst>
+          </a:prstGeom>
+          <a:ln cap="rnd">
+            <a:solidFill>
+              <a:schemeClr val="accent6">
+                <a:lumMod val="75000"/>
+              </a:schemeClr>
+            </a:solidFill>
+            <a:round/>
+            <a:headEnd type="triangle"/>
+          </a:ln>
+        </p:spPr>
+        <p:style>
+          <a:lnRef idx="2">
+            <a:schemeClr val="accent1"/>
+          </a:lnRef>
+          <a:fillRef idx="0">
+            <a:schemeClr val="accent1"/>
+          </a:fillRef>
+          <a:effectRef idx="1">
+            <a:schemeClr val="accent1"/>
+          </a:effectRef>
+          <a:fontRef idx="minor">
+            <a:schemeClr val="tx1"/>
+          </a:fontRef>
+        </p:style>
+        <p:txBody>
+          <a:bodyPr rtlCol="0" anchor="ctr"/>
+          <a:lstStyle/>
+          <a:p>
+            <a:pPr algn="ctr"/>
+            <a:endParaRPr lang="de-DE" sz="2400" dirty="0"/>
+          </a:p>
+        </p:txBody>
+      </p:sp>
+      <p:sp>
+        <p:nvSpPr>
+          <p:cNvPr id="33" name="Bogen 32">
+            <a:extLst>
+              <a:ext uri="{FF2B5EF4-FFF2-40B4-BE49-F238E27FC236}">
+                <a16:creationId xmlns:a16="http://schemas.microsoft.com/office/drawing/2014/main" id="{68A3AC0E-DEC8-A973-AC12-FE045B3B7FD1}"/>
+              </a:ext>
+            </a:extLst>
+          </p:cNvPr>
+          <p:cNvSpPr/>
+          <p:nvPr/>
+        </p:nvSpPr>
+        <p:spPr>
+          <a:xfrm>
+            <a:off x="723382" y="1589699"/>
+            <a:ext cx="1220493" cy="1220493"/>
+          </a:xfrm>
+          <a:prstGeom prst="arc">
+            <a:avLst>
+              <a:gd name="adj1" fmla="val 18675553"/>
+              <a:gd name="adj2" fmla="val 20361855"/>
+            </a:avLst>
+          </a:prstGeom>
+          <a:ln cap="rnd">
+            <a:solidFill>
+              <a:schemeClr val="accent2">
+                <a:lumMod val="75000"/>
+              </a:schemeClr>
+            </a:solidFill>
+            <a:round/>
+            <a:headEnd type="triangle"/>
+          </a:ln>
+        </p:spPr>
+        <p:style>
+          <a:lnRef idx="2">
+            <a:schemeClr val="accent1"/>
+          </a:lnRef>
+          <a:fillRef idx="0">
+            <a:schemeClr val="accent1"/>
+          </a:fillRef>
+          <a:effectRef idx="1">
+            <a:schemeClr val="accent1"/>
+          </a:effectRef>
+          <a:fontRef idx="minor">
+            <a:schemeClr val="tx1"/>
+          </a:fontRef>
+        </p:style>
+        <p:txBody>
+          <a:bodyPr rtlCol="0" anchor="ctr"/>
+          <a:lstStyle/>
+          <a:p>
+            <a:pPr algn="ctr"/>
+            <a:endParaRPr lang="de-DE" sz="2400" dirty="0"/>
+          </a:p>
+        </p:txBody>
+      </p:sp>
+      <p:cxnSp>
+        <p:nvCxnSpPr>
+          <p:cNvPr id="17" name="Gerade Verbindung mit Pfeil 16">
+            <a:extLst>
+              <a:ext uri="{FF2B5EF4-FFF2-40B4-BE49-F238E27FC236}">
+                <a16:creationId xmlns:a16="http://schemas.microsoft.com/office/drawing/2014/main" id="{989D3A23-B44A-C9AE-9A1C-2E60B162027D}"/>
+              </a:ext>
+            </a:extLst>
+          </p:cNvPr>
+          <p:cNvCxnSpPr>
+            <a:cxnSpLocks/>
+          </p:cNvCxnSpPr>
+          <p:nvPr/>
+        </p:nvCxnSpPr>
+        <p:spPr>
+          <a:xfrm flipV="1">
+            <a:off x="1333628" y="1387173"/>
+            <a:ext cx="705197" cy="810868"/>
+          </a:xfrm>
+          <a:prstGeom prst="straightConnector1">
+            <a:avLst/>
+          </a:prstGeom>
+          <a:ln cap="rnd">
+            <a:solidFill>
+              <a:schemeClr val="tx1">
+                <a:lumMod val="65000"/>
+                <a:lumOff val="35000"/>
+              </a:schemeClr>
+            </a:solidFill>
+            <a:round/>
+            <a:tailEnd type="triangle" w="med" len="med"/>
+          </a:ln>
+        </p:spPr>
+        <p:style>
+          <a:lnRef idx="2">
+            <a:schemeClr val="accent1"/>
+          </a:lnRef>
+          <a:fillRef idx="0">
+            <a:schemeClr val="accent1"/>
+          </a:fillRef>
+          <a:effectRef idx="1">
+            <a:schemeClr val="accent1"/>
+          </a:effectRef>
+          <a:fontRef idx="minor">
+            <a:schemeClr val="tx1"/>
+          </a:fontRef>
+        </p:style>
+      </p:cxnSp>
+      <p:cxnSp>
+        <p:nvCxnSpPr>
+          <p:cNvPr id="15" name="Gerade Verbindung mit Pfeil 14">
+            <a:extLst>
+              <a:ext uri="{FF2B5EF4-FFF2-40B4-BE49-F238E27FC236}">
+                <a16:creationId xmlns:a16="http://schemas.microsoft.com/office/drawing/2014/main" id="{85FF085A-FB17-1535-A256-0337B62E7C33}"/>
+              </a:ext>
+            </a:extLst>
+          </p:cNvPr>
+          <p:cNvCxnSpPr>
+            <a:cxnSpLocks/>
+          </p:cNvCxnSpPr>
+          <p:nvPr/>
+        </p:nvCxnSpPr>
+        <p:spPr>
+          <a:xfrm flipH="1" flipV="1">
+            <a:off x="1152398" y="1714951"/>
+            <a:ext cx="181230" cy="485003"/>
+          </a:xfrm>
+          <a:prstGeom prst="straightConnector1">
+            <a:avLst/>
+          </a:prstGeom>
+          <a:ln cap="rnd">
+            <a:solidFill>
+              <a:schemeClr val="tx1">
+                <a:lumMod val="65000"/>
+                <a:lumOff val="35000"/>
+              </a:schemeClr>
+            </a:solidFill>
+            <a:round/>
+            <a:tailEnd type="triangle" w="med" len="med"/>
+          </a:ln>
+        </p:spPr>
+        <p:style>
+          <a:lnRef idx="2">
+            <a:schemeClr val="accent1"/>
+          </a:lnRef>
+          <a:fillRef idx="0">
+            <a:schemeClr val="accent1"/>
+          </a:fillRef>
+          <a:effectRef idx="1">
+            <a:schemeClr val="accent1"/>
+          </a:effectRef>
+          <a:fontRef idx="minor">
+            <a:schemeClr val="tx1"/>
+          </a:fontRef>
+        </p:style>
+      </p:cxnSp>
+      <p:sp>
+        <p:nvSpPr>
+          <p:cNvPr id="19" name="Bogen 18">
+            <a:extLst>
+              <a:ext uri="{FF2B5EF4-FFF2-40B4-BE49-F238E27FC236}">
+                <a16:creationId xmlns:a16="http://schemas.microsoft.com/office/drawing/2014/main" id="{7EBFE475-B7AE-6A04-01F8-6EE17B0C43F5}"/>
+              </a:ext>
+            </a:extLst>
+          </p:cNvPr>
+          <p:cNvSpPr/>
+          <p:nvPr/>
+        </p:nvSpPr>
+        <p:spPr>
+          <a:xfrm>
+            <a:off x="723382" y="1591614"/>
+            <a:ext cx="1220493" cy="1220493"/>
+          </a:xfrm>
+          <a:prstGeom prst="arc">
+            <a:avLst>
+              <a:gd name="adj1" fmla="val 20384948"/>
+              <a:gd name="adj2" fmla="val 0"/>
+            </a:avLst>
+          </a:prstGeom>
+          <a:ln cap="rnd">
+            <a:solidFill>
+              <a:schemeClr val="accent5"/>
+            </a:solidFill>
+            <a:round/>
+            <a:headEnd type="triangle"/>
+          </a:ln>
+        </p:spPr>
+        <p:style>
+          <a:lnRef idx="2">
+            <a:schemeClr val="accent1"/>
+          </a:lnRef>
+          <a:fillRef idx="0">
+            <a:schemeClr val="accent1"/>
+          </a:fillRef>
+          <a:effectRef idx="1">
+            <a:schemeClr val="accent1"/>
+          </a:effectRef>
+          <a:fontRef idx="minor">
+            <a:schemeClr val="tx1"/>
+          </a:fontRef>
+        </p:style>
+        <p:txBody>
+          <a:bodyPr rtlCol="0" anchor="ctr"/>
+          <a:lstStyle/>
+          <a:p>
+            <a:pPr algn="ctr"/>
+            <a:endParaRPr lang="de-DE" sz="2400" dirty="0"/>
+          </a:p>
+        </p:txBody>
+      </p:sp>
+      <p:cxnSp>
+        <p:nvCxnSpPr>
+          <p:cNvPr id="8" name="Gerade Verbindung mit Pfeil 7">
+            <a:extLst>
+              <a:ext uri="{FF2B5EF4-FFF2-40B4-BE49-F238E27FC236}">
+                <a16:creationId xmlns:a16="http://schemas.microsoft.com/office/drawing/2014/main" id="{516C6F51-B798-9DE4-F389-B9F69426868D}"/>
+              </a:ext>
+            </a:extLst>
+          </p:cNvPr>
+          <p:cNvCxnSpPr>
+            <a:cxnSpLocks/>
+          </p:cNvCxnSpPr>
+          <p:nvPr/>
+        </p:nvCxnSpPr>
+        <p:spPr>
+          <a:xfrm flipV="1">
+            <a:off x="1333630" y="1869118"/>
+            <a:ext cx="890496" cy="332749"/>
+          </a:xfrm>
+          <a:prstGeom prst="straightConnector1">
+            <a:avLst/>
+          </a:prstGeom>
+          <a:ln cap="rnd">
+            <a:solidFill>
+              <a:schemeClr val="tx1">
+                <a:lumMod val="65000"/>
+                <a:lumOff val="35000"/>
+              </a:schemeClr>
+            </a:solidFill>
+            <a:round/>
+            <a:tailEnd type="triangle" w="med" len="med"/>
+          </a:ln>
+        </p:spPr>
+        <p:style>
+          <a:lnRef idx="2">
+            <a:schemeClr val="accent1"/>
+          </a:lnRef>
+          <a:fillRef idx="0">
+            <a:schemeClr val="accent1"/>
+          </a:fillRef>
+          <a:effectRef idx="1">
+            <a:schemeClr val="accent1"/>
+          </a:effectRef>
+          <a:fontRef idx="minor">
+            <a:schemeClr val="tx1"/>
+          </a:fontRef>
+        </p:style>
+      </p:cxnSp>
+      <p:cxnSp>
+        <p:nvCxnSpPr>
+          <p:cNvPr id="5" name="Gerade Verbindung mit Pfeil 4">
+            <a:extLst>
+              <a:ext uri="{FF2B5EF4-FFF2-40B4-BE49-F238E27FC236}">
+                <a16:creationId xmlns:a16="http://schemas.microsoft.com/office/drawing/2014/main" id="{6401A9DB-CC69-341F-A49E-3DF1347B2ADE}"/>
+              </a:ext>
+            </a:extLst>
+          </p:cNvPr>
+          <p:cNvCxnSpPr>
+            <a:cxnSpLocks/>
+          </p:cNvCxnSpPr>
+          <p:nvPr/>
+        </p:nvCxnSpPr>
+        <p:spPr>
+          <a:xfrm flipV="1">
+            <a:off x="1333630" y="1173167"/>
+            <a:ext cx="0" cy="1254116"/>
+          </a:xfrm>
+          <a:prstGeom prst="straightConnector1">
+            <a:avLst/>
+          </a:prstGeom>
+          <a:ln cap="rnd">
+            <a:solidFill>
+              <a:schemeClr val="tx1"/>
+            </a:solidFill>
+            <a:round/>
+            <a:tailEnd type="triangle" w="med" len="med"/>
+          </a:ln>
+        </p:spPr>
+        <p:style>
+          <a:lnRef idx="2">
+            <a:schemeClr val="accent1"/>
+          </a:lnRef>
+          <a:fillRef idx="0">
+            <a:schemeClr val="accent1"/>
+          </a:fillRef>
+          <a:effectRef idx="1">
+            <a:schemeClr val="accent1"/>
+          </a:effectRef>
+          <a:fontRef idx="minor">
+            <a:schemeClr val="tx1"/>
+          </a:fontRef>
+        </p:style>
+      </p:cxnSp>
+      <p:cxnSp>
+        <p:nvCxnSpPr>
+          <p:cNvPr id="6" name="Gerade Verbindung mit Pfeil 5">
+            <a:extLst>
+              <a:ext uri="{FF2B5EF4-FFF2-40B4-BE49-F238E27FC236}">
+                <a16:creationId xmlns:a16="http://schemas.microsoft.com/office/drawing/2014/main" id="{CB2BBF7C-26DC-37AD-E40B-D5C52711697E}"/>
+              </a:ext>
+            </a:extLst>
+          </p:cNvPr>
+          <p:cNvCxnSpPr>
+            <a:cxnSpLocks/>
+          </p:cNvCxnSpPr>
+          <p:nvPr/>
+        </p:nvCxnSpPr>
+        <p:spPr>
+          <a:xfrm>
+            <a:off x="1124941" y="2201867"/>
+            <a:ext cx="1242999" cy="0"/>
+          </a:xfrm>
+          <a:prstGeom prst="straightConnector1">
+            <a:avLst/>
+          </a:prstGeom>
+          <a:ln cap="rnd">
+            <a:solidFill>
+              <a:schemeClr val="tx1"/>
+            </a:solidFill>
+            <a:round/>
+            <a:tailEnd type="triangle" w="med" len="med"/>
+          </a:ln>
+        </p:spPr>
+        <p:style>
+          <a:lnRef idx="2">
+            <a:schemeClr val="accent1"/>
+          </a:lnRef>
+          <a:fillRef idx="0">
+            <a:schemeClr val="accent1"/>
+          </a:fillRef>
+          <a:effectRef idx="1">
+            <a:schemeClr val="accent1"/>
+          </a:effectRef>
+          <a:fontRef idx="minor">
+            <a:schemeClr val="tx1"/>
+          </a:fontRef>
+        </p:style>
+      </p:cxnSp>
+      <p:sp>
+        <p:nvSpPr>
+          <p:cNvPr id="13" name="Textfeld 12">
+            <a:extLst>
+              <a:ext uri="{FF2B5EF4-FFF2-40B4-BE49-F238E27FC236}">
+                <a16:creationId xmlns:a16="http://schemas.microsoft.com/office/drawing/2014/main" id="{E28D9122-C044-4129-C27D-5D45CF9A3643}"/>
+              </a:ext>
+            </a:extLst>
+          </p:cNvPr>
+          <p:cNvSpPr txBox="1"/>
+          <p:nvPr/>
+        </p:nvSpPr>
+        <p:spPr>
+          <a:xfrm>
+            <a:off x="2070145" y="1659455"/>
+            <a:ext cx="567731" cy="307777"/>
+          </a:xfrm>
+          <a:prstGeom prst="rect">
+            <a:avLst/>
+          </a:prstGeom>
+          <a:noFill/>
+        </p:spPr>
+        <p:txBody>
+          <a:bodyPr wrap="square" rtlCol="0">
+            <a:spAutoFit/>
+          </a:bodyPr>
+          <a:lstStyle/>
+          <a:p>
+            <a:pPr algn="ctr"/>
+            <a:r>
+              <a:rPr lang="de-DE" sz="1400" i="1" dirty="0">
+                <a:solidFill>
+                  <a:schemeClr val="tx1">
+                    <a:lumMod val="65000"/>
+                    <a:lumOff val="35000"/>
+                  </a:schemeClr>
+                </a:solidFill>
+                <a:latin typeface="CMU Serif" panose="02000603000000000000" pitchFamily="2" charset="0"/>
+                <a:ea typeface="CMU Serif" panose="02000603000000000000" pitchFamily="2" charset="0"/>
+                <a:cs typeface="CMU Serif" panose="02000603000000000000" pitchFamily="2" charset="0"/>
+              </a:rPr>
+              <a:t>R</a:t>
+            </a:r>
+            <a:endParaRPr lang="de-DE" sz="1400" baseline="-25000" dirty="0">
+              <a:solidFill>
+                <a:schemeClr val="tx1">
+                  <a:lumMod val="65000"/>
+                  <a:lumOff val="35000"/>
+                </a:schemeClr>
+              </a:solidFill>
+              <a:latin typeface="CMU Serif" panose="02000603000000000000" pitchFamily="2" charset="0"/>
+              <a:ea typeface="CMU Serif" panose="02000603000000000000" pitchFamily="2" charset="0"/>
+              <a:cs typeface="CMU Serif" panose="02000603000000000000" pitchFamily="2" charset="0"/>
+            </a:endParaRPr>
+          </a:p>
+        </p:txBody>
+      </p:sp>
+      <p:cxnSp>
+        <p:nvCxnSpPr>
+          <p:cNvPr id="21" name="Gerader Verbinder 20">
+            <a:extLst>
+              <a:ext uri="{FF2B5EF4-FFF2-40B4-BE49-F238E27FC236}">
+                <a16:creationId xmlns:a16="http://schemas.microsoft.com/office/drawing/2014/main" id="{34D43E4E-F361-1E90-E57D-2B5C4808A672}"/>
+              </a:ext>
+            </a:extLst>
+          </p:cNvPr>
+          <p:cNvCxnSpPr>
+            <a:cxnSpLocks/>
+          </p:cNvCxnSpPr>
+          <p:nvPr/>
+        </p:nvCxnSpPr>
+        <p:spPr>
+          <a:xfrm flipH="1">
+            <a:off x="1148130" y="1391540"/>
+            <a:ext cx="879069" cy="329246"/>
+          </a:xfrm>
+          <a:prstGeom prst="line">
+            <a:avLst/>
+          </a:prstGeom>
+          <a:ln w="9525" cap="rnd">
+            <a:solidFill>
+              <a:schemeClr val="tx1">
+                <a:lumMod val="65000"/>
+                <a:lumOff val="35000"/>
+              </a:schemeClr>
+            </a:solidFill>
+            <a:prstDash val="sysDash"/>
+            <a:round/>
+          </a:ln>
+        </p:spPr>
+        <p:style>
+          <a:lnRef idx="2">
+            <a:schemeClr val="accent1"/>
+          </a:lnRef>
+          <a:fillRef idx="0">
+            <a:schemeClr val="accent1"/>
+          </a:fillRef>
+          <a:effectRef idx="1">
+            <a:schemeClr val="accent1"/>
+          </a:effectRef>
+          <a:fontRef idx="minor">
+            <a:schemeClr val="tx1"/>
+          </a:fontRef>
+        </p:style>
+      </p:cxnSp>
+      <p:cxnSp>
+        <p:nvCxnSpPr>
+          <p:cNvPr id="26" name="Gerader Verbinder 25">
+            <a:extLst>
+              <a:ext uri="{FF2B5EF4-FFF2-40B4-BE49-F238E27FC236}">
+                <a16:creationId xmlns:a16="http://schemas.microsoft.com/office/drawing/2014/main" id="{2F07552C-E7C8-92FA-E47D-477B6170C19C}"/>
+              </a:ext>
+            </a:extLst>
+          </p:cNvPr>
+          <p:cNvCxnSpPr>
+            <a:cxnSpLocks/>
+          </p:cNvCxnSpPr>
+          <p:nvPr/>
+        </p:nvCxnSpPr>
+        <p:spPr>
+          <a:xfrm>
+            <a:off x="2038828" y="1387173"/>
+            <a:ext cx="181090" cy="482810"/>
+          </a:xfrm>
+          <a:prstGeom prst="line">
+            <a:avLst/>
+          </a:prstGeom>
+          <a:ln w="9525" cap="rnd">
+            <a:solidFill>
+              <a:schemeClr val="tx1">
+                <a:lumMod val="65000"/>
+                <a:lumOff val="35000"/>
+              </a:schemeClr>
+            </a:solidFill>
+            <a:prstDash val="sysDash"/>
+            <a:round/>
+          </a:ln>
+        </p:spPr>
+        <p:style>
+          <a:lnRef idx="2">
+            <a:schemeClr val="accent1"/>
+          </a:lnRef>
+          <a:fillRef idx="0">
+            <a:schemeClr val="accent1"/>
+          </a:fillRef>
+          <a:effectRef idx="1">
+            <a:schemeClr val="accent1"/>
+          </a:effectRef>
+          <a:fontRef idx="minor">
+            <a:schemeClr val="tx1"/>
+          </a:fontRef>
+        </p:style>
+      </p:cxnSp>
+      <p:sp>
+        <p:nvSpPr>
+          <p:cNvPr id="32" name="Textfeld 31">
+            <a:extLst>
+              <a:ext uri="{FF2B5EF4-FFF2-40B4-BE49-F238E27FC236}">
+                <a16:creationId xmlns:a16="http://schemas.microsoft.com/office/drawing/2014/main" id="{BA274F4F-4411-5608-4738-02E5CFF47798}"/>
+              </a:ext>
+            </a:extLst>
+          </p:cNvPr>
+          <p:cNvSpPr txBox="1"/>
+          <p:nvPr/>
+        </p:nvSpPr>
+        <p:spPr>
+          <a:xfrm>
+            <a:off x="801130" y="1383372"/>
+            <a:ext cx="567731" cy="307777"/>
+          </a:xfrm>
+          <a:prstGeom prst="rect">
+            <a:avLst/>
+          </a:prstGeom>
+          <a:noFill/>
+        </p:spPr>
+        <p:txBody>
+          <a:bodyPr wrap="square" rtlCol="0">
+            <a:spAutoFit/>
+          </a:bodyPr>
+          <a:lstStyle/>
+          <a:p>
+            <a:pPr algn="ctr"/>
+            <a:r>
+              <a:rPr lang="de-DE" sz="1400" i="1" dirty="0">
+                <a:solidFill>
+                  <a:schemeClr val="tx1">
+                    <a:lumMod val="65000"/>
+                    <a:lumOff val="35000"/>
+                  </a:schemeClr>
+                </a:solidFill>
+                <a:latin typeface="CMU Serif" panose="02000603000000000000" pitchFamily="2" charset="0"/>
+                <a:ea typeface="CMU Serif" panose="02000603000000000000" pitchFamily="2" charset="0"/>
+                <a:cs typeface="CMU Serif" panose="02000603000000000000" pitchFamily="2" charset="0"/>
+              </a:rPr>
+              <a:t>X</a:t>
+            </a:r>
+            <a:r>
+              <a:rPr lang="de-DE" sz="1400" baseline="-25000" dirty="0">
+                <a:solidFill>
+                  <a:schemeClr val="tx1">
+                    <a:lumMod val="65000"/>
+                    <a:lumOff val="35000"/>
+                  </a:schemeClr>
+                </a:solidFill>
+                <a:latin typeface="CMU Serif" panose="02000603000000000000" pitchFamily="2" charset="0"/>
+                <a:ea typeface="CMU Serif" panose="02000603000000000000" pitchFamily="2" charset="0"/>
+                <a:cs typeface="CMU Serif" panose="02000603000000000000" pitchFamily="2" charset="0"/>
+              </a:rPr>
+              <a:t>L</a:t>
+            </a:r>
+          </a:p>
+        </p:txBody>
+      </p:sp>
+      <p:sp>
+        <p:nvSpPr>
+          <p:cNvPr id="34" name="Textfeld 33">
+            <a:extLst>
+              <a:ext uri="{FF2B5EF4-FFF2-40B4-BE49-F238E27FC236}">
+                <a16:creationId xmlns:a16="http://schemas.microsoft.com/office/drawing/2014/main" id="{93691C1F-149C-2650-FCEA-66323A85007A}"/>
+              </a:ext>
+            </a:extLst>
+          </p:cNvPr>
+          <p:cNvSpPr txBox="1"/>
+          <p:nvPr/>
+        </p:nvSpPr>
+        <p:spPr>
+          <a:xfrm>
+            <a:off x="1881229" y="1146708"/>
+            <a:ext cx="567731" cy="307777"/>
+          </a:xfrm>
+          <a:prstGeom prst="rect">
+            <a:avLst/>
+          </a:prstGeom>
+          <a:noFill/>
+        </p:spPr>
+        <p:txBody>
+          <a:bodyPr wrap="square" rtlCol="0">
+            <a:spAutoFit/>
+          </a:bodyPr>
+          <a:lstStyle/>
+          <a:p>
+            <a:pPr algn="ctr"/>
+            <a:r>
+              <a:rPr lang="de-DE" sz="1400" i="1" dirty="0">
+                <a:solidFill>
+                  <a:schemeClr val="tx1">
+                    <a:lumMod val="65000"/>
+                    <a:lumOff val="35000"/>
+                  </a:schemeClr>
+                </a:solidFill>
+                <a:latin typeface="CMU Serif" panose="02000603000000000000" pitchFamily="2" charset="0"/>
+                <a:ea typeface="CMU Serif" panose="02000603000000000000" pitchFamily="2" charset="0"/>
+                <a:cs typeface="CMU Serif" panose="02000603000000000000" pitchFamily="2" charset="0"/>
+              </a:rPr>
+              <a:t>Z</a:t>
+            </a:r>
+            <a:endParaRPr lang="de-DE" sz="1400" baseline="-25000" dirty="0">
+              <a:solidFill>
+                <a:schemeClr val="tx1">
+                  <a:lumMod val="65000"/>
+                  <a:lumOff val="35000"/>
+                </a:schemeClr>
+              </a:solidFill>
+              <a:latin typeface="CMU Serif" panose="02000603000000000000" pitchFamily="2" charset="0"/>
+              <a:ea typeface="CMU Serif" panose="02000603000000000000" pitchFamily="2" charset="0"/>
+              <a:cs typeface="CMU Serif" panose="02000603000000000000" pitchFamily="2" charset="0"/>
+            </a:endParaRPr>
+          </a:p>
+        </p:txBody>
+      </p:sp>
+      <p:sp>
+        <p:nvSpPr>
+          <p:cNvPr id="35" name="Textfeld 34">
+            <a:extLst>
+              <a:ext uri="{FF2B5EF4-FFF2-40B4-BE49-F238E27FC236}">
+                <a16:creationId xmlns:a16="http://schemas.microsoft.com/office/drawing/2014/main" id="{7B8A5648-501C-A3A0-7C1B-D721981F53FF}"/>
+              </a:ext>
+            </a:extLst>
+          </p:cNvPr>
+          <p:cNvSpPr txBox="1"/>
+          <p:nvPr/>
+        </p:nvSpPr>
+        <p:spPr>
+          <a:xfrm>
+            <a:off x="1689643" y="1682539"/>
+            <a:ext cx="518786" cy="261610"/>
+          </a:xfrm>
+          <a:prstGeom prst="rect">
+            <a:avLst/>
+          </a:prstGeom>
+          <a:noFill/>
+        </p:spPr>
+        <p:txBody>
+          <a:bodyPr wrap="square" rtlCol="0">
+            <a:spAutoFit/>
+          </a:bodyPr>
+          <a:lstStyle/>
+          <a:p>
+            <a:pPr algn="ctr"/>
+            <a:r>
+              <a:rPr lang="de-DE" sz="1100" i="1" dirty="0">
+                <a:solidFill>
+                  <a:schemeClr val="accent2">
+                    <a:lumMod val="75000"/>
+                  </a:schemeClr>
+                </a:solidFill>
+                <a:latin typeface="Latin Modern Math" panose="02000503000000000000" pitchFamily="50" charset="0"/>
+                <a:ea typeface="Latin Modern Math" panose="02000503000000000000" pitchFamily="50" charset="0"/>
+                <a:cs typeface="CMU Serif" panose="02000603000000000000" pitchFamily="2" charset="0"/>
+              </a:rPr>
+              <a:t>φ</a:t>
+            </a:r>
+            <a:endParaRPr lang="de-DE" sz="1100" baseline="-25000" dirty="0">
+              <a:solidFill>
+                <a:schemeClr val="accent2">
+                  <a:lumMod val="75000"/>
+                </a:schemeClr>
+              </a:solidFill>
+              <a:latin typeface="CMU Serif" panose="02000603000000000000" pitchFamily="2" charset="0"/>
+              <a:ea typeface="CMU Serif" panose="02000603000000000000" pitchFamily="2" charset="0"/>
+              <a:cs typeface="CMU Serif" panose="02000603000000000000" pitchFamily="2" charset="0"/>
+            </a:endParaRPr>
+          </a:p>
+        </p:txBody>
+      </p:sp>
+      <p:sp>
+        <p:nvSpPr>
+          <p:cNvPr id="38" name="Textfeld 37">
+            <a:extLst>
+              <a:ext uri="{FF2B5EF4-FFF2-40B4-BE49-F238E27FC236}">
+                <a16:creationId xmlns:a16="http://schemas.microsoft.com/office/drawing/2014/main" id="{93968DC5-8915-C40E-D236-939007BC3F11}"/>
+              </a:ext>
+            </a:extLst>
+          </p:cNvPr>
+          <p:cNvSpPr txBox="1"/>
+          <p:nvPr/>
+        </p:nvSpPr>
+        <p:spPr>
+          <a:xfrm>
+            <a:off x="1207358" y="1664147"/>
+            <a:ext cx="518786" cy="261610"/>
+          </a:xfrm>
+          <a:prstGeom prst="rect">
+            <a:avLst/>
+          </a:prstGeom>
+          <a:noFill/>
+        </p:spPr>
+        <p:txBody>
+          <a:bodyPr wrap="square" rtlCol="0">
+            <a:spAutoFit/>
+          </a:bodyPr>
+          <a:lstStyle/>
+          <a:p>
+            <a:pPr algn="ctr"/>
+            <a:r>
+              <a:rPr lang="de-DE" sz="1100" i="1" dirty="0" err="1">
+                <a:solidFill>
+                  <a:schemeClr val="accent6">
+                    <a:lumMod val="75000"/>
+                  </a:schemeClr>
+                </a:solidFill>
+                <a:latin typeface="Latin Modern Math" panose="02000503000000000000" pitchFamily="50" charset="0"/>
+                <a:ea typeface="Latin Modern Math" panose="02000503000000000000" pitchFamily="50" charset="0"/>
+                <a:cs typeface="CMU Serif" panose="02000603000000000000" pitchFamily="2" charset="0"/>
+              </a:rPr>
+              <a:t>φ</a:t>
+            </a:r>
+            <a:r>
+              <a:rPr lang="de-DE" sz="1100" baseline="-25000" dirty="0" err="1">
+                <a:solidFill>
+                  <a:schemeClr val="accent6">
+                    <a:lumMod val="75000"/>
+                  </a:schemeClr>
+                </a:solidFill>
+                <a:latin typeface="CMU Serif" panose="02000603000000000000" pitchFamily="2" charset="0"/>
+                <a:ea typeface="CMU Serif" panose="02000603000000000000" pitchFamily="2" charset="0"/>
+                <a:cs typeface="CMU Serif" panose="02000603000000000000" pitchFamily="2" charset="0"/>
+              </a:rPr>
+              <a:t>L</a:t>
+            </a:r>
+            <a:endParaRPr lang="de-DE" sz="1100" baseline="-25000" dirty="0">
+              <a:solidFill>
+                <a:schemeClr val="accent6">
+                  <a:lumMod val="75000"/>
+                </a:schemeClr>
+              </a:solidFill>
+              <a:latin typeface="CMU Serif" panose="02000603000000000000" pitchFamily="2" charset="0"/>
+              <a:ea typeface="CMU Serif" panose="02000603000000000000" pitchFamily="2" charset="0"/>
+              <a:cs typeface="CMU Serif" panose="02000603000000000000" pitchFamily="2" charset="0"/>
+            </a:endParaRPr>
+          </a:p>
+        </p:txBody>
+      </p:sp>
+      <p:sp>
+        <p:nvSpPr>
+          <p:cNvPr id="39" name="Textfeld 38">
+            <a:extLst>
+              <a:ext uri="{FF2B5EF4-FFF2-40B4-BE49-F238E27FC236}">
+                <a16:creationId xmlns:a16="http://schemas.microsoft.com/office/drawing/2014/main" id="{D8154C49-2C27-4FE2-1915-FC8398530ED6}"/>
+              </a:ext>
+            </a:extLst>
+          </p:cNvPr>
+          <p:cNvSpPr txBox="1"/>
+          <p:nvPr/>
+        </p:nvSpPr>
+        <p:spPr>
+          <a:xfrm>
+            <a:off x="1890840" y="1964060"/>
+            <a:ext cx="518786" cy="261610"/>
+          </a:xfrm>
+          <a:prstGeom prst="rect">
+            <a:avLst/>
+          </a:prstGeom>
+          <a:noFill/>
+        </p:spPr>
+        <p:txBody>
+          <a:bodyPr wrap="square" rtlCol="0">
+            <a:spAutoFit/>
+          </a:bodyPr>
+          <a:lstStyle/>
+          <a:p>
+            <a:pPr algn="ctr"/>
+            <a:r>
+              <a:rPr lang="de-DE" sz="1100" i="1" dirty="0">
+                <a:solidFill>
+                  <a:schemeClr val="accent5"/>
+                </a:solidFill>
+                <a:latin typeface="Latin Modern Math" panose="02000503000000000000" pitchFamily="50" charset="0"/>
+                <a:ea typeface="Latin Modern Math" panose="02000503000000000000" pitchFamily="50" charset="0"/>
+                <a:cs typeface="CMU Serif" panose="02000603000000000000" pitchFamily="2" charset="0"/>
+              </a:rPr>
+              <a:t>ω </a:t>
+            </a:r>
+            <a:r>
+              <a:rPr lang="de-DE" sz="400" dirty="0">
+                <a:solidFill>
+                  <a:schemeClr val="accent5"/>
+                </a:solidFill>
+                <a:latin typeface="Latin Modern Math" panose="02000503000000000000" pitchFamily="50" charset="0"/>
+                <a:ea typeface="Latin Modern Math" panose="02000503000000000000" pitchFamily="50" charset="0"/>
+                <a:cs typeface="CMU Serif" panose="02000603000000000000" pitchFamily="2" charset="0"/>
+              </a:rPr>
+              <a:t>∙</a:t>
+            </a:r>
+            <a:r>
+              <a:rPr lang="de-DE" sz="1100" i="1" dirty="0">
+                <a:solidFill>
+                  <a:schemeClr val="accent5"/>
+                </a:solidFill>
+                <a:latin typeface="Latin Modern Math" panose="02000503000000000000" pitchFamily="50" charset="0"/>
+                <a:ea typeface="Latin Modern Math" panose="02000503000000000000" pitchFamily="50" charset="0"/>
+                <a:cs typeface="CMU Serif" panose="02000603000000000000" pitchFamily="2" charset="0"/>
+              </a:rPr>
+              <a:t> </a:t>
+            </a:r>
+            <a:r>
+              <a:rPr lang="de-DE" sz="1100" i="1" dirty="0">
+                <a:solidFill>
+                  <a:schemeClr val="accent5"/>
+                </a:solidFill>
+                <a:latin typeface="CMU Serif" panose="02000603000000000000" pitchFamily="2" charset="0"/>
+                <a:ea typeface="CMU Serif" panose="02000603000000000000" pitchFamily="2" charset="0"/>
+                <a:cs typeface="CMU Serif" panose="02000603000000000000" pitchFamily="2" charset="0"/>
+              </a:rPr>
+              <a:t>t</a:t>
+            </a:r>
+            <a:endParaRPr lang="de-DE" sz="1100" baseline="-25000" dirty="0">
+              <a:solidFill>
+                <a:schemeClr val="accent5"/>
+              </a:solidFill>
+              <a:latin typeface="CMU Serif" panose="02000603000000000000" pitchFamily="2" charset="0"/>
+              <a:ea typeface="CMU Serif" panose="02000603000000000000" pitchFamily="2" charset="0"/>
+              <a:cs typeface="CMU Serif" panose="02000603000000000000" pitchFamily="2" charset="0"/>
+            </a:endParaRPr>
+          </a:p>
+        </p:txBody>
+      </p:sp>
+    </p:spTree>
+    <p:extLst>
+      <p:ext uri="{BB962C8B-B14F-4D97-AF65-F5344CB8AC3E}">
+        <p14:creationId xmlns:p14="http://schemas.microsoft.com/office/powerpoint/2010/main" val="419832078"/>
+      </p:ext>
+    </p:extLst>
+  </p:cSld>
+  <p:clrMapOvr>
+    <a:masterClrMapping/>
+  </p:clrMapOvr>
+</p:sld>
+</file>
+
+<file path=ppt/slides/slide16.xml><?xml version="1.0" encoding="utf-8"?>
+<p:sld xmlns:a="http://schemas.openxmlformats.org/drawingml/2006/main" xmlns:r="http://schemas.openxmlformats.org/officeDocument/2006/relationships" xmlns:p="http://schemas.openxmlformats.org/presentationml/2006/main">
+  <p:cSld>
+    <p:spTree>
+      <p:nvGrpSpPr>
+        <p:cNvPr id="1" name="">
+          <a:extLst>
+            <a:ext uri="{FF2B5EF4-FFF2-40B4-BE49-F238E27FC236}">
+              <a16:creationId xmlns:a16="http://schemas.microsoft.com/office/drawing/2014/main" id="{FF11D1BF-65D5-9323-317A-3D29E7B05DBF}"/>
+            </a:ext>
+          </a:extLst>
+        </p:cNvPr>
+        <p:cNvGrpSpPr/>
+        <p:nvPr/>
+      </p:nvGrpSpPr>
+      <p:grpSpPr>
+        <a:xfrm>
+          <a:off x="0" y="0"/>
+          <a:ext cx="0" cy="0"/>
+          <a:chOff x="0" y="0"/>
+          <a:chExt cx="0" cy="0"/>
+        </a:xfrm>
+      </p:grpSpPr>
+      <p:sp>
+        <p:nvSpPr>
+          <p:cNvPr id="36" name="Bogen 35">
+            <a:extLst>
+              <a:ext uri="{FF2B5EF4-FFF2-40B4-BE49-F238E27FC236}">
+                <a16:creationId xmlns:a16="http://schemas.microsoft.com/office/drawing/2014/main" id="{C898436D-092B-6887-770A-2E9214543D3C}"/>
+              </a:ext>
+            </a:extLst>
+          </p:cNvPr>
+          <p:cNvSpPr/>
+          <p:nvPr/>
+        </p:nvSpPr>
+        <p:spPr>
+          <a:xfrm>
+            <a:off x="957943" y="1825175"/>
+            <a:ext cx="749544" cy="749542"/>
+          </a:xfrm>
+          <a:prstGeom prst="arc">
+            <a:avLst>
+              <a:gd name="adj1" fmla="val 15365455"/>
+              <a:gd name="adj2" fmla="val 20631686"/>
+            </a:avLst>
+          </a:prstGeom>
+          <a:ln cap="rnd">
+            <a:solidFill>
+              <a:schemeClr val="accent6">
+                <a:lumMod val="75000"/>
+              </a:schemeClr>
+            </a:solidFill>
+            <a:round/>
+            <a:headEnd type="triangle"/>
+            <a:tailEnd type="none"/>
+          </a:ln>
+        </p:spPr>
+        <p:style>
+          <a:lnRef idx="2">
+            <a:schemeClr val="accent1"/>
+          </a:lnRef>
+          <a:fillRef idx="0">
+            <a:schemeClr val="accent1"/>
+          </a:fillRef>
+          <a:effectRef idx="1">
+            <a:schemeClr val="accent1"/>
+          </a:effectRef>
+          <a:fontRef idx="minor">
+            <a:schemeClr val="tx1"/>
+          </a:fontRef>
+        </p:style>
+        <p:txBody>
+          <a:bodyPr rtlCol="0" anchor="ctr"/>
+          <a:lstStyle/>
+          <a:p>
+            <a:pPr algn="ctr"/>
+            <a:endParaRPr lang="de-DE" sz="2400" dirty="0"/>
+          </a:p>
+        </p:txBody>
+      </p:sp>
+      <p:sp>
+        <p:nvSpPr>
+          <p:cNvPr id="33" name="Bogen 32">
+            <a:extLst>
+              <a:ext uri="{FF2B5EF4-FFF2-40B4-BE49-F238E27FC236}">
+                <a16:creationId xmlns:a16="http://schemas.microsoft.com/office/drawing/2014/main" id="{8A39F823-4EC6-1598-05ED-E0939FCA092B}"/>
+              </a:ext>
+            </a:extLst>
+          </p:cNvPr>
+          <p:cNvSpPr/>
+          <p:nvPr/>
+        </p:nvSpPr>
+        <p:spPr>
+          <a:xfrm>
+            <a:off x="723382" y="1589699"/>
+            <a:ext cx="1220493" cy="1220493"/>
+          </a:xfrm>
+          <a:prstGeom prst="arc">
+            <a:avLst>
+              <a:gd name="adj1" fmla="val 15362795"/>
+              <a:gd name="adj2" fmla="val 17327976"/>
+            </a:avLst>
+          </a:prstGeom>
+          <a:ln cap="rnd">
+            <a:solidFill>
+              <a:schemeClr val="accent2">
+                <a:lumMod val="75000"/>
+              </a:schemeClr>
+            </a:solidFill>
+            <a:round/>
+            <a:headEnd type="triangle"/>
+          </a:ln>
+        </p:spPr>
+        <p:style>
+          <a:lnRef idx="2">
+            <a:schemeClr val="accent1"/>
+          </a:lnRef>
+          <a:fillRef idx="0">
+            <a:schemeClr val="accent1"/>
+          </a:fillRef>
+          <a:effectRef idx="1">
+            <a:schemeClr val="accent1"/>
+          </a:effectRef>
+          <a:fontRef idx="minor">
+            <a:schemeClr val="tx1"/>
+          </a:fontRef>
+        </p:style>
+        <p:txBody>
+          <a:bodyPr rtlCol="0" anchor="ctr"/>
+          <a:lstStyle/>
+          <a:p>
+            <a:pPr algn="ctr"/>
+            <a:endParaRPr lang="de-DE" sz="2400" dirty="0"/>
+          </a:p>
+        </p:txBody>
+      </p:sp>
+      <p:cxnSp>
+        <p:nvCxnSpPr>
+          <p:cNvPr id="15" name="Gerade Verbindung mit Pfeil 14">
+            <a:extLst>
+              <a:ext uri="{FF2B5EF4-FFF2-40B4-BE49-F238E27FC236}">
+                <a16:creationId xmlns:a16="http://schemas.microsoft.com/office/drawing/2014/main" id="{E4255DB4-0C33-D644-6BDF-3A9A916670DA}"/>
+              </a:ext>
+            </a:extLst>
+          </p:cNvPr>
+          <p:cNvCxnSpPr>
+            <a:cxnSpLocks/>
+          </p:cNvCxnSpPr>
+          <p:nvPr/>
+        </p:nvCxnSpPr>
+        <p:spPr>
+          <a:xfrm flipH="1" flipV="1">
+            <a:off x="1122699" y="1373148"/>
+            <a:ext cx="210929" cy="826806"/>
+          </a:xfrm>
+          <a:prstGeom prst="straightConnector1">
+            <a:avLst/>
+          </a:prstGeom>
+          <a:ln cap="rnd">
+            <a:solidFill>
+              <a:srgbClr val="FF0000"/>
+            </a:solidFill>
+            <a:round/>
+            <a:tailEnd type="triangle" w="med" len="med"/>
+          </a:ln>
+        </p:spPr>
+        <p:style>
+          <a:lnRef idx="2">
+            <a:schemeClr val="accent1"/>
+          </a:lnRef>
+          <a:fillRef idx="0">
+            <a:schemeClr val="accent1"/>
+          </a:fillRef>
+          <a:effectRef idx="1">
+            <a:schemeClr val="accent1"/>
+          </a:effectRef>
+          <a:fontRef idx="minor">
+            <a:schemeClr val="tx1"/>
+          </a:fontRef>
+        </p:style>
+      </p:cxnSp>
+      <p:sp>
+        <p:nvSpPr>
+          <p:cNvPr id="19" name="Bogen 18">
+            <a:extLst>
+              <a:ext uri="{FF2B5EF4-FFF2-40B4-BE49-F238E27FC236}">
+                <a16:creationId xmlns:a16="http://schemas.microsoft.com/office/drawing/2014/main" id="{51E64000-EC6E-79F3-C5F2-6ADB3E323DE7}"/>
+              </a:ext>
+            </a:extLst>
+          </p:cNvPr>
+          <p:cNvSpPr/>
+          <p:nvPr/>
+        </p:nvSpPr>
+        <p:spPr>
+          <a:xfrm>
+            <a:off x="880978" y="1749211"/>
+            <a:ext cx="905302" cy="905300"/>
+          </a:xfrm>
+          <a:prstGeom prst="arc">
+            <a:avLst>
+              <a:gd name="adj1" fmla="val 15357935"/>
+              <a:gd name="adj2" fmla="val 0"/>
+            </a:avLst>
+          </a:prstGeom>
+          <a:ln cap="rnd">
+            <a:solidFill>
+              <a:schemeClr val="accent5"/>
+            </a:solidFill>
+            <a:round/>
+            <a:headEnd type="triangle"/>
+          </a:ln>
+        </p:spPr>
+        <p:style>
+          <a:lnRef idx="2">
+            <a:schemeClr val="accent1"/>
+          </a:lnRef>
+          <a:fillRef idx="0">
+            <a:schemeClr val="accent1"/>
+          </a:fillRef>
+          <a:effectRef idx="1">
+            <a:schemeClr val="accent1"/>
+          </a:effectRef>
+          <a:fontRef idx="minor">
+            <a:schemeClr val="tx1"/>
+          </a:fontRef>
+        </p:style>
+        <p:txBody>
+          <a:bodyPr rtlCol="0" anchor="ctr"/>
+          <a:lstStyle/>
+          <a:p>
+            <a:pPr algn="ctr"/>
+            <a:endParaRPr lang="de-DE" sz="2400" dirty="0"/>
+          </a:p>
+        </p:txBody>
+      </p:sp>
+      <p:cxnSp>
+        <p:nvCxnSpPr>
+          <p:cNvPr id="8" name="Gerade Verbindung mit Pfeil 7">
+            <a:extLst>
+              <a:ext uri="{FF2B5EF4-FFF2-40B4-BE49-F238E27FC236}">
+                <a16:creationId xmlns:a16="http://schemas.microsoft.com/office/drawing/2014/main" id="{DE379DC9-32D2-1456-342D-E41F1842687A}"/>
+              </a:ext>
+            </a:extLst>
+          </p:cNvPr>
+          <p:cNvCxnSpPr>
+            <a:cxnSpLocks/>
+          </p:cNvCxnSpPr>
+          <p:nvPr/>
+        </p:nvCxnSpPr>
+        <p:spPr>
+          <a:xfrm flipV="1">
+            <a:off x="1333377" y="2053590"/>
+            <a:ext cx="552579" cy="144451"/>
+          </a:xfrm>
+          <a:prstGeom prst="straightConnector1">
+            <a:avLst/>
+          </a:prstGeom>
+          <a:ln cap="rnd">
+            <a:solidFill>
+              <a:srgbClr val="FF0000"/>
+            </a:solidFill>
+            <a:round/>
+            <a:tailEnd type="triangle" w="med" len="med"/>
+          </a:ln>
+        </p:spPr>
+        <p:style>
+          <a:lnRef idx="2">
+            <a:schemeClr val="accent1"/>
+          </a:lnRef>
+          <a:fillRef idx="0">
+            <a:schemeClr val="accent1"/>
+          </a:fillRef>
+          <a:effectRef idx="1">
+            <a:schemeClr val="accent1"/>
+          </a:effectRef>
+          <a:fontRef idx="minor">
+            <a:schemeClr val="tx1"/>
+          </a:fontRef>
+        </p:style>
+      </p:cxnSp>
+      <p:cxnSp>
+        <p:nvCxnSpPr>
+          <p:cNvPr id="10" name="Gerade Verbindung mit Pfeil 9">
+            <a:extLst>
+              <a:ext uri="{FF2B5EF4-FFF2-40B4-BE49-F238E27FC236}">
+                <a16:creationId xmlns:a16="http://schemas.microsoft.com/office/drawing/2014/main" id="{5EFA8261-CF7E-EBF2-557C-32990D3121C7}"/>
+              </a:ext>
+            </a:extLst>
+          </p:cNvPr>
+          <p:cNvCxnSpPr>
+            <a:cxnSpLocks/>
+          </p:cNvCxnSpPr>
+          <p:nvPr/>
+        </p:nvCxnSpPr>
+        <p:spPr>
+          <a:xfrm flipH="1" flipV="1">
+            <a:off x="1190820" y="1647825"/>
+            <a:ext cx="142809" cy="554042"/>
+          </a:xfrm>
+          <a:prstGeom prst="straightConnector1">
+            <a:avLst/>
+          </a:prstGeom>
+          <a:ln w="19050" cap="rnd">
+            <a:solidFill>
+              <a:srgbClr val="086FBD"/>
+            </a:solidFill>
+            <a:round/>
+            <a:tailEnd type="triangle" w="med" len="med"/>
+          </a:ln>
+        </p:spPr>
+        <p:style>
+          <a:lnRef idx="2">
+            <a:schemeClr val="accent1"/>
+          </a:lnRef>
+          <a:fillRef idx="0">
+            <a:schemeClr val="accent1"/>
+          </a:fillRef>
+          <a:effectRef idx="1">
+            <a:schemeClr val="accent1"/>
+          </a:effectRef>
+          <a:fontRef idx="minor">
+            <a:schemeClr val="tx1"/>
+          </a:fontRef>
+        </p:style>
+      </p:cxnSp>
+      <p:sp>
+        <p:nvSpPr>
+          <p:cNvPr id="13" name="Textfeld 12">
+            <a:extLst>
+              <a:ext uri="{FF2B5EF4-FFF2-40B4-BE49-F238E27FC236}">
+                <a16:creationId xmlns:a16="http://schemas.microsoft.com/office/drawing/2014/main" id="{284C988F-DA04-8C7B-EECC-E9C88D76291C}"/>
+              </a:ext>
+            </a:extLst>
+          </p:cNvPr>
+          <p:cNvSpPr txBox="1"/>
+          <p:nvPr/>
+        </p:nvSpPr>
+        <p:spPr>
+          <a:xfrm>
+            <a:off x="1773475" y="1852910"/>
+            <a:ext cx="567731" cy="307777"/>
+          </a:xfrm>
+          <a:prstGeom prst="rect">
+            <a:avLst/>
+          </a:prstGeom>
+          <a:noFill/>
+        </p:spPr>
+        <p:txBody>
+          <a:bodyPr wrap="square" rtlCol="0">
+            <a:spAutoFit/>
+          </a:bodyPr>
+          <a:lstStyle/>
+          <a:p>
+            <a:pPr algn="ctr"/>
+            <a:r>
+              <a:rPr lang="de-DE" sz="1400" i="1" dirty="0">
+                <a:solidFill>
+                  <a:srgbClr val="FF0000"/>
+                </a:solidFill>
+                <a:latin typeface="CMU Serif" panose="02000603000000000000" pitchFamily="2" charset="0"/>
+                <a:ea typeface="CMU Serif" panose="02000603000000000000" pitchFamily="2" charset="0"/>
+                <a:cs typeface="CMU Serif" panose="02000603000000000000" pitchFamily="2" charset="0"/>
+              </a:rPr>
+              <a:t>I</a:t>
+            </a:r>
+            <a:r>
+              <a:rPr lang="de-DE" sz="1400" baseline="-25000" dirty="0">
+                <a:solidFill>
+                  <a:srgbClr val="FF0000"/>
+                </a:solidFill>
+                <a:latin typeface="CMU Serif" panose="02000603000000000000" pitchFamily="2" charset="0"/>
+                <a:ea typeface="CMU Serif" panose="02000603000000000000" pitchFamily="2" charset="0"/>
+                <a:cs typeface="CMU Serif" panose="02000603000000000000" pitchFamily="2" charset="0"/>
+              </a:rPr>
+              <a:t>L</a:t>
+            </a:r>
+          </a:p>
+        </p:txBody>
+      </p:sp>
+      <p:sp>
+        <p:nvSpPr>
+          <p:cNvPr id="14" name="Textfeld 13">
+            <a:extLst>
+              <a:ext uri="{FF2B5EF4-FFF2-40B4-BE49-F238E27FC236}">
+                <a16:creationId xmlns:a16="http://schemas.microsoft.com/office/drawing/2014/main" id="{63FA82CE-E141-4ACC-3F54-7E87CB36E500}"/>
+              </a:ext>
+            </a:extLst>
+          </p:cNvPr>
+          <p:cNvSpPr txBox="1"/>
+          <p:nvPr/>
+        </p:nvSpPr>
+        <p:spPr>
+          <a:xfrm>
+            <a:off x="814841" y="1816139"/>
+            <a:ext cx="518786" cy="307777"/>
+          </a:xfrm>
+          <a:prstGeom prst="rect">
+            <a:avLst/>
+          </a:prstGeom>
+          <a:noFill/>
+        </p:spPr>
+        <p:txBody>
+          <a:bodyPr wrap="square" rtlCol="0">
+            <a:spAutoFit/>
+          </a:bodyPr>
+          <a:lstStyle/>
+          <a:p>
+            <a:pPr algn="ctr"/>
+            <a:r>
+              <a:rPr lang="de-DE" sz="1400" i="1" dirty="0" err="1">
+                <a:solidFill>
+                  <a:srgbClr val="086FBD"/>
+                </a:solidFill>
+                <a:latin typeface="CMU Serif" panose="02000603000000000000" pitchFamily="2" charset="0"/>
+                <a:ea typeface="CMU Serif" panose="02000603000000000000" pitchFamily="2" charset="0"/>
+                <a:cs typeface="CMU Serif" panose="02000603000000000000" pitchFamily="2" charset="0"/>
+              </a:rPr>
+              <a:t>U</a:t>
+            </a:r>
+            <a:r>
+              <a:rPr lang="de-DE" sz="1400" baseline="-25000" dirty="0" err="1">
+                <a:solidFill>
+                  <a:srgbClr val="086FBD"/>
+                </a:solidFill>
+                <a:latin typeface="CMU Serif" panose="02000603000000000000" pitchFamily="2" charset="0"/>
+                <a:ea typeface="CMU Serif" panose="02000603000000000000" pitchFamily="2" charset="0"/>
+                <a:cs typeface="CMU Serif" panose="02000603000000000000" pitchFamily="2" charset="0"/>
+              </a:rPr>
+              <a:t>ges</a:t>
+            </a:r>
+            <a:endParaRPr lang="de-DE" sz="1400" baseline="-25000" dirty="0">
+              <a:solidFill>
+                <a:srgbClr val="086FBD"/>
+              </a:solidFill>
+              <a:latin typeface="CMU Serif" panose="02000603000000000000" pitchFamily="2" charset="0"/>
+              <a:ea typeface="CMU Serif" panose="02000603000000000000" pitchFamily="2" charset="0"/>
+              <a:cs typeface="CMU Serif" panose="02000603000000000000" pitchFamily="2" charset="0"/>
+            </a:endParaRPr>
+          </a:p>
+        </p:txBody>
+      </p:sp>
+      <p:cxnSp>
+        <p:nvCxnSpPr>
+          <p:cNvPr id="21" name="Gerader Verbinder 20">
+            <a:extLst>
+              <a:ext uri="{FF2B5EF4-FFF2-40B4-BE49-F238E27FC236}">
+                <a16:creationId xmlns:a16="http://schemas.microsoft.com/office/drawing/2014/main" id="{388FD392-71AF-233E-0DF1-D632C540F5CB}"/>
+              </a:ext>
+            </a:extLst>
+          </p:cNvPr>
+          <p:cNvCxnSpPr>
+            <a:cxnSpLocks/>
+          </p:cNvCxnSpPr>
+          <p:nvPr/>
+        </p:nvCxnSpPr>
+        <p:spPr>
+          <a:xfrm flipH="1">
+            <a:off x="1123950" y="1234134"/>
+            <a:ext cx="552450" cy="143647"/>
+          </a:xfrm>
+          <a:prstGeom prst="line">
+            <a:avLst/>
+          </a:prstGeom>
+          <a:ln w="9525" cap="rnd">
+            <a:solidFill>
+              <a:srgbClr val="FF0000"/>
+            </a:solidFill>
+            <a:prstDash val="sysDash"/>
+            <a:round/>
+          </a:ln>
+        </p:spPr>
+        <p:style>
+          <a:lnRef idx="2">
+            <a:schemeClr val="accent1"/>
+          </a:lnRef>
+          <a:fillRef idx="0">
+            <a:schemeClr val="accent1"/>
+          </a:fillRef>
+          <a:effectRef idx="1">
+            <a:schemeClr val="accent1"/>
+          </a:effectRef>
+          <a:fontRef idx="minor">
+            <a:schemeClr val="tx1"/>
+          </a:fontRef>
+        </p:style>
+      </p:cxnSp>
+      <p:cxnSp>
+        <p:nvCxnSpPr>
+          <p:cNvPr id="26" name="Gerader Verbinder 25">
+            <a:extLst>
+              <a:ext uri="{FF2B5EF4-FFF2-40B4-BE49-F238E27FC236}">
+                <a16:creationId xmlns:a16="http://schemas.microsoft.com/office/drawing/2014/main" id="{B059BCA6-11DE-B890-9410-0BF75271D61F}"/>
+              </a:ext>
+            </a:extLst>
+          </p:cNvPr>
+          <p:cNvCxnSpPr>
+            <a:cxnSpLocks/>
+          </p:cNvCxnSpPr>
+          <p:nvPr/>
+        </p:nvCxnSpPr>
+        <p:spPr>
+          <a:xfrm>
+            <a:off x="1676819" y="1232535"/>
+            <a:ext cx="204360" cy="817229"/>
+          </a:xfrm>
+          <a:prstGeom prst="line">
+            <a:avLst/>
+          </a:prstGeom>
+          <a:ln w="9525" cap="rnd">
+            <a:solidFill>
+              <a:srgbClr val="FF0000"/>
+            </a:solidFill>
+            <a:prstDash val="sysDash"/>
+            <a:round/>
+          </a:ln>
+        </p:spPr>
+        <p:style>
+          <a:lnRef idx="2">
+            <a:schemeClr val="accent1"/>
+          </a:lnRef>
+          <a:fillRef idx="0">
+            <a:schemeClr val="accent1"/>
+          </a:fillRef>
+          <a:effectRef idx="1">
+            <a:schemeClr val="accent1"/>
+          </a:effectRef>
+          <a:fontRef idx="minor">
+            <a:schemeClr val="tx1"/>
+          </a:fontRef>
+        </p:style>
+      </p:cxnSp>
+      <p:sp>
+        <p:nvSpPr>
+          <p:cNvPr id="32" name="Textfeld 31">
+            <a:extLst>
+              <a:ext uri="{FF2B5EF4-FFF2-40B4-BE49-F238E27FC236}">
+                <a16:creationId xmlns:a16="http://schemas.microsoft.com/office/drawing/2014/main" id="{BB807887-D57B-4C7B-3F03-FCA44FA4C96B}"/>
+              </a:ext>
+            </a:extLst>
+          </p:cNvPr>
+          <p:cNvSpPr txBox="1"/>
+          <p:nvPr/>
+        </p:nvSpPr>
+        <p:spPr>
+          <a:xfrm>
+            <a:off x="653416" y="1129724"/>
+            <a:ext cx="567731" cy="307777"/>
+          </a:xfrm>
+          <a:prstGeom prst="rect">
+            <a:avLst/>
+          </a:prstGeom>
+          <a:noFill/>
+        </p:spPr>
+        <p:txBody>
+          <a:bodyPr wrap="square" rtlCol="0">
+            <a:spAutoFit/>
+          </a:bodyPr>
+          <a:lstStyle/>
+          <a:p>
+            <a:pPr algn="ctr"/>
+            <a:r>
+              <a:rPr lang="de-DE" sz="1400" i="1" dirty="0">
+                <a:solidFill>
+                  <a:srgbClr val="FF0000"/>
+                </a:solidFill>
+                <a:latin typeface="CMU Serif" panose="02000603000000000000" pitchFamily="2" charset="0"/>
+                <a:ea typeface="CMU Serif" panose="02000603000000000000" pitchFamily="2" charset="0"/>
+                <a:cs typeface="CMU Serif" panose="02000603000000000000" pitchFamily="2" charset="0"/>
+              </a:rPr>
+              <a:t>I</a:t>
+            </a:r>
+            <a:r>
+              <a:rPr lang="de-DE" sz="1400" i="1" baseline="-25000" dirty="0">
+                <a:solidFill>
+                  <a:srgbClr val="FF0000"/>
+                </a:solidFill>
+                <a:latin typeface="CMU Serif" panose="02000603000000000000" pitchFamily="2" charset="0"/>
+                <a:ea typeface="CMU Serif" panose="02000603000000000000" pitchFamily="2" charset="0"/>
+                <a:cs typeface="CMU Serif" panose="02000603000000000000" pitchFamily="2" charset="0"/>
+              </a:rPr>
+              <a:t>R</a:t>
+            </a:r>
+            <a:endParaRPr lang="de-DE" sz="1400" baseline="-25000" dirty="0">
+              <a:solidFill>
+                <a:srgbClr val="FF0000"/>
+              </a:solidFill>
+              <a:latin typeface="CMU Serif" panose="02000603000000000000" pitchFamily="2" charset="0"/>
+              <a:ea typeface="CMU Serif" panose="02000603000000000000" pitchFamily="2" charset="0"/>
+              <a:cs typeface="CMU Serif" panose="02000603000000000000" pitchFamily="2" charset="0"/>
+            </a:endParaRPr>
+          </a:p>
+        </p:txBody>
+      </p:sp>
+      <p:sp>
+        <p:nvSpPr>
+          <p:cNvPr id="34" name="Textfeld 33">
+            <a:extLst>
+              <a:ext uri="{FF2B5EF4-FFF2-40B4-BE49-F238E27FC236}">
+                <a16:creationId xmlns:a16="http://schemas.microsoft.com/office/drawing/2014/main" id="{834D633F-1DE3-03C4-7906-D647C2555D02}"/>
+              </a:ext>
+            </a:extLst>
+          </p:cNvPr>
+          <p:cNvSpPr txBox="1"/>
+          <p:nvPr/>
+        </p:nvSpPr>
+        <p:spPr>
+          <a:xfrm>
+            <a:off x="1650209" y="1125863"/>
+            <a:ext cx="567731" cy="307777"/>
+          </a:xfrm>
+          <a:prstGeom prst="rect">
+            <a:avLst/>
+          </a:prstGeom>
+          <a:noFill/>
+        </p:spPr>
+        <p:txBody>
+          <a:bodyPr wrap="square" rtlCol="0">
+            <a:spAutoFit/>
+          </a:bodyPr>
+          <a:lstStyle/>
+          <a:p>
+            <a:pPr algn="ctr"/>
+            <a:r>
+              <a:rPr lang="de-DE" sz="1400" i="1" dirty="0" err="1">
+                <a:solidFill>
+                  <a:srgbClr val="FF0000"/>
+                </a:solidFill>
+                <a:latin typeface="CMU Serif" panose="02000603000000000000" pitchFamily="2" charset="0"/>
+                <a:ea typeface="CMU Serif" panose="02000603000000000000" pitchFamily="2" charset="0"/>
+                <a:cs typeface="CMU Serif" panose="02000603000000000000" pitchFamily="2" charset="0"/>
+              </a:rPr>
+              <a:t>I</a:t>
+            </a:r>
+            <a:r>
+              <a:rPr lang="de-DE" sz="1400" baseline="-25000" dirty="0" err="1">
+                <a:solidFill>
+                  <a:srgbClr val="FF0000"/>
+                </a:solidFill>
+                <a:latin typeface="CMU Serif" panose="02000603000000000000" pitchFamily="2" charset="0"/>
+                <a:ea typeface="CMU Serif" panose="02000603000000000000" pitchFamily="2" charset="0"/>
+                <a:cs typeface="CMU Serif" panose="02000603000000000000" pitchFamily="2" charset="0"/>
+              </a:rPr>
+              <a:t>ges</a:t>
+            </a:r>
+            <a:endParaRPr lang="de-DE" sz="1400" baseline="-25000" dirty="0">
+              <a:solidFill>
+                <a:srgbClr val="FF0000"/>
+              </a:solidFill>
+              <a:latin typeface="CMU Serif" panose="02000603000000000000" pitchFamily="2" charset="0"/>
+              <a:ea typeface="CMU Serif" panose="02000603000000000000" pitchFamily="2" charset="0"/>
+              <a:cs typeface="CMU Serif" panose="02000603000000000000" pitchFamily="2" charset="0"/>
+            </a:endParaRPr>
+          </a:p>
+        </p:txBody>
+      </p:sp>
+      <p:sp>
+        <p:nvSpPr>
+          <p:cNvPr id="35" name="Textfeld 34">
+            <a:extLst>
+              <a:ext uri="{FF2B5EF4-FFF2-40B4-BE49-F238E27FC236}">
+                <a16:creationId xmlns:a16="http://schemas.microsoft.com/office/drawing/2014/main" id="{4AA6773A-02B6-EC40-31DA-6CB365B01329}"/>
+              </a:ext>
+            </a:extLst>
+          </p:cNvPr>
+          <p:cNvSpPr txBox="1"/>
+          <p:nvPr/>
+        </p:nvSpPr>
+        <p:spPr>
+          <a:xfrm>
+            <a:off x="1188701" y="1371235"/>
+            <a:ext cx="518786" cy="261610"/>
+          </a:xfrm>
+          <a:prstGeom prst="rect">
+            <a:avLst/>
+          </a:prstGeom>
+          <a:noFill/>
+        </p:spPr>
+        <p:txBody>
+          <a:bodyPr wrap="square" rtlCol="0">
+            <a:spAutoFit/>
+          </a:bodyPr>
+          <a:lstStyle/>
+          <a:p>
+            <a:pPr algn="ctr"/>
+            <a:r>
+              <a:rPr lang="de-DE" sz="1100" i="1" dirty="0">
+                <a:solidFill>
+                  <a:schemeClr val="accent2">
+                    <a:lumMod val="75000"/>
+                  </a:schemeClr>
+                </a:solidFill>
+                <a:latin typeface="Latin Modern Math" panose="02000503000000000000" pitchFamily="50" charset="0"/>
+                <a:ea typeface="Latin Modern Math" panose="02000503000000000000" pitchFamily="50" charset="0"/>
+                <a:cs typeface="CMU Serif" panose="02000603000000000000" pitchFamily="2" charset="0"/>
+              </a:rPr>
+              <a:t>φ</a:t>
+            </a:r>
+            <a:endParaRPr lang="de-DE" sz="1100" baseline="-25000" dirty="0">
+              <a:solidFill>
+                <a:schemeClr val="accent2">
+                  <a:lumMod val="75000"/>
+                </a:schemeClr>
+              </a:solidFill>
+              <a:latin typeface="CMU Serif" panose="02000603000000000000" pitchFamily="2" charset="0"/>
+              <a:ea typeface="CMU Serif" panose="02000603000000000000" pitchFamily="2" charset="0"/>
+              <a:cs typeface="CMU Serif" panose="02000603000000000000" pitchFamily="2" charset="0"/>
+            </a:endParaRPr>
+          </a:p>
+        </p:txBody>
+      </p:sp>
+      <p:sp>
+        <p:nvSpPr>
+          <p:cNvPr id="38" name="Textfeld 37">
+            <a:extLst>
+              <a:ext uri="{FF2B5EF4-FFF2-40B4-BE49-F238E27FC236}">
+                <a16:creationId xmlns:a16="http://schemas.microsoft.com/office/drawing/2014/main" id="{55C17400-6265-D2A4-C17E-5BFE18177C79}"/>
+              </a:ext>
+            </a:extLst>
+          </p:cNvPr>
+          <p:cNvSpPr txBox="1"/>
+          <p:nvPr/>
+        </p:nvSpPr>
+        <p:spPr>
+          <a:xfrm>
+            <a:off x="1254580" y="1895604"/>
+            <a:ext cx="518786" cy="261610"/>
+          </a:xfrm>
+          <a:prstGeom prst="rect">
+            <a:avLst/>
+          </a:prstGeom>
+          <a:noFill/>
+        </p:spPr>
+        <p:txBody>
+          <a:bodyPr wrap="square" rtlCol="0">
+            <a:spAutoFit/>
+          </a:bodyPr>
+          <a:lstStyle/>
+          <a:p>
+            <a:pPr algn="ctr"/>
+            <a:r>
+              <a:rPr lang="de-DE" sz="1100" i="1" dirty="0" err="1">
+                <a:solidFill>
+                  <a:schemeClr val="accent6">
+                    <a:lumMod val="75000"/>
+                  </a:schemeClr>
+                </a:solidFill>
+                <a:latin typeface="Latin Modern Math" panose="02000503000000000000" pitchFamily="50" charset="0"/>
+                <a:ea typeface="Latin Modern Math" panose="02000503000000000000" pitchFamily="50" charset="0"/>
+                <a:cs typeface="CMU Serif" panose="02000603000000000000" pitchFamily="2" charset="0"/>
+              </a:rPr>
+              <a:t>φ</a:t>
+            </a:r>
+            <a:r>
+              <a:rPr lang="de-DE" sz="1100" baseline="-25000" dirty="0" err="1">
+                <a:solidFill>
+                  <a:schemeClr val="accent6">
+                    <a:lumMod val="75000"/>
+                  </a:schemeClr>
+                </a:solidFill>
+                <a:latin typeface="CMU Serif" panose="02000603000000000000" pitchFamily="2" charset="0"/>
+                <a:ea typeface="CMU Serif" panose="02000603000000000000" pitchFamily="2" charset="0"/>
+                <a:cs typeface="CMU Serif" panose="02000603000000000000" pitchFamily="2" charset="0"/>
+              </a:rPr>
+              <a:t>L</a:t>
+            </a:r>
+            <a:endParaRPr lang="de-DE" sz="1100" baseline="-25000" dirty="0">
+              <a:solidFill>
+                <a:schemeClr val="accent6">
+                  <a:lumMod val="75000"/>
+                </a:schemeClr>
+              </a:solidFill>
+              <a:latin typeface="CMU Serif" panose="02000603000000000000" pitchFamily="2" charset="0"/>
+              <a:ea typeface="CMU Serif" panose="02000603000000000000" pitchFamily="2" charset="0"/>
+              <a:cs typeface="CMU Serif" panose="02000603000000000000" pitchFamily="2" charset="0"/>
+            </a:endParaRPr>
+          </a:p>
+        </p:txBody>
+      </p:sp>
+      <p:sp>
+        <p:nvSpPr>
+          <p:cNvPr id="39" name="Textfeld 38">
+            <a:extLst>
+              <a:ext uri="{FF2B5EF4-FFF2-40B4-BE49-F238E27FC236}">
+                <a16:creationId xmlns:a16="http://schemas.microsoft.com/office/drawing/2014/main" id="{FC636344-985D-FA48-7372-90AF752BA095}"/>
+              </a:ext>
+            </a:extLst>
+          </p:cNvPr>
+          <p:cNvSpPr txBox="1"/>
+          <p:nvPr/>
+        </p:nvSpPr>
+        <p:spPr>
+          <a:xfrm>
+            <a:off x="1509215" y="2200478"/>
+            <a:ext cx="518786" cy="261610"/>
+          </a:xfrm>
+          <a:prstGeom prst="rect">
+            <a:avLst/>
+          </a:prstGeom>
+          <a:noFill/>
+        </p:spPr>
+        <p:txBody>
+          <a:bodyPr wrap="square" rtlCol="0">
+            <a:spAutoFit/>
+          </a:bodyPr>
+          <a:lstStyle/>
+          <a:p>
+            <a:pPr algn="ctr"/>
+            <a:r>
+              <a:rPr lang="de-DE" sz="1100" i="1" dirty="0">
+                <a:solidFill>
+                  <a:schemeClr val="accent5"/>
+                </a:solidFill>
+                <a:latin typeface="Latin Modern Math" panose="02000503000000000000" pitchFamily="50" charset="0"/>
+                <a:ea typeface="Latin Modern Math" panose="02000503000000000000" pitchFamily="50" charset="0"/>
+                <a:cs typeface="CMU Serif" panose="02000603000000000000" pitchFamily="2" charset="0"/>
+              </a:rPr>
+              <a:t>ω </a:t>
+            </a:r>
+            <a:r>
+              <a:rPr lang="de-DE" sz="400" dirty="0">
+                <a:solidFill>
+                  <a:schemeClr val="accent5"/>
+                </a:solidFill>
+                <a:latin typeface="Latin Modern Math" panose="02000503000000000000" pitchFamily="50" charset="0"/>
+                <a:ea typeface="Latin Modern Math" panose="02000503000000000000" pitchFamily="50" charset="0"/>
+                <a:cs typeface="CMU Serif" panose="02000603000000000000" pitchFamily="2" charset="0"/>
+              </a:rPr>
+              <a:t>∙</a:t>
+            </a:r>
+            <a:r>
+              <a:rPr lang="de-DE" sz="1100" i="1" dirty="0">
+                <a:solidFill>
+                  <a:schemeClr val="accent5"/>
+                </a:solidFill>
+                <a:latin typeface="Latin Modern Math" panose="02000503000000000000" pitchFamily="50" charset="0"/>
+                <a:ea typeface="Latin Modern Math" panose="02000503000000000000" pitchFamily="50" charset="0"/>
+                <a:cs typeface="CMU Serif" panose="02000603000000000000" pitchFamily="2" charset="0"/>
+              </a:rPr>
+              <a:t> </a:t>
+            </a:r>
+            <a:r>
+              <a:rPr lang="de-DE" sz="1100" i="1" dirty="0">
+                <a:solidFill>
+                  <a:schemeClr val="accent5"/>
+                </a:solidFill>
+                <a:latin typeface="CMU Serif" panose="02000603000000000000" pitchFamily="2" charset="0"/>
+                <a:ea typeface="CMU Serif" panose="02000603000000000000" pitchFamily="2" charset="0"/>
+                <a:cs typeface="CMU Serif" panose="02000603000000000000" pitchFamily="2" charset="0"/>
+              </a:rPr>
+              <a:t>t</a:t>
+            </a:r>
+            <a:endParaRPr lang="de-DE" sz="1100" baseline="-25000" dirty="0">
+              <a:solidFill>
+                <a:schemeClr val="accent5"/>
+              </a:solidFill>
+              <a:latin typeface="CMU Serif" panose="02000603000000000000" pitchFamily="2" charset="0"/>
+              <a:ea typeface="CMU Serif" panose="02000603000000000000" pitchFamily="2" charset="0"/>
+              <a:cs typeface="CMU Serif" panose="02000603000000000000" pitchFamily="2" charset="0"/>
+            </a:endParaRPr>
+          </a:p>
+        </p:txBody>
+      </p:sp>
+      <p:cxnSp>
+        <p:nvCxnSpPr>
+          <p:cNvPr id="17" name="Gerade Verbindung mit Pfeil 16">
+            <a:extLst>
+              <a:ext uri="{FF2B5EF4-FFF2-40B4-BE49-F238E27FC236}">
+                <a16:creationId xmlns:a16="http://schemas.microsoft.com/office/drawing/2014/main" id="{78AE7485-A643-49FF-DB4B-CBF45E1B7A28}"/>
+              </a:ext>
+            </a:extLst>
+          </p:cNvPr>
+          <p:cNvCxnSpPr>
+            <a:cxnSpLocks/>
+          </p:cNvCxnSpPr>
+          <p:nvPr/>
+        </p:nvCxnSpPr>
+        <p:spPr>
+          <a:xfrm flipV="1">
+            <a:off x="1333628" y="1232535"/>
+            <a:ext cx="342772" cy="965506"/>
+          </a:xfrm>
+          <a:prstGeom prst="straightConnector1">
+            <a:avLst/>
+          </a:prstGeom>
+          <a:ln cap="rnd">
+            <a:solidFill>
+              <a:srgbClr val="FF0000"/>
+            </a:solidFill>
+            <a:round/>
+            <a:tailEnd type="triangle" w="med" len="med"/>
+          </a:ln>
+        </p:spPr>
+        <p:style>
+          <a:lnRef idx="2">
+            <a:schemeClr val="accent1"/>
+          </a:lnRef>
+          <a:fillRef idx="0">
+            <a:schemeClr val="accent1"/>
+          </a:fillRef>
+          <a:effectRef idx="1">
+            <a:schemeClr val="accent1"/>
+          </a:effectRef>
+          <a:fontRef idx="minor">
+            <a:schemeClr val="tx1"/>
+          </a:fontRef>
+        </p:style>
+      </p:cxnSp>
+      <p:cxnSp>
+        <p:nvCxnSpPr>
+          <p:cNvPr id="5" name="Gerade Verbindung mit Pfeil 4">
+            <a:extLst>
+              <a:ext uri="{FF2B5EF4-FFF2-40B4-BE49-F238E27FC236}">
+                <a16:creationId xmlns:a16="http://schemas.microsoft.com/office/drawing/2014/main" id="{09A136CD-BD11-3FBB-95F7-1806C08F3CF2}"/>
+              </a:ext>
+            </a:extLst>
+          </p:cNvPr>
+          <p:cNvCxnSpPr>
+            <a:cxnSpLocks/>
+          </p:cNvCxnSpPr>
+          <p:nvPr/>
+        </p:nvCxnSpPr>
+        <p:spPr>
+          <a:xfrm flipV="1">
+            <a:off x="1333630" y="1173167"/>
+            <a:ext cx="0" cy="1254116"/>
+          </a:xfrm>
+          <a:prstGeom prst="straightConnector1">
+            <a:avLst/>
+          </a:prstGeom>
+          <a:ln cap="rnd">
+            <a:solidFill>
+              <a:schemeClr val="tx1"/>
+            </a:solidFill>
+            <a:round/>
+            <a:tailEnd type="triangle" w="med" len="med"/>
+          </a:ln>
+        </p:spPr>
+        <p:style>
+          <a:lnRef idx="2">
+            <a:schemeClr val="accent1"/>
+          </a:lnRef>
+          <a:fillRef idx="0">
+            <a:schemeClr val="accent1"/>
+          </a:fillRef>
+          <a:effectRef idx="1">
+            <a:schemeClr val="accent1"/>
+          </a:effectRef>
+          <a:fontRef idx="minor">
+            <a:schemeClr val="tx1"/>
+          </a:fontRef>
+        </p:style>
+      </p:cxnSp>
+      <p:cxnSp>
+        <p:nvCxnSpPr>
+          <p:cNvPr id="6" name="Gerade Verbindung mit Pfeil 5">
+            <a:extLst>
+              <a:ext uri="{FF2B5EF4-FFF2-40B4-BE49-F238E27FC236}">
+                <a16:creationId xmlns:a16="http://schemas.microsoft.com/office/drawing/2014/main" id="{3802F077-8BE6-4A76-4FF1-A15030C26E45}"/>
+              </a:ext>
+            </a:extLst>
+          </p:cNvPr>
+          <p:cNvCxnSpPr>
+            <a:cxnSpLocks/>
+          </p:cNvCxnSpPr>
+          <p:nvPr/>
+        </p:nvCxnSpPr>
+        <p:spPr>
+          <a:xfrm>
+            <a:off x="1124941" y="2201867"/>
+            <a:ext cx="1242999" cy="0"/>
+          </a:xfrm>
+          <a:prstGeom prst="straightConnector1">
+            <a:avLst/>
+          </a:prstGeom>
+          <a:ln cap="rnd">
+            <a:solidFill>
+              <a:schemeClr val="tx1"/>
+            </a:solidFill>
+            <a:round/>
+            <a:tailEnd type="triangle" w="med" len="med"/>
+          </a:ln>
+        </p:spPr>
+        <p:style>
+          <a:lnRef idx="2">
+            <a:schemeClr val="accent1"/>
+          </a:lnRef>
+          <a:fillRef idx="0">
+            <a:schemeClr val="accent1"/>
+          </a:fillRef>
+          <a:effectRef idx="1">
+            <a:schemeClr val="accent1"/>
+          </a:effectRef>
+          <a:fontRef idx="minor">
+            <a:schemeClr val="tx1"/>
+          </a:fontRef>
+        </p:style>
+      </p:cxnSp>
+    </p:spTree>
+    <p:extLst>
+      <p:ext uri="{BB962C8B-B14F-4D97-AF65-F5344CB8AC3E}">
+        <p14:creationId xmlns:p14="http://schemas.microsoft.com/office/powerpoint/2010/main" val="1105841399"/>
+      </p:ext>
+    </p:extLst>
+  </p:cSld>
+  <p:clrMapOvr>
+    <a:masterClrMapping/>
+  </p:clrMapOvr>
+</p:sld>
+</file>
+
+<file path=ppt/slides/slide17.xml><?xml version="1.0" encoding="utf-8"?>
+<p:sld xmlns:a="http://schemas.openxmlformats.org/drawingml/2006/main" xmlns:r="http://schemas.openxmlformats.org/officeDocument/2006/relationships" xmlns:p="http://schemas.openxmlformats.org/presentationml/2006/main">
+  <p:cSld>
+    <p:spTree>
+      <p:nvGrpSpPr>
+        <p:cNvPr id="1" name="">
+          <a:extLst>
+            <a:ext uri="{FF2B5EF4-FFF2-40B4-BE49-F238E27FC236}">
+              <a16:creationId xmlns:a16="http://schemas.microsoft.com/office/drawing/2014/main" id="{5821008F-68E4-70B6-1C0A-20D79F679D41}"/>
+            </a:ext>
+          </a:extLst>
+        </p:cNvPr>
+        <p:cNvGrpSpPr/>
+        <p:nvPr/>
+      </p:nvGrpSpPr>
+      <p:grpSpPr>
+        <a:xfrm>
+          <a:off x="0" y="0"/>
+          <a:ext cx="0" cy="0"/>
+          <a:chOff x="0" y="0"/>
+          <a:chExt cx="0" cy="0"/>
+        </a:xfrm>
+      </p:grpSpPr>
+      <p:sp>
+        <p:nvSpPr>
+          <p:cNvPr id="36" name="Bogen 35">
+            <a:extLst>
+              <a:ext uri="{FF2B5EF4-FFF2-40B4-BE49-F238E27FC236}">
+                <a16:creationId xmlns:a16="http://schemas.microsoft.com/office/drawing/2014/main" id="{702EDC1A-2873-C3FA-949D-31F6F814F71B}"/>
+              </a:ext>
+            </a:extLst>
+          </p:cNvPr>
+          <p:cNvSpPr/>
+          <p:nvPr/>
+        </p:nvSpPr>
+        <p:spPr>
+          <a:xfrm>
+            <a:off x="957943" y="1825175"/>
+            <a:ext cx="749544" cy="749542"/>
+          </a:xfrm>
+          <a:prstGeom prst="arc">
+            <a:avLst>
+              <a:gd name="adj1" fmla="val 15365455"/>
+              <a:gd name="adj2" fmla="val 20631686"/>
+            </a:avLst>
+          </a:prstGeom>
+          <a:ln cap="rnd">
+            <a:solidFill>
+              <a:schemeClr val="accent6">
+                <a:lumMod val="75000"/>
+              </a:schemeClr>
+            </a:solidFill>
+            <a:round/>
+            <a:headEnd type="triangle"/>
+            <a:tailEnd type="none"/>
+          </a:ln>
+        </p:spPr>
+        <p:style>
+          <a:lnRef idx="2">
+            <a:schemeClr val="accent1"/>
+          </a:lnRef>
+          <a:fillRef idx="0">
+            <a:schemeClr val="accent1"/>
+          </a:fillRef>
+          <a:effectRef idx="1">
+            <a:schemeClr val="accent1"/>
+          </a:effectRef>
+          <a:fontRef idx="minor">
+            <a:schemeClr val="tx1"/>
+          </a:fontRef>
+        </p:style>
+        <p:txBody>
+          <a:bodyPr rtlCol="0" anchor="ctr"/>
+          <a:lstStyle/>
+          <a:p>
+            <a:pPr algn="ctr"/>
+            <a:endParaRPr lang="de-DE" sz="2400" dirty="0"/>
+          </a:p>
+        </p:txBody>
+      </p:sp>
+      <p:sp>
+        <p:nvSpPr>
+          <p:cNvPr id="33" name="Bogen 32">
+            <a:extLst>
+              <a:ext uri="{FF2B5EF4-FFF2-40B4-BE49-F238E27FC236}">
+                <a16:creationId xmlns:a16="http://schemas.microsoft.com/office/drawing/2014/main" id="{618CE5B3-D766-D77C-1C2B-8A11FB4475E6}"/>
+              </a:ext>
+            </a:extLst>
+          </p:cNvPr>
+          <p:cNvSpPr/>
+          <p:nvPr/>
+        </p:nvSpPr>
+        <p:spPr>
+          <a:xfrm>
+            <a:off x="723382" y="1589699"/>
+            <a:ext cx="1220493" cy="1220493"/>
+          </a:xfrm>
+          <a:prstGeom prst="arc">
+            <a:avLst>
+              <a:gd name="adj1" fmla="val 15362795"/>
+              <a:gd name="adj2" fmla="val 17327976"/>
+            </a:avLst>
+          </a:prstGeom>
+          <a:ln cap="rnd">
+            <a:solidFill>
+              <a:schemeClr val="accent2">
+                <a:lumMod val="75000"/>
+              </a:schemeClr>
+            </a:solidFill>
+            <a:round/>
+            <a:headEnd type="triangle"/>
+          </a:ln>
+        </p:spPr>
+        <p:style>
+          <a:lnRef idx="2">
+            <a:schemeClr val="accent1"/>
+          </a:lnRef>
+          <a:fillRef idx="0">
+            <a:schemeClr val="accent1"/>
+          </a:fillRef>
+          <a:effectRef idx="1">
+            <a:schemeClr val="accent1"/>
+          </a:effectRef>
+          <a:fontRef idx="minor">
+            <a:schemeClr val="tx1"/>
+          </a:fontRef>
+        </p:style>
+        <p:txBody>
+          <a:bodyPr rtlCol="0" anchor="ctr"/>
+          <a:lstStyle/>
+          <a:p>
+            <a:pPr algn="ctr"/>
+            <a:endParaRPr lang="de-DE" sz="2400" dirty="0"/>
+          </a:p>
+        </p:txBody>
+      </p:sp>
+      <p:cxnSp>
+        <p:nvCxnSpPr>
+          <p:cNvPr id="15" name="Gerade Verbindung mit Pfeil 14">
+            <a:extLst>
+              <a:ext uri="{FF2B5EF4-FFF2-40B4-BE49-F238E27FC236}">
+                <a16:creationId xmlns:a16="http://schemas.microsoft.com/office/drawing/2014/main" id="{5E32BBF8-6B0B-3477-F101-E7E9DEF0714A}"/>
+              </a:ext>
+            </a:extLst>
+          </p:cNvPr>
+          <p:cNvCxnSpPr>
+            <a:cxnSpLocks/>
+          </p:cNvCxnSpPr>
+          <p:nvPr/>
+        </p:nvCxnSpPr>
+        <p:spPr>
+          <a:xfrm flipH="1" flipV="1">
+            <a:off x="1122699" y="1373148"/>
+            <a:ext cx="210929" cy="826806"/>
+          </a:xfrm>
+          <a:prstGeom prst="straightConnector1">
+            <a:avLst/>
+          </a:prstGeom>
+          <a:ln cap="rnd">
+            <a:solidFill>
+              <a:schemeClr val="tx1">
+                <a:lumMod val="65000"/>
+                <a:lumOff val="35000"/>
+              </a:schemeClr>
+            </a:solidFill>
+            <a:round/>
+            <a:tailEnd type="triangle" w="med" len="med"/>
+          </a:ln>
+        </p:spPr>
+        <p:style>
+          <a:lnRef idx="2">
+            <a:schemeClr val="accent1"/>
+          </a:lnRef>
+          <a:fillRef idx="0">
+            <a:schemeClr val="accent1"/>
+          </a:fillRef>
+          <a:effectRef idx="1">
+            <a:schemeClr val="accent1"/>
+          </a:effectRef>
+          <a:fontRef idx="minor">
+            <a:schemeClr val="tx1"/>
+          </a:fontRef>
+        </p:style>
+      </p:cxnSp>
+      <p:sp>
+        <p:nvSpPr>
+          <p:cNvPr id="19" name="Bogen 18">
+            <a:extLst>
+              <a:ext uri="{FF2B5EF4-FFF2-40B4-BE49-F238E27FC236}">
+                <a16:creationId xmlns:a16="http://schemas.microsoft.com/office/drawing/2014/main" id="{5F82A971-AB20-CF36-1C85-D84C953879FB}"/>
+              </a:ext>
+            </a:extLst>
+          </p:cNvPr>
+          <p:cNvSpPr/>
+          <p:nvPr/>
+        </p:nvSpPr>
+        <p:spPr>
+          <a:xfrm>
+            <a:off x="880978" y="1749211"/>
+            <a:ext cx="905302" cy="905300"/>
+          </a:xfrm>
+          <a:prstGeom prst="arc">
+            <a:avLst>
+              <a:gd name="adj1" fmla="val 15357935"/>
+              <a:gd name="adj2" fmla="val 0"/>
+            </a:avLst>
+          </a:prstGeom>
+          <a:ln cap="rnd">
+            <a:solidFill>
+              <a:schemeClr val="accent5"/>
+            </a:solidFill>
+            <a:round/>
+            <a:headEnd type="triangle"/>
+          </a:ln>
+        </p:spPr>
+        <p:style>
+          <a:lnRef idx="2">
+            <a:schemeClr val="accent1"/>
+          </a:lnRef>
+          <a:fillRef idx="0">
+            <a:schemeClr val="accent1"/>
+          </a:fillRef>
+          <a:effectRef idx="1">
+            <a:schemeClr val="accent1"/>
+          </a:effectRef>
+          <a:fontRef idx="minor">
+            <a:schemeClr val="tx1"/>
+          </a:fontRef>
+        </p:style>
+        <p:txBody>
+          <a:bodyPr rtlCol="0" anchor="ctr"/>
+          <a:lstStyle/>
+          <a:p>
+            <a:pPr algn="ctr"/>
+            <a:endParaRPr lang="de-DE" sz="2400" dirty="0"/>
+          </a:p>
+        </p:txBody>
+      </p:sp>
+      <p:cxnSp>
+        <p:nvCxnSpPr>
+          <p:cNvPr id="8" name="Gerade Verbindung mit Pfeil 7">
+            <a:extLst>
+              <a:ext uri="{FF2B5EF4-FFF2-40B4-BE49-F238E27FC236}">
+                <a16:creationId xmlns:a16="http://schemas.microsoft.com/office/drawing/2014/main" id="{F69B98A5-94BC-D989-B951-26D2EDAB0CDB}"/>
+              </a:ext>
+            </a:extLst>
+          </p:cNvPr>
+          <p:cNvCxnSpPr>
+            <a:cxnSpLocks/>
+          </p:cNvCxnSpPr>
+          <p:nvPr/>
+        </p:nvCxnSpPr>
+        <p:spPr>
+          <a:xfrm flipV="1">
+            <a:off x="1333377" y="2053590"/>
+            <a:ext cx="552579" cy="144451"/>
+          </a:xfrm>
+          <a:prstGeom prst="straightConnector1">
+            <a:avLst/>
+          </a:prstGeom>
+          <a:ln cap="rnd">
+            <a:solidFill>
+              <a:schemeClr val="tx1">
+                <a:lumMod val="65000"/>
+                <a:lumOff val="35000"/>
+              </a:schemeClr>
+            </a:solidFill>
+            <a:round/>
+            <a:tailEnd type="triangle" w="med" len="med"/>
+          </a:ln>
+        </p:spPr>
+        <p:style>
+          <a:lnRef idx="2">
+            <a:schemeClr val="accent1"/>
+          </a:lnRef>
+          <a:fillRef idx="0">
+            <a:schemeClr val="accent1"/>
+          </a:fillRef>
+          <a:effectRef idx="1">
+            <a:schemeClr val="accent1"/>
+          </a:effectRef>
+          <a:fontRef idx="minor">
+            <a:schemeClr val="tx1"/>
+          </a:fontRef>
+        </p:style>
+      </p:cxnSp>
+      <p:sp>
+        <p:nvSpPr>
+          <p:cNvPr id="13" name="Textfeld 12">
+            <a:extLst>
+              <a:ext uri="{FF2B5EF4-FFF2-40B4-BE49-F238E27FC236}">
+                <a16:creationId xmlns:a16="http://schemas.microsoft.com/office/drawing/2014/main" id="{EBED0AA5-2A9D-B0B8-0A0A-2C33CEB03DD6}"/>
+              </a:ext>
+            </a:extLst>
+          </p:cNvPr>
+          <p:cNvSpPr txBox="1"/>
+          <p:nvPr/>
+        </p:nvSpPr>
+        <p:spPr>
+          <a:xfrm>
+            <a:off x="1755448" y="1963055"/>
+            <a:ext cx="567731" cy="246221"/>
+          </a:xfrm>
+          <a:prstGeom prst="rect">
+            <a:avLst/>
+          </a:prstGeom>
+          <a:noFill/>
+        </p:spPr>
+        <p:txBody>
+          <a:bodyPr wrap="square" rtlCol="0">
+            <a:spAutoFit/>
+          </a:bodyPr>
+          <a:lstStyle/>
+          <a:p>
+            <a:pPr algn="ctr"/>
+            <a:r>
+              <a:rPr lang="de-DE" sz="1000" i="1" dirty="0">
+                <a:solidFill>
+                  <a:schemeClr val="tx1">
+                    <a:lumMod val="65000"/>
+                    <a:lumOff val="35000"/>
+                  </a:schemeClr>
+                </a:solidFill>
+                <a:latin typeface="CMU Serif" panose="02000603000000000000" pitchFamily="2" charset="0"/>
+                <a:ea typeface="CMU Serif" panose="02000603000000000000" pitchFamily="2" charset="0"/>
+                <a:cs typeface="CMU Serif" panose="02000603000000000000" pitchFamily="2" charset="0"/>
+              </a:rPr>
+              <a:t>X</a:t>
+            </a:r>
+            <a:r>
+              <a:rPr lang="de-DE" sz="1000" baseline="-25000" dirty="0">
+                <a:solidFill>
+                  <a:schemeClr val="tx1">
+                    <a:lumMod val="65000"/>
+                    <a:lumOff val="35000"/>
+                  </a:schemeClr>
+                </a:solidFill>
+                <a:latin typeface="CMU Serif" panose="02000603000000000000" pitchFamily="2" charset="0"/>
+                <a:ea typeface="CMU Serif" panose="02000603000000000000" pitchFamily="2" charset="0"/>
+                <a:cs typeface="CMU Serif" panose="02000603000000000000" pitchFamily="2" charset="0"/>
+              </a:rPr>
+              <a:t>L</a:t>
+            </a:r>
+          </a:p>
+        </p:txBody>
+      </p:sp>
+      <p:cxnSp>
+        <p:nvCxnSpPr>
+          <p:cNvPr id="21" name="Gerader Verbinder 20">
+            <a:extLst>
+              <a:ext uri="{FF2B5EF4-FFF2-40B4-BE49-F238E27FC236}">
+                <a16:creationId xmlns:a16="http://schemas.microsoft.com/office/drawing/2014/main" id="{2B1AEE58-BB24-4676-80F4-0DAF33CB509C}"/>
+              </a:ext>
+            </a:extLst>
+          </p:cNvPr>
+          <p:cNvCxnSpPr>
+            <a:cxnSpLocks/>
+          </p:cNvCxnSpPr>
+          <p:nvPr/>
+        </p:nvCxnSpPr>
+        <p:spPr>
+          <a:xfrm flipH="1">
+            <a:off x="1123950" y="1234134"/>
+            <a:ext cx="552450" cy="143647"/>
+          </a:xfrm>
+          <a:prstGeom prst="line">
+            <a:avLst/>
+          </a:prstGeom>
+          <a:ln w="9525" cap="rnd">
+            <a:solidFill>
+              <a:schemeClr val="tx1">
+                <a:lumMod val="65000"/>
+                <a:lumOff val="35000"/>
+              </a:schemeClr>
+            </a:solidFill>
+            <a:prstDash val="sysDash"/>
+            <a:round/>
+          </a:ln>
+        </p:spPr>
+        <p:style>
+          <a:lnRef idx="2">
+            <a:schemeClr val="accent1"/>
+          </a:lnRef>
+          <a:fillRef idx="0">
+            <a:schemeClr val="accent1"/>
+          </a:fillRef>
+          <a:effectRef idx="1">
+            <a:schemeClr val="accent1"/>
+          </a:effectRef>
+          <a:fontRef idx="minor">
+            <a:schemeClr val="tx1"/>
+          </a:fontRef>
+        </p:style>
+      </p:cxnSp>
+      <p:cxnSp>
+        <p:nvCxnSpPr>
+          <p:cNvPr id="26" name="Gerader Verbinder 25">
+            <a:extLst>
+              <a:ext uri="{FF2B5EF4-FFF2-40B4-BE49-F238E27FC236}">
+                <a16:creationId xmlns:a16="http://schemas.microsoft.com/office/drawing/2014/main" id="{76337F0D-65C9-52B5-35E7-C472D9483CF1}"/>
+              </a:ext>
+            </a:extLst>
+          </p:cNvPr>
+          <p:cNvCxnSpPr>
+            <a:cxnSpLocks/>
+          </p:cNvCxnSpPr>
+          <p:nvPr/>
+        </p:nvCxnSpPr>
+        <p:spPr>
+          <a:xfrm>
+            <a:off x="1676819" y="1232535"/>
+            <a:ext cx="204360" cy="817229"/>
+          </a:xfrm>
+          <a:prstGeom prst="line">
+            <a:avLst/>
+          </a:prstGeom>
+          <a:ln w="9525" cap="rnd">
+            <a:solidFill>
+              <a:schemeClr val="tx1">
+                <a:lumMod val="65000"/>
+                <a:lumOff val="35000"/>
+              </a:schemeClr>
+            </a:solidFill>
+            <a:prstDash val="sysDash"/>
+            <a:round/>
+          </a:ln>
+        </p:spPr>
+        <p:style>
+          <a:lnRef idx="2">
+            <a:schemeClr val="accent1"/>
+          </a:lnRef>
+          <a:fillRef idx="0">
+            <a:schemeClr val="accent1"/>
+          </a:fillRef>
+          <a:effectRef idx="1">
+            <a:schemeClr val="accent1"/>
+          </a:effectRef>
+          <a:fontRef idx="minor">
+            <a:schemeClr val="tx1"/>
+          </a:fontRef>
+        </p:style>
+      </p:cxnSp>
+      <p:sp>
+        <p:nvSpPr>
+          <p:cNvPr id="32" name="Textfeld 31">
+            <a:extLst>
+              <a:ext uri="{FF2B5EF4-FFF2-40B4-BE49-F238E27FC236}">
+                <a16:creationId xmlns:a16="http://schemas.microsoft.com/office/drawing/2014/main" id="{8C19FD1F-82D4-1136-C2CF-29F34C9FE882}"/>
+              </a:ext>
+            </a:extLst>
+          </p:cNvPr>
+          <p:cNvSpPr txBox="1"/>
+          <p:nvPr/>
+        </p:nvSpPr>
+        <p:spPr>
+          <a:xfrm>
+            <a:off x="699391" y="1295642"/>
+            <a:ext cx="567731" cy="246221"/>
+          </a:xfrm>
+          <a:prstGeom prst="rect">
+            <a:avLst/>
+          </a:prstGeom>
+          <a:noFill/>
+        </p:spPr>
+        <p:txBody>
+          <a:bodyPr wrap="square" rtlCol="0">
+            <a:spAutoFit/>
+          </a:bodyPr>
+          <a:lstStyle/>
+          <a:p>
+            <a:pPr algn="ctr"/>
+            <a:r>
+              <a:rPr lang="de-DE" sz="1000" i="1" dirty="0">
+                <a:solidFill>
+                  <a:schemeClr val="tx1">
+                    <a:lumMod val="65000"/>
+                    <a:lumOff val="35000"/>
+                  </a:schemeClr>
+                </a:solidFill>
+                <a:latin typeface="CMU Serif" panose="02000603000000000000" pitchFamily="2" charset="0"/>
+                <a:ea typeface="CMU Serif" panose="02000603000000000000" pitchFamily="2" charset="0"/>
+                <a:cs typeface="CMU Serif" panose="02000603000000000000" pitchFamily="2" charset="0"/>
+              </a:rPr>
+              <a:t>R</a:t>
+            </a:r>
+            <a:endParaRPr lang="de-DE" sz="1000" baseline="-25000" dirty="0">
+              <a:solidFill>
+                <a:schemeClr val="tx1">
+                  <a:lumMod val="65000"/>
+                  <a:lumOff val="35000"/>
+                </a:schemeClr>
+              </a:solidFill>
+              <a:latin typeface="CMU Serif" panose="02000603000000000000" pitchFamily="2" charset="0"/>
+              <a:ea typeface="CMU Serif" panose="02000603000000000000" pitchFamily="2" charset="0"/>
+              <a:cs typeface="CMU Serif" panose="02000603000000000000" pitchFamily="2" charset="0"/>
+            </a:endParaRPr>
+          </a:p>
+        </p:txBody>
+      </p:sp>
+      <p:sp>
+        <p:nvSpPr>
+          <p:cNvPr id="34" name="Textfeld 33">
+            <a:extLst>
+              <a:ext uri="{FF2B5EF4-FFF2-40B4-BE49-F238E27FC236}">
+                <a16:creationId xmlns:a16="http://schemas.microsoft.com/office/drawing/2014/main" id="{C4D4D271-BD3D-6F09-8AB0-D6754B3D18AA}"/>
+              </a:ext>
+            </a:extLst>
+          </p:cNvPr>
+          <p:cNvSpPr txBox="1"/>
+          <p:nvPr/>
+        </p:nvSpPr>
+        <p:spPr>
+          <a:xfrm>
+            <a:off x="1557741" y="1266280"/>
+            <a:ext cx="567731" cy="246221"/>
+          </a:xfrm>
+          <a:prstGeom prst="rect">
+            <a:avLst/>
+          </a:prstGeom>
+          <a:noFill/>
+        </p:spPr>
+        <p:txBody>
+          <a:bodyPr wrap="square" rtlCol="0">
+            <a:spAutoFit/>
+          </a:bodyPr>
+          <a:lstStyle/>
+          <a:p>
+            <a:pPr algn="ctr"/>
+            <a:r>
+              <a:rPr lang="de-DE" sz="1000" i="1" dirty="0">
+                <a:solidFill>
+                  <a:schemeClr val="tx1">
+                    <a:lumMod val="65000"/>
+                    <a:lumOff val="35000"/>
+                  </a:schemeClr>
+                </a:solidFill>
+                <a:latin typeface="CMU Serif" panose="02000603000000000000" pitchFamily="2" charset="0"/>
+                <a:ea typeface="CMU Serif" panose="02000603000000000000" pitchFamily="2" charset="0"/>
+                <a:cs typeface="CMU Serif" panose="02000603000000000000" pitchFamily="2" charset="0"/>
+              </a:rPr>
+              <a:t>Z</a:t>
+            </a:r>
+            <a:endParaRPr lang="de-DE" sz="1000" baseline="-25000" dirty="0">
+              <a:solidFill>
+                <a:schemeClr val="tx1">
+                  <a:lumMod val="65000"/>
+                  <a:lumOff val="35000"/>
+                </a:schemeClr>
+              </a:solidFill>
+              <a:latin typeface="CMU Serif" panose="02000603000000000000" pitchFamily="2" charset="0"/>
+              <a:ea typeface="CMU Serif" panose="02000603000000000000" pitchFamily="2" charset="0"/>
+              <a:cs typeface="CMU Serif" panose="02000603000000000000" pitchFamily="2" charset="0"/>
+            </a:endParaRPr>
+          </a:p>
+        </p:txBody>
+      </p:sp>
+      <p:sp>
+        <p:nvSpPr>
+          <p:cNvPr id="35" name="Textfeld 34">
+            <a:extLst>
+              <a:ext uri="{FF2B5EF4-FFF2-40B4-BE49-F238E27FC236}">
+                <a16:creationId xmlns:a16="http://schemas.microsoft.com/office/drawing/2014/main" id="{FED82A6D-1701-8934-E707-4AD6675347FF}"/>
+              </a:ext>
+            </a:extLst>
+          </p:cNvPr>
+          <p:cNvSpPr txBox="1"/>
+          <p:nvPr/>
+        </p:nvSpPr>
+        <p:spPr>
+          <a:xfrm>
+            <a:off x="1188701" y="1371235"/>
+            <a:ext cx="518786" cy="261610"/>
+          </a:xfrm>
+          <a:prstGeom prst="rect">
+            <a:avLst/>
+          </a:prstGeom>
+          <a:noFill/>
+        </p:spPr>
+        <p:txBody>
+          <a:bodyPr wrap="square" rtlCol="0">
+            <a:spAutoFit/>
+          </a:bodyPr>
+          <a:lstStyle/>
+          <a:p>
+            <a:pPr algn="ctr"/>
+            <a:r>
+              <a:rPr lang="de-DE" sz="1100" i="1" dirty="0">
+                <a:solidFill>
+                  <a:schemeClr val="accent2">
+                    <a:lumMod val="75000"/>
+                  </a:schemeClr>
+                </a:solidFill>
+                <a:latin typeface="Latin Modern Math" panose="02000503000000000000" pitchFamily="50" charset="0"/>
+                <a:ea typeface="Latin Modern Math" panose="02000503000000000000" pitchFamily="50" charset="0"/>
+                <a:cs typeface="CMU Serif" panose="02000603000000000000" pitchFamily="2" charset="0"/>
+              </a:rPr>
+              <a:t>φ</a:t>
+            </a:r>
+            <a:endParaRPr lang="de-DE" sz="1100" baseline="-25000" dirty="0">
+              <a:solidFill>
+                <a:schemeClr val="accent2">
+                  <a:lumMod val="75000"/>
+                </a:schemeClr>
+              </a:solidFill>
+              <a:latin typeface="CMU Serif" panose="02000603000000000000" pitchFamily="2" charset="0"/>
+              <a:ea typeface="CMU Serif" panose="02000603000000000000" pitchFamily="2" charset="0"/>
+              <a:cs typeface="CMU Serif" panose="02000603000000000000" pitchFamily="2" charset="0"/>
+            </a:endParaRPr>
+          </a:p>
+        </p:txBody>
+      </p:sp>
+      <p:sp>
+        <p:nvSpPr>
+          <p:cNvPr id="38" name="Textfeld 37">
+            <a:extLst>
+              <a:ext uri="{FF2B5EF4-FFF2-40B4-BE49-F238E27FC236}">
+                <a16:creationId xmlns:a16="http://schemas.microsoft.com/office/drawing/2014/main" id="{E205B4EE-ACFD-A5B2-7E9C-DF917F8B567E}"/>
+              </a:ext>
+            </a:extLst>
+          </p:cNvPr>
+          <p:cNvSpPr txBox="1"/>
+          <p:nvPr/>
+        </p:nvSpPr>
+        <p:spPr>
+          <a:xfrm>
+            <a:off x="1254580" y="1895604"/>
+            <a:ext cx="518786" cy="261610"/>
+          </a:xfrm>
+          <a:prstGeom prst="rect">
+            <a:avLst/>
+          </a:prstGeom>
+          <a:noFill/>
+        </p:spPr>
+        <p:txBody>
+          <a:bodyPr wrap="square" rtlCol="0">
+            <a:spAutoFit/>
+          </a:bodyPr>
+          <a:lstStyle/>
+          <a:p>
+            <a:pPr algn="ctr"/>
+            <a:r>
+              <a:rPr lang="de-DE" sz="1100" i="1" dirty="0" err="1">
+                <a:solidFill>
+                  <a:schemeClr val="accent6">
+                    <a:lumMod val="75000"/>
+                  </a:schemeClr>
+                </a:solidFill>
+                <a:latin typeface="Latin Modern Math" panose="02000503000000000000" pitchFamily="50" charset="0"/>
+                <a:ea typeface="Latin Modern Math" panose="02000503000000000000" pitchFamily="50" charset="0"/>
+                <a:cs typeface="CMU Serif" panose="02000603000000000000" pitchFamily="2" charset="0"/>
+              </a:rPr>
+              <a:t>φ</a:t>
+            </a:r>
+            <a:r>
+              <a:rPr lang="de-DE" sz="1100" baseline="-25000" dirty="0" err="1">
+                <a:solidFill>
+                  <a:schemeClr val="accent6">
+                    <a:lumMod val="75000"/>
+                  </a:schemeClr>
+                </a:solidFill>
+                <a:latin typeface="CMU Serif" panose="02000603000000000000" pitchFamily="2" charset="0"/>
+                <a:ea typeface="CMU Serif" panose="02000603000000000000" pitchFamily="2" charset="0"/>
+                <a:cs typeface="CMU Serif" panose="02000603000000000000" pitchFamily="2" charset="0"/>
+              </a:rPr>
+              <a:t>L</a:t>
+            </a:r>
+            <a:endParaRPr lang="de-DE" sz="1100" baseline="-25000" dirty="0">
+              <a:solidFill>
+                <a:schemeClr val="accent6">
+                  <a:lumMod val="75000"/>
+                </a:schemeClr>
+              </a:solidFill>
+              <a:latin typeface="CMU Serif" panose="02000603000000000000" pitchFamily="2" charset="0"/>
+              <a:ea typeface="CMU Serif" panose="02000603000000000000" pitchFamily="2" charset="0"/>
+              <a:cs typeface="CMU Serif" panose="02000603000000000000" pitchFamily="2" charset="0"/>
+            </a:endParaRPr>
+          </a:p>
+        </p:txBody>
+      </p:sp>
+      <p:sp>
+        <p:nvSpPr>
+          <p:cNvPr id="39" name="Textfeld 38">
+            <a:extLst>
+              <a:ext uri="{FF2B5EF4-FFF2-40B4-BE49-F238E27FC236}">
+                <a16:creationId xmlns:a16="http://schemas.microsoft.com/office/drawing/2014/main" id="{E16EBB1A-38EF-D773-BBC0-3B73EF261BD0}"/>
+              </a:ext>
+            </a:extLst>
+          </p:cNvPr>
+          <p:cNvSpPr txBox="1"/>
+          <p:nvPr/>
+        </p:nvSpPr>
+        <p:spPr>
+          <a:xfrm>
+            <a:off x="1509215" y="2200478"/>
+            <a:ext cx="518786" cy="261610"/>
+          </a:xfrm>
+          <a:prstGeom prst="rect">
+            <a:avLst/>
+          </a:prstGeom>
+          <a:noFill/>
+        </p:spPr>
+        <p:txBody>
+          <a:bodyPr wrap="square" rtlCol="0">
+            <a:spAutoFit/>
+          </a:bodyPr>
+          <a:lstStyle/>
+          <a:p>
+            <a:pPr algn="ctr"/>
+            <a:r>
+              <a:rPr lang="de-DE" sz="1100" i="1" dirty="0">
+                <a:solidFill>
+                  <a:schemeClr val="accent5"/>
+                </a:solidFill>
+                <a:latin typeface="Latin Modern Math" panose="02000503000000000000" pitchFamily="50" charset="0"/>
+                <a:ea typeface="Latin Modern Math" panose="02000503000000000000" pitchFamily="50" charset="0"/>
+                <a:cs typeface="CMU Serif" panose="02000603000000000000" pitchFamily="2" charset="0"/>
+              </a:rPr>
+              <a:t>ω </a:t>
+            </a:r>
+            <a:r>
+              <a:rPr lang="de-DE" sz="400" dirty="0">
+                <a:solidFill>
+                  <a:schemeClr val="accent5"/>
+                </a:solidFill>
+                <a:latin typeface="Latin Modern Math" panose="02000503000000000000" pitchFamily="50" charset="0"/>
+                <a:ea typeface="Latin Modern Math" panose="02000503000000000000" pitchFamily="50" charset="0"/>
+                <a:cs typeface="CMU Serif" panose="02000603000000000000" pitchFamily="2" charset="0"/>
+              </a:rPr>
+              <a:t>∙</a:t>
+            </a:r>
+            <a:r>
+              <a:rPr lang="de-DE" sz="1100" i="1" dirty="0">
+                <a:solidFill>
+                  <a:schemeClr val="accent5"/>
+                </a:solidFill>
+                <a:latin typeface="Latin Modern Math" panose="02000503000000000000" pitchFamily="50" charset="0"/>
+                <a:ea typeface="Latin Modern Math" panose="02000503000000000000" pitchFamily="50" charset="0"/>
+                <a:cs typeface="CMU Serif" panose="02000603000000000000" pitchFamily="2" charset="0"/>
+              </a:rPr>
+              <a:t> </a:t>
+            </a:r>
+            <a:r>
+              <a:rPr lang="de-DE" sz="1100" i="1" dirty="0">
+                <a:solidFill>
+                  <a:schemeClr val="accent5"/>
+                </a:solidFill>
+                <a:latin typeface="CMU Serif" panose="02000603000000000000" pitchFamily="2" charset="0"/>
+                <a:ea typeface="CMU Serif" panose="02000603000000000000" pitchFamily="2" charset="0"/>
+                <a:cs typeface="CMU Serif" panose="02000603000000000000" pitchFamily="2" charset="0"/>
+              </a:rPr>
+              <a:t>t</a:t>
+            </a:r>
+            <a:endParaRPr lang="de-DE" sz="1100" baseline="-25000" dirty="0">
+              <a:solidFill>
+                <a:schemeClr val="accent5"/>
+              </a:solidFill>
+              <a:latin typeface="CMU Serif" panose="02000603000000000000" pitchFamily="2" charset="0"/>
+              <a:ea typeface="CMU Serif" panose="02000603000000000000" pitchFamily="2" charset="0"/>
+              <a:cs typeface="CMU Serif" panose="02000603000000000000" pitchFamily="2" charset="0"/>
+            </a:endParaRPr>
+          </a:p>
+        </p:txBody>
+      </p:sp>
+      <p:cxnSp>
+        <p:nvCxnSpPr>
+          <p:cNvPr id="17" name="Gerade Verbindung mit Pfeil 16">
+            <a:extLst>
+              <a:ext uri="{FF2B5EF4-FFF2-40B4-BE49-F238E27FC236}">
+                <a16:creationId xmlns:a16="http://schemas.microsoft.com/office/drawing/2014/main" id="{5FCAA144-654C-C117-6853-65EC22E22931}"/>
+              </a:ext>
+            </a:extLst>
+          </p:cNvPr>
+          <p:cNvCxnSpPr>
+            <a:cxnSpLocks/>
+          </p:cNvCxnSpPr>
+          <p:nvPr/>
+        </p:nvCxnSpPr>
+        <p:spPr>
+          <a:xfrm flipV="1">
+            <a:off x="1333628" y="1232535"/>
+            <a:ext cx="342772" cy="965506"/>
+          </a:xfrm>
+          <a:prstGeom prst="straightConnector1">
+            <a:avLst/>
+          </a:prstGeom>
+          <a:ln cap="rnd">
+            <a:solidFill>
+              <a:schemeClr val="tx1">
+                <a:lumMod val="65000"/>
+                <a:lumOff val="35000"/>
+              </a:schemeClr>
+            </a:solidFill>
+            <a:round/>
+            <a:tailEnd type="triangle" w="med" len="med"/>
+          </a:ln>
+        </p:spPr>
+        <p:style>
+          <a:lnRef idx="2">
+            <a:schemeClr val="accent1"/>
+          </a:lnRef>
+          <a:fillRef idx="0">
+            <a:schemeClr val="accent1"/>
+          </a:fillRef>
+          <a:effectRef idx="1">
+            <a:schemeClr val="accent1"/>
+          </a:effectRef>
+          <a:fontRef idx="minor">
+            <a:schemeClr val="tx1"/>
+          </a:fontRef>
+        </p:style>
+      </p:cxnSp>
+      <p:cxnSp>
+        <p:nvCxnSpPr>
+          <p:cNvPr id="5" name="Gerade Verbindung mit Pfeil 4">
+            <a:extLst>
+              <a:ext uri="{FF2B5EF4-FFF2-40B4-BE49-F238E27FC236}">
+                <a16:creationId xmlns:a16="http://schemas.microsoft.com/office/drawing/2014/main" id="{8732636D-46C8-AAF1-C162-6D1831F52D51}"/>
+              </a:ext>
+            </a:extLst>
+          </p:cNvPr>
+          <p:cNvCxnSpPr>
+            <a:cxnSpLocks/>
+          </p:cNvCxnSpPr>
+          <p:nvPr/>
+        </p:nvCxnSpPr>
+        <p:spPr>
+          <a:xfrm flipV="1">
+            <a:off x="1333630" y="1173167"/>
+            <a:ext cx="0" cy="1254116"/>
+          </a:xfrm>
+          <a:prstGeom prst="straightConnector1">
+            <a:avLst/>
+          </a:prstGeom>
+          <a:ln cap="rnd">
+            <a:solidFill>
+              <a:schemeClr val="tx1"/>
+            </a:solidFill>
+            <a:round/>
+            <a:tailEnd type="triangle" w="med" len="med"/>
+          </a:ln>
+        </p:spPr>
+        <p:style>
+          <a:lnRef idx="2">
+            <a:schemeClr val="accent1"/>
+          </a:lnRef>
+          <a:fillRef idx="0">
+            <a:schemeClr val="accent1"/>
+          </a:fillRef>
+          <a:effectRef idx="1">
+            <a:schemeClr val="accent1"/>
+          </a:effectRef>
+          <a:fontRef idx="minor">
+            <a:schemeClr val="tx1"/>
+          </a:fontRef>
+        </p:style>
+      </p:cxnSp>
+      <p:cxnSp>
+        <p:nvCxnSpPr>
+          <p:cNvPr id="6" name="Gerade Verbindung mit Pfeil 5">
+            <a:extLst>
+              <a:ext uri="{FF2B5EF4-FFF2-40B4-BE49-F238E27FC236}">
+                <a16:creationId xmlns:a16="http://schemas.microsoft.com/office/drawing/2014/main" id="{390D3F26-B1FD-01A8-CEF4-B259C8597E12}"/>
+              </a:ext>
+            </a:extLst>
+          </p:cNvPr>
+          <p:cNvCxnSpPr>
+            <a:cxnSpLocks/>
+          </p:cNvCxnSpPr>
+          <p:nvPr/>
+        </p:nvCxnSpPr>
+        <p:spPr>
+          <a:xfrm>
+            <a:off x="1124941" y="2201867"/>
+            <a:ext cx="1242999" cy="0"/>
+          </a:xfrm>
+          <a:prstGeom prst="straightConnector1">
+            <a:avLst/>
+          </a:prstGeom>
+          <a:ln cap="rnd">
+            <a:solidFill>
+              <a:schemeClr val="tx1"/>
+            </a:solidFill>
+            <a:round/>
+            <a:tailEnd type="triangle" w="med" len="med"/>
+          </a:ln>
+        </p:spPr>
+        <p:style>
+          <a:lnRef idx="2">
+            <a:schemeClr val="accent1"/>
+          </a:lnRef>
+          <a:fillRef idx="0">
+            <a:schemeClr val="accent1"/>
+          </a:fillRef>
+          <a:effectRef idx="1">
+            <a:schemeClr val="accent1"/>
+          </a:effectRef>
+          <a:fontRef idx="minor">
+            <a:schemeClr val="tx1"/>
+          </a:fontRef>
+        </p:style>
+      </p:cxnSp>
+      <p:sp>
+        <p:nvSpPr>
+          <p:cNvPr id="2" name="Textfeld 1">
+            <a:extLst>
+              <a:ext uri="{FF2B5EF4-FFF2-40B4-BE49-F238E27FC236}">
+                <a16:creationId xmlns:a16="http://schemas.microsoft.com/office/drawing/2014/main" id="{63014C64-623E-6D2D-103A-805BB5E72B9B}"/>
+              </a:ext>
+            </a:extLst>
+          </p:cNvPr>
+          <p:cNvSpPr txBox="1"/>
+          <p:nvPr/>
+        </p:nvSpPr>
+        <p:spPr>
+          <a:xfrm>
+            <a:off x="1760161" y="1812485"/>
+            <a:ext cx="567731" cy="246221"/>
+          </a:xfrm>
+          <a:prstGeom prst="rect">
+            <a:avLst/>
+          </a:prstGeom>
+          <a:noFill/>
+        </p:spPr>
+        <p:txBody>
+          <a:bodyPr wrap="square" rtlCol="0">
+            <a:spAutoFit/>
+          </a:bodyPr>
+          <a:lstStyle/>
+          <a:p>
+            <a:pPr algn="ctr"/>
+            <a:r>
+              <a:rPr lang="de-DE" sz="1000" dirty="0">
+                <a:solidFill>
+                  <a:schemeClr val="tx1">
+                    <a:lumMod val="65000"/>
+                    <a:lumOff val="35000"/>
+                  </a:schemeClr>
+                </a:solidFill>
+                <a:latin typeface="CMU Serif" panose="02000603000000000000" pitchFamily="2" charset="0"/>
+                <a:ea typeface="CMU Serif" panose="02000603000000000000" pitchFamily="2" charset="0"/>
+                <a:cs typeface="CMU Serif" panose="02000603000000000000" pitchFamily="2" charset="0"/>
+              </a:rPr>
+              <a:t>1</a:t>
+            </a:r>
+            <a:endParaRPr lang="de-DE" sz="1000" baseline="-25000" dirty="0">
+              <a:solidFill>
+                <a:schemeClr val="tx1">
+                  <a:lumMod val="65000"/>
+                  <a:lumOff val="35000"/>
+                </a:schemeClr>
+              </a:solidFill>
+              <a:latin typeface="CMU Serif" panose="02000603000000000000" pitchFamily="2" charset="0"/>
+              <a:ea typeface="CMU Serif" panose="02000603000000000000" pitchFamily="2" charset="0"/>
+              <a:cs typeface="CMU Serif" panose="02000603000000000000" pitchFamily="2" charset="0"/>
+            </a:endParaRPr>
+          </a:p>
+        </p:txBody>
+      </p:sp>
+      <p:sp>
+        <p:nvSpPr>
+          <p:cNvPr id="3" name="Textfeld 2">
+            <a:extLst>
+              <a:ext uri="{FF2B5EF4-FFF2-40B4-BE49-F238E27FC236}">
+                <a16:creationId xmlns:a16="http://schemas.microsoft.com/office/drawing/2014/main" id="{FE2A84DA-8B31-514D-498E-B67D4A50256D}"/>
+              </a:ext>
+            </a:extLst>
+          </p:cNvPr>
+          <p:cNvSpPr txBox="1"/>
+          <p:nvPr/>
+        </p:nvSpPr>
+        <p:spPr>
+          <a:xfrm>
+            <a:off x="709819" y="1145072"/>
+            <a:ext cx="567731" cy="246221"/>
+          </a:xfrm>
+          <a:prstGeom prst="rect">
+            <a:avLst/>
+          </a:prstGeom>
+          <a:noFill/>
+        </p:spPr>
+        <p:txBody>
+          <a:bodyPr wrap="square" rtlCol="0">
+            <a:spAutoFit/>
+          </a:bodyPr>
+          <a:lstStyle/>
+          <a:p>
+            <a:pPr algn="ctr"/>
+            <a:r>
+              <a:rPr lang="de-DE" sz="1000" dirty="0">
+                <a:solidFill>
+                  <a:schemeClr val="tx1">
+                    <a:lumMod val="65000"/>
+                    <a:lumOff val="35000"/>
+                  </a:schemeClr>
+                </a:solidFill>
+                <a:latin typeface="CMU Serif" panose="02000603000000000000" pitchFamily="2" charset="0"/>
+                <a:ea typeface="CMU Serif" panose="02000603000000000000" pitchFamily="2" charset="0"/>
+                <a:cs typeface="CMU Serif" panose="02000603000000000000" pitchFamily="2" charset="0"/>
+              </a:rPr>
+              <a:t>1</a:t>
+            </a:r>
+            <a:endParaRPr lang="de-DE" sz="1000" baseline="-25000" dirty="0">
+              <a:solidFill>
+                <a:schemeClr val="tx1">
+                  <a:lumMod val="65000"/>
+                  <a:lumOff val="35000"/>
+                </a:schemeClr>
+              </a:solidFill>
+              <a:latin typeface="CMU Serif" panose="02000603000000000000" pitchFamily="2" charset="0"/>
+              <a:ea typeface="CMU Serif" panose="02000603000000000000" pitchFamily="2" charset="0"/>
+              <a:cs typeface="CMU Serif" panose="02000603000000000000" pitchFamily="2" charset="0"/>
+            </a:endParaRPr>
+          </a:p>
+        </p:txBody>
+      </p:sp>
+      <p:sp>
+        <p:nvSpPr>
+          <p:cNvPr id="4" name="Textfeld 3">
+            <a:extLst>
+              <a:ext uri="{FF2B5EF4-FFF2-40B4-BE49-F238E27FC236}">
+                <a16:creationId xmlns:a16="http://schemas.microsoft.com/office/drawing/2014/main" id="{6CD43D44-CB25-1B48-F973-8D111B2CC036}"/>
+              </a:ext>
+            </a:extLst>
+          </p:cNvPr>
+          <p:cNvSpPr txBox="1"/>
+          <p:nvPr/>
+        </p:nvSpPr>
+        <p:spPr>
+          <a:xfrm>
+            <a:off x="1568169" y="1115710"/>
+            <a:ext cx="567731" cy="246221"/>
+          </a:xfrm>
+          <a:prstGeom prst="rect">
+            <a:avLst/>
+          </a:prstGeom>
+          <a:noFill/>
+        </p:spPr>
+        <p:txBody>
+          <a:bodyPr wrap="square" rtlCol="0">
+            <a:spAutoFit/>
+          </a:bodyPr>
+          <a:lstStyle/>
+          <a:p>
+            <a:pPr algn="ctr"/>
+            <a:r>
+              <a:rPr lang="de-DE" sz="1000" dirty="0">
+                <a:solidFill>
+                  <a:schemeClr val="tx1">
+                    <a:lumMod val="65000"/>
+                    <a:lumOff val="35000"/>
+                  </a:schemeClr>
+                </a:solidFill>
+                <a:latin typeface="CMU Serif" panose="02000603000000000000" pitchFamily="2" charset="0"/>
+                <a:ea typeface="CMU Serif" panose="02000603000000000000" pitchFamily="2" charset="0"/>
+                <a:cs typeface="CMU Serif" panose="02000603000000000000" pitchFamily="2" charset="0"/>
+              </a:rPr>
+              <a:t>1</a:t>
+            </a:r>
+            <a:endParaRPr lang="de-DE" sz="1000" baseline="-25000" dirty="0">
+              <a:solidFill>
+                <a:schemeClr val="tx1">
+                  <a:lumMod val="65000"/>
+                  <a:lumOff val="35000"/>
+                </a:schemeClr>
+              </a:solidFill>
+              <a:latin typeface="CMU Serif" panose="02000603000000000000" pitchFamily="2" charset="0"/>
+              <a:ea typeface="CMU Serif" panose="02000603000000000000" pitchFamily="2" charset="0"/>
+              <a:cs typeface="CMU Serif" panose="02000603000000000000" pitchFamily="2" charset="0"/>
+            </a:endParaRPr>
+          </a:p>
+        </p:txBody>
+      </p:sp>
+      <p:cxnSp>
+        <p:nvCxnSpPr>
+          <p:cNvPr id="9" name="Gerader Verbinder 8">
+            <a:extLst>
+              <a:ext uri="{FF2B5EF4-FFF2-40B4-BE49-F238E27FC236}">
+                <a16:creationId xmlns:a16="http://schemas.microsoft.com/office/drawing/2014/main" id="{16601A21-9688-B262-A325-40AD529F9A4F}"/>
+              </a:ext>
+            </a:extLst>
+          </p:cNvPr>
+          <p:cNvCxnSpPr>
+            <a:cxnSpLocks/>
+          </p:cNvCxnSpPr>
+          <p:nvPr/>
+        </p:nvCxnSpPr>
+        <p:spPr>
+          <a:xfrm>
+            <a:off x="928827" y="1331595"/>
+            <a:ext cx="124097" cy="0"/>
+          </a:xfrm>
+          <a:prstGeom prst="line">
+            <a:avLst/>
+          </a:prstGeom>
+          <a:ln w="6350">
+            <a:solidFill>
+              <a:schemeClr val="tx1">
+                <a:lumMod val="65000"/>
+                <a:lumOff val="35000"/>
+              </a:schemeClr>
+            </a:solidFill>
+          </a:ln>
+        </p:spPr>
+        <p:style>
+          <a:lnRef idx="2">
+            <a:schemeClr val="accent1"/>
+          </a:lnRef>
+          <a:fillRef idx="0">
+            <a:schemeClr val="accent1"/>
+          </a:fillRef>
+          <a:effectRef idx="1">
+            <a:schemeClr val="accent1"/>
+          </a:effectRef>
+          <a:fontRef idx="minor">
+            <a:schemeClr val="tx1"/>
+          </a:fontRef>
+        </p:style>
+      </p:cxnSp>
+      <p:cxnSp>
+        <p:nvCxnSpPr>
+          <p:cNvPr id="11" name="Gerader Verbinder 10">
+            <a:extLst>
+              <a:ext uri="{FF2B5EF4-FFF2-40B4-BE49-F238E27FC236}">
+                <a16:creationId xmlns:a16="http://schemas.microsoft.com/office/drawing/2014/main" id="{58BA2ED3-F08E-4CC3-3EE0-E059C768EACF}"/>
+              </a:ext>
+            </a:extLst>
+          </p:cNvPr>
+          <p:cNvCxnSpPr>
+            <a:cxnSpLocks/>
+          </p:cNvCxnSpPr>
+          <p:nvPr/>
+        </p:nvCxnSpPr>
+        <p:spPr>
+          <a:xfrm>
+            <a:off x="1790987" y="1301118"/>
+            <a:ext cx="124097" cy="0"/>
+          </a:xfrm>
+          <a:prstGeom prst="line">
+            <a:avLst/>
+          </a:prstGeom>
+          <a:ln w="6350">
+            <a:solidFill>
+              <a:schemeClr val="tx1">
+                <a:lumMod val="65000"/>
+                <a:lumOff val="35000"/>
+              </a:schemeClr>
+            </a:solidFill>
+          </a:ln>
+        </p:spPr>
+        <p:style>
+          <a:lnRef idx="2">
+            <a:schemeClr val="accent1"/>
+          </a:lnRef>
+          <a:fillRef idx="0">
+            <a:schemeClr val="accent1"/>
+          </a:fillRef>
+          <a:effectRef idx="1">
+            <a:schemeClr val="accent1"/>
+          </a:effectRef>
+          <a:fontRef idx="minor">
+            <a:schemeClr val="tx1"/>
+          </a:fontRef>
+        </p:style>
+      </p:cxnSp>
+      <p:cxnSp>
+        <p:nvCxnSpPr>
+          <p:cNvPr id="12" name="Gerader Verbinder 11">
+            <a:extLst>
+              <a:ext uri="{FF2B5EF4-FFF2-40B4-BE49-F238E27FC236}">
+                <a16:creationId xmlns:a16="http://schemas.microsoft.com/office/drawing/2014/main" id="{401A93AA-5CA3-5FDA-D12D-6C174E21D298}"/>
+              </a:ext>
+            </a:extLst>
+          </p:cNvPr>
+          <p:cNvCxnSpPr>
+            <a:cxnSpLocks/>
+          </p:cNvCxnSpPr>
+          <p:nvPr/>
+        </p:nvCxnSpPr>
+        <p:spPr>
+          <a:xfrm>
+            <a:off x="1966019" y="2001882"/>
+            <a:ext cx="153364" cy="0"/>
+          </a:xfrm>
+          <a:prstGeom prst="line">
+            <a:avLst/>
+          </a:prstGeom>
+          <a:ln w="6350">
+            <a:solidFill>
+              <a:schemeClr val="tx1">
+                <a:lumMod val="65000"/>
+                <a:lumOff val="35000"/>
+              </a:schemeClr>
+            </a:solidFill>
+          </a:ln>
+        </p:spPr>
+        <p:style>
+          <a:lnRef idx="2">
+            <a:schemeClr val="accent1"/>
+          </a:lnRef>
+          <a:fillRef idx="0">
+            <a:schemeClr val="accent1"/>
+          </a:fillRef>
+          <a:effectRef idx="1">
+            <a:schemeClr val="accent1"/>
+          </a:effectRef>
+          <a:fontRef idx="minor">
+            <a:schemeClr val="tx1"/>
+          </a:fontRef>
+        </p:style>
+      </p:cxnSp>
+    </p:spTree>
+    <p:extLst>
+      <p:ext uri="{BB962C8B-B14F-4D97-AF65-F5344CB8AC3E}">
+        <p14:creationId xmlns:p14="http://schemas.microsoft.com/office/powerpoint/2010/main" val="2594786348"/>
+      </p:ext>
+    </p:extLst>
+  </p:cSld>
+  <p:clrMapOvr>
+    <a:masterClrMapping/>
+  </p:clrMapOvr>
+</p:sld>
+</file>
+
+<file path=ppt/slides/slide18.xml><?xml version="1.0" encoding="utf-8"?>
+<p:sld xmlns:a="http://schemas.openxmlformats.org/drawingml/2006/main" xmlns:r="http://schemas.openxmlformats.org/officeDocument/2006/relationships" xmlns:p="http://schemas.openxmlformats.org/presentationml/2006/main">
+  <p:cSld>
+    <p:spTree>
+      <p:nvGrpSpPr>
+        <p:cNvPr id="1" name="">
+          <a:extLst>
+            <a:ext uri="{FF2B5EF4-FFF2-40B4-BE49-F238E27FC236}">
+              <a16:creationId xmlns:a16="http://schemas.microsoft.com/office/drawing/2014/main" id="{5ED21D99-6160-1563-1EEA-1A5B07111611}"/>
+            </a:ext>
+          </a:extLst>
+        </p:cNvPr>
+        <p:cNvGrpSpPr/>
+        <p:nvPr/>
+      </p:nvGrpSpPr>
+      <p:grpSpPr>
+        <a:xfrm>
+          <a:off x="0" y="0"/>
+          <a:ext cx="0" cy="0"/>
+          <a:chOff x="0" y="0"/>
+          <a:chExt cx="0" cy="0"/>
+        </a:xfrm>
+      </p:grpSpPr>
+      <p:sp>
+        <p:nvSpPr>
+          <p:cNvPr id="36" name="Bogen 35">
+            <a:extLst>
+              <a:ext uri="{FF2B5EF4-FFF2-40B4-BE49-F238E27FC236}">
+                <a16:creationId xmlns:a16="http://schemas.microsoft.com/office/drawing/2014/main" id="{0B8EE819-9388-6A83-DD0F-D790CE9DA3ED}"/>
+              </a:ext>
+            </a:extLst>
+          </p:cNvPr>
+          <p:cNvSpPr/>
+          <p:nvPr/>
+        </p:nvSpPr>
+        <p:spPr>
+          <a:xfrm>
+            <a:off x="957943" y="1825175"/>
+            <a:ext cx="749544" cy="749542"/>
+          </a:xfrm>
+          <a:prstGeom prst="arc">
+            <a:avLst>
+              <a:gd name="adj1" fmla="val 15365455"/>
+              <a:gd name="adj2" fmla="val 20631686"/>
+            </a:avLst>
+          </a:prstGeom>
+          <a:ln cap="rnd">
+            <a:solidFill>
+              <a:schemeClr val="accent6">
+                <a:lumMod val="75000"/>
+              </a:schemeClr>
+            </a:solidFill>
+            <a:round/>
+            <a:headEnd type="none"/>
+            <a:tailEnd type="triangle"/>
+          </a:ln>
+        </p:spPr>
+        <p:style>
+          <a:lnRef idx="2">
+            <a:schemeClr val="accent1"/>
+          </a:lnRef>
+          <a:fillRef idx="0">
+            <a:schemeClr val="accent1"/>
+          </a:fillRef>
+          <a:effectRef idx="1">
+            <a:schemeClr val="accent1"/>
+          </a:effectRef>
+          <a:fontRef idx="minor">
+            <a:schemeClr val="tx1"/>
+          </a:fontRef>
+        </p:style>
+        <p:txBody>
+          <a:bodyPr rtlCol="0" anchor="ctr"/>
+          <a:lstStyle/>
+          <a:p>
+            <a:pPr algn="ctr"/>
+            <a:endParaRPr lang="de-DE" sz="2400" dirty="0"/>
+          </a:p>
+        </p:txBody>
+      </p:sp>
+      <p:sp>
+        <p:nvSpPr>
+          <p:cNvPr id="33" name="Bogen 32">
+            <a:extLst>
+              <a:ext uri="{FF2B5EF4-FFF2-40B4-BE49-F238E27FC236}">
+                <a16:creationId xmlns:a16="http://schemas.microsoft.com/office/drawing/2014/main" id="{785EE370-5DF3-8EE2-ECEA-AC30783C4E66}"/>
+              </a:ext>
+            </a:extLst>
+          </p:cNvPr>
+          <p:cNvSpPr/>
+          <p:nvPr/>
+        </p:nvSpPr>
+        <p:spPr>
+          <a:xfrm>
+            <a:off x="723382" y="1589699"/>
+            <a:ext cx="1220493" cy="1220493"/>
+          </a:xfrm>
+          <a:prstGeom prst="arc">
+            <a:avLst>
+              <a:gd name="adj1" fmla="val 15362795"/>
+              <a:gd name="adj2" fmla="val 17327976"/>
+            </a:avLst>
+          </a:prstGeom>
+          <a:ln cap="rnd">
+            <a:solidFill>
+              <a:schemeClr val="accent2">
+                <a:lumMod val="75000"/>
+              </a:schemeClr>
+            </a:solidFill>
+            <a:round/>
+            <a:headEnd type="triangle"/>
+          </a:ln>
+        </p:spPr>
+        <p:style>
+          <a:lnRef idx="2">
+            <a:schemeClr val="accent1"/>
+          </a:lnRef>
+          <a:fillRef idx="0">
+            <a:schemeClr val="accent1"/>
+          </a:fillRef>
+          <a:effectRef idx="1">
+            <a:schemeClr val="accent1"/>
+          </a:effectRef>
+          <a:fontRef idx="minor">
+            <a:schemeClr val="tx1"/>
+          </a:fontRef>
+        </p:style>
+        <p:txBody>
+          <a:bodyPr rtlCol="0" anchor="ctr"/>
+          <a:lstStyle/>
+          <a:p>
+            <a:pPr algn="ctr"/>
+            <a:endParaRPr lang="de-DE" sz="2400" dirty="0"/>
+          </a:p>
+        </p:txBody>
+      </p:sp>
+      <p:cxnSp>
+        <p:nvCxnSpPr>
+          <p:cNvPr id="15" name="Gerade Verbindung mit Pfeil 14">
+            <a:extLst>
+              <a:ext uri="{FF2B5EF4-FFF2-40B4-BE49-F238E27FC236}">
+                <a16:creationId xmlns:a16="http://schemas.microsoft.com/office/drawing/2014/main" id="{B811FC28-A9BE-54FD-3417-4FB51E1E2458}"/>
+              </a:ext>
+            </a:extLst>
+          </p:cNvPr>
+          <p:cNvCxnSpPr>
+            <a:cxnSpLocks/>
+          </p:cNvCxnSpPr>
+          <p:nvPr/>
+        </p:nvCxnSpPr>
+        <p:spPr>
+          <a:xfrm flipH="1" flipV="1">
+            <a:off x="1122699" y="1373148"/>
+            <a:ext cx="210929" cy="826806"/>
+          </a:xfrm>
+          <a:prstGeom prst="straightConnector1">
+            <a:avLst/>
+          </a:prstGeom>
+          <a:ln cap="rnd">
+            <a:solidFill>
+              <a:srgbClr val="086FBD"/>
+            </a:solidFill>
+            <a:round/>
+            <a:tailEnd type="triangle" w="med" len="med"/>
+          </a:ln>
+        </p:spPr>
+        <p:style>
+          <a:lnRef idx="2">
+            <a:schemeClr val="accent1"/>
+          </a:lnRef>
+          <a:fillRef idx="0">
+            <a:schemeClr val="accent1"/>
+          </a:fillRef>
+          <a:effectRef idx="1">
+            <a:schemeClr val="accent1"/>
+          </a:effectRef>
+          <a:fontRef idx="minor">
+            <a:schemeClr val="tx1"/>
+          </a:fontRef>
+        </p:style>
+      </p:cxnSp>
+      <p:sp>
+        <p:nvSpPr>
+          <p:cNvPr id="19" name="Bogen 18">
+            <a:extLst>
+              <a:ext uri="{FF2B5EF4-FFF2-40B4-BE49-F238E27FC236}">
+                <a16:creationId xmlns:a16="http://schemas.microsoft.com/office/drawing/2014/main" id="{F828FDE6-575E-59C3-EFE8-F53578E0AB14}"/>
+              </a:ext>
+            </a:extLst>
+          </p:cNvPr>
+          <p:cNvSpPr/>
+          <p:nvPr/>
+        </p:nvSpPr>
+        <p:spPr>
+          <a:xfrm>
+            <a:off x="880978" y="1749211"/>
+            <a:ext cx="905302" cy="905300"/>
+          </a:xfrm>
+          <a:prstGeom prst="arc">
+            <a:avLst>
+              <a:gd name="adj1" fmla="val 15357935"/>
+              <a:gd name="adj2" fmla="val 0"/>
+            </a:avLst>
+          </a:prstGeom>
+          <a:ln cap="rnd">
+            <a:solidFill>
+              <a:schemeClr val="accent5"/>
+            </a:solidFill>
+            <a:round/>
+            <a:headEnd type="triangle"/>
+          </a:ln>
+        </p:spPr>
+        <p:style>
+          <a:lnRef idx="2">
+            <a:schemeClr val="accent1"/>
+          </a:lnRef>
+          <a:fillRef idx="0">
+            <a:schemeClr val="accent1"/>
+          </a:fillRef>
+          <a:effectRef idx="1">
+            <a:schemeClr val="accent1"/>
+          </a:effectRef>
+          <a:fontRef idx="minor">
+            <a:schemeClr val="tx1"/>
+          </a:fontRef>
+        </p:style>
+        <p:txBody>
+          <a:bodyPr rtlCol="0" anchor="ctr"/>
+          <a:lstStyle/>
+          <a:p>
+            <a:pPr algn="ctr"/>
+            <a:endParaRPr lang="de-DE" sz="2400" dirty="0"/>
+          </a:p>
+        </p:txBody>
+      </p:sp>
+      <p:cxnSp>
+        <p:nvCxnSpPr>
+          <p:cNvPr id="8" name="Gerade Verbindung mit Pfeil 7">
+            <a:extLst>
+              <a:ext uri="{FF2B5EF4-FFF2-40B4-BE49-F238E27FC236}">
+                <a16:creationId xmlns:a16="http://schemas.microsoft.com/office/drawing/2014/main" id="{858D793E-FBB1-BC0F-8A4C-64FAF7915906}"/>
+              </a:ext>
+            </a:extLst>
+          </p:cNvPr>
+          <p:cNvCxnSpPr>
+            <a:cxnSpLocks/>
+          </p:cNvCxnSpPr>
+          <p:nvPr/>
+        </p:nvCxnSpPr>
+        <p:spPr>
+          <a:xfrm flipV="1">
+            <a:off x="1333377" y="2053590"/>
+            <a:ext cx="552579" cy="144451"/>
+          </a:xfrm>
+          <a:prstGeom prst="straightConnector1">
+            <a:avLst/>
+          </a:prstGeom>
+          <a:ln cap="rnd">
+            <a:solidFill>
+              <a:srgbClr val="086FBD"/>
+            </a:solidFill>
+            <a:round/>
+            <a:tailEnd type="triangle" w="med" len="med"/>
+          </a:ln>
+        </p:spPr>
+        <p:style>
+          <a:lnRef idx="2">
+            <a:schemeClr val="accent1"/>
+          </a:lnRef>
+          <a:fillRef idx="0">
+            <a:schemeClr val="accent1"/>
+          </a:fillRef>
+          <a:effectRef idx="1">
+            <a:schemeClr val="accent1"/>
+          </a:effectRef>
+          <a:fontRef idx="minor">
+            <a:schemeClr val="tx1"/>
+          </a:fontRef>
+        </p:style>
+      </p:cxnSp>
+      <p:cxnSp>
+        <p:nvCxnSpPr>
+          <p:cNvPr id="10" name="Gerade Verbindung mit Pfeil 9">
+            <a:extLst>
+              <a:ext uri="{FF2B5EF4-FFF2-40B4-BE49-F238E27FC236}">
+                <a16:creationId xmlns:a16="http://schemas.microsoft.com/office/drawing/2014/main" id="{07748AF6-CEA4-4173-8BD1-EA5077762D39}"/>
+              </a:ext>
+            </a:extLst>
+          </p:cNvPr>
+          <p:cNvCxnSpPr>
+            <a:cxnSpLocks/>
+          </p:cNvCxnSpPr>
+          <p:nvPr/>
+        </p:nvCxnSpPr>
+        <p:spPr>
+          <a:xfrm flipH="1" flipV="1">
+            <a:off x="1190820" y="1647825"/>
+            <a:ext cx="142809" cy="554042"/>
+          </a:xfrm>
+          <a:prstGeom prst="straightConnector1">
+            <a:avLst/>
+          </a:prstGeom>
+          <a:ln w="19050" cap="rnd">
+            <a:solidFill>
+              <a:srgbClr val="FF0000"/>
+            </a:solidFill>
+            <a:round/>
+            <a:tailEnd type="triangle" w="med" len="med"/>
+          </a:ln>
+        </p:spPr>
+        <p:style>
+          <a:lnRef idx="2">
+            <a:schemeClr val="accent1"/>
+          </a:lnRef>
+          <a:fillRef idx="0">
+            <a:schemeClr val="accent1"/>
+          </a:fillRef>
+          <a:effectRef idx="1">
+            <a:schemeClr val="accent1"/>
+          </a:effectRef>
+          <a:fontRef idx="minor">
+            <a:schemeClr val="tx1"/>
+          </a:fontRef>
+        </p:style>
+      </p:cxnSp>
+      <p:sp>
+        <p:nvSpPr>
+          <p:cNvPr id="13" name="Textfeld 12">
+            <a:extLst>
+              <a:ext uri="{FF2B5EF4-FFF2-40B4-BE49-F238E27FC236}">
+                <a16:creationId xmlns:a16="http://schemas.microsoft.com/office/drawing/2014/main" id="{4786C6C6-20AF-EEC7-C196-260D284BE69A}"/>
+              </a:ext>
+            </a:extLst>
+          </p:cNvPr>
+          <p:cNvSpPr txBox="1"/>
+          <p:nvPr/>
+        </p:nvSpPr>
+        <p:spPr>
+          <a:xfrm>
+            <a:off x="1773475" y="1852910"/>
+            <a:ext cx="567731" cy="307777"/>
+          </a:xfrm>
+          <a:prstGeom prst="rect">
+            <a:avLst/>
+          </a:prstGeom>
+          <a:noFill/>
+        </p:spPr>
+        <p:txBody>
+          <a:bodyPr wrap="square" rtlCol="0">
+            <a:spAutoFit/>
+          </a:bodyPr>
+          <a:lstStyle/>
+          <a:p>
+            <a:pPr algn="ctr"/>
+            <a:r>
+              <a:rPr lang="de-DE" sz="1400" i="1" dirty="0">
+                <a:solidFill>
+                  <a:srgbClr val="086FBD"/>
+                </a:solidFill>
+                <a:latin typeface="CMU Serif" panose="02000603000000000000" pitchFamily="2" charset="0"/>
+                <a:ea typeface="CMU Serif" panose="02000603000000000000" pitchFamily="2" charset="0"/>
+                <a:cs typeface="CMU Serif" panose="02000603000000000000" pitchFamily="2" charset="0"/>
+              </a:rPr>
+              <a:t>U</a:t>
+            </a:r>
+            <a:r>
+              <a:rPr lang="de-DE" sz="1400" baseline="-25000" dirty="0">
+                <a:solidFill>
+                  <a:srgbClr val="086FBD"/>
+                </a:solidFill>
+                <a:latin typeface="CMU Serif" panose="02000603000000000000" pitchFamily="2" charset="0"/>
+                <a:ea typeface="CMU Serif" panose="02000603000000000000" pitchFamily="2" charset="0"/>
+                <a:cs typeface="CMU Serif" panose="02000603000000000000" pitchFamily="2" charset="0"/>
+              </a:rPr>
+              <a:t>C</a:t>
+            </a:r>
+          </a:p>
+        </p:txBody>
+      </p:sp>
+      <p:sp>
+        <p:nvSpPr>
+          <p:cNvPr id="14" name="Textfeld 13">
+            <a:extLst>
+              <a:ext uri="{FF2B5EF4-FFF2-40B4-BE49-F238E27FC236}">
+                <a16:creationId xmlns:a16="http://schemas.microsoft.com/office/drawing/2014/main" id="{1ADC5430-0855-EC51-65D2-FB149E3720A6}"/>
+              </a:ext>
+            </a:extLst>
+          </p:cNvPr>
+          <p:cNvSpPr txBox="1"/>
+          <p:nvPr/>
+        </p:nvSpPr>
+        <p:spPr>
+          <a:xfrm>
+            <a:off x="814841" y="1816139"/>
+            <a:ext cx="518786" cy="307777"/>
+          </a:xfrm>
+          <a:prstGeom prst="rect">
+            <a:avLst/>
+          </a:prstGeom>
+          <a:noFill/>
+        </p:spPr>
+        <p:txBody>
+          <a:bodyPr wrap="square" rtlCol="0">
+            <a:spAutoFit/>
+          </a:bodyPr>
+          <a:lstStyle/>
+          <a:p>
+            <a:pPr algn="ctr"/>
+            <a:r>
+              <a:rPr lang="de-DE" sz="1400" i="1" dirty="0" err="1">
+                <a:solidFill>
+                  <a:srgbClr val="FF0000"/>
+                </a:solidFill>
+                <a:latin typeface="CMU Serif" panose="02000603000000000000" pitchFamily="2" charset="0"/>
+                <a:ea typeface="CMU Serif" panose="02000603000000000000" pitchFamily="2" charset="0"/>
+                <a:cs typeface="CMU Serif" panose="02000603000000000000" pitchFamily="2" charset="0"/>
+              </a:rPr>
+              <a:t>I</a:t>
+            </a:r>
+            <a:r>
+              <a:rPr lang="de-DE" sz="1400" baseline="-25000" dirty="0" err="1">
+                <a:solidFill>
+                  <a:srgbClr val="FF0000"/>
+                </a:solidFill>
+                <a:latin typeface="CMU Serif" panose="02000603000000000000" pitchFamily="2" charset="0"/>
+                <a:ea typeface="CMU Serif" panose="02000603000000000000" pitchFamily="2" charset="0"/>
+                <a:cs typeface="CMU Serif" panose="02000603000000000000" pitchFamily="2" charset="0"/>
+              </a:rPr>
+              <a:t>ges</a:t>
+            </a:r>
+            <a:endParaRPr lang="de-DE" sz="1400" baseline="-25000" dirty="0">
+              <a:solidFill>
+                <a:srgbClr val="FF0000"/>
+              </a:solidFill>
+              <a:latin typeface="CMU Serif" panose="02000603000000000000" pitchFamily="2" charset="0"/>
+              <a:ea typeface="CMU Serif" panose="02000603000000000000" pitchFamily="2" charset="0"/>
+              <a:cs typeface="CMU Serif" panose="02000603000000000000" pitchFamily="2" charset="0"/>
+            </a:endParaRPr>
+          </a:p>
+        </p:txBody>
+      </p:sp>
+      <p:cxnSp>
+        <p:nvCxnSpPr>
+          <p:cNvPr id="21" name="Gerader Verbinder 20">
+            <a:extLst>
+              <a:ext uri="{FF2B5EF4-FFF2-40B4-BE49-F238E27FC236}">
+                <a16:creationId xmlns:a16="http://schemas.microsoft.com/office/drawing/2014/main" id="{8263A085-1518-2F0D-408F-887A339EC5F5}"/>
+              </a:ext>
+            </a:extLst>
+          </p:cNvPr>
+          <p:cNvCxnSpPr>
+            <a:cxnSpLocks/>
+          </p:cNvCxnSpPr>
+          <p:nvPr/>
+        </p:nvCxnSpPr>
+        <p:spPr>
+          <a:xfrm flipH="1">
+            <a:off x="1123950" y="1234134"/>
+            <a:ext cx="552450" cy="143647"/>
+          </a:xfrm>
+          <a:prstGeom prst="line">
+            <a:avLst/>
+          </a:prstGeom>
+          <a:ln w="9525" cap="rnd">
+            <a:solidFill>
+              <a:srgbClr val="086FBD"/>
+            </a:solidFill>
+            <a:prstDash val="sysDash"/>
+            <a:round/>
+          </a:ln>
+        </p:spPr>
+        <p:style>
+          <a:lnRef idx="2">
+            <a:schemeClr val="accent1"/>
+          </a:lnRef>
+          <a:fillRef idx="0">
+            <a:schemeClr val="accent1"/>
+          </a:fillRef>
+          <a:effectRef idx="1">
+            <a:schemeClr val="accent1"/>
+          </a:effectRef>
+          <a:fontRef idx="minor">
+            <a:schemeClr val="tx1"/>
+          </a:fontRef>
+        </p:style>
+      </p:cxnSp>
+      <p:cxnSp>
+        <p:nvCxnSpPr>
+          <p:cNvPr id="26" name="Gerader Verbinder 25">
+            <a:extLst>
+              <a:ext uri="{FF2B5EF4-FFF2-40B4-BE49-F238E27FC236}">
+                <a16:creationId xmlns:a16="http://schemas.microsoft.com/office/drawing/2014/main" id="{E3071F4E-0E82-F75B-BCB9-991E605EFB90}"/>
+              </a:ext>
+            </a:extLst>
+          </p:cNvPr>
+          <p:cNvCxnSpPr>
+            <a:cxnSpLocks/>
+          </p:cNvCxnSpPr>
+          <p:nvPr/>
+        </p:nvCxnSpPr>
+        <p:spPr>
+          <a:xfrm>
+            <a:off x="1676819" y="1232535"/>
+            <a:ext cx="204360" cy="817229"/>
+          </a:xfrm>
+          <a:prstGeom prst="line">
+            <a:avLst/>
+          </a:prstGeom>
+          <a:ln w="9525" cap="rnd">
+            <a:solidFill>
+              <a:srgbClr val="086FBD"/>
+            </a:solidFill>
+            <a:prstDash val="sysDash"/>
+            <a:round/>
+          </a:ln>
+        </p:spPr>
+        <p:style>
+          <a:lnRef idx="2">
+            <a:schemeClr val="accent1"/>
+          </a:lnRef>
+          <a:fillRef idx="0">
+            <a:schemeClr val="accent1"/>
+          </a:fillRef>
+          <a:effectRef idx="1">
+            <a:schemeClr val="accent1"/>
+          </a:effectRef>
+          <a:fontRef idx="minor">
+            <a:schemeClr val="tx1"/>
+          </a:fontRef>
+        </p:style>
+      </p:cxnSp>
+      <p:sp>
+        <p:nvSpPr>
+          <p:cNvPr id="32" name="Textfeld 31">
+            <a:extLst>
+              <a:ext uri="{FF2B5EF4-FFF2-40B4-BE49-F238E27FC236}">
+                <a16:creationId xmlns:a16="http://schemas.microsoft.com/office/drawing/2014/main" id="{38EB8F12-7FB9-107D-4548-20DDDD7CE9B9}"/>
+              </a:ext>
+            </a:extLst>
+          </p:cNvPr>
+          <p:cNvSpPr txBox="1"/>
+          <p:nvPr/>
+        </p:nvSpPr>
+        <p:spPr>
+          <a:xfrm>
+            <a:off x="653416" y="1129724"/>
+            <a:ext cx="567731" cy="307777"/>
+          </a:xfrm>
+          <a:prstGeom prst="rect">
+            <a:avLst/>
+          </a:prstGeom>
+          <a:noFill/>
+        </p:spPr>
+        <p:txBody>
+          <a:bodyPr wrap="square" rtlCol="0">
+            <a:spAutoFit/>
+          </a:bodyPr>
+          <a:lstStyle/>
+          <a:p>
+            <a:pPr algn="ctr"/>
+            <a:r>
+              <a:rPr lang="de-DE" sz="1400" i="1" dirty="0">
+                <a:solidFill>
+                  <a:srgbClr val="086FBD"/>
+                </a:solidFill>
+                <a:latin typeface="CMU Serif" panose="02000603000000000000" pitchFamily="2" charset="0"/>
+                <a:ea typeface="CMU Serif" panose="02000603000000000000" pitchFamily="2" charset="0"/>
+                <a:cs typeface="CMU Serif" panose="02000603000000000000" pitchFamily="2" charset="0"/>
+              </a:rPr>
+              <a:t>U</a:t>
+            </a:r>
+            <a:r>
+              <a:rPr lang="de-DE" sz="1400" i="1" baseline="-25000" dirty="0">
+                <a:solidFill>
+                  <a:srgbClr val="086FBD"/>
+                </a:solidFill>
+                <a:latin typeface="CMU Serif" panose="02000603000000000000" pitchFamily="2" charset="0"/>
+                <a:ea typeface="CMU Serif" panose="02000603000000000000" pitchFamily="2" charset="0"/>
+                <a:cs typeface="CMU Serif" panose="02000603000000000000" pitchFamily="2" charset="0"/>
+              </a:rPr>
+              <a:t>R</a:t>
+            </a:r>
+            <a:endParaRPr lang="de-DE" sz="1400" baseline="-25000" dirty="0">
+              <a:solidFill>
+                <a:srgbClr val="086FBD"/>
+              </a:solidFill>
+              <a:latin typeface="CMU Serif" panose="02000603000000000000" pitchFamily="2" charset="0"/>
+              <a:ea typeface="CMU Serif" panose="02000603000000000000" pitchFamily="2" charset="0"/>
+              <a:cs typeface="CMU Serif" panose="02000603000000000000" pitchFamily="2" charset="0"/>
+            </a:endParaRPr>
+          </a:p>
+        </p:txBody>
+      </p:sp>
+      <p:sp>
+        <p:nvSpPr>
+          <p:cNvPr id="34" name="Textfeld 33">
+            <a:extLst>
+              <a:ext uri="{FF2B5EF4-FFF2-40B4-BE49-F238E27FC236}">
+                <a16:creationId xmlns:a16="http://schemas.microsoft.com/office/drawing/2014/main" id="{07BC7F3B-F4EF-64A6-8CF1-A33C5797B9EE}"/>
+              </a:ext>
+            </a:extLst>
+          </p:cNvPr>
+          <p:cNvSpPr txBox="1"/>
+          <p:nvPr/>
+        </p:nvSpPr>
+        <p:spPr>
+          <a:xfrm>
+            <a:off x="1650209" y="1125863"/>
+            <a:ext cx="567731" cy="307777"/>
+          </a:xfrm>
+          <a:prstGeom prst="rect">
+            <a:avLst/>
+          </a:prstGeom>
+          <a:noFill/>
+        </p:spPr>
+        <p:txBody>
+          <a:bodyPr wrap="square" rtlCol="0">
+            <a:spAutoFit/>
+          </a:bodyPr>
+          <a:lstStyle/>
+          <a:p>
+            <a:pPr algn="ctr"/>
+            <a:r>
+              <a:rPr lang="de-DE" sz="1400" i="1" dirty="0" err="1">
+                <a:solidFill>
+                  <a:srgbClr val="086FBD"/>
+                </a:solidFill>
+                <a:latin typeface="CMU Serif" panose="02000603000000000000" pitchFamily="2" charset="0"/>
+                <a:ea typeface="CMU Serif" panose="02000603000000000000" pitchFamily="2" charset="0"/>
+                <a:cs typeface="CMU Serif" panose="02000603000000000000" pitchFamily="2" charset="0"/>
+              </a:rPr>
+              <a:t>U</a:t>
+            </a:r>
+            <a:r>
+              <a:rPr lang="de-DE" sz="1400" baseline="-25000" dirty="0" err="1">
+                <a:solidFill>
+                  <a:srgbClr val="086FBD"/>
+                </a:solidFill>
+                <a:latin typeface="CMU Serif" panose="02000603000000000000" pitchFamily="2" charset="0"/>
+                <a:ea typeface="CMU Serif" panose="02000603000000000000" pitchFamily="2" charset="0"/>
+                <a:cs typeface="CMU Serif" panose="02000603000000000000" pitchFamily="2" charset="0"/>
+              </a:rPr>
+              <a:t>ges</a:t>
+            </a:r>
+            <a:endParaRPr lang="de-DE" sz="1400" baseline="-25000" dirty="0">
+              <a:solidFill>
+                <a:srgbClr val="086FBD"/>
+              </a:solidFill>
+              <a:latin typeface="CMU Serif" panose="02000603000000000000" pitchFamily="2" charset="0"/>
+              <a:ea typeface="CMU Serif" panose="02000603000000000000" pitchFamily="2" charset="0"/>
+              <a:cs typeface="CMU Serif" panose="02000603000000000000" pitchFamily="2" charset="0"/>
+            </a:endParaRPr>
+          </a:p>
+        </p:txBody>
+      </p:sp>
+      <p:sp>
+        <p:nvSpPr>
+          <p:cNvPr id="35" name="Textfeld 34">
+            <a:extLst>
+              <a:ext uri="{FF2B5EF4-FFF2-40B4-BE49-F238E27FC236}">
+                <a16:creationId xmlns:a16="http://schemas.microsoft.com/office/drawing/2014/main" id="{7CC5D568-E1E0-B249-B023-DFBAF6DDFEA8}"/>
+              </a:ext>
+            </a:extLst>
+          </p:cNvPr>
+          <p:cNvSpPr txBox="1"/>
+          <p:nvPr/>
+        </p:nvSpPr>
+        <p:spPr>
+          <a:xfrm>
+            <a:off x="1188701" y="1371235"/>
+            <a:ext cx="518786" cy="261610"/>
+          </a:xfrm>
+          <a:prstGeom prst="rect">
+            <a:avLst/>
+          </a:prstGeom>
+          <a:noFill/>
+        </p:spPr>
+        <p:txBody>
+          <a:bodyPr wrap="square" rtlCol="0">
+            <a:spAutoFit/>
+          </a:bodyPr>
+          <a:lstStyle/>
+          <a:p>
+            <a:pPr algn="ctr"/>
+            <a:r>
+              <a:rPr lang="de-DE" sz="1100" i="1" dirty="0">
+                <a:solidFill>
+                  <a:schemeClr val="accent2">
+                    <a:lumMod val="75000"/>
+                  </a:schemeClr>
+                </a:solidFill>
+                <a:latin typeface="Latin Modern Math" panose="02000503000000000000" pitchFamily="50" charset="0"/>
+                <a:ea typeface="Latin Modern Math" panose="02000503000000000000" pitchFamily="50" charset="0"/>
+                <a:cs typeface="CMU Serif" panose="02000603000000000000" pitchFamily="2" charset="0"/>
+              </a:rPr>
+              <a:t>φ</a:t>
+            </a:r>
+            <a:endParaRPr lang="de-DE" sz="1100" baseline="-25000" dirty="0">
+              <a:solidFill>
+                <a:schemeClr val="accent2">
+                  <a:lumMod val="75000"/>
+                </a:schemeClr>
+              </a:solidFill>
+              <a:latin typeface="CMU Serif" panose="02000603000000000000" pitchFamily="2" charset="0"/>
+              <a:ea typeface="CMU Serif" panose="02000603000000000000" pitchFamily="2" charset="0"/>
+              <a:cs typeface="CMU Serif" panose="02000603000000000000" pitchFamily="2" charset="0"/>
+            </a:endParaRPr>
+          </a:p>
+        </p:txBody>
+      </p:sp>
+      <p:sp>
+        <p:nvSpPr>
+          <p:cNvPr id="38" name="Textfeld 37">
+            <a:extLst>
+              <a:ext uri="{FF2B5EF4-FFF2-40B4-BE49-F238E27FC236}">
+                <a16:creationId xmlns:a16="http://schemas.microsoft.com/office/drawing/2014/main" id="{EE6B9B4E-BA73-2340-8929-7B85D9F8595A}"/>
+              </a:ext>
+            </a:extLst>
+          </p:cNvPr>
+          <p:cNvSpPr txBox="1"/>
+          <p:nvPr/>
+        </p:nvSpPr>
+        <p:spPr>
+          <a:xfrm>
+            <a:off x="1254580" y="1895604"/>
+            <a:ext cx="518786" cy="261610"/>
+          </a:xfrm>
+          <a:prstGeom prst="rect">
+            <a:avLst/>
+          </a:prstGeom>
+          <a:noFill/>
+        </p:spPr>
+        <p:txBody>
+          <a:bodyPr wrap="square" rtlCol="0">
+            <a:spAutoFit/>
+          </a:bodyPr>
+          <a:lstStyle/>
+          <a:p>
+            <a:pPr algn="ctr"/>
+            <a:r>
+              <a:rPr lang="de-DE" sz="1100" i="1" dirty="0" err="1">
+                <a:solidFill>
+                  <a:schemeClr val="accent6">
+                    <a:lumMod val="75000"/>
+                  </a:schemeClr>
+                </a:solidFill>
+                <a:latin typeface="Latin Modern Math" panose="02000503000000000000" pitchFamily="50" charset="0"/>
+                <a:ea typeface="Latin Modern Math" panose="02000503000000000000" pitchFamily="50" charset="0"/>
+                <a:cs typeface="CMU Serif" panose="02000603000000000000" pitchFamily="2" charset="0"/>
+              </a:rPr>
+              <a:t>φ</a:t>
+            </a:r>
+            <a:r>
+              <a:rPr lang="de-DE" sz="1100" baseline="-25000" dirty="0" err="1">
+                <a:solidFill>
+                  <a:schemeClr val="accent6">
+                    <a:lumMod val="75000"/>
+                  </a:schemeClr>
+                </a:solidFill>
+                <a:latin typeface="CMU Serif" panose="02000603000000000000" pitchFamily="2" charset="0"/>
+                <a:ea typeface="CMU Serif" panose="02000603000000000000" pitchFamily="2" charset="0"/>
+                <a:cs typeface="CMU Serif" panose="02000603000000000000" pitchFamily="2" charset="0"/>
+              </a:rPr>
+              <a:t>C</a:t>
+            </a:r>
+            <a:endParaRPr lang="de-DE" sz="1100" baseline="-25000" dirty="0">
+              <a:solidFill>
+                <a:schemeClr val="accent6">
+                  <a:lumMod val="75000"/>
+                </a:schemeClr>
+              </a:solidFill>
+              <a:latin typeface="CMU Serif" panose="02000603000000000000" pitchFamily="2" charset="0"/>
+              <a:ea typeface="CMU Serif" panose="02000603000000000000" pitchFamily="2" charset="0"/>
+              <a:cs typeface="CMU Serif" panose="02000603000000000000" pitchFamily="2" charset="0"/>
+            </a:endParaRPr>
+          </a:p>
+        </p:txBody>
+      </p:sp>
+      <p:sp>
+        <p:nvSpPr>
+          <p:cNvPr id="39" name="Textfeld 38">
+            <a:extLst>
+              <a:ext uri="{FF2B5EF4-FFF2-40B4-BE49-F238E27FC236}">
+                <a16:creationId xmlns:a16="http://schemas.microsoft.com/office/drawing/2014/main" id="{A7E438CF-8302-D781-1B87-E495FE1EB239}"/>
+              </a:ext>
+            </a:extLst>
+          </p:cNvPr>
+          <p:cNvSpPr txBox="1"/>
+          <p:nvPr/>
+        </p:nvSpPr>
+        <p:spPr>
+          <a:xfrm>
+            <a:off x="1509215" y="2200478"/>
+            <a:ext cx="518786" cy="261610"/>
+          </a:xfrm>
+          <a:prstGeom prst="rect">
+            <a:avLst/>
+          </a:prstGeom>
+          <a:noFill/>
+        </p:spPr>
+        <p:txBody>
+          <a:bodyPr wrap="square" rtlCol="0">
+            <a:spAutoFit/>
+          </a:bodyPr>
+          <a:lstStyle/>
+          <a:p>
+            <a:pPr algn="ctr"/>
+            <a:r>
+              <a:rPr lang="de-DE" sz="1100" i="1" dirty="0">
+                <a:solidFill>
+                  <a:schemeClr val="accent5"/>
+                </a:solidFill>
+                <a:latin typeface="Latin Modern Math" panose="02000503000000000000" pitchFamily="50" charset="0"/>
+                <a:ea typeface="Latin Modern Math" panose="02000503000000000000" pitchFamily="50" charset="0"/>
+                <a:cs typeface="CMU Serif" panose="02000603000000000000" pitchFamily="2" charset="0"/>
+              </a:rPr>
+              <a:t>ω </a:t>
+            </a:r>
+            <a:r>
+              <a:rPr lang="de-DE" sz="400" dirty="0">
+                <a:solidFill>
+                  <a:schemeClr val="accent5"/>
+                </a:solidFill>
+                <a:latin typeface="Latin Modern Math" panose="02000503000000000000" pitchFamily="50" charset="0"/>
+                <a:ea typeface="Latin Modern Math" panose="02000503000000000000" pitchFamily="50" charset="0"/>
+                <a:cs typeface="CMU Serif" panose="02000603000000000000" pitchFamily="2" charset="0"/>
+              </a:rPr>
+              <a:t>∙</a:t>
+            </a:r>
+            <a:r>
+              <a:rPr lang="de-DE" sz="1100" i="1" dirty="0">
+                <a:solidFill>
+                  <a:schemeClr val="accent5"/>
+                </a:solidFill>
+                <a:latin typeface="Latin Modern Math" panose="02000503000000000000" pitchFamily="50" charset="0"/>
+                <a:ea typeface="Latin Modern Math" panose="02000503000000000000" pitchFamily="50" charset="0"/>
+                <a:cs typeface="CMU Serif" panose="02000603000000000000" pitchFamily="2" charset="0"/>
+              </a:rPr>
+              <a:t> </a:t>
+            </a:r>
+            <a:r>
+              <a:rPr lang="de-DE" sz="1100" i="1" dirty="0">
+                <a:solidFill>
+                  <a:schemeClr val="accent5"/>
+                </a:solidFill>
+                <a:latin typeface="CMU Serif" panose="02000603000000000000" pitchFamily="2" charset="0"/>
+                <a:ea typeface="CMU Serif" panose="02000603000000000000" pitchFamily="2" charset="0"/>
+                <a:cs typeface="CMU Serif" panose="02000603000000000000" pitchFamily="2" charset="0"/>
+              </a:rPr>
+              <a:t>t</a:t>
+            </a:r>
+            <a:endParaRPr lang="de-DE" sz="1100" baseline="-25000" dirty="0">
+              <a:solidFill>
+                <a:schemeClr val="accent5"/>
+              </a:solidFill>
+              <a:latin typeface="CMU Serif" panose="02000603000000000000" pitchFamily="2" charset="0"/>
+              <a:ea typeface="CMU Serif" panose="02000603000000000000" pitchFamily="2" charset="0"/>
+              <a:cs typeface="CMU Serif" panose="02000603000000000000" pitchFamily="2" charset="0"/>
+            </a:endParaRPr>
+          </a:p>
+        </p:txBody>
+      </p:sp>
+      <p:cxnSp>
+        <p:nvCxnSpPr>
+          <p:cNvPr id="17" name="Gerade Verbindung mit Pfeil 16">
+            <a:extLst>
+              <a:ext uri="{FF2B5EF4-FFF2-40B4-BE49-F238E27FC236}">
+                <a16:creationId xmlns:a16="http://schemas.microsoft.com/office/drawing/2014/main" id="{FD8BDC76-9120-8DE9-B64D-3BFCD2C1776B}"/>
+              </a:ext>
+            </a:extLst>
+          </p:cNvPr>
+          <p:cNvCxnSpPr>
+            <a:cxnSpLocks/>
+          </p:cNvCxnSpPr>
+          <p:nvPr/>
+        </p:nvCxnSpPr>
+        <p:spPr>
+          <a:xfrm flipV="1">
+            <a:off x="1333628" y="1232535"/>
+            <a:ext cx="342772" cy="965506"/>
+          </a:xfrm>
+          <a:prstGeom prst="straightConnector1">
+            <a:avLst/>
+          </a:prstGeom>
+          <a:ln cap="rnd">
+            <a:solidFill>
+              <a:srgbClr val="086FBD"/>
+            </a:solidFill>
+            <a:round/>
+            <a:tailEnd type="triangle" w="med" len="med"/>
+          </a:ln>
+        </p:spPr>
+        <p:style>
+          <a:lnRef idx="2">
+            <a:schemeClr val="accent1"/>
+          </a:lnRef>
+          <a:fillRef idx="0">
+            <a:schemeClr val="accent1"/>
+          </a:fillRef>
+          <a:effectRef idx="1">
+            <a:schemeClr val="accent1"/>
+          </a:effectRef>
+          <a:fontRef idx="minor">
+            <a:schemeClr val="tx1"/>
+          </a:fontRef>
+        </p:style>
+      </p:cxnSp>
+      <p:cxnSp>
+        <p:nvCxnSpPr>
+          <p:cNvPr id="5" name="Gerade Verbindung mit Pfeil 4">
+            <a:extLst>
+              <a:ext uri="{FF2B5EF4-FFF2-40B4-BE49-F238E27FC236}">
+                <a16:creationId xmlns:a16="http://schemas.microsoft.com/office/drawing/2014/main" id="{A40F2B8C-E138-A876-7DEE-025820290DA8}"/>
+              </a:ext>
+            </a:extLst>
+          </p:cNvPr>
+          <p:cNvCxnSpPr>
+            <a:cxnSpLocks/>
+          </p:cNvCxnSpPr>
+          <p:nvPr/>
+        </p:nvCxnSpPr>
+        <p:spPr>
+          <a:xfrm flipV="1">
+            <a:off x="1333630" y="1173167"/>
+            <a:ext cx="0" cy="1254116"/>
+          </a:xfrm>
+          <a:prstGeom prst="straightConnector1">
+            <a:avLst/>
+          </a:prstGeom>
+          <a:ln cap="rnd">
+            <a:solidFill>
+              <a:schemeClr val="tx1"/>
+            </a:solidFill>
+            <a:round/>
+            <a:tailEnd type="triangle" w="med" len="med"/>
+          </a:ln>
+        </p:spPr>
+        <p:style>
+          <a:lnRef idx="2">
+            <a:schemeClr val="accent1"/>
+          </a:lnRef>
+          <a:fillRef idx="0">
+            <a:schemeClr val="accent1"/>
+          </a:fillRef>
+          <a:effectRef idx="1">
+            <a:schemeClr val="accent1"/>
+          </a:effectRef>
+          <a:fontRef idx="minor">
+            <a:schemeClr val="tx1"/>
+          </a:fontRef>
+        </p:style>
+      </p:cxnSp>
+      <p:cxnSp>
+        <p:nvCxnSpPr>
+          <p:cNvPr id="6" name="Gerade Verbindung mit Pfeil 5">
+            <a:extLst>
+              <a:ext uri="{FF2B5EF4-FFF2-40B4-BE49-F238E27FC236}">
+                <a16:creationId xmlns:a16="http://schemas.microsoft.com/office/drawing/2014/main" id="{B1460347-5A0C-2FB1-6DE4-36543FA94271}"/>
+              </a:ext>
+            </a:extLst>
+          </p:cNvPr>
+          <p:cNvCxnSpPr>
+            <a:cxnSpLocks/>
+          </p:cNvCxnSpPr>
+          <p:nvPr/>
+        </p:nvCxnSpPr>
+        <p:spPr>
+          <a:xfrm>
+            <a:off x="1124941" y="2201867"/>
+            <a:ext cx="1242999" cy="0"/>
+          </a:xfrm>
+          <a:prstGeom prst="straightConnector1">
+            <a:avLst/>
+          </a:prstGeom>
+          <a:ln cap="rnd">
+            <a:solidFill>
+              <a:schemeClr val="tx1"/>
+            </a:solidFill>
+            <a:round/>
+            <a:tailEnd type="triangle" w="med" len="med"/>
+          </a:ln>
+        </p:spPr>
+        <p:style>
+          <a:lnRef idx="2">
+            <a:schemeClr val="accent1"/>
+          </a:lnRef>
+          <a:fillRef idx="0">
+            <a:schemeClr val="accent1"/>
+          </a:fillRef>
+          <a:effectRef idx="1">
+            <a:schemeClr val="accent1"/>
+          </a:effectRef>
+          <a:fontRef idx="minor">
+            <a:schemeClr val="tx1"/>
+          </a:fontRef>
+        </p:style>
+      </p:cxnSp>
+    </p:spTree>
+    <p:extLst>
+      <p:ext uri="{BB962C8B-B14F-4D97-AF65-F5344CB8AC3E}">
+        <p14:creationId xmlns:p14="http://schemas.microsoft.com/office/powerpoint/2010/main" val="2012553162"/>
+      </p:ext>
+    </p:extLst>
+  </p:cSld>
+  <p:clrMapOvr>
+    <a:masterClrMapping/>
+  </p:clrMapOvr>
+</p:sld>
+</file>
+
+<file path=ppt/slides/slide19.xml><?xml version="1.0" encoding="utf-8"?>
+<p:sld xmlns:a="http://schemas.openxmlformats.org/drawingml/2006/main" xmlns:r="http://schemas.openxmlformats.org/officeDocument/2006/relationships" xmlns:p="http://schemas.openxmlformats.org/presentationml/2006/main">
+  <p:cSld>
+    <p:spTree>
+      <p:nvGrpSpPr>
+        <p:cNvPr id="1" name="">
+          <a:extLst>
+            <a:ext uri="{FF2B5EF4-FFF2-40B4-BE49-F238E27FC236}">
+              <a16:creationId xmlns:a16="http://schemas.microsoft.com/office/drawing/2014/main" id="{E0C65F1F-40C5-26A2-F3CA-48EF5A680A5F}"/>
+            </a:ext>
+          </a:extLst>
+        </p:cNvPr>
+        <p:cNvGrpSpPr/>
+        <p:nvPr/>
+      </p:nvGrpSpPr>
+      <p:grpSpPr>
+        <a:xfrm>
+          <a:off x="0" y="0"/>
+          <a:ext cx="0" cy="0"/>
+          <a:chOff x="0" y="0"/>
+          <a:chExt cx="0" cy="0"/>
+        </a:xfrm>
+      </p:grpSpPr>
+      <p:sp>
+        <p:nvSpPr>
+          <p:cNvPr id="36" name="Bogen 35">
+            <a:extLst>
+              <a:ext uri="{FF2B5EF4-FFF2-40B4-BE49-F238E27FC236}">
+                <a16:creationId xmlns:a16="http://schemas.microsoft.com/office/drawing/2014/main" id="{4B8EE8B6-CB9E-B530-3441-49AE274C82DB}"/>
+              </a:ext>
+            </a:extLst>
+          </p:cNvPr>
+          <p:cNvSpPr/>
+          <p:nvPr/>
+        </p:nvSpPr>
+        <p:spPr>
+          <a:xfrm>
+            <a:off x="957943" y="1825175"/>
+            <a:ext cx="749544" cy="749542"/>
+          </a:xfrm>
+          <a:prstGeom prst="arc">
+            <a:avLst>
+              <a:gd name="adj1" fmla="val 15365455"/>
+              <a:gd name="adj2" fmla="val 20631686"/>
+            </a:avLst>
+          </a:prstGeom>
+          <a:ln cap="rnd">
+            <a:solidFill>
+              <a:schemeClr val="accent6">
+                <a:lumMod val="75000"/>
+              </a:schemeClr>
+            </a:solidFill>
+            <a:round/>
+            <a:headEnd type="none"/>
+            <a:tailEnd type="triangle"/>
+          </a:ln>
+        </p:spPr>
+        <p:style>
+          <a:lnRef idx="2">
+            <a:schemeClr val="accent1"/>
+          </a:lnRef>
+          <a:fillRef idx="0">
+            <a:schemeClr val="accent1"/>
+          </a:fillRef>
+          <a:effectRef idx="1">
+            <a:schemeClr val="accent1"/>
+          </a:effectRef>
+          <a:fontRef idx="minor">
+            <a:schemeClr val="tx1"/>
+          </a:fontRef>
+        </p:style>
+        <p:txBody>
+          <a:bodyPr rtlCol="0" anchor="ctr"/>
+          <a:lstStyle/>
+          <a:p>
+            <a:pPr algn="ctr"/>
+            <a:endParaRPr lang="de-DE" sz="2400" dirty="0"/>
+          </a:p>
+        </p:txBody>
+      </p:sp>
+      <p:sp>
+        <p:nvSpPr>
+          <p:cNvPr id="33" name="Bogen 32">
+            <a:extLst>
+              <a:ext uri="{FF2B5EF4-FFF2-40B4-BE49-F238E27FC236}">
+                <a16:creationId xmlns:a16="http://schemas.microsoft.com/office/drawing/2014/main" id="{B78F6BE0-60D3-9D90-E499-E93BA3489858}"/>
+              </a:ext>
+            </a:extLst>
+          </p:cNvPr>
+          <p:cNvSpPr/>
+          <p:nvPr/>
+        </p:nvSpPr>
+        <p:spPr>
+          <a:xfrm>
+            <a:off x="723382" y="1589699"/>
+            <a:ext cx="1220493" cy="1220493"/>
+          </a:xfrm>
+          <a:prstGeom prst="arc">
+            <a:avLst>
+              <a:gd name="adj1" fmla="val 15362795"/>
+              <a:gd name="adj2" fmla="val 17327976"/>
+            </a:avLst>
+          </a:prstGeom>
+          <a:ln cap="rnd">
+            <a:solidFill>
+              <a:schemeClr val="accent2">
+                <a:lumMod val="75000"/>
+              </a:schemeClr>
+            </a:solidFill>
+            <a:round/>
+            <a:headEnd type="triangle"/>
+          </a:ln>
+        </p:spPr>
+        <p:style>
+          <a:lnRef idx="2">
+            <a:schemeClr val="accent1"/>
+          </a:lnRef>
+          <a:fillRef idx="0">
+            <a:schemeClr val="accent1"/>
+          </a:fillRef>
+          <a:effectRef idx="1">
+            <a:schemeClr val="accent1"/>
+          </a:effectRef>
+          <a:fontRef idx="minor">
+            <a:schemeClr val="tx1"/>
+          </a:fontRef>
+        </p:style>
+        <p:txBody>
+          <a:bodyPr rtlCol="0" anchor="ctr"/>
+          <a:lstStyle/>
+          <a:p>
+            <a:pPr algn="ctr"/>
+            <a:endParaRPr lang="de-DE" sz="2400" dirty="0"/>
+          </a:p>
+        </p:txBody>
+      </p:sp>
+      <p:cxnSp>
+        <p:nvCxnSpPr>
+          <p:cNvPr id="15" name="Gerade Verbindung mit Pfeil 14">
+            <a:extLst>
+              <a:ext uri="{FF2B5EF4-FFF2-40B4-BE49-F238E27FC236}">
+                <a16:creationId xmlns:a16="http://schemas.microsoft.com/office/drawing/2014/main" id="{89F02440-35FD-1B50-4BDA-B63ADD91A9EE}"/>
+              </a:ext>
+            </a:extLst>
+          </p:cNvPr>
+          <p:cNvCxnSpPr>
+            <a:cxnSpLocks/>
+          </p:cNvCxnSpPr>
+          <p:nvPr/>
+        </p:nvCxnSpPr>
+        <p:spPr>
+          <a:xfrm flipH="1" flipV="1">
+            <a:off x="1122699" y="1373148"/>
+            <a:ext cx="210929" cy="826806"/>
+          </a:xfrm>
+          <a:prstGeom prst="straightConnector1">
+            <a:avLst/>
+          </a:prstGeom>
+          <a:ln cap="rnd">
+            <a:solidFill>
+              <a:schemeClr val="tx1">
+                <a:lumMod val="65000"/>
+                <a:lumOff val="35000"/>
+              </a:schemeClr>
+            </a:solidFill>
+            <a:round/>
+            <a:tailEnd type="triangle" w="med" len="med"/>
+          </a:ln>
+        </p:spPr>
+        <p:style>
+          <a:lnRef idx="2">
+            <a:schemeClr val="accent1"/>
+          </a:lnRef>
+          <a:fillRef idx="0">
+            <a:schemeClr val="accent1"/>
+          </a:fillRef>
+          <a:effectRef idx="1">
+            <a:schemeClr val="accent1"/>
+          </a:effectRef>
+          <a:fontRef idx="minor">
+            <a:schemeClr val="tx1"/>
+          </a:fontRef>
+        </p:style>
+      </p:cxnSp>
+      <p:sp>
+        <p:nvSpPr>
+          <p:cNvPr id="19" name="Bogen 18">
+            <a:extLst>
+              <a:ext uri="{FF2B5EF4-FFF2-40B4-BE49-F238E27FC236}">
+                <a16:creationId xmlns:a16="http://schemas.microsoft.com/office/drawing/2014/main" id="{D195302D-C3FD-10F1-82CB-753A6ED51B48}"/>
+              </a:ext>
+            </a:extLst>
+          </p:cNvPr>
+          <p:cNvSpPr/>
+          <p:nvPr/>
+        </p:nvSpPr>
+        <p:spPr>
+          <a:xfrm>
+            <a:off x="880978" y="1749211"/>
+            <a:ext cx="905302" cy="905300"/>
+          </a:xfrm>
+          <a:prstGeom prst="arc">
+            <a:avLst>
+              <a:gd name="adj1" fmla="val 15357935"/>
+              <a:gd name="adj2" fmla="val 0"/>
+            </a:avLst>
+          </a:prstGeom>
+          <a:ln cap="rnd">
+            <a:solidFill>
+              <a:schemeClr val="accent5"/>
+            </a:solidFill>
+            <a:round/>
+            <a:headEnd type="triangle"/>
+          </a:ln>
+        </p:spPr>
+        <p:style>
+          <a:lnRef idx="2">
+            <a:schemeClr val="accent1"/>
+          </a:lnRef>
+          <a:fillRef idx="0">
+            <a:schemeClr val="accent1"/>
+          </a:fillRef>
+          <a:effectRef idx="1">
+            <a:schemeClr val="accent1"/>
+          </a:effectRef>
+          <a:fontRef idx="minor">
+            <a:schemeClr val="tx1"/>
+          </a:fontRef>
+        </p:style>
+        <p:txBody>
+          <a:bodyPr rtlCol="0" anchor="ctr"/>
+          <a:lstStyle/>
+          <a:p>
+            <a:pPr algn="ctr"/>
+            <a:endParaRPr lang="de-DE" sz="2400" dirty="0"/>
+          </a:p>
+        </p:txBody>
+      </p:sp>
+      <p:cxnSp>
+        <p:nvCxnSpPr>
+          <p:cNvPr id="8" name="Gerade Verbindung mit Pfeil 7">
+            <a:extLst>
+              <a:ext uri="{FF2B5EF4-FFF2-40B4-BE49-F238E27FC236}">
+                <a16:creationId xmlns:a16="http://schemas.microsoft.com/office/drawing/2014/main" id="{755CE313-9AB3-15F5-16FD-7A86D229A453}"/>
+              </a:ext>
+            </a:extLst>
+          </p:cNvPr>
+          <p:cNvCxnSpPr>
+            <a:cxnSpLocks/>
+          </p:cNvCxnSpPr>
+          <p:nvPr/>
+        </p:nvCxnSpPr>
+        <p:spPr>
+          <a:xfrm flipV="1">
+            <a:off x="1333377" y="2053590"/>
+            <a:ext cx="552579" cy="144451"/>
+          </a:xfrm>
+          <a:prstGeom prst="straightConnector1">
+            <a:avLst/>
+          </a:prstGeom>
+          <a:ln cap="rnd">
+            <a:solidFill>
+              <a:schemeClr val="tx1">
+                <a:lumMod val="65000"/>
+                <a:lumOff val="35000"/>
+              </a:schemeClr>
+            </a:solidFill>
+            <a:round/>
+            <a:tailEnd type="triangle" w="med" len="med"/>
+          </a:ln>
+        </p:spPr>
+        <p:style>
+          <a:lnRef idx="2">
+            <a:schemeClr val="accent1"/>
+          </a:lnRef>
+          <a:fillRef idx="0">
+            <a:schemeClr val="accent1"/>
+          </a:fillRef>
+          <a:effectRef idx="1">
+            <a:schemeClr val="accent1"/>
+          </a:effectRef>
+          <a:fontRef idx="minor">
+            <a:schemeClr val="tx1"/>
+          </a:fontRef>
+        </p:style>
+      </p:cxnSp>
+      <p:sp>
+        <p:nvSpPr>
+          <p:cNvPr id="13" name="Textfeld 12">
+            <a:extLst>
+              <a:ext uri="{FF2B5EF4-FFF2-40B4-BE49-F238E27FC236}">
+                <a16:creationId xmlns:a16="http://schemas.microsoft.com/office/drawing/2014/main" id="{F85066F8-B03E-0145-A5CC-CA36FCF200CC}"/>
+              </a:ext>
+            </a:extLst>
+          </p:cNvPr>
+          <p:cNvSpPr txBox="1"/>
+          <p:nvPr/>
+        </p:nvSpPr>
+        <p:spPr>
+          <a:xfrm>
+            <a:off x="1773475" y="1852910"/>
+            <a:ext cx="567731" cy="307777"/>
+          </a:xfrm>
+          <a:prstGeom prst="rect">
+            <a:avLst/>
+          </a:prstGeom>
+          <a:noFill/>
+        </p:spPr>
+        <p:txBody>
+          <a:bodyPr wrap="square" rtlCol="0">
+            <a:spAutoFit/>
+          </a:bodyPr>
+          <a:lstStyle/>
+          <a:p>
+            <a:pPr algn="ctr"/>
+            <a:r>
+              <a:rPr lang="de-DE" sz="1400" i="1" dirty="0">
+                <a:solidFill>
+                  <a:schemeClr val="tx1">
+                    <a:lumMod val="65000"/>
+                    <a:lumOff val="35000"/>
+                  </a:schemeClr>
+                </a:solidFill>
+                <a:latin typeface="CMU Serif" panose="02000603000000000000" pitchFamily="2" charset="0"/>
+                <a:ea typeface="CMU Serif" panose="02000603000000000000" pitchFamily="2" charset="0"/>
+                <a:cs typeface="CMU Serif" panose="02000603000000000000" pitchFamily="2" charset="0"/>
+              </a:rPr>
+              <a:t>X</a:t>
+            </a:r>
+            <a:r>
+              <a:rPr lang="de-DE" sz="1400" baseline="-25000" dirty="0">
+                <a:solidFill>
+                  <a:schemeClr val="tx1">
+                    <a:lumMod val="65000"/>
+                    <a:lumOff val="35000"/>
+                  </a:schemeClr>
+                </a:solidFill>
+                <a:latin typeface="CMU Serif" panose="02000603000000000000" pitchFamily="2" charset="0"/>
+                <a:ea typeface="CMU Serif" panose="02000603000000000000" pitchFamily="2" charset="0"/>
+                <a:cs typeface="CMU Serif" panose="02000603000000000000" pitchFamily="2" charset="0"/>
+              </a:rPr>
+              <a:t>C</a:t>
+            </a:r>
+          </a:p>
+        </p:txBody>
+      </p:sp>
+      <p:cxnSp>
+        <p:nvCxnSpPr>
+          <p:cNvPr id="21" name="Gerader Verbinder 20">
+            <a:extLst>
+              <a:ext uri="{FF2B5EF4-FFF2-40B4-BE49-F238E27FC236}">
+                <a16:creationId xmlns:a16="http://schemas.microsoft.com/office/drawing/2014/main" id="{28F9DF99-4CF3-E032-08EC-C7EB466F2035}"/>
+              </a:ext>
+            </a:extLst>
+          </p:cNvPr>
+          <p:cNvCxnSpPr>
+            <a:cxnSpLocks/>
+          </p:cNvCxnSpPr>
+          <p:nvPr/>
+        </p:nvCxnSpPr>
+        <p:spPr>
+          <a:xfrm flipH="1">
+            <a:off x="1123950" y="1234134"/>
+            <a:ext cx="552450" cy="143647"/>
+          </a:xfrm>
+          <a:prstGeom prst="line">
+            <a:avLst/>
+          </a:prstGeom>
+          <a:ln w="9525" cap="rnd">
+            <a:solidFill>
+              <a:schemeClr val="tx1">
+                <a:lumMod val="65000"/>
+                <a:lumOff val="35000"/>
+              </a:schemeClr>
+            </a:solidFill>
+            <a:prstDash val="sysDash"/>
+            <a:round/>
+          </a:ln>
+        </p:spPr>
+        <p:style>
+          <a:lnRef idx="2">
+            <a:schemeClr val="accent1"/>
+          </a:lnRef>
+          <a:fillRef idx="0">
+            <a:schemeClr val="accent1"/>
+          </a:fillRef>
+          <a:effectRef idx="1">
+            <a:schemeClr val="accent1"/>
+          </a:effectRef>
+          <a:fontRef idx="minor">
+            <a:schemeClr val="tx1"/>
+          </a:fontRef>
+        </p:style>
+      </p:cxnSp>
+      <p:cxnSp>
+        <p:nvCxnSpPr>
+          <p:cNvPr id="26" name="Gerader Verbinder 25">
+            <a:extLst>
+              <a:ext uri="{FF2B5EF4-FFF2-40B4-BE49-F238E27FC236}">
+                <a16:creationId xmlns:a16="http://schemas.microsoft.com/office/drawing/2014/main" id="{F464F4A8-969B-47FF-BF65-D421E28CF736}"/>
+              </a:ext>
+            </a:extLst>
+          </p:cNvPr>
+          <p:cNvCxnSpPr>
+            <a:cxnSpLocks/>
+          </p:cNvCxnSpPr>
+          <p:nvPr/>
+        </p:nvCxnSpPr>
+        <p:spPr>
+          <a:xfrm>
+            <a:off x="1676819" y="1232535"/>
+            <a:ext cx="204360" cy="817229"/>
+          </a:xfrm>
+          <a:prstGeom prst="line">
+            <a:avLst/>
+          </a:prstGeom>
+          <a:ln w="9525" cap="rnd">
+            <a:solidFill>
+              <a:schemeClr val="tx1">
+                <a:lumMod val="65000"/>
+                <a:lumOff val="35000"/>
+              </a:schemeClr>
+            </a:solidFill>
+            <a:prstDash val="sysDash"/>
+            <a:round/>
+          </a:ln>
+        </p:spPr>
+        <p:style>
+          <a:lnRef idx="2">
+            <a:schemeClr val="accent1"/>
+          </a:lnRef>
+          <a:fillRef idx="0">
+            <a:schemeClr val="accent1"/>
+          </a:fillRef>
+          <a:effectRef idx="1">
+            <a:schemeClr val="accent1"/>
+          </a:effectRef>
+          <a:fontRef idx="minor">
+            <a:schemeClr val="tx1"/>
+          </a:fontRef>
+        </p:style>
+      </p:cxnSp>
+      <p:sp>
+        <p:nvSpPr>
+          <p:cNvPr id="32" name="Textfeld 31">
+            <a:extLst>
+              <a:ext uri="{FF2B5EF4-FFF2-40B4-BE49-F238E27FC236}">
+                <a16:creationId xmlns:a16="http://schemas.microsoft.com/office/drawing/2014/main" id="{196F563C-21D9-C972-2A4C-A4878E64E0F8}"/>
+              </a:ext>
+            </a:extLst>
+          </p:cNvPr>
+          <p:cNvSpPr txBox="1"/>
+          <p:nvPr/>
+        </p:nvSpPr>
+        <p:spPr>
+          <a:xfrm>
+            <a:off x="703201" y="1135694"/>
+            <a:ext cx="567731" cy="307777"/>
+          </a:xfrm>
+          <a:prstGeom prst="rect">
+            <a:avLst/>
+          </a:prstGeom>
+          <a:noFill/>
+        </p:spPr>
+        <p:txBody>
+          <a:bodyPr wrap="square" rtlCol="0">
+            <a:spAutoFit/>
+          </a:bodyPr>
+          <a:lstStyle/>
+          <a:p>
+            <a:pPr algn="ctr"/>
+            <a:r>
+              <a:rPr lang="de-DE" sz="1400" i="1" dirty="0">
+                <a:solidFill>
+                  <a:schemeClr val="tx1">
+                    <a:lumMod val="65000"/>
+                    <a:lumOff val="35000"/>
+                  </a:schemeClr>
+                </a:solidFill>
+                <a:latin typeface="CMU Serif" panose="02000603000000000000" pitchFamily="2" charset="0"/>
+                <a:ea typeface="CMU Serif" panose="02000603000000000000" pitchFamily="2" charset="0"/>
+                <a:cs typeface="CMU Serif" panose="02000603000000000000" pitchFamily="2" charset="0"/>
+              </a:rPr>
+              <a:t>R</a:t>
+            </a:r>
+            <a:endParaRPr lang="de-DE" sz="1400" baseline="-25000" dirty="0">
+              <a:solidFill>
+                <a:schemeClr val="tx1">
+                  <a:lumMod val="65000"/>
+                  <a:lumOff val="35000"/>
+                </a:schemeClr>
+              </a:solidFill>
+              <a:latin typeface="CMU Serif" panose="02000603000000000000" pitchFamily="2" charset="0"/>
+              <a:ea typeface="CMU Serif" panose="02000603000000000000" pitchFamily="2" charset="0"/>
+              <a:cs typeface="CMU Serif" panose="02000603000000000000" pitchFamily="2" charset="0"/>
+            </a:endParaRPr>
+          </a:p>
+        </p:txBody>
+      </p:sp>
+      <p:sp>
+        <p:nvSpPr>
+          <p:cNvPr id="34" name="Textfeld 33">
+            <a:extLst>
+              <a:ext uri="{FF2B5EF4-FFF2-40B4-BE49-F238E27FC236}">
+                <a16:creationId xmlns:a16="http://schemas.microsoft.com/office/drawing/2014/main" id="{0C154BAE-1F3F-3F10-D4C5-EF69DF26A03F}"/>
+              </a:ext>
+            </a:extLst>
+          </p:cNvPr>
+          <p:cNvSpPr txBox="1"/>
+          <p:nvPr/>
+        </p:nvSpPr>
+        <p:spPr>
+          <a:xfrm>
+            <a:off x="1542317" y="1119906"/>
+            <a:ext cx="567731" cy="307777"/>
+          </a:xfrm>
+          <a:prstGeom prst="rect">
+            <a:avLst/>
+          </a:prstGeom>
+          <a:noFill/>
+        </p:spPr>
+        <p:txBody>
+          <a:bodyPr wrap="square" rtlCol="0">
+            <a:spAutoFit/>
+          </a:bodyPr>
+          <a:lstStyle/>
+          <a:p>
+            <a:pPr algn="ctr"/>
+            <a:r>
+              <a:rPr lang="de-DE" sz="1400" i="1" dirty="0">
+                <a:solidFill>
+                  <a:schemeClr val="tx1">
+                    <a:lumMod val="65000"/>
+                    <a:lumOff val="35000"/>
+                  </a:schemeClr>
+                </a:solidFill>
+                <a:latin typeface="CMU Serif" panose="02000603000000000000" pitchFamily="2" charset="0"/>
+                <a:ea typeface="CMU Serif" panose="02000603000000000000" pitchFamily="2" charset="0"/>
+                <a:cs typeface="CMU Serif" panose="02000603000000000000" pitchFamily="2" charset="0"/>
+              </a:rPr>
+              <a:t>Z</a:t>
+            </a:r>
+            <a:endParaRPr lang="de-DE" sz="1400" baseline="-25000" dirty="0">
+              <a:solidFill>
+                <a:schemeClr val="tx1">
+                  <a:lumMod val="65000"/>
+                  <a:lumOff val="35000"/>
+                </a:schemeClr>
+              </a:solidFill>
+              <a:latin typeface="CMU Serif" panose="02000603000000000000" pitchFamily="2" charset="0"/>
+              <a:ea typeface="CMU Serif" panose="02000603000000000000" pitchFamily="2" charset="0"/>
+              <a:cs typeface="CMU Serif" panose="02000603000000000000" pitchFamily="2" charset="0"/>
+            </a:endParaRPr>
+          </a:p>
+        </p:txBody>
+      </p:sp>
+      <p:sp>
+        <p:nvSpPr>
+          <p:cNvPr id="35" name="Textfeld 34">
+            <a:extLst>
+              <a:ext uri="{FF2B5EF4-FFF2-40B4-BE49-F238E27FC236}">
+                <a16:creationId xmlns:a16="http://schemas.microsoft.com/office/drawing/2014/main" id="{6B51B853-B1D3-1769-E086-448BEFD64F20}"/>
+              </a:ext>
+            </a:extLst>
+          </p:cNvPr>
+          <p:cNvSpPr txBox="1"/>
+          <p:nvPr/>
+        </p:nvSpPr>
+        <p:spPr>
+          <a:xfrm>
+            <a:off x="1188701" y="1371235"/>
+            <a:ext cx="518786" cy="261610"/>
+          </a:xfrm>
+          <a:prstGeom prst="rect">
+            <a:avLst/>
+          </a:prstGeom>
+          <a:noFill/>
+        </p:spPr>
+        <p:txBody>
+          <a:bodyPr wrap="square" rtlCol="0">
+            <a:spAutoFit/>
+          </a:bodyPr>
+          <a:lstStyle/>
+          <a:p>
+            <a:pPr algn="ctr"/>
+            <a:r>
+              <a:rPr lang="de-DE" sz="1100" i="1" dirty="0">
+                <a:solidFill>
+                  <a:schemeClr val="accent2">
+                    <a:lumMod val="75000"/>
+                  </a:schemeClr>
+                </a:solidFill>
+                <a:latin typeface="Latin Modern Math" panose="02000503000000000000" pitchFamily="50" charset="0"/>
+                <a:ea typeface="Latin Modern Math" panose="02000503000000000000" pitchFamily="50" charset="0"/>
+                <a:cs typeface="CMU Serif" panose="02000603000000000000" pitchFamily="2" charset="0"/>
+              </a:rPr>
+              <a:t>φ</a:t>
+            </a:r>
+            <a:endParaRPr lang="de-DE" sz="1100" baseline="-25000" dirty="0">
+              <a:solidFill>
+                <a:schemeClr val="accent2">
+                  <a:lumMod val="75000"/>
+                </a:schemeClr>
+              </a:solidFill>
+              <a:latin typeface="CMU Serif" panose="02000603000000000000" pitchFamily="2" charset="0"/>
+              <a:ea typeface="CMU Serif" panose="02000603000000000000" pitchFamily="2" charset="0"/>
+              <a:cs typeface="CMU Serif" panose="02000603000000000000" pitchFamily="2" charset="0"/>
+            </a:endParaRPr>
+          </a:p>
+        </p:txBody>
+      </p:sp>
+      <p:sp>
+        <p:nvSpPr>
+          <p:cNvPr id="38" name="Textfeld 37">
+            <a:extLst>
+              <a:ext uri="{FF2B5EF4-FFF2-40B4-BE49-F238E27FC236}">
+                <a16:creationId xmlns:a16="http://schemas.microsoft.com/office/drawing/2014/main" id="{870D773E-4D4D-19A5-AFF4-F19196983DC0}"/>
+              </a:ext>
+            </a:extLst>
+          </p:cNvPr>
+          <p:cNvSpPr txBox="1"/>
+          <p:nvPr/>
+        </p:nvSpPr>
+        <p:spPr>
+          <a:xfrm>
+            <a:off x="1254580" y="1895604"/>
+            <a:ext cx="518786" cy="261610"/>
+          </a:xfrm>
+          <a:prstGeom prst="rect">
+            <a:avLst/>
+          </a:prstGeom>
+          <a:noFill/>
+        </p:spPr>
+        <p:txBody>
+          <a:bodyPr wrap="square" rtlCol="0">
+            <a:spAutoFit/>
+          </a:bodyPr>
+          <a:lstStyle/>
+          <a:p>
+            <a:pPr algn="ctr"/>
+            <a:r>
+              <a:rPr lang="de-DE" sz="1100" i="1" dirty="0" err="1">
+                <a:solidFill>
+                  <a:schemeClr val="accent6">
+                    <a:lumMod val="75000"/>
+                  </a:schemeClr>
+                </a:solidFill>
+                <a:latin typeface="Latin Modern Math" panose="02000503000000000000" pitchFamily="50" charset="0"/>
+                <a:ea typeface="Latin Modern Math" panose="02000503000000000000" pitchFamily="50" charset="0"/>
+                <a:cs typeface="CMU Serif" panose="02000603000000000000" pitchFamily="2" charset="0"/>
+              </a:rPr>
+              <a:t>φ</a:t>
+            </a:r>
+            <a:r>
+              <a:rPr lang="de-DE" sz="1100" baseline="-25000" dirty="0" err="1">
+                <a:solidFill>
+                  <a:schemeClr val="accent6">
+                    <a:lumMod val="75000"/>
+                  </a:schemeClr>
+                </a:solidFill>
+                <a:latin typeface="CMU Serif" panose="02000603000000000000" pitchFamily="2" charset="0"/>
+                <a:ea typeface="CMU Serif" panose="02000603000000000000" pitchFamily="2" charset="0"/>
+                <a:cs typeface="CMU Serif" panose="02000603000000000000" pitchFamily="2" charset="0"/>
+              </a:rPr>
+              <a:t>C</a:t>
+            </a:r>
+            <a:endParaRPr lang="de-DE" sz="1100" baseline="-25000" dirty="0">
+              <a:solidFill>
+                <a:schemeClr val="accent6">
+                  <a:lumMod val="75000"/>
+                </a:schemeClr>
+              </a:solidFill>
+              <a:latin typeface="CMU Serif" panose="02000603000000000000" pitchFamily="2" charset="0"/>
+              <a:ea typeface="CMU Serif" panose="02000603000000000000" pitchFamily="2" charset="0"/>
+              <a:cs typeface="CMU Serif" panose="02000603000000000000" pitchFamily="2" charset="0"/>
+            </a:endParaRPr>
+          </a:p>
+        </p:txBody>
+      </p:sp>
+      <p:sp>
+        <p:nvSpPr>
+          <p:cNvPr id="39" name="Textfeld 38">
+            <a:extLst>
+              <a:ext uri="{FF2B5EF4-FFF2-40B4-BE49-F238E27FC236}">
+                <a16:creationId xmlns:a16="http://schemas.microsoft.com/office/drawing/2014/main" id="{035BFAF9-3CBF-FA3D-B9C0-B7A2F10CD3A7}"/>
+              </a:ext>
+            </a:extLst>
+          </p:cNvPr>
+          <p:cNvSpPr txBox="1"/>
+          <p:nvPr/>
+        </p:nvSpPr>
+        <p:spPr>
+          <a:xfrm>
+            <a:off x="1509215" y="2200478"/>
+            <a:ext cx="518786" cy="261610"/>
+          </a:xfrm>
+          <a:prstGeom prst="rect">
+            <a:avLst/>
+          </a:prstGeom>
+          <a:noFill/>
+        </p:spPr>
+        <p:txBody>
+          <a:bodyPr wrap="square" rtlCol="0">
+            <a:spAutoFit/>
+          </a:bodyPr>
+          <a:lstStyle/>
+          <a:p>
+            <a:pPr algn="ctr"/>
+            <a:r>
+              <a:rPr lang="de-DE" sz="1100" i="1" dirty="0">
+                <a:solidFill>
+                  <a:schemeClr val="accent5"/>
+                </a:solidFill>
+                <a:latin typeface="Latin Modern Math" panose="02000503000000000000" pitchFamily="50" charset="0"/>
+                <a:ea typeface="Latin Modern Math" panose="02000503000000000000" pitchFamily="50" charset="0"/>
+                <a:cs typeface="CMU Serif" panose="02000603000000000000" pitchFamily="2" charset="0"/>
+              </a:rPr>
+              <a:t>ω </a:t>
+            </a:r>
+            <a:r>
+              <a:rPr lang="de-DE" sz="400" dirty="0">
+                <a:solidFill>
+                  <a:schemeClr val="accent5"/>
+                </a:solidFill>
+                <a:latin typeface="Latin Modern Math" panose="02000503000000000000" pitchFamily="50" charset="0"/>
+                <a:ea typeface="Latin Modern Math" panose="02000503000000000000" pitchFamily="50" charset="0"/>
+                <a:cs typeface="CMU Serif" panose="02000603000000000000" pitchFamily="2" charset="0"/>
+              </a:rPr>
+              <a:t>∙</a:t>
+            </a:r>
+            <a:r>
+              <a:rPr lang="de-DE" sz="1100" i="1" dirty="0">
+                <a:solidFill>
+                  <a:schemeClr val="accent5"/>
+                </a:solidFill>
+                <a:latin typeface="Latin Modern Math" panose="02000503000000000000" pitchFamily="50" charset="0"/>
+                <a:ea typeface="Latin Modern Math" panose="02000503000000000000" pitchFamily="50" charset="0"/>
+                <a:cs typeface="CMU Serif" panose="02000603000000000000" pitchFamily="2" charset="0"/>
+              </a:rPr>
+              <a:t> </a:t>
+            </a:r>
+            <a:r>
+              <a:rPr lang="de-DE" sz="1100" i="1" dirty="0">
+                <a:solidFill>
+                  <a:schemeClr val="accent5"/>
+                </a:solidFill>
+                <a:latin typeface="CMU Serif" panose="02000603000000000000" pitchFamily="2" charset="0"/>
+                <a:ea typeface="CMU Serif" panose="02000603000000000000" pitchFamily="2" charset="0"/>
+                <a:cs typeface="CMU Serif" panose="02000603000000000000" pitchFamily="2" charset="0"/>
+              </a:rPr>
+              <a:t>t</a:t>
+            </a:r>
+            <a:endParaRPr lang="de-DE" sz="1100" baseline="-25000" dirty="0">
+              <a:solidFill>
+                <a:schemeClr val="accent5"/>
+              </a:solidFill>
+              <a:latin typeface="CMU Serif" panose="02000603000000000000" pitchFamily="2" charset="0"/>
+              <a:ea typeface="CMU Serif" panose="02000603000000000000" pitchFamily="2" charset="0"/>
+              <a:cs typeface="CMU Serif" panose="02000603000000000000" pitchFamily="2" charset="0"/>
+            </a:endParaRPr>
+          </a:p>
+        </p:txBody>
+      </p:sp>
+      <p:cxnSp>
+        <p:nvCxnSpPr>
+          <p:cNvPr id="17" name="Gerade Verbindung mit Pfeil 16">
+            <a:extLst>
+              <a:ext uri="{FF2B5EF4-FFF2-40B4-BE49-F238E27FC236}">
+                <a16:creationId xmlns:a16="http://schemas.microsoft.com/office/drawing/2014/main" id="{C70E8374-4850-B467-BF1E-35A341D4A161}"/>
+              </a:ext>
+            </a:extLst>
+          </p:cNvPr>
+          <p:cNvCxnSpPr>
+            <a:cxnSpLocks/>
+          </p:cNvCxnSpPr>
+          <p:nvPr/>
+        </p:nvCxnSpPr>
+        <p:spPr>
+          <a:xfrm flipV="1">
+            <a:off x="1333628" y="1232535"/>
+            <a:ext cx="342772" cy="965506"/>
+          </a:xfrm>
+          <a:prstGeom prst="straightConnector1">
+            <a:avLst/>
+          </a:prstGeom>
+          <a:ln cap="rnd">
+            <a:solidFill>
+              <a:schemeClr val="tx1">
+                <a:lumMod val="65000"/>
+                <a:lumOff val="35000"/>
+              </a:schemeClr>
+            </a:solidFill>
+            <a:round/>
+            <a:tailEnd type="triangle" w="med" len="med"/>
+          </a:ln>
+        </p:spPr>
+        <p:style>
+          <a:lnRef idx="2">
+            <a:schemeClr val="accent1"/>
+          </a:lnRef>
+          <a:fillRef idx="0">
+            <a:schemeClr val="accent1"/>
+          </a:fillRef>
+          <a:effectRef idx="1">
+            <a:schemeClr val="accent1"/>
+          </a:effectRef>
+          <a:fontRef idx="minor">
+            <a:schemeClr val="tx1"/>
+          </a:fontRef>
+        </p:style>
+      </p:cxnSp>
+      <p:cxnSp>
+        <p:nvCxnSpPr>
+          <p:cNvPr id="5" name="Gerade Verbindung mit Pfeil 4">
+            <a:extLst>
+              <a:ext uri="{FF2B5EF4-FFF2-40B4-BE49-F238E27FC236}">
+                <a16:creationId xmlns:a16="http://schemas.microsoft.com/office/drawing/2014/main" id="{845A89D4-9A82-1EDD-5C36-1209F3F1A65C}"/>
+              </a:ext>
+            </a:extLst>
+          </p:cNvPr>
+          <p:cNvCxnSpPr>
+            <a:cxnSpLocks/>
+          </p:cNvCxnSpPr>
+          <p:nvPr/>
+        </p:nvCxnSpPr>
+        <p:spPr>
+          <a:xfrm flipV="1">
+            <a:off x="1333630" y="1173167"/>
+            <a:ext cx="0" cy="1254116"/>
+          </a:xfrm>
+          <a:prstGeom prst="straightConnector1">
+            <a:avLst/>
+          </a:prstGeom>
+          <a:ln cap="rnd">
+            <a:solidFill>
+              <a:schemeClr val="tx1"/>
+            </a:solidFill>
+            <a:round/>
+            <a:tailEnd type="triangle" w="med" len="med"/>
+          </a:ln>
+        </p:spPr>
+        <p:style>
+          <a:lnRef idx="2">
+            <a:schemeClr val="accent1"/>
+          </a:lnRef>
+          <a:fillRef idx="0">
+            <a:schemeClr val="accent1"/>
+          </a:fillRef>
+          <a:effectRef idx="1">
+            <a:schemeClr val="accent1"/>
+          </a:effectRef>
+          <a:fontRef idx="minor">
+            <a:schemeClr val="tx1"/>
+          </a:fontRef>
+        </p:style>
+      </p:cxnSp>
+      <p:cxnSp>
+        <p:nvCxnSpPr>
+          <p:cNvPr id="6" name="Gerade Verbindung mit Pfeil 5">
+            <a:extLst>
+              <a:ext uri="{FF2B5EF4-FFF2-40B4-BE49-F238E27FC236}">
+                <a16:creationId xmlns:a16="http://schemas.microsoft.com/office/drawing/2014/main" id="{E50FA914-8933-4BC7-D9E7-23860076FF33}"/>
+              </a:ext>
+            </a:extLst>
+          </p:cNvPr>
+          <p:cNvCxnSpPr>
+            <a:cxnSpLocks/>
+          </p:cNvCxnSpPr>
+          <p:nvPr/>
+        </p:nvCxnSpPr>
+        <p:spPr>
+          <a:xfrm>
+            <a:off x="1124941" y="2201867"/>
+            <a:ext cx="1242999" cy="0"/>
+          </a:xfrm>
+          <a:prstGeom prst="straightConnector1">
+            <a:avLst/>
+          </a:prstGeom>
+          <a:ln cap="rnd">
+            <a:solidFill>
+              <a:schemeClr val="tx1"/>
+            </a:solidFill>
+            <a:round/>
+            <a:tailEnd type="triangle" w="med" len="med"/>
+          </a:ln>
+        </p:spPr>
+        <p:style>
+          <a:lnRef idx="2">
+            <a:schemeClr val="accent1"/>
+          </a:lnRef>
+          <a:fillRef idx="0">
+            <a:schemeClr val="accent1"/>
+          </a:fillRef>
+          <a:effectRef idx="1">
+            <a:schemeClr val="accent1"/>
+          </a:effectRef>
+          <a:fontRef idx="minor">
+            <a:schemeClr val="tx1"/>
+          </a:fontRef>
+        </p:style>
+      </p:cxnSp>
+    </p:spTree>
+    <p:extLst>
+      <p:ext uri="{BB962C8B-B14F-4D97-AF65-F5344CB8AC3E}">
+        <p14:creationId xmlns:p14="http://schemas.microsoft.com/office/powerpoint/2010/main" val="2688220480"/>
+      </p:ext>
+    </p:extLst>
+  </p:cSld>
+  <p:clrMapOvr>
+    <a:masterClrMapping/>
+  </p:clrMapOvr>
+</p:sld>
+</file>
+
 <file path=ppt/slides/slide2.xml><?xml version="1.0" encoding="utf-8"?>
 <p:sld xmlns:a="http://schemas.openxmlformats.org/drawingml/2006/main" xmlns:r="http://schemas.openxmlformats.org/officeDocument/2006/relationships" xmlns:p="http://schemas.openxmlformats.org/presentationml/2006/main">
   <p:cSld>
@@ -11464,6 +17543,2231 @@
     <p:extLst>
       <p:ext uri="{BB962C8B-B14F-4D97-AF65-F5344CB8AC3E}">
         <p14:creationId xmlns:p14="http://schemas.microsoft.com/office/powerpoint/2010/main" val="3333156678"/>
+      </p:ext>
+    </p:extLst>
+  </p:cSld>
+  <p:clrMapOvr>
+    <a:masterClrMapping/>
+  </p:clrMapOvr>
+</p:sld>
+</file>
+
+<file path=ppt/slides/slide20.xml><?xml version="1.0" encoding="utf-8"?>
+<p:sld xmlns:a="http://schemas.openxmlformats.org/drawingml/2006/main" xmlns:r="http://schemas.openxmlformats.org/officeDocument/2006/relationships" xmlns:p="http://schemas.openxmlformats.org/presentationml/2006/main">
+  <p:cSld>
+    <p:spTree>
+      <p:nvGrpSpPr>
+        <p:cNvPr id="1" name="">
+          <a:extLst>
+            <a:ext uri="{FF2B5EF4-FFF2-40B4-BE49-F238E27FC236}">
+              <a16:creationId xmlns:a16="http://schemas.microsoft.com/office/drawing/2014/main" id="{7800611E-7525-B20B-66C4-C817FE3018DB}"/>
+            </a:ext>
+          </a:extLst>
+        </p:cNvPr>
+        <p:cNvGrpSpPr/>
+        <p:nvPr/>
+      </p:nvGrpSpPr>
+      <p:grpSpPr>
+        <a:xfrm>
+          <a:off x="0" y="0"/>
+          <a:ext cx="0" cy="0"/>
+          <a:chOff x="0" y="0"/>
+          <a:chExt cx="0" cy="0"/>
+        </a:xfrm>
+      </p:grpSpPr>
+      <p:sp>
+        <p:nvSpPr>
+          <p:cNvPr id="36" name="Bogen 35">
+            <a:extLst>
+              <a:ext uri="{FF2B5EF4-FFF2-40B4-BE49-F238E27FC236}">
+                <a16:creationId xmlns:a16="http://schemas.microsoft.com/office/drawing/2014/main" id="{A8ACBFC0-F7E3-1095-90D5-0C8E0D570DDC}"/>
+              </a:ext>
+            </a:extLst>
+          </p:cNvPr>
+          <p:cNvSpPr/>
+          <p:nvPr/>
+        </p:nvSpPr>
+        <p:spPr>
+          <a:xfrm>
+            <a:off x="1015221" y="1882453"/>
+            <a:ext cx="634988" cy="634986"/>
+          </a:xfrm>
+          <a:prstGeom prst="arc">
+            <a:avLst>
+              <a:gd name="adj1" fmla="val 14973702"/>
+              <a:gd name="adj2" fmla="val 20361855"/>
+            </a:avLst>
+          </a:prstGeom>
+          <a:ln cap="rnd">
+            <a:solidFill>
+              <a:schemeClr val="accent6">
+                <a:lumMod val="75000"/>
+              </a:schemeClr>
+            </a:solidFill>
+            <a:round/>
+            <a:headEnd type="none"/>
+            <a:tailEnd type="triangle"/>
+          </a:ln>
+        </p:spPr>
+        <p:style>
+          <a:lnRef idx="2">
+            <a:schemeClr val="accent1"/>
+          </a:lnRef>
+          <a:fillRef idx="0">
+            <a:schemeClr val="accent1"/>
+          </a:fillRef>
+          <a:effectRef idx="1">
+            <a:schemeClr val="accent1"/>
+          </a:effectRef>
+          <a:fontRef idx="minor">
+            <a:schemeClr val="tx1"/>
+          </a:fontRef>
+        </p:style>
+        <p:txBody>
+          <a:bodyPr rtlCol="0" anchor="ctr"/>
+          <a:lstStyle/>
+          <a:p>
+            <a:pPr algn="ctr"/>
+            <a:endParaRPr lang="de-DE" sz="2400" dirty="0"/>
+          </a:p>
+        </p:txBody>
+      </p:sp>
+      <p:sp>
+        <p:nvSpPr>
+          <p:cNvPr id="33" name="Bogen 32">
+            <a:extLst>
+              <a:ext uri="{FF2B5EF4-FFF2-40B4-BE49-F238E27FC236}">
+                <a16:creationId xmlns:a16="http://schemas.microsoft.com/office/drawing/2014/main" id="{CA47CA2A-BB74-E796-9393-4007F46ACAEB}"/>
+              </a:ext>
+            </a:extLst>
+          </p:cNvPr>
+          <p:cNvSpPr/>
+          <p:nvPr/>
+        </p:nvSpPr>
+        <p:spPr>
+          <a:xfrm>
+            <a:off x="723382" y="1589699"/>
+            <a:ext cx="1220493" cy="1220493"/>
+          </a:xfrm>
+          <a:prstGeom prst="arc">
+            <a:avLst>
+              <a:gd name="adj1" fmla="val 18675553"/>
+              <a:gd name="adj2" fmla="val 20361855"/>
+            </a:avLst>
+          </a:prstGeom>
+          <a:ln cap="rnd">
+            <a:solidFill>
+              <a:schemeClr val="accent2">
+                <a:lumMod val="75000"/>
+              </a:schemeClr>
+            </a:solidFill>
+            <a:round/>
+            <a:headEnd type="triangle"/>
+          </a:ln>
+        </p:spPr>
+        <p:style>
+          <a:lnRef idx="2">
+            <a:schemeClr val="accent1"/>
+          </a:lnRef>
+          <a:fillRef idx="0">
+            <a:schemeClr val="accent1"/>
+          </a:fillRef>
+          <a:effectRef idx="1">
+            <a:schemeClr val="accent1"/>
+          </a:effectRef>
+          <a:fontRef idx="minor">
+            <a:schemeClr val="tx1"/>
+          </a:fontRef>
+        </p:style>
+        <p:txBody>
+          <a:bodyPr rtlCol="0" anchor="ctr"/>
+          <a:lstStyle/>
+          <a:p>
+            <a:pPr algn="ctr"/>
+            <a:endParaRPr lang="de-DE" sz="2400" dirty="0"/>
+          </a:p>
+        </p:txBody>
+      </p:sp>
+      <p:cxnSp>
+        <p:nvCxnSpPr>
+          <p:cNvPr id="17" name="Gerade Verbindung mit Pfeil 16">
+            <a:extLst>
+              <a:ext uri="{FF2B5EF4-FFF2-40B4-BE49-F238E27FC236}">
+                <a16:creationId xmlns:a16="http://schemas.microsoft.com/office/drawing/2014/main" id="{2D400844-18AF-ECDE-9693-BE896915B567}"/>
+              </a:ext>
+            </a:extLst>
+          </p:cNvPr>
+          <p:cNvCxnSpPr>
+            <a:cxnSpLocks/>
+          </p:cNvCxnSpPr>
+          <p:nvPr/>
+        </p:nvCxnSpPr>
+        <p:spPr>
+          <a:xfrm flipV="1">
+            <a:off x="1333628" y="1387173"/>
+            <a:ext cx="705197" cy="810868"/>
+          </a:xfrm>
+          <a:prstGeom prst="straightConnector1">
+            <a:avLst/>
+          </a:prstGeom>
+          <a:ln cap="rnd">
+            <a:solidFill>
+              <a:srgbClr val="FF0000"/>
+            </a:solidFill>
+            <a:round/>
+            <a:tailEnd type="triangle" w="med" len="med"/>
+          </a:ln>
+        </p:spPr>
+        <p:style>
+          <a:lnRef idx="2">
+            <a:schemeClr val="accent1"/>
+          </a:lnRef>
+          <a:fillRef idx="0">
+            <a:schemeClr val="accent1"/>
+          </a:fillRef>
+          <a:effectRef idx="1">
+            <a:schemeClr val="accent1"/>
+          </a:effectRef>
+          <a:fontRef idx="minor">
+            <a:schemeClr val="tx1"/>
+          </a:fontRef>
+        </p:style>
+      </p:cxnSp>
+      <p:cxnSp>
+        <p:nvCxnSpPr>
+          <p:cNvPr id="15" name="Gerade Verbindung mit Pfeil 14">
+            <a:extLst>
+              <a:ext uri="{FF2B5EF4-FFF2-40B4-BE49-F238E27FC236}">
+                <a16:creationId xmlns:a16="http://schemas.microsoft.com/office/drawing/2014/main" id="{ECB5A77A-2EC6-700F-E5F1-053E97985D05}"/>
+              </a:ext>
+            </a:extLst>
+          </p:cNvPr>
+          <p:cNvCxnSpPr>
+            <a:cxnSpLocks/>
+          </p:cNvCxnSpPr>
+          <p:nvPr/>
+        </p:nvCxnSpPr>
+        <p:spPr>
+          <a:xfrm flipH="1" flipV="1">
+            <a:off x="1152398" y="1714951"/>
+            <a:ext cx="181230" cy="485003"/>
+          </a:xfrm>
+          <a:prstGeom prst="straightConnector1">
+            <a:avLst/>
+          </a:prstGeom>
+          <a:ln cap="rnd">
+            <a:solidFill>
+              <a:srgbClr val="FF0000"/>
+            </a:solidFill>
+            <a:round/>
+            <a:tailEnd type="triangle" w="med" len="med"/>
+          </a:ln>
+        </p:spPr>
+        <p:style>
+          <a:lnRef idx="2">
+            <a:schemeClr val="accent1"/>
+          </a:lnRef>
+          <a:fillRef idx="0">
+            <a:schemeClr val="accent1"/>
+          </a:fillRef>
+          <a:effectRef idx="1">
+            <a:schemeClr val="accent1"/>
+          </a:effectRef>
+          <a:fontRef idx="minor">
+            <a:schemeClr val="tx1"/>
+          </a:fontRef>
+        </p:style>
+      </p:cxnSp>
+      <p:sp>
+        <p:nvSpPr>
+          <p:cNvPr id="19" name="Bogen 18">
+            <a:extLst>
+              <a:ext uri="{FF2B5EF4-FFF2-40B4-BE49-F238E27FC236}">
+                <a16:creationId xmlns:a16="http://schemas.microsoft.com/office/drawing/2014/main" id="{7D9CEEFC-C592-E8FC-6E53-34F3F61F7421}"/>
+              </a:ext>
+            </a:extLst>
+          </p:cNvPr>
+          <p:cNvSpPr/>
+          <p:nvPr/>
+        </p:nvSpPr>
+        <p:spPr>
+          <a:xfrm>
+            <a:off x="723382" y="1591614"/>
+            <a:ext cx="1220493" cy="1220493"/>
+          </a:xfrm>
+          <a:prstGeom prst="arc">
+            <a:avLst>
+              <a:gd name="adj1" fmla="val 20384948"/>
+              <a:gd name="adj2" fmla="val 0"/>
+            </a:avLst>
+          </a:prstGeom>
+          <a:ln cap="rnd">
+            <a:solidFill>
+              <a:schemeClr val="accent5"/>
+            </a:solidFill>
+            <a:round/>
+            <a:headEnd type="triangle"/>
+          </a:ln>
+        </p:spPr>
+        <p:style>
+          <a:lnRef idx="2">
+            <a:schemeClr val="accent1"/>
+          </a:lnRef>
+          <a:fillRef idx="0">
+            <a:schemeClr val="accent1"/>
+          </a:fillRef>
+          <a:effectRef idx="1">
+            <a:schemeClr val="accent1"/>
+          </a:effectRef>
+          <a:fontRef idx="minor">
+            <a:schemeClr val="tx1"/>
+          </a:fontRef>
+        </p:style>
+        <p:txBody>
+          <a:bodyPr rtlCol="0" anchor="ctr"/>
+          <a:lstStyle/>
+          <a:p>
+            <a:pPr algn="ctr"/>
+            <a:endParaRPr lang="de-DE" sz="2400" dirty="0"/>
+          </a:p>
+        </p:txBody>
+      </p:sp>
+      <p:cxnSp>
+        <p:nvCxnSpPr>
+          <p:cNvPr id="8" name="Gerade Verbindung mit Pfeil 7">
+            <a:extLst>
+              <a:ext uri="{FF2B5EF4-FFF2-40B4-BE49-F238E27FC236}">
+                <a16:creationId xmlns:a16="http://schemas.microsoft.com/office/drawing/2014/main" id="{D7CA4E30-3F5C-8515-9FD9-591439097759}"/>
+              </a:ext>
+            </a:extLst>
+          </p:cNvPr>
+          <p:cNvCxnSpPr>
+            <a:cxnSpLocks/>
+          </p:cNvCxnSpPr>
+          <p:nvPr/>
+        </p:nvCxnSpPr>
+        <p:spPr>
+          <a:xfrm flipV="1">
+            <a:off x="1333630" y="1869118"/>
+            <a:ext cx="890496" cy="332749"/>
+          </a:xfrm>
+          <a:prstGeom prst="straightConnector1">
+            <a:avLst/>
+          </a:prstGeom>
+          <a:ln cap="rnd">
+            <a:solidFill>
+              <a:srgbClr val="FF0000"/>
+            </a:solidFill>
+            <a:round/>
+            <a:tailEnd type="triangle" w="med" len="med"/>
+          </a:ln>
+        </p:spPr>
+        <p:style>
+          <a:lnRef idx="2">
+            <a:schemeClr val="accent1"/>
+          </a:lnRef>
+          <a:fillRef idx="0">
+            <a:schemeClr val="accent1"/>
+          </a:fillRef>
+          <a:effectRef idx="1">
+            <a:schemeClr val="accent1"/>
+          </a:effectRef>
+          <a:fontRef idx="minor">
+            <a:schemeClr val="tx1"/>
+          </a:fontRef>
+        </p:style>
+      </p:cxnSp>
+      <p:cxnSp>
+        <p:nvCxnSpPr>
+          <p:cNvPr id="10" name="Gerade Verbindung mit Pfeil 9">
+            <a:extLst>
+              <a:ext uri="{FF2B5EF4-FFF2-40B4-BE49-F238E27FC236}">
+                <a16:creationId xmlns:a16="http://schemas.microsoft.com/office/drawing/2014/main" id="{E2A1E47E-C0A1-ED50-456E-6F565D7D4EEC}"/>
+              </a:ext>
+            </a:extLst>
+          </p:cNvPr>
+          <p:cNvCxnSpPr>
+            <a:cxnSpLocks/>
+          </p:cNvCxnSpPr>
+          <p:nvPr/>
+        </p:nvCxnSpPr>
+        <p:spPr>
+          <a:xfrm flipV="1">
+            <a:off x="1333629" y="2048789"/>
+            <a:ext cx="409941" cy="153078"/>
+          </a:xfrm>
+          <a:prstGeom prst="straightConnector1">
+            <a:avLst/>
+          </a:prstGeom>
+          <a:ln w="19050" cap="rnd">
+            <a:solidFill>
+              <a:srgbClr val="086FBD"/>
+            </a:solidFill>
+            <a:round/>
+            <a:tailEnd type="triangle" w="med" len="med"/>
+          </a:ln>
+        </p:spPr>
+        <p:style>
+          <a:lnRef idx="2">
+            <a:schemeClr val="accent1"/>
+          </a:lnRef>
+          <a:fillRef idx="0">
+            <a:schemeClr val="accent1"/>
+          </a:fillRef>
+          <a:effectRef idx="1">
+            <a:schemeClr val="accent1"/>
+          </a:effectRef>
+          <a:fontRef idx="minor">
+            <a:schemeClr val="tx1"/>
+          </a:fontRef>
+        </p:style>
+      </p:cxnSp>
+      <p:cxnSp>
+        <p:nvCxnSpPr>
+          <p:cNvPr id="5" name="Gerade Verbindung mit Pfeil 4">
+            <a:extLst>
+              <a:ext uri="{FF2B5EF4-FFF2-40B4-BE49-F238E27FC236}">
+                <a16:creationId xmlns:a16="http://schemas.microsoft.com/office/drawing/2014/main" id="{8A6AC442-F81F-A9C3-DCA8-49AD6E4736D2}"/>
+              </a:ext>
+            </a:extLst>
+          </p:cNvPr>
+          <p:cNvCxnSpPr>
+            <a:cxnSpLocks/>
+          </p:cNvCxnSpPr>
+          <p:nvPr/>
+        </p:nvCxnSpPr>
+        <p:spPr>
+          <a:xfrm flipV="1">
+            <a:off x="1333630" y="1173167"/>
+            <a:ext cx="0" cy="1254116"/>
+          </a:xfrm>
+          <a:prstGeom prst="straightConnector1">
+            <a:avLst/>
+          </a:prstGeom>
+          <a:ln cap="rnd">
+            <a:solidFill>
+              <a:schemeClr val="tx1"/>
+            </a:solidFill>
+            <a:round/>
+            <a:tailEnd type="triangle" w="med" len="med"/>
+          </a:ln>
+        </p:spPr>
+        <p:style>
+          <a:lnRef idx="2">
+            <a:schemeClr val="accent1"/>
+          </a:lnRef>
+          <a:fillRef idx="0">
+            <a:schemeClr val="accent1"/>
+          </a:fillRef>
+          <a:effectRef idx="1">
+            <a:schemeClr val="accent1"/>
+          </a:effectRef>
+          <a:fontRef idx="minor">
+            <a:schemeClr val="tx1"/>
+          </a:fontRef>
+        </p:style>
+      </p:cxnSp>
+      <p:cxnSp>
+        <p:nvCxnSpPr>
+          <p:cNvPr id="6" name="Gerade Verbindung mit Pfeil 5">
+            <a:extLst>
+              <a:ext uri="{FF2B5EF4-FFF2-40B4-BE49-F238E27FC236}">
+                <a16:creationId xmlns:a16="http://schemas.microsoft.com/office/drawing/2014/main" id="{50C9854A-AD4C-E9D5-6BD6-63451A78BEB0}"/>
+              </a:ext>
+            </a:extLst>
+          </p:cNvPr>
+          <p:cNvCxnSpPr>
+            <a:cxnSpLocks/>
+          </p:cNvCxnSpPr>
+          <p:nvPr/>
+        </p:nvCxnSpPr>
+        <p:spPr>
+          <a:xfrm>
+            <a:off x="1124941" y="2201867"/>
+            <a:ext cx="1242999" cy="0"/>
+          </a:xfrm>
+          <a:prstGeom prst="straightConnector1">
+            <a:avLst/>
+          </a:prstGeom>
+          <a:ln cap="rnd">
+            <a:solidFill>
+              <a:schemeClr val="tx1"/>
+            </a:solidFill>
+            <a:round/>
+            <a:tailEnd type="triangle" w="med" len="med"/>
+          </a:ln>
+        </p:spPr>
+        <p:style>
+          <a:lnRef idx="2">
+            <a:schemeClr val="accent1"/>
+          </a:lnRef>
+          <a:fillRef idx="0">
+            <a:schemeClr val="accent1"/>
+          </a:fillRef>
+          <a:effectRef idx="1">
+            <a:schemeClr val="accent1"/>
+          </a:effectRef>
+          <a:fontRef idx="minor">
+            <a:schemeClr val="tx1"/>
+          </a:fontRef>
+        </p:style>
+      </p:cxnSp>
+      <p:sp>
+        <p:nvSpPr>
+          <p:cNvPr id="13" name="Textfeld 12">
+            <a:extLst>
+              <a:ext uri="{FF2B5EF4-FFF2-40B4-BE49-F238E27FC236}">
+                <a16:creationId xmlns:a16="http://schemas.microsoft.com/office/drawing/2014/main" id="{5E34CB65-737D-DEC9-2881-A38F8F0463D1}"/>
+              </a:ext>
+            </a:extLst>
+          </p:cNvPr>
+          <p:cNvSpPr txBox="1"/>
+          <p:nvPr/>
+        </p:nvSpPr>
+        <p:spPr>
+          <a:xfrm>
+            <a:off x="2070145" y="1659455"/>
+            <a:ext cx="567731" cy="307777"/>
+          </a:xfrm>
+          <a:prstGeom prst="rect">
+            <a:avLst/>
+          </a:prstGeom>
+          <a:noFill/>
+        </p:spPr>
+        <p:txBody>
+          <a:bodyPr wrap="square" rtlCol="0">
+            <a:spAutoFit/>
+          </a:bodyPr>
+          <a:lstStyle/>
+          <a:p>
+            <a:pPr algn="ctr"/>
+            <a:r>
+              <a:rPr lang="de-DE" sz="1400" i="1" dirty="0">
+                <a:solidFill>
+                  <a:srgbClr val="FF0000"/>
+                </a:solidFill>
+                <a:latin typeface="CMU Serif" panose="02000603000000000000" pitchFamily="2" charset="0"/>
+                <a:ea typeface="CMU Serif" panose="02000603000000000000" pitchFamily="2" charset="0"/>
+                <a:cs typeface="CMU Serif" panose="02000603000000000000" pitchFamily="2" charset="0"/>
+              </a:rPr>
+              <a:t>I</a:t>
+            </a:r>
+            <a:r>
+              <a:rPr lang="de-DE" sz="1400" baseline="-25000" dirty="0">
+                <a:solidFill>
+                  <a:srgbClr val="FF0000"/>
+                </a:solidFill>
+                <a:latin typeface="CMU Serif" panose="02000603000000000000" pitchFamily="2" charset="0"/>
+                <a:ea typeface="CMU Serif" panose="02000603000000000000" pitchFamily="2" charset="0"/>
+                <a:cs typeface="CMU Serif" panose="02000603000000000000" pitchFamily="2" charset="0"/>
+              </a:rPr>
+              <a:t>R</a:t>
+            </a:r>
+          </a:p>
+        </p:txBody>
+      </p:sp>
+      <p:sp>
+        <p:nvSpPr>
+          <p:cNvPr id="14" name="Textfeld 13">
+            <a:extLst>
+              <a:ext uri="{FF2B5EF4-FFF2-40B4-BE49-F238E27FC236}">
+                <a16:creationId xmlns:a16="http://schemas.microsoft.com/office/drawing/2014/main" id="{7A887355-9F44-773C-268E-3FEFFAAD9A8D}"/>
+              </a:ext>
+            </a:extLst>
+          </p:cNvPr>
+          <p:cNvSpPr txBox="1"/>
+          <p:nvPr/>
+        </p:nvSpPr>
+        <p:spPr>
+          <a:xfrm>
+            <a:off x="1450218" y="2169108"/>
+            <a:ext cx="518786" cy="307777"/>
+          </a:xfrm>
+          <a:prstGeom prst="rect">
+            <a:avLst/>
+          </a:prstGeom>
+          <a:noFill/>
+        </p:spPr>
+        <p:txBody>
+          <a:bodyPr wrap="square" rtlCol="0">
+            <a:spAutoFit/>
+          </a:bodyPr>
+          <a:lstStyle/>
+          <a:p>
+            <a:pPr algn="ctr"/>
+            <a:r>
+              <a:rPr lang="de-DE" sz="1400" i="1" dirty="0" err="1">
+                <a:solidFill>
+                  <a:srgbClr val="086FBD"/>
+                </a:solidFill>
+                <a:latin typeface="CMU Serif" panose="02000603000000000000" pitchFamily="2" charset="0"/>
+                <a:ea typeface="CMU Serif" panose="02000603000000000000" pitchFamily="2" charset="0"/>
+                <a:cs typeface="CMU Serif" panose="02000603000000000000" pitchFamily="2" charset="0"/>
+              </a:rPr>
+              <a:t>U</a:t>
+            </a:r>
+            <a:r>
+              <a:rPr lang="de-DE" sz="1400" baseline="-25000" dirty="0" err="1">
+                <a:solidFill>
+                  <a:srgbClr val="086FBD"/>
+                </a:solidFill>
+                <a:latin typeface="CMU Serif" panose="02000603000000000000" pitchFamily="2" charset="0"/>
+                <a:ea typeface="CMU Serif" panose="02000603000000000000" pitchFamily="2" charset="0"/>
+                <a:cs typeface="CMU Serif" panose="02000603000000000000" pitchFamily="2" charset="0"/>
+              </a:rPr>
+              <a:t>ges</a:t>
+            </a:r>
+            <a:endParaRPr lang="de-DE" sz="1400" baseline="-25000" dirty="0">
+              <a:solidFill>
+                <a:srgbClr val="086FBD"/>
+              </a:solidFill>
+              <a:latin typeface="CMU Serif" panose="02000603000000000000" pitchFamily="2" charset="0"/>
+              <a:ea typeface="CMU Serif" panose="02000603000000000000" pitchFamily="2" charset="0"/>
+              <a:cs typeface="CMU Serif" panose="02000603000000000000" pitchFamily="2" charset="0"/>
+            </a:endParaRPr>
+          </a:p>
+        </p:txBody>
+      </p:sp>
+      <p:cxnSp>
+        <p:nvCxnSpPr>
+          <p:cNvPr id="21" name="Gerader Verbinder 20">
+            <a:extLst>
+              <a:ext uri="{FF2B5EF4-FFF2-40B4-BE49-F238E27FC236}">
+                <a16:creationId xmlns:a16="http://schemas.microsoft.com/office/drawing/2014/main" id="{741ECF74-E588-6CE4-4564-F12DD863BAF5}"/>
+              </a:ext>
+            </a:extLst>
+          </p:cNvPr>
+          <p:cNvCxnSpPr>
+            <a:cxnSpLocks/>
+          </p:cNvCxnSpPr>
+          <p:nvPr/>
+        </p:nvCxnSpPr>
+        <p:spPr>
+          <a:xfrm flipH="1">
+            <a:off x="1148130" y="1391540"/>
+            <a:ext cx="879069" cy="329246"/>
+          </a:xfrm>
+          <a:prstGeom prst="line">
+            <a:avLst/>
+          </a:prstGeom>
+          <a:ln w="9525" cap="rnd">
+            <a:solidFill>
+              <a:srgbClr val="FF0000"/>
+            </a:solidFill>
+            <a:prstDash val="sysDash"/>
+            <a:round/>
+          </a:ln>
+        </p:spPr>
+        <p:style>
+          <a:lnRef idx="2">
+            <a:schemeClr val="accent1"/>
+          </a:lnRef>
+          <a:fillRef idx="0">
+            <a:schemeClr val="accent1"/>
+          </a:fillRef>
+          <a:effectRef idx="1">
+            <a:schemeClr val="accent1"/>
+          </a:effectRef>
+          <a:fontRef idx="minor">
+            <a:schemeClr val="tx1"/>
+          </a:fontRef>
+        </p:style>
+      </p:cxnSp>
+      <p:cxnSp>
+        <p:nvCxnSpPr>
+          <p:cNvPr id="26" name="Gerader Verbinder 25">
+            <a:extLst>
+              <a:ext uri="{FF2B5EF4-FFF2-40B4-BE49-F238E27FC236}">
+                <a16:creationId xmlns:a16="http://schemas.microsoft.com/office/drawing/2014/main" id="{1F1642E6-6680-776B-1103-8CF4B40993E1}"/>
+              </a:ext>
+            </a:extLst>
+          </p:cNvPr>
+          <p:cNvCxnSpPr>
+            <a:cxnSpLocks/>
+          </p:cNvCxnSpPr>
+          <p:nvPr/>
+        </p:nvCxnSpPr>
+        <p:spPr>
+          <a:xfrm>
+            <a:off x="2038828" y="1387173"/>
+            <a:ext cx="181090" cy="482810"/>
+          </a:xfrm>
+          <a:prstGeom prst="line">
+            <a:avLst/>
+          </a:prstGeom>
+          <a:ln w="9525" cap="rnd">
+            <a:solidFill>
+              <a:srgbClr val="FF0000"/>
+            </a:solidFill>
+            <a:prstDash val="sysDash"/>
+            <a:round/>
+          </a:ln>
+        </p:spPr>
+        <p:style>
+          <a:lnRef idx="2">
+            <a:schemeClr val="accent1"/>
+          </a:lnRef>
+          <a:fillRef idx="0">
+            <a:schemeClr val="accent1"/>
+          </a:fillRef>
+          <a:effectRef idx="1">
+            <a:schemeClr val="accent1"/>
+          </a:effectRef>
+          <a:fontRef idx="minor">
+            <a:schemeClr val="tx1"/>
+          </a:fontRef>
+        </p:style>
+      </p:cxnSp>
+      <p:sp>
+        <p:nvSpPr>
+          <p:cNvPr id="32" name="Textfeld 31">
+            <a:extLst>
+              <a:ext uri="{FF2B5EF4-FFF2-40B4-BE49-F238E27FC236}">
+                <a16:creationId xmlns:a16="http://schemas.microsoft.com/office/drawing/2014/main" id="{468682C5-43C1-72D9-39F8-5B3C0C125E7B}"/>
+              </a:ext>
+            </a:extLst>
+          </p:cNvPr>
+          <p:cNvSpPr txBox="1"/>
+          <p:nvPr/>
+        </p:nvSpPr>
+        <p:spPr>
+          <a:xfrm>
+            <a:off x="841075" y="1364740"/>
+            <a:ext cx="567731" cy="307777"/>
+          </a:xfrm>
+          <a:prstGeom prst="rect">
+            <a:avLst/>
+          </a:prstGeom>
+          <a:noFill/>
+        </p:spPr>
+        <p:txBody>
+          <a:bodyPr wrap="square" rtlCol="0">
+            <a:spAutoFit/>
+          </a:bodyPr>
+          <a:lstStyle/>
+          <a:p>
+            <a:pPr algn="ctr"/>
+            <a:r>
+              <a:rPr lang="de-DE" sz="1400" i="1" dirty="0">
+                <a:solidFill>
+                  <a:srgbClr val="FF0000"/>
+                </a:solidFill>
+                <a:latin typeface="CMU Serif" panose="02000603000000000000" pitchFamily="2" charset="0"/>
+                <a:ea typeface="CMU Serif" panose="02000603000000000000" pitchFamily="2" charset="0"/>
+                <a:cs typeface="CMU Serif" panose="02000603000000000000" pitchFamily="2" charset="0"/>
+              </a:rPr>
+              <a:t>I</a:t>
+            </a:r>
+            <a:r>
+              <a:rPr lang="de-DE" sz="1400" baseline="-25000" dirty="0">
+                <a:solidFill>
+                  <a:srgbClr val="FF0000"/>
+                </a:solidFill>
+                <a:latin typeface="CMU Serif" panose="02000603000000000000" pitchFamily="2" charset="0"/>
+                <a:ea typeface="CMU Serif" panose="02000603000000000000" pitchFamily="2" charset="0"/>
+                <a:cs typeface="CMU Serif" panose="02000603000000000000" pitchFamily="2" charset="0"/>
+              </a:rPr>
+              <a:t>C</a:t>
+            </a:r>
+          </a:p>
+        </p:txBody>
+      </p:sp>
+      <p:sp>
+        <p:nvSpPr>
+          <p:cNvPr id="34" name="Textfeld 33">
+            <a:extLst>
+              <a:ext uri="{FF2B5EF4-FFF2-40B4-BE49-F238E27FC236}">
+                <a16:creationId xmlns:a16="http://schemas.microsoft.com/office/drawing/2014/main" id="{FE5A1705-7075-2B20-1CE1-25EF977C7397}"/>
+              </a:ext>
+            </a:extLst>
+          </p:cNvPr>
+          <p:cNvSpPr txBox="1"/>
+          <p:nvPr/>
+        </p:nvSpPr>
+        <p:spPr>
+          <a:xfrm>
+            <a:off x="1890840" y="1122170"/>
+            <a:ext cx="567731" cy="307777"/>
+          </a:xfrm>
+          <a:prstGeom prst="rect">
+            <a:avLst/>
+          </a:prstGeom>
+          <a:noFill/>
+        </p:spPr>
+        <p:txBody>
+          <a:bodyPr wrap="square" rtlCol="0">
+            <a:spAutoFit/>
+          </a:bodyPr>
+          <a:lstStyle/>
+          <a:p>
+            <a:pPr algn="ctr"/>
+            <a:r>
+              <a:rPr lang="de-DE" sz="1400" i="1" dirty="0" err="1">
+                <a:solidFill>
+                  <a:srgbClr val="FF0000"/>
+                </a:solidFill>
+                <a:latin typeface="CMU Serif" panose="02000603000000000000" pitchFamily="2" charset="0"/>
+                <a:ea typeface="CMU Serif" panose="02000603000000000000" pitchFamily="2" charset="0"/>
+                <a:cs typeface="CMU Serif" panose="02000603000000000000" pitchFamily="2" charset="0"/>
+              </a:rPr>
+              <a:t>I</a:t>
+            </a:r>
+            <a:r>
+              <a:rPr lang="de-DE" sz="1400" baseline="-25000" dirty="0" err="1">
+                <a:solidFill>
+                  <a:srgbClr val="FF0000"/>
+                </a:solidFill>
+                <a:latin typeface="CMU Serif" panose="02000603000000000000" pitchFamily="2" charset="0"/>
+                <a:ea typeface="CMU Serif" panose="02000603000000000000" pitchFamily="2" charset="0"/>
+                <a:cs typeface="CMU Serif" panose="02000603000000000000" pitchFamily="2" charset="0"/>
+              </a:rPr>
+              <a:t>ges</a:t>
+            </a:r>
+            <a:endParaRPr lang="de-DE" sz="1400" baseline="-25000" dirty="0">
+              <a:solidFill>
+                <a:srgbClr val="FF0000"/>
+              </a:solidFill>
+              <a:latin typeface="CMU Serif" panose="02000603000000000000" pitchFamily="2" charset="0"/>
+              <a:ea typeface="CMU Serif" panose="02000603000000000000" pitchFamily="2" charset="0"/>
+              <a:cs typeface="CMU Serif" panose="02000603000000000000" pitchFamily="2" charset="0"/>
+            </a:endParaRPr>
+          </a:p>
+        </p:txBody>
+      </p:sp>
+      <p:sp>
+        <p:nvSpPr>
+          <p:cNvPr id="35" name="Textfeld 34">
+            <a:extLst>
+              <a:ext uri="{FF2B5EF4-FFF2-40B4-BE49-F238E27FC236}">
+                <a16:creationId xmlns:a16="http://schemas.microsoft.com/office/drawing/2014/main" id="{E969BBC6-1ECC-24BA-7A13-BB715CEBC333}"/>
+              </a:ext>
+            </a:extLst>
+          </p:cNvPr>
+          <p:cNvSpPr txBox="1"/>
+          <p:nvPr/>
+        </p:nvSpPr>
+        <p:spPr>
+          <a:xfrm>
+            <a:off x="1689643" y="1682539"/>
+            <a:ext cx="518786" cy="261610"/>
+          </a:xfrm>
+          <a:prstGeom prst="rect">
+            <a:avLst/>
+          </a:prstGeom>
+          <a:noFill/>
+        </p:spPr>
+        <p:txBody>
+          <a:bodyPr wrap="square" rtlCol="0">
+            <a:spAutoFit/>
+          </a:bodyPr>
+          <a:lstStyle/>
+          <a:p>
+            <a:pPr algn="ctr"/>
+            <a:r>
+              <a:rPr lang="de-DE" sz="1100" i="1" dirty="0">
+                <a:solidFill>
+                  <a:schemeClr val="accent2">
+                    <a:lumMod val="75000"/>
+                  </a:schemeClr>
+                </a:solidFill>
+                <a:latin typeface="Latin Modern Math" panose="02000503000000000000" pitchFamily="50" charset="0"/>
+                <a:ea typeface="Latin Modern Math" panose="02000503000000000000" pitchFamily="50" charset="0"/>
+                <a:cs typeface="CMU Serif" panose="02000603000000000000" pitchFamily="2" charset="0"/>
+              </a:rPr>
+              <a:t>φ</a:t>
+            </a:r>
+            <a:endParaRPr lang="de-DE" sz="1100" baseline="-25000" dirty="0">
+              <a:solidFill>
+                <a:schemeClr val="accent2">
+                  <a:lumMod val="75000"/>
+                </a:schemeClr>
+              </a:solidFill>
+              <a:latin typeface="CMU Serif" panose="02000603000000000000" pitchFamily="2" charset="0"/>
+              <a:ea typeface="CMU Serif" panose="02000603000000000000" pitchFamily="2" charset="0"/>
+              <a:cs typeface="CMU Serif" panose="02000603000000000000" pitchFamily="2" charset="0"/>
+            </a:endParaRPr>
+          </a:p>
+        </p:txBody>
+      </p:sp>
+      <p:sp>
+        <p:nvSpPr>
+          <p:cNvPr id="38" name="Textfeld 37">
+            <a:extLst>
+              <a:ext uri="{FF2B5EF4-FFF2-40B4-BE49-F238E27FC236}">
+                <a16:creationId xmlns:a16="http://schemas.microsoft.com/office/drawing/2014/main" id="{CFD389EB-58B8-4244-AFAB-0D4462BD4B29}"/>
+              </a:ext>
+            </a:extLst>
+          </p:cNvPr>
+          <p:cNvSpPr txBox="1"/>
+          <p:nvPr/>
+        </p:nvSpPr>
+        <p:spPr>
+          <a:xfrm>
+            <a:off x="1207358" y="1664147"/>
+            <a:ext cx="518786" cy="261610"/>
+          </a:xfrm>
+          <a:prstGeom prst="rect">
+            <a:avLst/>
+          </a:prstGeom>
+          <a:noFill/>
+        </p:spPr>
+        <p:txBody>
+          <a:bodyPr wrap="square" rtlCol="0">
+            <a:spAutoFit/>
+          </a:bodyPr>
+          <a:lstStyle/>
+          <a:p>
+            <a:pPr algn="ctr"/>
+            <a:r>
+              <a:rPr lang="de-DE" sz="1100" i="1" dirty="0" err="1">
+                <a:solidFill>
+                  <a:schemeClr val="accent6">
+                    <a:lumMod val="75000"/>
+                  </a:schemeClr>
+                </a:solidFill>
+                <a:latin typeface="Latin Modern Math" panose="02000503000000000000" pitchFamily="50" charset="0"/>
+                <a:ea typeface="Latin Modern Math" panose="02000503000000000000" pitchFamily="50" charset="0"/>
+                <a:cs typeface="CMU Serif" panose="02000603000000000000" pitchFamily="2" charset="0"/>
+              </a:rPr>
+              <a:t>φ</a:t>
+            </a:r>
+            <a:r>
+              <a:rPr lang="de-DE" sz="1100" baseline="-25000" dirty="0" err="1">
+                <a:solidFill>
+                  <a:schemeClr val="accent6">
+                    <a:lumMod val="75000"/>
+                  </a:schemeClr>
+                </a:solidFill>
+                <a:latin typeface="CMU Serif" panose="02000603000000000000" pitchFamily="2" charset="0"/>
+                <a:ea typeface="CMU Serif" panose="02000603000000000000" pitchFamily="2" charset="0"/>
+                <a:cs typeface="CMU Serif" panose="02000603000000000000" pitchFamily="2" charset="0"/>
+              </a:rPr>
+              <a:t>C</a:t>
+            </a:r>
+            <a:endParaRPr lang="de-DE" sz="1100" baseline="-25000" dirty="0">
+              <a:solidFill>
+                <a:schemeClr val="accent6">
+                  <a:lumMod val="75000"/>
+                </a:schemeClr>
+              </a:solidFill>
+              <a:latin typeface="CMU Serif" panose="02000603000000000000" pitchFamily="2" charset="0"/>
+              <a:ea typeface="CMU Serif" panose="02000603000000000000" pitchFamily="2" charset="0"/>
+              <a:cs typeface="CMU Serif" panose="02000603000000000000" pitchFamily="2" charset="0"/>
+            </a:endParaRPr>
+          </a:p>
+        </p:txBody>
+      </p:sp>
+      <p:sp>
+        <p:nvSpPr>
+          <p:cNvPr id="39" name="Textfeld 38">
+            <a:extLst>
+              <a:ext uri="{FF2B5EF4-FFF2-40B4-BE49-F238E27FC236}">
+                <a16:creationId xmlns:a16="http://schemas.microsoft.com/office/drawing/2014/main" id="{D19E2B06-BFAF-8D5A-F8EA-034E4A71C056}"/>
+              </a:ext>
+            </a:extLst>
+          </p:cNvPr>
+          <p:cNvSpPr txBox="1"/>
+          <p:nvPr/>
+        </p:nvSpPr>
+        <p:spPr>
+          <a:xfrm>
+            <a:off x="1890840" y="1964060"/>
+            <a:ext cx="518786" cy="261610"/>
+          </a:xfrm>
+          <a:prstGeom prst="rect">
+            <a:avLst/>
+          </a:prstGeom>
+          <a:noFill/>
+        </p:spPr>
+        <p:txBody>
+          <a:bodyPr wrap="square" rtlCol="0">
+            <a:spAutoFit/>
+          </a:bodyPr>
+          <a:lstStyle/>
+          <a:p>
+            <a:pPr algn="ctr"/>
+            <a:r>
+              <a:rPr lang="de-DE" sz="1100" i="1" dirty="0">
+                <a:solidFill>
+                  <a:schemeClr val="accent5"/>
+                </a:solidFill>
+                <a:latin typeface="Latin Modern Math" panose="02000503000000000000" pitchFamily="50" charset="0"/>
+                <a:ea typeface="Latin Modern Math" panose="02000503000000000000" pitchFamily="50" charset="0"/>
+                <a:cs typeface="CMU Serif" panose="02000603000000000000" pitchFamily="2" charset="0"/>
+              </a:rPr>
+              <a:t>ω </a:t>
+            </a:r>
+            <a:r>
+              <a:rPr lang="de-DE" sz="400" dirty="0">
+                <a:solidFill>
+                  <a:schemeClr val="accent5"/>
+                </a:solidFill>
+                <a:latin typeface="Latin Modern Math" panose="02000503000000000000" pitchFamily="50" charset="0"/>
+                <a:ea typeface="Latin Modern Math" panose="02000503000000000000" pitchFamily="50" charset="0"/>
+                <a:cs typeface="CMU Serif" panose="02000603000000000000" pitchFamily="2" charset="0"/>
+              </a:rPr>
+              <a:t>∙</a:t>
+            </a:r>
+            <a:r>
+              <a:rPr lang="de-DE" sz="1100" i="1" dirty="0">
+                <a:solidFill>
+                  <a:schemeClr val="accent5"/>
+                </a:solidFill>
+                <a:latin typeface="Latin Modern Math" panose="02000503000000000000" pitchFamily="50" charset="0"/>
+                <a:ea typeface="Latin Modern Math" panose="02000503000000000000" pitchFamily="50" charset="0"/>
+                <a:cs typeface="CMU Serif" panose="02000603000000000000" pitchFamily="2" charset="0"/>
+              </a:rPr>
+              <a:t> </a:t>
+            </a:r>
+            <a:r>
+              <a:rPr lang="de-DE" sz="1100" i="1" dirty="0">
+                <a:solidFill>
+                  <a:schemeClr val="accent5"/>
+                </a:solidFill>
+                <a:latin typeface="CMU Serif" panose="02000603000000000000" pitchFamily="2" charset="0"/>
+                <a:ea typeface="CMU Serif" panose="02000603000000000000" pitchFamily="2" charset="0"/>
+                <a:cs typeface="CMU Serif" panose="02000603000000000000" pitchFamily="2" charset="0"/>
+              </a:rPr>
+              <a:t>t</a:t>
+            </a:r>
+            <a:endParaRPr lang="de-DE" sz="1100" baseline="-25000" dirty="0">
+              <a:solidFill>
+                <a:schemeClr val="accent5"/>
+              </a:solidFill>
+              <a:latin typeface="CMU Serif" panose="02000603000000000000" pitchFamily="2" charset="0"/>
+              <a:ea typeface="CMU Serif" panose="02000603000000000000" pitchFamily="2" charset="0"/>
+              <a:cs typeface="CMU Serif" panose="02000603000000000000" pitchFamily="2" charset="0"/>
+            </a:endParaRPr>
+          </a:p>
+        </p:txBody>
+      </p:sp>
+    </p:spTree>
+    <p:extLst>
+      <p:ext uri="{BB962C8B-B14F-4D97-AF65-F5344CB8AC3E}">
+        <p14:creationId xmlns:p14="http://schemas.microsoft.com/office/powerpoint/2010/main" val="686965149"/>
+      </p:ext>
+    </p:extLst>
+  </p:cSld>
+  <p:clrMapOvr>
+    <a:masterClrMapping/>
+  </p:clrMapOvr>
+</p:sld>
+</file>
+
+<file path=ppt/slides/slide21.xml><?xml version="1.0" encoding="utf-8"?>
+<p:sld xmlns:a="http://schemas.openxmlformats.org/drawingml/2006/main" xmlns:r="http://schemas.openxmlformats.org/officeDocument/2006/relationships" xmlns:p="http://schemas.openxmlformats.org/presentationml/2006/main">
+  <p:cSld>
+    <p:spTree>
+      <p:nvGrpSpPr>
+        <p:cNvPr id="1" name="">
+          <a:extLst>
+            <a:ext uri="{FF2B5EF4-FFF2-40B4-BE49-F238E27FC236}">
+              <a16:creationId xmlns:a16="http://schemas.microsoft.com/office/drawing/2014/main" id="{4A90C545-1A5A-B84A-3A2F-456CD8213BA9}"/>
+            </a:ext>
+          </a:extLst>
+        </p:cNvPr>
+        <p:cNvGrpSpPr/>
+        <p:nvPr/>
+      </p:nvGrpSpPr>
+      <p:grpSpPr>
+        <a:xfrm>
+          <a:off x="0" y="0"/>
+          <a:ext cx="0" cy="0"/>
+          <a:chOff x="0" y="0"/>
+          <a:chExt cx="0" cy="0"/>
+        </a:xfrm>
+      </p:grpSpPr>
+      <p:sp>
+        <p:nvSpPr>
+          <p:cNvPr id="36" name="Bogen 35">
+            <a:extLst>
+              <a:ext uri="{FF2B5EF4-FFF2-40B4-BE49-F238E27FC236}">
+                <a16:creationId xmlns:a16="http://schemas.microsoft.com/office/drawing/2014/main" id="{A2B95901-55CA-9E5D-21D9-15851FBDCBCD}"/>
+              </a:ext>
+            </a:extLst>
+          </p:cNvPr>
+          <p:cNvSpPr/>
+          <p:nvPr/>
+        </p:nvSpPr>
+        <p:spPr>
+          <a:xfrm>
+            <a:off x="1015221" y="1882453"/>
+            <a:ext cx="634988" cy="634986"/>
+          </a:xfrm>
+          <a:prstGeom prst="arc">
+            <a:avLst>
+              <a:gd name="adj1" fmla="val 14973702"/>
+              <a:gd name="adj2" fmla="val 20361855"/>
+            </a:avLst>
+          </a:prstGeom>
+          <a:ln cap="rnd">
+            <a:solidFill>
+              <a:schemeClr val="accent6">
+                <a:lumMod val="75000"/>
+              </a:schemeClr>
+            </a:solidFill>
+            <a:round/>
+            <a:headEnd type="none"/>
+            <a:tailEnd type="triangle"/>
+          </a:ln>
+        </p:spPr>
+        <p:style>
+          <a:lnRef idx="2">
+            <a:schemeClr val="accent1"/>
+          </a:lnRef>
+          <a:fillRef idx="0">
+            <a:schemeClr val="accent1"/>
+          </a:fillRef>
+          <a:effectRef idx="1">
+            <a:schemeClr val="accent1"/>
+          </a:effectRef>
+          <a:fontRef idx="minor">
+            <a:schemeClr val="tx1"/>
+          </a:fontRef>
+        </p:style>
+        <p:txBody>
+          <a:bodyPr rtlCol="0" anchor="ctr"/>
+          <a:lstStyle/>
+          <a:p>
+            <a:pPr algn="ctr"/>
+            <a:endParaRPr lang="de-DE" sz="2400" dirty="0"/>
+          </a:p>
+        </p:txBody>
+      </p:sp>
+      <p:sp>
+        <p:nvSpPr>
+          <p:cNvPr id="33" name="Bogen 32">
+            <a:extLst>
+              <a:ext uri="{FF2B5EF4-FFF2-40B4-BE49-F238E27FC236}">
+                <a16:creationId xmlns:a16="http://schemas.microsoft.com/office/drawing/2014/main" id="{BB032B6D-C0E9-5B9B-9830-7895A821F14B}"/>
+              </a:ext>
+            </a:extLst>
+          </p:cNvPr>
+          <p:cNvSpPr/>
+          <p:nvPr/>
+        </p:nvSpPr>
+        <p:spPr>
+          <a:xfrm>
+            <a:off x="723382" y="1589699"/>
+            <a:ext cx="1220493" cy="1220493"/>
+          </a:xfrm>
+          <a:prstGeom prst="arc">
+            <a:avLst>
+              <a:gd name="adj1" fmla="val 18675553"/>
+              <a:gd name="adj2" fmla="val 20361855"/>
+            </a:avLst>
+          </a:prstGeom>
+          <a:ln cap="rnd">
+            <a:solidFill>
+              <a:schemeClr val="accent2">
+                <a:lumMod val="75000"/>
+              </a:schemeClr>
+            </a:solidFill>
+            <a:round/>
+            <a:headEnd type="triangle"/>
+          </a:ln>
+        </p:spPr>
+        <p:style>
+          <a:lnRef idx="2">
+            <a:schemeClr val="accent1"/>
+          </a:lnRef>
+          <a:fillRef idx="0">
+            <a:schemeClr val="accent1"/>
+          </a:fillRef>
+          <a:effectRef idx="1">
+            <a:schemeClr val="accent1"/>
+          </a:effectRef>
+          <a:fontRef idx="minor">
+            <a:schemeClr val="tx1"/>
+          </a:fontRef>
+        </p:style>
+        <p:txBody>
+          <a:bodyPr rtlCol="0" anchor="ctr"/>
+          <a:lstStyle/>
+          <a:p>
+            <a:pPr algn="ctr"/>
+            <a:endParaRPr lang="de-DE" sz="2400" dirty="0"/>
+          </a:p>
+        </p:txBody>
+      </p:sp>
+      <p:cxnSp>
+        <p:nvCxnSpPr>
+          <p:cNvPr id="17" name="Gerade Verbindung mit Pfeil 16">
+            <a:extLst>
+              <a:ext uri="{FF2B5EF4-FFF2-40B4-BE49-F238E27FC236}">
+                <a16:creationId xmlns:a16="http://schemas.microsoft.com/office/drawing/2014/main" id="{E63C1AD5-5C00-B438-CF56-2EFDE4316207}"/>
+              </a:ext>
+            </a:extLst>
+          </p:cNvPr>
+          <p:cNvCxnSpPr>
+            <a:cxnSpLocks/>
+          </p:cNvCxnSpPr>
+          <p:nvPr/>
+        </p:nvCxnSpPr>
+        <p:spPr>
+          <a:xfrm flipV="1">
+            <a:off x="1333628" y="1387173"/>
+            <a:ext cx="705197" cy="810868"/>
+          </a:xfrm>
+          <a:prstGeom prst="straightConnector1">
+            <a:avLst/>
+          </a:prstGeom>
+          <a:ln cap="rnd">
+            <a:solidFill>
+              <a:schemeClr val="tx1">
+                <a:lumMod val="65000"/>
+                <a:lumOff val="35000"/>
+              </a:schemeClr>
+            </a:solidFill>
+            <a:round/>
+            <a:tailEnd type="triangle" w="med" len="med"/>
+          </a:ln>
+        </p:spPr>
+        <p:style>
+          <a:lnRef idx="2">
+            <a:schemeClr val="accent1"/>
+          </a:lnRef>
+          <a:fillRef idx="0">
+            <a:schemeClr val="accent1"/>
+          </a:fillRef>
+          <a:effectRef idx="1">
+            <a:schemeClr val="accent1"/>
+          </a:effectRef>
+          <a:fontRef idx="minor">
+            <a:schemeClr val="tx1"/>
+          </a:fontRef>
+        </p:style>
+      </p:cxnSp>
+      <p:cxnSp>
+        <p:nvCxnSpPr>
+          <p:cNvPr id="15" name="Gerade Verbindung mit Pfeil 14">
+            <a:extLst>
+              <a:ext uri="{FF2B5EF4-FFF2-40B4-BE49-F238E27FC236}">
+                <a16:creationId xmlns:a16="http://schemas.microsoft.com/office/drawing/2014/main" id="{C3665983-AA18-7C73-D2D3-E5D5408256AA}"/>
+              </a:ext>
+            </a:extLst>
+          </p:cNvPr>
+          <p:cNvCxnSpPr>
+            <a:cxnSpLocks/>
+          </p:cNvCxnSpPr>
+          <p:nvPr/>
+        </p:nvCxnSpPr>
+        <p:spPr>
+          <a:xfrm flipH="1" flipV="1">
+            <a:off x="1152398" y="1714951"/>
+            <a:ext cx="181230" cy="485003"/>
+          </a:xfrm>
+          <a:prstGeom prst="straightConnector1">
+            <a:avLst/>
+          </a:prstGeom>
+          <a:ln cap="rnd">
+            <a:solidFill>
+              <a:schemeClr val="tx1">
+                <a:lumMod val="65000"/>
+                <a:lumOff val="35000"/>
+              </a:schemeClr>
+            </a:solidFill>
+            <a:round/>
+            <a:tailEnd type="triangle" w="med" len="med"/>
+          </a:ln>
+        </p:spPr>
+        <p:style>
+          <a:lnRef idx="2">
+            <a:schemeClr val="accent1"/>
+          </a:lnRef>
+          <a:fillRef idx="0">
+            <a:schemeClr val="accent1"/>
+          </a:fillRef>
+          <a:effectRef idx="1">
+            <a:schemeClr val="accent1"/>
+          </a:effectRef>
+          <a:fontRef idx="minor">
+            <a:schemeClr val="tx1"/>
+          </a:fontRef>
+        </p:style>
+      </p:cxnSp>
+      <p:sp>
+        <p:nvSpPr>
+          <p:cNvPr id="19" name="Bogen 18">
+            <a:extLst>
+              <a:ext uri="{FF2B5EF4-FFF2-40B4-BE49-F238E27FC236}">
+                <a16:creationId xmlns:a16="http://schemas.microsoft.com/office/drawing/2014/main" id="{BB2FD627-752C-E9EA-ABA2-DD8A5798407D}"/>
+              </a:ext>
+            </a:extLst>
+          </p:cNvPr>
+          <p:cNvSpPr/>
+          <p:nvPr/>
+        </p:nvSpPr>
+        <p:spPr>
+          <a:xfrm>
+            <a:off x="723382" y="1591614"/>
+            <a:ext cx="1220493" cy="1220493"/>
+          </a:xfrm>
+          <a:prstGeom prst="arc">
+            <a:avLst>
+              <a:gd name="adj1" fmla="val 20384948"/>
+              <a:gd name="adj2" fmla="val 0"/>
+            </a:avLst>
+          </a:prstGeom>
+          <a:ln cap="rnd">
+            <a:solidFill>
+              <a:schemeClr val="accent5"/>
+            </a:solidFill>
+            <a:round/>
+            <a:headEnd type="triangle"/>
+          </a:ln>
+        </p:spPr>
+        <p:style>
+          <a:lnRef idx="2">
+            <a:schemeClr val="accent1"/>
+          </a:lnRef>
+          <a:fillRef idx="0">
+            <a:schemeClr val="accent1"/>
+          </a:fillRef>
+          <a:effectRef idx="1">
+            <a:schemeClr val="accent1"/>
+          </a:effectRef>
+          <a:fontRef idx="minor">
+            <a:schemeClr val="tx1"/>
+          </a:fontRef>
+        </p:style>
+        <p:txBody>
+          <a:bodyPr rtlCol="0" anchor="ctr"/>
+          <a:lstStyle/>
+          <a:p>
+            <a:pPr algn="ctr"/>
+            <a:endParaRPr lang="de-DE" sz="2400" dirty="0"/>
+          </a:p>
+        </p:txBody>
+      </p:sp>
+      <p:cxnSp>
+        <p:nvCxnSpPr>
+          <p:cNvPr id="8" name="Gerade Verbindung mit Pfeil 7">
+            <a:extLst>
+              <a:ext uri="{FF2B5EF4-FFF2-40B4-BE49-F238E27FC236}">
+                <a16:creationId xmlns:a16="http://schemas.microsoft.com/office/drawing/2014/main" id="{41891283-B51A-A4CA-1B4C-9B65CB1365D8}"/>
+              </a:ext>
+            </a:extLst>
+          </p:cNvPr>
+          <p:cNvCxnSpPr>
+            <a:cxnSpLocks/>
+          </p:cNvCxnSpPr>
+          <p:nvPr/>
+        </p:nvCxnSpPr>
+        <p:spPr>
+          <a:xfrm flipV="1">
+            <a:off x="1333630" y="1869118"/>
+            <a:ext cx="890496" cy="332749"/>
+          </a:xfrm>
+          <a:prstGeom prst="straightConnector1">
+            <a:avLst/>
+          </a:prstGeom>
+          <a:ln cap="rnd">
+            <a:solidFill>
+              <a:schemeClr val="tx1">
+                <a:lumMod val="65000"/>
+                <a:lumOff val="35000"/>
+              </a:schemeClr>
+            </a:solidFill>
+            <a:round/>
+            <a:tailEnd type="triangle" w="med" len="med"/>
+          </a:ln>
+        </p:spPr>
+        <p:style>
+          <a:lnRef idx="2">
+            <a:schemeClr val="accent1"/>
+          </a:lnRef>
+          <a:fillRef idx="0">
+            <a:schemeClr val="accent1"/>
+          </a:fillRef>
+          <a:effectRef idx="1">
+            <a:schemeClr val="accent1"/>
+          </a:effectRef>
+          <a:fontRef idx="minor">
+            <a:schemeClr val="tx1"/>
+          </a:fontRef>
+        </p:style>
+      </p:cxnSp>
+      <p:cxnSp>
+        <p:nvCxnSpPr>
+          <p:cNvPr id="5" name="Gerade Verbindung mit Pfeil 4">
+            <a:extLst>
+              <a:ext uri="{FF2B5EF4-FFF2-40B4-BE49-F238E27FC236}">
+                <a16:creationId xmlns:a16="http://schemas.microsoft.com/office/drawing/2014/main" id="{B670D5B2-1F95-5F4B-808F-2B1B6384D3A5}"/>
+              </a:ext>
+            </a:extLst>
+          </p:cNvPr>
+          <p:cNvCxnSpPr>
+            <a:cxnSpLocks/>
+          </p:cNvCxnSpPr>
+          <p:nvPr/>
+        </p:nvCxnSpPr>
+        <p:spPr>
+          <a:xfrm flipV="1">
+            <a:off x="1333630" y="1173167"/>
+            <a:ext cx="0" cy="1254116"/>
+          </a:xfrm>
+          <a:prstGeom prst="straightConnector1">
+            <a:avLst/>
+          </a:prstGeom>
+          <a:ln cap="rnd">
+            <a:solidFill>
+              <a:schemeClr val="tx1"/>
+            </a:solidFill>
+            <a:round/>
+            <a:tailEnd type="triangle" w="med" len="med"/>
+          </a:ln>
+        </p:spPr>
+        <p:style>
+          <a:lnRef idx="2">
+            <a:schemeClr val="accent1"/>
+          </a:lnRef>
+          <a:fillRef idx="0">
+            <a:schemeClr val="accent1"/>
+          </a:fillRef>
+          <a:effectRef idx="1">
+            <a:schemeClr val="accent1"/>
+          </a:effectRef>
+          <a:fontRef idx="minor">
+            <a:schemeClr val="tx1"/>
+          </a:fontRef>
+        </p:style>
+      </p:cxnSp>
+      <p:cxnSp>
+        <p:nvCxnSpPr>
+          <p:cNvPr id="6" name="Gerade Verbindung mit Pfeil 5">
+            <a:extLst>
+              <a:ext uri="{FF2B5EF4-FFF2-40B4-BE49-F238E27FC236}">
+                <a16:creationId xmlns:a16="http://schemas.microsoft.com/office/drawing/2014/main" id="{FCD147A6-2344-8FC6-3F3C-831E3F8DC3FB}"/>
+              </a:ext>
+            </a:extLst>
+          </p:cNvPr>
+          <p:cNvCxnSpPr>
+            <a:cxnSpLocks/>
+          </p:cNvCxnSpPr>
+          <p:nvPr/>
+        </p:nvCxnSpPr>
+        <p:spPr>
+          <a:xfrm>
+            <a:off x="1124941" y="2201867"/>
+            <a:ext cx="1242999" cy="0"/>
+          </a:xfrm>
+          <a:prstGeom prst="straightConnector1">
+            <a:avLst/>
+          </a:prstGeom>
+          <a:ln cap="rnd">
+            <a:solidFill>
+              <a:schemeClr val="tx1"/>
+            </a:solidFill>
+            <a:round/>
+            <a:tailEnd type="triangle" w="med" len="med"/>
+          </a:ln>
+        </p:spPr>
+        <p:style>
+          <a:lnRef idx="2">
+            <a:schemeClr val="accent1"/>
+          </a:lnRef>
+          <a:fillRef idx="0">
+            <a:schemeClr val="accent1"/>
+          </a:fillRef>
+          <a:effectRef idx="1">
+            <a:schemeClr val="accent1"/>
+          </a:effectRef>
+          <a:fontRef idx="minor">
+            <a:schemeClr val="tx1"/>
+          </a:fontRef>
+        </p:style>
+      </p:cxnSp>
+      <p:cxnSp>
+        <p:nvCxnSpPr>
+          <p:cNvPr id="21" name="Gerader Verbinder 20">
+            <a:extLst>
+              <a:ext uri="{FF2B5EF4-FFF2-40B4-BE49-F238E27FC236}">
+                <a16:creationId xmlns:a16="http://schemas.microsoft.com/office/drawing/2014/main" id="{C2D09EC9-CD5D-8E56-3EEB-DA00856BBCD5}"/>
+              </a:ext>
+            </a:extLst>
+          </p:cNvPr>
+          <p:cNvCxnSpPr>
+            <a:cxnSpLocks/>
+          </p:cNvCxnSpPr>
+          <p:nvPr/>
+        </p:nvCxnSpPr>
+        <p:spPr>
+          <a:xfrm flipH="1">
+            <a:off x="1148130" y="1391540"/>
+            <a:ext cx="879069" cy="329246"/>
+          </a:xfrm>
+          <a:prstGeom prst="line">
+            <a:avLst/>
+          </a:prstGeom>
+          <a:ln w="9525" cap="rnd">
+            <a:solidFill>
+              <a:schemeClr val="tx1">
+                <a:lumMod val="65000"/>
+                <a:lumOff val="35000"/>
+              </a:schemeClr>
+            </a:solidFill>
+            <a:prstDash val="sysDash"/>
+            <a:round/>
+          </a:ln>
+        </p:spPr>
+        <p:style>
+          <a:lnRef idx="2">
+            <a:schemeClr val="accent1"/>
+          </a:lnRef>
+          <a:fillRef idx="0">
+            <a:schemeClr val="accent1"/>
+          </a:fillRef>
+          <a:effectRef idx="1">
+            <a:schemeClr val="accent1"/>
+          </a:effectRef>
+          <a:fontRef idx="minor">
+            <a:schemeClr val="tx1"/>
+          </a:fontRef>
+        </p:style>
+      </p:cxnSp>
+      <p:cxnSp>
+        <p:nvCxnSpPr>
+          <p:cNvPr id="26" name="Gerader Verbinder 25">
+            <a:extLst>
+              <a:ext uri="{FF2B5EF4-FFF2-40B4-BE49-F238E27FC236}">
+                <a16:creationId xmlns:a16="http://schemas.microsoft.com/office/drawing/2014/main" id="{F1A6B914-1B8E-4A2D-816D-A76788B6B7FD}"/>
+              </a:ext>
+            </a:extLst>
+          </p:cNvPr>
+          <p:cNvCxnSpPr>
+            <a:cxnSpLocks/>
+          </p:cNvCxnSpPr>
+          <p:nvPr/>
+        </p:nvCxnSpPr>
+        <p:spPr>
+          <a:xfrm>
+            <a:off x="2038828" y="1387173"/>
+            <a:ext cx="181090" cy="482810"/>
+          </a:xfrm>
+          <a:prstGeom prst="line">
+            <a:avLst/>
+          </a:prstGeom>
+          <a:ln w="9525" cap="rnd">
+            <a:solidFill>
+              <a:schemeClr val="tx1">
+                <a:lumMod val="65000"/>
+                <a:lumOff val="35000"/>
+              </a:schemeClr>
+            </a:solidFill>
+            <a:prstDash val="sysDash"/>
+            <a:round/>
+          </a:ln>
+        </p:spPr>
+        <p:style>
+          <a:lnRef idx="2">
+            <a:schemeClr val="accent1"/>
+          </a:lnRef>
+          <a:fillRef idx="0">
+            <a:schemeClr val="accent1"/>
+          </a:fillRef>
+          <a:effectRef idx="1">
+            <a:schemeClr val="accent1"/>
+          </a:effectRef>
+          <a:fontRef idx="minor">
+            <a:schemeClr val="tx1"/>
+          </a:fontRef>
+        </p:style>
+      </p:cxnSp>
+      <p:sp>
+        <p:nvSpPr>
+          <p:cNvPr id="35" name="Textfeld 34">
+            <a:extLst>
+              <a:ext uri="{FF2B5EF4-FFF2-40B4-BE49-F238E27FC236}">
+                <a16:creationId xmlns:a16="http://schemas.microsoft.com/office/drawing/2014/main" id="{D99F27B2-2A5F-7007-E84A-B3227A9B54A7}"/>
+              </a:ext>
+            </a:extLst>
+          </p:cNvPr>
+          <p:cNvSpPr txBox="1"/>
+          <p:nvPr/>
+        </p:nvSpPr>
+        <p:spPr>
+          <a:xfrm>
+            <a:off x="1689643" y="1682539"/>
+            <a:ext cx="518786" cy="261610"/>
+          </a:xfrm>
+          <a:prstGeom prst="rect">
+            <a:avLst/>
+          </a:prstGeom>
+          <a:noFill/>
+        </p:spPr>
+        <p:txBody>
+          <a:bodyPr wrap="square" rtlCol="0">
+            <a:spAutoFit/>
+          </a:bodyPr>
+          <a:lstStyle/>
+          <a:p>
+            <a:pPr algn="ctr"/>
+            <a:r>
+              <a:rPr lang="de-DE" sz="1100" i="1" dirty="0">
+                <a:solidFill>
+                  <a:schemeClr val="accent2">
+                    <a:lumMod val="75000"/>
+                  </a:schemeClr>
+                </a:solidFill>
+                <a:latin typeface="Latin Modern Math" panose="02000503000000000000" pitchFamily="50" charset="0"/>
+                <a:ea typeface="Latin Modern Math" panose="02000503000000000000" pitchFamily="50" charset="0"/>
+                <a:cs typeface="CMU Serif" panose="02000603000000000000" pitchFamily="2" charset="0"/>
+              </a:rPr>
+              <a:t>φ</a:t>
+            </a:r>
+            <a:endParaRPr lang="de-DE" sz="1100" baseline="-25000" dirty="0">
+              <a:solidFill>
+                <a:schemeClr val="accent2">
+                  <a:lumMod val="75000"/>
+                </a:schemeClr>
+              </a:solidFill>
+              <a:latin typeface="CMU Serif" panose="02000603000000000000" pitchFamily="2" charset="0"/>
+              <a:ea typeface="CMU Serif" panose="02000603000000000000" pitchFamily="2" charset="0"/>
+              <a:cs typeface="CMU Serif" panose="02000603000000000000" pitchFamily="2" charset="0"/>
+            </a:endParaRPr>
+          </a:p>
+        </p:txBody>
+      </p:sp>
+      <p:sp>
+        <p:nvSpPr>
+          <p:cNvPr id="38" name="Textfeld 37">
+            <a:extLst>
+              <a:ext uri="{FF2B5EF4-FFF2-40B4-BE49-F238E27FC236}">
+                <a16:creationId xmlns:a16="http://schemas.microsoft.com/office/drawing/2014/main" id="{17B95098-D08C-5C99-7171-3E9052F272CA}"/>
+              </a:ext>
+            </a:extLst>
+          </p:cNvPr>
+          <p:cNvSpPr txBox="1"/>
+          <p:nvPr/>
+        </p:nvSpPr>
+        <p:spPr>
+          <a:xfrm>
+            <a:off x="1207358" y="1664147"/>
+            <a:ext cx="518786" cy="261610"/>
+          </a:xfrm>
+          <a:prstGeom prst="rect">
+            <a:avLst/>
+          </a:prstGeom>
+          <a:noFill/>
+        </p:spPr>
+        <p:txBody>
+          <a:bodyPr wrap="square" rtlCol="0">
+            <a:spAutoFit/>
+          </a:bodyPr>
+          <a:lstStyle/>
+          <a:p>
+            <a:pPr algn="ctr"/>
+            <a:r>
+              <a:rPr lang="de-DE" sz="1100" i="1" dirty="0" err="1">
+                <a:solidFill>
+                  <a:schemeClr val="accent6">
+                    <a:lumMod val="75000"/>
+                  </a:schemeClr>
+                </a:solidFill>
+                <a:latin typeface="Latin Modern Math" panose="02000503000000000000" pitchFamily="50" charset="0"/>
+                <a:ea typeface="Latin Modern Math" panose="02000503000000000000" pitchFamily="50" charset="0"/>
+                <a:cs typeface="CMU Serif" panose="02000603000000000000" pitchFamily="2" charset="0"/>
+              </a:rPr>
+              <a:t>φ</a:t>
+            </a:r>
+            <a:r>
+              <a:rPr lang="de-DE" sz="1100" baseline="-25000" dirty="0" err="1">
+                <a:solidFill>
+                  <a:schemeClr val="accent6">
+                    <a:lumMod val="75000"/>
+                  </a:schemeClr>
+                </a:solidFill>
+                <a:latin typeface="CMU Serif" panose="02000603000000000000" pitchFamily="2" charset="0"/>
+                <a:ea typeface="CMU Serif" panose="02000603000000000000" pitchFamily="2" charset="0"/>
+                <a:cs typeface="CMU Serif" panose="02000603000000000000" pitchFamily="2" charset="0"/>
+              </a:rPr>
+              <a:t>C</a:t>
+            </a:r>
+            <a:endParaRPr lang="de-DE" sz="1100" baseline="-25000" dirty="0">
+              <a:solidFill>
+                <a:schemeClr val="accent6">
+                  <a:lumMod val="75000"/>
+                </a:schemeClr>
+              </a:solidFill>
+              <a:latin typeface="CMU Serif" panose="02000603000000000000" pitchFamily="2" charset="0"/>
+              <a:ea typeface="CMU Serif" panose="02000603000000000000" pitchFamily="2" charset="0"/>
+              <a:cs typeface="CMU Serif" panose="02000603000000000000" pitchFamily="2" charset="0"/>
+            </a:endParaRPr>
+          </a:p>
+        </p:txBody>
+      </p:sp>
+      <p:sp>
+        <p:nvSpPr>
+          <p:cNvPr id="39" name="Textfeld 38">
+            <a:extLst>
+              <a:ext uri="{FF2B5EF4-FFF2-40B4-BE49-F238E27FC236}">
+                <a16:creationId xmlns:a16="http://schemas.microsoft.com/office/drawing/2014/main" id="{94E8C824-A8F1-4BAE-4EAC-A29D24D9F991}"/>
+              </a:ext>
+            </a:extLst>
+          </p:cNvPr>
+          <p:cNvSpPr txBox="1"/>
+          <p:nvPr/>
+        </p:nvSpPr>
+        <p:spPr>
+          <a:xfrm>
+            <a:off x="1890840" y="1964060"/>
+            <a:ext cx="518786" cy="261610"/>
+          </a:xfrm>
+          <a:prstGeom prst="rect">
+            <a:avLst/>
+          </a:prstGeom>
+          <a:noFill/>
+        </p:spPr>
+        <p:txBody>
+          <a:bodyPr wrap="square" rtlCol="0">
+            <a:spAutoFit/>
+          </a:bodyPr>
+          <a:lstStyle/>
+          <a:p>
+            <a:pPr algn="ctr"/>
+            <a:r>
+              <a:rPr lang="de-DE" sz="1100" i="1" dirty="0">
+                <a:solidFill>
+                  <a:schemeClr val="accent5"/>
+                </a:solidFill>
+                <a:latin typeface="Latin Modern Math" panose="02000503000000000000" pitchFamily="50" charset="0"/>
+                <a:ea typeface="Latin Modern Math" panose="02000503000000000000" pitchFamily="50" charset="0"/>
+                <a:cs typeface="CMU Serif" panose="02000603000000000000" pitchFamily="2" charset="0"/>
+              </a:rPr>
+              <a:t>ω </a:t>
+            </a:r>
+            <a:r>
+              <a:rPr lang="de-DE" sz="400" dirty="0">
+                <a:solidFill>
+                  <a:schemeClr val="accent5"/>
+                </a:solidFill>
+                <a:latin typeface="Latin Modern Math" panose="02000503000000000000" pitchFamily="50" charset="0"/>
+                <a:ea typeface="Latin Modern Math" panose="02000503000000000000" pitchFamily="50" charset="0"/>
+                <a:cs typeface="CMU Serif" panose="02000603000000000000" pitchFamily="2" charset="0"/>
+              </a:rPr>
+              <a:t>∙</a:t>
+            </a:r>
+            <a:r>
+              <a:rPr lang="de-DE" sz="1100" i="1" dirty="0">
+                <a:solidFill>
+                  <a:schemeClr val="accent5"/>
+                </a:solidFill>
+                <a:latin typeface="Latin Modern Math" panose="02000503000000000000" pitchFamily="50" charset="0"/>
+                <a:ea typeface="Latin Modern Math" panose="02000503000000000000" pitchFamily="50" charset="0"/>
+                <a:cs typeface="CMU Serif" panose="02000603000000000000" pitchFamily="2" charset="0"/>
+              </a:rPr>
+              <a:t> </a:t>
+            </a:r>
+            <a:r>
+              <a:rPr lang="de-DE" sz="1100" i="1" dirty="0">
+                <a:solidFill>
+                  <a:schemeClr val="accent5"/>
+                </a:solidFill>
+                <a:latin typeface="CMU Serif" panose="02000603000000000000" pitchFamily="2" charset="0"/>
+                <a:ea typeface="CMU Serif" panose="02000603000000000000" pitchFamily="2" charset="0"/>
+                <a:cs typeface="CMU Serif" panose="02000603000000000000" pitchFamily="2" charset="0"/>
+              </a:rPr>
+              <a:t>t</a:t>
+            </a:r>
+            <a:endParaRPr lang="de-DE" sz="1100" baseline="-25000" dirty="0">
+              <a:solidFill>
+                <a:schemeClr val="accent5"/>
+              </a:solidFill>
+              <a:latin typeface="CMU Serif" panose="02000603000000000000" pitchFamily="2" charset="0"/>
+              <a:ea typeface="CMU Serif" panose="02000603000000000000" pitchFamily="2" charset="0"/>
+              <a:cs typeface="CMU Serif" panose="02000603000000000000" pitchFamily="2" charset="0"/>
+            </a:endParaRPr>
+          </a:p>
+        </p:txBody>
+      </p:sp>
+      <p:sp>
+        <p:nvSpPr>
+          <p:cNvPr id="2" name="Textfeld 1">
+            <a:extLst>
+              <a:ext uri="{FF2B5EF4-FFF2-40B4-BE49-F238E27FC236}">
+                <a16:creationId xmlns:a16="http://schemas.microsoft.com/office/drawing/2014/main" id="{323B199B-DC7E-F244-8E47-0FD73EB358D5}"/>
+              </a:ext>
+            </a:extLst>
+          </p:cNvPr>
+          <p:cNvSpPr txBox="1"/>
+          <p:nvPr/>
+        </p:nvSpPr>
+        <p:spPr>
+          <a:xfrm>
+            <a:off x="714461" y="1605457"/>
+            <a:ext cx="567731" cy="246221"/>
+          </a:xfrm>
+          <a:prstGeom prst="rect">
+            <a:avLst/>
+          </a:prstGeom>
+          <a:noFill/>
+        </p:spPr>
+        <p:txBody>
+          <a:bodyPr wrap="square" rtlCol="0">
+            <a:spAutoFit/>
+          </a:bodyPr>
+          <a:lstStyle/>
+          <a:p>
+            <a:pPr algn="ctr"/>
+            <a:r>
+              <a:rPr lang="de-DE" sz="1000" i="1" dirty="0">
+                <a:solidFill>
+                  <a:schemeClr val="tx1">
+                    <a:lumMod val="65000"/>
+                    <a:lumOff val="35000"/>
+                  </a:schemeClr>
+                </a:solidFill>
+                <a:latin typeface="CMU Serif" panose="02000603000000000000" pitchFamily="2" charset="0"/>
+                <a:ea typeface="CMU Serif" panose="02000603000000000000" pitchFamily="2" charset="0"/>
+                <a:cs typeface="CMU Serif" panose="02000603000000000000" pitchFamily="2" charset="0"/>
+              </a:rPr>
+              <a:t>X</a:t>
+            </a:r>
+            <a:r>
+              <a:rPr lang="de-DE" sz="1000" baseline="-25000" dirty="0">
+                <a:solidFill>
+                  <a:schemeClr val="tx1">
+                    <a:lumMod val="65000"/>
+                    <a:lumOff val="35000"/>
+                  </a:schemeClr>
+                </a:solidFill>
+                <a:latin typeface="CMU Serif" panose="02000603000000000000" pitchFamily="2" charset="0"/>
+                <a:ea typeface="CMU Serif" panose="02000603000000000000" pitchFamily="2" charset="0"/>
+                <a:cs typeface="CMU Serif" panose="02000603000000000000" pitchFamily="2" charset="0"/>
+              </a:rPr>
+              <a:t>C</a:t>
+            </a:r>
+          </a:p>
+        </p:txBody>
+      </p:sp>
+      <p:sp>
+        <p:nvSpPr>
+          <p:cNvPr id="3" name="Textfeld 2">
+            <a:extLst>
+              <a:ext uri="{FF2B5EF4-FFF2-40B4-BE49-F238E27FC236}">
+                <a16:creationId xmlns:a16="http://schemas.microsoft.com/office/drawing/2014/main" id="{FCE384DD-F75E-D7F5-6DD9-2A68F310E5B7}"/>
+              </a:ext>
+            </a:extLst>
+          </p:cNvPr>
+          <p:cNvSpPr txBox="1"/>
+          <p:nvPr/>
+        </p:nvSpPr>
+        <p:spPr>
+          <a:xfrm>
+            <a:off x="2065808" y="1794273"/>
+            <a:ext cx="567731" cy="246221"/>
+          </a:xfrm>
+          <a:prstGeom prst="rect">
+            <a:avLst/>
+          </a:prstGeom>
+          <a:noFill/>
+        </p:spPr>
+        <p:txBody>
+          <a:bodyPr wrap="square" rtlCol="0">
+            <a:spAutoFit/>
+          </a:bodyPr>
+          <a:lstStyle/>
+          <a:p>
+            <a:pPr algn="ctr"/>
+            <a:r>
+              <a:rPr lang="de-DE" sz="1000" i="1" dirty="0">
+                <a:solidFill>
+                  <a:schemeClr val="tx1">
+                    <a:lumMod val="65000"/>
+                    <a:lumOff val="35000"/>
+                  </a:schemeClr>
+                </a:solidFill>
+                <a:latin typeface="CMU Serif" panose="02000603000000000000" pitchFamily="2" charset="0"/>
+                <a:ea typeface="CMU Serif" panose="02000603000000000000" pitchFamily="2" charset="0"/>
+                <a:cs typeface="CMU Serif" panose="02000603000000000000" pitchFamily="2" charset="0"/>
+              </a:rPr>
+              <a:t>R</a:t>
+            </a:r>
+            <a:endParaRPr lang="de-DE" sz="1000" baseline="-25000" dirty="0">
+              <a:solidFill>
+                <a:schemeClr val="tx1">
+                  <a:lumMod val="65000"/>
+                  <a:lumOff val="35000"/>
+                </a:schemeClr>
+              </a:solidFill>
+              <a:latin typeface="CMU Serif" panose="02000603000000000000" pitchFamily="2" charset="0"/>
+              <a:ea typeface="CMU Serif" panose="02000603000000000000" pitchFamily="2" charset="0"/>
+              <a:cs typeface="CMU Serif" panose="02000603000000000000" pitchFamily="2" charset="0"/>
+            </a:endParaRPr>
+          </a:p>
+        </p:txBody>
+      </p:sp>
+      <p:sp>
+        <p:nvSpPr>
+          <p:cNvPr id="4" name="Textfeld 3">
+            <a:extLst>
+              <a:ext uri="{FF2B5EF4-FFF2-40B4-BE49-F238E27FC236}">
+                <a16:creationId xmlns:a16="http://schemas.microsoft.com/office/drawing/2014/main" id="{A14B1F69-4874-37A8-6C6F-C3A94C32624E}"/>
+              </a:ext>
+            </a:extLst>
+          </p:cNvPr>
+          <p:cNvSpPr txBox="1"/>
+          <p:nvPr/>
+        </p:nvSpPr>
+        <p:spPr>
+          <a:xfrm>
+            <a:off x="1890840" y="1288372"/>
+            <a:ext cx="567731" cy="246221"/>
+          </a:xfrm>
+          <a:prstGeom prst="rect">
+            <a:avLst/>
+          </a:prstGeom>
+          <a:noFill/>
+        </p:spPr>
+        <p:txBody>
+          <a:bodyPr wrap="square" rtlCol="0">
+            <a:spAutoFit/>
+          </a:bodyPr>
+          <a:lstStyle/>
+          <a:p>
+            <a:pPr algn="ctr"/>
+            <a:r>
+              <a:rPr lang="de-DE" sz="1000" i="1" dirty="0">
+                <a:solidFill>
+                  <a:schemeClr val="tx1">
+                    <a:lumMod val="65000"/>
+                    <a:lumOff val="35000"/>
+                  </a:schemeClr>
+                </a:solidFill>
+                <a:latin typeface="CMU Serif" panose="02000603000000000000" pitchFamily="2" charset="0"/>
+                <a:ea typeface="CMU Serif" panose="02000603000000000000" pitchFamily="2" charset="0"/>
+                <a:cs typeface="CMU Serif" panose="02000603000000000000" pitchFamily="2" charset="0"/>
+              </a:rPr>
+              <a:t>Z</a:t>
+            </a:r>
+            <a:endParaRPr lang="de-DE" sz="1000" baseline="-25000" dirty="0">
+              <a:solidFill>
+                <a:schemeClr val="tx1">
+                  <a:lumMod val="65000"/>
+                  <a:lumOff val="35000"/>
+                </a:schemeClr>
+              </a:solidFill>
+              <a:latin typeface="CMU Serif" panose="02000603000000000000" pitchFamily="2" charset="0"/>
+              <a:ea typeface="CMU Serif" panose="02000603000000000000" pitchFamily="2" charset="0"/>
+              <a:cs typeface="CMU Serif" panose="02000603000000000000" pitchFamily="2" charset="0"/>
+            </a:endParaRPr>
+          </a:p>
+        </p:txBody>
+      </p:sp>
+      <p:sp>
+        <p:nvSpPr>
+          <p:cNvPr id="7" name="Textfeld 6">
+            <a:extLst>
+              <a:ext uri="{FF2B5EF4-FFF2-40B4-BE49-F238E27FC236}">
+                <a16:creationId xmlns:a16="http://schemas.microsoft.com/office/drawing/2014/main" id="{54275DB9-0F03-828D-4449-AC15E4A65DAC}"/>
+              </a:ext>
+            </a:extLst>
+          </p:cNvPr>
+          <p:cNvSpPr txBox="1"/>
+          <p:nvPr/>
+        </p:nvSpPr>
+        <p:spPr>
+          <a:xfrm>
+            <a:off x="719174" y="1454887"/>
+            <a:ext cx="567731" cy="246221"/>
+          </a:xfrm>
+          <a:prstGeom prst="rect">
+            <a:avLst/>
+          </a:prstGeom>
+          <a:noFill/>
+        </p:spPr>
+        <p:txBody>
+          <a:bodyPr wrap="square" rtlCol="0">
+            <a:spAutoFit/>
+          </a:bodyPr>
+          <a:lstStyle/>
+          <a:p>
+            <a:pPr algn="ctr"/>
+            <a:r>
+              <a:rPr lang="de-DE" sz="1000" dirty="0">
+                <a:solidFill>
+                  <a:schemeClr val="tx1">
+                    <a:lumMod val="65000"/>
+                    <a:lumOff val="35000"/>
+                  </a:schemeClr>
+                </a:solidFill>
+                <a:latin typeface="CMU Serif" panose="02000603000000000000" pitchFamily="2" charset="0"/>
+                <a:ea typeface="CMU Serif" panose="02000603000000000000" pitchFamily="2" charset="0"/>
+                <a:cs typeface="CMU Serif" panose="02000603000000000000" pitchFamily="2" charset="0"/>
+              </a:rPr>
+              <a:t>1</a:t>
+            </a:r>
+            <a:endParaRPr lang="de-DE" sz="1000" baseline="-25000" dirty="0">
+              <a:solidFill>
+                <a:schemeClr val="tx1">
+                  <a:lumMod val="65000"/>
+                  <a:lumOff val="35000"/>
+                </a:schemeClr>
+              </a:solidFill>
+              <a:latin typeface="CMU Serif" panose="02000603000000000000" pitchFamily="2" charset="0"/>
+              <a:ea typeface="CMU Serif" panose="02000603000000000000" pitchFamily="2" charset="0"/>
+              <a:cs typeface="CMU Serif" panose="02000603000000000000" pitchFamily="2" charset="0"/>
+            </a:endParaRPr>
+          </a:p>
+        </p:txBody>
+      </p:sp>
+      <p:sp>
+        <p:nvSpPr>
+          <p:cNvPr id="9" name="Textfeld 8">
+            <a:extLst>
+              <a:ext uri="{FF2B5EF4-FFF2-40B4-BE49-F238E27FC236}">
+                <a16:creationId xmlns:a16="http://schemas.microsoft.com/office/drawing/2014/main" id="{EAEC86E8-C842-8741-20CA-ECC9E5C343FD}"/>
+              </a:ext>
+            </a:extLst>
+          </p:cNvPr>
+          <p:cNvSpPr txBox="1"/>
+          <p:nvPr/>
+        </p:nvSpPr>
+        <p:spPr>
+          <a:xfrm>
+            <a:off x="2076236" y="1643703"/>
+            <a:ext cx="567731" cy="246221"/>
+          </a:xfrm>
+          <a:prstGeom prst="rect">
+            <a:avLst/>
+          </a:prstGeom>
+          <a:noFill/>
+        </p:spPr>
+        <p:txBody>
+          <a:bodyPr wrap="square" rtlCol="0">
+            <a:spAutoFit/>
+          </a:bodyPr>
+          <a:lstStyle/>
+          <a:p>
+            <a:pPr algn="ctr"/>
+            <a:r>
+              <a:rPr lang="de-DE" sz="1000" dirty="0">
+                <a:solidFill>
+                  <a:schemeClr val="tx1">
+                    <a:lumMod val="65000"/>
+                    <a:lumOff val="35000"/>
+                  </a:schemeClr>
+                </a:solidFill>
+                <a:latin typeface="CMU Serif" panose="02000603000000000000" pitchFamily="2" charset="0"/>
+                <a:ea typeface="CMU Serif" panose="02000603000000000000" pitchFamily="2" charset="0"/>
+                <a:cs typeface="CMU Serif" panose="02000603000000000000" pitchFamily="2" charset="0"/>
+              </a:rPr>
+              <a:t>1</a:t>
+            </a:r>
+            <a:endParaRPr lang="de-DE" sz="1000" baseline="-25000" dirty="0">
+              <a:solidFill>
+                <a:schemeClr val="tx1">
+                  <a:lumMod val="65000"/>
+                  <a:lumOff val="35000"/>
+                </a:schemeClr>
+              </a:solidFill>
+              <a:latin typeface="CMU Serif" panose="02000603000000000000" pitchFamily="2" charset="0"/>
+              <a:ea typeface="CMU Serif" panose="02000603000000000000" pitchFamily="2" charset="0"/>
+              <a:cs typeface="CMU Serif" panose="02000603000000000000" pitchFamily="2" charset="0"/>
+            </a:endParaRPr>
+          </a:p>
+        </p:txBody>
+      </p:sp>
+      <p:sp>
+        <p:nvSpPr>
+          <p:cNvPr id="10" name="Textfeld 9">
+            <a:extLst>
+              <a:ext uri="{FF2B5EF4-FFF2-40B4-BE49-F238E27FC236}">
+                <a16:creationId xmlns:a16="http://schemas.microsoft.com/office/drawing/2014/main" id="{EF576917-36E2-420E-C580-114C717C3435}"/>
+              </a:ext>
+            </a:extLst>
+          </p:cNvPr>
+          <p:cNvSpPr txBox="1"/>
+          <p:nvPr/>
+        </p:nvSpPr>
+        <p:spPr>
+          <a:xfrm>
+            <a:off x="1901268" y="1137802"/>
+            <a:ext cx="567731" cy="246221"/>
+          </a:xfrm>
+          <a:prstGeom prst="rect">
+            <a:avLst/>
+          </a:prstGeom>
+          <a:noFill/>
+        </p:spPr>
+        <p:txBody>
+          <a:bodyPr wrap="square" rtlCol="0">
+            <a:spAutoFit/>
+          </a:bodyPr>
+          <a:lstStyle/>
+          <a:p>
+            <a:pPr algn="ctr"/>
+            <a:r>
+              <a:rPr lang="de-DE" sz="1000" dirty="0">
+                <a:solidFill>
+                  <a:schemeClr val="tx1">
+                    <a:lumMod val="65000"/>
+                    <a:lumOff val="35000"/>
+                  </a:schemeClr>
+                </a:solidFill>
+                <a:latin typeface="CMU Serif" panose="02000603000000000000" pitchFamily="2" charset="0"/>
+                <a:ea typeface="CMU Serif" panose="02000603000000000000" pitchFamily="2" charset="0"/>
+                <a:cs typeface="CMU Serif" panose="02000603000000000000" pitchFamily="2" charset="0"/>
+              </a:rPr>
+              <a:t>1</a:t>
+            </a:r>
+            <a:endParaRPr lang="de-DE" sz="1000" baseline="-25000" dirty="0">
+              <a:solidFill>
+                <a:schemeClr val="tx1">
+                  <a:lumMod val="65000"/>
+                  <a:lumOff val="35000"/>
+                </a:schemeClr>
+              </a:solidFill>
+              <a:latin typeface="CMU Serif" panose="02000603000000000000" pitchFamily="2" charset="0"/>
+              <a:ea typeface="CMU Serif" panose="02000603000000000000" pitchFamily="2" charset="0"/>
+              <a:cs typeface="CMU Serif" panose="02000603000000000000" pitchFamily="2" charset="0"/>
+            </a:endParaRPr>
+          </a:p>
+        </p:txBody>
+      </p:sp>
+      <p:cxnSp>
+        <p:nvCxnSpPr>
+          <p:cNvPr id="11" name="Gerader Verbinder 10">
+            <a:extLst>
+              <a:ext uri="{FF2B5EF4-FFF2-40B4-BE49-F238E27FC236}">
+                <a16:creationId xmlns:a16="http://schemas.microsoft.com/office/drawing/2014/main" id="{9145EB7A-A285-F483-74A4-DFAD77466C11}"/>
+              </a:ext>
+            </a:extLst>
+          </p:cNvPr>
+          <p:cNvCxnSpPr>
+            <a:cxnSpLocks/>
+          </p:cNvCxnSpPr>
+          <p:nvPr/>
+        </p:nvCxnSpPr>
+        <p:spPr>
+          <a:xfrm>
+            <a:off x="2295244" y="1830226"/>
+            <a:ext cx="124097" cy="0"/>
+          </a:xfrm>
+          <a:prstGeom prst="line">
+            <a:avLst/>
+          </a:prstGeom>
+          <a:ln w="6350">
+            <a:solidFill>
+              <a:schemeClr val="tx1">
+                <a:lumMod val="65000"/>
+                <a:lumOff val="35000"/>
+              </a:schemeClr>
+            </a:solidFill>
+          </a:ln>
+        </p:spPr>
+        <p:style>
+          <a:lnRef idx="2">
+            <a:schemeClr val="accent1"/>
+          </a:lnRef>
+          <a:fillRef idx="0">
+            <a:schemeClr val="accent1"/>
+          </a:fillRef>
+          <a:effectRef idx="1">
+            <a:schemeClr val="accent1"/>
+          </a:effectRef>
+          <a:fontRef idx="minor">
+            <a:schemeClr val="tx1"/>
+          </a:fontRef>
+        </p:style>
+      </p:cxnSp>
+      <p:cxnSp>
+        <p:nvCxnSpPr>
+          <p:cNvPr id="12" name="Gerader Verbinder 11">
+            <a:extLst>
+              <a:ext uri="{FF2B5EF4-FFF2-40B4-BE49-F238E27FC236}">
+                <a16:creationId xmlns:a16="http://schemas.microsoft.com/office/drawing/2014/main" id="{E86B782C-48CE-2375-4A4E-2311230A52AB}"/>
+              </a:ext>
+            </a:extLst>
+          </p:cNvPr>
+          <p:cNvCxnSpPr>
+            <a:cxnSpLocks/>
+          </p:cNvCxnSpPr>
+          <p:nvPr/>
+        </p:nvCxnSpPr>
+        <p:spPr>
+          <a:xfrm>
+            <a:off x="2124086" y="1323210"/>
+            <a:ext cx="124097" cy="0"/>
+          </a:xfrm>
+          <a:prstGeom prst="line">
+            <a:avLst/>
+          </a:prstGeom>
+          <a:ln w="6350">
+            <a:solidFill>
+              <a:schemeClr val="tx1">
+                <a:lumMod val="65000"/>
+                <a:lumOff val="35000"/>
+              </a:schemeClr>
+            </a:solidFill>
+          </a:ln>
+        </p:spPr>
+        <p:style>
+          <a:lnRef idx="2">
+            <a:schemeClr val="accent1"/>
+          </a:lnRef>
+          <a:fillRef idx="0">
+            <a:schemeClr val="accent1"/>
+          </a:fillRef>
+          <a:effectRef idx="1">
+            <a:schemeClr val="accent1"/>
+          </a:effectRef>
+          <a:fontRef idx="minor">
+            <a:schemeClr val="tx1"/>
+          </a:fontRef>
+        </p:style>
+      </p:cxnSp>
+      <p:cxnSp>
+        <p:nvCxnSpPr>
+          <p:cNvPr id="14" name="Gerader Verbinder 13">
+            <a:extLst>
+              <a:ext uri="{FF2B5EF4-FFF2-40B4-BE49-F238E27FC236}">
+                <a16:creationId xmlns:a16="http://schemas.microsoft.com/office/drawing/2014/main" id="{030BE5FB-9C58-22EB-FE91-B9B5E33F7089}"/>
+              </a:ext>
+            </a:extLst>
+          </p:cNvPr>
+          <p:cNvCxnSpPr>
+            <a:cxnSpLocks/>
+          </p:cNvCxnSpPr>
+          <p:nvPr/>
+        </p:nvCxnSpPr>
+        <p:spPr>
+          <a:xfrm>
+            <a:off x="925032" y="1644284"/>
+            <a:ext cx="153364" cy="0"/>
+          </a:xfrm>
+          <a:prstGeom prst="line">
+            <a:avLst/>
+          </a:prstGeom>
+          <a:ln w="6350">
+            <a:solidFill>
+              <a:schemeClr val="tx1">
+                <a:lumMod val="65000"/>
+                <a:lumOff val="35000"/>
+              </a:schemeClr>
+            </a:solidFill>
+          </a:ln>
+        </p:spPr>
+        <p:style>
+          <a:lnRef idx="2">
+            <a:schemeClr val="accent1"/>
+          </a:lnRef>
+          <a:fillRef idx="0">
+            <a:schemeClr val="accent1"/>
+          </a:fillRef>
+          <a:effectRef idx="1">
+            <a:schemeClr val="accent1"/>
+          </a:effectRef>
+          <a:fontRef idx="minor">
+            <a:schemeClr val="tx1"/>
+          </a:fontRef>
+        </p:style>
+      </p:cxnSp>
+    </p:spTree>
+    <p:extLst>
+      <p:ext uri="{BB962C8B-B14F-4D97-AF65-F5344CB8AC3E}">
+        <p14:creationId xmlns:p14="http://schemas.microsoft.com/office/powerpoint/2010/main" val="4026976114"/>
       </p:ext>
     </p:extLst>
   </p:cSld>
@@ -16989,7 +25293,7 @@
               <a:t>u</a:t>
             </a:r>
             <a:r>
-              <a:rPr lang="de-DE" sz="1400" i="1" baseline="-25000" dirty="0">
+              <a:rPr lang="de-DE" sz="1400" baseline="-25000" dirty="0">
                 <a:solidFill>
                   <a:srgbClr val="086FBD"/>
                 </a:solidFill>
@@ -17057,8 +25361,8 @@
         </p:nvSpPr>
         <p:spPr>
           <a:xfrm>
-            <a:off x="1529673" y="1365291"/>
-            <a:ext cx="518786" cy="307777"/>
+            <a:off x="1496467" y="1365291"/>
+            <a:ext cx="551992" cy="307777"/>
           </a:xfrm>
           <a:prstGeom prst="rect">
             <a:avLst/>
@@ -17084,7 +25388,7 @@
               <a:t>i</a:t>
             </a:r>
             <a:r>
-              <a:rPr lang="de-DE" sz="1400" i="1" baseline="-25000" dirty="0">
+              <a:rPr lang="de-DE" sz="1400" baseline="-25000" dirty="0">
                 <a:solidFill>
                   <a:srgbClr val="FF0000"/>
                 </a:solidFill>

--- a/B.Sc. LRT/Grundlagen der Elektrotechnik/images/ETech-Images.pptx
+++ b/B.Sc. LRT/Grundlagen der Elektrotechnik/images/ETech-Images.pptx
@@ -5,7 +5,7 @@
     <p:sldMasterId id="2147483660" r:id="rId1"/>
   </p:sldMasterIdLst>
   <p:notesMasterIdLst>
-    <p:notesMasterId r:id="rId23"/>
+    <p:notesMasterId r:id="rId27"/>
   </p:notesMasterIdLst>
   <p:sldIdLst>
     <p:sldId id="256" r:id="rId2"/>
@@ -29,6 +29,10 @@
     <p:sldId id="273" r:id="rId20"/>
     <p:sldId id="276" r:id="rId21"/>
     <p:sldId id="277" r:id="rId22"/>
+    <p:sldId id="278" r:id="rId23"/>
+    <p:sldId id="279" r:id="rId24"/>
+    <p:sldId id="280" r:id="rId25"/>
+    <p:sldId id="281" r:id="rId26"/>
   </p:sldIdLst>
   <p:sldSz cx="3600450" cy="3600450"/>
   <p:notesSz cx="6858000" cy="9144000"/>
@@ -217,7 +221,7 @@
           <a:p>
             <a:fld id="{0C596C2D-C72C-406E-B79E-9BAC142DD20E}" type="datetimeFigureOut">
               <a:rPr lang="de-DE" smtClean="0"/>
-              <a:t>12.02.2026</a:t>
+              <a:t>17.02.2026</a:t>
             </a:fld>
             <a:endParaRPr lang="de-DE" dirty="0"/>
           </a:p>
@@ -615,7 +619,7 @@
           <a:p>
             <a:fld id="{6EAE28AA-0912-4DA0-8B30-7F3CA3FE6671}" type="datetimeFigureOut">
               <a:rPr lang="de-DE" smtClean="0"/>
-              <a:t>12.02.2026</a:t>
+              <a:t>17.02.2026</a:t>
             </a:fld>
             <a:endParaRPr lang="de-DE" dirty="0"/>
           </a:p>
@@ -785,7 +789,7 @@
           <a:p>
             <a:fld id="{6EAE28AA-0912-4DA0-8B30-7F3CA3FE6671}" type="datetimeFigureOut">
               <a:rPr lang="de-DE" smtClean="0"/>
-              <a:t>12.02.2026</a:t>
+              <a:t>17.02.2026</a:t>
             </a:fld>
             <a:endParaRPr lang="de-DE" dirty="0"/>
           </a:p>
@@ -965,7 +969,7 @@
           <a:p>
             <a:fld id="{6EAE28AA-0912-4DA0-8B30-7F3CA3FE6671}" type="datetimeFigureOut">
               <a:rPr lang="de-DE" smtClean="0"/>
-              <a:t>12.02.2026</a:t>
+              <a:t>17.02.2026</a:t>
             </a:fld>
             <a:endParaRPr lang="de-DE" dirty="0"/>
           </a:p>
@@ -1135,7 +1139,7 @@
           <a:p>
             <a:fld id="{6EAE28AA-0912-4DA0-8B30-7F3CA3FE6671}" type="datetimeFigureOut">
               <a:rPr lang="de-DE" smtClean="0"/>
-              <a:t>12.02.2026</a:t>
+              <a:t>17.02.2026</a:t>
             </a:fld>
             <a:endParaRPr lang="de-DE" dirty="0"/>
           </a:p>
@@ -1381,7 +1385,7 @@
           <a:p>
             <a:fld id="{6EAE28AA-0912-4DA0-8B30-7F3CA3FE6671}" type="datetimeFigureOut">
               <a:rPr lang="de-DE" smtClean="0"/>
-              <a:t>12.02.2026</a:t>
+              <a:t>17.02.2026</a:t>
             </a:fld>
             <a:endParaRPr lang="de-DE" dirty="0"/>
           </a:p>
@@ -1613,7 +1617,7 @@
           <a:p>
             <a:fld id="{6EAE28AA-0912-4DA0-8B30-7F3CA3FE6671}" type="datetimeFigureOut">
               <a:rPr lang="de-DE" smtClean="0"/>
-              <a:t>12.02.2026</a:t>
+              <a:t>17.02.2026</a:t>
             </a:fld>
             <a:endParaRPr lang="de-DE" dirty="0"/>
           </a:p>
@@ -1980,7 +1984,7 @@
           <a:p>
             <a:fld id="{6EAE28AA-0912-4DA0-8B30-7F3CA3FE6671}" type="datetimeFigureOut">
               <a:rPr lang="de-DE" smtClean="0"/>
-              <a:t>12.02.2026</a:t>
+              <a:t>17.02.2026</a:t>
             </a:fld>
             <a:endParaRPr lang="de-DE" dirty="0"/>
           </a:p>
@@ -2098,7 +2102,7 @@
           <a:p>
             <a:fld id="{6EAE28AA-0912-4DA0-8B30-7F3CA3FE6671}" type="datetimeFigureOut">
               <a:rPr lang="de-DE" smtClean="0"/>
-              <a:t>12.02.2026</a:t>
+              <a:t>17.02.2026</a:t>
             </a:fld>
             <a:endParaRPr lang="de-DE" dirty="0"/>
           </a:p>
@@ -2193,7 +2197,7 @@
           <a:p>
             <a:fld id="{6EAE28AA-0912-4DA0-8B30-7F3CA3FE6671}" type="datetimeFigureOut">
               <a:rPr lang="de-DE" smtClean="0"/>
-              <a:t>12.02.2026</a:t>
+              <a:t>17.02.2026</a:t>
             </a:fld>
             <a:endParaRPr lang="de-DE" dirty="0"/>
           </a:p>
@@ -2470,7 +2474,7 @@
           <a:p>
             <a:fld id="{6EAE28AA-0912-4DA0-8B30-7F3CA3FE6671}" type="datetimeFigureOut">
               <a:rPr lang="de-DE" smtClean="0"/>
-              <a:t>12.02.2026</a:t>
+              <a:t>17.02.2026</a:t>
             </a:fld>
             <a:endParaRPr lang="de-DE" dirty="0"/>
           </a:p>
@@ -2727,7 +2731,7 @@
           <a:p>
             <a:fld id="{6EAE28AA-0912-4DA0-8B30-7F3CA3FE6671}" type="datetimeFigureOut">
               <a:rPr lang="de-DE" smtClean="0"/>
-              <a:t>12.02.2026</a:t>
+              <a:t>17.02.2026</a:t>
             </a:fld>
             <a:endParaRPr lang="de-DE" dirty="0"/>
           </a:p>
@@ -2940,7 +2944,7 @@
           <a:p>
             <a:fld id="{6EAE28AA-0912-4DA0-8B30-7F3CA3FE6671}" type="datetimeFigureOut">
               <a:rPr lang="de-DE" smtClean="0"/>
-              <a:t>12.02.2026</a:t>
+              <a:t>17.02.2026</a:t>
             </a:fld>
             <a:endParaRPr lang="de-DE" dirty="0"/>
           </a:p>
@@ -19768,6 +19772,5516 @@
     <p:extLst>
       <p:ext uri="{BB962C8B-B14F-4D97-AF65-F5344CB8AC3E}">
         <p14:creationId xmlns:p14="http://schemas.microsoft.com/office/powerpoint/2010/main" val="4026976114"/>
+      </p:ext>
+    </p:extLst>
+  </p:cSld>
+  <p:clrMapOvr>
+    <a:masterClrMapping/>
+  </p:clrMapOvr>
+</p:sld>
+</file>
+
+<file path=ppt/slides/slide22.xml><?xml version="1.0" encoding="utf-8"?>
+<p:sld xmlns:a="http://schemas.openxmlformats.org/drawingml/2006/main" xmlns:r="http://schemas.openxmlformats.org/officeDocument/2006/relationships" xmlns:p="http://schemas.openxmlformats.org/presentationml/2006/main">
+  <p:cSld>
+    <p:spTree>
+      <p:nvGrpSpPr>
+        <p:cNvPr id="1" name="">
+          <a:extLst>
+            <a:ext uri="{FF2B5EF4-FFF2-40B4-BE49-F238E27FC236}">
+              <a16:creationId xmlns:a16="http://schemas.microsoft.com/office/drawing/2014/main" id="{1324DB1F-DBF9-4E7C-A43E-BD3D96EB5D7B}"/>
+            </a:ext>
+          </a:extLst>
+        </p:cNvPr>
+        <p:cNvGrpSpPr/>
+        <p:nvPr/>
+      </p:nvGrpSpPr>
+      <p:grpSpPr>
+        <a:xfrm>
+          <a:off x="0" y="0"/>
+          <a:ext cx="0" cy="0"/>
+          <a:chOff x="0" y="0"/>
+          <a:chExt cx="0" cy="0"/>
+        </a:xfrm>
+      </p:grpSpPr>
+      <p:sp>
+        <p:nvSpPr>
+          <p:cNvPr id="4" name="Rechteck 3">
+            <a:extLst>
+              <a:ext uri="{FF2B5EF4-FFF2-40B4-BE49-F238E27FC236}">
+                <a16:creationId xmlns:a16="http://schemas.microsoft.com/office/drawing/2014/main" id="{A77ED293-AE6C-DE94-CCE8-19B09B548329}"/>
+              </a:ext>
+            </a:extLst>
+          </p:cNvPr>
+          <p:cNvSpPr/>
+          <p:nvPr/>
+        </p:nvSpPr>
+        <p:spPr>
+          <a:xfrm>
+            <a:off x="1252602" y="886216"/>
+            <a:ext cx="1094135" cy="1803748"/>
+          </a:xfrm>
+          <a:prstGeom prst="rect">
+            <a:avLst/>
+          </a:prstGeom>
+          <a:noFill/>
+          <a:ln w="15875" cap="rnd">
+            <a:solidFill>
+              <a:schemeClr val="tx1"/>
+            </a:solidFill>
+            <a:round/>
+          </a:ln>
+        </p:spPr>
+        <p:style>
+          <a:lnRef idx="2">
+            <a:schemeClr val="accent1">
+              <a:shade val="15000"/>
+            </a:schemeClr>
+          </a:lnRef>
+          <a:fillRef idx="1">
+            <a:schemeClr val="accent1"/>
+          </a:fillRef>
+          <a:effectRef idx="0">
+            <a:schemeClr val="accent1"/>
+          </a:effectRef>
+          <a:fontRef idx="minor">
+            <a:schemeClr val="lt1"/>
+          </a:fontRef>
+        </p:style>
+        <p:txBody>
+          <a:bodyPr rtlCol="0" anchor="ctr"/>
+          <a:lstStyle/>
+          <a:p>
+            <a:pPr algn="ctr"/>
+            <a:endParaRPr lang="de-DE" dirty="0"/>
+          </a:p>
+        </p:txBody>
+      </p:sp>
+      <p:sp>
+        <p:nvSpPr>
+          <p:cNvPr id="10" name="Rechteck 9">
+            <a:extLst>
+              <a:ext uri="{FF2B5EF4-FFF2-40B4-BE49-F238E27FC236}">
+                <a16:creationId xmlns:a16="http://schemas.microsoft.com/office/drawing/2014/main" id="{980DB097-6DF0-0CA0-696E-9CE228280A0E}"/>
+              </a:ext>
+            </a:extLst>
+          </p:cNvPr>
+          <p:cNvSpPr/>
+          <p:nvPr/>
+        </p:nvSpPr>
+        <p:spPr>
+          <a:xfrm rot="16200000">
+            <a:off x="2180600" y="1262538"/>
+            <a:ext cx="335280" cy="118110"/>
+          </a:xfrm>
+          <a:prstGeom prst="rect">
+            <a:avLst/>
+          </a:prstGeom>
+          <a:solidFill>
+            <a:schemeClr val="bg1"/>
+          </a:solidFill>
+          <a:ln w="15875" cap="rnd">
+            <a:solidFill>
+              <a:schemeClr val="tx1"/>
+            </a:solidFill>
+            <a:round/>
+          </a:ln>
+        </p:spPr>
+        <p:style>
+          <a:lnRef idx="2">
+            <a:schemeClr val="accent1">
+              <a:shade val="15000"/>
+            </a:schemeClr>
+          </a:lnRef>
+          <a:fillRef idx="1">
+            <a:schemeClr val="accent1"/>
+          </a:fillRef>
+          <a:effectRef idx="0">
+            <a:schemeClr val="accent1"/>
+          </a:effectRef>
+          <a:fontRef idx="minor">
+            <a:schemeClr val="lt1"/>
+          </a:fontRef>
+        </p:style>
+        <p:txBody>
+          <a:bodyPr rtlCol="0" anchor="ctr"/>
+          <a:lstStyle/>
+          <a:p>
+            <a:pPr algn="ctr"/>
+            <a:endParaRPr lang="de-DE" dirty="0"/>
+          </a:p>
+        </p:txBody>
+      </p:sp>
+      <p:sp>
+        <p:nvSpPr>
+          <p:cNvPr id="11" name="Rechteck 10">
+            <a:extLst>
+              <a:ext uri="{FF2B5EF4-FFF2-40B4-BE49-F238E27FC236}">
+                <a16:creationId xmlns:a16="http://schemas.microsoft.com/office/drawing/2014/main" id="{D4653D95-9E25-F74A-C28C-11F58FF558D3}"/>
+              </a:ext>
+            </a:extLst>
+          </p:cNvPr>
+          <p:cNvSpPr/>
+          <p:nvPr/>
+        </p:nvSpPr>
+        <p:spPr>
+          <a:xfrm rot="16200000" flipH="1">
+            <a:off x="2315749" y="2128772"/>
+            <a:ext cx="64982" cy="229902"/>
+          </a:xfrm>
+          <a:prstGeom prst="rect">
+            <a:avLst/>
+          </a:prstGeom>
+          <a:solidFill>
+            <a:schemeClr val="bg1"/>
+          </a:solidFill>
+          <a:ln w="15875" cap="rnd">
+            <a:noFill/>
+            <a:round/>
+          </a:ln>
+        </p:spPr>
+        <p:style>
+          <a:lnRef idx="2">
+            <a:schemeClr val="accent1">
+              <a:shade val="15000"/>
+            </a:schemeClr>
+          </a:lnRef>
+          <a:fillRef idx="1">
+            <a:schemeClr val="accent1"/>
+          </a:fillRef>
+          <a:effectRef idx="0">
+            <a:schemeClr val="accent1"/>
+          </a:effectRef>
+          <a:fontRef idx="minor">
+            <a:schemeClr val="lt1"/>
+          </a:fontRef>
+        </p:style>
+        <p:txBody>
+          <a:bodyPr rtlCol="0" anchor="ctr"/>
+          <a:lstStyle/>
+          <a:p>
+            <a:pPr algn="ctr"/>
+            <a:endParaRPr lang="de-DE" dirty="0"/>
+          </a:p>
+        </p:txBody>
+      </p:sp>
+      <p:sp>
+        <p:nvSpPr>
+          <p:cNvPr id="13" name="Ellipse 12">
+            <a:extLst>
+              <a:ext uri="{FF2B5EF4-FFF2-40B4-BE49-F238E27FC236}">
+                <a16:creationId xmlns:a16="http://schemas.microsoft.com/office/drawing/2014/main" id="{5FEA5FA4-C1D0-C3D4-A296-E205F649D531}"/>
+              </a:ext>
+            </a:extLst>
+          </p:cNvPr>
+          <p:cNvSpPr/>
+          <p:nvPr/>
+        </p:nvSpPr>
+        <p:spPr>
+          <a:xfrm>
+            <a:off x="1138303" y="1946073"/>
+            <a:ext cx="228600" cy="228600"/>
+          </a:xfrm>
+          <a:prstGeom prst="ellipse">
+            <a:avLst/>
+          </a:prstGeom>
+          <a:noFill/>
+          <a:ln w="15875">
+            <a:solidFill>
+              <a:schemeClr val="tx1"/>
+            </a:solidFill>
+          </a:ln>
+        </p:spPr>
+        <p:style>
+          <a:lnRef idx="2">
+            <a:schemeClr val="accent1">
+              <a:shade val="15000"/>
+            </a:schemeClr>
+          </a:lnRef>
+          <a:fillRef idx="1">
+            <a:schemeClr val="accent1"/>
+          </a:fillRef>
+          <a:effectRef idx="0">
+            <a:schemeClr val="accent1"/>
+          </a:effectRef>
+          <a:fontRef idx="minor">
+            <a:schemeClr val="lt1"/>
+          </a:fontRef>
+        </p:style>
+        <p:txBody>
+          <a:bodyPr rtlCol="0" anchor="ctr"/>
+          <a:lstStyle/>
+          <a:p>
+            <a:pPr algn="ctr"/>
+            <a:endParaRPr lang="de-DE" dirty="0"/>
+          </a:p>
+        </p:txBody>
+      </p:sp>
+      <p:cxnSp>
+        <p:nvCxnSpPr>
+          <p:cNvPr id="14" name="Gerade Verbindung mit Pfeil 13">
+            <a:extLst>
+              <a:ext uri="{FF2B5EF4-FFF2-40B4-BE49-F238E27FC236}">
+                <a16:creationId xmlns:a16="http://schemas.microsoft.com/office/drawing/2014/main" id="{44460B7A-CEF3-0E26-00B3-72EE77A6F20F}"/>
+              </a:ext>
+            </a:extLst>
+          </p:cNvPr>
+          <p:cNvCxnSpPr>
+            <a:cxnSpLocks/>
+          </p:cNvCxnSpPr>
+          <p:nvPr/>
+        </p:nvCxnSpPr>
+        <p:spPr>
+          <a:xfrm>
+            <a:off x="1425958" y="1799479"/>
+            <a:ext cx="0" cy="565147"/>
+          </a:xfrm>
+          <a:prstGeom prst="straightConnector1">
+            <a:avLst/>
+          </a:prstGeom>
+          <a:ln cap="rnd">
+            <a:solidFill>
+              <a:srgbClr val="086FBD"/>
+            </a:solidFill>
+            <a:round/>
+            <a:tailEnd type="triangle"/>
+          </a:ln>
+        </p:spPr>
+        <p:style>
+          <a:lnRef idx="2">
+            <a:schemeClr val="accent1"/>
+          </a:lnRef>
+          <a:fillRef idx="0">
+            <a:schemeClr val="accent1"/>
+          </a:fillRef>
+          <a:effectRef idx="1">
+            <a:schemeClr val="accent1"/>
+          </a:effectRef>
+          <a:fontRef idx="minor">
+            <a:schemeClr val="tx1"/>
+          </a:fontRef>
+        </p:style>
+      </p:cxnSp>
+      <p:sp>
+        <p:nvSpPr>
+          <p:cNvPr id="15" name="Textfeld 14">
+            <a:extLst>
+              <a:ext uri="{FF2B5EF4-FFF2-40B4-BE49-F238E27FC236}">
+                <a16:creationId xmlns:a16="http://schemas.microsoft.com/office/drawing/2014/main" id="{1412374B-2035-3EB3-1D14-F51E3F4FC5E0}"/>
+              </a:ext>
+            </a:extLst>
+          </p:cNvPr>
+          <p:cNvSpPr txBox="1"/>
+          <p:nvPr/>
+        </p:nvSpPr>
+        <p:spPr>
+          <a:xfrm>
+            <a:off x="1372931" y="1932738"/>
+            <a:ext cx="341666" cy="261610"/>
+          </a:xfrm>
+          <a:prstGeom prst="rect">
+            <a:avLst/>
+          </a:prstGeom>
+          <a:noFill/>
+        </p:spPr>
+        <p:txBody>
+          <a:bodyPr wrap="square" rtlCol="0">
+            <a:spAutoFit/>
+          </a:bodyPr>
+          <a:lstStyle/>
+          <a:p>
+            <a:r>
+              <a:rPr lang="de-DE" sz="1100" i="1" dirty="0">
+                <a:solidFill>
+                  <a:srgbClr val="086FBD"/>
+                </a:solidFill>
+                <a:latin typeface="CMU Serif" panose="02000603000000000000" pitchFamily="2" charset="0"/>
+                <a:ea typeface="CMU Serif" panose="02000603000000000000" pitchFamily="2" charset="0"/>
+                <a:cs typeface="CMU Serif" panose="02000603000000000000" pitchFamily="2" charset="0"/>
+              </a:rPr>
+              <a:t>û</a:t>
+            </a:r>
+            <a:endParaRPr lang="de-DE" sz="1100" baseline="-25000" dirty="0">
+              <a:solidFill>
+                <a:srgbClr val="086FBD"/>
+              </a:solidFill>
+              <a:latin typeface="CMU Serif" panose="02000603000000000000" pitchFamily="2" charset="0"/>
+              <a:ea typeface="CMU Serif" panose="02000603000000000000" pitchFamily="2" charset="0"/>
+              <a:cs typeface="CMU Serif" panose="02000603000000000000" pitchFamily="2" charset="0"/>
+            </a:endParaRPr>
+          </a:p>
+        </p:txBody>
+      </p:sp>
+      <p:cxnSp>
+        <p:nvCxnSpPr>
+          <p:cNvPr id="16" name="Gerade Verbindung mit Pfeil 15">
+            <a:extLst>
+              <a:ext uri="{FF2B5EF4-FFF2-40B4-BE49-F238E27FC236}">
+                <a16:creationId xmlns:a16="http://schemas.microsoft.com/office/drawing/2014/main" id="{179DA026-5186-1E81-EF9F-1246B5E7B89F}"/>
+              </a:ext>
+            </a:extLst>
+          </p:cNvPr>
+          <p:cNvCxnSpPr/>
+          <p:nvPr/>
+        </p:nvCxnSpPr>
+        <p:spPr>
+          <a:xfrm>
+            <a:off x="1720730" y="886454"/>
+            <a:ext cx="167999" cy="0"/>
+          </a:xfrm>
+          <a:prstGeom prst="straightConnector1">
+            <a:avLst/>
+          </a:prstGeom>
+          <a:ln cap="rnd">
+            <a:solidFill>
+              <a:srgbClr val="FF0000"/>
+            </a:solidFill>
+            <a:round/>
+            <a:tailEnd type="triangle"/>
+          </a:ln>
+        </p:spPr>
+        <p:style>
+          <a:lnRef idx="2">
+            <a:schemeClr val="accent1"/>
+          </a:lnRef>
+          <a:fillRef idx="0">
+            <a:schemeClr val="accent1"/>
+          </a:fillRef>
+          <a:effectRef idx="1">
+            <a:schemeClr val="accent1"/>
+          </a:effectRef>
+          <a:fontRef idx="minor">
+            <a:schemeClr val="tx1"/>
+          </a:fontRef>
+        </p:style>
+      </p:cxnSp>
+      <p:sp>
+        <p:nvSpPr>
+          <p:cNvPr id="17" name="Textfeld 16">
+            <a:extLst>
+              <a:ext uri="{FF2B5EF4-FFF2-40B4-BE49-F238E27FC236}">
+                <a16:creationId xmlns:a16="http://schemas.microsoft.com/office/drawing/2014/main" id="{C7FFED1E-1CCE-F62F-7261-31F4E84288AF}"/>
+              </a:ext>
+            </a:extLst>
+          </p:cNvPr>
+          <p:cNvSpPr txBox="1"/>
+          <p:nvPr/>
+        </p:nvSpPr>
+        <p:spPr>
+          <a:xfrm>
+            <a:off x="1609825" y="914738"/>
+            <a:ext cx="414807" cy="261610"/>
+          </a:xfrm>
+          <a:prstGeom prst="rect">
+            <a:avLst/>
+          </a:prstGeom>
+          <a:noFill/>
+        </p:spPr>
+        <p:txBody>
+          <a:bodyPr wrap="square" rtlCol="0">
+            <a:spAutoFit/>
+          </a:bodyPr>
+          <a:lstStyle/>
+          <a:p>
+            <a:r>
+              <a:rPr lang="de-DE" sz="1100" i="1" dirty="0">
+                <a:solidFill>
+                  <a:srgbClr val="FF0000"/>
+                </a:solidFill>
+                <a:latin typeface="CMU Serif" panose="02000603000000000000" pitchFamily="2" charset="0"/>
+                <a:ea typeface="CMU Serif" panose="02000603000000000000" pitchFamily="2" charset="0"/>
+                <a:cs typeface="CMU Serif" panose="02000603000000000000" pitchFamily="2" charset="0"/>
+              </a:rPr>
+              <a:t>i</a:t>
+            </a:r>
+            <a:r>
+              <a:rPr lang="de-DE" sz="1100" dirty="0">
+                <a:solidFill>
+                  <a:srgbClr val="FF0000"/>
+                </a:solidFill>
+                <a:latin typeface="CMU Serif" panose="02000603000000000000" pitchFamily="2" charset="0"/>
+                <a:ea typeface="CMU Serif" panose="02000603000000000000" pitchFamily="2" charset="0"/>
+                <a:cs typeface="CMU Serif" panose="02000603000000000000" pitchFamily="2" charset="0"/>
+              </a:rPr>
+              <a:t>(</a:t>
+            </a:r>
+            <a:r>
+              <a:rPr lang="de-DE" sz="1100" i="1" dirty="0">
+                <a:solidFill>
+                  <a:srgbClr val="FF0000"/>
+                </a:solidFill>
+                <a:latin typeface="CMU Serif" panose="02000603000000000000" pitchFamily="2" charset="0"/>
+                <a:ea typeface="CMU Serif" panose="02000603000000000000" pitchFamily="2" charset="0"/>
+                <a:cs typeface="CMU Serif" panose="02000603000000000000" pitchFamily="2" charset="0"/>
+              </a:rPr>
+              <a:t>t</a:t>
+            </a:r>
+            <a:r>
+              <a:rPr lang="de-DE" sz="1100" dirty="0">
+                <a:solidFill>
+                  <a:srgbClr val="FF0000"/>
+                </a:solidFill>
+                <a:latin typeface="CMU Serif" panose="02000603000000000000" pitchFamily="2" charset="0"/>
+                <a:ea typeface="CMU Serif" panose="02000603000000000000" pitchFamily="2" charset="0"/>
+                <a:cs typeface="CMU Serif" panose="02000603000000000000" pitchFamily="2" charset="0"/>
+              </a:rPr>
+              <a:t>)</a:t>
+            </a:r>
+            <a:endParaRPr lang="de-DE" sz="1100" baseline="-25000" dirty="0">
+              <a:solidFill>
+                <a:srgbClr val="FF0000"/>
+              </a:solidFill>
+              <a:latin typeface="CMU Serif" panose="02000603000000000000" pitchFamily="2" charset="0"/>
+              <a:ea typeface="CMU Serif" panose="02000603000000000000" pitchFamily="2" charset="0"/>
+              <a:cs typeface="CMU Serif" panose="02000603000000000000" pitchFamily="2" charset="0"/>
+            </a:endParaRPr>
+          </a:p>
+        </p:txBody>
+      </p:sp>
+      <p:sp>
+        <p:nvSpPr>
+          <p:cNvPr id="20" name="Textfeld 19">
+            <a:extLst>
+              <a:ext uri="{FF2B5EF4-FFF2-40B4-BE49-F238E27FC236}">
+                <a16:creationId xmlns:a16="http://schemas.microsoft.com/office/drawing/2014/main" id="{C4206880-4613-5DA0-59F9-9EA479070CCD}"/>
+              </a:ext>
+            </a:extLst>
+          </p:cNvPr>
+          <p:cNvSpPr txBox="1"/>
+          <p:nvPr/>
+        </p:nvSpPr>
+        <p:spPr>
+          <a:xfrm>
+            <a:off x="2348239" y="1199555"/>
+            <a:ext cx="341666" cy="261610"/>
+          </a:xfrm>
+          <a:prstGeom prst="rect">
+            <a:avLst/>
+          </a:prstGeom>
+          <a:noFill/>
+        </p:spPr>
+        <p:txBody>
+          <a:bodyPr wrap="square" rtlCol="0">
+            <a:spAutoFit/>
+          </a:bodyPr>
+          <a:lstStyle/>
+          <a:p>
+            <a:pPr algn="ctr"/>
+            <a:r>
+              <a:rPr lang="de-DE" sz="1100" i="1" dirty="0">
+                <a:latin typeface="CMU Serif" panose="02000603000000000000" pitchFamily="2" charset="0"/>
+                <a:ea typeface="CMU Serif" panose="02000603000000000000" pitchFamily="2" charset="0"/>
+                <a:cs typeface="CMU Serif" panose="02000603000000000000" pitchFamily="2" charset="0"/>
+              </a:rPr>
+              <a:t>R</a:t>
+            </a:r>
+            <a:endParaRPr lang="de-DE" sz="1100" baseline="-25000" dirty="0">
+              <a:latin typeface="CMU Serif" panose="02000603000000000000" pitchFamily="2" charset="0"/>
+              <a:ea typeface="CMU Serif" panose="02000603000000000000" pitchFamily="2" charset="0"/>
+              <a:cs typeface="CMU Serif" panose="02000603000000000000" pitchFamily="2" charset="0"/>
+            </a:endParaRPr>
+          </a:p>
+        </p:txBody>
+      </p:sp>
+      <p:sp>
+        <p:nvSpPr>
+          <p:cNvPr id="26" name="Textfeld 25">
+            <a:extLst>
+              <a:ext uri="{FF2B5EF4-FFF2-40B4-BE49-F238E27FC236}">
+                <a16:creationId xmlns:a16="http://schemas.microsoft.com/office/drawing/2014/main" id="{8F9A8D64-0000-F750-686E-FCC69287EC25}"/>
+              </a:ext>
+            </a:extLst>
+          </p:cNvPr>
+          <p:cNvSpPr txBox="1"/>
+          <p:nvPr/>
+        </p:nvSpPr>
+        <p:spPr>
+          <a:xfrm>
+            <a:off x="2409512" y="2123673"/>
+            <a:ext cx="341666" cy="261610"/>
+          </a:xfrm>
+          <a:prstGeom prst="rect">
+            <a:avLst/>
+          </a:prstGeom>
+          <a:noFill/>
+        </p:spPr>
+        <p:txBody>
+          <a:bodyPr wrap="square" rtlCol="0">
+            <a:spAutoFit/>
+          </a:bodyPr>
+          <a:lstStyle/>
+          <a:p>
+            <a:pPr algn="ctr"/>
+            <a:r>
+              <a:rPr lang="de-DE" sz="1100" i="1" dirty="0">
+                <a:latin typeface="CMU Serif" panose="02000603000000000000" pitchFamily="2" charset="0"/>
+                <a:ea typeface="CMU Serif" panose="02000603000000000000" pitchFamily="2" charset="0"/>
+                <a:cs typeface="CMU Serif" panose="02000603000000000000" pitchFamily="2" charset="0"/>
+              </a:rPr>
+              <a:t>C</a:t>
+            </a:r>
+            <a:endParaRPr lang="de-DE" sz="1100" baseline="-25000" dirty="0">
+              <a:latin typeface="CMU Serif" panose="02000603000000000000" pitchFamily="2" charset="0"/>
+              <a:ea typeface="CMU Serif" panose="02000603000000000000" pitchFamily="2" charset="0"/>
+              <a:cs typeface="CMU Serif" panose="02000603000000000000" pitchFamily="2" charset="0"/>
+            </a:endParaRPr>
+          </a:p>
+        </p:txBody>
+      </p:sp>
+      <p:cxnSp>
+        <p:nvCxnSpPr>
+          <p:cNvPr id="2" name="Gerade Verbindung mit Pfeil 1">
+            <a:extLst>
+              <a:ext uri="{FF2B5EF4-FFF2-40B4-BE49-F238E27FC236}">
+                <a16:creationId xmlns:a16="http://schemas.microsoft.com/office/drawing/2014/main" id="{3FBD5434-61CF-3629-8B56-A06F1B4EC280}"/>
+              </a:ext>
+            </a:extLst>
+          </p:cNvPr>
+          <p:cNvCxnSpPr>
+            <a:cxnSpLocks/>
+          </p:cNvCxnSpPr>
+          <p:nvPr/>
+        </p:nvCxnSpPr>
+        <p:spPr>
+          <a:xfrm>
+            <a:off x="2233289" y="2211232"/>
+            <a:ext cx="236026" cy="0"/>
+          </a:xfrm>
+          <a:prstGeom prst="straightConnector1">
+            <a:avLst/>
+          </a:prstGeom>
+          <a:ln w="15875" cap="rnd">
+            <a:solidFill>
+              <a:schemeClr val="tx1"/>
+            </a:solidFill>
+            <a:round/>
+            <a:tailEnd type="none" w="med" len="med"/>
+          </a:ln>
+        </p:spPr>
+        <p:style>
+          <a:lnRef idx="2">
+            <a:schemeClr val="accent1"/>
+          </a:lnRef>
+          <a:fillRef idx="0">
+            <a:schemeClr val="accent1"/>
+          </a:fillRef>
+          <a:effectRef idx="1">
+            <a:schemeClr val="accent1"/>
+          </a:effectRef>
+          <a:fontRef idx="minor">
+            <a:schemeClr val="tx1"/>
+          </a:fontRef>
+        </p:style>
+      </p:cxnSp>
+      <p:cxnSp>
+        <p:nvCxnSpPr>
+          <p:cNvPr id="25" name="Gerade Verbindung mit Pfeil 24">
+            <a:extLst>
+              <a:ext uri="{FF2B5EF4-FFF2-40B4-BE49-F238E27FC236}">
+                <a16:creationId xmlns:a16="http://schemas.microsoft.com/office/drawing/2014/main" id="{F48FDFCA-4949-79FC-7540-3D0A7F144798}"/>
+              </a:ext>
+            </a:extLst>
+          </p:cNvPr>
+          <p:cNvCxnSpPr>
+            <a:cxnSpLocks/>
+          </p:cNvCxnSpPr>
+          <p:nvPr/>
+        </p:nvCxnSpPr>
+        <p:spPr>
+          <a:xfrm>
+            <a:off x="2233289" y="2276214"/>
+            <a:ext cx="236026" cy="0"/>
+          </a:xfrm>
+          <a:prstGeom prst="straightConnector1">
+            <a:avLst/>
+          </a:prstGeom>
+          <a:ln w="15875" cap="rnd">
+            <a:solidFill>
+              <a:schemeClr val="tx1"/>
+            </a:solidFill>
+            <a:round/>
+            <a:tailEnd type="none" w="med" len="med"/>
+          </a:ln>
+        </p:spPr>
+        <p:style>
+          <a:lnRef idx="2">
+            <a:schemeClr val="accent1"/>
+          </a:lnRef>
+          <a:fillRef idx="0">
+            <a:schemeClr val="accent1"/>
+          </a:fillRef>
+          <a:effectRef idx="1">
+            <a:schemeClr val="accent1"/>
+          </a:effectRef>
+          <a:fontRef idx="minor">
+            <a:schemeClr val="tx1"/>
+          </a:fontRef>
+        </p:style>
+      </p:cxnSp>
+      <p:cxnSp>
+        <p:nvCxnSpPr>
+          <p:cNvPr id="30" name="Gerade Verbindung mit Pfeil 29">
+            <a:extLst>
+              <a:ext uri="{FF2B5EF4-FFF2-40B4-BE49-F238E27FC236}">
+                <a16:creationId xmlns:a16="http://schemas.microsoft.com/office/drawing/2014/main" id="{14557E65-3FF6-FED8-FF1A-EC7FB7866E7B}"/>
+              </a:ext>
+            </a:extLst>
+          </p:cNvPr>
+          <p:cNvCxnSpPr>
+            <a:cxnSpLocks/>
+          </p:cNvCxnSpPr>
+          <p:nvPr/>
+        </p:nvCxnSpPr>
+        <p:spPr>
+          <a:xfrm>
+            <a:off x="2160764" y="2028760"/>
+            <a:ext cx="0" cy="451437"/>
+          </a:xfrm>
+          <a:prstGeom prst="straightConnector1">
+            <a:avLst/>
+          </a:prstGeom>
+          <a:ln cap="rnd">
+            <a:solidFill>
+              <a:srgbClr val="086FBD"/>
+            </a:solidFill>
+            <a:round/>
+            <a:tailEnd type="triangle"/>
+          </a:ln>
+        </p:spPr>
+        <p:style>
+          <a:lnRef idx="2">
+            <a:schemeClr val="accent1"/>
+          </a:lnRef>
+          <a:fillRef idx="0">
+            <a:schemeClr val="accent1"/>
+          </a:fillRef>
+          <a:effectRef idx="1">
+            <a:schemeClr val="accent1"/>
+          </a:effectRef>
+          <a:fontRef idx="minor">
+            <a:schemeClr val="tx1"/>
+          </a:fontRef>
+        </p:style>
+      </p:cxnSp>
+      <p:cxnSp>
+        <p:nvCxnSpPr>
+          <p:cNvPr id="33" name="Gerade Verbindung mit Pfeil 32">
+            <a:extLst>
+              <a:ext uri="{FF2B5EF4-FFF2-40B4-BE49-F238E27FC236}">
+                <a16:creationId xmlns:a16="http://schemas.microsoft.com/office/drawing/2014/main" id="{F24BFF88-ABFE-F018-0E65-4A254EC38916}"/>
+              </a:ext>
+            </a:extLst>
+          </p:cNvPr>
+          <p:cNvCxnSpPr>
+            <a:cxnSpLocks/>
+          </p:cNvCxnSpPr>
+          <p:nvPr/>
+        </p:nvCxnSpPr>
+        <p:spPr>
+          <a:xfrm>
+            <a:off x="2160764" y="1130719"/>
+            <a:ext cx="0" cy="451437"/>
+          </a:xfrm>
+          <a:prstGeom prst="straightConnector1">
+            <a:avLst/>
+          </a:prstGeom>
+          <a:ln cap="rnd">
+            <a:solidFill>
+              <a:srgbClr val="086FBD"/>
+            </a:solidFill>
+            <a:round/>
+            <a:tailEnd type="triangle"/>
+          </a:ln>
+        </p:spPr>
+        <p:style>
+          <a:lnRef idx="2">
+            <a:schemeClr val="accent1"/>
+          </a:lnRef>
+          <a:fillRef idx="0">
+            <a:schemeClr val="accent1"/>
+          </a:fillRef>
+          <a:effectRef idx="1">
+            <a:schemeClr val="accent1"/>
+          </a:effectRef>
+          <a:fontRef idx="minor">
+            <a:schemeClr val="tx1"/>
+          </a:fontRef>
+        </p:style>
+      </p:cxnSp>
+      <p:sp>
+        <p:nvSpPr>
+          <p:cNvPr id="34" name="Textfeld 33">
+            <a:extLst>
+              <a:ext uri="{FF2B5EF4-FFF2-40B4-BE49-F238E27FC236}">
+                <a16:creationId xmlns:a16="http://schemas.microsoft.com/office/drawing/2014/main" id="{3AF7A77F-3E18-32FD-5EB2-ED6440F68840}"/>
+              </a:ext>
+            </a:extLst>
+          </p:cNvPr>
+          <p:cNvSpPr txBox="1"/>
+          <p:nvPr/>
+        </p:nvSpPr>
+        <p:spPr>
+          <a:xfrm>
+            <a:off x="1687550" y="1204631"/>
+            <a:ext cx="526326" cy="261610"/>
+          </a:xfrm>
+          <a:prstGeom prst="rect">
+            <a:avLst/>
+          </a:prstGeom>
+          <a:noFill/>
+        </p:spPr>
+        <p:txBody>
+          <a:bodyPr wrap="square" rtlCol="0">
+            <a:spAutoFit/>
+          </a:bodyPr>
+          <a:lstStyle/>
+          <a:p>
+            <a:r>
+              <a:rPr lang="de-DE" sz="1100" i="1" dirty="0" err="1">
+                <a:solidFill>
+                  <a:srgbClr val="086FBD"/>
+                </a:solidFill>
+                <a:latin typeface="CMU Serif" panose="02000603000000000000" pitchFamily="2" charset="0"/>
+                <a:ea typeface="CMU Serif" panose="02000603000000000000" pitchFamily="2" charset="0"/>
+                <a:cs typeface="CMU Serif" panose="02000603000000000000" pitchFamily="2" charset="0"/>
+              </a:rPr>
+              <a:t>u</a:t>
+            </a:r>
+            <a:r>
+              <a:rPr lang="de-DE" sz="1100" baseline="-25000" dirty="0" err="1">
+                <a:solidFill>
+                  <a:srgbClr val="086FBD"/>
+                </a:solidFill>
+                <a:latin typeface="CMU Serif" panose="02000603000000000000" pitchFamily="2" charset="0"/>
+                <a:ea typeface="CMU Serif" panose="02000603000000000000" pitchFamily="2" charset="0"/>
+                <a:cs typeface="CMU Serif" panose="02000603000000000000" pitchFamily="2" charset="0"/>
+              </a:rPr>
+              <a:t>R</a:t>
+            </a:r>
+            <a:r>
+              <a:rPr lang="de-DE" sz="1100" dirty="0">
+                <a:solidFill>
+                  <a:srgbClr val="086FBD"/>
+                </a:solidFill>
+                <a:latin typeface="CMU Serif" panose="02000603000000000000" pitchFamily="2" charset="0"/>
+                <a:ea typeface="CMU Serif" panose="02000603000000000000" pitchFamily="2" charset="0"/>
+                <a:cs typeface="CMU Serif" panose="02000603000000000000" pitchFamily="2" charset="0"/>
+              </a:rPr>
+              <a:t>(</a:t>
+            </a:r>
+            <a:r>
+              <a:rPr lang="de-DE" sz="1100" i="1" dirty="0">
+                <a:solidFill>
+                  <a:srgbClr val="086FBD"/>
+                </a:solidFill>
+                <a:latin typeface="CMU Serif" panose="02000603000000000000" pitchFamily="2" charset="0"/>
+                <a:ea typeface="CMU Serif" panose="02000603000000000000" pitchFamily="2" charset="0"/>
+                <a:cs typeface="CMU Serif" panose="02000603000000000000" pitchFamily="2" charset="0"/>
+              </a:rPr>
+              <a:t>t</a:t>
+            </a:r>
+            <a:r>
+              <a:rPr lang="de-DE" sz="1100" dirty="0">
+                <a:solidFill>
+                  <a:srgbClr val="086FBD"/>
+                </a:solidFill>
+                <a:latin typeface="CMU Serif" panose="02000603000000000000" pitchFamily="2" charset="0"/>
+                <a:ea typeface="CMU Serif" panose="02000603000000000000" pitchFamily="2" charset="0"/>
+                <a:cs typeface="CMU Serif" panose="02000603000000000000" pitchFamily="2" charset="0"/>
+              </a:rPr>
+              <a:t>)</a:t>
+            </a:r>
+          </a:p>
+        </p:txBody>
+      </p:sp>
+      <p:sp>
+        <p:nvSpPr>
+          <p:cNvPr id="35" name="Rechteck 34">
+            <a:extLst>
+              <a:ext uri="{FF2B5EF4-FFF2-40B4-BE49-F238E27FC236}">
+                <a16:creationId xmlns:a16="http://schemas.microsoft.com/office/drawing/2014/main" id="{E4CACA53-2F4F-C915-5017-EADE3D5389AD}"/>
+              </a:ext>
+            </a:extLst>
+          </p:cNvPr>
+          <p:cNvSpPr/>
+          <p:nvPr/>
+        </p:nvSpPr>
+        <p:spPr>
+          <a:xfrm rot="16200000" flipH="1">
+            <a:off x="1093728" y="1262646"/>
+            <a:ext cx="317750" cy="135424"/>
+          </a:xfrm>
+          <a:prstGeom prst="rect">
+            <a:avLst/>
+          </a:prstGeom>
+          <a:solidFill>
+            <a:schemeClr val="bg1"/>
+          </a:solidFill>
+          <a:ln w="15875" cap="rnd">
+            <a:noFill/>
+            <a:round/>
+          </a:ln>
+        </p:spPr>
+        <p:style>
+          <a:lnRef idx="2">
+            <a:schemeClr val="accent1">
+              <a:shade val="15000"/>
+            </a:schemeClr>
+          </a:lnRef>
+          <a:fillRef idx="1">
+            <a:schemeClr val="accent1"/>
+          </a:fillRef>
+          <a:effectRef idx="0">
+            <a:schemeClr val="accent1"/>
+          </a:effectRef>
+          <a:fontRef idx="minor">
+            <a:schemeClr val="lt1"/>
+          </a:fontRef>
+        </p:style>
+        <p:txBody>
+          <a:bodyPr rtlCol="0" anchor="ctr"/>
+          <a:lstStyle/>
+          <a:p>
+            <a:pPr algn="ctr"/>
+            <a:endParaRPr lang="de-DE" dirty="0"/>
+          </a:p>
+        </p:txBody>
+      </p:sp>
+      <p:sp>
+        <p:nvSpPr>
+          <p:cNvPr id="36" name="Ellipse 35">
+            <a:extLst>
+              <a:ext uri="{FF2B5EF4-FFF2-40B4-BE49-F238E27FC236}">
+                <a16:creationId xmlns:a16="http://schemas.microsoft.com/office/drawing/2014/main" id="{CD23F8BF-5411-63E1-080A-BE675C24B9E9}"/>
+              </a:ext>
+            </a:extLst>
+          </p:cNvPr>
+          <p:cNvSpPr/>
+          <p:nvPr/>
+        </p:nvSpPr>
+        <p:spPr>
+          <a:xfrm flipH="1">
+            <a:off x="1229743" y="1461165"/>
+            <a:ext cx="45720" cy="45720"/>
+          </a:xfrm>
+          <a:prstGeom prst="ellipse">
+            <a:avLst/>
+          </a:prstGeom>
+          <a:solidFill>
+            <a:schemeClr val="tx1"/>
+          </a:solidFill>
+          <a:ln>
+            <a:noFill/>
+          </a:ln>
+        </p:spPr>
+        <p:style>
+          <a:lnRef idx="2">
+            <a:schemeClr val="accent1">
+              <a:shade val="15000"/>
+            </a:schemeClr>
+          </a:lnRef>
+          <a:fillRef idx="1">
+            <a:schemeClr val="accent1"/>
+          </a:fillRef>
+          <a:effectRef idx="0">
+            <a:schemeClr val="accent1"/>
+          </a:effectRef>
+          <a:fontRef idx="minor">
+            <a:schemeClr val="lt1"/>
+          </a:fontRef>
+        </p:style>
+        <p:txBody>
+          <a:bodyPr rtlCol="0" anchor="ctr"/>
+          <a:lstStyle/>
+          <a:p>
+            <a:pPr algn="ctr"/>
+            <a:endParaRPr lang="de-DE" dirty="0"/>
+          </a:p>
+        </p:txBody>
+      </p:sp>
+      <p:cxnSp>
+        <p:nvCxnSpPr>
+          <p:cNvPr id="37" name="Gerade Verbindung mit Pfeil 36">
+            <a:extLst>
+              <a:ext uri="{FF2B5EF4-FFF2-40B4-BE49-F238E27FC236}">
+                <a16:creationId xmlns:a16="http://schemas.microsoft.com/office/drawing/2014/main" id="{6C1018D1-1A1D-5AEE-B186-557D52EDDC91}"/>
+              </a:ext>
+            </a:extLst>
+          </p:cNvPr>
+          <p:cNvCxnSpPr>
+            <a:cxnSpLocks/>
+          </p:cNvCxnSpPr>
+          <p:nvPr/>
+        </p:nvCxnSpPr>
+        <p:spPr>
+          <a:xfrm>
+            <a:off x="1129691" y="1211319"/>
+            <a:ext cx="123825" cy="270510"/>
+          </a:xfrm>
+          <a:prstGeom prst="straightConnector1">
+            <a:avLst/>
+          </a:prstGeom>
+          <a:ln w="15875" cap="rnd">
+            <a:solidFill>
+              <a:schemeClr val="tx1"/>
+            </a:solidFill>
+            <a:round/>
+            <a:tailEnd type="none" w="med" len="med"/>
+          </a:ln>
+        </p:spPr>
+        <p:style>
+          <a:lnRef idx="2">
+            <a:schemeClr val="accent1"/>
+          </a:lnRef>
+          <a:fillRef idx="0">
+            <a:schemeClr val="accent1"/>
+          </a:fillRef>
+          <a:effectRef idx="1">
+            <a:schemeClr val="accent1"/>
+          </a:effectRef>
+          <a:fontRef idx="minor">
+            <a:schemeClr val="tx1"/>
+          </a:fontRef>
+        </p:style>
+      </p:cxnSp>
+      <p:sp>
+        <p:nvSpPr>
+          <p:cNvPr id="40" name="Ellipse 39">
+            <a:extLst>
+              <a:ext uri="{FF2B5EF4-FFF2-40B4-BE49-F238E27FC236}">
+                <a16:creationId xmlns:a16="http://schemas.microsoft.com/office/drawing/2014/main" id="{55DD7C48-4228-1D5C-6FBC-6DD5411ADA5F}"/>
+              </a:ext>
+            </a:extLst>
+          </p:cNvPr>
+          <p:cNvSpPr/>
+          <p:nvPr/>
+        </p:nvSpPr>
+        <p:spPr>
+          <a:xfrm flipH="1">
+            <a:off x="1229743" y="1151807"/>
+            <a:ext cx="45720" cy="45720"/>
+          </a:xfrm>
+          <a:prstGeom prst="ellipse">
+            <a:avLst/>
+          </a:prstGeom>
+          <a:solidFill>
+            <a:schemeClr val="tx1"/>
+          </a:solidFill>
+          <a:ln>
+            <a:noFill/>
+          </a:ln>
+        </p:spPr>
+        <p:style>
+          <a:lnRef idx="2">
+            <a:schemeClr val="accent1">
+              <a:shade val="15000"/>
+            </a:schemeClr>
+          </a:lnRef>
+          <a:fillRef idx="1">
+            <a:schemeClr val="accent1"/>
+          </a:fillRef>
+          <a:effectRef idx="0">
+            <a:schemeClr val="accent1"/>
+          </a:effectRef>
+          <a:fontRef idx="minor">
+            <a:schemeClr val="lt1"/>
+          </a:fontRef>
+        </p:style>
+        <p:txBody>
+          <a:bodyPr rtlCol="0" anchor="ctr"/>
+          <a:lstStyle/>
+          <a:p>
+            <a:pPr algn="ctr"/>
+            <a:endParaRPr lang="de-DE" dirty="0"/>
+          </a:p>
+        </p:txBody>
+      </p:sp>
+      <p:sp>
+        <p:nvSpPr>
+          <p:cNvPr id="41" name="Bogen 40">
+            <a:extLst>
+              <a:ext uri="{FF2B5EF4-FFF2-40B4-BE49-F238E27FC236}">
+                <a16:creationId xmlns:a16="http://schemas.microsoft.com/office/drawing/2014/main" id="{7359C294-67CF-974B-2656-507AEEBECAFB}"/>
+              </a:ext>
+            </a:extLst>
+          </p:cNvPr>
+          <p:cNvSpPr/>
+          <p:nvPr/>
+        </p:nvSpPr>
+        <p:spPr>
+          <a:xfrm>
+            <a:off x="1089725" y="1336016"/>
+            <a:ext cx="325755" cy="325755"/>
+          </a:xfrm>
+          <a:prstGeom prst="arc">
+            <a:avLst>
+              <a:gd name="adj1" fmla="val 13359495"/>
+              <a:gd name="adj2" fmla="val 17793908"/>
+            </a:avLst>
+          </a:prstGeom>
+          <a:ln w="9525" cap="rnd">
+            <a:solidFill>
+              <a:schemeClr val="accent2"/>
+            </a:solidFill>
+            <a:round/>
+            <a:headEnd type="none"/>
+            <a:tailEnd type="triangle" w="sm" len="sm"/>
+          </a:ln>
+        </p:spPr>
+        <p:style>
+          <a:lnRef idx="2">
+            <a:schemeClr val="accent1"/>
+          </a:lnRef>
+          <a:fillRef idx="0">
+            <a:schemeClr val="accent1"/>
+          </a:fillRef>
+          <a:effectRef idx="1">
+            <a:schemeClr val="accent1"/>
+          </a:effectRef>
+          <a:fontRef idx="minor">
+            <a:schemeClr val="tx1"/>
+          </a:fontRef>
+        </p:style>
+        <p:txBody>
+          <a:bodyPr rtlCol="0" anchor="ctr"/>
+          <a:lstStyle/>
+          <a:p>
+            <a:pPr algn="ctr"/>
+            <a:endParaRPr lang="de-DE"/>
+          </a:p>
+        </p:txBody>
+      </p:sp>
+      <p:sp>
+        <p:nvSpPr>
+          <p:cNvPr id="42" name="Textfeld 41">
+            <a:extLst>
+              <a:ext uri="{FF2B5EF4-FFF2-40B4-BE49-F238E27FC236}">
+                <a16:creationId xmlns:a16="http://schemas.microsoft.com/office/drawing/2014/main" id="{A372958A-A398-5308-2B88-2A1CB896E61D}"/>
+              </a:ext>
+            </a:extLst>
+          </p:cNvPr>
+          <p:cNvSpPr txBox="1"/>
+          <p:nvPr/>
+        </p:nvSpPr>
+        <p:spPr>
+          <a:xfrm rot="16200000">
+            <a:off x="992308" y="1141522"/>
+            <a:ext cx="872034" cy="261610"/>
+          </a:xfrm>
+          <a:prstGeom prst="rect">
+            <a:avLst/>
+          </a:prstGeom>
+          <a:noFill/>
+        </p:spPr>
+        <p:txBody>
+          <a:bodyPr wrap="square" rtlCol="0">
+            <a:spAutoFit/>
+          </a:bodyPr>
+          <a:lstStyle/>
+          <a:p>
+            <a:r>
+              <a:rPr lang="de-DE" sz="1100" dirty="0">
+                <a:solidFill>
+                  <a:schemeClr val="accent2"/>
+                </a:solidFill>
+                <a:latin typeface="CMU Serif" panose="02000603000000000000" pitchFamily="2" charset="0"/>
+                <a:ea typeface="CMU Serif" panose="02000603000000000000" pitchFamily="2" charset="0"/>
+                <a:cs typeface="CMU Serif" panose="02000603000000000000" pitchFamily="2" charset="0"/>
+              </a:rPr>
+              <a:t>bei </a:t>
+            </a:r>
+            <a:r>
+              <a:rPr lang="de-DE" sz="1100" i="1" dirty="0">
+                <a:solidFill>
+                  <a:schemeClr val="accent2"/>
+                </a:solidFill>
+                <a:latin typeface="CMU Serif" panose="02000603000000000000" pitchFamily="2" charset="0"/>
+                <a:ea typeface="CMU Serif" panose="02000603000000000000" pitchFamily="2" charset="0"/>
+                <a:cs typeface="CMU Serif" panose="02000603000000000000" pitchFamily="2" charset="0"/>
+              </a:rPr>
+              <a:t>t </a:t>
+            </a:r>
+            <a:r>
+              <a:rPr lang="de-DE" sz="1100" dirty="0">
+                <a:solidFill>
+                  <a:schemeClr val="accent2"/>
+                </a:solidFill>
+                <a:latin typeface="CMU Serif" panose="02000603000000000000" pitchFamily="2" charset="0"/>
+                <a:ea typeface="CMU Serif" panose="02000603000000000000" pitchFamily="2" charset="0"/>
+                <a:cs typeface="CMU Serif" panose="02000603000000000000" pitchFamily="2" charset="0"/>
+              </a:rPr>
+              <a:t>= 0</a:t>
+            </a:r>
+            <a:endParaRPr lang="de-DE" sz="1100" baseline="-25000" dirty="0">
+              <a:solidFill>
+                <a:schemeClr val="accent2"/>
+              </a:solidFill>
+              <a:latin typeface="CMU Serif" panose="02000603000000000000" pitchFamily="2" charset="0"/>
+              <a:ea typeface="CMU Serif" panose="02000603000000000000" pitchFamily="2" charset="0"/>
+              <a:cs typeface="CMU Serif" panose="02000603000000000000" pitchFamily="2" charset="0"/>
+            </a:endParaRPr>
+          </a:p>
+        </p:txBody>
+      </p:sp>
+      <p:sp>
+        <p:nvSpPr>
+          <p:cNvPr id="43" name="Textfeld 42">
+            <a:extLst>
+              <a:ext uri="{FF2B5EF4-FFF2-40B4-BE49-F238E27FC236}">
+                <a16:creationId xmlns:a16="http://schemas.microsoft.com/office/drawing/2014/main" id="{DA6A4815-A4C8-88C7-8578-7D9CD43384AA}"/>
+              </a:ext>
+            </a:extLst>
+          </p:cNvPr>
+          <p:cNvSpPr txBox="1"/>
+          <p:nvPr/>
+        </p:nvSpPr>
+        <p:spPr>
+          <a:xfrm>
+            <a:off x="1687550" y="2112917"/>
+            <a:ext cx="526326" cy="261610"/>
+          </a:xfrm>
+          <a:prstGeom prst="rect">
+            <a:avLst/>
+          </a:prstGeom>
+          <a:noFill/>
+        </p:spPr>
+        <p:txBody>
+          <a:bodyPr wrap="square" rtlCol="0">
+            <a:spAutoFit/>
+          </a:bodyPr>
+          <a:lstStyle/>
+          <a:p>
+            <a:r>
+              <a:rPr lang="de-DE" sz="1100" i="1" dirty="0" err="1">
+                <a:solidFill>
+                  <a:srgbClr val="086FBD"/>
+                </a:solidFill>
+                <a:latin typeface="CMU Serif" panose="02000603000000000000" pitchFamily="2" charset="0"/>
+                <a:ea typeface="CMU Serif" panose="02000603000000000000" pitchFamily="2" charset="0"/>
+                <a:cs typeface="CMU Serif" panose="02000603000000000000" pitchFamily="2" charset="0"/>
+              </a:rPr>
+              <a:t>u</a:t>
+            </a:r>
+            <a:r>
+              <a:rPr lang="de-DE" sz="1100" baseline="-25000" dirty="0" err="1">
+                <a:solidFill>
+                  <a:srgbClr val="086FBD"/>
+                </a:solidFill>
+                <a:latin typeface="CMU Serif" panose="02000603000000000000" pitchFamily="2" charset="0"/>
+                <a:ea typeface="CMU Serif" panose="02000603000000000000" pitchFamily="2" charset="0"/>
+                <a:cs typeface="CMU Serif" panose="02000603000000000000" pitchFamily="2" charset="0"/>
+              </a:rPr>
+              <a:t>C</a:t>
+            </a:r>
+            <a:r>
+              <a:rPr lang="de-DE" sz="1100" dirty="0">
+                <a:solidFill>
+                  <a:srgbClr val="086FBD"/>
+                </a:solidFill>
+                <a:latin typeface="CMU Serif" panose="02000603000000000000" pitchFamily="2" charset="0"/>
+                <a:ea typeface="CMU Serif" panose="02000603000000000000" pitchFamily="2" charset="0"/>
+                <a:cs typeface="CMU Serif" panose="02000603000000000000" pitchFamily="2" charset="0"/>
+              </a:rPr>
+              <a:t>(</a:t>
+            </a:r>
+            <a:r>
+              <a:rPr lang="de-DE" sz="1100" i="1" dirty="0">
+                <a:solidFill>
+                  <a:srgbClr val="086FBD"/>
+                </a:solidFill>
+                <a:latin typeface="CMU Serif" panose="02000603000000000000" pitchFamily="2" charset="0"/>
+                <a:ea typeface="CMU Serif" panose="02000603000000000000" pitchFamily="2" charset="0"/>
+                <a:cs typeface="CMU Serif" panose="02000603000000000000" pitchFamily="2" charset="0"/>
+              </a:rPr>
+              <a:t>t</a:t>
+            </a:r>
+            <a:r>
+              <a:rPr lang="de-DE" sz="1100" dirty="0">
+                <a:solidFill>
+                  <a:srgbClr val="086FBD"/>
+                </a:solidFill>
+                <a:latin typeface="CMU Serif" panose="02000603000000000000" pitchFamily="2" charset="0"/>
+                <a:ea typeface="CMU Serif" panose="02000603000000000000" pitchFamily="2" charset="0"/>
+                <a:cs typeface="CMU Serif" panose="02000603000000000000" pitchFamily="2" charset="0"/>
+              </a:rPr>
+              <a:t>)</a:t>
+            </a:r>
+          </a:p>
+        </p:txBody>
+      </p:sp>
+    </p:spTree>
+    <p:extLst>
+      <p:ext uri="{BB962C8B-B14F-4D97-AF65-F5344CB8AC3E}">
+        <p14:creationId xmlns:p14="http://schemas.microsoft.com/office/powerpoint/2010/main" val="967512345"/>
+      </p:ext>
+    </p:extLst>
+  </p:cSld>
+  <p:clrMapOvr>
+    <a:masterClrMapping/>
+  </p:clrMapOvr>
+</p:sld>
+</file>
+
+<file path=ppt/slides/slide23.xml><?xml version="1.0" encoding="utf-8"?>
+<p:sld xmlns:a="http://schemas.openxmlformats.org/drawingml/2006/main" xmlns:r="http://schemas.openxmlformats.org/officeDocument/2006/relationships" xmlns:p="http://schemas.openxmlformats.org/presentationml/2006/main">
+  <p:cSld>
+    <p:spTree>
+      <p:nvGrpSpPr>
+        <p:cNvPr id="1" name="">
+          <a:extLst>
+            <a:ext uri="{FF2B5EF4-FFF2-40B4-BE49-F238E27FC236}">
+              <a16:creationId xmlns:a16="http://schemas.microsoft.com/office/drawing/2014/main" id="{BA68EC46-E549-62F1-E01E-1A6C3718F8B0}"/>
+            </a:ext>
+          </a:extLst>
+        </p:cNvPr>
+        <p:cNvGrpSpPr/>
+        <p:nvPr/>
+      </p:nvGrpSpPr>
+      <p:grpSpPr>
+        <a:xfrm>
+          <a:off x="0" y="0"/>
+          <a:ext cx="0" cy="0"/>
+          <a:chOff x="0" y="0"/>
+          <a:chExt cx="0" cy="0"/>
+        </a:xfrm>
+      </p:grpSpPr>
+      <p:sp>
+        <p:nvSpPr>
+          <p:cNvPr id="4" name="Rechteck 3">
+            <a:extLst>
+              <a:ext uri="{FF2B5EF4-FFF2-40B4-BE49-F238E27FC236}">
+                <a16:creationId xmlns:a16="http://schemas.microsoft.com/office/drawing/2014/main" id="{36B4FBAA-E7ED-53BD-CD05-EDCB9B12DE34}"/>
+              </a:ext>
+            </a:extLst>
+          </p:cNvPr>
+          <p:cNvSpPr/>
+          <p:nvPr/>
+        </p:nvSpPr>
+        <p:spPr>
+          <a:xfrm>
+            <a:off x="1252602" y="886216"/>
+            <a:ext cx="1094135" cy="1803748"/>
+          </a:xfrm>
+          <a:prstGeom prst="rect">
+            <a:avLst/>
+          </a:prstGeom>
+          <a:noFill/>
+          <a:ln w="15875" cap="rnd">
+            <a:solidFill>
+              <a:schemeClr val="tx1"/>
+            </a:solidFill>
+            <a:round/>
+          </a:ln>
+        </p:spPr>
+        <p:style>
+          <a:lnRef idx="2">
+            <a:schemeClr val="accent1">
+              <a:shade val="15000"/>
+            </a:schemeClr>
+          </a:lnRef>
+          <a:fillRef idx="1">
+            <a:schemeClr val="accent1"/>
+          </a:fillRef>
+          <a:effectRef idx="0">
+            <a:schemeClr val="accent1"/>
+          </a:effectRef>
+          <a:fontRef idx="minor">
+            <a:schemeClr val="lt1"/>
+          </a:fontRef>
+        </p:style>
+        <p:txBody>
+          <a:bodyPr rtlCol="0" anchor="ctr"/>
+          <a:lstStyle/>
+          <a:p>
+            <a:pPr algn="ctr"/>
+            <a:endParaRPr lang="de-DE" dirty="0"/>
+          </a:p>
+        </p:txBody>
+      </p:sp>
+      <p:sp>
+        <p:nvSpPr>
+          <p:cNvPr id="10" name="Rechteck 9">
+            <a:extLst>
+              <a:ext uri="{FF2B5EF4-FFF2-40B4-BE49-F238E27FC236}">
+                <a16:creationId xmlns:a16="http://schemas.microsoft.com/office/drawing/2014/main" id="{22FA2232-6AC3-A29B-73BF-B34717A7DA09}"/>
+              </a:ext>
+            </a:extLst>
+          </p:cNvPr>
+          <p:cNvSpPr/>
+          <p:nvPr/>
+        </p:nvSpPr>
+        <p:spPr>
+          <a:xfrm rot="16200000">
+            <a:off x="2180600" y="1262538"/>
+            <a:ext cx="335280" cy="118110"/>
+          </a:xfrm>
+          <a:prstGeom prst="rect">
+            <a:avLst/>
+          </a:prstGeom>
+          <a:solidFill>
+            <a:schemeClr val="bg1"/>
+          </a:solidFill>
+          <a:ln w="15875" cap="rnd">
+            <a:solidFill>
+              <a:schemeClr val="tx1"/>
+            </a:solidFill>
+            <a:round/>
+          </a:ln>
+        </p:spPr>
+        <p:style>
+          <a:lnRef idx="2">
+            <a:schemeClr val="accent1">
+              <a:shade val="15000"/>
+            </a:schemeClr>
+          </a:lnRef>
+          <a:fillRef idx="1">
+            <a:schemeClr val="accent1"/>
+          </a:fillRef>
+          <a:effectRef idx="0">
+            <a:schemeClr val="accent1"/>
+          </a:effectRef>
+          <a:fontRef idx="minor">
+            <a:schemeClr val="lt1"/>
+          </a:fontRef>
+        </p:style>
+        <p:txBody>
+          <a:bodyPr rtlCol="0" anchor="ctr"/>
+          <a:lstStyle/>
+          <a:p>
+            <a:pPr algn="ctr"/>
+            <a:endParaRPr lang="de-DE" dirty="0"/>
+          </a:p>
+        </p:txBody>
+      </p:sp>
+      <p:sp>
+        <p:nvSpPr>
+          <p:cNvPr id="11" name="Rechteck 10">
+            <a:extLst>
+              <a:ext uri="{FF2B5EF4-FFF2-40B4-BE49-F238E27FC236}">
+                <a16:creationId xmlns:a16="http://schemas.microsoft.com/office/drawing/2014/main" id="{399866BC-F5EE-D779-6F11-AAD519100FC0}"/>
+              </a:ext>
+            </a:extLst>
+          </p:cNvPr>
+          <p:cNvSpPr/>
+          <p:nvPr/>
+        </p:nvSpPr>
+        <p:spPr>
+          <a:xfrm rot="16200000" flipH="1">
+            <a:off x="2315749" y="2128772"/>
+            <a:ext cx="64982" cy="229902"/>
+          </a:xfrm>
+          <a:prstGeom prst="rect">
+            <a:avLst/>
+          </a:prstGeom>
+          <a:solidFill>
+            <a:schemeClr val="bg1"/>
+          </a:solidFill>
+          <a:ln w="15875" cap="rnd">
+            <a:noFill/>
+            <a:round/>
+          </a:ln>
+        </p:spPr>
+        <p:style>
+          <a:lnRef idx="2">
+            <a:schemeClr val="accent1">
+              <a:shade val="15000"/>
+            </a:schemeClr>
+          </a:lnRef>
+          <a:fillRef idx="1">
+            <a:schemeClr val="accent1"/>
+          </a:fillRef>
+          <a:effectRef idx="0">
+            <a:schemeClr val="accent1"/>
+          </a:effectRef>
+          <a:fontRef idx="minor">
+            <a:schemeClr val="lt1"/>
+          </a:fontRef>
+        </p:style>
+        <p:txBody>
+          <a:bodyPr rtlCol="0" anchor="ctr"/>
+          <a:lstStyle/>
+          <a:p>
+            <a:pPr algn="ctr"/>
+            <a:endParaRPr lang="de-DE" dirty="0"/>
+          </a:p>
+        </p:txBody>
+      </p:sp>
+      <p:cxnSp>
+        <p:nvCxnSpPr>
+          <p:cNvPr id="16" name="Gerade Verbindung mit Pfeil 15">
+            <a:extLst>
+              <a:ext uri="{FF2B5EF4-FFF2-40B4-BE49-F238E27FC236}">
+                <a16:creationId xmlns:a16="http://schemas.microsoft.com/office/drawing/2014/main" id="{154C551A-15C2-8219-52A3-618555E8F9EE}"/>
+              </a:ext>
+            </a:extLst>
+          </p:cNvPr>
+          <p:cNvCxnSpPr>
+            <a:cxnSpLocks/>
+          </p:cNvCxnSpPr>
+          <p:nvPr/>
+        </p:nvCxnSpPr>
+        <p:spPr>
+          <a:xfrm>
+            <a:off x="1720730" y="886454"/>
+            <a:ext cx="167999" cy="0"/>
+          </a:xfrm>
+          <a:prstGeom prst="straightConnector1">
+            <a:avLst/>
+          </a:prstGeom>
+          <a:ln cap="rnd">
+            <a:solidFill>
+              <a:srgbClr val="FF0000"/>
+            </a:solidFill>
+            <a:round/>
+            <a:headEnd type="triangle"/>
+            <a:tailEnd type="none"/>
+          </a:ln>
+        </p:spPr>
+        <p:style>
+          <a:lnRef idx="2">
+            <a:schemeClr val="accent1"/>
+          </a:lnRef>
+          <a:fillRef idx="0">
+            <a:schemeClr val="accent1"/>
+          </a:fillRef>
+          <a:effectRef idx="1">
+            <a:schemeClr val="accent1"/>
+          </a:effectRef>
+          <a:fontRef idx="minor">
+            <a:schemeClr val="tx1"/>
+          </a:fontRef>
+        </p:style>
+      </p:cxnSp>
+      <p:sp>
+        <p:nvSpPr>
+          <p:cNvPr id="17" name="Textfeld 16">
+            <a:extLst>
+              <a:ext uri="{FF2B5EF4-FFF2-40B4-BE49-F238E27FC236}">
+                <a16:creationId xmlns:a16="http://schemas.microsoft.com/office/drawing/2014/main" id="{3E415C9F-46E7-5EF4-3797-FA7C5266221B}"/>
+              </a:ext>
+            </a:extLst>
+          </p:cNvPr>
+          <p:cNvSpPr txBox="1"/>
+          <p:nvPr/>
+        </p:nvSpPr>
+        <p:spPr>
+          <a:xfrm>
+            <a:off x="1609825" y="914738"/>
+            <a:ext cx="414807" cy="261610"/>
+          </a:xfrm>
+          <a:prstGeom prst="rect">
+            <a:avLst/>
+          </a:prstGeom>
+          <a:noFill/>
+        </p:spPr>
+        <p:txBody>
+          <a:bodyPr wrap="square" rtlCol="0">
+            <a:spAutoFit/>
+          </a:bodyPr>
+          <a:lstStyle/>
+          <a:p>
+            <a:r>
+              <a:rPr lang="de-DE" sz="1100" i="1" dirty="0">
+                <a:solidFill>
+                  <a:srgbClr val="FF0000"/>
+                </a:solidFill>
+                <a:latin typeface="CMU Serif" panose="02000603000000000000" pitchFamily="2" charset="0"/>
+                <a:ea typeface="CMU Serif" panose="02000603000000000000" pitchFamily="2" charset="0"/>
+                <a:cs typeface="CMU Serif" panose="02000603000000000000" pitchFamily="2" charset="0"/>
+              </a:rPr>
+              <a:t>i</a:t>
+            </a:r>
+            <a:r>
+              <a:rPr lang="de-DE" sz="1100" dirty="0">
+                <a:solidFill>
+                  <a:srgbClr val="FF0000"/>
+                </a:solidFill>
+                <a:latin typeface="CMU Serif" panose="02000603000000000000" pitchFamily="2" charset="0"/>
+                <a:ea typeface="CMU Serif" panose="02000603000000000000" pitchFamily="2" charset="0"/>
+                <a:cs typeface="CMU Serif" panose="02000603000000000000" pitchFamily="2" charset="0"/>
+              </a:rPr>
+              <a:t>(</a:t>
+            </a:r>
+            <a:r>
+              <a:rPr lang="de-DE" sz="1100" i="1" dirty="0">
+                <a:solidFill>
+                  <a:srgbClr val="FF0000"/>
+                </a:solidFill>
+                <a:latin typeface="CMU Serif" panose="02000603000000000000" pitchFamily="2" charset="0"/>
+                <a:ea typeface="CMU Serif" panose="02000603000000000000" pitchFamily="2" charset="0"/>
+                <a:cs typeface="CMU Serif" panose="02000603000000000000" pitchFamily="2" charset="0"/>
+              </a:rPr>
+              <a:t>t</a:t>
+            </a:r>
+            <a:r>
+              <a:rPr lang="de-DE" sz="1100" dirty="0">
+                <a:solidFill>
+                  <a:srgbClr val="FF0000"/>
+                </a:solidFill>
+                <a:latin typeface="CMU Serif" panose="02000603000000000000" pitchFamily="2" charset="0"/>
+                <a:ea typeface="CMU Serif" panose="02000603000000000000" pitchFamily="2" charset="0"/>
+                <a:cs typeface="CMU Serif" panose="02000603000000000000" pitchFamily="2" charset="0"/>
+              </a:rPr>
+              <a:t>)</a:t>
+            </a:r>
+            <a:endParaRPr lang="de-DE" sz="1100" baseline="-25000" dirty="0">
+              <a:solidFill>
+                <a:srgbClr val="FF0000"/>
+              </a:solidFill>
+              <a:latin typeface="CMU Serif" panose="02000603000000000000" pitchFamily="2" charset="0"/>
+              <a:ea typeface="CMU Serif" panose="02000603000000000000" pitchFamily="2" charset="0"/>
+              <a:cs typeface="CMU Serif" panose="02000603000000000000" pitchFamily="2" charset="0"/>
+            </a:endParaRPr>
+          </a:p>
+        </p:txBody>
+      </p:sp>
+      <p:sp>
+        <p:nvSpPr>
+          <p:cNvPr id="20" name="Textfeld 19">
+            <a:extLst>
+              <a:ext uri="{FF2B5EF4-FFF2-40B4-BE49-F238E27FC236}">
+                <a16:creationId xmlns:a16="http://schemas.microsoft.com/office/drawing/2014/main" id="{D76D1723-99B5-1849-B8A9-482E0349C6BF}"/>
+              </a:ext>
+            </a:extLst>
+          </p:cNvPr>
+          <p:cNvSpPr txBox="1"/>
+          <p:nvPr/>
+        </p:nvSpPr>
+        <p:spPr>
+          <a:xfrm>
+            <a:off x="2348239" y="1199555"/>
+            <a:ext cx="341666" cy="261610"/>
+          </a:xfrm>
+          <a:prstGeom prst="rect">
+            <a:avLst/>
+          </a:prstGeom>
+          <a:noFill/>
+        </p:spPr>
+        <p:txBody>
+          <a:bodyPr wrap="square" rtlCol="0">
+            <a:spAutoFit/>
+          </a:bodyPr>
+          <a:lstStyle/>
+          <a:p>
+            <a:pPr algn="ctr"/>
+            <a:r>
+              <a:rPr lang="de-DE" sz="1100" i="1" dirty="0">
+                <a:latin typeface="CMU Serif" panose="02000603000000000000" pitchFamily="2" charset="0"/>
+                <a:ea typeface="CMU Serif" panose="02000603000000000000" pitchFamily="2" charset="0"/>
+                <a:cs typeface="CMU Serif" panose="02000603000000000000" pitchFamily="2" charset="0"/>
+              </a:rPr>
+              <a:t>R</a:t>
+            </a:r>
+            <a:endParaRPr lang="de-DE" sz="1100" baseline="-25000" dirty="0">
+              <a:latin typeface="CMU Serif" panose="02000603000000000000" pitchFamily="2" charset="0"/>
+              <a:ea typeface="CMU Serif" panose="02000603000000000000" pitchFamily="2" charset="0"/>
+              <a:cs typeface="CMU Serif" panose="02000603000000000000" pitchFamily="2" charset="0"/>
+            </a:endParaRPr>
+          </a:p>
+        </p:txBody>
+      </p:sp>
+      <p:sp>
+        <p:nvSpPr>
+          <p:cNvPr id="26" name="Textfeld 25">
+            <a:extLst>
+              <a:ext uri="{FF2B5EF4-FFF2-40B4-BE49-F238E27FC236}">
+                <a16:creationId xmlns:a16="http://schemas.microsoft.com/office/drawing/2014/main" id="{7774AA57-AE8B-5C8A-4F5C-46EC53CFA147}"/>
+              </a:ext>
+            </a:extLst>
+          </p:cNvPr>
+          <p:cNvSpPr txBox="1"/>
+          <p:nvPr/>
+        </p:nvSpPr>
+        <p:spPr>
+          <a:xfrm>
+            <a:off x="2409512" y="2123673"/>
+            <a:ext cx="341666" cy="261610"/>
+          </a:xfrm>
+          <a:prstGeom prst="rect">
+            <a:avLst/>
+          </a:prstGeom>
+          <a:noFill/>
+        </p:spPr>
+        <p:txBody>
+          <a:bodyPr wrap="square" rtlCol="0">
+            <a:spAutoFit/>
+          </a:bodyPr>
+          <a:lstStyle/>
+          <a:p>
+            <a:pPr algn="ctr"/>
+            <a:r>
+              <a:rPr lang="de-DE" sz="1100" i="1" dirty="0">
+                <a:latin typeface="CMU Serif" panose="02000603000000000000" pitchFamily="2" charset="0"/>
+                <a:ea typeface="CMU Serif" panose="02000603000000000000" pitchFamily="2" charset="0"/>
+                <a:cs typeface="CMU Serif" panose="02000603000000000000" pitchFamily="2" charset="0"/>
+              </a:rPr>
+              <a:t>C</a:t>
+            </a:r>
+            <a:endParaRPr lang="de-DE" sz="1100" baseline="-25000" dirty="0">
+              <a:latin typeface="CMU Serif" panose="02000603000000000000" pitchFamily="2" charset="0"/>
+              <a:ea typeface="CMU Serif" panose="02000603000000000000" pitchFamily="2" charset="0"/>
+              <a:cs typeface="CMU Serif" panose="02000603000000000000" pitchFamily="2" charset="0"/>
+            </a:endParaRPr>
+          </a:p>
+        </p:txBody>
+      </p:sp>
+      <p:cxnSp>
+        <p:nvCxnSpPr>
+          <p:cNvPr id="2" name="Gerade Verbindung mit Pfeil 1">
+            <a:extLst>
+              <a:ext uri="{FF2B5EF4-FFF2-40B4-BE49-F238E27FC236}">
+                <a16:creationId xmlns:a16="http://schemas.microsoft.com/office/drawing/2014/main" id="{EEF27B67-D92C-5B99-8D45-16AC336CC7E7}"/>
+              </a:ext>
+            </a:extLst>
+          </p:cNvPr>
+          <p:cNvCxnSpPr>
+            <a:cxnSpLocks/>
+          </p:cNvCxnSpPr>
+          <p:nvPr/>
+        </p:nvCxnSpPr>
+        <p:spPr>
+          <a:xfrm>
+            <a:off x="2233289" y="2211232"/>
+            <a:ext cx="236026" cy="0"/>
+          </a:xfrm>
+          <a:prstGeom prst="straightConnector1">
+            <a:avLst/>
+          </a:prstGeom>
+          <a:ln w="15875" cap="rnd">
+            <a:solidFill>
+              <a:schemeClr val="tx1"/>
+            </a:solidFill>
+            <a:round/>
+            <a:tailEnd type="none" w="med" len="med"/>
+          </a:ln>
+        </p:spPr>
+        <p:style>
+          <a:lnRef idx="2">
+            <a:schemeClr val="accent1"/>
+          </a:lnRef>
+          <a:fillRef idx="0">
+            <a:schemeClr val="accent1"/>
+          </a:fillRef>
+          <a:effectRef idx="1">
+            <a:schemeClr val="accent1"/>
+          </a:effectRef>
+          <a:fontRef idx="minor">
+            <a:schemeClr val="tx1"/>
+          </a:fontRef>
+        </p:style>
+      </p:cxnSp>
+      <p:cxnSp>
+        <p:nvCxnSpPr>
+          <p:cNvPr id="25" name="Gerade Verbindung mit Pfeil 24">
+            <a:extLst>
+              <a:ext uri="{FF2B5EF4-FFF2-40B4-BE49-F238E27FC236}">
+                <a16:creationId xmlns:a16="http://schemas.microsoft.com/office/drawing/2014/main" id="{C1F3179C-60F4-79C6-6FFD-1EC10627E5FA}"/>
+              </a:ext>
+            </a:extLst>
+          </p:cNvPr>
+          <p:cNvCxnSpPr>
+            <a:cxnSpLocks/>
+          </p:cNvCxnSpPr>
+          <p:nvPr/>
+        </p:nvCxnSpPr>
+        <p:spPr>
+          <a:xfrm>
+            <a:off x="2233289" y="2276214"/>
+            <a:ext cx="236026" cy="0"/>
+          </a:xfrm>
+          <a:prstGeom prst="straightConnector1">
+            <a:avLst/>
+          </a:prstGeom>
+          <a:ln w="15875" cap="rnd">
+            <a:solidFill>
+              <a:schemeClr val="tx1"/>
+            </a:solidFill>
+            <a:round/>
+            <a:tailEnd type="none" w="med" len="med"/>
+          </a:ln>
+        </p:spPr>
+        <p:style>
+          <a:lnRef idx="2">
+            <a:schemeClr val="accent1"/>
+          </a:lnRef>
+          <a:fillRef idx="0">
+            <a:schemeClr val="accent1"/>
+          </a:fillRef>
+          <a:effectRef idx="1">
+            <a:schemeClr val="accent1"/>
+          </a:effectRef>
+          <a:fontRef idx="minor">
+            <a:schemeClr val="tx1"/>
+          </a:fontRef>
+        </p:style>
+      </p:cxnSp>
+      <p:cxnSp>
+        <p:nvCxnSpPr>
+          <p:cNvPr id="30" name="Gerade Verbindung mit Pfeil 29">
+            <a:extLst>
+              <a:ext uri="{FF2B5EF4-FFF2-40B4-BE49-F238E27FC236}">
+                <a16:creationId xmlns:a16="http://schemas.microsoft.com/office/drawing/2014/main" id="{CF1392F2-E070-93D2-B398-BBDD53FD14B3}"/>
+              </a:ext>
+            </a:extLst>
+          </p:cNvPr>
+          <p:cNvCxnSpPr>
+            <a:cxnSpLocks/>
+          </p:cNvCxnSpPr>
+          <p:nvPr/>
+        </p:nvCxnSpPr>
+        <p:spPr>
+          <a:xfrm>
+            <a:off x="2160764" y="2028760"/>
+            <a:ext cx="0" cy="451437"/>
+          </a:xfrm>
+          <a:prstGeom prst="straightConnector1">
+            <a:avLst/>
+          </a:prstGeom>
+          <a:ln cap="rnd">
+            <a:solidFill>
+              <a:srgbClr val="086FBD"/>
+            </a:solidFill>
+            <a:round/>
+            <a:tailEnd type="triangle"/>
+          </a:ln>
+        </p:spPr>
+        <p:style>
+          <a:lnRef idx="2">
+            <a:schemeClr val="accent1"/>
+          </a:lnRef>
+          <a:fillRef idx="0">
+            <a:schemeClr val="accent1"/>
+          </a:fillRef>
+          <a:effectRef idx="1">
+            <a:schemeClr val="accent1"/>
+          </a:effectRef>
+          <a:fontRef idx="minor">
+            <a:schemeClr val="tx1"/>
+          </a:fontRef>
+        </p:style>
+      </p:cxnSp>
+      <p:cxnSp>
+        <p:nvCxnSpPr>
+          <p:cNvPr id="33" name="Gerade Verbindung mit Pfeil 32">
+            <a:extLst>
+              <a:ext uri="{FF2B5EF4-FFF2-40B4-BE49-F238E27FC236}">
+                <a16:creationId xmlns:a16="http://schemas.microsoft.com/office/drawing/2014/main" id="{3219B351-F736-C2FE-26B6-46E4C17792A7}"/>
+              </a:ext>
+            </a:extLst>
+          </p:cNvPr>
+          <p:cNvCxnSpPr>
+            <a:cxnSpLocks/>
+          </p:cNvCxnSpPr>
+          <p:nvPr/>
+        </p:nvCxnSpPr>
+        <p:spPr>
+          <a:xfrm>
+            <a:off x="2160764" y="1130719"/>
+            <a:ext cx="0" cy="451437"/>
+          </a:xfrm>
+          <a:prstGeom prst="straightConnector1">
+            <a:avLst/>
+          </a:prstGeom>
+          <a:ln cap="rnd">
+            <a:solidFill>
+              <a:srgbClr val="086FBD"/>
+            </a:solidFill>
+            <a:round/>
+            <a:tailEnd type="triangle"/>
+          </a:ln>
+        </p:spPr>
+        <p:style>
+          <a:lnRef idx="2">
+            <a:schemeClr val="accent1"/>
+          </a:lnRef>
+          <a:fillRef idx="0">
+            <a:schemeClr val="accent1"/>
+          </a:fillRef>
+          <a:effectRef idx="1">
+            <a:schemeClr val="accent1"/>
+          </a:effectRef>
+          <a:fontRef idx="minor">
+            <a:schemeClr val="tx1"/>
+          </a:fontRef>
+        </p:style>
+      </p:cxnSp>
+      <p:sp>
+        <p:nvSpPr>
+          <p:cNvPr id="34" name="Textfeld 33">
+            <a:extLst>
+              <a:ext uri="{FF2B5EF4-FFF2-40B4-BE49-F238E27FC236}">
+                <a16:creationId xmlns:a16="http://schemas.microsoft.com/office/drawing/2014/main" id="{BA7F7DA6-39D2-03C7-377D-56647E6F2C1C}"/>
+              </a:ext>
+            </a:extLst>
+          </p:cNvPr>
+          <p:cNvSpPr txBox="1"/>
+          <p:nvPr/>
+        </p:nvSpPr>
+        <p:spPr>
+          <a:xfrm>
+            <a:off x="1687550" y="1204631"/>
+            <a:ext cx="526326" cy="261610"/>
+          </a:xfrm>
+          <a:prstGeom prst="rect">
+            <a:avLst/>
+          </a:prstGeom>
+          <a:noFill/>
+        </p:spPr>
+        <p:txBody>
+          <a:bodyPr wrap="square" rtlCol="0">
+            <a:spAutoFit/>
+          </a:bodyPr>
+          <a:lstStyle/>
+          <a:p>
+            <a:r>
+              <a:rPr lang="de-DE" sz="1100" i="1" dirty="0" err="1">
+                <a:solidFill>
+                  <a:srgbClr val="086FBD"/>
+                </a:solidFill>
+                <a:latin typeface="CMU Serif" panose="02000603000000000000" pitchFamily="2" charset="0"/>
+                <a:ea typeface="CMU Serif" panose="02000603000000000000" pitchFamily="2" charset="0"/>
+                <a:cs typeface="CMU Serif" panose="02000603000000000000" pitchFamily="2" charset="0"/>
+              </a:rPr>
+              <a:t>u</a:t>
+            </a:r>
+            <a:r>
+              <a:rPr lang="de-DE" sz="1100" baseline="-25000" dirty="0" err="1">
+                <a:solidFill>
+                  <a:srgbClr val="086FBD"/>
+                </a:solidFill>
+                <a:latin typeface="CMU Serif" panose="02000603000000000000" pitchFamily="2" charset="0"/>
+                <a:ea typeface="CMU Serif" panose="02000603000000000000" pitchFamily="2" charset="0"/>
+                <a:cs typeface="CMU Serif" panose="02000603000000000000" pitchFamily="2" charset="0"/>
+              </a:rPr>
+              <a:t>R</a:t>
+            </a:r>
+            <a:r>
+              <a:rPr lang="de-DE" sz="1100" dirty="0">
+                <a:solidFill>
+                  <a:srgbClr val="086FBD"/>
+                </a:solidFill>
+                <a:latin typeface="CMU Serif" panose="02000603000000000000" pitchFamily="2" charset="0"/>
+                <a:ea typeface="CMU Serif" panose="02000603000000000000" pitchFamily="2" charset="0"/>
+                <a:cs typeface="CMU Serif" panose="02000603000000000000" pitchFamily="2" charset="0"/>
+              </a:rPr>
+              <a:t>(</a:t>
+            </a:r>
+            <a:r>
+              <a:rPr lang="de-DE" sz="1100" i="1" dirty="0">
+                <a:solidFill>
+                  <a:srgbClr val="086FBD"/>
+                </a:solidFill>
+                <a:latin typeface="CMU Serif" panose="02000603000000000000" pitchFamily="2" charset="0"/>
+                <a:ea typeface="CMU Serif" panose="02000603000000000000" pitchFamily="2" charset="0"/>
+                <a:cs typeface="CMU Serif" panose="02000603000000000000" pitchFamily="2" charset="0"/>
+              </a:rPr>
+              <a:t>t</a:t>
+            </a:r>
+            <a:r>
+              <a:rPr lang="de-DE" sz="1100" dirty="0">
+                <a:solidFill>
+                  <a:srgbClr val="086FBD"/>
+                </a:solidFill>
+                <a:latin typeface="CMU Serif" panose="02000603000000000000" pitchFamily="2" charset="0"/>
+                <a:ea typeface="CMU Serif" panose="02000603000000000000" pitchFamily="2" charset="0"/>
+                <a:cs typeface="CMU Serif" panose="02000603000000000000" pitchFamily="2" charset="0"/>
+              </a:rPr>
+              <a:t>)</a:t>
+            </a:r>
+          </a:p>
+        </p:txBody>
+      </p:sp>
+      <p:sp>
+        <p:nvSpPr>
+          <p:cNvPr id="35" name="Rechteck 34">
+            <a:extLst>
+              <a:ext uri="{FF2B5EF4-FFF2-40B4-BE49-F238E27FC236}">
+                <a16:creationId xmlns:a16="http://schemas.microsoft.com/office/drawing/2014/main" id="{3F8CEDEF-B602-B968-8BCB-A15A046CBC36}"/>
+              </a:ext>
+            </a:extLst>
+          </p:cNvPr>
+          <p:cNvSpPr/>
+          <p:nvPr/>
+        </p:nvSpPr>
+        <p:spPr>
+          <a:xfrm rot="16200000" flipH="1">
+            <a:off x="1093728" y="1262646"/>
+            <a:ext cx="317750" cy="135424"/>
+          </a:xfrm>
+          <a:prstGeom prst="rect">
+            <a:avLst/>
+          </a:prstGeom>
+          <a:solidFill>
+            <a:schemeClr val="bg1"/>
+          </a:solidFill>
+          <a:ln w="15875" cap="rnd">
+            <a:noFill/>
+            <a:round/>
+          </a:ln>
+        </p:spPr>
+        <p:style>
+          <a:lnRef idx="2">
+            <a:schemeClr val="accent1">
+              <a:shade val="15000"/>
+            </a:schemeClr>
+          </a:lnRef>
+          <a:fillRef idx="1">
+            <a:schemeClr val="accent1"/>
+          </a:fillRef>
+          <a:effectRef idx="0">
+            <a:schemeClr val="accent1"/>
+          </a:effectRef>
+          <a:fontRef idx="minor">
+            <a:schemeClr val="lt1"/>
+          </a:fontRef>
+        </p:style>
+        <p:txBody>
+          <a:bodyPr rtlCol="0" anchor="ctr"/>
+          <a:lstStyle/>
+          <a:p>
+            <a:pPr algn="ctr"/>
+            <a:endParaRPr lang="de-DE" dirty="0"/>
+          </a:p>
+        </p:txBody>
+      </p:sp>
+      <p:sp>
+        <p:nvSpPr>
+          <p:cNvPr id="36" name="Ellipse 35">
+            <a:extLst>
+              <a:ext uri="{FF2B5EF4-FFF2-40B4-BE49-F238E27FC236}">
+                <a16:creationId xmlns:a16="http://schemas.microsoft.com/office/drawing/2014/main" id="{BC6C92FA-462A-3811-AC44-F2B70097D345}"/>
+              </a:ext>
+            </a:extLst>
+          </p:cNvPr>
+          <p:cNvSpPr/>
+          <p:nvPr/>
+        </p:nvSpPr>
+        <p:spPr>
+          <a:xfrm flipH="1">
+            <a:off x="1229743" y="1461165"/>
+            <a:ext cx="45720" cy="45720"/>
+          </a:xfrm>
+          <a:prstGeom prst="ellipse">
+            <a:avLst/>
+          </a:prstGeom>
+          <a:solidFill>
+            <a:schemeClr val="tx1"/>
+          </a:solidFill>
+          <a:ln>
+            <a:noFill/>
+          </a:ln>
+        </p:spPr>
+        <p:style>
+          <a:lnRef idx="2">
+            <a:schemeClr val="accent1">
+              <a:shade val="15000"/>
+            </a:schemeClr>
+          </a:lnRef>
+          <a:fillRef idx="1">
+            <a:schemeClr val="accent1"/>
+          </a:fillRef>
+          <a:effectRef idx="0">
+            <a:schemeClr val="accent1"/>
+          </a:effectRef>
+          <a:fontRef idx="minor">
+            <a:schemeClr val="lt1"/>
+          </a:fontRef>
+        </p:style>
+        <p:txBody>
+          <a:bodyPr rtlCol="0" anchor="ctr"/>
+          <a:lstStyle/>
+          <a:p>
+            <a:pPr algn="ctr"/>
+            <a:endParaRPr lang="de-DE" dirty="0"/>
+          </a:p>
+        </p:txBody>
+      </p:sp>
+      <p:cxnSp>
+        <p:nvCxnSpPr>
+          <p:cNvPr id="37" name="Gerade Verbindung mit Pfeil 36">
+            <a:extLst>
+              <a:ext uri="{FF2B5EF4-FFF2-40B4-BE49-F238E27FC236}">
+                <a16:creationId xmlns:a16="http://schemas.microsoft.com/office/drawing/2014/main" id="{6AEABC36-89FB-70B1-FF99-A3BEB596926F}"/>
+              </a:ext>
+            </a:extLst>
+          </p:cNvPr>
+          <p:cNvCxnSpPr>
+            <a:cxnSpLocks/>
+          </p:cNvCxnSpPr>
+          <p:nvPr/>
+        </p:nvCxnSpPr>
+        <p:spPr>
+          <a:xfrm>
+            <a:off x="1129691" y="1211319"/>
+            <a:ext cx="123825" cy="270510"/>
+          </a:xfrm>
+          <a:prstGeom prst="straightConnector1">
+            <a:avLst/>
+          </a:prstGeom>
+          <a:ln w="15875" cap="rnd">
+            <a:solidFill>
+              <a:schemeClr val="tx1"/>
+            </a:solidFill>
+            <a:round/>
+            <a:tailEnd type="none" w="med" len="med"/>
+          </a:ln>
+        </p:spPr>
+        <p:style>
+          <a:lnRef idx="2">
+            <a:schemeClr val="accent1"/>
+          </a:lnRef>
+          <a:fillRef idx="0">
+            <a:schemeClr val="accent1"/>
+          </a:fillRef>
+          <a:effectRef idx="1">
+            <a:schemeClr val="accent1"/>
+          </a:effectRef>
+          <a:fontRef idx="minor">
+            <a:schemeClr val="tx1"/>
+          </a:fontRef>
+        </p:style>
+      </p:cxnSp>
+      <p:sp>
+        <p:nvSpPr>
+          <p:cNvPr id="40" name="Ellipse 39">
+            <a:extLst>
+              <a:ext uri="{FF2B5EF4-FFF2-40B4-BE49-F238E27FC236}">
+                <a16:creationId xmlns:a16="http://schemas.microsoft.com/office/drawing/2014/main" id="{3526EA1B-2D58-9164-6B01-00D126747FF2}"/>
+              </a:ext>
+            </a:extLst>
+          </p:cNvPr>
+          <p:cNvSpPr/>
+          <p:nvPr/>
+        </p:nvSpPr>
+        <p:spPr>
+          <a:xfrm flipH="1">
+            <a:off x="1229743" y="1151807"/>
+            <a:ext cx="45720" cy="45720"/>
+          </a:xfrm>
+          <a:prstGeom prst="ellipse">
+            <a:avLst/>
+          </a:prstGeom>
+          <a:solidFill>
+            <a:schemeClr val="tx1"/>
+          </a:solidFill>
+          <a:ln>
+            <a:noFill/>
+          </a:ln>
+        </p:spPr>
+        <p:style>
+          <a:lnRef idx="2">
+            <a:schemeClr val="accent1">
+              <a:shade val="15000"/>
+            </a:schemeClr>
+          </a:lnRef>
+          <a:fillRef idx="1">
+            <a:schemeClr val="accent1"/>
+          </a:fillRef>
+          <a:effectRef idx="0">
+            <a:schemeClr val="accent1"/>
+          </a:effectRef>
+          <a:fontRef idx="minor">
+            <a:schemeClr val="lt1"/>
+          </a:fontRef>
+        </p:style>
+        <p:txBody>
+          <a:bodyPr rtlCol="0" anchor="ctr"/>
+          <a:lstStyle/>
+          <a:p>
+            <a:pPr algn="ctr"/>
+            <a:endParaRPr lang="de-DE" dirty="0"/>
+          </a:p>
+        </p:txBody>
+      </p:sp>
+      <p:sp>
+        <p:nvSpPr>
+          <p:cNvPr id="41" name="Bogen 40">
+            <a:extLst>
+              <a:ext uri="{FF2B5EF4-FFF2-40B4-BE49-F238E27FC236}">
+                <a16:creationId xmlns:a16="http://schemas.microsoft.com/office/drawing/2014/main" id="{51CEE164-100D-266E-8656-F62791344E43}"/>
+              </a:ext>
+            </a:extLst>
+          </p:cNvPr>
+          <p:cNvSpPr/>
+          <p:nvPr/>
+        </p:nvSpPr>
+        <p:spPr>
+          <a:xfrm>
+            <a:off x="1089725" y="1336016"/>
+            <a:ext cx="325755" cy="325755"/>
+          </a:xfrm>
+          <a:prstGeom prst="arc">
+            <a:avLst>
+              <a:gd name="adj1" fmla="val 13359495"/>
+              <a:gd name="adj2" fmla="val 17793908"/>
+            </a:avLst>
+          </a:prstGeom>
+          <a:ln w="9525" cap="rnd">
+            <a:solidFill>
+              <a:schemeClr val="accent2"/>
+            </a:solidFill>
+            <a:round/>
+            <a:headEnd type="none"/>
+            <a:tailEnd type="triangle" w="sm" len="sm"/>
+          </a:ln>
+        </p:spPr>
+        <p:style>
+          <a:lnRef idx="2">
+            <a:schemeClr val="accent1"/>
+          </a:lnRef>
+          <a:fillRef idx="0">
+            <a:schemeClr val="accent1"/>
+          </a:fillRef>
+          <a:effectRef idx="1">
+            <a:schemeClr val="accent1"/>
+          </a:effectRef>
+          <a:fontRef idx="minor">
+            <a:schemeClr val="tx1"/>
+          </a:fontRef>
+        </p:style>
+        <p:txBody>
+          <a:bodyPr rtlCol="0" anchor="ctr"/>
+          <a:lstStyle/>
+          <a:p>
+            <a:pPr algn="ctr"/>
+            <a:endParaRPr lang="de-DE"/>
+          </a:p>
+        </p:txBody>
+      </p:sp>
+      <p:sp>
+        <p:nvSpPr>
+          <p:cNvPr id="42" name="Textfeld 41">
+            <a:extLst>
+              <a:ext uri="{FF2B5EF4-FFF2-40B4-BE49-F238E27FC236}">
+                <a16:creationId xmlns:a16="http://schemas.microsoft.com/office/drawing/2014/main" id="{B7A5CDD4-2032-1014-25D4-8E8BFCB602CE}"/>
+              </a:ext>
+            </a:extLst>
+          </p:cNvPr>
+          <p:cNvSpPr txBox="1"/>
+          <p:nvPr/>
+        </p:nvSpPr>
+        <p:spPr>
+          <a:xfrm rot="16200000">
+            <a:off x="992308" y="1141522"/>
+            <a:ext cx="872034" cy="261610"/>
+          </a:xfrm>
+          <a:prstGeom prst="rect">
+            <a:avLst/>
+          </a:prstGeom>
+          <a:noFill/>
+        </p:spPr>
+        <p:txBody>
+          <a:bodyPr wrap="square" rtlCol="0">
+            <a:spAutoFit/>
+          </a:bodyPr>
+          <a:lstStyle/>
+          <a:p>
+            <a:r>
+              <a:rPr lang="de-DE" sz="1100" dirty="0">
+                <a:solidFill>
+                  <a:schemeClr val="accent2"/>
+                </a:solidFill>
+                <a:latin typeface="CMU Serif" panose="02000603000000000000" pitchFamily="2" charset="0"/>
+                <a:ea typeface="CMU Serif" panose="02000603000000000000" pitchFamily="2" charset="0"/>
+                <a:cs typeface="CMU Serif" panose="02000603000000000000" pitchFamily="2" charset="0"/>
+              </a:rPr>
+              <a:t>bei </a:t>
+            </a:r>
+            <a:r>
+              <a:rPr lang="de-DE" sz="1100" i="1" dirty="0">
+                <a:solidFill>
+                  <a:schemeClr val="accent2"/>
+                </a:solidFill>
+                <a:latin typeface="CMU Serif" panose="02000603000000000000" pitchFamily="2" charset="0"/>
+                <a:ea typeface="CMU Serif" panose="02000603000000000000" pitchFamily="2" charset="0"/>
+                <a:cs typeface="CMU Serif" panose="02000603000000000000" pitchFamily="2" charset="0"/>
+              </a:rPr>
+              <a:t>t </a:t>
+            </a:r>
+            <a:r>
+              <a:rPr lang="de-DE" sz="1100" dirty="0">
+                <a:solidFill>
+                  <a:schemeClr val="accent2"/>
+                </a:solidFill>
+                <a:latin typeface="CMU Serif" panose="02000603000000000000" pitchFamily="2" charset="0"/>
+                <a:ea typeface="CMU Serif" panose="02000603000000000000" pitchFamily="2" charset="0"/>
+                <a:cs typeface="CMU Serif" panose="02000603000000000000" pitchFamily="2" charset="0"/>
+              </a:rPr>
+              <a:t>= 0</a:t>
+            </a:r>
+            <a:endParaRPr lang="de-DE" sz="1100" baseline="-25000" dirty="0">
+              <a:solidFill>
+                <a:schemeClr val="accent2"/>
+              </a:solidFill>
+              <a:latin typeface="CMU Serif" panose="02000603000000000000" pitchFamily="2" charset="0"/>
+              <a:ea typeface="CMU Serif" panose="02000603000000000000" pitchFamily="2" charset="0"/>
+              <a:cs typeface="CMU Serif" panose="02000603000000000000" pitchFamily="2" charset="0"/>
+            </a:endParaRPr>
+          </a:p>
+        </p:txBody>
+      </p:sp>
+      <p:sp>
+        <p:nvSpPr>
+          <p:cNvPr id="43" name="Textfeld 42">
+            <a:extLst>
+              <a:ext uri="{FF2B5EF4-FFF2-40B4-BE49-F238E27FC236}">
+                <a16:creationId xmlns:a16="http://schemas.microsoft.com/office/drawing/2014/main" id="{FBAEF234-F625-D439-E0F6-443788CC9680}"/>
+              </a:ext>
+            </a:extLst>
+          </p:cNvPr>
+          <p:cNvSpPr txBox="1"/>
+          <p:nvPr/>
+        </p:nvSpPr>
+        <p:spPr>
+          <a:xfrm>
+            <a:off x="1687550" y="2112917"/>
+            <a:ext cx="526326" cy="261610"/>
+          </a:xfrm>
+          <a:prstGeom prst="rect">
+            <a:avLst/>
+          </a:prstGeom>
+          <a:noFill/>
+        </p:spPr>
+        <p:txBody>
+          <a:bodyPr wrap="square" rtlCol="0">
+            <a:spAutoFit/>
+          </a:bodyPr>
+          <a:lstStyle/>
+          <a:p>
+            <a:r>
+              <a:rPr lang="de-DE" sz="1100" i="1" dirty="0" err="1">
+                <a:solidFill>
+                  <a:srgbClr val="086FBD"/>
+                </a:solidFill>
+                <a:latin typeface="CMU Serif" panose="02000603000000000000" pitchFamily="2" charset="0"/>
+                <a:ea typeface="CMU Serif" panose="02000603000000000000" pitchFamily="2" charset="0"/>
+                <a:cs typeface="CMU Serif" panose="02000603000000000000" pitchFamily="2" charset="0"/>
+              </a:rPr>
+              <a:t>u</a:t>
+            </a:r>
+            <a:r>
+              <a:rPr lang="de-DE" sz="1100" baseline="-25000" dirty="0" err="1">
+                <a:solidFill>
+                  <a:srgbClr val="086FBD"/>
+                </a:solidFill>
+                <a:latin typeface="CMU Serif" panose="02000603000000000000" pitchFamily="2" charset="0"/>
+                <a:ea typeface="CMU Serif" panose="02000603000000000000" pitchFamily="2" charset="0"/>
+                <a:cs typeface="CMU Serif" panose="02000603000000000000" pitchFamily="2" charset="0"/>
+              </a:rPr>
+              <a:t>C</a:t>
+            </a:r>
+            <a:r>
+              <a:rPr lang="de-DE" sz="1100" dirty="0">
+                <a:solidFill>
+                  <a:srgbClr val="086FBD"/>
+                </a:solidFill>
+                <a:latin typeface="CMU Serif" panose="02000603000000000000" pitchFamily="2" charset="0"/>
+                <a:ea typeface="CMU Serif" panose="02000603000000000000" pitchFamily="2" charset="0"/>
+                <a:cs typeface="CMU Serif" panose="02000603000000000000" pitchFamily="2" charset="0"/>
+              </a:rPr>
+              <a:t>(</a:t>
+            </a:r>
+            <a:r>
+              <a:rPr lang="de-DE" sz="1100" i="1" dirty="0">
+                <a:solidFill>
+                  <a:srgbClr val="086FBD"/>
+                </a:solidFill>
+                <a:latin typeface="CMU Serif" panose="02000603000000000000" pitchFamily="2" charset="0"/>
+                <a:ea typeface="CMU Serif" panose="02000603000000000000" pitchFamily="2" charset="0"/>
+                <a:cs typeface="CMU Serif" panose="02000603000000000000" pitchFamily="2" charset="0"/>
+              </a:rPr>
+              <a:t>t</a:t>
+            </a:r>
+            <a:r>
+              <a:rPr lang="de-DE" sz="1100" dirty="0">
+                <a:solidFill>
+                  <a:srgbClr val="086FBD"/>
+                </a:solidFill>
+                <a:latin typeface="CMU Serif" panose="02000603000000000000" pitchFamily="2" charset="0"/>
+                <a:ea typeface="CMU Serif" panose="02000603000000000000" pitchFamily="2" charset="0"/>
+                <a:cs typeface="CMU Serif" panose="02000603000000000000" pitchFamily="2" charset="0"/>
+              </a:rPr>
+              <a:t>)</a:t>
+            </a:r>
+          </a:p>
+        </p:txBody>
+      </p:sp>
+    </p:spTree>
+    <p:extLst>
+      <p:ext uri="{BB962C8B-B14F-4D97-AF65-F5344CB8AC3E}">
+        <p14:creationId xmlns:p14="http://schemas.microsoft.com/office/powerpoint/2010/main" val="473719508"/>
+      </p:ext>
+    </p:extLst>
+  </p:cSld>
+  <p:clrMapOvr>
+    <a:masterClrMapping/>
+  </p:clrMapOvr>
+</p:sld>
+</file>
+
+<file path=ppt/slides/slide24.xml><?xml version="1.0" encoding="utf-8"?>
+<p:sld xmlns:a="http://schemas.openxmlformats.org/drawingml/2006/main" xmlns:r="http://schemas.openxmlformats.org/officeDocument/2006/relationships" xmlns:p="http://schemas.openxmlformats.org/presentationml/2006/main">
+  <p:cSld>
+    <p:spTree>
+      <p:nvGrpSpPr>
+        <p:cNvPr id="1" name="">
+          <a:extLst>
+            <a:ext uri="{FF2B5EF4-FFF2-40B4-BE49-F238E27FC236}">
+              <a16:creationId xmlns:a16="http://schemas.microsoft.com/office/drawing/2014/main" id="{6F603BC1-55B5-4C75-89B6-91D5F0DB978A}"/>
+            </a:ext>
+          </a:extLst>
+        </p:cNvPr>
+        <p:cNvGrpSpPr/>
+        <p:nvPr/>
+      </p:nvGrpSpPr>
+      <p:grpSpPr>
+        <a:xfrm>
+          <a:off x="0" y="0"/>
+          <a:ext cx="0" cy="0"/>
+          <a:chOff x="0" y="0"/>
+          <a:chExt cx="0" cy="0"/>
+        </a:xfrm>
+      </p:grpSpPr>
+      <p:sp>
+        <p:nvSpPr>
+          <p:cNvPr id="15" name="Textfeld 14">
+            <a:extLst>
+              <a:ext uri="{FF2B5EF4-FFF2-40B4-BE49-F238E27FC236}">
+                <a16:creationId xmlns:a16="http://schemas.microsoft.com/office/drawing/2014/main" id="{48ABDE44-56E9-C9AF-BB19-86E973D0B90B}"/>
+              </a:ext>
+            </a:extLst>
+          </p:cNvPr>
+          <p:cNvSpPr txBox="1"/>
+          <p:nvPr/>
+        </p:nvSpPr>
+        <p:spPr>
+          <a:xfrm>
+            <a:off x="2117146" y="1921724"/>
+            <a:ext cx="341666" cy="261610"/>
+          </a:xfrm>
+          <a:prstGeom prst="rect">
+            <a:avLst/>
+          </a:prstGeom>
+          <a:noFill/>
+        </p:spPr>
+        <p:txBody>
+          <a:bodyPr wrap="square" rtlCol="0">
+            <a:spAutoFit/>
+          </a:bodyPr>
+          <a:lstStyle/>
+          <a:p>
+            <a:r>
+              <a:rPr lang="de-DE" sz="1100" i="1" dirty="0">
+                <a:solidFill>
+                  <a:srgbClr val="086FBD"/>
+                </a:solidFill>
+                <a:latin typeface="CMU Serif" panose="02000603000000000000" pitchFamily="2" charset="0"/>
+                <a:ea typeface="CMU Serif" panose="02000603000000000000" pitchFamily="2" charset="0"/>
+                <a:cs typeface="CMU Serif" panose="02000603000000000000" pitchFamily="2" charset="0"/>
+              </a:rPr>
+              <a:t>û</a:t>
+            </a:r>
+            <a:endParaRPr lang="de-DE" sz="1100" baseline="-25000" dirty="0">
+              <a:solidFill>
+                <a:srgbClr val="086FBD"/>
+              </a:solidFill>
+              <a:latin typeface="CMU Serif" panose="02000603000000000000" pitchFamily="2" charset="0"/>
+              <a:ea typeface="CMU Serif" panose="02000603000000000000" pitchFamily="2" charset="0"/>
+              <a:cs typeface="CMU Serif" panose="02000603000000000000" pitchFamily="2" charset="0"/>
+            </a:endParaRPr>
+          </a:p>
+        </p:txBody>
+      </p:sp>
+      <p:sp>
+        <p:nvSpPr>
+          <p:cNvPr id="20" name="Textfeld 19">
+            <a:extLst>
+              <a:ext uri="{FF2B5EF4-FFF2-40B4-BE49-F238E27FC236}">
+                <a16:creationId xmlns:a16="http://schemas.microsoft.com/office/drawing/2014/main" id="{33AFD381-A7B5-EC3D-77A5-3DB00A614131}"/>
+              </a:ext>
+            </a:extLst>
+          </p:cNvPr>
+          <p:cNvSpPr txBox="1"/>
+          <p:nvPr/>
+        </p:nvSpPr>
+        <p:spPr>
+          <a:xfrm>
+            <a:off x="1152264" y="937655"/>
+            <a:ext cx="341666" cy="261610"/>
+          </a:xfrm>
+          <a:prstGeom prst="rect">
+            <a:avLst/>
+          </a:prstGeom>
+          <a:noFill/>
+        </p:spPr>
+        <p:txBody>
+          <a:bodyPr wrap="square" rtlCol="0">
+            <a:spAutoFit/>
+          </a:bodyPr>
+          <a:lstStyle/>
+          <a:p>
+            <a:pPr algn="ctr"/>
+            <a:r>
+              <a:rPr lang="de-DE" sz="1100" i="1" dirty="0">
+                <a:latin typeface="CMU Serif" panose="02000603000000000000" pitchFamily="2" charset="0"/>
+                <a:ea typeface="CMU Serif" panose="02000603000000000000" pitchFamily="2" charset="0"/>
+                <a:cs typeface="CMU Serif" panose="02000603000000000000" pitchFamily="2" charset="0"/>
+              </a:rPr>
+              <a:t>R</a:t>
+            </a:r>
+            <a:endParaRPr lang="de-DE" sz="1100" baseline="-25000" dirty="0">
+              <a:latin typeface="CMU Serif" panose="02000603000000000000" pitchFamily="2" charset="0"/>
+              <a:ea typeface="CMU Serif" panose="02000603000000000000" pitchFamily="2" charset="0"/>
+              <a:cs typeface="CMU Serif" panose="02000603000000000000" pitchFamily="2" charset="0"/>
+            </a:endParaRPr>
+          </a:p>
+        </p:txBody>
+      </p:sp>
+      <p:cxnSp>
+        <p:nvCxnSpPr>
+          <p:cNvPr id="30" name="Gerade Verbindung mit Pfeil 29">
+            <a:extLst>
+              <a:ext uri="{FF2B5EF4-FFF2-40B4-BE49-F238E27FC236}">
+                <a16:creationId xmlns:a16="http://schemas.microsoft.com/office/drawing/2014/main" id="{36B350E4-4A4D-80AB-5B39-DAA86B287878}"/>
+              </a:ext>
+            </a:extLst>
+          </p:cNvPr>
+          <p:cNvCxnSpPr>
+            <a:cxnSpLocks/>
+          </p:cNvCxnSpPr>
+          <p:nvPr/>
+        </p:nvCxnSpPr>
+        <p:spPr>
+          <a:xfrm>
+            <a:off x="2009361" y="2163555"/>
+            <a:ext cx="497064" cy="0"/>
+          </a:xfrm>
+          <a:prstGeom prst="straightConnector1">
+            <a:avLst/>
+          </a:prstGeom>
+          <a:ln cap="rnd">
+            <a:solidFill>
+              <a:srgbClr val="086FBD"/>
+            </a:solidFill>
+            <a:round/>
+            <a:tailEnd type="triangle"/>
+          </a:ln>
+        </p:spPr>
+        <p:style>
+          <a:lnRef idx="2">
+            <a:schemeClr val="accent1"/>
+          </a:lnRef>
+          <a:fillRef idx="0">
+            <a:schemeClr val="accent1"/>
+          </a:fillRef>
+          <a:effectRef idx="1">
+            <a:schemeClr val="accent1"/>
+          </a:effectRef>
+          <a:fontRef idx="minor">
+            <a:schemeClr val="tx1"/>
+          </a:fontRef>
+        </p:style>
+      </p:cxnSp>
+      <p:sp>
+        <p:nvSpPr>
+          <p:cNvPr id="34" name="Textfeld 33">
+            <a:extLst>
+              <a:ext uri="{FF2B5EF4-FFF2-40B4-BE49-F238E27FC236}">
+                <a16:creationId xmlns:a16="http://schemas.microsoft.com/office/drawing/2014/main" id="{BFF9F74F-84C3-D7BB-06AD-C391F3B82C36}"/>
+              </a:ext>
+            </a:extLst>
+          </p:cNvPr>
+          <p:cNvSpPr txBox="1"/>
+          <p:nvPr/>
+        </p:nvSpPr>
+        <p:spPr>
+          <a:xfrm>
+            <a:off x="1095511" y="1423503"/>
+            <a:ext cx="526326" cy="261610"/>
+          </a:xfrm>
+          <a:prstGeom prst="rect">
+            <a:avLst/>
+          </a:prstGeom>
+          <a:noFill/>
+        </p:spPr>
+        <p:txBody>
+          <a:bodyPr wrap="square" rtlCol="0">
+            <a:spAutoFit/>
+          </a:bodyPr>
+          <a:lstStyle/>
+          <a:p>
+            <a:r>
+              <a:rPr lang="de-DE" sz="1100" i="1" dirty="0" err="1">
+                <a:solidFill>
+                  <a:srgbClr val="086FBD"/>
+                </a:solidFill>
+                <a:latin typeface="CMU Serif" panose="02000603000000000000" pitchFamily="2" charset="0"/>
+                <a:ea typeface="CMU Serif" panose="02000603000000000000" pitchFamily="2" charset="0"/>
+                <a:cs typeface="CMU Serif" panose="02000603000000000000" pitchFamily="2" charset="0"/>
+              </a:rPr>
+              <a:t>u</a:t>
+            </a:r>
+            <a:r>
+              <a:rPr lang="de-DE" sz="1100" baseline="-25000" dirty="0" err="1">
+                <a:solidFill>
+                  <a:srgbClr val="086FBD"/>
+                </a:solidFill>
+                <a:latin typeface="CMU Serif" panose="02000603000000000000" pitchFamily="2" charset="0"/>
+                <a:ea typeface="CMU Serif" panose="02000603000000000000" pitchFamily="2" charset="0"/>
+                <a:cs typeface="CMU Serif" panose="02000603000000000000" pitchFamily="2" charset="0"/>
+              </a:rPr>
+              <a:t>R</a:t>
+            </a:r>
+            <a:r>
+              <a:rPr lang="de-DE" sz="1100" dirty="0">
+                <a:solidFill>
+                  <a:srgbClr val="086FBD"/>
+                </a:solidFill>
+                <a:latin typeface="CMU Serif" panose="02000603000000000000" pitchFamily="2" charset="0"/>
+                <a:ea typeface="CMU Serif" panose="02000603000000000000" pitchFamily="2" charset="0"/>
+                <a:cs typeface="CMU Serif" panose="02000603000000000000" pitchFamily="2" charset="0"/>
+              </a:rPr>
+              <a:t>(</a:t>
+            </a:r>
+            <a:r>
+              <a:rPr lang="de-DE" sz="1100" i="1" dirty="0">
+                <a:solidFill>
+                  <a:srgbClr val="086FBD"/>
+                </a:solidFill>
+                <a:latin typeface="CMU Serif" panose="02000603000000000000" pitchFamily="2" charset="0"/>
+                <a:ea typeface="CMU Serif" panose="02000603000000000000" pitchFamily="2" charset="0"/>
+                <a:cs typeface="CMU Serif" panose="02000603000000000000" pitchFamily="2" charset="0"/>
+              </a:rPr>
+              <a:t>t</a:t>
+            </a:r>
+            <a:r>
+              <a:rPr lang="de-DE" sz="1100" dirty="0">
+                <a:solidFill>
+                  <a:srgbClr val="086FBD"/>
+                </a:solidFill>
+                <a:latin typeface="CMU Serif" panose="02000603000000000000" pitchFamily="2" charset="0"/>
+                <a:ea typeface="CMU Serif" panose="02000603000000000000" pitchFamily="2" charset="0"/>
+                <a:cs typeface="CMU Serif" panose="02000603000000000000" pitchFamily="2" charset="0"/>
+              </a:rPr>
+              <a:t>)</a:t>
+            </a:r>
+          </a:p>
+        </p:txBody>
+      </p:sp>
+      <p:sp>
+        <p:nvSpPr>
+          <p:cNvPr id="4" name="Rechteck 3">
+            <a:extLst>
+              <a:ext uri="{FF2B5EF4-FFF2-40B4-BE49-F238E27FC236}">
+                <a16:creationId xmlns:a16="http://schemas.microsoft.com/office/drawing/2014/main" id="{09B7C51C-8166-A0DE-45A3-63ED40657704}"/>
+              </a:ext>
+            </a:extLst>
+          </p:cNvPr>
+          <p:cNvSpPr/>
+          <p:nvPr/>
+        </p:nvSpPr>
+        <p:spPr>
+          <a:xfrm rot="16200000">
+            <a:off x="1253123" y="898184"/>
+            <a:ext cx="1094135" cy="1803748"/>
+          </a:xfrm>
+          <a:prstGeom prst="rect">
+            <a:avLst/>
+          </a:prstGeom>
+          <a:noFill/>
+          <a:ln w="15875" cap="rnd">
+            <a:solidFill>
+              <a:schemeClr val="tx1"/>
+            </a:solidFill>
+            <a:round/>
+          </a:ln>
+        </p:spPr>
+        <p:style>
+          <a:lnRef idx="2">
+            <a:schemeClr val="accent1">
+              <a:shade val="15000"/>
+            </a:schemeClr>
+          </a:lnRef>
+          <a:fillRef idx="1">
+            <a:schemeClr val="accent1"/>
+          </a:fillRef>
+          <a:effectRef idx="0">
+            <a:schemeClr val="accent1"/>
+          </a:effectRef>
+          <a:fontRef idx="minor">
+            <a:schemeClr val="lt1"/>
+          </a:fontRef>
+        </p:style>
+        <p:txBody>
+          <a:bodyPr rtlCol="0" anchor="ctr"/>
+          <a:lstStyle/>
+          <a:p>
+            <a:pPr algn="ctr"/>
+            <a:endParaRPr lang="de-DE" dirty="0"/>
+          </a:p>
+        </p:txBody>
+      </p:sp>
+      <p:sp>
+        <p:nvSpPr>
+          <p:cNvPr id="10" name="Rechteck 9">
+            <a:extLst>
+              <a:ext uri="{FF2B5EF4-FFF2-40B4-BE49-F238E27FC236}">
+                <a16:creationId xmlns:a16="http://schemas.microsoft.com/office/drawing/2014/main" id="{57BD0432-6998-9C0C-83E9-B7579863E547}"/>
+              </a:ext>
+            </a:extLst>
+          </p:cNvPr>
+          <p:cNvSpPr/>
+          <p:nvPr/>
+        </p:nvSpPr>
+        <p:spPr>
+          <a:xfrm rot="10800000">
+            <a:off x="1166053" y="1192433"/>
+            <a:ext cx="335280" cy="118110"/>
+          </a:xfrm>
+          <a:prstGeom prst="rect">
+            <a:avLst/>
+          </a:prstGeom>
+          <a:solidFill>
+            <a:schemeClr val="bg1"/>
+          </a:solidFill>
+          <a:ln w="15875" cap="rnd">
+            <a:solidFill>
+              <a:schemeClr val="tx1"/>
+            </a:solidFill>
+            <a:round/>
+          </a:ln>
+        </p:spPr>
+        <p:style>
+          <a:lnRef idx="2">
+            <a:schemeClr val="accent1">
+              <a:shade val="15000"/>
+            </a:schemeClr>
+          </a:lnRef>
+          <a:fillRef idx="1">
+            <a:schemeClr val="accent1"/>
+          </a:fillRef>
+          <a:effectRef idx="0">
+            <a:schemeClr val="accent1"/>
+          </a:effectRef>
+          <a:fontRef idx="minor">
+            <a:schemeClr val="lt1"/>
+          </a:fontRef>
+        </p:style>
+        <p:txBody>
+          <a:bodyPr rtlCol="0" anchor="ctr"/>
+          <a:lstStyle/>
+          <a:p>
+            <a:pPr algn="ctr"/>
+            <a:endParaRPr lang="de-DE" dirty="0"/>
+          </a:p>
+        </p:txBody>
+      </p:sp>
+      <p:sp>
+        <p:nvSpPr>
+          <p:cNvPr id="13" name="Ellipse 12">
+            <a:extLst>
+              <a:ext uri="{FF2B5EF4-FFF2-40B4-BE49-F238E27FC236}">
+                <a16:creationId xmlns:a16="http://schemas.microsoft.com/office/drawing/2014/main" id="{9FD9D439-D2B3-B2B7-A287-7D4179F7F6A6}"/>
+              </a:ext>
+            </a:extLst>
+          </p:cNvPr>
+          <p:cNvSpPr/>
+          <p:nvPr/>
+        </p:nvSpPr>
+        <p:spPr>
+          <a:xfrm rot="16200000">
+            <a:off x="2141053" y="2232825"/>
+            <a:ext cx="228600" cy="228600"/>
+          </a:xfrm>
+          <a:prstGeom prst="ellipse">
+            <a:avLst/>
+          </a:prstGeom>
+          <a:noFill/>
+          <a:ln w="15875">
+            <a:solidFill>
+              <a:schemeClr val="tx1"/>
+            </a:solidFill>
+          </a:ln>
+        </p:spPr>
+        <p:style>
+          <a:lnRef idx="2">
+            <a:schemeClr val="accent1">
+              <a:shade val="15000"/>
+            </a:schemeClr>
+          </a:lnRef>
+          <a:fillRef idx="1">
+            <a:schemeClr val="accent1"/>
+          </a:fillRef>
+          <a:effectRef idx="0">
+            <a:schemeClr val="accent1"/>
+          </a:effectRef>
+          <a:fontRef idx="minor">
+            <a:schemeClr val="lt1"/>
+          </a:fontRef>
+        </p:style>
+        <p:txBody>
+          <a:bodyPr rtlCol="0" anchor="ctr"/>
+          <a:lstStyle/>
+          <a:p>
+            <a:pPr algn="ctr"/>
+            <a:endParaRPr lang="de-DE" dirty="0"/>
+          </a:p>
+        </p:txBody>
+      </p:sp>
+      <p:sp>
+        <p:nvSpPr>
+          <p:cNvPr id="42" name="Textfeld 41">
+            <a:extLst>
+              <a:ext uri="{FF2B5EF4-FFF2-40B4-BE49-F238E27FC236}">
+                <a16:creationId xmlns:a16="http://schemas.microsoft.com/office/drawing/2014/main" id="{8BC20C97-372E-CF0E-B764-FCE7D24EF0F9}"/>
+              </a:ext>
+            </a:extLst>
+          </p:cNvPr>
+          <p:cNvSpPr txBox="1"/>
+          <p:nvPr/>
+        </p:nvSpPr>
+        <p:spPr>
+          <a:xfrm>
+            <a:off x="1032621" y="1956844"/>
+            <a:ext cx="755748" cy="261610"/>
+          </a:xfrm>
+          <a:prstGeom prst="rect">
+            <a:avLst/>
+          </a:prstGeom>
+          <a:noFill/>
+        </p:spPr>
+        <p:txBody>
+          <a:bodyPr wrap="square" rtlCol="0">
+            <a:spAutoFit/>
+          </a:bodyPr>
+          <a:lstStyle/>
+          <a:p>
+            <a:pPr algn="ctr"/>
+            <a:r>
+              <a:rPr lang="de-DE" sz="1100" dirty="0">
+                <a:solidFill>
+                  <a:schemeClr val="accent2"/>
+                </a:solidFill>
+                <a:latin typeface="CMU Serif" panose="02000603000000000000" pitchFamily="2" charset="0"/>
+                <a:ea typeface="CMU Serif" panose="02000603000000000000" pitchFamily="2" charset="0"/>
+                <a:cs typeface="CMU Serif" panose="02000603000000000000" pitchFamily="2" charset="0"/>
+              </a:rPr>
+              <a:t>bei </a:t>
+            </a:r>
+            <a:r>
+              <a:rPr lang="de-DE" sz="1100" i="1" dirty="0">
+                <a:solidFill>
+                  <a:schemeClr val="accent2"/>
+                </a:solidFill>
+                <a:latin typeface="CMU Serif" panose="02000603000000000000" pitchFamily="2" charset="0"/>
+                <a:ea typeface="CMU Serif" panose="02000603000000000000" pitchFamily="2" charset="0"/>
+                <a:cs typeface="CMU Serif" panose="02000603000000000000" pitchFamily="2" charset="0"/>
+              </a:rPr>
+              <a:t>t </a:t>
+            </a:r>
+            <a:r>
+              <a:rPr lang="de-DE" sz="1100" dirty="0">
+                <a:solidFill>
+                  <a:schemeClr val="accent2"/>
+                </a:solidFill>
+                <a:latin typeface="CMU Serif" panose="02000603000000000000" pitchFamily="2" charset="0"/>
+                <a:ea typeface="CMU Serif" panose="02000603000000000000" pitchFamily="2" charset="0"/>
+                <a:cs typeface="CMU Serif" panose="02000603000000000000" pitchFamily="2" charset="0"/>
+              </a:rPr>
+              <a:t>= 0</a:t>
+            </a:r>
+            <a:endParaRPr lang="de-DE" sz="1100" baseline="-25000" dirty="0">
+              <a:solidFill>
+                <a:schemeClr val="accent2"/>
+              </a:solidFill>
+              <a:latin typeface="CMU Serif" panose="02000603000000000000" pitchFamily="2" charset="0"/>
+              <a:ea typeface="CMU Serif" panose="02000603000000000000" pitchFamily="2" charset="0"/>
+              <a:cs typeface="CMU Serif" panose="02000603000000000000" pitchFamily="2" charset="0"/>
+            </a:endParaRPr>
+          </a:p>
+        </p:txBody>
+      </p:sp>
+      <p:sp>
+        <p:nvSpPr>
+          <p:cNvPr id="43" name="Textfeld 42">
+            <a:extLst>
+              <a:ext uri="{FF2B5EF4-FFF2-40B4-BE49-F238E27FC236}">
+                <a16:creationId xmlns:a16="http://schemas.microsoft.com/office/drawing/2014/main" id="{E94DF0A1-B5DB-D9C0-2570-DAE5E2252169}"/>
+              </a:ext>
+            </a:extLst>
+          </p:cNvPr>
+          <p:cNvSpPr txBox="1"/>
+          <p:nvPr/>
+        </p:nvSpPr>
+        <p:spPr>
+          <a:xfrm>
+            <a:off x="2004950" y="1429934"/>
+            <a:ext cx="526326" cy="261610"/>
+          </a:xfrm>
+          <a:prstGeom prst="rect">
+            <a:avLst/>
+          </a:prstGeom>
+          <a:noFill/>
+        </p:spPr>
+        <p:txBody>
+          <a:bodyPr wrap="square" rtlCol="0">
+            <a:spAutoFit/>
+          </a:bodyPr>
+          <a:lstStyle/>
+          <a:p>
+            <a:r>
+              <a:rPr lang="de-DE" sz="1100" i="1" dirty="0" err="1">
+                <a:solidFill>
+                  <a:srgbClr val="086FBD"/>
+                </a:solidFill>
+                <a:latin typeface="CMU Serif" panose="02000603000000000000" pitchFamily="2" charset="0"/>
+                <a:ea typeface="CMU Serif" panose="02000603000000000000" pitchFamily="2" charset="0"/>
+                <a:cs typeface="CMU Serif" panose="02000603000000000000" pitchFamily="2" charset="0"/>
+              </a:rPr>
+              <a:t>u</a:t>
+            </a:r>
+            <a:r>
+              <a:rPr lang="de-DE" sz="1100" baseline="-25000" dirty="0" err="1">
+                <a:solidFill>
+                  <a:srgbClr val="086FBD"/>
+                </a:solidFill>
+                <a:latin typeface="CMU Serif" panose="02000603000000000000" pitchFamily="2" charset="0"/>
+                <a:ea typeface="CMU Serif" panose="02000603000000000000" pitchFamily="2" charset="0"/>
+                <a:cs typeface="CMU Serif" panose="02000603000000000000" pitchFamily="2" charset="0"/>
+              </a:rPr>
+              <a:t>L</a:t>
+            </a:r>
+            <a:r>
+              <a:rPr lang="de-DE" sz="1100" dirty="0">
+                <a:solidFill>
+                  <a:srgbClr val="086FBD"/>
+                </a:solidFill>
+                <a:latin typeface="CMU Serif" panose="02000603000000000000" pitchFamily="2" charset="0"/>
+                <a:ea typeface="CMU Serif" panose="02000603000000000000" pitchFamily="2" charset="0"/>
+                <a:cs typeface="CMU Serif" panose="02000603000000000000" pitchFamily="2" charset="0"/>
+              </a:rPr>
+              <a:t>(</a:t>
+            </a:r>
+            <a:r>
+              <a:rPr lang="de-DE" sz="1100" i="1" dirty="0">
+                <a:solidFill>
+                  <a:srgbClr val="086FBD"/>
+                </a:solidFill>
+                <a:latin typeface="CMU Serif" panose="02000603000000000000" pitchFamily="2" charset="0"/>
+                <a:ea typeface="CMU Serif" panose="02000603000000000000" pitchFamily="2" charset="0"/>
+                <a:cs typeface="CMU Serif" panose="02000603000000000000" pitchFamily="2" charset="0"/>
+              </a:rPr>
+              <a:t>t</a:t>
+            </a:r>
+            <a:r>
+              <a:rPr lang="de-DE" sz="1100" dirty="0">
+                <a:solidFill>
+                  <a:srgbClr val="086FBD"/>
+                </a:solidFill>
+                <a:latin typeface="CMU Serif" panose="02000603000000000000" pitchFamily="2" charset="0"/>
+                <a:ea typeface="CMU Serif" panose="02000603000000000000" pitchFamily="2" charset="0"/>
+                <a:cs typeface="CMU Serif" panose="02000603000000000000" pitchFamily="2" charset="0"/>
+              </a:rPr>
+              <a:t>)</a:t>
+            </a:r>
+          </a:p>
+        </p:txBody>
+      </p:sp>
+      <p:sp>
+        <p:nvSpPr>
+          <p:cNvPr id="35" name="Rechteck 34">
+            <a:extLst>
+              <a:ext uri="{FF2B5EF4-FFF2-40B4-BE49-F238E27FC236}">
+                <a16:creationId xmlns:a16="http://schemas.microsoft.com/office/drawing/2014/main" id="{22ECBF1E-DDD3-48F0-561D-A4C720B1E0A9}"/>
+              </a:ext>
+            </a:extLst>
+          </p:cNvPr>
+          <p:cNvSpPr/>
+          <p:nvPr/>
+        </p:nvSpPr>
+        <p:spPr>
+          <a:xfrm flipH="1">
+            <a:off x="1181235" y="2278524"/>
+            <a:ext cx="317750" cy="135424"/>
+          </a:xfrm>
+          <a:prstGeom prst="rect">
+            <a:avLst/>
+          </a:prstGeom>
+          <a:solidFill>
+            <a:schemeClr val="bg1"/>
+          </a:solidFill>
+          <a:ln w="15875" cap="rnd">
+            <a:noFill/>
+            <a:round/>
+          </a:ln>
+        </p:spPr>
+        <p:style>
+          <a:lnRef idx="2">
+            <a:schemeClr val="accent1">
+              <a:shade val="15000"/>
+            </a:schemeClr>
+          </a:lnRef>
+          <a:fillRef idx="1">
+            <a:schemeClr val="accent1"/>
+          </a:fillRef>
+          <a:effectRef idx="0">
+            <a:schemeClr val="accent1"/>
+          </a:effectRef>
+          <a:fontRef idx="minor">
+            <a:schemeClr val="lt1"/>
+          </a:fontRef>
+        </p:style>
+        <p:txBody>
+          <a:bodyPr rtlCol="0" anchor="ctr"/>
+          <a:lstStyle/>
+          <a:p>
+            <a:pPr algn="ctr"/>
+            <a:endParaRPr lang="de-DE" dirty="0"/>
+          </a:p>
+        </p:txBody>
+      </p:sp>
+      <p:sp>
+        <p:nvSpPr>
+          <p:cNvPr id="36" name="Ellipse 35">
+            <a:extLst>
+              <a:ext uri="{FF2B5EF4-FFF2-40B4-BE49-F238E27FC236}">
+                <a16:creationId xmlns:a16="http://schemas.microsoft.com/office/drawing/2014/main" id="{3300E2B8-2028-881F-F8AA-C96D29506390}"/>
+              </a:ext>
+            </a:extLst>
+          </p:cNvPr>
+          <p:cNvSpPr/>
+          <p:nvPr/>
+        </p:nvSpPr>
+        <p:spPr>
+          <a:xfrm rot="16200000" flipH="1">
+            <a:off x="1473265" y="2324265"/>
+            <a:ext cx="45720" cy="45720"/>
+          </a:xfrm>
+          <a:prstGeom prst="ellipse">
+            <a:avLst/>
+          </a:prstGeom>
+          <a:solidFill>
+            <a:schemeClr val="tx1"/>
+          </a:solidFill>
+          <a:ln>
+            <a:noFill/>
+          </a:ln>
+        </p:spPr>
+        <p:style>
+          <a:lnRef idx="2">
+            <a:schemeClr val="accent1">
+              <a:shade val="15000"/>
+            </a:schemeClr>
+          </a:lnRef>
+          <a:fillRef idx="1">
+            <a:schemeClr val="accent1"/>
+          </a:fillRef>
+          <a:effectRef idx="0">
+            <a:schemeClr val="accent1"/>
+          </a:effectRef>
+          <a:fontRef idx="minor">
+            <a:schemeClr val="lt1"/>
+          </a:fontRef>
+        </p:style>
+        <p:txBody>
+          <a:bodyPr rtlCol="0" anchor="ctr"/>
+          <a:lstStyle/>
+          <a:p>
+            <a:pPr algn="ctr"/>
+            <a:endParaRPr lang="de-DE" dirty="0"/>
+          </a:p>
+        </p:txBody>
+      </p:sp>
+      <p:cxnSp>
+        <p:nvCxnSpPr>
+          <p:cNvPr id="37" name="Gerade Verbindung mit Pfeil 36">
+            <a:extLst>
+              <a:ext uri="{FF2B5EF4-FFF2-40B4-BE49-F238E27FC236}">
+                <a16:creationId xmlns:a16="http://schemas.microsoft.com/office/drawing/2014/main" id="{C9C440D5-C6CF-A2D9-AF3A-98135C7AAD0A}"/>
+              </a:ext>
+            </a:extLst>
+          </p:cNvPr>
+          <p:cNvCxnSpPr>
+            <a:cxnSpLocks/>
+          </p:cNvCxnSpPr>
+          <p:nvPr/>
+        </p:nvCxnSpPr>
+        <p:spPr>
+          <a:xfrm flipV="1">
+            <a:off x="1205868" y="2346213"/>
+            <a:ext cx="288062" cy="35037"/>
+          </a:xfrm>
+          <a:prstGeom prst="straightConnector1">
+            <a:avLst/>
+          </a:prstGeom>
+          <a:ln w="15875" cap="rnd">
+            <a:solidFill>
+              <a:schemeClr val="tx1"/>
+            </a:solidFill>
+            <a:round/>
+            <a:tailEnd type="none" w="med" len="med"/>
+          </a:ln>
+        </p:spPr>
+        <p:style>
+          <a:lnRef idx="2">
+            <a:schemeClr val="accent1"/>
+          </a:lnRef>
+          <a:fillRef idx="0">
+            <a:schemeClr val="accent1"/>
+          </a:fillRef>
+          <a:effectRef idx="1">
+            <a:schemeClr val="accent1"/>
+          </a:effectRef>
+          <a:fontRef idx="minor">
+            <a:schemeClr val="tx1"/>
+          </a:fontRef>
+        </p:style>
+      </p:cxnSp>
+      <p:sp>
+        <p:nvSpPr>
+          <p:cNvPr id="40" name="Ellipse 39">
+            <a:extLst>
+              <a:ext uri="{FF2B5EF4-FFF2-40B4-BE49-F238E27FC236}">
+                <a16:creationId xmlns:a16="http://schemas.microsoft.com/office/drawing/2014/main" id="{33AF360B-A0C3-56BB-1AAA-EBF48C75AEB0}"/>
+              </a:ext>
+            </a:extLst>
+          </p:cNvPr>
+          <p:cNvSpPr/>
+          <p:nvPr/>
+        </p:nvSpPr>
+        <p:spPr>
+          <a:xfrm rot="16200000" flipH="1">
+            <a:off x="1163907" y="2324265"/>
+            <a:ext cx="45720" cy="45720"/>
+          </a:xfrm>
+          <a:prstGeom prst="ellipse">
+            <a:avLst/>
+          </a:prstGeom>
+          <a:solidFill>
+            <a:schemeClr val="tx1"/>
+          </a:solidFill>
+          <a:ln>
+            <a:noFill/>
+          </a:ln>
+        </p:spPr>
+        <p:style>
+          <a:lnRef idx="2">
+            <a:schemeClr val="accent1">
+              <a:shade val="15000"/>
+            </a:schemeClr>
+          </a:lnRef>
+          <a:fillRef idx="1">
+            <a:schemeClr val="accent1"/>
+          </a:fillRef>
+          <a:effectRef idx="0">
+            <a:schemeClr val="accent1"/>
+          </a:effectRef>
+          <a:fontRef idx="minor">
+            <a:schemeClr val="lt1"/>
+          </a:fontRef>
+        </p:style>
+        <p:txBody>
+          <a:bodyPr rtlCol="0" anchor="ctr"/>
+          <a:lstStyle/>
+          <a:p>
+            <a:pPr algn="ctr"/>
+            <a:endParaRPr lang="de-DE" dirty="0"/>
+          </a:p>
+        </p:txBody>
+      </p:sp>
+      <p:sp>
+        <p:nvSpPr>
+          <p:cNvPr id="41" name="Bogen 40">
+            <a:extLst>
+              <a:ext uri="{FF2B5EF4-FFF2-40B4-BE49-F238E27FC236}">
+                <a16:creationId xmlns:a16="http://schemas.microsoft.com/office/drawing/2014/main" id="{620A917F-1021-8E7D-680C-1C900F61E34A}"/>
+              </a:ext>
+            </a:extLst>
+          </p:cNvPr>
+          <p:cNvSpPr/>
+          <p:nvPr/>
+        </p:nvSpPr>
+        <p:spPr>
+          <a:xfrm>
+            <a:off x="1331407" y="2183334"/>
+            <a:ext cx="325755" cy="325755"/>
+          </a:xfrm>
+          <a:prstGeom prst="arc">
+            <a:avLst>
+              <a:gd name="adj1" fmla="val 8292870"/>
+              <a:gd name="adj2" fmla="val 12277374"/>
+            </a:avLst>
+          </a:prstGeom>
+          <a:ln w="9525" cap="rnd">
+            <a:solidFill>
+              <a:schemeClr val="accent2"/>
+            </a:solidFill>
+            <a:round/>
+            <a:headEnd type="none"/>
+            <a:tailEnd type="triangle" w="sm" len="sm"/>
+          </a:ln>
+        </p:spPr>
+        <p:style>
+          <a:lnRef idx="2">
+            <a:schemeClr val="accent1"/>
+          </a:lnRef>
+          <a:fillRef idx="0">
+            <a:schemeClr val="accent1"/>
+          </a:fillRef>
+          <a:effectRef idx="1">
+            <a:schemeClr val="accent1"/>
+          </a:effectRef>
+          <a:fontRef idx="minor">
+            <a:schemeClr val="tx1"/>
+          </a:fontRef>
+        </p:style>
+        <p:txBody>
+          <a:bodyPr rtlCol="0" anchor="ctr"/>
+          <a:lstStyle/>
+          <a:p>
+            <a:pPr algn="ctr"/>
+            <a:endParaRPr lang="de-DE"/>
+          </a:p>
+        </p:txBody>
+      </p:sp>
+      <p:sp>
+        <p:nvSpPr>
+          <p:cNvPr id="6" name="Rechteck 5">
+            <a:extLst>
+              <a:ext uri="{FF2B5EF4-FFF2-40B4-BE49-F238E27FC236}">
+                <a16:creationId xmlns:a16="http://schemas.microsoft.com/office/drawing/2014/main" id="{31196E48-D70F-D7ED-2A4F-B51F6F36D469}"/>
+              </a:ext>
+            </a:extLst>
+          </p:cNvPr>
+          <p:cNvSpPr/>
+          <p:nvPr/>
+        </p:nvSpPr>
+        <p:spPr>
+          <a:xfrm rot="10800000">
+            <a:off x="2072732" y="1192434"/>
+            <a:ext cx="335280" cy="118110"/>
+          </a:xfrm>
+          <a:prstGeom prst="rect">
+            <a:avLst/>
+          </a:prstGeom>
+          <a:solidFill>
+            <a:schemeClr val="tx1"/>
+          </a:solidFill>
+          <a:ln w="15875" cap="rnd">
+            <a:solidFill>
+              <a:schemeClr val="tx1"/>
+            </a:solidFill>
+            <a:round/>
+          </a:ln>
+        </p:spPr>
+        <p:style>
+          <a:lnRef idx="2">
+            <a:schemeClr val="accent1">
+              <a:shade val="15000"/>
+            </a:schemeClr>
+          </a:lnRef>
+          <a:fillRef idx="1">
+            <a:schemeClr val="accent1"/>
+          </a:fillRef>
+          <a:effectRef idx="0">
+            <a:schemeClr val="accent1"/>
+          </a:effectRef>
+          <a:fontRef idx="minor">
+            <a:schemeClr val="lt1"/>
+          </a:fontRef>
+        </p:style>
+        <p:txBody>
+          <a:bodyPr rtlCol="0" anchor="ctr"/>
+          <a:lstStyle/>
+          <a:p>
+            <a:pPr algn="ctr"/>
+            <a:endParaRPr lang="de-DE" dirty="0"/>
+          </a:p>
+        </p:txBody>
+      </p:sp>
+      <p:cxnSp>
+        <p:nvCxnSpPr>
+          <p:cNvPr id="9" name="Gerade Verbindung mit Pfeil 8">
+            <a:extLst>
+              <a:ext uri="{FF2B5EF4-FFF2-40B4-BE49-F238E27FC236}">
+                <a16:creationId xmlns:a16="http://schemas.microsoft.com/office/drawing/2014/main" id="{6F760A7B-CFCD-4C5C-825C-3BAB5C65D066}"/>
+              </a:ext>
+            </a:extLst>
+          </p:cNvPr>
+          <p:cNvCxnSpPr>
+            <a:cxnSpLocks/>
+          </p:cNvCxnSpPr>
+          <p:nvPr/>
+        </p:nvCxnSpPr>
+        <p:spPr>
+          <a:xfrm>
+            <a:off x="2046024" y="1401555"/>
+            <a:ext cx="409015" cy="0"/>
+          </a:xfrm>
+          <a:prstGeom prst="straightConnector1">
+            <a:avLst/>
+          </a:prstGeom>
+          <a:ln cap="rnd">
+            <a:solidFill>
+              <a:srgbClr val="086FBD"/>
+            </a:solidFill>
+            <a:round/>
+            <a:tailEnd type="triangle"/>
+          </a:ln>
+        </p:spPr>
+        <p:style>
+          <a:lnRef idx="2">
+            <a:schemeClr val="accent1"/>
+          </a:lnRef>
+          <a:fillRef idx="0">
+            <a:schemeClr val="accent1"/>
+          </a:fillRef>
+          <a:effectRef idx="1">
+            <a:schemeClr val="accent1"/>
+          </a:effectRef>
+          <a:fontRef idx="minor">
+            <a:schemeClr val="tx1"/>
+          </a:fontRef>
+        </p:style>
+      </p:cxnSp>
+      <p:sp>
+        <p:nvSpPr>
+          <p:cNvPr id="21" name="Textfeld 20">
+            <a:extLst>
+              <a:ext uri="{FF2B5EF4-FFF2-40B4-BE49-F238E27FC236}">
+                <a16:creationId xmlns:a16="http://schemas.microsoft.com/office/drawing/2014/main" id="{94374818-597E-2EDD-D7B3-F72BBD3465E2}"/>
+              </a:ext>
+            </a:extLst>
+          </p:cNvPr>
+          <p:cNvSpPr txBox="1"/>
+          <p:nvPr/>
+        </p:nvSpPr>
+        <p:spPr>
+          <a:xfrm>
+            <a:off x="2056169" y="932319"/>
+            <a:ext cx="341666" cy="261610"/>
+          </a:xfrm>
+          <a:prstGeom prst="rect">
+            <a:avLst/>
+          </a:prstGeom>
+          <a:noFill/>
+        </p:spPr>
+        <p:txBody>
+          <a:bodyPr wrap="square" rtlCol="0">
+            <a:spAutoFit/>
+          </a:bodyPr>
+          <a:lstStyle/>
+          <a:p>
+            <a:pPr algn="ctr"/>
+            <a:r>
+              <a:rPr lang="de-DE" sz="1100" i="1" dirty="0">
+                <a:latin typeface="CMU Serif" panose="02000603000000000000" pitchFamily="2" charset="0"/>
+                <a:ea typeface="CMU Serif" panose="02000603000000000000" pitchFamily="2" charset="0"/>
+                <a:cs typeface="CMU Serif" panose="02000603000000000000" pitchFamily="2" charset="0"/>
+              </a:rPr>
+              <a:t>L</a:t>
+            </a:r>
+            <a:endParaRPr lang="de-DE" sz="1100" baseline="-25000" dirty="0">
+              <a:latin typeface="CMU Serif" panose="02000603000000000000" pitchFamily="2" charset="0"/>
+              <a:ea typeface="CMU Serif" panose="02000603000000000000" pitchFamily="2" charset="0"/>
+              <a:cs typeface="CMU Serif" panose="02000603000000000000" pitchFamily="2" charset="0"/>
+            </a:endParaRPr>
+          </a:p>
+        </p:txBody>
+      </p:sp>
+      <p:cxnSp>
+        <p:nvCxnSpPr>
+          <p:cNvPr id="23" name="Gerade Verbindung mit Pfeil 22">
+            <a:extLst>
+              <a:ext uri="{FF2B5EF4-FFF2-40B4-BE49-F238E27FC236}">
+                <a16:creationId xmlns:a16="http://schemas.microsoft.com/office/drawing/2014/main" id="{5C8D99BA-2F6B-7E96-4E50-16E6E12B7CD3}"/>
+              </a:ext>
+            </a:extLst>
+          </p:cNvPr>
+          <p:cNvCxnSpPr>
+            <a:cxnSpLocks/>
+          </p:cNvCxnSpPr>
+          <p:nvPr/>
+        </p:nvCxnSpPr>
+        <p:spPr>
+          <a:xfrm>
+            <a:off x="1135602" y="1401555"/>
+            <a:ext cx="409015" cy="0"/>
+          </a:xfrm>
+          <a:prstGeom prst="straightConnector1">
+            <a:avLst/>
+          </a:prstGeom>
+          <a:ln cap="rnd">
+            <a:solidFill>
+              <a:srgbClr val="086FBD"/>
+            </a:solidFill>
+            <a:round/>
+            <a:tailEnd type="triangle"/>
+          </a:ln>
+        </p:spPr>
+        <p:style>
+          <a:lnRef idx="2">
+            <a:schemeClr val="accent1"/>
+          </a:lnRef>
+          <a:fillRef idx="0">
+            <a:schemeClr val="accent1"/>
+          </a:fillRef>
+          <a:effectRef idx="1">
+            <a:schemeClr val="accent1"/>
+          </a:effectRef>
+          <a:fontRef idx="minor">
+            <a:schemeClr val="tx1"/>
+          </a:fontRef>
+        </p:style>
+      </p:cxnSp>
+      <p:sp>
+        <p:nvSpPr>
+          <p:cNvPr id="24" name="Ellipse 23">
+            <a:extLst>
+              <a:ext uri="{FF2B5EF4-FFF2-40B4-BE49-F238E27FC236}">
+                <a16:creationId xmlns:a16="http://schemas.microsoft.com/office/drawing/2014/main" id="{E8144928-E12B-5873-4768-1A480E483DD5}"/>
+              </a:ext>
+            </a:extLst>
+          </p:cNvPr>
+          <p:cNvSpPr/>
+          <p:nvPr/>
+        </p:nvSpPr>
+        <p:spPr>
+          <a:xfrm rot="16200000" flipH="1">
+            <a:off x="1777037" y="2323351"/>
+            <a:ext cx="45720" cy="45720"/>
+          </a:xfrm>
+          <a:prstGeom prst="ellipse">
+            <a:avLst/>
+          </a:prstGeom>
+          <a:solidFill>
+            <a:schemeClr val="tx1"/>
+          </a:solidFill>
+          <a:ln>
+            <a:noFill/>
+          </a:ln>
+        </p:spPr>
+        <p:style>
+          <a:lnRef idx="2">
+            <a:schemeClr val="accent1">
+              <a:shade val="15000"/>
+            </a:schemeClr>
+          </a:lnRef>
+          <a:fillRef idx="1">
+            <a:schemeClr val="accent1"/>
+          </a:fillRef>
+          <a:effectRef idx="0">
+            <a:schemeClr val="accent1"/>
+          </a:effectRef>
+          <a:fontRef idx="minor">
+            <a:schemeClr val="lt1"/>
+          </a:fontRef>
+        </p:style>
+        <p:txBody>
+          <a:bodyPr rtlCol="0" anchor="ctr"/>
+          <a:lstStyle/>
+          <a:p>
+            <a:pPr algn="ctr"/>
+            <a:endParaRPr lang="de-DE" dirty="0"/>
+          </a:p>
+        </p:txBody>
+      </p:sp>
+      <p:sp>
+        <p:nvSpPr>
+          <p:cNvPr id="27" name="Ellipse 26">
+            <a:extLst>
+              <a:ext uri="{FF2B5EF4-FFF2-40B4-BE49-F238E27FC236}">
+                <a16:creationId xmlns:a16="http://schemas.microsoft.com/office/drawing/2014/main" id="{64158193-68E2-F192-7A83-D1911B10C46E}"/>
+              </a:ext>
+            </a:extLst>
+          </p:cNvPr>
+          <p:cNvSpPr/>
+          <p:nvPr/>
+        </p:nvSpPr>
+        <p:spPr>
+          <a:xfrm rot="16200000" flipH="1">
+            <a:off x="1777037" y="1231379"/>
+            <a:ext cx="45720" cy="45720"/>
+          </a:xfrm>
+          <a:prstGeom prst="ellipse">
+            <a:avLst/>
+          </a:prstGeom>
+          <a:solidFill>
+            <a:schemeClr val="tx1"/>
+          </a:solidFill>
+          <a:ln>
+            <a:noFill/>
+          </a:ln>
+        </p:spPr>
+        <p:style>
+          <a:lnRef idx="2">
+            <a:schemeClr val="accent1">
+              <a:shade val="15000"/>
+            </a:schemeClr>
+          </a:lnRef>
+          <a:fillRef idx="1">
+            <a:schemeClr val="accent1"/>
+          </a:fillRef>
+          <a:effectRef idx="0">
+            <a:schemeClr val="accent1"/>
+          </a:effectRef>
+          <a:fontRef idx="minor">
+            <a:schemeClr val="lt1"/>
+          </a:fontRef>
+        </p:style>
+        <p:txBody>
+          <a:bodyPr rtlCol="0" anchor="ctr"/>
+          <a:lstStyle/>
+          <a:p>
+            <a:pPr algn="ctr"/>
+            <a:endParaRPr lang="de-DE" dirty="0"/>
+          </a:p>
+        </p:txBody>
+      </p:sp>
+      <p:cxnSp>
+        <p:nvCxnSpPr>
+          <p:cNvPr id="28" name="Gerade Verbindung mit Pfeil 27">
+            <a:extLst>
+              <a:ext uri="{FF2B5EF4-FFF2-40B4-BE49-F238E27FC236}">
+                <a16:creationId xmlns:a16="http://schemas.microsoft.com/office/drawing/2014/main" id="{10A6B60B-78C9-55B1-7D96-E48F41A73BFB}"/>
+              </a:ext>
+            </a:extLst>
+          </p:cNvPr>
+          <p:cNvCxnSpPr>
+            <a:cxnSpLocks/>
+          </p:cNvCxnSpPr>
+          <p:nvPr/>
+        </p:nvCxnSpPr>
+        <p:spPr>
+          <a:xfrm>
+            <a:off x="1799701" y="1946910"/>
+            <a:ext cx="0" cy="382156"/>
+          </a:xfrm>
+          <a:prstGeom prst="straightConnector1">
+            <a:avLst/>
+          </a:prstGeom>
+          <a:ln w="15875" cap="rnd">
+            <a:solidFill>
+              <a:schemeClr val="tx1"/>
+            </a:solidFill>
+            <a:round/>
+            <a:tailEnd type="none" w="med" len="med"/>
+          </a:ln>
+        </p:spPr>
+        <p:style>
+          <a:lnRef idx="2">
+            <a:schemeClr val="accent1"/>
+          </a:lnRef>
+          <a:fillRef idx="0">
+            <a:schemeClr val="accent1"/>
+          </a:fillRef>
+          <a:effectRef idx="1">
+            <a:schemeClr val="accent1"/>
+          </a:effectRef>
+          <a:fontRef idx="minor">
+            <a:schemeClr val="tx1"/>
+          </a:fontRef>
+        </p:style>
+      </p:cxnSp>
+      <p:cxnSp>
+        <p:nvCxnSpPr>
+          <p:cNvPr id="32" name="Gerade Verbindung mit Pfeil 31">
+            <a:extLst>
+              <a:ext uri="{FF2B5EF4-FFF2-40B4-BE49-F238E27FC236}">
+                <a16:creationId xmlns:a16="http://schemas.microsoft.com/office/drawing/2014/main" id="{23AB872C-9EA0-92DF-EDCE-05A1E236532B}"/>
+              </a:ext>
+            </a:extLst>
+          </p:cNvPr>
+          <p:cNvCxnSpPr>
+            <a:cxnSpLocks/>
+          </p:cNvCxnSpPr>
+          <p:nvPr/>
+        </p:nvCxnSpPr>
+        <p:spPr>
+          <a:xfrm>
+            <a:off x="1799897" y="1270110"/>
+            <a:ext cx="0" cy="372000"/>
+          </a:xfrm>
+          <a:prstGeom prst="straightConnector1">
+            <a:avLst/>
+          </a:prstGeom>
+          <a:ln w="15875" cap="rnd">
+            <a:solidFill>
+              <a:schemeClr val="tx1"/>
+            </a:solidFill>
+            <a:round/>
+            <a:tailEnd type="none" w="med" len="med"/>
+          </a:ln>
+        </p:spPr>
+        <p:style>
+          <a:lnRef idx="2">
+            <a:schemeClr val="accent1"/>
+          </a:lnRef>
+          <a:fillRef idx="0">
+            <a:schemeClr val="accent1"/>
+          </a:fillRef>
+          <a:effectRef idx="1">
+            <a:schemeClr val="accent1"/>
+          </a:effectRef>
+          <a:fontRef idx="minor">
+            <a:schemeClr val="tx1"/>
+          </a:fontRef>
+        </p:style>
+      </p:cxnSp>
+      <p:grpSp>
+        <p:nvGrpSpPr>
+          <p:cNvPr id="45" name="Gruppieren 44">
+            <a:extLst>
+              <a:ext uri="{FF2B5EF4-FFF2-40B4-BE49-F238E27FC236}">
+                <a16:creationId xmlns:a16="http://schemas.microsoft.com/office/drawing/2014/main" id="{0CC48418-3562-AF94-AD53-0C88A0C813B5}"/>
+              </a:ext>
+            </a:extLst>
+          </p:cNvPr>
+          <p:cNvGrpSpPr/>
+          <p:nvPr/>
+        </p:nvGrpSpPr>
+        <p:grpSpPr>
+          <a:xfrm rot="5400000">
+            <a:off x="1559700" y="1712058"/>
+            <a:ext cx="355078" cy="171207"/>
+            <a:chOff x="1200803" y="2710131"/>
+            <a:chExt cx="355078" cy="171207"/>
+          </a:xfrm>
+        </p:grpSpPr>
+        <p:sp>
+          <p:nvSpPr>
+            <p:cNvPr id="38" name="Ellipse 37">
+              <a:extLst>
+                <a:ext uri="{FF2B5EF4-FFF2-40B4-BE49-F238E27FC236}">
+                  <a16:creationId xmlns:a16="http://schemas.microsoft.com/office/drawing/2014/main" id="{8C48B4D8-DAFA-35D7-2362-3E69201CD970}"/>
+                </a:ext>
+              </a:extLst>
+            </p:cNvPr>
+            <p:cNvSpPr/>
+            <p:nvPr/>
+          </p:nvSpPr>
+          <p:spPr>
+            <a:xfrm rot="16200000" flipH="1">
+              <a:off x="1510161" y="2710131"/>
+              <a:ext cx="45720" cy="45720"/>
+            </a:xfrm>
+            <a:prstGeom prst="ellipse">
+              <a:avLst/>
+            </a:prstGeom>
+            <a:solidFill>
+              <a:schemeClr val="tx1"/>
+            </a:solidFill>
+            <a:ln>
+              <a:noFill/>
+            </a:ln>
+          </p:spPr>
+          <p:style>
+            <a:lnRef idx="2">
+              <a:schemeClr val="accent1">
+                <a:shade val="15000"/>
+              </a:schemeClr>
+            </a:lnRef>
+            <a:fillRef idx="1">
+              <a:schemeClr val="accent1"/>
+            </a:fillRef>
+            <a:effectRef idx="0">
+              <a:schemeClr val="accent1"/>
+            </a:effectRef>
+            <a:fontRef idx="minor">
+              <a:schemeClr val="lt1"/>
+            </a:fontRef>
+          </p:style>
+          <p:txBody>
+            <a:bodyPr rtlCol="0" anchor="ctr"/>
+            <a:lstStyle/>
+            <a:p>
+              <a:pPr algn="ctr"/>
+              <a:endParaRPr lang="de-DE" dirty="0"/>
+            </a:p>
+          </p:txBody>
+        </p:sp>
+        <p:cxnSp>
+          <p:nvCxnSpPr>
+            <p:cNvPr id="39" name="Gerade Verbindung mit Pfeil 38">
+              <a:extLst>
+                <a:ext uri="{FF2B5EF4-FFF2-40B4-BE49-F238E27FC236}">
+                  <a16:creationId xmlns:a16="http://schemas.microsoft.com/office/drawing/2014/main" id="{34608C6C-09BF-DAE5-1B10-4185C84D4A68}"/>
+                </a:ext>
+              </a:extLst>
+            </p:cNvPr>
+            <p:cNvCxnSpPr>
+              <a:cxnSpLocks/>
+            </p:cNvCxnSpPr>
+            <p:nvPr/>
+          </p:nvCxnSpPr>
+          <p:spPr>
+            <a:xfrm rot="16200000">
+              <a:off x="1325991" y="2676503"/>
+              <a:ext cx="149260" cy="260410"/>
+            </a:xfrm>
+            <a:prstGeom prst="straightConnector1">
+              <a:avLst/>
+            </a:prstGeom>
+            <a:ln w="15875" cap="rnd">
+              <a:solidFill>
+                <a:schemeClr val="tx1"/>
+              </a:solidFill>
+              <a:round/>
+              <a:tailEnd type="none" w="med" len="med"/>
+            </a:ln>
+          </p:spPr>
+          <p:style>
+            <a:lnRef idx="2">
+              <a:schemeClr val="accent1"/>
+            </a:lnRef>
+            <a:fillRef idx="0">
+              <a:schemeClr val="accent1"/>
+            </a:fillRef>
+            <a:effectRef idx="1">
+              <a:schemeClr val="accent1"/>
+            </a:effectRef>
+            <a:fontRef idx="minor">
+              <a:schemeClr val="tx1"/>
+            </a:fontRef>
+          </p:style>
+        </p:cxnSp>
+        <p:sp>
+          <p:nvSpPr>
+            <p:cNvPr id="44" name="Ellipse 43">
+              <a:extLst>
+                <a:ext uri="{FF2B5EF4-FFF2-40B4-BE49-F238E27FC236}">
+                  <a16:creationId xmlns:a16="http://schemas.microsoft.com/office/drawing/2014/main" id="{93B481E0-8C3E-E472-D901-518F79D1C714}"/>
+                </a:ext>
+              </a:extLst>
+            </p:cNvPr>
+            <p:cNvSpPr/>
+            <p:nvPr/>
+          </p:nvSpPr>
+          <p:spPr>
+            <a:xfrm rot="16200000" flipH="1">
+              <a:off x="1200803" y="2710131"/>
+              <a:ext cx="45720" cy="45720"/>
+            </a:xfrm>
+            <a:prstGeom prst="ellipse">
+              <a:avLst/>
+            </a:prstGeom>
+            <a:solidFill>
+              <a:schemeClr val="tx1"/>
+            </a:solidFill>
+            <a:ln>
+              <a:noFill/>
+            </a:ln>
+          </p:spPr>
+          <p:style>
+            <a:lnRef idx="2">
+              <a:schemeClr val="accent1">
+                <a:shade val="15000"/>
+              </a:schemeClr>
+            </a:lnRef>
+            <a:fillRef idx="1">
+              <a:schemeClr val="accent1"/>
+            </a:fillRef>
+            <a:effectRef idx="0">
+              <a:schemeClr val="accent1"/>
+            </a:effectRef>
+            <a:fontRef idx="minor">
+              <a:schemeClr val="lt1"/>
+            </a:fontRef>
+          </p:style>
+          <p:txBody>
+            <a:bodyPr rtlCol="0" anchor="ctr"/>
+            <a:lstStyle/>
+            <a:p>
+              <a:pPr algn="ctr"/>
+              <a:endParaRPr lang="de-DE" dirty="0"/>
+            </a:p>
+          </p:txBody>
+        </p:sp>
+      </p:grpSp>
+      <p:sp>
+        <p:nvSpPr>
+          <p:cNvPr id="47" name="Bogen 46">
+            <a:extLst>
+              <a:ext uri="{FF2B5EF4-FFF2-40B4-BE49-F238E27FC236}">
+                <a16:creationId xmlns:a16="http://schemas.microsoft.com/office/drawing/2014/main" id="{0A81164E-5B87-1028-857A-2D404959285C}"/>
+              </a:ext>
+            </a:extLst>
+          </p:cNvPr>
+          <p:cNvSpPr/>
+          <p:nvPr/>
+        </p:nvSpPr>
+        <p:spPr>
+          <a:xfrm>
+            <a:off x="1632669" y="1790757"/>
+            <a:ext cx="325755" cy="325755"/>
+          </a:xfrm>
+          <a:prstGeom prst="arc">
+            <a:avLst>
+              <a:gd name="adj1" fmla="val 12099626"/>
+              <a:gd name="adj2" fmla="val 16577799"/>
+            </a:avLst>
+          </a:prstGeom>
+          <a:ln w="9525" cap="rnd">
+            <a:solidFill>
+              <a:schemeClr val="accent2"/>
+            </a:solidFill>
+            <a:round/>
+            <a:headEnd type="triangle" w="sm" len="sm"/>
+            <a:tailEnd type="none" w="sm" len="sm"/>
+          </a:ln>
+        </p:spPr>
+        <p:style>
+          <a:lnRef idx="2">
+            <a:schemeClr val="accent1"/>
+          </a:lnRef>
+          <a:fillRef idx="0">
+            <a:schemeClr val="accent1"/>
+          </a:fillRef>
+          <a:effectRef idx="1">
+            <a:schemeClr val="accent1"/>
+          </a:effectRef>
+          <a:fontRef idx="minor">
+            <a:schemeClr val="tx1"/>
+          </a:fontRef>
+        </p:style>
+        <p:txBody>
+          <a:bodyPr rtlCol="0" anchor="ctr"/>
+          <a:lstStyle/>
+          <a:p>
+            <a:pPr algn="ctr"/>
+            <a:endParaRPr lang="de-DE"/>
+          </a:p>
+        </p:txBody>
+      </p:sp>
+      <p:sp>
+        <p:nvSpPr>
+          <p:cNvPr id="48" name="Textfeld 47">
+            <a:extLst>
+              <a:ext uri="{FF2B5EF4-FFF2-40B4-BE49-F238E27FC236}">
+                <a16:creationId xmlns:a16="http://schemas.microsoft.com/office/drawing/2014/main" id="{496D8AA2-A1DA-8EB2-F4F4-D0D90470CDF5}"/>
+              </a:ext>
+            </a:extLst>
+          </p:cNvPr>
+          <p:cNvSpPr txBox="1"/>
+          <p:nvPr/>
+        </p:nvSpPr>
+        <p:spPr>
+          <a:xfrm>
+            <a:off x="2270280" y="1678365"/>
+            <a:ext cx="472290" cy="261610"/>
+          </a:xfrm>
+          <a:prstGeom prst="rect">
+            <a:avLst/>
+          </a:prstGeom>
+          <a:noFill/>
+        </p:spPr>
+        <p:txBody>
+          <a:bodyPr wrap="square" rtlCol="0">
+            <a:spAutoFit/>
+          </a:bodyPr>
+          <a:lstStyle/>
+          <a:p>
+            <a:r>
+              <a:rPr lang="de-DE" sz="1100" i="1" dirty="0" err="1">
+                <a:solidFill>
+                  <a:srgbClr val="FF0000"/>
+                </a:solidFill>
+                <a:latin typeface="CMU Serif" panose="02000603000000000000" pitchFamily="2" charset="0"/>
+                <a:ea typeface="CMU Serif" panose="02000603000000000000" pitchFamily="2" charset="0"/>
+                <a:cs typeface="CMU Serif" panose="02000603000000000000" pitchFamily="2" charset="0"/>
+              </a:rPr>
+              <a:t>i</a:t>
+            </a:r>
+            <a:r>
+              <a:rPr lang="de-DE" sz="1100" baseline="-25000" dirty="0" err="1">
+                <a:solidFill>
+                  <a:srgbClr val="FF0000"/>
+                </a:solidFill>
+                <a:latin typeface="CMU Serif" panose="02000603000000000000" pitchFamily="2" charset="0"/>
+                <a:ea typeface="CMU Serif" panose="02000603000000000000" pitchFamily="2" charset="0"/>
+                <a:cs typeface="CMU Serif" panose="02000603000000000000" pitchFamily="2" charset="0"/>
+              </a:rPr>
+              <a:t>L</a:t>
+            </a:r>
+            <a:r>
+              <a:rPr lang="de-DE" sz="1100" dirty="0">
+                <a:solidFill>
+                  <a:srgbClr val="FF0000"/>
+                </a:solidFill>
+                <a:latin typeface="CMU Serif" panose="02000603000000000000" pitchFamily="2" charset="0"/>
+                <a:ea typeface="CMU Serif" panose="02000603000000000000" pitchFamily="2" charset="0"/>
+                <a:cs typeface="CMU Serif" panose="02000603000000000000" pitchFamily="2" charset="0"/>
+              </a:rPr>
+              <a:t>(</a:t>
+            </a:r>
+            <a:r>
+              <a:rPr lang="de-DE" sz="1100" i="1" dirty="0">
+                <a:solidFill>
+                  <a:srgbClr val="FF0000"/>
+                </a:solidFill>
+                <a:latin typeface="CMU Serif" panose="02000603000000000000" pitchFamily="2" charset="0"/>
+                <a:ea typeface="CMU Serif" panose="02000603000000000000" pitchFamily="2" charset="0"/>
+                <a:cs typeface="CMU Serif" panose="02000603000000000000" pitchFamily="2" charset="0"/>
+              </a:rPr>
+              <a:t>t</a:t>
+            </a:r>
+            <a:r>
+              <a:rPr lang="de-DE" sz="1100" dirty="0">
+                <a:solidFill>
+                  <a:srgbClr val="FF0000"/>
+                </a:solidFill>
+                <a:latin typeface="CMU Serif" panose="02000603000000000000" pitchFamily="2" charset="0"/>
+                <a:ea typeface="CMU Serif" panose="02000603000000000000" pitchFamily="2" charset="0"/>
+                <a:cs typeface="CMU Serif" panose="02000603000000000000" pitchFamily="2" charset="0"/>
+              </a:rPr>
+              <a:t>)</a:t>
+            </a:r>
+            <a:endParaRPr lang="de-DE" sz="1100" baseline="-25000" dirty="0">
+              <a:solidFill>
+                <a:srgbClr val="FF0000"/>
+              </a:solidFill>
+              <a:latin typeface="CMU Serif" panose="02000603000000000000" pitchFamily="2" charset="0"/>
+              <a:ea typeface="CMU Serif" panose="02000603000000000000" pitchFamily="2" charset="0"/>
+              <a:cs typeface="CMU Serif" panose="02000603000000000000" pitchFamily="2" charset="0"/>
+            </a:endParaRPr>
+          </a:p>
+        </p:txBody>
+      </p:sp>
+      <p:cxnSp>
+        <p:nvCxnSpPr>
+          <p:cNvPr id="49" name="Gerade Verbindung mit Pfeil 48">
+            <a:extLst>
+              <a:ext uri="{FF2B5EF4-FFF2-40B4-BE49-F238E27FC236}">
+                <a16:creationId xmlns:a16="http://schemas.microsoft.com/office/drawing/2014/main" id="{B728796A-BA0D-31A3-CD64-A35D9FFF6B95}"/>
+              </a:ext>
+            </a:extLst>
+          </p:cNvPr>
+          <p:cNvCxnSpPr>
+            <a:cxnSpLocks/>
+          </p:cNvCxnSpPr>
+          <p:nvPr/>
+        </p:nvCxnSpPr>
+        <p:spPr>
+          <a:xfrm>
+            <a:off x="2702065" y="1726556"/>
+            <a:ext cx="0" cy="181294"/>
+          </a:xfrm>
+          <a:prstGeom prst="straightConnector1">
+            <a:avLst/>
+          </a:prstGeom>
+          <a:ln cap="rnd">
+            <a:solidFill>
+              <a:srgbClr val="FF0000"/>
+            </a:solidFill>
+            <a:round/>
+            <a:tailEnd type="triangle"/>
+          </a:ln>
+        </p:spPr>
+        <p:style>
+          <a:lnRef idx="2">
+            <a:schemeClr val="accent1"/>
+          </a:lnRef>
+          <a:fillRef idx="0">
+            <a:schemeClr val="accent1"/>
+          </a:fillRef>
+          <a:effectRef idx="1">
+            <a:schemeClr val="accent1"/>
+          </a:effectRef>
+          <a:fontRef idx="minor">
+            <a:schemeClr val="tx1"/>
+          </a:fontRef>
+        </p:style>
+      </p:cxnSp>
+    </p:spTree>
+    <p:extLst>
+      <p:ext uri="{BB962C8B-B14F-4D97-AF65-F5344CB8AC3E}">
+        <p14:creationId xmlns:p14="http://schemas.microsoft.com/office/powerpoint/2010/main" val="3238569131"/>
+      </p:ext>
+    </p:extLst>
+  </p:cSld>
+  <p:clrMapOvr>
+    <a:masterClrMapping/>
+  </p:clrMapOvr>
+</p:sld>
+</file>
+
+<file path=ppt/slides/slide25.xml><?xml version="1.0" encoding="utf-8"?>
+<p:sld xmlns:a="http://schemas.openxmlformats.org/drawingml/2006/main" xmlns:r="http://schemas.openxmlformats.org/officeDocument/2006/relationships" xmlns:p="http://schemas.openxmlformats.org/presentationml/2006/main">
+  <p:cSld>
+    <p:spTree>
+      <p:nvGrpSpPr>
+        <p:cNvPr id="1" name="">
+          <a:extLst>
+            <a:ext uri="{FF2B5EF4-FFF2-40B4-BE49-F238E27FC236}">
+              <a16:creationId xmlns:a16="http://schemas.microsoft.com/office/drawing/2014/main" id="{12A603F6-C6C5-B47E-3FD1-03034BA7FB68}"/>
+            </a:ext>
+          </a:extLst>
+        </p:cNvPr>
+        <p:cNvGrpSpPr/>
+        <p:nvPr/>
+      </p:nvGrpSpPr>
+      <p:grpSpPr>
+        <a:xfrm>
+          <a:off x="0" y="0"/>
+          <a:ext cx="0" cy="0"/>
+          <a:chOff x="0" y="0"/>
+          <a:chExt cx="0" cy="0"/>
+        </a:xfrm>
+      </p:grpSpPr>
+      <p:sp>
+        <p:nvSpPr>
+          <p:cNvPr id="15" name="Textfeld 14">
+            <a:extLst>
+              <a:ext uri="{FF2B5EF4-FFF2-40B4-BE49-F238E27FC236}">
+                <a16:creationId xmlns:a16="http://schemas.microsoft.com/office/drawing/2014/main" id="{F141743F-E639-F3FD-40EE-8381803433C9}"/>
+              </a:ext>
+            </a:extLst>
+          </p:cNvPr>
+          <p:cNvSpPr txBox="1"/>
+          <p:nvPr/>
+        </p:nvSpPr>
+        <p:spPr>
+          <a:xfrm>
+            <a:off x="2117146" y="1921724"/>
+            <a:ext cx="341666" cy="261610"/>
+          </a:xfrm>
+          <a:prstGeom prst="rect">
+            <a:avLst/>
+          </a:prstGeom>
+          <a:noFill/>
+        </p:spPr>
+        <p:txBody>
+          <a:bodyPr wrap="square" rtlCol="0">
+            <a:spAutoFit/>
+          </a:bodyPr>
+          <a:lstStyle/>
+          <a:p>
+            <a:r>
+              <a:rPr lang="de-DE" sz="1100" i="1" dirty="0">
+                <a:solidFill>
+                  <a:srgbClr val="086FBD"/>
+                </a:solidFill>
+                <a:latin typeface="CMU Serif" panose="02000603000000000000" pitchFamily="2" charset="0"/>
+                <a:ea typeface="CMU Serif" panose="02000603000000000000" pitchFamily="2" charset="0"/>
+                <a:cs typeface="CMU Serif" panose="02000603000000000000" pitchFamily="2" charset="0"/>
+              </a:rPr>
+              <a:t>û</a:t>
+            </a:r>
+            <a:endParaRPr lang="de-DE" sz="1100" baseline="-25000" dirty="0">
+              <a:solidFill>
+                <a:srgbClr val="086FBD"/>
+              </a:solidFill>
+              <a:latin typeface="CMU Serif" panose="02000603000000000000" pitchFamily="2" charset="0"/>
+              <a:ea typeface="CMU Serif" panose="02000603000000000000" pitchFamily="2" charset="0"/>
+              <a:cs typeface="CMU Serif" panose="02000603000000000000" pitchFamily="2" charset="0"/>
+            </a:endParaRPr>
+          </a:p>
+        </p:txBody>
+      </p:sp>
+      <p:sp>
+        <p:nvSpPr>
+          <p:cNvPr id="17" name="Textfeld 16">
+            <a:extLst>
+              <a:ext uri="{FF2B5EF4-FFF2-40B4-BE49-F238E27FC236}">
+                <a16:creationId xmlns:a16="http://schemas.microsoft.com/office/drawing/2014/main" id="{7A04DDEA-52FB-9FC6-B683-AE081413CA9B}"/>
+              </a:ext>
+            </a:extLst>
+          </p:cNvPr>
+          <p:cNvSpPr txBox="1"/>
+          <p:nvPr/>
+        </p:nvSpPr>
+        <p:spPr>
+          <a:xfrm>
+            <a:off x="2270280" y="1678365"/>
+            <a:ext cx="472290" cy="261610"/>
+          </a:xfrm>
+          <a:prstGeom prst="rect">
+            <a:avLst/>
+          </a:prstGeom>
+          <a:noFill/>
+        </p:spPr>
+        <p:txBody>
+          <a:bodyPr wrap="square" rtlCol="0">
+            <a:spAutoFit/>
+          </a:bodyPr>
+          <a:lstStyle/>
+          <a:p>
+            <a:r>
+              <a:rPr lang="de-DE" sz="1100" i="1" dirty="0" err="1">
+                <a:solidFill>
+                  <a:srgbClr val="FF0000"/>
+                </a:solidFill>
+                <a:latin typeface="CMU Serif" panose="02000603000000000000" pitchFamily="2" charset="0"/>
+                <a:ea typeface="CMU Serif" panose="02000603000000000000" pitchFamily="2" charset="0"/>
+                <a:cs typeface="CMU Serif" panose="02000603000000000000" pitchFamily="2" charset="0"/>
+              </a:rPr>
+              <a:t>i</a:t>
+            </a:r>
+            <a:r>
+              <a:rPr lang="de-DE" sz="1100" baseline="-25000" dirty="0" err="1">
+                <a:solidFill>
+                  <a:srgbClr val="FF0000"/>
+                </a:solidFill>
+                <a:latin typeface="CMU Serif" panose="02000603000000000000" pitchFamily="2" charset="0"/>
+                <a:ea typeface="CMU Serif" panose="02000603000000000000" pitchFamily="2" charset="0"/>
+                <a:cs typeface="CMU Serif" panose="02000603000000000000" pitchFamily="2" charset="0"/>
+              </a:rPr>
+              <a:t>L</a:t>
+            </a:r>
+            <a:r>
+              <a:rPr lang="de-DE" sz="1100" dirty="0">
+                <a:solidFill>
+                  <a:srgbClr val="FF0000"/>
+                </a:solidFill>
+                <a:latin typeface="CMU Serif" panose="02000603000000000000" pitchFamily="2" charset="0"/>
+                <a:ea typeface="CMU Serif" panose="02000603000000000000" pitchFamily="2" charset="0"/>
+                <a:cs typeface="CMU Serif" panose="02000603000000000000" pitchFamily="2" charset="0"/>
+              </a:rPr>
+              <a:t>(</a:t>
+            </a:r>
+            <a:r>
+              <a:rPr lang="de-DE" sz="1100" i="1" dirty="0">
+                <a:solidFill>
+                  <a:srgbClr val="FF0000"/>
+                </a:solidFill>
+                <a:latin typeface="CMU Serif" panose="02000603000000000000" pitchFamily="2" charset="0"/>
+                <a:ea typeface="CMU Serif" panose="02000603000000000000" pitchFamily="2" charset="0"/>
+                <a:cs typeface="CMU Serif" panose="02000603000000000000" pitchFamily="2" charset="0"/>
+              </a:rPr>
+              <a:t>t</a:t>
+            </a:r>
+            <a:r>
+              <a:rPr lang="de-DE" sz="1100" dirty="0">
+                <a:solidFill>
+                  <a:srgbClr val="FF0000"/>
+                </a:solidFill>
+                <a:latin typeface="CMU Serif" panose="02000603000000000000" pitchFamily="2" charset="0"/>
+                <a:ea typeface="CMU Serif" panose="02000603000000000000" pitchFamily="2" charset="0"/>
+                <a:cs typeface="CMU Serif" panose="02000603000000000000" pitchFamily="2" charset="0"/>
+              </a:rPr>
+              <a:t>)</a:t>
+            </a:r>
+            <a:endParaRPr lang="de-DE" sz="1100" baseline="-25000" dirty="0">
+              <a:solidFill>
+                <a:srgbClr val="FF0000"/>
+              </a:solidFill>
+              <a:latin typeface="CMU Serif" panose="02000603000000000000" pitchFamily="2" charset="0"/>
+              <a:ea typeface="CMU Serif" panose="02000603000000000000" pitchFamily="2" charset="0"/>
+              <a:cs typeface="CMU Serif" panose="02000603000000000000" pitchFamily="2" charset="0"/>
+            </a:endParaRPr>
+          </a:p>
+        </p:txBody>
+      </p:sp>
+      <p:sp>
+        <p:nvSpPr>
+          <p:cNvPr id="20" name="Textfeld 19">
+            <a:extLst>
+              <a:ext uri="{FF2B5EF4-FFF2-40B4-BE49-F238E27FC236}">
+                <a16:creationId xmlns:a16="http://schemas.microsoft.com/office/drawing/2014/main" id="{04598F50-A949-EF18-BAAD-08FBEE70A139}"/>
+              </a:ext>
+            </a:extLst>
+          </p:cNvPr>
+          <p:cNvSpPr txBox="1"/>
+          <p:nvPr/>
+        </p:nvSpPr>
+        <p:spPr>
+          <a:xfrm>
+            <a:off x="1152264" y="937655"/>
+            <a:ext cx="341666" cy="261610"/>
+          </a:xfrm>
+          <a:prstGeom prst="rect">
+            <a:avLst/>
+          </a:prstGeom>
+          <a:noFill/>
+        </p:spPr>
+        <p:txBody>
+          <a:bodyPr wrap="square" rtlCol="0">
+            <a:spAutoFit/>
+          </a:bodyPr>
+          <a:lstStyle/>
+          <a:p>
+            <a:pPr algn="ctr"/>
+            <a:r>
+              <a:rPr lang="de-DE" sz="1100" i="1" dirty="0">
+                <a:latin typeface="CMU Serif" panose="02000603000000000000" pitchFamily="2" charset="0"/>
+                <a:ea typeface="CMU Serif" panose="02000603000000000000" pitchFamily="2" charset="0"/>
+                <a:cs typeface="CMU Serif" panose="02000603000000000000" pitchFamily="2" charset="0"/>
+              </a:rPr>
+              <a:t>R</a:t>
+            </a:r>
+            <a:endParaRPr lang="de-DE" sz="1100" baseline="-25000" dirty="0">
+              <a:latin typeface="CMU Serif" panose="02000603000000000000" pitchFamily="2" charset="0"/>
+              <a:ea typeface="CMU Serif" panose="02000603000000000000" pitchFamily="2" charset="0"/>
+              <a:cs typeface="CMU Serif" panose="02000603000000000000" pitchFamily="2" charset="0"/>
+            </a:endParaRPr>
+          </a:p>
+        </p:txBody>
+      </p:sp>
+      <p:cxnSp>
+        <p:nvCxnSpPr>
+          <p:cNvPr id="30" name="Gerade Verbindung mit Pfeil 29">
+            <a:extLst>
+              <a:ext uri="{FF2B5EF4-FFF2-40B4-BE49-F238E27FC236}">
+                <a16:creationId xmlns:a16="http://schemas.microsoft.com/office/drawing/2014/main" id="{DA819432-A647-6031-DCB5-371737839CDC}"/>
+              </a:ext>
+            </a:extLst>
+          </p:cNvPr>
+          <p:cNvCxnSpPr>
+            <a:cxnSpLocks/>
+          </p:cNvCxnSpPr>
+          <p:nvPr/>
+        </p:nvCxnSpPr>
+        <p:spPr>
+          <a:xfrm>
+            <a:off x="2009361" y="2163555"/>
+            <a:ext cx="497064" cy="0"/>
+          </a:xfrm>
+          <a:prstGeom prst="straightConnector1">
+            <a:avLst/>
+          </a:prstGeom>
+          <a:ln cap="rnd">
+            <a:solidFill>
+              <a:srgbClr val="086FBD"/>
+            </a:solidFill>
+            <a:round/>
+            <a:tailEnd type="triangle"/>
+          </a:ln>
+        </p:spPr>
+        <p:style>
+          <a:lnRef idx="2">
+            <a:schemeClr val="accent1"/>
+          </a:lnRef>
+          <a:fillRef idx="0">
+            <a:schemeClr val="accent1"/>
+          </a:fillRef>
+          <a:effectRef idx="1">
+            <a:schemeClr val="accent1"/>
+          </a:effectRef>
+          <a:fontRef idx="minor">
+            <a:schemeClr val="tx1"/>
+          </a:fontRef>
+        </p:style>
+      </p:cxnSp>
+      <p:sp>
+        <p:nvSpPr>
+          <p:cNvPr id="34" name="Textfeld 33">
+            <a:extLst>
+              <a:ext uri="{FF2B5EF4-FFF2-40B4-BE49-F238E27FC236}">
+                <a16:creationId xmlns:a16="http://schemas.microsoft.com/office/drawing/2014/main" id="{3D89649C-44FD-43D5-35DF-7FA356FAB835}"/>
+              </a:ext>
+            </a:extLst>
+          </p:cNvPr>
+          <p:cNvSpPr txBox="1"/>
+          <p:nvPr/>
+        </p:nvSpPr>
+        <p:spPr>
+          <a:xfrm>
+            <a:off x="1095511" y="1423503"/>
+            <a:ext cx="526326" cy="261610"/>
+          </a:xfrm>
+          <a:prstGeom prst="rect">
+            <a:avLst/>
+          </a:prstGeom>
+          <a:noFill/>
+        </p:spPr>
+        <p:txBody>
+          <a:bodyPr wrap="square" rtlCol="0">
+            <a:spAutoFit/>
+          </a:bodyPr>
+          <a:lstStyle/>
+          <a:p>
+            <a:r>
+              <a:rPr lang="de-DE" sz="1100" i="1" dirty="0" err="1">
+                <a:solidFill>
+                  <a:srgbClr val="086FBD"/>
+                </a:solidFill>
+                <a:latin typeface="CMU Serif" panose="02000603000000000000" pitchFamily="2" charset="0"/>
+                <a:ea typeface="CMU Serif" panose="02000603000000000000" pitchFamily="2" charset="0"/>
+                <a:cs typeface="CMU Serif" panose="02000603000000000000" pitchFamily="2" charset="0"/>
+              </a:rPr>
+              <a:t>u</a:t>
+            </a:r>
+            <a:r>
+              <a:rPr lang="de-DE" sz="1100" baseline="-25000" dirty="0" err="1">
+                <a:solidFill>
+                  <a:srgbClr val="086FBD"/>
+                </a:solidFill>
+                <a:latin typeface="CMU Serif" panose="02000603000000000000" pitchFamily="2" charset="0"/>
+                <a:ea typeface="CMU Serif" panose="02000603000000000000" pitchFamily="2" charset="0"/>
+                <a:cs typeface="CMU Serif" panose="02000603000000000000" pitchFamily="2" charset="0"/>
+              </a:rPr>
+              <a:t>R</a:t>
+            </a:r>
+            <a:r>
+              <a:rPr lang="de-DE" sz="1100" dirty="0">
+                <a:solidFill>
+                  <a:srgbClr val="086FBD"/>
+                </a:solidFill>
+                <a:latin typeface="CMU Serif" panose="02000603000000000000" pitchFamily="2" charset="0"/>
+                <a:ea typeface="CMU Serif" panose="02000603000000000000" pitchFamily="2" charset="0"/>
+                <a:cs typeface="CMU Serif" panose="02000603000000000000" pitchFamily="2" charset="0"/>
+              </a:rPr>
+              <a:t>(</a:t>
+            </a:r>
+            <a:r>
+              <a:rPr lang="de-DE" sz="1100" i="1" dirty="0">
+                <a:solidFill>
+                  <a:srgbClr val="086FBD"/>
+                </a:solidFill>
+                <a:latin typeface="CMU Serif" panose="02000603000000000000" pitchFamily="2" charset="0"/>
+                <a:ea typeface="CMU Serif" panose="02000603000000000000" pitchFamily="2" charset="0"/>
+                <a:cs typeface="CMU Serif" panose="02000603000000000000" pitchFamily="2" charset="0"/>
+              </a:rPr>
+              <a:t>t</a:t>
+            </a:r>
+            <a:r>
+              <a:rPr lang="de-DE" sz="1100" dirty="0">
+                <a:solidFill>
+                  <a:srgbClr val="086FBD"/>
+                </a:solidFill>
+                <a:latin typeface="CMU Serif" panose="02000603000000000000" pitchFamily="2" charset="0"/>
+                <a:ea typeface="CMU Serif" panose="02000603000000000000" pitchFamily="2" charset="0"/>
+                <a:cs typeface="CMU Serif" panose="02000603000000000000" pitchFamily="2" charset="0"/>
+              </a:rPr>
+              <a:t>)</a:t>
+            </a:r>
+          </a:p>
+        </p:txBody>
+      </p:sp>
+      <p:sp>
+        <p:nvSpPr>
+          <p:cNvPr id="4" name="Rechteck 3">
+            <a:extLst>
+              <a:ext uri="{FF2B5EF4-FFF2-40B4-BE49-F238E27FC236}">
+                <a16:creationId xmlns:a16="http://schemas.microsoft.com/office/drawing/2014/main" id="{31E3E778-B94A-63FF-24C6-0A41ED3B9D16}"/>
+              </a:ext>
+            </a:extLst>
+          </p:cNvPr>
+          <p:cNvSpPr/>
+          <p:nvPr/>
+        </p:nvSpPr>
+        <p:spPr>
+          <a:xfrm rot="16200000">
+            <a:off x="1253123" y="898184"/>
+            <a:ext cx="1094135" cy="1803748"/>
+          </a:xfrm>
+          <a:prstGeom prst="rect">
+            <a:avLst/>
+          </a:prstGeom>
+          <a:noFill/>
+          <a:ln w="15875" cap="rnd">
+            <a:solidFill>
+              <a:schemeClr val="tx1"/>
+            </a:solidFill>
+            <a:round/>
+          </a:ln>
+        </p:spPr>
+        <p:style>
+          <a:lnRef idx="2">
+            <a:schemeClr val="accent1">
+              <a:shade val="15000"/>
+            </a:schemeClr>
+          </a:lnRef>
+          <a:fillRef idx="1">
+            <a:schemeClr val="accent1"/>
+          </a:fillRef>
+          <a:effectRef idx="0">
+            <a:schemeClr val="accent1"/>
+          </a:effectRef>
+          <a:fontRef idx="minor">
+            <a:schemeClr val="lt1"/>
+          </a:fontRef>
+        </p:style>
+        <p:txBody>
+          <a:bodyPr rtlCol="0" anchor="ctr"/>
+          <a:lstStyle/>
+          <a:p>
+            <a:pPr algn="ctr"/>
+            <a:endParaRPr lang="de-DE" dirty="0"/>
+          </a:p>
+        </p:txBody>
+      </p:sp>
+      <p:sp>
+        <p:nvSpPr>
+          <p:cNvPr id="10" name="Rechteck 9">
+            <a:extLst>
+              <a:ext uri="{FF2B5EF4-FFF2-40B4-BE49-F238E27FC236}">
+                <a16:creationId xmlns:a16="http://schemas.microsoft.com/office/drawing/2014/main" id="{5F2CE997-F465-43DB-E70D-840C1779B970}"/>
+              </a:ext>
+            </a:extLst>
+          </p:cNvPr>
+          <p:cNvSpPr/>
+          <p:nvPr/>
+        </p:nvSpPr>
+        <p:spPr>
+          <a:xfrm rot="10800000">
+            <a:off x="1166053" y="1192433"/>
+            <a:ext cx="335280" cy="118110"/>
+          </a:xfrm>
+          <a:prstGeom prst="rect">
+            <a:avLst/>
+          </a:prstGeom>
+          <a:solidFill>
+            <a:schemeClr val="bg1"/>
+          </a:solidFill>
+          <a:ln w="15875" cap="rnd">
+            <a:solidFill>
+              <a:schemeClr val="tx1"/>
+            </a:solidFill>
+            <a:round/>
+          </a:ln>
+        </p:spPr>
+        <p:style>
+          <a:lnRef idx="2">
+            <a:schemeClr val="accent1">
+              <a:shade val="15000"/>
+            </a:schemeClr>
+          </a:lnRef>
+          <a:fillRef idx="1">
+            <a:schemeClr val="accent1"/>
+          </a:fillRef>
+          <a:effectRef idx="0">
+            <a:schemeClr val="accent1"/>
+          </a:effectRef>
+          <a:fontRef idx="minor">
+            <a:schemeClr val="lt1"/>
+          </a:fontRef>
+        </p:style>
+        <p:txBody>
+          <a:bodyPr rtlCol="0" anchor="ctr"/>
+          <a:lstStyle/>
+          <a:p>
+            <a:pPr algn="ctr"/>
+            <a:endParaRPr lang="de-DE" dirty="0"/>
+          </a:p>
+        </p:txBody>
+      </p:sp>
+      <p:sp>
+        <p:nvSpPr>
+          <p:cNvPr id="13" name="Ellipse 12">
+            <a:extLst>
+              <a:ext uri="{FF2B5EF4-FFF2-40B4-BE49-F238E27FC236}">
+                <a16:creationId xmlns:a16="http://schemas.microsoft.com/office/drawing/2014/main" id="{4E868680-1CF2-FBAE-3C09-4BDA7D8D3AD5}"/>
+              </a:ext>
+            </a:extLst>
+          </p:cNvPr>
+          <p:cNvSpPr/>
+          <p:nvPr/>
+        </p:nvSpPr>
+        <p:spPr>
+          <a:xfrm rot="16200000">
+            <a:off x="2141053" y="2232825"/>
+            <a:ext cx="228600" cy="228600"/>
+          </a:xfrm>
+          <a:prstGeom prst="ellipse">
+            <a:avLst/>
+          </a:prstGeom>
+          <a:noFill/>
+          <a:ln w="15875">
+            <a:solidFill>
+              <a:schemeClr val="tx1"/>
+            </a:solidFill>
+          </a:ln>
+        </p:spPr>
+        <p:style>
+          <a:lnRef idx="2">
+            <a:schemeClr val="accent1">
+              <a:shade val="15000"/>
+            </a:schemeClr>
+          </a:lnRef>
+          <a:fillRef idx="1">
+            <a:schemeClr val="accent1"/>
+          </a:fillRef>
+          <a:effectRef idx="0">
+            <a:schemeClr val="accent1"/>
+          </a:effectRef>
+          <a:fontRef idx="minor">
+            <a:schemeClr val="lt1"/>
+          </a:fontRef>
+        </p:style>
+        <p:txBody>
+          <a:bodyPr rtlCol="0" anchor="ctr"/>
+          <a:lstStyle/>
+          <a:p>
+            <a:pPr algn="ctr"/>
+            <a:endParaRPr lang="de-DE" dirty="0"/>
+          </a:p>
+        </p:txBody>
+      </p:sp>
+      <p:sp>
+        <p:nvSpPr>
+          <p:cNvPr id="42" name="Textfeld 41">
+            <a:extLst>
+              <a:ext uri="{FF2B5EF4-FFF2-40B4-BE49-F238E27FC236}">
+                <a16:creationId xmlns:a16="http://schemas.microsoft.com/office/drawing/2014/main" id="{BFF67F6B-EFBE-58EE-C890-56849EBB9F97}"/>
+              </a:ext>
+            </a:extLst>
+          </p:cNvPr>
+          <p:cNvSpPr txBox="1"/>
+          <p:nvPr/>
+        </p:nvSpPr>
+        <p:spPr>
+          <a:xfrm>
+            <a:off x="1032621" y="1956844"/>
+            <a:ext cx="755748" cy="261610"/>
+          </a:xfrm>
+          <a:prstGeom prst="rect">
+            <a:avLst/>
+          </a:prstGeom>
+          <a:noFill/>
+        </p:spPr>
+        <p:txBody>
+          <a:bodyPr wrap="square" rtlCol="0">
+            <a:spAutoFit/>
+          </a:bodyPr>
+          <a:lstStyle/>
+          <a:p>
+            <a:pPr algn="ctr"/>
+            <a:r>
+              <a:rPr lang="de-DE" sz="1100" dirty="0">
+                <a:solidFill>
+                  <a:schemeClr val="accent2"/>
+                </a:solidFill>
+                <a:latin typeface="CMU Serif" panose="02000603000000000000" pitchFamily="2" charset="0"/>
+                <a:ea typeface="CMU Serif" panose="02000603000000000000" pitchFamily="2" charset="0"/>
+                <a:cs typeface="CMU Serif" panose="02000603000000000000" pitchFamily="2" charset="0"/>
+              </a:rPr>
+              <a:t>bei </a:t>
+            </a:r>
+            <a:r>
+              <a:rPr lang="de-DE" sz="1100" i="1" dirty="0">
+                <a:solidFill>
+                  <a:schemeClr val="accent2"/>
+                </a:solidFill>
+                <a:latin typeface="CMU Serif" panose="02000603000000000000" pitchFamily="2" charset="0"/>
+                <a:ea typeface="CMU Serif" panose="02000603000000000000" pitchFamily="2" charset="0"/>
+                <a:cs typeface="CMU Serif" panose="02000603000000000000" pitchFamily="2" charset="0"/>
+              </a:rPr>
+              <a:t>t </a:t>
+            </a:r>
+            <a:r>
+              <a:rPr lang="de-DE" sz="1100" dirty="0">
+                <a:solidFill>
+                  <a:schemeClr val="accent2"/>
+                </a:solidFill>
+                <a:latin typeface="CMU Serif" panose="02000603000000000000" pitchFamily="2" charset="0"/>
+                <a:ea typeface="CMU Serif" panose="02000603000000000000" pitchFamily="2" charset="0"/>
+                <a:cs typeface="CMU Serif" panose="02000603000000000000" pitchFamily="2" charset="0"/>
+              </a:rPr>
+              <a:t>= 0</a:t>
+            </a:r>
+            <a:endParaRPr lang="de-DE" sz="1100" baseline="-25000" dirty="0">
+              <a:solidFill>
+                <a:schemeClr val="accent2"/>
+              </a:solidFill>
+              <a:latin typeface="CMU Serif" panose="02000603000000000000" pitchFamily="2" charset="0"/>
+              <a:ea typeface="CMU Serif" panose="02000603000000000000" pitchFamily="2" charset="0"/>
+              <a:cs typeface="CMU Serif" panose="02000603000000000000" pitchFamily="2" charset="0"/>
+            </a:endParaRPr>
+          </a:p>
+        </p:txBody>
+      </p:sp>
+      <p:sp>
+        <p:nvSpPr>
+          <p:cNvPr id="43" name="Textfeld 42">
+            <a:extLst>
+              <a:ext uri="{FF2B5EF4-FFF2-40B4-BE49-F238E27FC236}">
+                <a16:creationId xmlns:a16="http://schemas.microsoft.com/office/drawing/2014/main" id="{5C3E1E94-667E-E120-441F-F02A9165FBED}"/>
+              </a:ext>
+            </a:extLst>
+          </p:cNvPr>
+          <p:cNvSpPr txBox="1"/>
+          <p:nvPr/>
+        </p:nvSpPr>
+        <p:spPr>
+          <a:xfrm>
+            <a:off x="2004950" y="1429934"/>
+            <a:ext cx="526326" cy="261610"/>
+          </a:xfrm>
+          <a:prstGeom prst="rect">
+            <a:avLst/>
+          </a:prstGeom>
+          <a:noFill/>
+        </p:spPr>
+        <p:txBody>
+          <a:bodyPr wrap="square" rtlCol="0">
+            <a:spAutoFit/>
+          </a:bodyPr>
+          <a:lstStyle/>
+          <a:p>
+            <a:r>
+              <a:rPr lang="de-DE" sz="1100" i="1" dirty="0" err="1">
+                <a:solidFill>
+                  <a:srgbClr val="086FBD"/>
+                </a:solidFill>
+                <a:latin typeface="CMU Serif" panose="02000603000000000000" pitchFamily="2" charset="0"/>
+                <a:ea typeface="CMU Serif" panose="02000603000000000000" pitchFamily="2" charset="0"/>
+                <a:cs typeface="CMU Serif" panose="02000603000000000000" pitchFamily="2" charset="0"/>
+              </a:rPr>
+              <a:t>u</a:t>
+            </a:r>
+            <a:r>
+              <a:rPr lang="de-DE" sz="1100" baseline="-25000" dirty="0" err="1">
+                <a:solidFill>
+                  <a:srgbClr val="086FBD"/>
+                </a:solidFill>
+                <a:latin typeface="CMU Serif" panose="02000603000000000000" pitchFamily="2" charset="0"/>
+                <a:ea typeface="CMU Serif" panose="02000603000000000000" pitchFamily="2" charset="0"/>
+                <a:cs typeface="CMU Serif" panose="02000603000000000000" pitchFamily="2" charset="0"/>
+              </a:rPr>
+              <a:t>L</a:t>
+            </a:r>
+            <a:r>
+              <a:rPr lang="de-DE" sz="1100" dirty="0">
+                <a:solidFill>
+                  <a:srgbClr val="086FBD"/>
+                </a:solidFill>
+                <a:latin typeface="CMU Serif" panose="02000603000000000000" pitchFamily="2" charset="0"/>
+                <a:ea typeface="CMU Serif" panose="02000603000000000000" pitchFamily="2" charset="0"/>
+                <a:cs typeface="CMU Serif" panose="02000603000000000000" pitchFamily="2" charset="0"/>
+              </a:rPr>
+              <a:t>(</a:t>
+            </a:r>
+            <a:r>
+              <a:rPr lang="de-DE" sz="1100" i="1" dirty="0">
+                <a:solidFill>
+                  <a:srgbClr val="086FBD"/>
+                </a:solidFill>
+                <a:latin typeface="CMU Serif" panose="02000603000000000000" pitchFamily="2" charset="0"/>
+                <a:ea typeface="CMU Serif" panose="02000603000000000000" pitchFamily="2" charset="0"/>
+                <a:cs typeface="CMU Serif" panose="02000603000000000000" pitchFamily="2" charset="0"/>
+              </a:rPr>
+              <a:t>t</a:t>
+            </a:r>
+            <a:r>
+              <a:rPr lang="de-DE" sz="1100" dirty="0">
+                <a:solidFill>
+                  <a:srgbClr val="086FBD"/>
+                </a:solidFill>
+                <a:latin typeface="CMU Serif" panose="02000603000000000000" pitchFamily="2" charset="0"/>
+                <a:ea typeface="CMU Serif" panose="02000603000000000000" pitchFamily="2" charset="0"/>
+                <a:cs typeface="CMU Serif" panose="02000603000000000000" pitchFamily="2" charset="0"/>
+              </a:rPr>
+              <a:t>)</a:t>
+            </a:r>
+          </a:p>
+        </p:txBody>
+      </p:sp>
+      <p:sp>
+        <p:nvSpPr>
+          <p:cNvPr id="35" name="Rechteck 34">
+            <a:extLst>
+              <a:ext uri="{FF2B5EF4-FFF2-40B4-BE49-F238E27FC236}">
+                <a16:creationId xmlns:a16="http://schemas.microsoft.com/office/drawing/2014/main" id="{C2C25B99-95B9-8F8B-2B4A-F888C02609FA}"/>
+              </a:ext>
+            </a:extLst>
+          </p:cNvPr>
+          <p:cNvSpPr/>
+          <p:nvPr/>
+        </p:nvSpPr>
+        <p:spPr>
+          <a:xfrm flipH="1">
+            <a:off x="1181235" y="2278524"/>
+            <a:ext cx="317750" cy="135424"/>
+          </a:xfrm>
+          <a:prstGeom prst="rect">
+            <a:avLst/>
+          </a:prstGeom>
+          <a:solidFill>
+            <a:schemeClr val="bg1"/>
+          </a:solidFill>
+          <a:ln w="15875" cap="rnd">
+            <a:noFill/>
+            <a:round/>
+          </a:ln>
+        </p:spPr>
+        <p:style>
+          <a:lnRef idx="2">
+            <a:schemeClr val="accent1">
+              <a:shade val="15000"/>
+            </a:schemeClr>
+          </a:lnRef>
+          <a:fillRef idx="1">
+            <a:schemeClr val="accent1"/>
+          </a:fillRef>
+          <a:effectRef idx="0">
+            <a:schemeClr val="accent1"/>
+          </a:effectRef>
+          <a:fontRef idx="minor">
+            <a:schemeClr val="lt1"/>
+          </a:fontRef>
+        </p:style>
+        <p:txBody>
+          <a:bodyPr rtlCol="0" anchor="ctr"/>
+          <a:lstStyle/>
+          <a:p>
+            <a:pPr algn="ctr"/>
+            <a:endParaRPr lang="de-DE" dirty="0"/>
+          </a:p>
+        </p:txBody>
+      </p:sp>
+      <p:sp>
+        <p:nvSpPr>
+          <p:cNvPr id="36" name="Ellipse 35">
+            <a:extLst>
+              <a:ext uri="{FF2B5EF4-FFF2-40B4-BE49-F238E27FC236}">
+                <a16:creationId xmlns:a16="http://schemas.microsoft.com/office/drawing/2014/main" id="{AB602784-DA17-EA8A-DA74-E21BC9AC02C3}"/>
+              </a:ext>
+            </a:extLst>
+          </p:cNvPr>
+          <p:cNvSpPr/>
+          <p:nvPr/>
+        </p:nvSpPr>
+        <p:spPr>
+          <a:xfrm rot="16200000" flipH="1">
+            <a:off x="1473265" y="2324265"/>
+            <a:ext cx="45720" cy="45720"/>
+          </a:xfrm>
+          <a:prstGeom prst="ellipse">
+            <a:avLst/>
+          </a:prstGeom>
+          <a:solidFill>
+            <a:schemeClr val="tx1"/>
+          </a:solidFill>
+          <a:ln>
+            <a:noFill/>
+          </a:ln>
+        </p:spPr>
+        <p:style>
+          <a:lnRef idx="2">
+            <a:schemeClr val="accent1">
+              <a:shade val="15000"/>
+            </a:schemeClr>
+          </a:lnRef>
+          <a:fillRef idx="1">
+            <a:schemeClr val="accent1"/>
+          </a:fillRef>
+          <a:effectRef idx="0">
+            <a:schemeClr val="accent1"/>
+          </a:effectRef>
+          <a:fontRef idx="minor">
+            <a:schemeClr val="lt1"/>
+          </a:fontRef>
+        </p:style>
+        <p:txBody>
+          <a:bodyPr rtlCol="0" anchor="ctr"/>
+          <a:lstStyle/>
+          <a:p>
+            <a:pPr algn="ctr"/>
+            <a:endParaRPr lang="de-DE" dirty="0"/>
+          </a:p>
+        </p:txBody>
+      </p:sp>
+      <p:cxnSp>
+        <p:nvCxnSpPr>
+          <p:cNvPr id="37" name="Gerade Verbindung mit Pfeil 36">
+            <a:extLst>
+              <a:ext uri="{FF2B5EF4-FFF2-40B4-BE49-F238E27FC236}">
+                <a16:creationId xmlns:a16="http://schemas.microsoft.com/office/drawing/2014/main" id="{0CD917A2-8DEC-BF0A-92E9-8863C3364094}"/>
+              </a:ext>
+            </a:extLst>
+          </p:cNvPr>
+          <p:cNvCxnSpPr>
+            <a:cxnSpLocks/>
+          </p:cNvCxnSpPr>
+          <p:nvPr/>
+        </p:nvCxnSpPr>
+        <p:spPr>
+          <a:xfrm flipV="1">
+            <a:off x="1238253" y="2346213"/>
+            <a:ext cx="255677" cy="147432"/>
+          </a:xfrm>
+          <a:prstGeom prst="straightConnector1">
+            <a:avLst/>
+          </a:prstGeom>
+          <a:ln w="15875" cap="rnd">
+            <a:solidFill>
+              <a:schemeClr val="tx1"/>
+            </a:solidFill>
+            <a:round/>
+            <a:tailEnd type="none" w="med" len="med"/>
+          </a:ln>
+        </p:spPr>
+        <p:style>
+          <a:lnRef idx="2">
+            <a:schemeClr val="accent1"/>
+          </a:lnRef>
+          <a:fillRef idx="0">
+            <a:schemeClr val="accent1"/>
+          </a:fillRef>
+          <a:effectRef idx="1">
+            <a:schemeClr val="accent1"/>
+          </a:effectRef>
+          <a:fontRef idx="minor">
+            <a:schemeClr val="tx1"/>
+          </a:fontRef>
+        </p:style>
+      </p:cxnSp>
+      <p:sp>
+        <p:nvSpPr>
+          <p:cNvPr id="40" name="Ellipse 39">
+            <a:extLst>
+              <a:ext uri="{FF2B5EF4-FFF2-40B4-BE49-F238E27FC236}">
+                <a16:creationId xmlns:a16="http://schemas.microsoft.com/office/drawing/2014/main" id="{3CA3446F-3352-1E84-8EE1-D666F26C8F9F}"/>
+              </a:ext>
+            </a:extLst>
+          </p:cNvPr>
+          <p:cNvSpPr/>
+          <p:nvPr/>
+        </p:nvSpPr>
+        <p:spPr>
+          <a:xfrm rot="16200000" flipH="1">
+            <a:off x="1163907" y="2324265"/>
+            <a:ext cx="45720" cy="45720"/>
+          </a:xfrm>
+          <a:prstGeom prst="ellipse">
+            <a:avLst/>
+          </a:prstGeom>
+          <a:solidFill>
+            <a:schemeClr val="tx1"/>
+          </a:solidFill>
+          <a:ln>
+            <a:noFill/>
+          </a:ln>
+        </p:spPr>
+        <p:style>
+          <a:lnRef idx="2">
+            <a:schemeClr val="accent1">
+              <a:shade val="15000"/>
+            </a:schemeClr>
+          </a:lnRef>
+          <a:fillRef idx="1">
+            <a:schemeClr val="accent1"/>
+          </a:fillRef>
+          <a:effectRef idx="0">
+            <a:schemeClr val="accent1"/>
+          </a:effectRef>
+          <a:fontRef idx="minor">
+            <a:schemeClr val="lt1"/>
+          </a:fontRef>
+        </p:style>
+        <p:txBody>
+          <a:bodyPr rtlCol="0" anchor="ctr"/>
+          <a:lstStyle/>
+          <a:p>
+            <a:pPr algn="ctr"/>
+            <a:endParaRPr lang="de-DE" dirty="0"/>
+          </a:p>
+        </p:txBody>
+      </p:sp>
+      <p:sp>
+        <p:nvSpPr>
+          <p:cNvPr id="41" name="Bogen 40">
+            <a:extLst>
+              <a:ext uri="{FF2B5EF4-FFF2-40B4-BE49-F238E27FC236}">
+                <a16:creationId xmlns:a16="http://schemas.microsoft.com/office/drawing/2014/main" id="{A562628A-000A-6FA1-E6F0-45939F3A4ED4}"/>
+              </a:ext>
+            </a:extLst>
+          </p:cNvPr>
+          <p:cNvSpPr/>
+          <p:nvPr/>
+        </p:nvSpPr>
+        <p:spPr>
+          <a:xfrm>
+            <a:off x="1331407" y="2183334"/>
+            <a:ext cx="325755" cy="325755"/>
+          </a:xfrm>
+          <a:prstGeom prst="arc">
+            <a:avLst>
+              <a:gd name="adj1" fmla="val 6809369"/>
+              <a:gd name="adj2" fmla="val 11440298"/>
+            </a:avLst>
+          </a:prstGeom>
+          <a:ln w="9525" cap="rnd">
+            <a:solidFill>
+              <a:schemeClr val="accent2"/>
+            </a:solidFill>
+            <a:round/>
+            <a:headEnd type="triangle" w="sm" len="sm"/>
+            <a:tailEnd type="none" w="sm" len="sm"/>
+          </a:ln>
+        </p:spPr>
+        <p:style>
+          <a:lnRef idx="2">
+            <a:schemeClr val="accent1"/>
+          </a:lnRef>
+          <a:fillRef idx="0">
+            <a:schemeClr val="accent1"/>
+          </a:fillRef>
+          <a:effectRef idx="1">
+            <a:schemeClr val="accent1"/>
+          </a:effectRef>
+          <a:fontRef idx="minor">
+            <a:schemeClr val="tx1"/>
+          </a:fontRef>
+        </p:style>
+        <p:txBody>
+          <a:bodyPr rtlCol="0" anchor="ctr"/>
+          <a:lstStyle/>
+          <a:p>
+            <a:pPr algn="ctr"/>
+            <a:endParaRPr lang="de-DE"/>
+          </a:p>
+        </p:txBody>
+      </p:sp>
+      <p:sp>
+        <p:nvSpPr>
+          <p:cNvPr id="6" name="Rechteck 5">
+            <a:extLst>
+              <a:ext uri="{FF2B5EF4-FFF2-40B4-BE49-F238E27FC236}">
+                <a16:creationId xmlns:a16="http://schemas.microsoft.com/office/drawing/2014/main" id="{08416C13-7943-B9FF-4571-760EE30E69B1}"/>
+              </a:ext>
+            </a:extLst>
+          </p:cNvPr>
+          <p:cNvSpPr/>
+          <p:nvPr/>
+        </p:nvSpPr>
+        <p:spPr>
+          <a:xfrm rot="10800000">
+            <a:off x="2072732" y="1192434"/>
+            <a:ext cx="335280" cy="118110"/>
+          </a:xfrm>
+          <a:prstGeom prst="rect">
+            <a:avLst/>
+          </a:prstGeom>
+          <a:solidFill>
+            <a:schemeClr val="tx1"/>
+          </a:solidFill>
+          <a:ln w="15875" cap="rnd">
+            <a:solidFill>
+              <a:schemeClr val="tx1"/>
+            </a:solidFill>
+            <a:round/>
+          </a:ln>
+        </p:spPr>
+        <p:style>
+          <a:lnRef idx="2">
+            <a:schemeClr val="accent1">
+              <a:shade val="15000"/>
+            </a:schemeClr>
+          </a:lnRef>
+          <a:fillRef idx="1">
+            <a:schemeClr val="accent1"/>
+          </a:fillRef>
+          <a:effectRef idx="0">
+            <a:schemeClr val="accent1"/>
+          </a:effectRef>
+          <a:fontRef idx="minor">
+            <a:schemeClr val="lt1"/>
+          </a:fontRef>
+        </p:style>
+        <p:txBody>
+          <a:bodyPr rtlCol="0" anchor="ctr"/>
+          <a:lstStyle/>
+          <a:p>
+            <a:pPr algn="ctr"/>
+            <a:endParaRPr lang="de-DE" dirty="0"/>
+          </a:p>
+        </p:txBody>
+      </p:sp>
+      <p:cxnSp>
+        <p:nvCxnSpPr>
+          <p:cNvPr id="9" name="Gerade Verbindung mit Pfeil 8">
+            <a:extLst>
+              <a:ext uri="{FF2B5EF4-FFF2-40B4-BE49-F238E27FC236}">
+                <a16:creationId xmlns:a16="http://schemas.microsoft.com/office/drawing/2014/main" id="{C46D86B9-933F-C035-E682-685DC2C0CC9F}"/>
+              </a:ext>
+            </a:extLst>
+          </p:cNvPr>
+          <p:cNvCxnSpPr>
+            <a:cxnSpLocks/>
+          </p:cNvCxnSpPr>
+          <p:nvPr/>
+        </p:nvCxnSpPr>
+        <p:spPr>
+          <a:xfrm>
+            <a:off x="2046024" y="1401555"/>
+            <a:ext cx="409015" cy="0"/>
+          </a:xfrm>
+          <a:prstGeom prst="straightConnector1">
+            <a:avLst/>
+          </a:prstGeom>
+          <a:ln cap="rnd">
+            <a:solidFill>
+              <a:srgbClr val="086FBD"/>
+            </a:solidFill>
+            <a:round/>
+            <a:tailEnd type="triangle"/>
+          </a:ln>
+        </p:spPr>
+        <p:style>
+          <a:lnRef idx="2">
+            <a:schemeClr val="accent1"/>
+          </a:lnRef>
+          <a:fillRef idx="0">
+            <a:schemeClr val="accent1"/>
+          </a:fillRef>
+          <a:effectRef idx="1">
+            <a:schemeClr val="accent1"/>
+          </a:effectRef>
+          <a:fontRef idx="minor">
+            <a:schemeClr val="tx1"/>
+          </a:fontRef>
+        </p:style>
+      </p:cxnSp>
+      <p:cxnSp>
+        <p:nvCxnSpPr>
+          <p:cNvPr id="16" name="Gerade Verbindung mit Pfeil 15">
+            <a:extLst>
+              <a:ext uri="{FF2B5EF4-FFF2-40B4-BE49-F238E27FC236}">
+                <a16:creationId xmlns:a16="http://schemas.microsoft.com/office/drawing/2014/main" id="{88BF8A66-352B-6B2F-60F0-09DC4E6AE51C}"/>
+              </a:ext>
+            </a:extLst>
+          </p:cNvPr>
+          <p:cNvCxnSpPr>
+            <a:cxnSpLocks/>
+          </p:cNvCxnSpPr>
+          <p:nvPr/>
+        </p:nvCxnSpPr>
+        <p:spPr>
+          <a:xfrm>
+            <a:off x="2702065" y="1726556"/>
+            <a:ext cx="0" cy="181294"/>
+          </a:xfrm>
+          <a:prstGeom prst="straightConnector1">
+            <a:avLst/>
+          </a:prstGeom>
+          <a:ln cap="rnd">
+            <a:solidFill>
+              <a:srgbClr val="FF0000"/>
+            </a:solidFill>
+            <a:round/>
+            <a:tailEnd type="triangle"/>
+          </a:ln>
+        </p:spPr>
+        <p:style>
+          <a:lnRef idx="2">
+            <a:schemeClr val="accent1"/>
+          </a:lnRef>
+          <a:fillRef idx="0">
+            <a:schemeClr val="accent1"/>
+          </a:fillRef>
+          <a:effectRef idx="1">
+            <a:schemeClr val="accent1"/>
+          </a:effectRef>
+          <a:fontRef idx="minor">
+            <a:schemeClr val="tx1"/>
+          </a:fontRef>
+        </p:style>
+      </p:cxnSp>
+      <p:sp>
+        <p:nvSpPr>
+          <p:cNvPr id="21" name="Textfeld 20">
+            <a:extLst>
+              <a:ext uri="{FF2B5EF4-FFF2-40B4-BE49-F238E27FC236}">
+                <a16:creationId xmlns:a16="http://schemas.microsoft.com/office/drawing/2014/main" id="{FEC0E150-D99D-05FF-5C74-83AF09C7F666}"/>
+              </a:ext>
+            </a:extLst>
+          </p:cNvPr>
+          <p:cNvSpPr txBox="1"/>
+          <p:nvPr/>
+        </p:nvSpPr>
+        <p:spPr>
+          <a:xfrm>
+            <a:off x="2056169" y="932319"/>
+            <a:ext cx="341666" cy="261610"/>
+          </a:xfrm>
+          <a:prstGeom prst="rect">
+            <a:avLst/>
+          </a:prstGeom>
+          <a:noFill/>
+        </p:spPr>
+        <p:txBody>
+          <a:bodyPr wrap="square" rtlCol="0">
+            <a:spAutoFit/>
+          </a:bodyPr>
+          <a:lstStyle/>
+          <a:p>
+            <a:pPr algn="ctr"/>
+            <a:r>
+              <a:rPr lang="de-DE" sz="1100" i="1" dirty="0">
+                <a:latin typeface="CMU Serif" panose="02000603000000000000" pitchFamily="2" charset="0"/>
+                <a:ea typeface="CMU Serif" panose="02000603000000000000" pitchFamily="2" charset="0"/>
+                <a:cs typeface="CMU Serif" panose="02000603000000000000" pitchFamily="2" charset="0"/>
+              </a:rPr>
+              <a:t>L</a:t>
+            </a:r>
+            <a:endParaRPr lang="de-DE" sz="1100" baseline="-25000" dirty="0">
+              <a:latin typeface="CMU Serif" panose="02000603000000000000" pitchFamily="2" charset="0"/>
+              <a:ea typeface="CMU Serif" panose="02000603000000000000" pitchFamily="2" charset="0"/>
+              <a:cs typeface="CMU Serif" panose="02000603000000000000" pitchFamily="2" charset="0"/>
+            </a:endParaRPr>
+          </a:p>
+        </p:txBody>
+      </p:sp>
+      <p:cxnSp>
+        <p:nvCxnSpPr>
+          <p:cNvPr id="23" name="Gerade Verbindung mit Pfeil 22">
+            <a:extLst>
+              <a:ext uri="{FF2B5EF4-FFF2-40B4-BE49-F238E27FC236}">
+                <a16:creationId xmlns:a16="http://schemas.microsoft.com/office/drawing/2014/main" id="{E380CEA6-ACD7-E0D9-AB94-D3151ADCBEA0}"/>
+              </a:ext>
+            </a:extLst>
+          </p:cNvPr>
+          <p:cNvCxnSpPr>
+            <a:cxnSpLocks/>
+          </p:cNvCxnSpPr>
+          <p:nvPr/>
+        </p:nvCxnSpPr>
+        <p:spPr>
+          <a:xfrm>
+            <a:off x="1135602" y="1401555"/>
+            <a:ext cx="409015" cy="0"/>
+          </a:xfrm>
+          <a:prstGeom prst="straightConnector1">
+            <a:avLst/>
+          </a:prstGeom>
+          <a:ln cap="rnd">
+            <a:solidFill>
+              <a:srgbClr val="086FBD"/>
+            </a:solidFill>
+            <a:round/>
+            <a:tailEnd type="triangle"/>
+          </a:ln>
+        </p:spPr>
+        <p:style>
+          <a:lnRef idx="2">
+            <a:schemeClr val="accent1"/>
+          </a:lnRef>
+          <a:fillRef idx="0">
+            <a:schemeClr val="accent1"/>
+          </a:fillRef>
+          <a:effectRef idx="1">
+            <a:schemeClr val="accent1"/>
+          </a:effectRef>
+          <a:fontRef idx="minor">
+            <a:schemeClr val="tx1"/>
+          </a:fontRef>
+        </p:style>
+      </p:cxnSp>
+      <p:sp>
+        <p:nvSpPr>
+          <p:cNvPr id="24" name="Ellipse 23">
+            <a:extLst>
+              <a:ext uri="{FF2B5EF4-FFF2-40B4-BE49-F238E27FC236}">
+                <a16:creationId xmlns:a16="http://schemas.microsoft.com/office/drawing/2014/main" id="{8D4CDD87-CF4E-B49F-7AD6-25DFE1C9041F}"/>
+              </a:ext>
+            </a:extLst>
+          </p:cNvPr>
+          <p:cNvSpPr/>
+          <p:nvPr/>
+        </p:nvSpPr>
+        <p:spPr>
+          <a:xfrm rot="16200000" flipH="1">
+            <a:off x="1777037" y="2323351"/>
+            <a:ext cx="45720" cy="45720"/>
+          </a:xfrm>
+          <a:prstGeom prst="ellipse">
+            <a:avLst/>
+          </a:prstGeom>
+          <a:solidFill>
+            <a:schemeClr val="tx1"/>
+          </a:solidFill>
+          <a:ln>
+            <a:noFill/>
+          </a:ln>
+        </p:spPr>
+        <p:style>
+          <a:lnRef idx="2">
+            <a:schemeClr val="accent1">
+              <a:shade val="15000"/>
+            </a:schemeClr>
+          </a:lnRef>
+          <a:fillRef idx="1">
+            <a:schemeClr val="accent1"/>
+          </a:fillRef>
+          <a:effectRef idx="0">
+            <a:schemeClr val="accent1"/>
+          </a:effectRef>
+          <a:fontRef idx="minor">
+            <a:schemeClr val="lt1"/>
+          </a:fontRef>
+        </p:style>
+        <p:txBody>
+          <a:bodyPr rtlCol="0" anchor="ctr"/>
+          <a:lstStyle/>
+          <a:p>
+            <a:pPr algn="ctr"/>
+            <a:endParaRPr lang="de-DE" dirty="0"/>
+          </a:p>
+        </p:txBody>
+      </p:sp>
+      <p:sp>
+        <p:nvSpPr>
+          <p:cNvPr id="27" name="Ellipse 26">
+            <a:extLst>
+              <a:ext uri="{FF2B5EF4-FFF2-40B4-BE49-F238E27FC236}">
+                <a16:creationId xmlns:a16="http://schemas.microsoft.com/office/drawing/2014/main" id="{C45E3C58-9B03-F4FB-CBDC-2E0CC0E10E1C}"/>
+              </a:ext>
+            </a:extLst>
+          </p:cNvPr>
+          <p:cNvSpPr/>
+          <p:nvPr/>
+        </p:nvSpPr>
+        <p:spPr>
+          <a:xfrm rot="16200000" flipH="1">
+            <a:off x="1777037" y="1231379"/>
+            <a:ext cx="45720" cy="45720"/>
+          </a:xfrm>
+          <a:prstGeom prst="ellipse">
+            <a:avLst/>
+          </a:prstGeom>
+          <a:solidFill>
+            <a:schemeClr val="tx1"/>
+          </a:solidFill>
+          <a:ln>
+            <a:noFill/>
+          </a:ln>
+        </p:spPr>
+        <p:style>
+          <a:lnRef idx="2">
+            <a:schemeClr val="accent1">
+              <a:shade val="15000"/>
+            </a:schemeClr>
+          </a:lnRef>
+          <a:fillRef idx="1">
+            <a:schemeClr val="accent1"/>
+          </a:fillRef>
+          <a:effectRef idx="0">
+            <a:schemeClr val="accent1"/>
+          </a:effectRef>
+          <a:fontRef idx="minor">
+            <a:schemeClr val="lt1"/>
+          </a:fontRef>
+        </p:style>
+        <p:txBody>
+          <a:bodyPr rtlCol="0" anchor="ctr"/>
+          <a:lstStyle/>
+          <a:p>
+            <a:pPr algn="ctr"/>
+            <a:endParaRPr lang="de-DE" dirty="0"/>
+          </a:p>
+        </p:txBody>
+      </p:sp>
+      <p:cxnSp>
+        <p:nvCxnSpPr>
+          <p:cNvPr id="28" name="Gerade Verbindung mit Pfeil 27">
+            <a:extLst>
+              <a:ext uri="{FF2B5EF4-FFF2-40B4-BE49-F238E27FC236}">
+                <a16:creationId xmlns:a16="http://schemas.microsoft.com/office/drawing/2014/main" id="{C4A4456F-3B16-F020-79EF-2DD9B152CE96}"/>
+              </a:ext>
+            </a:extLst>
+          </p:cNvPr>
+          <p:cNvCxnSpPr>
+            <a:cxnSpLocks/>
+          </p:cNvCxnSpPr>
+          <p:nvPr/>
+        </p:nvCxnSpPr>
+        <p:spPr>
+          <a:xfrm>
+            <a:off x="1799701" y="1946910"/>
+            <a:ext cx="0" cy="382156"/>
+          </a:xfrm>
+          <a:prstGeom prst="straightConnector1">
+            <a:avLst/>
+          </a:prstGeom>
+          <a:ln w="15875" cap="rnd">
+            <a:solidFill>
+              <a:schemeClr val="tx1"/>
+            </a:solidFill>
+            <a:round/>
+            <a:tailEnd type="none" w="med" len="med"/>
+          </a:ln>
+        </p:spPr>
+        <p:style>
+          <a:lnRef idx="2">
+            <a:schemeClr val="accent1"/>
+          </a:lnRef>
+          <a:fillRef idx="0">
+            <a:schemeClr val="accent1"/>
+          </a:fillRef>
+          <a:effectRef idx="1">
+            <a:schemeClr val="accent1"/>
+          </a:effectRef>
+          <a:fontRef idx="minor">
+            <a:schemeClr val="tx1"/>
+          </a:fontRef>
+        </p:style>
+      </p:cxnSp>
+      <p:cxnSp>
+        <p:nvCxnSpPr>
+          <p:cNvPr id="32" name="Gerade Verbindung mit Pfeil 31">
+            <a:extLst>
+              <a:ext uri="{FF2B5EF4-FFF2-40B4-BE49-F238E27FC236}">
+                <a16:creationId xmlns:a16="http://schemas.microsoft.com/office/drawing/2014/main" id="{DA739CD9-CA70-24BA-7F37-40EDE057E600}"/>
+              </a:ext>
+            </a:extLst>
+          </p:cNvPr>
+          <p:cNvCxnSpPr>
+            <a:cxnSpLocks/>
+          </p:cNvCxnSpPr>
+          <p:nvPr/>
+        </p:nvCxnSpPr>
+        <p:spPr>
+          <a:xfrm>
+            <a:off x="1799897" y="1270110"/>
+            <a:ext cx="0" cy="372000"/>
+          </a:xfrm>
+          <a:prstGeom prst="straightConnector1">
+            <a:avLst/>
+          </a:prstGeom>
+          <a:ln w="15875" cap="rnd">
+            <a:solidFill>
+              <a:schemeClr val="tx1"/>
+            </a:solidFill>
+            <a:round/>
+            <a:tailEnd type="none" w="med" len="med"/>
+          </a:ln>
+        </p:spPr>
+        <p:style>
+          <a:lnRef idx="2">
+            <a:schemeClr val="accent1"/>
+          </a:lnRef>
+          <a:fillRef idx="0">
+            <a:schemeClr val="accent1"/>
+          </a:fillRef>
+          <a:effectRef idx="1">
+            <a:schemeClr val="accent1"/>
+          </a:effectRef>
+          <a:fontRef idx="minor">
+            <a:schemeClr val="tx1"/>
+          </a:fontRef>
+        </p:style>
+      </p:cxnSp>
+      <p:grpSp>
+        <p:nvGrpSpPr>
+          <p:cNvPr id="45" name="Gruppieren 44">
+            <a:extLst>
+              <a:ext uri="{FF2B5EF4-FFF2-40B4-BE49-F238E27FC236}">
+                <a16:creationId xmlns:a16="http://schemas.microsoft.com/office/drawing/2014/main" id="{A8F73D0B-2DDE-6B00-7DCB-351B64A8F224}"/>
+              </a:ext>
+            </a:extLst>
+          </p:cNvPr>
+          <p:cNvGrpSpPr/>
+          <p:nvPr/>
+        </p:nvGrpSpPr>
+        <p:grpSpPr>
+          <a:xfrm rot="5400000">
+            <a:off x="1613040" y="1765398"/>
+            <a:ext cx="355078" cy="64527"/>
+            <a:chOff x="1200803" y="2710131"/>
+            <a:chExt cx="355078" cy="64527"/>
+          </a:xfrm>
+        </p:grpSpPr>
+        <p:sp>
+          <p:nvSpPr>
+            <p:cNvPr id="38" name="Ellipse 37">
+              <a:extLst>
+                <a:ext uri="{FF2B5EF4-FFF2-40B4-BE49-F238E27FC236}">
+                  <a16:creationId xmlns:a16="http://schemas.microsoft.com/office/drawing/2014/main" id="{E5E9CD99-DAEC-50C3-E8F5-2DD2B13AC827}"/>
+                </a:ext>
+              </a:extLst>
+            </p:cNvPr>
+            <p:cNvSpPr/>
+            <p:nvPr/>
+          </p:nvSpPr>
+          <p:spPr>
+            <a:xfrm rot="16200000" flipH="1">
+              <a:off x="1510161" y="2710131"/>
+              <a:ext cx="45720" cy="45720"/>
+            </a:xfrm>
+            <a:prstGeom prst="ellipse">
+              <a:avLst/>
+            </a:prstGeom>
+            <a:solidFill>
+              <a:schemeClr val="tx1"/>
+            </a:solidFill>
+            <a:ln>
+              <a:noFill/>
+            </a:ln>
+          </p:spPr>
+          <p:style>
+            <a:lnRef idx="2">
+              <a:schemeClr val="accent1">
+                <a:shade val="15000"/>
+              </a:schemeClr>
+            </a:lnRef>
+            <a:fillRef idx="1">
+              <a:schemeClr val="accent1"/>
+            </a:fillRef>
+            <a:effectRef idx="0">
+              <a:schemeClr val="accent1"/>
+            </a:effectRef>
+            <a:fontRef idx="minor">
+              <a:schemeClr val="lt1"/>
+            </a:fontRef>
+          </p:style>
+          <p:txBody>
+            <a:bodyPr rtlCol="0" anchor="ctr"/>
+            <a:lstStyle/>
+            <a:p>
+              <a:pPr algn="ctr"/>
+              <a:endParaRPr lang="de-DE" dirty="0"/>
+            </a:p>
+          </p:txBody>
+        </p:sp>
+        <p:cxnSp>
+          <p:nvCxnSpPr>
+            <p:cNvPr id="39" name="Gerade Verbindung mit Pfeil 38">
+              <a:extLst>
+                <a:ext uri="{FF2B5EF4-FFF2-40B4-BE49-F238E27FC236}">
+                  <a16:creationId xmlns:a16="http://schemas.microsoft.com/office/drawing/2014/main" id="{FB020F76-DA9C-728A-BDF7-55C26FAB92D6}"/>
+                </a:ext>
+              </a:extLst>
+            </p:cNvPr>
+            <p:cNvCxnSpPr>
+              <a:cxnSpLocks/>
+            </p:cNvCxnSpPr>
+            <p:nvPr/>
+          </p:nvCxnSpPr>
+          <p:spPr>
+            <a:xfrm rot="16200000">
+              <a:off x="1365996" y="2609828"/>
+              <a:ext cx="42580" cy="287080"/>
+            </a:xfrm>
+            <a:prstGeom prst="straightConnector1">
+              <a:avLst/>
+            </a:prstGeom>
+            <a:ln w="15875" cap="rnd">
+              <a:solidFill>
+                <a:schemeClr val="tx1"/>
+              </a:solidFill>
+              <a:round/>
+              <a:tailEnd type="none" w="med" len="med"/>
+            </a:ln>
+          </p:spPr>
+          <p:style>
+            <a:lnRef idx="2">
+              <a:schemeClr val="accent1"/>
+            </a:lnRef>
+            <a:fillRef idx="0">
+              <a:schemeClr val="accent1"/>
+            </a:fillRef>
+            <a:effectRef idx="1">
+              <a:schemeClr val="accent1"/>
+            </a:effectRef>
+            <a:fontRef idx="minor">
+              <a:schemeClr val="tx1"/>
+            </a:fontRef>
+          </p:style>
+        </p:cxnSp>
+        <p:sp>
+          <p:nvSpPr>
+            <p:cNvPr id="44" name="Ellipse 43">
+              <a:extLst>
+                <a:ext uri="{FF2B5EF4-FFF2-40B4-BE49-F238E27FC236}">
+                  <a16:creationId xmlns:a16="http://schemas.microsoft.com/office/drawing/2014/main" id="{E9464EB0-35F3-AAAF-3B5E-4266F920CA55}"/>
+                </a:ext>
+              </a:extLst>
+            </p:cNvPr>
+            <p:cNvSpPr/>
+            <p:nvPr/>
+          </p:nvSpPr>
+          <p:spPr>
+            <a:xfrm rot="16200000" flipH="1">
+              <a:off x="1200803" y="2710131"/>
+              <a:ext cx="45720" cy="45720"/>
+            </a:xfrm>
+            <a:prstGeom prst="ellipse">
+              <a:avLst/>
+            </a:prstGeom>
+            <a:solidFill>
+              <a:schemeClr val="tx1"/>
+            </a:solidFill>
+            <a:ln>
+              <a:noFill/>
+            </a:ln>
+          </p:spPr>
+          <p:style>
+            <a:lnRef idx="2">
+              <a:schemeClr val="accent1">
+                <a:shade val="15000"/>
+              </a:schemeClr>
+            </a:lnRef>
+            <a:fillRef idx="1">
+              <a:schemeClr val="accent1"/>
+            </a:fillRef>
+            <a:effectRef idx="0">
+              <a:schemeClr val="accent1"/>
+            </a:effectRef>
+            <a:fontRef idx="minor">
+              <a:schemeClr val="lt1"/>
+            </a:fontRef>
+          </p:style>
+          <p:txBody>
+            <a:bodyPr rtlCol="0" anchor="ctr"/>
+            <a:lstStyle/>
+            <a:p>
+              <a:pPr algn="ctr"/>
+              <a:endParaRPr lang="de-DE" dirty="0"/>
+            </a:p>
+          </p:txBody>
+        </p:sp>
+      </p:grpSp>
+      <p:sp>
+        <p:nvSpPr>
+          <p:cNvPr id="47" name="Bogen 46">
+            <a:extLst>
+              <a:ext uri="{FF2B5EF4-FFF2-40B4-BE49-F238E27FC236}">
+                <a16:creationId xmlns:a16="http://schemas.microsoft.com/office/drawing/2014/main" id="{9B9335DF-18B2-AAD3-8EC9-111097C9573E}"/>
+              </a:ext>
+            </a:extLst>
+          </p:cNvPr>
+          <p:cNvSpPr/>
+          <p:nvPr/>
+        </p:nvSpPr>
+        <p:spPr>
+          <a:xfrm>
+            <a:off x="1636479" y="1790757"/>
+            <a:ext cx="325755" cy="325755"/>
+          </a:xfrm>
+          <a:prstGeom prst="arc">
+            <a:avLst>
+              <a:gd name="adj1" fmla="val 13452731"/>
+              <a:gd name="adj2" fmla="val 18203437"/>
+            </a:avLst>
+          </a:prstGeom>
+          <a:ln w="9525" cap="rnd">
+            <a:solidFill>
+              <a:schemeClr val="accent2"/>
+            </a:solidFill>
+            <a:round/>
+            <a:headEnd type="none" w="sm" len="sm"/>
+            <a:tailEnd type="triangle" w="sm" len="sm"/>
+          </a:ln>
+        </p:spPr>
+        <p:style>
+          <a:lnRef idx="2">
+            <a:schemeClr val="accent1"/>
+          </a:lnRef>
+          <a:fillRef idx="0">
+            <a:schemeClr val="accent1"/>
+          </a:fillRef>
+          <a:effectRef idx="1">
+            <a:schemeClr val="accent1"/>
+          </a:effectRef>
+          <a:fontRef idx="minor">
+            <a:schemeClr val="tx1"/>
+          </a:fontRef>
+        </p:style>
+        <p:txBody>
+          <a:bodyPr rtlCol="0" anchor="ctr"/>
+          <a:lstStyle/>
+          <a:p>
+            <a:pPr algn="ctr"/>
+            <a:endParaRPr lang="de-DE"/>
+          </a:p>
+        </p:txBody>
+      </p:sp>
+    </p:spTree>
+    <p:extLst>
+      <p:ext uri="{BB962C8B-B14F-4D97-AF65-F5344CB8AC3E}">
+        <p14:creationId xmlns:p14="http://schemas.microsoft.com/office/powerpoint/2010/main" val="2803672751"/>
       </p:ext>
     </p:extLst>
   </p:cSld>
